--- a/defense/智学助手-课程设计答辩.pptx
+++ b/defense/智学助手-课程设计答辩.pptx
@@ -5268,7 +5268,7 @@
         <p:spPr>
           <a:xfrm>
             <a:off x="502920" y="182880"/>
-            <a:ext cx="11185855" cy="621792"/>
+            <a:ext cx="11155680" cy="621792"/>
           </a:xfrm>
           <a:prstGeom prst="rect">
             <a:avLst/>
@@ -5314,7 +5314,7 @@
         </p:nvSpPr>
         <p:spPr>
           <a:xfrm>
-            <a:off x="8351215" y="274320"/>
+            <a:off x="8321040" y="274320"/>
             <a:ext cx="3383280" cy="457200"/>
           </a:xfrm>
           <a:prstGeom prst="rect">
@@ -5361,7 +5361,7 @@
         </p:nvSpPr>
         <p:spPr>
           <a:xfrm>
-            <a:off x="11277295" y="6473952"/>
+            <a:off x="11247120" y="6473952"/>
             <a:ext cx="640080" cy="274320"/>
           </a:xfrm>
           <a:prstGeom prst="rect">
@@ -5402,60 +5402,14 @@
       </p:sp>
       <p:sp>
         <p:nvSpPr>
-          <p:cNvPr id="6" name="Rectangle 5"/>
-          <p:cNvSpPr/>
+          <p:cNvPr id="6" name="TextBox 5"/>
+          <p:cNvSpPr txBox="1"/>
           <p:nvPr/>
         </p:nvSpPr>
         <p:spPr>
           <a:xfrm>
-            <a:off x="548640" y="1170432"/>
-            <a:ext cx="11091672" cy="502920"/>
-          </a:xfrm>
-          <a:prstGeom prst="rect">
-            <a:avLst/>
-          </a:prstGeom>
-          <a:solidFill>
-            <a:srgbClr val="FFF2CC"/>
-          </a:solidFill>
-          <a:ln w="15240">
-            <a:solidFill>
-              <a:srgbClr val="C55A11"/>
-            </a:solidFill>
-          </a:ln>
-          <a:effectLst/>
-        </p:spPr>
-        <p:style>
-          <a:lnRef idx="1">
-            <a:schemeClr val="accent1"/>
-          </a:lnRef>
-          <a:fillRef idx="3">
-            <a:schemeClr val="accent1"/>
-          </a:fillRef>
-          <a:effectRef idx="2">
-            <a:schemeClr val="accent1"/>
-          </a:effectRef>
-          <a:fontRef idx="minor">
-            <a:schemeClr val="lt1"/>
-          </a:fontRef>
-        </p:style>
-        <p:txBody>
-          <a:bodyPr rtlCol="0" anchor="ctr"/>
-          <a:lstStyle/>
-          <a:p>
-            <a:pPr algn="ctr"/>
-          </a:p>
-        </p:txBody>
-      </p:sp>
-      <p:sp>
-        <p:nvSpPr>
-          <p:cNvPr id="7" name="TextBox 6"/>
-          <p:cNvSpPr txBox="1"/>
-          <p:nvPr/>
-        </p:nvSpPr>
-        <p:spPr>
-          <a:xfrm>
-            <a:off x="731520" y="1170432"/>
-            <a:ext cx="10698480" cy="502920"/>
+            <a:off x="548640" y="1143000"/>
+            <a:ext cx="11091672" cy="365760"/>
           </a:xfrm>
           <a:prstGeom prst="rect">
             <a:avLst/>
@@ -5463,7 +5417,7 @@
           <a:noFill/>
         </p:spPr>
         <p:txBody>
-          <a:bodyPr wrap="square" anchor="ctr" lIns="0" rIns="0" tIns="0" bIns="0">
+          <a:bodyPr wrap="square" anchor="t" lIns="0" rIns="0" tIns="0" bIns="0">
             <a:spAutoFit/>
           </a:bodyPr>
           <a:lstStyle/>
@@ -5480,19 +5434,305 @@
               </a:spcAft>
             </a:pPr>
             <a:r>
-              <a:rPr sz="1400" b="1">
+              <a:rPr sz="1700" b="1">
                 <a:solidFill>
-                  <a:srgbClr val="C55A11"/>
+                  <a:srgbClr val="2E75B6"/>
                 </a:solidFill>
                 <a:latin typeface="微软雅黑"/>
                 <a:ea typeface="微软雅黑"/>
                 <a:cs typeface="微软雅黑"/>
               </a:rPr>
-              <a:t>【待补充】本页内容需在该模块实现完成后填写</a:t>
-            </a:r>
-          </a:p>
-        </p:txBody>
-      </p:sp>
+              <a:t>出题流程</a:t>
+            </a:r>
+          </a:p>
+        </p:txBody>
+      </p:sp>
+      <p:graphicFrame>
+        <p:nvGraphicFramePr>
+          <p:cNvPr id="7" name="Table 6"/>
+          <p:cNvGraphicFramePr>
+            <a:graphicFrameLocks noGrp="1"/>
+          </p:cNvGraphicFramePr>
+          <p:nvPr/>
+        </p:nvGraphicFramePr>
+        <p:xfrm>
+          <a:off x="548640" y="1572768"/>
+          <a:ext cx="11091672" cy="2103120"/>
+        </p:xfrm>
+        <a:graphic>
+          <a:graphicData uri="http://schemas.openxmlformats.org/drawingml/2006/table">
+            <a:tbl>
+              <a:tblPr firstRow="1" bandRow="1">
+                <a:tableStyleId>{5C22544A-7EE6-4342-B048-85BDC9FD1C3A}</a:tableStyleId>
+              </a:tblPr>
+              <a:tblGrid>
+                <a:gridCol w="1232408"/>
+                <a:gridCol w="9859264"/>
+              </a:tblGrid>
+              <a:tr h="420624">
+                <a:tc>
+                  <a:txBody>
+                    <a:bodyPr/>
+                    <a:lstStyle/>
+                    <a:p>
+                      <a:pPr algn="ctr"/>
+                      <a:r>
+                        <a:rPr sz="1300" b="1">
+                          <a:solidFill>
+                            <a:srgbClr val="FFFFFF"/>
+                          </a:solidFill>
+                          <a:latin typeface="微软雅黑"/>
+                          <a:ea typeface="微软雅黑"/>
+                          <a:cs typeface="微软雅黑"/>
+                        </a:rPr>
+                        <a:t>步骤</a:t>
+                      </a:r>
+                    </a:p>
+                  </a:txBody>
+                  <a:tcPr anchor="ctr">
+                    <a:solidFill>
+                      <a:srgbClr val="1F4E79"/>
+                    </a:solidFill>
+                  </a:tcPr>
+                </a:tc>
+                <a:tc>
+                  <a:txBody>
+                    <a:bodyPr/>
+                    <a:lstStyle/>
+                    <a:p>
+                      <a:pPr algn="ctr"/>
+                      <a:r>
+                        <a:rPr sz="1300" b="1">
+                          <a:solidFill>
+                            <a:srgbClr val="FFFFFF"/>
+                          </a:solidFill>
+                          <a:latin typeface="微软雅黑"/>
+                          <a:ea typeface="微软雅黑"/>
+                          <a:cs typeface="微软雅黑"/>
+                        </a:rPr>
+                        <a:t>处理内容</a:t>
+                      </a:r>
+                    </a:p>
+                  </a:txBody>
+                  <a:tcPr anchor="ctr">
+                    <a:solidFill>
+                      <a:srgbClr val="1F4E79"/>
+                    </a:solidFill>
+                  </a:tcPr>
+                </a:tc>
+              </a:tr>
+              <a:tr h="420624">
+                <a:tc>
+                  <a:txBody>
+                    <a:bodyPr/>
+                    <a:lstStyle/>
+                    <a:p>
+                      <a:pPr algn="ctr"/>
+                      <a:r>
+                        <a:rPr sz="1200" b="0">
+                          <a:solidFill>
+                            <a:srgbClr val="222222"/>
+                          </a:solidFill>
+                          <a:latin typeface="微软雅黑"/>
+                          <a:ea typeface="微软雅黑"/>
+                          <a:cs typeface="微软雅黑"/>
+                        </a:rPr>
+                        <a:t>① 检索</a:t>
+                      </a:r>
+                    </a:p>
+                  </a:txBody>
+                  <a:tcPr anchor="ctr">
+                    <a:solidFill>
+                      <a:srgbClr val="FFFFFF"/>
+                    </a:solidFill>
+                  </a:tcPr>
+                </a:tc>
+                <a:tc>
+                  <a:txBody>
+                    <a:bodyPr/>
+                    <a:lstStyle/>
+                    <a:p>
+                      <a:pPr algn="l"/>
+                      <a:r>
+                        <a:rPr sz="1200" b="0">
+                          <a:solidFill>
+                            <a:srgbClr val="222222"/>
+                          </a:solidFill>
+                          <a:latin typeface="微软雅黑"/>
+                          <a:ea typeface="微软雅黑"/>
+                          <a:cs typeface="微软雅黑"/>
+                        </a:rPr>
+                        <a:t>按出题主题从 Chroma 检索相关文本片段，拼接为参考资料</a:t>
+                      </a:r>
+                    </a:p>
+                  </a:txBody>
+                  <a:tcPr anchor="ctr">
+                    <a:solidFill>
+                      <a:srgbClr val="FFFFFF"/>
+                    </a:solidFill>
+                  </a:tcPr>
+                </a:tc>
+              </a:tr>
+              <a:tr h="420624">
+                <a:tc>
+                  <a:txBody>
+                    <a:bodyPr/>
+                    <a:lstStyle/>
+                    <a:p>
+                      <a:pPr algn="ctr"/>
+                      <a:r>
+                        <a:rPr sz="1200" b="0">
+                          <a:solidFill>
+                            <a:srgbClr val="222222"/>
+                          </a:solidFill>
+                          <a:latin typeface="微软雅黑"/>
+                          <a:ea typeface="微软雅黑"/>
+                          <a:cs typeface="微软雅黑"/>
+                        </a:rPr>
+                        <a:t>② 生成</a:t>
+                      </a:r>
+                    </a:p>
+                  </a:txBody>
+                  <a:tcPr anchor="ctr">
+                    <a:solidFill>
+                      <a:srgbClr val="EAF3FB"/>
+                    </a:solidFill>
+                  </a:tcPr>
+                </a:tc>
+                <a:tc>
+                  <a:txBody>
+                    <a:bodyPr/>
+                    <a:lstStyle/>
+                    <a:p>
+                      <a:pPr algn="l"/>
+                      <a:r>
+                        <a:rPr sz="1200" b="0">
+                          <a:solidFill>
+                            <a:srgbClr val="222222"/>
+                          </a:solidFill>
+                          <a:latin typeface="微软雅黑"/>
+                          <a:ea typeface="微软雅黑"/>
+                          <a:cs typeface="微软雅黑"/>
+                        </a:rPr>
+                        <a:t>将题型、难度、数量与参考资料填入提示词，交由大模型生成</a:t>
+                      </a:r>
+                    </a:p>
+                  </a:txBody>
+                  <a:tcPr anchor="ctr">
+                    <a:solidFill>
+                      <a:srgbClr val="EAF3FB"/>
+                    </a:solidFill>
+                  </a:tcPr>
+                </a:tc>
+              </a:tr>
+              <a:tr h="420624">
+                <a:tc>
+                  <a:txBody>
+                    <a:bodyPr/>
+                    <a:lstStyle/>
+                    <a:p>
+                      <a:pPr algn="ctr"/>
+                      <a:r>
+                        <a:rPr sz="1200" b="0">
+                          <a:solidFill>
+                            <a:srgbClr val="222222"/>
+                          </a:solidFill>
+                          <a:latin typeface="微软雅黑"/>
+                          <a:ea typeface="微软雅黑"/>
+                          <a:cs typeface="微软雅黑"/>
+                        </a:rPr>
+                        <a:t>③ 校验</a:t>
+                      </a:r>
+                    </a:p>
+                  </a:txBody>
+                  <a:tcPr anchor="ctr">
+                    <a:solidFill>
+                      <a:srgbClr val="FFFFFF"/>
+                    </a:solidFill>
+                  </a:tcPr>
+                </a:tc>
+                <a:tc>
+                  <a:txBody>
+                    <a:bodyPr/>
+                    <a:lstStyle/>
+                    <a:p>
+                      <a:pPr algn="l"/>
+                      <a:r>
+                        <a:rPr sz="1200" b="0">
+                          <a:solidFill>
+                            <a:srgbClr val="222222"/>
+                          </a:solidFill>
+                          <a:latin typeface="微软雅黑"/>
+                          <a:ea typeface="微软雅黑"/>
+                          <a:cs typeface="微软雅黑"/>
+                        </a:rPr>
+                        <a:t>去除代码块标记后解析 JSON 并校验字段，失败最多重试 2 次</a:t>
+                      </a:r>
+                    </a:p>
+                  </a:txBody>
+                  <a:tcPr anchor="ctr">
+                    <a:solidFill>
+                      <a:srgbClr val="FFFFFF"/>
+                    </a:solidFill>
+                  </a:tcPr>
+                </a:tc>
+              </a:tr>
+              <a:tr h="420624">
+                <a:tc>
+                  <a:txBody>
+                    <a:bodyPr/>
+                    <a:lstStyle/>
+                    <a:p>
+                      <a:pPr algn="ctr"/>
+                      <a:r>
+                        <a:rPr sz="1200" b="0">
+                          <a:solidFill>
+                            <a:srgbClr val="222222"/>
+                          </a:solidFill>
+                          <a:latin typeface="微软雅黑"/>
+                          <a:ea typeface="微软雅黑"/>
+                          <a:cs typeface="微软雅黑"/>
+                        </a:rPr>
+                        <a:t>④ 入库</a:t>
+                      </a:r>
+                    </a:p>
+                  </a:txBody>
+                  <a:tcPr anchor="ctr">
+                    <a:solidFill>
+                      <a:srgbClr val="EAF3FB"/>
+                    </a:solidFill>
+                  </a:tcPr>
+                </a:tc>
+                <a:tc>
+                  <a:txBody>
+                    <a:bodyPr/>
+                    <a:lstStyle/>
+                    <a:p>
+                      <a:pPr algn="l"/>
+                      <a:r>
+                        <a:rPr sz="1200" b="0">
+                          <a:solidFill>
+                            <a:srgbClr val="222222"/>
+                          </a:solidFill>
+                          <a:latin typeface="微软雅黑"/>
+                          <a:ea typeface="微软雅黑"/>
+                          <a:cs typeface="微软雅黑"/>
+                        </a:rPr>
+                        <a:t>同一会话中先写出题批次获取编号，再批量写入题目后提交</a:t>
+                      </a:r>
+                    </a:p>
+                  </a:txBody>
+                  <a:tcPr anchor="ctr">
+                    <a:solidFill>
+                      <a:srgbClr val="EAF3FB"/>
+                    </a:solidFill>
+                  </a:tcPr>
+                </a:tc>
+              </a:tr>
+            </a:tbl>
+          </a:graphicData>
+        </a:graphic>
+      </p:graphicFrame>
       <p:sp>
         <p:nvSpPr>
           <p:cNvPr id="8" name="TextBox 7"/>
@@ -5501,8 +5741,8 @@
         </p:nvSpPr>
         <p:spPr>
           <a:xfrm>
-            <a:off x="548640" y="1965960"/>
-            <a:ext cx="11064240" cy="5120640"/>
+            <a:off x="548640" y="3703320"/>
+            <a:ext cx="11091672" cy="365760"/>
           </a:xfrm>
           <a:prstGeom prst="rect">
             <a:avLst/>
@@ -5523,21 +5763,44 @@
                 <a:spcPts val="0"/>
               </a:spcBef>
               <a:spcAft>
-                <a:spcPts val="1600"/>
+                <a:spcPts val="600"/>
               </a:spcAft>
             </a:pPr>
             <a:r>
-              <a:rPr sz="1600" b="0">
+              <a:rPr sz="1700" b="1">
                 <a:solidFill>
-                  <a:srgbClr val="808080"/>
+                  <a:srgbClr val="2E75B6"/>
                 </a:solidFill>
                 <a:latin typeface="微软雅黑"/>
                 <a:ea typeface="微软雅黑"/>
                 <a:cs typeface="微软雅黑"/>
               </a:rPr>
-              <a:t>• 模块流程图：【待补充】</a:t>
-            </a:r>
-          </a:p>
+              <a:t>判题策略（按题型区分）</a:t>
+            </a:r>
+          </a:p>
+        </p:txBody>
+      </p:sp>
+      <p:sp>
+        <p:nvSpPr>
+          <p:cNvPr id="9" name="TextBox 8"/>
+          <p:cNvSpPr txBox="1"/>
+          <p:nvPr/>
+        </p:nvSpPr>
+        <p:spPr>
+          <a:xfrm>
+            <a:off x="548640" y="4133087"/>
+            <a:ext cx="11091672" cy="2103120"/>
+          </a:xfrm>
+          <a:prstGeom prst="rect">
+            <a:avLst/>
+          </a:prstGeom>
+          <a:noFill/>
+        </p:spPr>
+        <p:txBody>
+          <a:bodyPr wrap="square" anchor="t" lIns="0" rIns="0" tIns="0" bIns="0">
+            <a:spAutoFit/>
+          </a:bodyPr>
+          <a:lstStyle/>
           <a:p>
             <a:pPr algn="l">
               <a:lnSpc>
@@ -5547,19 +5810,30 @@
                 <a:spcPts val="0"/>
               </a:spcBef>
               <a:spcAft>
-                <a:spcPts val="1600"/>
+                <a:spcPts val="600"/>
               </a:spcAft>
             </a:pPr>
             <a:r>
-              <a:rPr sz="1600" b="0">
+              <a:rPr sz="1400" b="0">
                 <a:solidFill>
-                  <a:srgbClr val="808080"/>
+                  <a:srgbClr val="222222"/>
                 </a:solidFill>
                 <a:latin typeface="微软雅黑"/>
                 <a:ea typeface="微软雅黑"/>
                 <a:cs typeface="微软雅黑"/>
               </a:rPr>
-              <a:t>• Prompt 设计与结构化输出校验：【待补充】</a:t>
+              <a:t>• </a:t>
+            </a:r>
+            <a:r>
+              <a:rPr sz="1400" b="0">
+                <a:solidFill>
+                  <a:srgbClr val="222222"/>
+                </a:solidFill>
+                <a:latin typeface="微软雅黑"/>
+                <a:ea typeface="微软雅黑"/>
+                <a:cs typeface="微软雅黑"/>
+              </a:rPr>
+              <a:t>单选 / 判断：直接比对答案字符串</a:t>
             </a:r>
           </a:p>
           <a:p>
@@ -5571,19 +5845,30 @@
                 <a:spcPts val="0"/>
               </a:spcBef>
               <a:spcAft>
-                <a:spcPts val="1600"/>
+                <a:spcPts val="600"/>
               </a:spcAft>
             </a:pPr>
             <a:r>
-              <a:rPr sz="1600" b="0">
+              <a:rPr sz="1400" b="0">
                 <a:solidFill>
-                  <a:srgbClr val="808080"/>
+                  <a:srgbClr val="222222"/>
                 </a:solidFill>
                 <a:latin typeface="微软雅黑"/>
                 <a:ea typeface="微软雅黑"/>
                 <a:cs typeface="微软雅黑"/>
               </a:rPr>
-              <a:t>• 判题逻辑与关键代码：【待补充】</a:t>
+              <a:t>• </a:t>
+            </a:r>
+            <a:r>
+              <a:rPr sz="1400" b="0">
+                <a:solidFill>
+                  <a:srgbClr val="222222"/>
+                </a:solidFill>
+                <a:latin typeface="微软雅黑"/>
+                <a:ea typeface="微软雅黑"/>
+                <a:cs typeface="微软雅黑"/>
+              </a:rPr>
+              <a:t>多选：先将用户答案与正确答案分别排序再比对，使“AB”与“BA”等价</a:t>
             </a:r>
           </a:p>
           <a:p>
@@ -5595,43 +5880,30 @@
                 <a:spcPts val="0"/>
               </a:spcBef>
               <a:spcAft>
-                <a:spcPts val="1600"/>
+                <a:spcPts val="600"/>
               </a:spcAft>
             </a:pPr>
             <a:r>
-              <a:rPr sz="1600" b="0">
+              <a:rPr sz="1400" b="0">
                 <a:solidFill>
-                  <a:srgbClr val="808080"/>
+                  <a:srgbClr val="222222"/>
                 </a:solidFill>
                 <a:latin typeface="微软雅黑"/>
                 <a:ea typeface="微软雅黑"/>
                 <a:cs typeface="微软雅黑"/>
               </a:rPr>
-              <a:t>• 功能界面截图：【待补充】</a:t>
-            </a:r>
-          </a:p>
-          <a:p>
-            <a:pPr algn="l">
-              <a:lnSpc>
-                <a:spcPct val="125000"/>
-              </a:lnSpc>
-              <a:spcBef>
-                <a:spcPts val="0"/>
-              </a:spcBef>
-              <a:spcAft>
-                <a:spcPts val="1600"/>
-              </a:spcAft>
-            </a:pPr>
-            <a:r>
-              <a:rPr sz="1600" b="0">
+              <a:t>• </a:t>
+            </a:r>
+            <a:r>
+              <a:rPr sz="1400" b="0">
                 <a:solidFill>
-                  <a:srgbClr val="808080"/>
+                  <a:srgbClr val="222222"/>
                 </a:solidFill>
                 <a:latin typeface="微软雅黑"/>
                 <a:ea typeface="微软雅黑"/>
                 <a:cs typeface="微软雅黑"/>
               </a:rPr>
-              <a:t>• 测试用例与结果：【待补充】</a:t>
+              <a:t>简答：调用大模型做语义评分；失败时降级为关键词匹配（命中率 60% 判正确）；仍无法判断则记为待复习</a:t>
             </a:r>
           </a:p>
         </p:txBody>
@@ -5707,7 +5979,7 @@
         <p:spPr>
           <a:xfrm>
             <a:off x="502920" y="182880"/>
-            <a:ext cx="11185855" cy="621792"/>
+            <a:ext cx="11155680" cy="621792"/>
           </a:xfrm>
           <a:prstGeom prst="rect">
             <a:avLst/>
@@ -5753,7 +6025,7 @@
         </p:nvSpPr>
         <p:spPr>
           <a:xfrm>
-            <a:off x="8351215" y="274320"/>
+            <a:off x="8321040" y="274320"/>
             <a:ext cx="3383280" cy="457200"/>
           </a:xfrm>
           <a:prstGeom prst="rect">
@@ -5800,7 +6072,7 @@
         </p:nvSpPr>
         <p:spPr>
           <a:xfrm>
-            <a:off x="11277295" y="6473952"/>
+            <a:off x="11247120" y="6473952"/>
             <a:ext cx="640080" cy="274320"/>
           </a:xfrm>
           <a:prstGeom prst="rect">
@@ -5841,60 +6113,14 @@
       </p:sp>
       <p:sp>
         <p:nvSpPr>
-          <p:cNvPr id="6" name="Rectangle 5"/>
-          <p:cNvSpPr/>
+          <p:cNvPr id="6" name="TextBox 5"/>
+          <p:cNvSpPr txBox="1"/>
           <p:nvPr/>
         </p:nvSpPr>
         <p:spPr>
           <a:xfrm>
-            <a:off x="548640" y="1170432"/>
-            <a:ext cx="11091672" cy="502920"/>
-          </a:xfrm>
-          <a:prstGeom prst="rect">
-            <a:avLst/>
-          </a:prstGeom>
-          <a:solidFill>
-            <a:srgbClr val="FFF2CC"/>
-          </a:solidFill>
-          <a:ln w="15240">
-            <a:solidFill>
-              <a:srgbClr val="C55A11"/>
-            </a:solidFill>
-          </a:ln>
-          <a:effectLst/>
-        </p:spPr>
-        <p:style>
-          <a:lnRef idx="1">
-            <a:schemeClr val="accent1"/>
-          </a:lnRef>
-          <a:fillRef idx="3">
-            <a:schemeClr val="accent1"/>
-          </a:fillRef>
-          <a:effectRef idx="2">
-            <a:schemeClr val="accent1"/>
-          </a:effectRef>
-          <a:fontRef idx="minor">
-            <a:schemeClr val="lt1"/>
-          </a:fontRef>
-        </p:style>
-        <p:txBody>
-          <a:bodyPr rtlCol="0" anchor="ctr"/>
-          <a:lstStyle/>
-          <a:p>
-            <a:pPr algn="ctr"/>
-          </a:p>
-        </p:txBody>
-      </p:sp>
-      <p:sp>
-        <p:nvSpPr>
-          <p:cNvPr id="7" name="TextBox 6"/>
-          <p:cNvSpPr txBox="1"/>
-          <p:nvPr/>
-        </p:nvSpPr>
-        <p:spPr>
-          <a:xfrm>
-            <a:off x="731520" y="1170432"/>
-            <a:ext cx="10698480" cy="502920"/>
+            <a:off x="548640" y="1143000"/>
+            <a:ext cx="11091672" cy="365760"/>
           </a:xfrm>
           <a:prstGeom prst="rect">
             <a:avLst/>
@@ -5902,7 +6128,7 @@
           <a:noFill/>
         </p:spPr>
         <p:txBody>
-          <a:bodyPr wrap="square" anchor="ctr" lIns="0" rIns="0" tIns="0" bIns="0">
+          <a:bodyPr wrap="square" anchor="t" lIns="0" rIns="0" tIns="0" bIns="0">
             <a:spAutoFit/>
           </a:bodyPr>
           <a:lstStyle/>
@@ -5919,29 +6145,29 @@
               </a:spcAft>
             </a:pPr>
             <a:r>
-              <a:rPr sz="1400" b="1">
+              <a:rPr sz="1700" b="1">
                 <a:solidFill>
-                  <a:srgbClr val="C55A11"/>
+                  <a:srgbClr val="2E75B6"/>
                 </a:solidFill>
                 <a:latin typeface="微软雅黑"/>
                 <a:ea typeface="微软雅黑"/>
                 <a:cs typeface="微软雅黑"/>
               </a:rPr>
-              <a:t>【待补充】本页内容需在该模块实现完成后填写</a:t>
-            </a:r>
-          </a:p>
-        </p:txBody>
-      </p:sp>
-      <p:sp>
-        <p:nvSpPr>
-          <p:cNvPr id="8" name="TextBox 7"/>
+              <a:t>错题本</a:t>
+            </a:r>
+          </a:p>
+        </p:txBody>
+      </p:sp>
+      <p:sp>
+        <p:nvSpPr>
+          <p:cNvPr id="7" name="TextBox 6"/>
           <p:cNvSpPr txBox="1"/>
           <p:nvPr/>
         </p:nvSpPr>
         <p:spPr>
           <a:xfrm>
-            <a:off x="548640" y="1965960"/>
-            <a:ext cx="11064240" cy="5120640"/>
+            <a:off x="548640" y="1572768"/>
+            <a:ext cx="11091672" cy="1234440"/>
           </a:xfrm>
           <a:prstGeom prst="rect">
             <a:avLst/>
@@ -5962,19 +6188,30 @@
                 <a:spcPts val="0"/>
               </a:spcBef>
               <a:spcAft>
-                <a:spcPts val="1600"/>
+                <a:spcPts val="600"/>
               </a:spcAft>
             </a:pPr>
             <a:r>
-              <a:rPr sz="1600" b="0">
+              <a:rPr sz="1400" b="0">
                 <a:solidFill>
-                  <a:srgbClr val="808080"/>
+                  <a:srgbClr val="222222"/>
                 </a:solidFill>
                 <a:latin typeface="微软雅黑"/>
                 <a:ea typeface="微软雅黑"/>
                 <a:cs typeface="微软雅黑"/>
               </a:rPr>
-              <a:t>• 错题沉淀流程与关键代码：【待补充】</a:t>
+              <a:t>• </a:t>
+            </a:r>
+            <a:r>
+              <a:rPr sz="1400" b="0">
+                <a:solidFill>
+                  <a:srgbClr val="222222"/>
+                </a:solidFill>
+                <a:latin typeface="微软雅黑"/>
+                <a:ea typeface="微软雅黑"/>
+                <a:cs typeface="微软雅黑"/>
+              </a:rPr>
+              <a:t>判为错误的题目自动写入错题本，记录用户答案、正确答案与解析</a:t>
             </a:r>
           </a:p>
           <a:p>
@@ -5986,19 +6223,30 @@
                 <a:spcPts val="0"/>
               </a:spcBef>
               <a:spcAft>
-                <a:spcPts val="1600"/>
+                <a:spcPts val="600"/>
               </a:spcAft>
             </a:pPr>
             <a:r>
-              <a:rPr sz="1600" b="0">
+              <a:rPr sz="1400" b="0">
                 <a:solidFill>
-                  <a:srgbClr val="808080"/>
+                  <a:srgbClr val="222222"/>
                 </a:solidFill>
                 <a:latin typeface="微软雅黑"/>
                 <a:ea typeface="微软雅黑"/>
                 <a:cs typeface="微软雅黑"/>
               </a:rPr>
-              <a:t>• 复习计划生成算法与 Prompt 设计：【待补充】</a:t>
+              <a:t>• </a:t>
+            </a:r>
+            <a:r>
+              <a:rPr sz="1400" b="0">
+                <a:solidFill>
+                  <a:srgbClr val="222222"/>
+                </a:solidFill>
+                <a:latin typeface="微软雅黑"/>
+                <a:ea typeface="微软雅黑"/>
+                <a:cs typeface="微软雅黑"/>
+              </a:rPr>
+              <a:t>同一题目若已存在未掌握记录则不重复插入，避免错题堆积</a:t>
             </a:r>
           </a:p>
           <a:p>
@@ -6010,21 +6258,55 @@
                 <a:spcPts val="0"/>
               </a:spcBef>
               <a:spcAft>
-                <a:spcPts val="1600"/>
+                <a:spcPts val="600"/>
               </a:spcAft>
             </a:pPr>
             <a:r>
-              <a:rPr sz="1600" b="0">
+              <a:rPr sz="1400" b="0">
                 <a:solidFill>
-                  <a:srgbClr val="808080"/>
+                  <a:srgbClr val="222222"/>
                 </a:solidFill>
                 <a:latin typeface="微软雅黑"/>
                 <a:ea typeface="微软雅黑"/>
                 <a:cs typeface="微软雅黑"/>
               </a:rPr>
-              <a:t>• 模块流程图：【待补充】</a:t>
-            </a:r>
-          </a:p>
+              <a:t>• </a:t>
+            </a:r>
+            <a:r>
+              <a:rPr sz="1400" b="0">
+                <a:solidFill>
+                  <a:srgbClr val="222222"/>
+                </a:solidFill>
+                <a:latin typeface="微软雅黑"/>
+                <a:ea typeface="微软雅黑"/>
+                <a:cs typeface="微软雅黑"/>
+              </a:rPr>
+              <a:t>支持按课程查看、按掌握状态筛选、标记掌握与移除</a:t>
+            </a:r>
+          </a:p>
+        </p:txBody>
+      </p:sp>
+      <p:sp>
+        <p:nvSpPr>
+          <p:cNvPr id="8" name="TextBox 7"/>
+          <p:cNvSpPr txBox="1"/>
+          <p:nvPr/>
+        </p:nvSpPr>
+        <p:spPr>
+          <a:xfrm>
+            <a:off x="548640" y="2788920"/>
+            <a:ext cx="11091672" cy="365760"/>
+          </a:xfrm>
+          <a:prstGeom prst="rect">
+            <a:avLst/>
+          </a:prstGeom>
+          <a:noFill/>
+        </p:spPr>
+        <p:txBody>
+          <a:bodyPr wrap="square" anchor="t" lIns="0" rIns="0" tIns="0" bIns="0">
+            <a:spAutoFit/>
+          </a:bodyPr>
+          <a:lstStyle/>
           <a:p>
             <a:pPr algn="l">
               <a:lnSpc>
@@ -6034,47 +6316,309 @@
                 <a:spcPts val="0"/>
               </a:spcBef>
               <a:spcAft>
-                <a:spcPts val="1600"/>
+                <a:spcPts val="600"/>
               </a:spcAft>
             </a:pPr>
             <a:r>
-              <a:rPr sz="1600" b="0">
+              <a:rPr sz="1700" b="1">
                 <a:solidFill>
-                  <a:srgbClr val="808080"/>
+                  <a:srgbClr val="2E75B6"/>
                 </a:solidFill>
                 <a:latin typeface="微软雅黑"/>
                 <a:ea typeface="微软雅黑"/>
                 <a:cs typeface="微软雅黑"/>
               </a:rPr>
-              <a:t>• 功能界面截图：【待补充】</a:t>
-            </a:r>
-          </a:p>
-          <a:p>
-            <a:pPr algn="l">
-              <a:lnSpc>
-                <a:spcPct val="125000"/>
-              </a:lnSpc>
-              <a:spcBef>
-                <a:spcPts val="0"/>
-              </a:spcBef>
-              <a:spcAft>
-                <a:spcPts val="1600"/>
-              </a:spcAft>
-            </a:pPr>
-            <a:r>
-              <a:rPr sz="1600" b="0">
-                <a:solidFill>
-                  <a:srgbClr val="808080"/>
-                </a:solidFill>
-                <a:latin typeface="微软雅黑"/>
-                <a:ea typeface="微软雅黑"/>
-                <a:cs typeface="微软雅黑"/>
-              </a:rPr>
-              <a:t>• 测试用例与结果：【待补充】</a:t>
-            </a:r>
-          </a:p>
-        </p:txBody>
-      </p:sp>
+              <a:t>复习计划生成</a:t>
+            </a:r>
+          </a:p>
+        </p:txBody>
+      </p:sp>
+      <p:graphicFrame>
+        <p:nvGraphicFramePr>
+          <p:cNvPr id="9" name="Table 8"/>
+          <p:cNvGraphicFramePr>
+            <a:graphicFrameLocks noGrp="1"/>
+          </p:cNvGraphicFramePr>
+          <p:nvPr/>
+        </p:nvGraphicFramePr>
+        <p:xfrm>
+          <a:off x="548640" y="3218688"/>
+          <a:ext cx="11091672" cy="2103120"/>
+        </p:xfrm>
+        <a:graphic>
+          <a:graphicData uri="http://schemas.openxmlformats.org/drawingml/2006/table">
+            <a:tbl>
+              <a:tblPr firstRow="1" bandRow="1">
+                <a:tableStyleId>{5C22544A-7EE6-4342-B048-85BDC9FD1C3A}</a:tableStyleId>
+              </a:tblPr>
+              <a:tblGrid>
+                <a:gridCol w="1232408"/>
+                <a:gridCol w="9859264"/>
+              </a:tblGrid>
+              <a:tr h="420624">
+                <a:tc>
+                  <a:txBody>
+                    <a:bodyPr/>
+                    <a:lstStyle/>
+                    <a:p>
+                      <a:pPr algn="ctr"/>
+                      <a:r>
+                        <a:rPr sz="1300" b="1">
+                          <a:solidFill>
+                            <a:srgbClr val="FFFFFF"/>
+                          </a:solidFill>
+                          <a:latin typeface="微软雅黑"/>
+                          <a:ea typeface="微软雅黑"/>
+                          <a:cs typeface="微软雅黑"/>
+                        </a:rPr>
+                        <a:t>步骤</a:t>
+                      </a:r>
+                    </a:p>
+                  </a:txBody>
+                  <a:tcPr anchor="ctr">
+                    <a:solidFill>
+                      <a:srgbClr val="1F4E79"/>
+                    </a:solidFill>
+                  </a:tcPr>
+                </a:tc>
+                <a:tc>
+                  <a:txBody>
+                    <a:bodyPr/>
+                    <a:lstStyle/>
+                    <a:p>
+                      <a:pPr algn="ctr"/>
+                      <a:r>
+                        <a:rPr sz="1300" b="1">
+                          <a:solidFill>
+                            <a:srgbClr val="FFFFFF"/>
+                          </a:solidFill>
+                          <a:latin typeface="微软雅黑"/>
+                          <a:ea typeface="微软雅黑"/>
+                          <a:cs typeface="微软雅黑"/>
+                        </a:rPr>
+                        <a:t>处理内容</a:t>
+                      </a:r>
+                    </a:p>
+                  </a:txBody>
+                  <a:tcPr anchor="ctr">
+                    <a:solidFill>
+                      <a:srgbClr val="1F4E79"/>
+                    </a:solidFill>
+                  </a:tcPr>
+                </a:tc>
+              </a:tr>
+              <a:tr h="420624">
+                <a:tc>
+                  <a:txBody>
+                    <a:bodyPr/>
+                    <a:lstStyle/>
+                    <a:p>
+                      <a:pPr algn="ctr"/>
+                      <a:r>
+                        <a:rPr sz="1200" b="0">
+                          <a:solidFill>
+                            <a:srgbClr val="222222"/>
+                          </a:solidFill>
+                          <a:latin typeface="微软雅黑"/>
+                          <a:ea typeface="微软雅黑"/>
+                          <a:cs typeface="微软雅黑"/>
+                        </a:rPr>
+                        <a:t>① 取错题</a:t>
+                      </a:r>
+                    </a:p>
+                  </a:txBody>
+                  <a:tcPr anchor="ctr">
+                    <a:solidFill>
+                      <a:srgbClr val="FFFFFF"/>
+                    </a:solidFill>
+                  </a:tcPr>
+                </a:tc>
+                <a:tc>
+                  <a:txBody>
+                    <a:bodyPr/>
+                    <a:lstStyle/>
+                    <a:p>
+                      <a:pPr algn="l"/>
+                      <a:r>
+                        <a:rPr sz="1200" b="0">
+                          <a:solidFill>
+                            <a:srgbClr val="222222"/>
+                          </a:solidFill>
+                          <a:latin typeface="微软雅黑"/>
+                          <a:ea typeface="微软雅黑"/>
+                          <a:cs typeface="微软雅黑"/>
+                        </a:rPr>
+                        <a:t>读取该课程所有未掌握的错题及其解析</a:t>
+                      </a:r>
+                    </a:p>
+                  </a:txBody>
+                  <a:tcPr anchor="ctr">
+                    <a:solidFill>
+                      <a:srgbClr val="FFFFFF"/>
+                    </a:solidFill>
+                  </a:tcPr>
+                </a:tc>
+              </a:tr>
+              <a:tr h="420624">
+                <a:tc>
+                  <a:txBody>
+                    <a:bodyPr/>
+                    <a:lstStyle/>
+                    <a:p>
+                      <a:pPr algn="ctr"/>
+                      <a:r>
+                        <a:rPr sz="1200" b="0">
+                          <a:solidFill>
+                            <a:srgbClr val="222222"/>
+                          </a:solidFill>
+                          <a:latin typeface="微软雅黑"/>
+                          <a:ea typeface="微软雅黑"/>
+                          <a:cs typeface="微软雅黑"/>
+                        </a:rPr>
+                        <a:t>② 分配</a:t>
+                      </a:r>
+                    </a:p>
+                  </a:txBody>
+                  <a:tcPr anchor="ctr">
+                    <a:solidFill>
+                      <a:srgbClr val="EAF3FB"/>
+                    </a:solidFill>
+                  </a:tcPr>
+                </a:tc>
+                <a:tc>
+                  <a:txBody>
+                    <a:bodyPr/>
+                    <a:lstStyle/>
+                    <a:p>
+                      <a:pPr algn="l"/>
+                      <a:r>
+                        <a:rPr sz="1200" b="0">
+                          <a:solidFill>
+                            <a:srgbClr val="222222"/>
+                          </a:solidFill>
+                          <a:latin typeface="微软雅黑"/>
+                          <a:ea typeface="微软雅黑"/>
+                          <a:cs typeface="微软雅黑"/>
+                        </a:rPr>
+                        <a:t>交由大模型将知识点分配到 7 天，输出“第几天 + 知识点”</a:t>
+                      </a:r>
+                    </a:p>
+                  </a:txBody>
+                  <a:tcPr anchor="ctr">
+                    <a:solidFill>
+                      <a:srgbClr val="EAF3FB"/>
+                    </a:solidFill>
+                  </a:tcPr>
+                </a:tc>
+              </a:tr>
+              <a:tr h="420624">
+                <a:tc>
+                  <a:txBody>
+                    <a:bodyPr/>
+                    <a:lstStyle/>
+                    <a:p>
+                      <a:pPr algn="ctr"/>
+                      <a:r>
+                        <a:rPr sz="1200" b="0">
+                          <a:solidFill>
+                            <a:srgbClr val="222222"/>
+                          </a:solidFill>
+                          <a:latin typeface="微软雅黑"/>
+                          <a:ea typeface="微软雅黑"/>
+                          <a:cs typeface="微软雅黑"/>
+                        </a:rPr>
+                        <a:t>③ 算日期</a:t>
+                      </a:r>
+                    </a:p>
+                  </a:txBody>
+                  <a:tcPr anchor="ctr">
+                    <a:solidFill>
+                      <a:srgbClr val="FFFFFF"/>
+                    </a:solidFill>
+                  </a:tcPr>
+                </a:tc>
+                <a:tc>
+                  <a:txBody>
+                    <a:bodyPr/>
+                    <a:lstStyle/>
+                    <a:p>
+                      <a:pPr algn="l"/>
+                      <a:r>
+                        <a:rPr sz="1200" b="0">
+                          <a:solidFill>
+                            <a:srgbClr val="222222"/>
+                          </a:solidFill>
+                          <a:latin typeface="微软雅黑"/>
+                          <a:ea typeface="微软雅黑"/>
+                          <a:cs typeface="微软雅黑"/>
+                        </a:rPr>
+                        <a:t>服务端以当天为基准计算具体日期后写入条目，避免模型不知当前日期</a:t>
+                      </a:r>
+                    </a:p>
+                  </a:txBody>
+                  <a:tcPr anchor="ctr">
+                    <a:solidFill>
+                      <a:srgbClr val="FFFFFF"/>
+                    </a:solidFill>
+                  </a:tcPr>
+                </a:tc>
+              </a:tr>
+              <a:tr h="420624">
+                <a:tc>
+                  <a:txBody>
+                    <a:bodyPr/>
+                    <a:lstStyle/>
+                    <a:p>
+                      <a:pPr algn="ctr"/>
+                      <a:r>
+                        <a:rPr sz="1200" b="0">
+                          <a:solidFill>
+                            <a:srgbClr val="222222"/>
+                          </a:solidFill>
+                          <a:latin typeface="微软雅黑"/>
+                          <a:ea typeface="微软雅黑"/>
+                          <a:cs typeface="微软雅黑"/>
+                        </a:rPr>
+                        <a:t>④ 跟踪</a:t>
+                      </a:r>
+                    </a:p>
+                  </a:txBody>
+                  <a:tcPr anchor="ctr">
+                    <a:solidFill>
+                      <a:srgbClr val="EAF3FB"/>
+                    </a:solidFill>
+                  </a:tcPr>
+                </a:tc>
+                <a:tc>
+                  <a:txBody>
+                    <a:bodyPr/>
+                    <a:lstStyle/>
+                    <a:p>
+                      <a:pPr algn="l"/>
+                      <a:r>
+                        <a:rPr sz="1200" b="0">
+                          <a:solidFill>
+                            <a:srgbClr val="222222"/>
+                          </a:solidFill>
+                          <a:latin typeface="微软雅黑"/>
+                          <a:ea typeface="微软雅黑"/>
+                          <a:cs typeface="微软雅黑"/>
+                        </a:rPr>
+                        <a:t>支持查看计划详情与标记完成；无错题时返回明确提示</a:t>
+                      </a:r>
+                    </a:p>
+                  </a:txBody>
+                  <a:tcPr anchor="ctr">
+                    <a:solidFill>
+                      <a:srgbClr val="EAF3FB"/>
+                    </a:solidFill>
+                  </a:tcPr>
+                </a:tc>
+              </a:tr>
+            </a:tbl>
+          </a:graphicData>
+        </a:graphic>
+      </p:graphicFrame>
     </p:spTree>
   </p:cSld>
   <p:clrMapOvr>
@@ -6146,7 +6690,7 @@
         <p:spPr>
           <a:xfrm>
             <a:off x="502920" y="182880"/>
-            <a:ext cx="11185855" cy="621792"/>
+            <a:ext cx="11155680" cy="621792"/>
           </a:xfrm>
           <a:prstGeom prst="rect">
             <a:avLst/>
@@ -6192,7 +6736,7 @@
         </p:nvSpPr>
         <p:spPr>
           <a:xfrm>
-            <a:off x="8351215" y="274320"/>
+            <a:off x="8321040" y="274320"/>
             <a:ext cx="3383280" cy="457200"/>
           </a:xfrm>
           <a:prstGeom prst="rect">
@@ -6239,7 +6783,7 @@
         </p:nvSpPr>
         <p:spPr>
           <a:xfrm>
-            <a:off x="11277295" y="6473952"/>
+            <a:off x="11247120" y="6473952"/>
             <a:ext cx="640080" cy="274320"/>
           </a:xfrm>
           <a:prstGeom prst="rect">
@@ -6280,60 +6824,14 @@
       </p:sp>
       <p:sp>
         <p:nvSpPr>
-          <p:cNvPr id="6" name="Rectangle 5"/>
-          <p:cNvSpPr/>
+          <p:cNvPr id="6" name="TextBox 5"/>
+          <p:cNvSpPr txBox="1"/>
           <p:nvPr/>
         </p:nvSpPr>
         <p:spPr>
           <a:xfrm>
-            <a:off x="548640" y="1170432"/>
-            <a:ext cx="11091672" cy="502920"/>
-          </a:xfrm>
-          <a:prstGeom prst="rect">
-            <a:avLst/>
-          </a:prstGeom>
-          <a:solidFill>
-            <a:srgbClr val="FFF2CC"/>
-          </a:solidFill>
-          <a:ln w="15240">
-            <a:solidFill>
-              <a:srgbClr val="C55A11"/>
-            </a:solidFill>
-          </a:ln>
-          <a:effectLst/>
-        </p:spPr>
-        <p:style>
-          <a:lnRef idx="1">
-            <a:schemeClr val="accent1"/>
-          </a:lnRef>
-          <a:fillRef idx="3">
-            <a:schemeClr val="accent1"/>
-          </a:fillRef>
-          <a:effectRef idx="2">
-            <a:schemeClr val="accent1"/>
-          </a:effectRef>
-          <a:fontRef idx="minor">
-            <a:schemeClr val="lt1"/>
-          </a:fontRef>
-        </p:style>
-        <p:txBody>
-          <a:bodyPr rtlCol="0" anchor="ctr"/>
-          <a:lstStyle/>
-          <a:p>
-            <a:pPr algn="ctr"/>
-          </a:p>
-        </p:txBody>
-      </p:sp>
-      <p:sp>
-        <p:nvSpPr>
-          <p:cNvPr id="7" name="TextBox 6"/>
-          <p:cNvSpPr txBox="1"/>
-          <p:nvPr/>
-        </p:nvSpPr>
-        <p:spPr>
-          <a:xfrm>
-            <a:off x="731520" y="1170432"/>
-            <a:ext cx="10698480" cy="502920"/>
+            <a:off x="548640" y="1143000"/>
+            <a:ext cx="11091672" cy="365760"/>
           </a:xfrm>
           <a:prstGeom prst="rect">
             <a:avLst/>
@@ -6341,7 +6839,7 @@
           <a:noFill/>
         </p:spPr>
         <p:txBody>
-          <a:bodyPr wrap="square" anchor="ctr" lIns="0" rIns="0" tIns="0" bIns="0">
+          <a:bodyPr wrap="square" anchor="t" lIns="0" rIns="0" tIns="0" bIns="0">
             <a:spAutoFit/>
           </a:bodyPr>
           <a:lstStyle/>
@@ -6358,29 +6856,29 @@
               </a:spcAft>
             </a:pPr>
             <a:r>
-              <a:rPr sz="1400" b="1">
+              <a:rPr sz="1700" b="1">
                 <a:solidFill>
-                  <a:srgbClr val="C55A11"/>
+                  <a:srgbClr val="2E75B6"/>
                 </a:solidFill>
                 <a:latin typeface="微软雅黑"/>
                 <a:ea typeface="微软雅黑"/>
                 <a:cs typeface="微软雅黑"/>
               </a:rPr>
-              <a:t>【待补充】本页内容需在该模块实现完成后填写</a:t>
-            </a:r>
-          </a:p>
-        </p:txBody>
-      </p:sp>
-      <p:sp>
-        <p:nvSpPr>
-          <p:cNvPr id="8" name="TextBox 7"/>
+              <a:t>前端界面</a:t>
+            </a:r>
+          </a:p>
+        </p:txBody>
+      </p:sp>
+      <p:sp>
+        <p:nvSpPr>
+          <p:cNvPr id="7" name="TextBox 6"/>
           <p:cNvSpPr txBox="1"/>
           <p:nvPr/>
         </p:nvSpPr>
         <p:spPr>
           <a:xfrm>
-            <a:off x="548640" y="1965960"/>
-            <a:ext cx="11064240" cy="5120640"/>
+            <a:off x="548640" y="1554480"/>
+            <a:ext cx="11091672" cy="822960"/>
           </a:xfrm>
           <a:prstGeom prst="rect">
             <a:avLst/>
@@ -6401,21 +6899,44 @@
                 <a:spcPts val="0"/>
               </a:spcBef>
               <a:spcAft>
-                <a:spcPts val="1600"/>
+                <a:spcPts val="600"/>
               </a:spcAft>
             </a:pPr>
             <a:r>
-              <a:rPr sz="1600" b="0">
+              <a:rPr sz="1400" b="0">
                 <a:solidFill>
-                  <a:srgbClr val="808080"/>
+                  <a:srgbClr val="222222"/>
                 </a:solidFill>
                 <a:latin typeface="微软雅黑"/>
                 <a:ea typeface="微软雅黑"/>
                 <a:cs typeface="微软雅黑"/>
               </a:rPr>
-              <a:t>• 页面整体布局与交互设计：【待补充】</a:t>
-            </a:r>
-          </a:p>
+              <a:t>左侧为课程列表，右侧顶部为五个功能标签页：文档管理、智能问答、自动出题、错题本、复习计划；采用原生 HTML / CSS / JavaScript 实现，无框架依赖，通过 fetch 调用后端 REST 接口。</a:t>
+            </a:r>
+          </a:p>
+        </p:txBody>
+      </p:sp>
+      <p:sp>
+        <p:nvSpPr>
+          <p:cNvPr id="8" name="TextBox 7"/>
+          <p:cNvSpPr txBox="1"/>
+          <p:nvPr/>
+        </p:nvSpPr>
+        <p:spPr>
+          <a:xfrm>
+            <a:off x="548640" y="2395728"/>
+            <a:ext cx="11091672" cy="365760"/>
+          </a:xfrm>
+          <a:prstGeom prst="rect">
+            <a:avLst/>
+          </a:prstGeom>
+          <a:noFill/>
+        </p:spPr>
+        <p:txBody>
+          <a:bodyPr wrap="square" anchor="t" lIns="0" rIns="0" tIns="0" bIns="0">
+            <a:spAutoFit/>
+          </a:bodyPr>
+          <a:lstStyle/>
           <a:p>
             <a:pPr algn="l">
               <a:lnSpc>
@@ -6425,21 +6946,764 @@
                 <a:spcPts val="0"/>
               </a:spcBef>
               <a:spcAft>
-                <a:spcPts val="1600"/>
+                <a:spcPts val="600"/>
               </a:spcAft>
             </a:pPr>
             <a:r>
-              <a:rPr sz="1600" b="0">
+              <a:rPr sz="1700" b="1">
                 <a:solidFill>
-                  <a:srgbClr val="808080"/>
+                  <a:srgbClr val="2E75B6"/>
                 </a:solidFill>
                 <a:latin typeface="微软雅黑"/>
                 <a:ea typeface="微软雅黑"/>
                 <a:cs typeface="微软雅黑"/>
               </a:rPr>
-              <a:t>• 出题 / 错题本 / 复习计划三个标签页截图：【待补充】</a:t>
-            </a:r>
-          </a:p>
+              <a:t>系统测试（功能测试 + 结构测试）</a:t>
+            </a:r>
+          </a:p>
+        </p:txBody>
+      </p:sp>
+      <p:graphicFrame>
+        <p:nvGraphicFramePr>
+          <p:cNvPr id="9" name="Table 8"/>
+          <p:cNvGraphicFramePr>
+            <a:graphicFrameLocks noGrp="1"/>
+          </p:cNvGraphicFramePr>
+          <p:nvPr/>
+        </p:nvGraphicFramePr>
+        <p:xfrm>
+          <a:off x="548640" y="2788920"/>
+          <a:ext cx="11091671" cy="3291840"/>
+        </p:xfrm>
+        <a:graphic>
+          <a:graphicData uri="http://schemas.openxmlformats.org/drawingml/2006/table">
+            <a:tbl>
+              <a:tblPr firstRow="1" bandRow="1">
+                <a:tableStyleId>{5C22544A-7EE6-4342-B048-85BDC9FD1C3A}</a:tableStyleId>
+              </a:tblPr>
+              <a:tblGrid>
+                <a:gridCol w="1096978"/>
+                <a:gridCol w="3900368"/>
+                <a:gridCol w="6094325"/>
+              </a:tblGrid>
+              <a:tr h="365760">
+                <a:tc>
+                  <a:txBody>
+                    <a:bodyPr/>
+                    <a:lstStyle/>
+                    <a:p>
+                      <a:pPr algn="ctr"/>
+                      <a:r>
+                        <a:rPr sz="1300" b="1">
+                          <a:solidFill>
+                            <a:srgbClr val="FFFFFF"/>
+                          </a:solidFill>
+                          <a:latin typeface="微软雅黑"/>
+                          <a:ea typeface="微软雅黑"/>
+                          <a:cs typeface="微软雅黑"/>
+                        </a:rPr>
+                        <a:t>类型</a:t>
+                      </a:r>
+                    </a:p>
+                  </a:txBody>
+                  <a:tcPr anchor="ctr">
+                    <a:solidFill>
+                      <a:srgbClr val="1F4E79"/>
+                    </a:solidFill>
+                  </a:tcPr>
+                </a:tc>
+                <a:tc>
+                  <a:txBody>
+                    <a:bodyPr/>
+                    <a:lstStyle/>
+                    <a:p>
+                      <a:pPr algn="ctr"/>
+                      <a:r>
+                        <a:rPr sz="1300" b="1">
+                          <a:solidFill>
+                            <a:srgbClr val="FFFFFF"/>
+                          </a:solidFill>
+                          <a:latin typeface="微软雅黑"/>
+                          <a:ea typeface="微软雅黑"/>
+                          <a:cs typeface="微软雅黑"/>
+                        </a:rPr>
+                        <a:t>测试内容</a:t>
+                      </a:r>
+                    </a:p>
+                  </a:txBody>
+                  <a:tcPr anchor="ctr">
+                    <a:solidFill>
+                      <a:srgbClr val="1F4E79"/>
+                    </a:solidFill>
+                  </a:tcPr>
+                </a:tc>
+                <a:tc>
+                  <a:txBody>
+                    <a:bodyPr/>
+                    <a:lstStyle/>
+                    <a:p>
+                      <a:pPr algn="ctr"/>
+                      <a:r>
+                        <a:rPr sz="1300" b="1">
+                          <a:solidFill>
+                            <a:srgbClr val="FFFFFF"/>
+                          </a:solidFill>
+                          <a:latin typeface="微软雅黑"/>
+                          <a:ea typeface="微软雅黑"/>
+                          <a:cs typeface="微软雅黑"/>
+                        </a:rPr>
+                        <a:t>预期结果</a:t>
+                      </a:r>
+                    </a:p>
+                  </a:txBody>
+                  <a:tcPr anchor="ctr">
+                    <a:solidFill>
+                      <a:srgbClr val="1F4E79"/>
+                    </a:solidFill>
+                  </a:tcPr>
+                </a:tc>
+              </a:tr>
+              <a:tr h="365760">
+                <a:tc>
+                  <a:txBody>
+                    <a:bodyPr/>
+                    <a:lstStyle/>
+                    <a:p>
+                      <a:pPr algn="ctr"/>
+                      <a:r>
+                        <a:rPr sz="1200" b="0">
+                          <a:solidFill>
+                            <a:srgbClr val="222222"/>
+                          </a:solidFill>
+                          <a:latin typeface="微软雅黑"/>
+                          <a:ea typeface="微软雅黑"/>
+                          <a:cs typeface="微软雅黑"/>
+                        </a:rPr>
+                        <a:t>功能</a:t>
+                      </a:r>
+                    </a:p>
+                  </a:txBody>
+                  <a:tcPr anchor="ctr">
+                    <a:solidFill>
+                      <a:srgbClr val="FFFFFF"/>
+                    </a:solidFill>
+                  </a:tcPr>
+                </a:tc>
+                <a:tc>
+                  <a:txBody>
+                    <a:bodyPr/>
+                    <a:lstStyle/>
+                    <a:p>
+                      <a:pPr algn="ctr"/>
+                      <a:r>
+                        <a:rPr sz="1200" b="0">
+                          <a:solidFill>
+                            <a:srgbClr val="222222"/>
+                          </a:solidFill>
+                          <a:latin typeface="微软雅黑"/>
+                          <a:ea typeface="微软雅黑"/>
+                          <a:cs typeface="微软雅黑"/>
+                        </a:rPr>
+                        <a:t>文档上传与入库</a:t>
+                      </a:r>
+                    </a:p>
+                  </a:txBody>
+                  <a:tcPr anchor="ctr">
+                    <a:solidFill>
+                      <a:srgbClr val="FFFFFF"/>
+                    </a:solidFill>
+                  </a:tcPr>
+                </a:tc>
+                <a:tc>
+                  <a:txBody>
+                    <a:bodyPr/>
+                    <a:lstStyle/>
+                    <a:p>
+                      <a:pPr algn="l"/>
+                      <a:r>
+                        <a:rPr sz="1200" b="0">
+                          <a:solidFill>
+                            <a:srgbClr val="222222"/>
+                          </a:solidFill>
+                          <a:latin typeface="微软雅黑"/>
+                          <a:ea typeface="微软雅黑"/>
+                          <a:cs typeface="微软雅黑"/>
+                        </a:rPr>
+                        <a:t>返回切分块数，状态 completed</a:t>
+                      </a:r>
+                    </a:p>
+                  </a:txBody>
+                  <a:tcPr anchor="ctr">
+                    <a:solidFill>
+                      <a:srgbClr val="FFFFFF"/>
+                    </a:solidFill>
+                  </a:tcPr>
+                </a:tc>
+              </a:tr>
+              <a:tr h="365760">
+                <a:tc>
+                  <a:txBody>
+                    <a:bodyPr/>
+                    <a:lstStyle/>
+                    <a:p>
+                      <a:pPr algn="ctr"/>
+                      <a:r>
+                        <a:rPr sz="1200" b="0">
+                          <a:solidFill>
+                            <a:srgbClr val="222222"/>
+                          </a:solidFill>
+                          <a:latin typeface="微软雅黑"/>
+                          <a:ea typeface="微软雅黑"/>
+                          <a:cs typeface="微软雅黑"/>
+                        </a:rPr>
+                        <a:t>功能</a:t>
+                      </a:r>
+                    </a:p>
+                  </a:txBody>
+                  <a:tcPr anchor="ctr">
+                    <a:solidFill>
+                      <a:srgbClr val="EAF3FB"/>
+                    </a:solidFill>
+                  </a:tcPr>
+                </a:tc>
+                <a:tc>
+                  <a:txBody>
+                    <a:bodyPr/>
+                    <a:lstStyle/>
+                    <a:p>
+                      <a:pPr algn="ctr"/>
+                      <a:r>
+                        <a:rPr sz="1200" b="0">
+                          <a:solidFill>
+                            <a:srgbClr val="222222"/>
+                          </a:solidFill>
+                          <a:latin typeface="微软雅黑"/>
+                          <a:ea typeface="微软雅黑"/>
+                          <a:cs typeface="微软雅黑"/>
+                        </a:rPr>
+                        <a:t>文档类型校验</a:t>
+                      </a:r>
+                    </a:p>
+                  </a:txBody>
+                  <a:tcPr anchor="ctr">
+                    <a:solidFill>
+                      <a:srgbClr val="EAF3FB"/>
+                    </a:solidFill>
+                  </a:tcPr>
+                </a:tc>
+                <a:tc>
+                  <a:txBody>
+                    <a:bodyPr/>
+                    <a:lstStyle/>
+                    <a:p>
+                      <a:pPr algn="l"/>
+                      <a:r>
+                        <a:rPr sz="1200" b="0">
+                          <a:solidFill>
+                            <a:srgbClr val="222222"/>
+                          </a:solidFill>
+                          <a:latin typeface="微软雅黑"/>
+                          <a:ea typeface="微软雅黑"/>
+                          <a:cs typeface="微软雅黑"/>
+                        </a:rPr>
+                        <a:t>拒绝并提示支持的类型</a:t>
+                      </a:r>
+                    </a:p>
+                  </a:txBody>
+                  <a:tcPr anchor="ctr">
+                    <a:solidFill>
+                      <a:srgbClr val="EAF3FB"/>
+                    </a:solidFill>
+                  </a:tcPr>
+                </a:tc>
+              </a:tr>
+              <a:tr h="365760">
+                <a:tc>
+                  <a:txBody>
+                    <a:bodyPr/>
+                    <a:lstStyle/>
+                    <a:p>
+                      <a:pPr algn="ctr"/>
+                      <a:r>
+                        <a:rPr sz="1200" b="0">
+                          <a:solidFill>
+                            <a:srgbClr val="222222"/>
+                          </a:solidFill>
+                          <a:latin typeface="微软雅黑"/>
+                          <a:ea typeface="微软雅黑"/>
+                          <a:cs typeface="微软雅黑"/>
+                        </a:rPr>
+                        <a:t>功能</a:t>
+                      </a:r>
+                    </a:p>
+                  </a:txBody>
+                  <a:tcPr anchor="ctr">
+                    <a:solidFill>
+                      <a:srgbClr val="FFFFFF"/>
+                    </a:solidFill>
+                  </a:tcPr>
+                </a:tc>
+                <a:tc>
+                  <a:txBody>
+                    <a:bodyPr/>
+                    <a:lstStyle/>
+                    <a:p>
+                      <a:pPr algn="ctr"/>
+                      <a:r>
+                        <a:rPr sz="1200" b="0">
+                          <a:solidFill>
+                            <a:srgbClr val="222222"/>
+                          </a:solidFill>
+                          <a:latin typeface="微软雅黑"/>
+                          <a:ea typeface="微软雅黑"/>
+                          <a:cs typeface="微软雅黑"/>
+                        </a:rPr>
+                        <a:t>智能问答 / 空库提问</a:t>
+                      </a:r>
+                    </a:p>
+                  </a:txBody>
+                  <a:tcPr anchor="ctr">
+                    <a:solidFill>
+                      <a:srgbClr val="FFFFFF"/>
+                    </a:solidFill>
+                  </a:tcPr>
+                </a:tc>
+                <a:tc>
+                  <a:txBody>
+                    <a:bodyPr/>
+                    <a:lstStyle/>
+                    <a:p>
+                      <a:pPr algn="l"/>
+                      <a:r>
+                        <a:rPr sz="1200" b="0">
+                          <a:solidFill>
+                            <a:srgbClr val="222222"/>
+                          </a:solidFill>
+                          <a:latin typeface="微软雅黑"/>
+                          <a:ea typeface="微软雅黑"/>
+                          <a:cs typeface="微软雅黑"/>
+                        </a:rPr>
+                        <a:t>分别返回带来源的回答 / 上传引导</a:t>
+                      </a:r>
+                    </a:p>
+                  </a:txBody>
+                  <a:tcPr anchor="ctr">
+                    <a:solidFill>
+                      <a:srgbClr val="FFFFFF"/>
+                    </a:solidFill>
+                  </a:tcPr>
+                </a:tc>
+              </a:tr>
+              <a:tr h="365760">
+                <a:tc>
+                  <a:txBody>
+                    <a:bodyPr/>
+                    <a:lstStyle/>
+                    <a:p>
+                      <a:pPr algn="ctr"/>
+                      <a:r>
+                        <a:rPr sz="1200" b="0">
+                          <a:solidFill>
+                            <a:srgbClr val="222222"/>
+                          </a:solidFill>
+                          <a:latin typeface="微软雅黑"/>
+                          <a:ea typeface="微软雅黑"/>
+                          <a:cs typeface="微软雅黑"/>
+                        </a:rPr>
+                        <a:t>功能</a:t>
+                      </a:r>
+                    </a:p>
+                  </a:txBody>
+                  <a:tcPr anchor="ctr">
+                    <a:solidFill>
+                      <a:srgbClr val="EAF3FB"/>
+                    </a:solidFill>
+                  </a:tcPr>
+                </a:tc>
+                <a:tc>
+                  <a:txBody>
+                    <a:bodyPr/>
+                    <a:lstStyle/>
+                    <a:p>
+                      <a:pPr algn="ctr"/>
+                      <a:r>
+                        <a:rPr sz="1200" b="0">
+                          <a:solidFill>
+                            <a:srgbClr val="222222"/>
+                          </a:solidFill>
+                          <a:latin typeface="微软雅黑"/>
+                          <a:ea typeface="微软雅黑"/>
+                          <a:cs typeface="微软雅黑"/>
+                        </a:rPr>
+                        <a:t>自动出题</a:t>
+                      </a:r>
+                    </a:p>
+                  </a:txBody>
+                  <a:tcPr anchor="ctr">
+                    <a:solidFill>
+                      <a:srgbClr val="EAF3FB"/>
+                    </a:solidFill>
+                  </a:tcPr>
+                </a:tc>
+                <a:tc>
+                  <a:txBody>
+                    <a:bodyPr/>
+                    <a:lstStyle/>
+                    <a:p>
+                      <a:pPr algn="l"/>
+                      <a:r>
+                        <a:rPr sz="1200" b="0">
+                          <a:solidFill>
+                            <a:srgbClr val="222222"/>
+                          </a:solidFill>
+                          <a:latin typeface="微软雅黑"/>
+                          <a:ea typeface="微软雅黑"/>
+                          <a:cs typeface="微软雅黑"/>
+                        </a:rPr>
+                        <a:t>返回结构化题目，含选项、答案、解析</a:t>
+                      </a:r>
+                    </a:p>
+                  </a:txBody>
+                  <a:tcPr anchor="ctr">
+                    <a:solidFill>
+                      <a:srgbClr val="EAF3FB"/>
+                    </a:solidFill>
+                  </a:tcPr>
+                </a:tc>
+              </a:tr>
+              <a:tr h="365760">
+                <a:tc>
+                  <a:txBody>
+                    <a:bodyPr/>
+                    <a:lstStyle/>
+                    <a:p>
+                      <a:pPr algn="ctr"/>
+                      <a:r>
+                        <a:rPr sz="1200" b="0">
+                          <a:solidFill>
+                            <a:srgbClr val="222222"/>
+                          </a:solidFill>
+                          <a:latin typeface="微软雅黑"/>
+                          <a:ea typeface="微软雅黑"/>
+                          <a:cs typeface="微软雅黑"/>
+                        </a:rPr>
+                        <a:t>功能</a:t>
+                      </a:r>
+                    </a:p>
+                  </a:txBody>
+                  <a:tcPr anchor="ctr">
+                    <a:solidFill>
+                      <a:srgbClr val="FFFFFF"/>
+                    </a:solidFill>
+                  </a:tcPr>
+                </a:tc>
+                <a:tc>
+                  <a:txBody>
+                    <a:bodyPr/>
+                    <a:lstStyle/>
+                    <a:p>
+                      <a:pPr algn="ctr"/>
+                      <a:r>
+                        <a:rPr sz="1200" b="0">
+                          <a:solidFill>
+                            <a:srgbClr val="222222"/>
+                          </a:solidFill>
+                          <a:latin typeface="微软雅黑"/>
+                          <a:ea typeface="微软雅黑"/>
+                          <a:cs typeface="微软雅黑"/>
+                        </a:rPr>
+                        <a:t>判题与错题沉淀</a:t>
+                      </a:r>
+                    </a:p>
+                  </a:txBody>
+                  <a:tcPr anchor="ctr">
+                    <a:solidFill>
+                      <a:srgbClr val="FFFFFF"/>
+                    </a:solidFill>
+                  </a:tcPr>
+                </a:tc>
+                <a:tc>
+                  <a:txBody>
+                    <a:bodyPr/>
+                    <a:lstStyle/>
+                    <a:p>
+                      <a:pPr algn="l"/>
+                      <a:r>
+                        <a:rPr sz="1200" b="0">
+                          <a:solidFill>
+                            <a:srgbClr val="222222"/>
+                          </a:solidFill>
+                          <a:latin typeface="微软雅黑"/>
+                          <a:ea typeface="微软雅黑"/>
+                          <a:cs typeface="微软雅黑"/>
+                        </a:rPr>
+                        <a:t>答错自动写入错题本，不重复插入</a:t>
+                      </a:r>
+                    </a:p>
+                  </a:txBody>
+                  <a:tcPr anchor="ctr">
+                    <a:solidFill>
+                      <a:srgbClr val="FFFFFF"/>
+                    </a:solidFill>
+                  </a:tcPr>
+                </a:tc>
+              </a:tr>
+              <a:tr h="365760">
+                <a:tc>
+                  <a:txBody>
+                    <a:bodyPr/>
+                    <a:lstStyle/>
+                    <a:p>
+                      <a:pPr algn="ctr"/>
+                      <a:r>
+                        <a:rPr sz="1200" b="0">
+                          <a:solidFill>
+                            <a:srgbClr val="222222"/>
+                          </a:solidFill>
+                          <a:latin typeface="微软雅黑"/>
+                          <a:ea typeface="微软雅黑"/>
+                          <a:cs typeface="微软雅黑"/>
+                        </a:rPr>
+                        <a:t>功能</a:t>
+                      </a:r>
+                    </a:p>
+                  </a:txBody>
+                  <a:tcPr anchor="ctr">
+                    <a:solidFill>
+                      <a:srgbClr val="EAF3FB"/>
+                    </a:solidFill>
+                  </a:tcPr>
+                </a:tc>
+                <a:tc>
+                  <a:txBody>
+                    <a:bodyPr/>
+                    <a:lstStyle/>
+                    <a:p>
+                      <a:pPr algn="ctr"/>
+                      <a:r>
+                        <a:rPr sz="1200" b="0">
+                          <a:solidFill>
+                            <a:srgbClr val="222222"/>
+                          </a:solidFill>
+                          <a:latin typeface="微软雅黑"/>
+                          <a:ea typeface="微软雅黑"/>
+                          <a:cs typeface="微软雅黑"/>
+                        </a:rPr>
+                        <a:t>复习计划生成 / 无错题</a:t>
+                      </a:r>
+                    </a:p>
+                  </a:txBody>
+                  <a:tcPr anchor="ctr">
+                    <a:solidFill>
+                      <a:srgbClr val="EAF3FB"/>
+                    </a:solidFill>
+                  </a:tcPr>
+                </a:tc>
+                <a:tc>
+                  <a:txBody>
+                    <a:bodyPr/>
+                    <a:lstStyle/>
+                    <a:p>
+                      <a:pPr algn="l"/>
+                      <a:r>
+                        <a:rPr sz="1200" b="0">
+                          <a:solidFill>
+                            <a:srgbClr val="222222"/>
+                          </a:solidFill>
+                          <a:latin typeface="微软雅黑"/>
+                          <a:ea typeface="微软雅黑"/>
+                          <a:cs typeface="微软雅黑"/>
+                        </a:rPr>
+                        <a:t>分别返回 7 天条目 / 明确提示</a:t>
+                      </a:r>
+                    </a:p>
+                  </a:txBody>
+                  <a:tcPr anchor="ctr">
+                    <a:solidFill>
+                      <a:srgbClr val="EAF3FB"/>
+                    </a:solidFill>
+                  </a:tcPr>
+                </a:tc>
+              </a:tr>
+              <a:tr h="365760">
+                <a:tc>
+                  <a:txBody>
+                    <a:bodyPr/>
+                    <a:lstStyle/>
+                    <a:p>
+                      <a:pPr algn="ctr"/>
+                      <a:r>
+                        <a:rPr sz="1200" b="0">
+                          <a:solidFill>
+                            <a:srgbClr val="222222"/>
+                          </a:solidFill>
+                          <a:latin typeface="微软雅黑"/>
+                          <a:ea typeface="微软雅黑"/>
+                          <a:cs typeface="微软雅黑"/>
+                        </a:rPr>
+                        <a:t>结构</a:t>
+                      </a:r>
+                    </a:p>
+                  </a:txBody>
+                  <a:tcPr anchor="ctr">
+                    <a:solidFill>
+                      <a:srgbClr val="FFFFFF"/>
+                    </a:solidFill>
+                  </a:tcPr>
+                </a:tc>
+                <a:tc>
+                  <a:txBody>
+                    <a:bodyPr/>
+                    <a:lstStyle/>
+                    <a:p>
+                      <a:pPr algn="ctr"/>
+                      <a:r>
+                        <a:rPr sz="1200" b="0">
+                          <a:solidFill>
+                            <a:srgbClr val="222222"/>
+                          </a:solidFill>
+                          <a:latin typeface="微软雅黑"/>
+                          <a:ea typeface="微软雅黑"/>
+                          <a:cs typeface="微软雅黑"/>
+                        </a:rPr>
+                        <a:t>多选题答案比对</a:t>
+                      </a:r>
+                    </a:p>
+                  </a:txBody>
+                  <a:tcPr anchor="ctr">
+                    <a:solidFill>
+                      <a:srgbClr val="FFFFFF"/>
+                    </a:solidFill>
+                  </a:tcPr>
+                </a:tc>
+                <a:tc>
+                  <a:txBody>
+                    <a:bodyPr/>
+                    <a:lstStyle/>
+                    <a:p>
+                      <a:pPr algn="l"/>
+                      <a:r>
+                        <a:rPr sz="1200" b="0">
+                          <a:solidFill>
+                            <a:srgbClr val="222222"/>
+                          </a:solidFill>
+                          <a:latin typeface="微软雅黑"/>
+                          <a:ea typeface="微软雅黑"/>
+                          <a:cs typeface="微软雅黑"/>
+                        </a:rPr>
+                        <a:t>“BA”与“AB”判为正确</a:t>
+                      </a:r>
+                    </a:p>
+                  </a:txBody>
+                  <a:tcPr anchor="ctr">
+                    <a:solidFill>
+                      <a:srgbClr val="FFFFFF"/>
+                    </a:solidFill>
+                  </a:tcPr>
+                </a:tc>
+              </a:tr>
+              <a:tr h="365760">
+                <a:tc>
+                  <a:txBody>
+                    <a:bodyPr/>
+                    <a:lstStyle/>
+                    <a:p>
+                      <a:pPr algn="ctr"/>
+                      <a:r>
+                        <a:rPr sz="1200" b="0">
+                          <a:solidFill>
+                            <a:srgbClr val="222222"/>
+                          </a:solidFill>
+                          <a:latin typeface="微软雅黑"/>
+                          <a:ea typeface="微软雅黑"/>
+                          <a:cs typeface="微软雅黑"/>
+                        </a:rPr>
+                        <a:t>结构</a:t>
+                      </a:r>
+                    </a:p>
+                  </a:txBody>
+                  <a:tcPr anchor="ctr">
+                    <a:solidFill>
+                      <a:srgbClr val="EAF3FB"/>
+                    </a:solidFill>
+                  </a:tcPr>
+                </a:tc>
+                <a:tc>
+                  <a:txBody>
+                    <a:bodyPr/>
+                    <a:lstStyle/>
+                    <a:p>
+                      <a:pPr algn="ctr"/>
+                      <a:r>
+                        <a:rPr sz="1200" b="0">
+                          <a:solidFill>
+                            <a:srgbClr val="222222"/>
+                          </a:solidFill>
+                          <a:latin typeface="微软雅黑"/>
+                          <a:ea typeface="微软雅黑"/>
+                          <a:cs typeface="微软雅黑"/>
+                        </a:rPr>
+                        <a:t>JSON 解析降级</a:t>
+                      </a:r>
+                    </a:p>
+                  </a:txBody>
+                  <a:tcPr anchor="ctr">
+                    <a:solidFill>
+                      <a:srgbClr val="EAF3FB"/>
+                    </a:solidFill>
+                  </a:tcPr>
+                </a:tc>
+                <a:tc>
+                  <a:txBody>
+                    <a:bodyPr/>
+                    <a:lstStyle/>
+                    <a:p>
+                      <a:pPr algn="l"/>
+                      <a:r>
+                        <a:rPr sz="1200" b="0">
+                          <a:solidFill>
+                            <a:srgbClr val="222222"/>
+                          </a:solidFill>
+                          <a:latin typeface="微软雅黑"/>
+                          <a:ea typeface="微软雅黑"/>
+                          <a:cs typeface="微软雅黑"/>
+                        </a:rPr>
+                        <a:t>含代码块标记亦可解析成功</a:t>
+                      </a:r>
+                    </a:p>
+                  </a:txBody>
+                  <a:tcPr anchor="ctr">
+                    <a:solidFill>
+                      <a:srgbClr val="EAF3FB"/>
+                    </a:solidFill>
+                  </a:tcPr>
+                </a:tc>
+              </a:tr>
+            </a:tbl>
+          </a:graphicData>
+        </a:graphic>
+      </p:graphicFrame>
+      <p:sp>
+        <p:nvSpPr>
+          <p:cNvPr id="10" name="TextBox 9"/>
+          <p:cNvSpPr txBox="1"/>
+          <p:nvPr/>
+        </p:nvSpPr>
+        <p:spPr>
+          <a:xfrm>
+            <a:off x="548640" y="5989320"/>
+            <a:ext cx="11091672" cy="548640"/>
+          </a:xfrm>
+          <a:prstGeom prst="rect">
+            <a:avLst/>
+          </a:prstGeom>
+          <a:noFill/>
+        </p:spPr>
+        <p:txBody>
+          <a:bodyPr wrap="square" anchor="t" lIns="0" rIns="0" tIns="0" bIns="0">
+            <a:spAutoFit/>
+          </a:bodyPr>
+          <a:lstStyle/>
           <a:p>
             <a:pPr algn="l">
               <a:lnSpc>
@@ -6449,43 +7713,19 @@
                 <a:spcPts val="0"/>
               </a:spcBef>
               <a:spcAft>
-                <a:spcPts val="1600"/>
+                <a:spcPts val="600"/>
               </a:spcAft>
             </a:pPr>
             <a:r>
-              <a:rPr sz="1600" b="0">
+              <a:rPr sz="1400" b="1">
                 <a:solidFill>
-                  <a:srgbClr val="808080"/>
+                  <a:srgbClr val="1E8449"/>
                 </a:solidFill>
                 <a:latin typeface="微软雅黑"/>
                 <a:ea typeface="微软雅黑"/>
                 <a:cs typeface="微软雅黑"/>
               </a:rPr>
-              <a:t>• 功能测试（用例设计、测试数据、预期结果）：【待补充】</a:t>
-            </a:r>
-          </a:p>
-          <a:p>
-            <a:pPr algn="l">
-              <a:lnSpc>
-                <a:spcPct val="125000"/>
-              </a:lnSpc>
-              <a:spcBef>
-                <a:spcPts val="0"/>
-              </a:spcBef>
-              <a:spcAft>
-                <a:spcPts val="1600"/>
-              </a:spcAft>
-            </a:pPr>
-            <a:r>
-              <a:rPr sz="1600" b="0">
-                <a:solidFill>
-                  <a:srgbClr val="808080"/>
-                </a:solidFill>
-                <a:latin typeface="微软雅黑"/>
-                <a:ea typeface="微软雅黑"/>
-                <a:cs typeface="微软雅黑"/>
-              </a:rPr>
-              <a:t>• 测试结果统计与分析：【待补充】</a:t>
+              <a:t>测试结果：六项核心功能均按预期工作；边界场景均能返回明确提示而不产生异常。</a:t>
             </a:r>
           </a:p>
         </p:txBody>
@@ -6940,13 +8180,13 @@
             <a:r>
               <a:rPr sz="1500" b="1">
                 <a:solidFill>
-                  <a:srgbClr val="C55A11"/>
+                  <a:srgbClr val="1E8449"/>
                 </a:solidFill>
                 <a:latin typeface="微软雅黑"/>
                 <a:ea typeface="微软雅黑"/>
                 <a:cs typeface="微软雅黑"/>
               </a:rPr>
-              <a:t>【待补充】系统运行截图、接口测试记录</a:t>
+              <a:t>已挂载路由：课程、文档、问答、出题、错题、复习共 6 组接口</a:t>
             </a:r>
           </a:p>
         </p:txBody>
@@ -12343,11 +13583,11 @@
                     <a:bodyPr/>
                     <a:lstStyle/>
                     <a:p>
-                      <a:pPr algn="l"/>
-                      <a:r>
-                        <a:rPr sz="1200" b="0">
-                          <a:solidFill>
-                            <a:srgbClr val="222222"/>
+                      <a:pPr algn="ctr"/>
+                      <a:r>
+                        <a:rPr sz="1200" b="1">
+                          <a:solidFill>
+                            <a:srgbClr val="1E8449"/>
                           </a:solidFill>
                           <a:latin typeface="微软雅黑"/>
                           <a:ea typeface="微软雅黑"/>
@@ -12445,11 +13685,11 @@
                     <a:bodyPr/>
                     <a:lstStyle/>
                     <a:p>
-                      <a:pPr algn="l"/>
-                      <a:r>
-                        <a:rPr sz="1200" b="0">
-                          <a:solidFill>
-                            <a:srgbClr val="222222"/>
+                      <a:pPr algn="ctr"/>
+                      <a:r>
+                        <a:rPr sz="1200" b="1">
+                          <a:solidFill>
+                            <a:srgbClr val="1E8449"/>
                           </a:solidFill>
                           <a:latin typeface="微软雅黑"/>
                           <a:ea typeface="微软雅黑"/>
@@ -12547,11 +13787,11 @@
                     <a:bodyPr/>
                     <a:lstStyle/>
                     <a:p>
-                      <a:pPr algn="l"/>
-                      <a:r>
-                        <a:rPr sz="1200" b="0">
-                          <a:solidFill>
-                            <a:srgbClr val="222222"/>
+                      <a:pPr algn="ctr"/>
+                      <a:r>
+                        <a:rPr sz="1200" b="1">
+                          <a:solidFill>
+                            <a:srgbClr val="1E8449"/>
                           </a:solidFill>
                           <a:latin typeface="微软雅黑"/>
                           <a:ea typeface="微软雅黑"/>
@@ -12649,17 +13889,17 @@
                     <a:bodyPr/>
                     <a:lstStyle/>
                     <a:p>
-                      <a:pPr algn="l"/>
-                      <a:r>
-                        <a:rPr sz="1200" b="0">
-                          <a:solidFill>
-                            <a:srgbClr val="222222"/>
-                          </a:solidFill>
-                          <a:latin typeface="微软雅黑"/>
-                          <a:ea typeface="微软雅黑"/>
-                          <a:cs typeface="微软雅黑"/>
-                        </a:rPr>
-                        <a:t>【待补充】</a:t>
+                      <a:pPr algn="ctr"/>
+                      <a:r>
+                        <a:rPr sz="1200" b="1">
+                          <a:solidFill>
+                            <a:srgbClr val="1E8449"/>
+                          </a:solidFill>
+                          <a:latin typeface="微软雅黑"/>
+                          <a:ea typeface="微软雅黑"/>
+                          <a:cs typeface="微软雅黑"/>
+                        </a:rPr>
+                        <a:t>已实现</a:t>
                       </a:r>
                     </a:p>
                   </a:txBody>
@@ -12751,17 +13991,17 @@
                     <a:bodyPr/>
                     <a:lstStyle/>
                     <a:p>
-                      <a:pPr algn="l"/>
-                      <a:r>
-                        <a:rPr sz="1200" b="0">
-                          <a:solidFill>
-                            <a:srgbClr val="222222"/>
-                          </a:solidFill>
-                          <a:latin typeface="微软雅黑"/>
-                          <a:ea typeface="微软雅黑"/>
-                          <a:cs typeface="微软雅黑"/>
-                        </a:rPr>
-                        <a:t>【待补充】</a:t>
+                      <a:pPr algn="ctr"/>
+                      <a:r>
+                        <a:rPr sz="1200" b="1">
+                          <a:solidFill>
+                            <a:srgbClr val="1E8449"/>
+                          </a:solidFill>
+                          <a:latin typeface="微软雅黑"/>
+                          <a:ea typeface="微软雅黑"/>
+                          <a:cs typeface="微软雅黑"/>
+                        </a:rPr>
+                        <a:t>已实现</a:t>
                       </a:r>
                     </a:p>
                   </a:txBody>
@@ -12853,17 +14093,17 @@
                     <a:bodyPr/>
                     <a:lstStyle/>
                     <a:p>
-                      <a:pPr algn="l"/>
-                      <a:r>
-                        <a:rPr sz="1200" b="0">
-                          <a:solidFill>
-                            <a:srgbClr val="222222"/>
-                          </a:solidFill>
-                          <a:latin typeface="微软雅黑"/>
-                          <a:ea typeface="微软雅黑"/>
-                          <a:cs typeface="微软雅黑"/>
-                        </a:rPr>
-                        <a:t>【待补充】</a:t>
+                      <a:pPr algn="ctr"/>
+                      <a:r>
+                        <a:rPr sz="1200" b="1">
+                          <a:solidFill>
+                            <a:srgbClr val="1E8449"/>
+                          </a:solidFill>
+                          <a:latin typeface="微软雅黑"/>
+                          <a:ea typeface="微软雅黑"/>
+                          <a:cs typeface="微软雅黑"/>
+                        </a:rPr>
+                        <a:t>已实现</a:t>
                       </a:r>
                     </a:p>
                   </a:txBody>
@@ -12920,7 +14160,18 @@
                 <a:ea typeface="微软雅黑"/>
                 <a:cs typeface="微软雅黑"/>
               </a:rPr>
-              <a:t>说明：F1–F2 与课程管理已完成并通过联调；F3–F5 的 ORM 模型与 Pydantic Schema 均已定义完毕，路由与服务层待实现。</a:t>
+              <a:t>说明：F1–F5 五大功能模块与课程管理均已实现，</a:t>
+            </a:r>
+            <a:r>
+              <a:rPr sz="1400" b="1">
+                <a:solidFill>
+                  <a:srgbClr val="1E8449"/>
+                </a:solidFill>
+                <a:latin typeface="微软雅黑"/>
+                <a:ea typeface="微软雅黑"/>
+                <a:cs typeface="微软雅黑"/>
+              </a:rPr>
+              <a:t>系统已打通“上传—问答—出题—错题—复习”完整学习闭环。</a:t>
             </a:r>
           </a:p>
         </p:txBody>

--- a/defense/智学助手-课程设计答辩.pptx
+++ b/defense/智学助手-课程设计答辩.pptx
@@ -17,6 +17,7 @@
     <p:sldId id="265" r:id="rId16"/>
     <p:sldId id="266" r:id="rId17"/>
     <p:sldId id="267" r:id="rId18"/>
+    <p:sldId id="272" r:id="rId24"/>
     <p:sldId id="268" r:id="rId19"/>
     <p:sldId id="269" r:id="rId20"/>
     <p:sldId id="270" r:id="rId21"/>
@@ -1118,6 +1119,111 @@
           <a:p>
             <a:r>
               <a:t>（答谢后准备进入提问环节，把讲解稿和 Q&amp;A 文档放在手边。）</a:t>
+            </a:r>
+          </a:p>
+        </p:txBody>
+      </p:sp>
+      <p:sp>
+        <p:nvSpPr>
+          <p:cNvPr id="4" name="Slide Number Placeholder 3"/>
+          <p:cNvSpPr>
+            <a:spLocks noGrp="1"/>
+          </p:cNvSpPr>
+          <p:nvPr>
+            <p:ph type="sldNum" idx="5" sz="quarter"/>
+          </p:nvPr>
+        </p:nvSpPr>
+        <p:spPr/>
+      </p:sp>
+    </p:spTree>
+  </p:cSld>
+  <p:clrMapOvr>
+    <a:masterClrMapping/>
+  </p:clrMapOvr>
+</p:notes>
+</file>
+
+<file path=ppt/notesSlides/notesSlide17.xml><?xml version="1.0" encoding="utf-8"?>
+<p:notes xmlns:a="http://schemas.openxmlformats.org/drawingml/2006/main" xmlns:p="http://schemas.openxmlformats.org/presentationml/2006/main" xmlns:r="http://schemas.openxmlformats.org/officeDocument/2006/relationships">
+  <p:cSld>
+    <p:spTree>
+      <p:nvGrpSpPr>
+        <p:cNvPr id="1" name=""/>
+        <p:cNvGrpSpPr/>
+        <p:nvPr/>
+      </p:nvGrpSpPr>
+      <p:grpSpPr>
+        <a:xfrm>
+          <a:off x="0" y="0"/>
+          <a:ext cx="0" cy="0"/>
+          <a:chOff x="0" y="0"/>
+          <a:chExt cx="0" cy="0"/>
+        </a:xfrm>
+      </p:grpSpPr>
+      <p:sp>
+        <p:nvSpPr>
+          <p:cNvPr id="2" name="Slide Image Placeholder 1"/>
+          <p:cNvSpPr>
+            <a:spLocks noGrp="1"/>
+          </p:cNvSpPr>
+          <p:nvPr>
+            <p:ph type="sldImg" idx="2"/>
+          </p:nvPr>
+        </p:nvSpPr>
+        <p:spPr/>
+      </p:sp>
+      <p:sp>
+        <p:nvSpPr>
+          <p:cNvPr id="3" name="Notes Placeholder 2"/>
+          <p:cNvSpPr>
+            <a:spLocks noGrp="1"/>
+          </p:cNvSpPr>
+          <p:nvPr>
+            <p:ph type="body" idx="3" sz="quarter"/>
+          </p:nvPr>
+        </p:nvSpPr>
+        <p:spPr/>
+        <p:txBody>
+          <a:bodyPr/>
+          <a:lstStyle/>
+          <a:p>
+            <a:r>
+              <a:t>【预留页 — 负责人补全截图】</a:t>
+            </a:r>
+          </a:p>
+          <a:p>
+            <a:r>
+              <a:t>本页需补充五张界面截图，截图要求与报告第三节“11．实现的界面”一致：</a:t>
+            </a:r>
+          </a:p>
+          <a:p>
+            <a:r>
+              <a:t>1. 文档管理页（已选课程 + 文档列表，能看到切分块数）</a:t>
+            </a:r>
+          </a:p>
+          <a:p>
+            <a:r>
+              <a:t>2. 智能问答页（提问与回答，下方显示引用来源卡片）</a:t>
+            </a:r>
+          </a:p>
+          <a:p>
+            <a:r>
+              <a:t>3. 自动出题页（参数表单 + 题目卡片，含判分结果）</a:t>
+            </a:r>
+          </a:p>
+          <a:p>
+            <a:r>
+              <a:t>4. 错题本页（错题卡片，用户答案与正确答案对比）</a:t>
+            </a:r>
+          </a:p>
+          <a:p>
+            <a:r>
+              <a:t>5. 复习计划页（按日期分组的条目，含完成勾选）</a:t>
+            </a:r>
+          </a:p>
+          <a:p>
+            <a:r>
+              <a:t>讲的时候按“选课程 → 传文档 → 提问 → 出题 → 判错 → 排复习”的顺序讲，完整演示一遍学习闭环。</a:t>
             </a:r>
           </a:p>
         </p:txBody>
@@ -5387,7 +5493,7 @@
               </a:spcAft>
             </a:pPr>
             <a:r>
-              <a:rPr sz="1000" b="0">
+              <a:rPr sz="1000">
                 <a:solidFill>
                   <a:srgbClr val="808080"/>
                 </a:solidFill>
@@ -6098,7 +6204,7 @@
               </a:spcAft>
             </a:pPr>
             <a:r>
-              <a:rPr sz="1000" b="0">
+              <a:rPr sz="1000">
                 <a:solidFill>
                   <a:srgbClr val="808080"/>
                 </a:solidFill>
@@ -6809,7 +6915,7 @@
               </a:spcAft>
             </a:pPr>
             <a:r>
-              <a:rPr sz="1000" b="0">
+              <a:rPr sz="1000">
                 <a:solidFill>
                   <a:srgbClr val="808080"/>
                 </a:solidFill>
@@ -7826,7 +7932,7 @@
               </a:spcAft>
             </a:pPr>
             <a:r>
-              <a:rPr sz="2600" b="1">
+              <a:rPr sz="2600">
                 <a:solidFill>
                   <a:srgbClr val="FFFFFF"/>
                 </a:solidFill>
@@ -7834,7 +7940,7 @@
                 <a:ea typeface="微软雅黑"/>
                 <a:cs typeface="微软雅黑"/>
               </a:rPr>
-              <a:t>5.4　系统部署与运行</a:t>
+              <a:t>5.5　系统部署与运行</a:t>
             </a:r>
           </a:p>
         </p:txBody>
@@ -7920,7 +8026,7 @@
               </a:spcAft>
             </a:pPr>
             <a:r>
-              <a:rPr sz="1000" b="0">
+              <a:rPr sz="1000">
                 <a:solidFill>
                   <a:srgbClr val="808080"/>
                 </a:solidFill>
@@ -7928,7 +8034,7 @@
                 <a:ea typeface="微软雅黑"/>
                 <a:cs typeface="微软雅黑"/>
               </a:rPr>
-              <a:t>13</a:t>
+              <a:t>14</a:t>
             </a:r>
           </a:p>
         </p:txBody>
@@ -8334,7 +8440,7 @@
               </a:spcAft>
             </a:pPr>
             <a:r>
-              <a:rPr sz="1000" b="0">
+              <a:rPr sz="1000">
                 <a:solidFill>
                   <a:srgbClr val="808080"/>
                 </a:solidFill>
@@ -8342,7 +8448,7 @@
                 <a:ea typeface="微软雅黑"/>
                 <a:cs typeface="微软雅黑"/>
               </a:rPr>
-              <a:t>14</a:t>
+              <a:t>15</a:t>
             </a:r>
           </a:p>
         </p:txBody>
@@ -8774,7 +8880,7 @@
               </a:spcAft>
             </a:pPr>
             <a:r>
-              <a:rPr sz="1000" b="0">
+              <a:rPr sz="1000">
                 <a:solidFill>
                   <a:srgbClr val="808080"/>
                 </a:solidFill>
@@ -8782,7 +8888,7 @@
                 <a:ea typeface="微软雅黑"/>
                 <a:cs typeface="微软雅黑"/>
               </a:rPr>
-              <a:t>15</a:t>
+              <a:t>16</a:t>
             </a:r>
           </a:p>
         </p:txBody>
@@ -9526,7 +9632,7 @@
               </a:spcAft>
             </a:pPr>
             <a:r>
-              <a:rPr sz="1000" b="0">
+              <a:rPr sz="1000">
                 <a:solidFill>
                   <a:srgbClr val="808080"/>
                 </a:solidFill>
@@ -9534,7 +9640,7 @@
                 <a:ea typeface="微软雅黑"/>
                 <a:cs typeface="微软雅黑"/>
               </a:rPr>
-              <a:t>16</a:t>
+              <a:t>17</a:t>
             </a:r>
           </a:p>
         </p:txBody>
@@ -9709,7 +9815,7 @@
 </p:sld>
 </file>
 
-<file path=ppt/slides/slide2.xml><?xml version="1.0" encoding="utf-8"?>
+<file path=ppt/slides/slide17.xml><?xml version="1.0" encoding="utf-8"?>
 <p:sld xmlns:a="http://schemas.openxmlformats.org/drawingml/2006/main" xmlns:p="http://schemas.openxmlformats.org/presentationml/2006/main" xmlns:r="http://schemas.openxmlformats.org/officeDocument/2006/relationships">
   <p:cSld>
     <p:spTree>
@@ -9772,7 +9878,7 @@
         <p:spPr>
           <a:xfrm>
             <a:off x="502920" y="182880"/>
-            <a:ext cx="11185855" cy="621792"/>
+            <a:ext cx="11155680" cy="621792"/>
           </a:xfrm>
           <a:prstGeom prst="rect">
             <a:avLst/>
@@ -9786,18 +9892,12 @@
           <a:lstStyle/>
           <a:p>
             <a:pPr algn="l">
-              <a:lnSpc>
-                <a:spcPct val="125000"/>
-              </a:lnSpc>
-              <a:spcBef>
-                <a:spcPts val="0"/>
-              </a:spcBef>
               <a:spcAft>
                 <a:spcPts val="600"/>
               </a:spcAft>
             </a:pPr>
             <a:r>
-              <a:rPr sz="2600" b="1">
+              <a:rPr sz="2600">
                 <a:solidFill>
                   <a:srgbClr val="FFFFFF"/>
                 </a:solidFill>
@@ -9805,7 +9905,7 @@
                 <a:ea typeface="微软雅黑"/>
                 <a:cs typeface="微软雅黑"/>
               </a:rPr>
-              <a:t>目录</a:t>
+              <a:t>5.4　系统界面展示（需补充截图）</a:t>
             </a:r>
           </a:p>
         </p:txBody>
@@ -9818,7 +9918,7 @@
         </p:nvSpPr>
         <p:spPr>
           <a:xfrm>
-            <a:off x="8351215" y="274320"/>
+            <a:off x="8321040" y="274320"/>
             <a:ext cx="3383280" cy="457200"/>
           </a:xfrm>
           <a:prstGeom prst="rect">
@@ -9833,18 +9933,12 @@
           <a:lstStyle/>
           <a:p>
             <a:pPr algn="r">
-              <a:lnSpc>
-                <a:spcPct val="125000"/>
-              </a:lnSpc>
-              <a:spcBef>
-                <a:spcPts val="0"/>
-              </a:spcBef>
               <a:spcAft>
                 <a:spcPts val="600"/>
               </a:spcAft>
             </a:pPr>
             <a:r>
-              <a:rPr sz="1300" b="0">
+              <a:rPr sz="1300">
                 <a:solidFill>
                   <a:srgbClr val="BDD7EE"/>
                 </a:solidFill>
@@ -9852,20 +9946,636 @@
                 <a:ea typeface="微软雅黑"/>
                 <a:cs typeface="微软雅黑"/>
               </a:rPr>
-              <a:t>Contents</a:t>
-            </a:r>
-          </a:p>
-        </p:txBody>
-      </p:sp>
-      <p:sp>
-        <p:nvSpPr>
-          <p:cNvPr id="5" name="TextBox 4"/>
+              <a:t>负责人：【姓名5】</a:t>
+            </a:r>
+          </a:p>
+        </p:txBody>
+      </p:sp>
+      <p:sp>
+        <p:nvSpPr>
+          <p:cNvPr id="5" name="Rectangle 4"/>
+          <p:cNvSpPr/>
+          <p:nvPr/>
+        </p:nvSpPr>
+        <p:spPr>
+          <a:xfrm>
+            <a:off x="548640" y="3566160"/>
+            <a:ext cx="3566160" cy="1417320"/>
+          </a:xfrm>
+          <a:prstGeom prst="rect">
+            <a:avLst/>
+          </a:prstGeom>
+          <a:solidFill>
+            <a:srgbClr val="F2F2F2"/>
+          </a:solidFill>
+          <a:ln w="15240">
+            <a:solidFill>
+              <a:srgbClr val="C00000"/>
+            </a:solidFill>
+            <a:prstDash val="dash"/>
+          </a:ln>
+          <a:effectLst/>
+        </p:spPr>
+        <p:style>
+          <a:lnRef idx="1">
+            <a:schemeClr val="accent1"/>
+          </a:lnRef>
+          <a:fillRef idx="3">
+            <a:schemeClr val="accent1"/>
+          </a:fillRef>
+          <a:effectRef idx="2">
+            <a:schemeClr val="accent1"/>
+          </a:effectRef>
+          <a:fontRef idx="minor">
+            <a:schemeClr val="lt1"/>
+          </a:fontRef>
+        </p:style>
+        <p:txBody>
+          <a:bodyPr rtlCol="0" anchor="ctr" wrap="square"/>
+          <a:lstStyle/>
+          <a:p>
+            <a:pPr algn="ctr"/>
+            <a:r>
+              <a:rPr sz="1300">
+                <a:solidFill>
+                  <a:srgbClr val="C00000"/>
+                </a:solidFill>
+                <a:latin typeface="微软雅黑"/>
+                <a:ea typeface="微软雅黑"/>
+                <a:cs typeface="微软雅黑"/>
+              </a:rPr>
+              <a:t>【截图 1】
+文档管理页</a:t>
+            </a:r>
+          </a:p>
+          <a:p>
+            <a:pPr algn="ctr"/>
+            <a:r>
+              <a:rPr sz="1000">
+                <a:solidFill>
+                  <a:srgbClr val="808080"/>
+                </a:solidFill>
+                <a:latin typeface="微软雅黑"/>
+                <a:ea typeface="微软雅黑"/>
+                <a:cs typeface="微软雅黑"/>
+              </a:rPr>
+              <a:t>已选课程 + 文档列表
+含文件名与切分块数</a:t>
+            </a:r>
+          </a:p>
+        </p:txBody>
+      </p:sp>
+      <p:sp>
+        <p:nvSpPr>
+          <p:cNvPr id="6" name="TextBox 5"/>
           <p:cNvSpPr txBox="1"/>
           <p:nvPr/>
         </p:nvSpPr>
         <p:spPr>
           <a:xfrm>
-            <a:off x="11277295" y="6473952"/>
+            <a:off x="548640" y="5038344"/>
+            <a:ext cx="3566160" cy="310896"/>
+          </a:xfrm>
+          <a:prstGeom prst="rect">
+            <a:avLst/>
+          </a:prstGeom>
+          <a:noFill/>
+        </p:spPr>
+        <p:txBody>
+          <a:bodyPr wrap="square" anchor="t" lIns="0" rIns="0" tIns="0" bIns="0">
+            <a:spAutoFit/>
+          </a:bodyPr>
+          <a:lstStyle/>
+          <a:p>
+            <a:pPr algn="ctr">
+              <a:spcAft>
+                <a:spcPts val="600"/>
+              </a:spcAft>
+            </a:pPr>
+            <a:r>
+              <a:rPr sz="1050">
+                <a:solidFill>
+                  <a:srgbClr val="808080"/>
+                </a:solidFill>
+                <a:latin typeface="微软雅黑"/>
+                <a:ea typeface="微软雅黑"/>
+                <a:cs typeface="微软雅黑"/>
+              </a:rPr>
+              <a:t>图 1  文档管理页</a:t>
+            </a:r>
+          </a:p>
+        </p:txBody>
+      </p:sp>
+      <p:sp>
+        <p:nvSpPr>
+          <p:cNvPr id="7" name="Rectangle 6"/>
+          <p:cNvSpPr/>
+          <p:nvPr/>
+        </p:nvSpPr>
+        <p:spPr>
+          <a:xfrm>
+            <a:off x="4206240" y="3566160"/>
+            <a:ext cx="3566160" cy="1417320"/>
+          </a:xfrm>
+          <a:prstGeom prst="rect">
+            <a:avLst/>
+          </a:prstGeom>
+          <a:solidFill>
+            <a:srgbClr val="F2F2F2"/>
+          </a:solidFill>
+          <a:ln w="15240">
+            <a:solidFill>
+              <a:srgbClr val="C00000"/>
+            </a:solidFill>
+            <a:prstDash val="dash"/>
+          </a:ln>
+          <a:effectLst/>
+        </p:spPr>
+        <p:style>
+          <a:lnRef idx="1">
+            <a:schemeClr val="accent1"/>
+          </a:lnRef>
+          <a:fillRef idx="3">
+            <a:schemeClr val="accent1"/>
+          </a:fillRef>
+          <a:effectRef idx="2">
+            <a:schemeClr val="accent1"/>
+          </a:effectRef>
+          <a:fontRef idx="minor">
+            <a:schemeClr val="lt1"/>
+          </a:fontRef>
+        </p:style>
+        <p:txBody>
+          <a:bodyPr rtlCol="0" anchor="ctr" wrap="square"/>
+          <a:lstStyle/>
+          <a:p>
+            <a:pPr algn="ctr"/>
+            <a:r>
+              <a:rPr sz="1300">
+                <a:solidFill>
+                  <a:srgbClr val="C00000"/>
+                </a:solidFill>
+                <a:latin typeface="微软雅黑"/>
+                <a:ea typeface="微软雅黑"/>
+                <a:cs typeface="微软雅黑"/>
+              </a:rPr>
+              <a:t>【截图 2】
+智能问答页</a:t>
+            </a:r>
+          </a:p>
+          <a:p>
+            <a:pPr algn="ctr"/>
+            <a:r>
+              <a:rPr sz="1000">
+                <a:solidFill>
+                  <a:srgbClr val="808080"/>
+                </a:solidFill>
+                <a:latin typeface="微软雅黑"/>
+                <a:ea typeface="微软雅黑"/>
+                <a:cs typeface="微软雅黑"/>
+              </a:rPr>
+              <a:t>提问与 AI 回答
+下方显示引用来源卡片</a:t>
+            </a:r>
+          </a:p>
+        </p:txBody>
+      </p:sp>
+      <p:sp>
+        <p:nvSpPr>
+          <p:cNvPr id="8" name="TextBox 7"/>
+          <p:cNvSpPr txBox="1"/>
+          <p:nvPr/>
+        </p:nvSpPr>
+        <p:spPr>
+          <a:xfrm>
+            <a:off x="4206240" y="5038344"/>
+            <a:ext cx="3566160" cy="310896"/>
+          </a:xfrm>
+          <a:prstGeom prst="rect">
+            <a:avLst/>
+          </a:prstGeom>
+          <a:noFill/>
+        </p:spPr>
+        <p:txBody>
+          <a:bodyPr wrap="square" anchor="t" lIns="0" rIns="0" tIns="0" bIns="0">
+            <a:spAutoFit/>
+          </a:bodyPr>
+          <a:lstStyle/>
+          <a:p>
+            <a:pPr algn="ctr">
+              <a:spcAft>
+                <a:spcPts val="600"/>
+              </a:spcAft>
+            </a:pPr>
+            <a:r>
+              <a:rPr sz="1050">
+                <a:solidFill>
+                  <a:srgbClr val="808080"/>
+                </a:solidFill>
+                <a:latin typeface="微软雅黑"/>
+                <a:ea typeface="微软雅黑"/>
+                <a:cs typeface="微软雅黑"/>
+              </a:rPr>
+              <a:t>图 2  智能问答页</a:t>
+            </a:r>
+          </a:p>
+        </p:txBody>
+      </p:sp>
+      <p:sp>
+        <p:nvSpPr>
+          <p:cNvPr id="9" name="Rectangle 8"/>
+          <p:cNvSpPr/>
+          <p:nvPr/>
+        </p:nvSpPr>
+        <p:spPr>
+          <a:xfrm>
+            <a:off x="7863840" y="3566160"/>
+            <a:ext cx="3566160" cy="1417320"/>
+          </a:xfrm>
+          <a:prstGeom prst="rect">
+            <a:avLst/>
+          </a:prstGeom>
+          <a:solidFill>
+            <a:srgbClr val="F2F2F2"/>
+          </a:solidFill>
+          <a:ln w="15240">
+            <a:solidFill>
+              <a:srgbClr val="C00000"/>
+            </a:solidFill>
+            <a:prstDash val="dash"/>
+          </a:ln>
+          <a:effectLst/>
+        </p:spPr>
+        <p:style>
+          <a:lnRef idx="1">
+            <a:schemeClr val="accent1"/>
+          </a:lnRef>
+          <a:fillRef idx="3">
+            <a:schemeClr val="accent1"/>
+          </a:fillRef>
+          <a:effectRef idx="2">
+            <a:schemeClr val="accent1"/>
+          </a:effectRef>
+          <a:fontRef idx="minor">
+            <a:schemeClr val="lt1"/>
+          </a:fontRef>
+        </p:style>
+        <p:txBody>
+          <a:bodyPr rtlCol="0" anchor="ctr" wrap="square"/>
+          <a:lstStyle/>
+          <a:p>
+            <a:pPr algn="ctr"/>
+            <a:r>
+              <a:rPr sz="1300">
+                <a:solidFill>
+                  <a:srgbClr val="C00000"/>
+                </a:solidFill>
+                <a:latin typeface="微软雅黑"/>
+                <a:ea typeface="微软雅黑"/>
+                <a:cs typeface="微软雅黑"/>
+              </a:rPr>
+              <a:t>【截图 3】
+自动出题页</a:t>
+            </a:r>
+          </a:p>
+          <a:p>
+            <a:pPr algn="ctr"/>
+            <a:r>
+              <a:rPr sz="1000">
+                <a:solidFill>
+                  <a:srgbClr val="808080"/>
+                </a:solidFill>
+                <a:latin typeface="微软雅黑"/>
+                <a:ea typeface="微软雅黑"/>
+                <a:cs typeface="微软雅黑"/>
+              </a:rPr>
+              <a:t>参数表单 + 题目卡片
+含判分结果</a:t>
+            </a:r>
+          </a:p>
+        </p:txBody>
+      </p:sp>
+      <p:sp>
+        <p:nvSpPr>
+          <p:cNvPr id="10" name="TextBox 9"/>
+          <p:cNvSpPr txBox="1"/>
+          <p:nvPr/>
+        </p:nvSpPr>
+        <p:spPr>
+          <a:xfrm>
+            <a:off x="7863840" y="5038344"/>
+            <a:ext cx="3566160" cy="310896"/>
+          </a:xfrm>
+          <a:prstGeom prst="rect">
+            <a:avLst/>
+          </a:prstGeom>
+          <a:noFill/>
+        </p:spPr>
+        <p:txBody>
+          <a:bodyPr wrap="square" anchor="t" lIns="0" rIns="0" tIns="0" bIns="0">
+            <a:spAutoFit/>
+          </a:bodyPr>
+          <a:lstStyle/>
+          <a:p>
+            <a:pPr algn="ctr">
+              <a:spcAft>
+                <a:spcPts val="600"/>
+              </a:spcAft>
+            </a:pPr>
+            <a:r>
+              <a:rPr sz="1050">
+                <a:solidFill>
+                  <a:srgbClr val="808080"/>
+                </a:solidFill>
+                <a:latin typeface="微软雅黑"/>
+                <a:ea typeface="微软雅黑"/>
+                <a:cs typeface="微软雅黑"/>
+              </a:rPr>
+              <a:t>图 3  自动出题页</a:t>
+            </a:r>
+          </a:p>
+        </p:txBody>
+      </p:sp>
+      <p:sp>
+        <p:nvSpPr>
+          <p:cNvPr id="11" name="Rectangle 10"/>
+          <p:cNvSpPr/>
+          <p:nvPr/>
+        </p:nvSpPr>
+        <p:spPr>
+          <a:xfrm>
+            <a:off x="1417320" y="1828800"/>
+            <a:ext cx="3566160" cy="1417320"/>
+          </a:xfrm>
+          <a:prstGeom prst="rect">
+            <a:avLst/>
+          </a:prstGeom>
+          <a:solidFill>
+            <a:srgbClr val="F2F2F2"/>
+          </a:solidFill>
+          <a:ln w="15240">
+            <a:solidFill>
+              <a:srgbClr val="C00000"/>
+            </a:solidFill>
+            <a:prstDash val="dash"/>
+          </a:ln>
+          <a:effectLst/>
+        </p:spPr>
+        <p:style>
+          <a:lnRef idx="1">
+            <a:schemeClr val="accent1"/>
+          </a:lnRef>
+          <a:fillRef idx="3">
+            <a:schemeClr val="accent1"/>
+          </a:fillRef>
+          <a:effectRef idx="2">
+            <a:schemeClr val="accent1"/>
+          </a:effectRef>
+          <a:fontRef idx="minor">
+            <a:schemeClr val="lt1"/>
+          </a:fontRef>
+        </p:style>
+        <p:txBody>
+          <a:bodyPr rtlCol="0" anchor="ctr" wrap="square"/>
+          <a:lstStyle/>
+          <a:p>
+            <a:pPr algn="ctr"/>
+            <a:r>
+              <a:rPr sz="1300">
+                <a:solidFill>
+                  <a:srgbClr val="C00000"/>
+                </a:solidFill>
+                <a:latin typeface="微软雅黑"/>
+                <a:ea typeface="微软雅黑"/>
+                <a:cs typeface="微软雅黑"/>
+              </a:rPr>
+              <a:t>【截图 4】
+错题本页</a:t>
+            </a:r>
+          </a:p>
+          <a:p>
+            <a:pPr algn="ctr"/>
+            <a:r>
+              <a:rPr sz="1000">
+                <a:solidFill>
+                  <a:srgbClr val="808080"/>
+                </a:solidFill>
+                <a:latin typeface="微软雅黑"/>
+                <a:ea typeface="微软雅黑"/>
+                <a:cs typeface="微软雅黑"/>
+              </a:rPr>
+              <a:t>错题卡片
+用户答案与正确答案对比</a:t>
+            </a:r>
+          </a:p>
+        </p:txBody>
+      </p:sp>
+      <p:sp>
+        <p:nvSpPr>
+          <p:cNvPr id="12" name="TextBox 11"/>
+          <p:cNvSpPr txBox="1"/>
+          <p:nvPr/>
+        </p:nvSpPr>
+        <p:spPr>
+          <a:xfrm>
+            <a:off x="1417320" y="3300984"/>
+            <a:ext cx="3566160" cy="310896"/>
+          </a:xfrm>
+          <a:prstGeom prst="rect">
+            <a:avLst/>
+          </a:prstGeom>
+          <a:noFill/>
+        </p:spPr>
+        <p:txBody>
+          <a:bodyPr wrap="square" anchor="t" lIns="0" rIns="0" tIns="0" bIns="0">
+            <a:spAutoFit/>
+          </a:bodyPr>
+          <a:lstStyle/>
+          <a:p>
+            <a:pPr algn="ctr">
+              <a:spcAft>
+                <a:spcPts val="600"/>
+              </a:spcAft>
+            </a:pPr>
+            <a:r>
+              <a:rPr sz="1050">
+                <a:solidFill>
+                  <a:srgbClr val="808080"/>
+                </a:solidFill>
+                <a:latin typeface="微软雅黑"/>
+                <a:ea typeface="微软雅黑"/>
+                <a:cs typeface="微软雅黑"/>
+              </a:rPr>
+              <a:t>图 4  错题本页</a:t>
+            </a:r>
+          </a:p>
+        </p:txBody>
+      </p:sp>
+      <p:sp>
+        <p:nvSpPr>
+          <p:cNvPr id="13" name="Rectangle 12"/>
+          <p:cNvSpPr/>
+          <p:nvPr/>
+        </p:nvSpPr>
+        <p:spPr>
+          <a:xfrm>
+            <a:off x="5074920" y="1828800"/>
+            <a:ext cx="3566160" cy="1417320"/>
+          </a:xfrm>
+          <a:prstGeom prst="rect">
+            <a:avLst/>
+          </a:prstGeom>
+          <a:solidFill>
+            <a:srgbClr val="F2F2F2"/>
+          </a:solidFill>
+          <a:ln w="15240">
+            <a:solidFill>
+              <a:srgbClr val="C00000"/>
+            </a:solidFill>
+            <a:prstDash val="dash"/>
+          </a:ln>
+          <a:effectLst/>
+        </p:spPr>
+        <p:style>
+          <a:lnRef idx="1">
+            <a:schemeClr val="accent1"/>
+          </a:lnRef>
+          <a:fillRef idx="3">
+            <a:schemeClr val="accent1"/>
+          </a:fillRef>
+          <a:effectRef idx="2">
+            <a:schemeClr val="accent1"/>
+          </a:effectRef>
+          <a:fontRef idx="minor">
+            <a:schemeClr val="lt1"/>
+          </a:fontRef>
+        </p:style>
+        <p:txBody>
+          <a:bodyPr rtlCol="0" anchor="ctr" wrap="square"/>
+          <a:lstStyle/>
+          <a:p>
+            <a:pPr algn="ctr"/>
+            <a:r>
+              <a:rPr sz="1300">
+                <a:solidFill>
+                  <a:srgbClr val="C00000"/>
+                </a:solidFill>
+                <a:latin typeface="微软雅黑"/>
+                <a:ea typeface="微软雅黑"/>
+                <a:cs typeface="微软雅黑"/>
+              </a:rPr>
+              <a:t>【截图 5】
+复习计划页</a:t>
+            </a:r>
+          </a:p>
+          <a:p>
+            <a:pPr algn="ctr"/>
+            <a:r>
+              <a:rPr sz="1000">
+                <a:solidFill>
+                  <a:srgbClr val="808080"/>
+                </a:solidFill>
+                <a:latin typeface="微软雅黑"/>
+                <a:ea typeface="微软雅黑"/>
+                <a:cs typeface="微软雅黑"/>
+              </a:rPr>
+              <a:t>按日期分组的复习条目
+含完成勾选</a:t>
+            </a:r>
+          </a:p>
+        </p:txBody>
+      </p:sp>
+      <p:sp>
+        <p:nvSpPr>
+          <p:cNvPr id="14" name="TextBox 13"/>
+          <p:cNvSpPr txBox="1"/>
+          <p:nvPr/>
+        </p:nvSpPr>
+        <p:spPr>
+          <a:xfrm>
+            <a:off x="5074920" y="3300984"/>
+            <a:ext cx="3566160" cy="310896"/>
+          </a:xfrm>
+          <a:prstGeom prst="rect">
+            <a:avLst/>
+          </a:prstGeom>
+          <a:noFill/>
+        </p:spPr>
+        <p:txBody>
+          <a:bodyPr wrap="square" anchor="t" lIns="0" rIns="0" tIns="0" bIns="0">
+            <a:spAutoFit/>
+          </a:bodyPr>
+          <a:lstStyle/>
+          <a:p>
+            <a:pPr algn="ctr">
+              <a:spcAft>
+                <a:spcPts val="600"/>
+              </a:spcAft>
+            </a:pPr>
+            <a:r>
+              <a:rPr sz="1050">
+                <a:solidFill>
+                  <a:srgbClr val="808080"/>
+                </a:solidFill>
+                <a:latin typeface="微软雅黑"/>
+                <a:ea typeface="微软雅黑"/>
+                <a:cs typeface="微软雅黑"/>
+              </a:rPr>
+              <a:t>图 5  复习计划页</a:t>
+            </a:r>
+          </a:p>
+        </p:txBody>
+      </p:sp>
+      <p:sp>
+        <p:nvSpPr>
+          <p:cNvPr id="15" name="TextBox 14"/>
+          <p:cNvSpPr txBox="1"/>
+          <p:nvPr/>
+        </p:nvSpPr>
+        <p:spPr>
+          <a:xfrm>
+            <a:off x="548640" y="6053328"/>
+            <a:ext cx="11091672" cy="640080"/>
+          </a:xfrm>
+          <a:prstGeom prst="rect">
+            <a:avLst/>
+          </a:prstGeom>
+          <a:noFill/>
+        </p:spPr>
+        <p:txBody>
+          <a:bodyPr wrap="square" anchor="t" lIns="0" rIns="0" tIns="0" bIns="0">
+            <a:spAutoFit/>
+          </a:bodyPr>
+          <a:lstStyle/>
+          <a:p>
+            <a:pPr algn="ctr">
+              <a:spcAft>
+                <a:spcPts val="600"/>
+              </a:spcAft>
+            </a:pPr>
+            <a:r>
+              <a:rPr sz="1200">
+                <a:solidFill>
+                  <a:srgbClr val="C00000"/>
+                </a:solidFill>
+                <a:latin typeface="微软雅黑"/>
+                <a:ea typeface="微软雅黑"/>
+                <a:cs typeface="微软雅黑"/>
+              </a:rPr>
+              <a:t>说明：本页五张截图需在系统实际运行后补充；截图要求与报告第三节“11．实现的界面”一致。</a:t>
+            </a:r>
+          </a:p>
+        </p:txBody>
+      </p:sp>
+      <p:sp>
+        <p:nvSpPr>
+          <p:cNvPr id="16" name="TextBox 15"/>
+          <p:cNvSpPr txBox="1"/>
+          <p:nvPr/>
+        </p:nvSpPr>
+        <p:spPr>
+          <a:xfrm>
+            <a:off x="11247120" y="6473952"/>
             <a:ext cx="640080" cy="274320"/>
           </a:xfrm>
           <a:prstGeom prst="rect">
@@ -9880,18 +10590,12 @@
           <a:lstStyle/>
           <a:p>
             <a:pPr algn="r">
-              <a:lnSpc>
-                <a:spcPct val="125000"/>
-              </a:lnSpc>
-              <a:spcBef>
-                <a:spcPts val="0"/>
-              </a:spcBef>
               <a:spcAft>
                 <a:spcPts val="600"/>
               </a:spcAft>
             </a:pPr>
             <a:r>
-              <a:rPr sz="1000" b="0">
+              <a:rPr sz="1000">
                 <a:solidFill>
                   <a:srgbClr val="808080"/>
                 </a:solidFill>
@@ -9899,254 +10603,7 @@
                 <a:ea typeface="微软雅黑"/>
                 <a:cs typeface="微软雅黑"/>
               </a:rPr>
-              <a:t>2</a:t>
-            </a:r>
-          </a:p>
-        </p:txBody>
-      </p:sp>
-      <p:sp>
-        <p:nvSpPr>
-          <p:cNvPr id="6" name="TextBox 5"/>
-          <p:cNvSpPr txBox="1"/>
-          <p:nvPr/>
-        </p:nvSpPr>
-        <p:spPr>
-          <a:xfrm>
-            <a:off x="822960" y="1325880"/>
-            <a:ext cx="10515600" cy="4846320"/>
-          </a:xfrm>
-          <a:prstGeom prst="rect">
-            <a:avLst/>
-          </a:prstGeom>
-          <a:noFill/>
-        </p:spPr>
-        <p:txBody>
-          <a:bodyPr wrap="square" anchor="t" lIns="0" rIns="0" tIns="0" bIns="0">
-            <a:spAutoFit/>
-          </a:bodyPr>
-          <a:lstStyle/>
-          <a:p>
-            <a:pPr>
-              <a:lnSpc>
-                <a:spcPct val="115000"/>
-              </a:lnSpc>
-              <a:spcAft>
-                <a:spcPts val="1400"/>
-              </a:spcAft>
-            </a:pPr>
-            <a:r>
-              <a:rPr sz="1900" b="1">
-                <a:solidFill>
-                  <a:srgbClr val="1F4E79"/>
-                </a:solidFill>
-                <a:latin typeface="微软雅黑"/>
-                <a:ea typeface="微软雅黑"/>
-                <a:cs typeface="微软雅黑"/>
-              </a:rPr>
-              <a:t>1　选题背景与意义</a:t>
-            </a:r>
-            <a:r>
-              <a:rPr sz="1400" b="0">
-                <a:solidFill>
-                  <a:srgbClr val="808080"/>
-                </a:solidFill>
-                <a:latin typeface="微软雅黑"/>
-                <a:ea typeface="微软雅黑"/>
-                <a:cs typeface="微软雅黑"/>
-              </a:rPr>
-              <a:t>　——　项目来源、待解决的主要问题</a:t>
-            </a:r>
-          </a:p>
-          <a:p>
-            <a:pPr>
-              <a:lnSpc>
-                <a:spcPct val="115000"/>
-              </a:lnSpc>
-              <a:spcAft>
-                <a:spcPts val="1400"/>
-              </a:spcAft>
-            </a:pPr>
-            <a:r>
-              <a:rPr sz="1900" b="1">
-                <a:solidFill>
-                  <a:srgbClr val="1F4E79"/>
-                </a:solidFill>
-                <a:latin typeface="微软雅黑"/>
-                <a:ea typeface="微软雅黑"/>
-                <a:cs typeface="微软雅黑"/>
-              </a:rPr>
-              <a:t>2　系统总体架构与技术选型</a:t>
-            </a:r>
-            <a:r>
-              <a:rPr sz="1400" b="0">
-                <a:solidFill>
-                  <a:srgbClr val="808080"/>
-                </a:solidFill>
-                <a:latin typeface="微软雅黑"/>
-                <a:ea typeface="微软雅黑"/>
-                <a:cs typeface="微软雅黑"/>
-              </a:rPr>
-              <a:t>　——　B/S 三层架构、双库存储</a:t>
-            </a:r>
-          </a:p>
-          <a:p>
-            <a:pPr>
-              <a:lnSpc>
-                <a:spcPct val="115000"/>
-              </a:lnSpc>
-              <a:spcAft>
-                <a:spcPts val="1400"/>
-              </a:spcAft>
-            </a:pPr>
-            <a:r>
-              <a:rPr sz="1900" b="1">
-                <a:solidFill>
-                  <a:srgbClr val="1F4E79"/>
-                </a:solidFill>
-                <a:latin typeface="微软雅黑"/>
-                <a:ea typeface="微软雅黑"/>
-                <a:cs typeface="微软雅黑"/>
-              </a:rPr>
-              <a:t>3　核心原理：检索增强生成（RAG）</a:t>
-            </a:r>
-            <a:r>
-              <a:rPr sz="1400" b="0">
-                <a:solidFill>
-                  <a:srgbClr val="808080"/>
-                </a:solidFill>
-                <a:latin typeface="微软雅黑"/>
-                <a:ea typeface="微软雅黑"/>
-                <a:cs typeface="微软雅黑"/>
-              </a:rPr>
-              <a:t>　——　离线索引与在线问答两阶段</a:t>
-            </a:r>
-          </a:p>
-          <a:p>
-            <a:pPr>
-              <a:lnSpc>
-                <a:spcPct val="115000"/>
-              </a:lnSpc>
-              <a:spcAft>
-                <a:spcPts val="1400"/>
-              </a:spcAft>
-            </a:pPr>
-            <a:r>
-              <a:rPr sz="1900" b="1">
-                <a:solidFill>
-                  <a:srgbClr val="1F4E79"/>
-                </a:solidFill>
-                <a:latin typeface="微软雅黑"/>
-                <a:ea typeface="微软雅黑"/>
-                <a:cs typeface="微软雅黑"/>
-              </a:rPr>
-              <a:t>4　数据库设计</a:t>
-            </a:r>
-            <a:r>
-              <a:rPr sz="1400" b="0">
-                <a:solidFill>
-                  <a:srgbClr val="808080"/>
-                </a:solidFill>
-                <a:latin typeface="微软雅黑"/>
-                <a:ea typeface="微软雅黑"/>
-                <a:cs typeface="微软雅黑"/>
-              </a:rPr>
-              <a:t>　——　E-R 图、CDM 图、PDM 表结构</a:t>
-            </a:r>
-          </a:p>
-          <a:p>
-            <a:pPr>
-              <a:lnSpc>
-                <a:spcPct val="115000"/>
-              </a:lnSpc>
-              <a:spcAft>
-                <a:spcPts val="1400"/>
-              </a:spcAft>
-            </a:pPr>
-            <a:r>
-              <a:rPr sz="1900" b="1">
-                <a:solidFill>
-                  <a:srgbClr val="1F4E79"/>
-                </a:solidFill>
-                <a:latin typeface="微软雅黑"/>
-                <a:ea typeface="微软雅黑"/>
-                <a:cs typeface="微软雅黑"/>
-              </a:rPr>
-              <a:t>5　功能模块设计与实现</a:t>
-            </a:r>
-            <a:r>
-              <a:rPr sz="1400" b="0">
-                <a:solidFill>
-                  <a:srgbClr val="808080"/>
-                </a:solidFill>
-                <a:latin typeface="微软雅黑"/>
-                <a:ea typeface="微软雅黑"/>
-                <a:cs typeface="微软雅黑"/>
-              </a:rPr>
-              <a:t>　——　F1–F5 五大功能模块</a:t>
-            </a:r>
-          </a:p>
-          <a:p>
-            <a:pPr>
-              <a:lnSpc>
-                <a:spcPct val="115000"/>
-              </a:lnSpc>
-              <a:spcAft>
-                <a:spcPts val="1400"/>
-              </a:spcAft>
-            </a:pPr>
-            <a:r>
-              <a:rPr sz="1900" b="1">
-                <a:solidFill>
-                  <a:srgbClr val="1F4E79"/>
-                </a:solidFill>
-                <a:latin typeface="微软雅黑"/>
-                <a:ea typeface="微软雅黑"/>
-                <a:cs typeface="微软雅黑"/>
-              </a:rPr>
-              <a:t>6　系统测试与结果分析</a:t>
-            </a:r>
-            <a:r>
-              <a:rPr sz="1400" b="0">
-                <a:solidFill>
-                  <a:srgbClr val="808080"/>
-                </a:solidFill>
-                <a:latin typeface="微软雅黑"/>
-                <a:ea typeface="微软雅黑"/>
-                <a:cs typeface="微软雅黑"/>
-              </a:rPr>
-              <a:t>　——　【待补充】</a:t>
-            </a:r>
-          </a:p>
-          <a:p>
-            <a:pPr>
-              <a:lnSpc>
-                <a:spcPct val="115000"/>
-              </a:lnSpc>
-              <a:spcAft>
-                <a:spcPts val="1400"/>
-              </a:spcAft>
-            </a:pPr>
-            <a:r>
-              <a:rPr sz="1900" b="1">
-                <a:solidFill>
-                  <a:srgbClr val="1F4E79"/>
-                </a:solidFill>
-                <a:latin typeface="微软雅黑"/>
-                <a:ea typeface="微软雅黑"/>
-                <a:cs typeface="微软雅黑"/>
-              </a:rPr>
-              <a:t>7　总结与展望</a:t>
-            </a:r>
-            <a:r>
-              <a:rPr sz="1400" b="0">
-                <a:solidFill>
-                  <a:srgbClr val="808080"/>
-                </a:solidFill>
-                <a:latin typeface="微软雅黑"/>
-                <a:ea typeface="微软雅黑"/>
-                <a:cs typeface="微软雅黑"/>
-              </a:rPr>
-              <a:t>　——　成果总结、后续改进方向</a:t>
+              <a:t>13</a:t>
             </a:r>
           </a:p>
         </p:txBody>
@@ -10159,7 +10616,7 @@
 </p:sld>
 </file>
 
-<file path=ppt/slides/slide3.xml><?xml version="1.0" encoding="utf-8"?>
+<file path=ppt/slides/slide2.xml><?xml version="1.0" encoding="utf-8"?>
 <p:sld xmlns:a="http://schemas.openxmlformats.org/drawingml/2006/main" xmlns:p="http://schemas.openxmlformats.org/presentationml/2006/main" xmlns:r="http://schemas.openxmlformats.org/officeDocument/2006/relationships">
   <p:cSld>
     <p:spTree>
@@ -10255,7 +10712,7 @@
                 <a:ea typeface="微软雅黑"/>
                 <a:cs typeface="微软雅黑"/>
               </a:rPr>
-              <a:t>1　选题背景与意义</a:t>
+              <a:t>目录</a:t>
             </a:r>
           </a:p>
         </p:txBody>
@@ -10268,8 +10725,8 @@
         </p:nvSpPr>
         <p:spPr>
           <a:xfrm>
-            <a:off x="11277295" y="6473952"/>
-            <a:ext cx="640080" cy="274320"/>
+            <a:off x="8351215" y="274320"/>
+            <a:ext cx="3383280" cy="457200"/>
           </a:xfrm>
           <a:prstGeom prst="rect">
             <a:avLst/>
@@ -10277,7 +10734,7 @@
           <a:noFill/>
         </p:spPr>
         <p:txBody>
-          <a:bodyPr wrap="square" anchor="t" lIns="0" rIns="0" tIns="0" bIns="0">
+          <a:bodyPr wrap="square" anchor="ctr" lIns="0" rIns="0" tIns="0" bIns="0">
             <a:spAutoFit/>
           </a:bodyPr>
           <a:lstStyle/>
@@ -10294,7 +10751,457 @@
               </a:spcAft>
             </a:pPr>
             <a:r>
-              <a:rPr sz="1000" b="0">
+              <a:rPr sz="1300" b="0">
+                <a:solidFill>
+                  <a:srgbClr val="BDD7EE"/>
+                </a:solidFill>
+                <a:latin typeface="微软雅黑"/>
+                <a:ea typeface="微软雅黑"/>
+                <a:cs typeface="微软雅黑"/>
+              </a:rPr>
+              <a:t>Contents</a:t>
+            </a:r>
+          </a:p>
+        </p:txBody>
+      </p:sp>
+      <p:sp>
+        <p:nvSpPr>
+          <p:cNvPr id="5" name="TextBox 4"/>
+          <p:cNvSpPr txBox="1"/>
+          <p:nvPr/>
+        </p:nvSpPr>
+        <p:spPr>
+          <a:xfrm>
+            <a:off x="11277295" y="6473952"/>
+            <a:ext cx="640080" cy="274320"/>
+          </a:xfrm>
+          <a:prstGeom prst="rect">
+            <a:avLst/>
+          </a:prstGeom>
+          <a:noFill/>
+        </p:spPr>
+        <p:txBody>
+          <a:bodyPr wrap="square" anchor="t" lIns="0" rIns="0" tIns="0" bIns="0">
+            <a:spAutoFit/>
+          </a:bodyPr>
+          <a:lstStyle/>
+          <a:p>
+            <a:pPr algn="r">
+              <a:lnSpc>
+                <a:spcPct val="125000"/>
+              </a:lnSpc>
+              <a:spcBef>
+                <a:spcPts val="0"/>
+              </a:spcBef>
+              <a:spcAft>
+                <a:spcPts val="600"/>
+              </a:spcAft>
+            </a:pPr>
+            <a:r>
+              <a:rPr sz="1000">
+                <a:solidFill>
+                  <a:srgbClr val="808080"/>
+                </a:solidFill>
+                <a:latin typeface="微软雅黑"/>
+                <a:ea typeface="微软雅黑"/>
+                <a:cs typeface="微软雅黑"/>
+              </a:rPr>
+              <a:t>2</a:t>
+            </a:r>
+          </a:p>
+        </p:txBody>
+      </p:sp>
+      <p:sp>
+        <p:nvSpPr>
+          <p:cNvPr id="6" name="TextBox 5"/>
+          <p:cNvSpPr txBox="1"/>
+          <p:nvPr/>
+        </p:nvSpPr>
+        <p:spPr>
+          <a:xfrm>
+            <a:off x="822960" y="1325880"/>
+            <a:ext cx="10515600" cy="4846320"/>
+          </a:xfrm>
+          <a:prstGeom prst="rect">
+            <a:avLst/>
+          </a:prstGeom>
+          <a:noFill/>
+        </p:spPr>
+        <p:txBody>
+          <a:bodyPr wrap="square" anchor="t" lIns="0" rIns="0" tIns="0" bIns="0">
+            <a:spAutoFit/>
+          </a:bodyPr>
+          <a:lstStyle/>
+          <a:p>
+            <a:pPr>
+              <a:lnSpc>
+                <a:spcPct val="115000"/>
+              </a:lnSpc>
+              <a:spcAft>
+                <a:spcPts val="1400"/>
+              </a:spcAft>
+            </a:pPr>
+            <a:r>
+              <a:rPr sz="1900" b="1">
+                <a:solidFill>
+                  <a:srgbClr val="1F4E79"/>
+                </a:solidFill>
+                <a:latin typeface="微软雅黑"/>
+                <a:ea typeface="微软雅黑"/>
+                <a:cs typeface="微软雅黑"/>
+              </a:rPr>
+              <a:t>1　选题背景与意义</a:t>
+            </a:r>
+            <a:r>
+              <a:rPr sz="1400" b="0">
+                <a:solidFill>
+                  <a:srgbClr val="808080"/>
+                </a:solidFill>
+                <a:latin typeface="微软雅黑"/>
+                <a:ea typeface="微软雅黑"/>
+                <a:cs typeface="微软雅黑"/>
+              </a:rPr>
+              <a:t>　——　项目来源、待解决的主要问题</a:t>
+            </a:r>
+          </a:p>
+          <a:p>
+            <a:pPr>
+              <a:lnSpc>
+                <a:spcPct val="115000"/>
+              </a:lnSpc>
+              <a:spcAft>
+                <a:spcPts val="1400"/>
+              </a:spcAft>
+            </a:pPr>
+            <a:r>
+              <a:rPr sz="1900" b="1">
+                <a:solidFill>
+                  <a:srgbClr val="1F4E79"/>
+                </a:solidFill>
+                <a:latin typeface="微软雅黑"/>
+                <a:ea typeface="微软雅黑"/>
+                <a:cs typeface="微软雅黑"/>
+              </a:rPr>
+              <a:t>2　系统总体架构与技术选型</a:t>
+            </a:r>
+            <a:r>
+              <a:rPr sz="1400" b="0">
+                <a:solidFill>
+                  <a:srgbClr val="808080"/>
+                </a:solidFill>
+                <a:latin typeface="微软雅黑"/>
+                <a:ea typeface="微软雅黑"/>
+                <a:cs typeface="微软雅黑"/>
+              </a:rPr>
+              <a:t>　——　B/S 三层架构、双库存储</a:t>
+            </a:r>
+          </a:p>
+          <a:p>
+            <a:pPr>
+              <a:lnSpc>
+                <a:spcPct val="115000"/>
+              </a:lnSpc>
+              <a:spcAft>
+                <a:spcPts val="1400"/>
+              </a:spcAft>
+            </a:pPr>
+            <a:r>
+              <a:rPr sz="1900" b="1">
+                <a:solidFill>
+                  <a:srgbClr val="1F4E79"/>
+                </a:solidFill>
+                <a:latin typeface="微软雅黑"/>
+                <a:ea typeface="微软雅黑"/>
+                <a:cs typeface="微软雅黑"/>
+              </a:rPr>
+              <a:t>3　核心原理：检索增强生成（RAG）</a:t>
+            </a:r>
+            <a:r>
+              <a:rPr sz="1400" b="0">
+                <a:solidFill>
+                  <a:srgbClr val="808080"/>
+                </a:solidFill>
+                <a:latin typeface="微软雅黑"/>
+                <a:ea typeface="微软雅黑"/>
+                <a:cs typeface="微软雅黑"/>
+              </a:rPr>
+              <a:t>　——　离线索引与在线问答两阶段</a:t>
+            </a:r>
+          </a:p>
+          <a:p>
+            <a:pPr>
+              <a:lnSpc>
+                <a:spcPct val="115000"/>
+              </a:lnSpc>
+              <a:spcAft>
+                <a:spcPts val="1400"/>
+              </a:spcAft>
+            </a:pPr>
+            <a:r>
+              <a:rPr sz="1900" b="1">
+                <a:solidFill>
+                  <a:srgbClr val="1F4E79"/>
+                </a:solidFill>
+                <a:latin typeface="微软雅黑"/>
+                <a:ea typeface="微软雅黑"/>
+                <a:cs typeface="微软雅黑"/>
+              </a:rPr>
+              <a:t>4　数据库设计</a:t>
+            </a:r>
+            <a:r>
+              <a:rPr sz="1400" b="0">
+                <a:solidFill>
+                  <a:srgbClr val="808080"/>
+                </a:solidFill>
+                <a:latin typeface="微软雅黑"/>
+                <a:ea typeface="微软雅黑"/>
+                <a:cs typeface="微软雅黑"/>
+              </a:rPr>
+              <a:t>　——　E-R 图、CDM 图、PDM 表结构</a:t>
+            </a:r>
+          </a:p>
+          <a:p>
+            <a:pPr>
+              <a:lnSpc>
+                <a:spcPct val="115000"/>
+              </a:lnSpc>
+              <a:spcAft>
+                <a:spcPts val="1400"/>
+              </a:spcAft>
+            </a:pPr>
+            <a:r>
+              <a:rPr sz="1900" b="1">
+                <a:solidFill>
+                  <a:srgbClr val="1F4E79"/>
+                </a:solidFill>
+                <a:latin typeface="微软雅黑"/>
+                <a:ea typeface="微软雅黑"/>
+                <a:cs typeface="微软雅黑"/>
+              </a:rPr>
+              <a:t>5　功能模块设计与实现</a:t>
+            </a:r>
+            <a:r>
+              <a:rPr sz="1400" b="0">
+                <a:solidFill>
+                  <a:srgbClr val="808080"/>
+                </a:solidFill>
+                <a:latin typeface="微软雅黑"/>
+                <a:ea typeface="微软雅黑"/>
+                <a:cs typeface="微软雅黑"/>
+              </a:rPr>
+              <a:t>　——　F1–F5 五大功能模块</a:t>
+            </a:r>
+          </a:p>
+          <a:p>
+            <a:pPr>
+              <a:lnSpc>
+                <a:spcPct val="115000"/>
+              </a:lnSpc>
+              <a:spcAft>
+                <a:spcPts val="1400"/>
+              </a:spcAft>
+            </a:pPr>
+            <a:r>
+              <a:rPr sz="1900">
+                <a:solidFill>
+                  <a:srgbClr val="1F4E79"/>
+                </a:solidFill>
+                <a:latin typeface="微软雅黑"/>
+                <a:ea typeface="微软雅黑"/>
+                <a:cs typeface="微软雅黑"/>
+              </a:rPr>
+              <a:t>6　系统测试与结果分析　——　</a:t>
+            </a:r>
+            <a:r>
+              <a:rPr sz="1400">
+                <a:solidFill>
+                  <a:srgbClr val="808080"/>
+                </a:solidFill>
+                <a:latin typeface="微软雅黑"/>
+                <a:ea typeface="微软雅黑"/>
+                <a:cs typeface="微软雅黑"/>
+              </a:rPr>
+              <a:t>测试用例、数据与分析结论</a:t>
+            </a:r>
+          </a:p>
+          <a:p>
+            <a:pPr>
+              <a:lnSpc>
+                <a:spcPct val="115000"/>
+              </a:lnSpc>
+              <a:spcAft>
+                <a:spcPts val="1400"/>
+              </a:spcAft>
+            </a:pPr>
+            <a:r>
+              <a:rPr sz="1900" b="1">
+                <a:solidFill>
+                  <a:srgbClr val="1F4E79"/>
+                </a:solidFill>
+                <a:latin typeface="微软雅黑"/>
+                <a:ea typeface="微软雅黑"/>
+                <a:cs typeface="微软雅黑"/>
+              </a:rPr>
+              <a:t>7　总结与展望</a:t>
+            </a:r>
+            <a:r>
+              <a:rPr sz="1400" b="0">
+                <a:solidFill>
+                  <a:srgbClr val="808080"/>
+                </a:solidFill>
+                <a:latin typeface="微软雅黑"/>
+                <a:ea typeface="微软雅黑"/>
+                <a:cs typeface="微软雅黑"/>
+              </a:rPr>
+              <a:t>　——　成果总结、后续改进方向</a:t>
+            </a:r>
+          </a:p>
+        </p:txBody>
+      </p:sp>
+    </p:spTree>
+  </p:cSld>
+  <p:clrMapOvr>
+    <a:masterClrMapping/>
+  </p:clrMapOvr>
+</p:sld>
+</file>
+
+<file path=ppt/slides/slide3.xml><?xml version="1.0" encoding="utf-8"?>
+<p:sld xmlns:a="http://schemas.openxmlformats.org/drawingml/2006/main" xmlns:p="http://schemas.openxmlformats.org/presentationml/2006/main" xmlns:r="http://schemas.openxmlformats.org/officeDocument/2006/relationships">
+  <p:cSld>
+    <p:spTree>
+      <p:nvGrpSpPr>
+        <p:cNvPr id="1" name=""/>
+        <p:cNvGrpSpPr/>
+        <p:nvPr/>
+      </p:nvGrpSpPr>
+      <p:grpSpPr/>
+      <p:sp>
+        <p:nvSpPr>
+          <p:cNvPr id="2" name="Rectangle 1"/>
+          <p:cNvSpPr/>
+          <p:nvPr/>
+        </p:nvSpPr>
+        <p:spPr>
+          <a:xfrm>
+            <a:off x="0" y="0"/>
+            <a:ext cx="12191695" cy="960120"/>
+          </a:xfrm>
+          <a:prstGeom prst="rect">
+            <a:avLst/>
+          </a:prstGeom>
+          <a:solidFill>
+            <a:srgbClr val="1F4E79"/>
+          </a:solidFill>
+          <a:ln>
+            <a:noFill/>
+          </a:ln>
+          <a:effectLst/>
+        </p:spPr>
+        <p:style>
+          <a:lnRef idx="1">
+            <a:schemeClr val="accent1"/>
+          </a:lnRef>
+          <a:fillRef idx="3">
+            <a:schemeClr val="accent1"/>
+          </a:fillRef>
+          <a:effectRef idx="2">
+            <a:schemeClr val="accent1"/>
+          </a:effectRef>
+          <a:fontRef idx="minor">
+            <a:schemeClr val="lt1"/>
+          </a:fontRef>
+        </p:style>
+        <p:txBody>
+          <a:bodyPr rtlCol="0" anchor="ctr"/>
+          <a:lstStyle/>
+          <a:p>
+            <a:pPr algn="ctr"/>
+          </a:p>
+        </p:txBody>
+      </p:sp>
+      <p:sp>
+        <p:nvSpPr>
+          <p:cNvPr id="3" name="TextBox 2"/>
+          <p:cNvSpPr txBox="1"/>
+          <p:nvPr/>
+        </p:nvSpPr>
+        <p:spPr>
+          <a:xfrm>
+            <a:off x="502920" y="182880"/>
+            <a:ext cx="11185855" cy="621792"/>
+          </a:xfrm>
+          <a:prstGeom prst="rect">
+            <a:avLst/>
+          </a:prstGeom>
+          <a:noFill/>
+        </p:spPr>
+        <p:txBody>
+          <a:bodyPr wrap="square" anchor="ctr" lIns="0" rIns="0" tIns="0" bIns="0">
+            <a:spAutoFit/>
+          </a:bodyPr>
+          <a:lstStyle/>
+          <a:p>
+            <a:pPr algn="l">
+              <a:lnSpc>
+                <a:spcPct val="125000"/>
+              </a:lnSpc>
+              <a:spcBef>
+                <a:spcPts val="0"/>
+              </a:spcBef>
+              <a:spcAft>
+                <a:spcPts val="600"/>
+              </a:spcAft>
+            </a:pPr>
+            <a:r>
+              <a:rPr sz="2600" b="1">
+                <a:solidFill>
+                  <a:srgbClr val="FFFFFF"/>
+                </a:solidFill>
+                <a:latin typeface="微软雅黑"/>
+                <a:ea typeface="微软雅黑"/>
+                <a:cs typeface="微软雅黑"/>
+              </a:rPr>
+              <a:t>1　选题背景与意义</a:t>
+            </a:r>
+          </a:p>
+        </p:txBody>
+      </p:sp>
+      <p:sp>
+        <p:nvSpPr>
+          <p:cNvPr id="4" name="TextBox 3"/>
+          <p:cNvSpPr txBox="1"/>
+          <p:nvPr/>
+        </p:nvSpPr>
+        <p:spPr>
+          <a:xfrm>
+            <a:off x="11277295" y="6473952"/>
+            <a:ext cx="640080" cy="274320"/>
+          </a:xfrm>
+          <a:prstGeom prst="rect">
+            <a:avLst/>
+          </a:prstGeom>
+          <a:noFill/>
+        </p:spPr>
+        <p:txBody>
+          <a:bodyPr wrap="square" anchor="t" lIns="0" rIns="0" tIns="0" bIns="0">
+            <a:spAutoFit/>
+          </a:bodyPr>
+          <a:lstStyle/>
+          <a:p>
+            <a:pPr algn="r">
+              <a:lnSpc>
+                <a:spcPct val="125000"/>
+              </a:lnSpc>
+              <a:spcBef>
+                <a:spcPts val="0"/>
+              </a:spcBef>
+              <a:spcAft>
+                <a:spcPts val="600"/>
+              </a:spcAft>
+            </a:pPr>
+            <a:r>
+              <a:rPr sz="1000">
                 <a:solidFill>
                   <a:srgbClr val="808080"/>
                 </a:solidFill>
@@ -10660,7 +11567,7 @@
               </a:spcAft>
             </a:pPr>
             <a:r>
-              <a:rPr sz="1000" b="0">
+              <a:rPr sz="1000">
                 <a:solidFill>
                   <a:srgbClr val="808080"/>
                 </a:solidFill>
@@ -11564,7 +12471,7 @@
               </a:spcAft>
             </a:pPr>
             <a:r>
-              <a:rPr sz="1000" b="0">
+              <a:rPr sz="1000">
                 <a:solidFill>
                   <a:srgbClr val="808080"/>
                 </a:solidFill>
@@ -11838,7 +12745,7 @@
               </a:spcAft>
             </a:pPr>
             <a:r>
-              <a:rPr sz="1000" b="0">
+              <a:rPr sz="1000">
                 <a:solidFill>
                   <a:srgbClr val="808080"/>
                 </a:solidFill>
@@ -12065,7 +12972,7 @@
               </a:spcAft>
             </a:pPr>
             <a:r>
-              <a:rPr sz="1000" b="0">
+              <a:rPr sz="1000">
                 <a:solidFill>
                   <a:srgbClr val="808080"/>
                 </a:solidFill>
@@ -12292,7 +13199,7 @@
               </a:spcAft>
             </a:pPr>
             <a:r>
-              <a:rPr sz="1000" b="0">
+              <a:rPr sz="1000">
                 <a:solidFill>
                   <a:srgbClr val="808080"/>
                 </a:solidFill>
@@ -13363,7 +14270,7 @@
               </a:spcAft>
             </a:pPr>
             <a:r>
-              <a:rPr sz="1000" b="0">
+              <a:rPr sz="1000">
                 <a:solidFill>
                   <a:srgbClr val="808080"/>
                 </a:solidFill>

--- a/defense/智学助手-课程设计答辩.pptx
+++ b/defense/智学助手-课程设计答辩.pptx
@@ -7907,6 +7907,807 @@
         <p:spPr>
           <a:xfrm>
             <a:off x="502920" y="182880"/>
+            <a:ext cx="11155680" cy="621792"/>
+          </a:xfrm>
+          <a:prstGeom prst="rect">
+            <a:avLst/>
+          </a:prstGeom>
+          <a:noFill/>
+        </p:spPr>
+        <p:txBody>
+          <a:bodyPr wrap="square" anchor="ctr" lIns="0" rIns="0" tIns="0" bIns="0">
+            <a:spAutoFit/>
+          </a:bodyPr>
+          <a:lstStyle/>
+          <a:p>
+            <a:pPr algn="l">
+              <a:spcAft>
+                <a:spcPts val="600"/>
+              </a:spcAft>
+            </a:pPr>
+            <a:r>
+              <a:rPr sz="2600">
+                <a:solidFill>
+                  <a:srgbClr val="FFFFFF"/>
+                </a:solidFill>
+                <a:latin typeface="微软雅黑"/>
+                <a:ea typeface="微软雅黑"/>
+                <a:cs typeface="微软雅黑"/>
+              </a:rPr>
+              <a:t>5.4　系统界面展示（需补充截图）</a:t>
+            </a:r>
+          </a:p>
+        </p:txBody>
+      </p:sp>
+      <p:sp>
+        <p:nvSpPr>
+          <p:cNvPr id="4" name="TextBox 3"/>
+          <p:cNvSpPr txBox="1"/>
+          <p:nvPr/>
+        </p:nvSpPr>
+        <p:spPr>
+          <a:xfrm>
+            <a:off x="8321040" y="274320"/>
+            <a:ext cx="3383280" cy="457200"/>
+          </a:xfrm>
+          <a:prstGeom prst="rect">
+            <a:avLst/>
+          </a:prstGeom>
+          <a:noFill/>
+        </p:spPr>
+        <p:txBody>
+          <a:bodyPr wrap="square" anchor="ctr" lIns="0" rIns="0" tIns="0" bIns="0">
+            <a:spAutoFit/>
+          </a:bodyPr>
+          <a:lstStyle/>
+          <a:p>
+            <a:pPr algn="r">
+              <a:spcAft>
+                <a:spcPts val="600"/>
+              </a:spcAft>
+            </a:pPr>
+            <a:r>
+              <a:rPr sz="1300">
+                <a:solidFill>
+                  <a:srgbClr val="BDD7EE"/>
+                </a:solidFill>
+                <a:latin typeface="微软雅黑"/>
+                <a:ea typeface="微软雅黑"/>
+                <a:cs typeface="微软雅黑"/>
+              </a:rPr>
+              <a:t>负责人：【姓名5】</a:t>
+            </a:r>
+          </a:p>
+        </p:txBody>
+      </p:sp>
+      <p:sp>
+        <p:nvSpPr>
+          <p:cNvPr id="5" name="Rectangle 4"/>
+          <p:cNvSpPr/>
+          <p:nvPr/>
+        </p:nvSpPr>
+        <p:spPr>
+          <a:xfrm>
+            <a:off x="548640" y="3566160"/>
+            <a:ext cx="3566160" cy="1417320"/>
+          </a:xfrm>
+          <a:prstGeom prst="rect">
+            <a:avLst/>
+          </a:prstGeom>
+          <a:solidFill>
+            <a:srgbClr val="F2F2F2"/>
+          </a:solidFill>
+          <a:ln w="15240">
+            <a:solidFill>
+              <a:srgbClr val="C00000"/>
+            </a:solidFill>
+            <a:prstDash val="dash"/>
+          </a:ln>
+          <a:effectLst/>
+        </p:spPr>
+        <p:style>
+          <a:lnRef idx="1">
+            <a:schemeClr val="accent1"/>
+          </a:lnRef>
+          <a:fillRef idx="3">
+            <a:schemeClr val="accent1"/>
+          </a:fillRef>
+          <a:effectRef idx="2">
+            <a:schemeClr val="accent1"/>
+          </a:effectRef>
+          <a:fontRef idx="minor">
+            <a:schemeClr val="lt1"/>
+          </a:fontRef>
+        </p:style>
+        <p:txBody>
+          <a:bodyPr rtlCol="0" anchor="ctr" wrap="square"/>
+          <a:lstStyle/>
+          <a:p>
+            <a:pPr algn="ctr"/>
+            <a:r>
+              <a:rPr sz="1300">
+                <a:solidFill>
+                  <a:srgbClr val="C00000"/>
+                </a:solidFill>
+                <a:latin typeface="微软雅黑"/>
+                <a:ea typeface="微软雅黑"/>
+                <a:cs typeface="微软雅黑"/>
+              </a:rPr>
+              <a:t>【截图 1】
+文档管理页</a:t>
+            </a:r>
+          </a:p>
+          <a:p>
+            <a:pPr algn="ctr"/>
+            <a:r>
+              <a:rPr sz="1000">
+                <a:solidFill>
+                  <a:srgbClr val="808080"/>
+                </a:solidFill>
+                <a:latin typeface="微软雅黑"/>
+                <a:ea typeface="微软雅黑"/>
+                <a:cs typeface="微软雅黑"/>
+              </a:rPr>
+              <a:t>已选课程 + 文档列表
+含文件名与切分块数</a:t>
+            </a:r>
+          </a:p>
+        </p:txBody>
+      </p:sp>
+      <p:sp>
+        <p:nvSpPr>
+          <p:cNvPr id="6" name="TextBox 5"/>
+          <p:cNvSpPr txBox="1"/>
+          <p:nvPr/>
+        </p:nvSpPr>
+        <p:spPr>
+          <a:xfrm>
+            <a:off x="548640" y="5038344"/>
+            <a:ext cx="3566160" cy="310896"/>
+          </a:xfrm>
+          <a:prstGeom prst="rect">
+            <a:avLst/>
+          </a:prstGeom>
+          <a:noFill/>
+        </p:spPr>
+        <p:txBody>
+          <a:bodyPr wrap="square" anchor="t" lIns="0" rIns="0" tIns="0" bIns="0">
+            <a:spAutoFit/>
+          </a:bodyPr>
+          <a:lstStyle/>
+          <a:p>
+            <a:pPr algn="ctr">
+              <a:spcAft>
+                <a:spcPts val="600"/>
+              </a:spcAft>
+            </a:pPr>
+            <a:r>
+              <a:rPr sz="1050">
+                <a:solidFill>
+                  <a:srgbClr val="808080"/>
+                </a:solidFill>
+                <a:latin typeface="微软雅黑"/>
+                <a:ea typeface="微软雅黑"/>
+                <a:cs typeface="微软雅黑"/>
+              </a:rPr>
+              <a:t>图 1  文档管理页</a:t>
+            </a:r>
+          </a:p>
+        </p:txBody>
+      </p:sp>
+      <p:sp>
+        <p:nvSpPr>
+          <p:cNvPr id="7" name="Rectangle 6"/>
+          <p:cNvSpPr/>
+          <p:nvPr/>
+        </p:nvSpPr>
+        <p:spPr>
+          <a:xfrm>
+            <a:off x="4206240" y="3566160"/>
+            <a:ext cx="3566160" cy="1417320"/>
+          </a:xfrm>
+          <a:prstGeom prst="rect">
+            <a:avLst/>
+          </a:prstGeom>
+          <a:solidFill>
+            <a:srgbClr val="F2F2F2"/>
+          </a:solidFill>
+          <a:ln w="15240">
+            <a:solidFill>
+              <a:srgbClr val="C00000"/>
+            </a:solidFill>
+            <a:prstDash val="dash"/>
+          </a:ln>
+          <a:effectLst/>
+        </p:spPr>
+        <p:style>
+          <a:lnRef idx="1">
+            <a:schemeClr val="accent1"/>
+          </a:lnRef>
+          <a:fillRef idx="3">
+            <a:schemeClr val="accent1"/>
+          </a:fillRef>
+          <a:effectRef idx="2">
+            <a:schemeClr val="accent1"/>
+          </a:effectRef>
+          <a:fontRef idx="minor">
+            <a:schemeClr val="lt1"/>
+          </a:fontRef>
+        </p:style>
+        <p:txBody>
+          <a:bodyPr rtlCol="0" anchor="ctr" wrap="square"/>
+          <a:lstStyle/>
+          <a:p>
+            <a:pPr algn="ctr"/>
+            <a:r>
+              <a:rPr sz="1300">
+                <a:solidFill>
+                  <a:srgbClr val="C00000"/>
+                </a:solidFill>
+                <a:latin typeface="微软雅黑"/>
+                <a:ea typeface="微软雅黑"/>
+                <a:cs typeface="微软雅黑"/>
+              </a:rPr>
+              <a:t>【截图 2】
+智能问答页</a:t>
+            </a:r>
+          </a:p>
+          <a:p>
+            <a:pPr algn="ctr"/>
+            <a:r>
+              <a:rPr sz="1000">
+                <a:solidFill>
+                  <a:srgbClr val="808080"/>
+                </a:solidFill>
+                <a:latin typeface="微软雅黑"/>
+                <a:ea typeface="微软雅黑"/>
+                <a:cs typeface="微软雅黑"/>
+              </a:rPr>
+              <a:t>提问与 AI 回答
+下方显示引用来源卡片</a:t>
+            </a:r>
+          </a:p>
+        </p:txBody>
+      </p:sp>
+      <p:sp>
+        <p:nvSpPr>
+          <p:cNvPr id="8" name="TextBox 7"/>
+          <p:cNvSpPr txBox="1"/>
+          <p:nvPr/>
+        </p:nvSpPr>
+        <p:spPr>
+          <a:xfrm>
+            <a:off x="4206240" y="5038344"/>
+            <a:ext cx="3566160" cy="310896"/>
+          </a:xfrm>
+          <a:prstGeom prst="rect">
+            <a:avLst/>
+          </a:prstGeom>
+          <a:noFill/>
+        </p:spPr>
+        <p:txBody>
+          <a:bodyPr wrap="square" anchor="t" lIns="0" rIns="0" tIns="0" bIns="0">
+            <a:spAutoFit/>
+          </a:bodyPr>
+          <a:lstStyle/>
+          <a:p>
+            <a:pPr algn="ctr">
+              <a:spcAft>
+                <a:spcPts val="600"/>
+              </a:spcAft>
+            </a:pPr>
+            <a:r>
+              <a:rPr sz="1050">
+                <a:solidFill>
+                  <a:srgbClr val="808080"/>
+                </a:solidFill>
+                <a:latin typeface="微软雅黑"/>
+                <a:ea typeface="微软雅黑"/>
+                <a:cs typeface="微软雅黑"/>
+              </a:rPr>
+              <a:t>图 2  智能问答页</a:t>
+            </a:r>
+          </a:p>
+        </p:txBody>
+      </p:sp>
+      <p:sp>
+        <p:nvSpPr>
+          <p:cNvPr id="9" name="Rectangle 8"/>
+          <p:cNvSpPr/>
+          <p:nvPr/>
+        </p:nvSpPr>
+        <p:spPr>
+          <a:xfrm>
+            <a:off x="7863840" y="3566160"/>
+            <a:ext cx="3566160" cy="1417320"/>
+          </a:xfrm>
+          <a:prstGeom prst="rect">
+            <a:avLst/>
+          </a:prstGeom>
+          <a:solidFill>
+            <a:srgbClr val="F2F2F2"/>
+          </a:solidFill>
+          <a:ln w="15240">
+            <a:solidFill>
+              <a:srgbClr val="C00000"/>
+            </a:solidFill>
+            <a:prstDash val="dash"/>
+          </a:ln>
+          <a:effectLst/>
+        </p:spPr>
+        <p:style>
+          <a:lnRef idx="1">
+            <a:schemeClr val="accent1"/>
+          </a:lnRef>
+          <a:fillRef idx="3">
+            <a:schemeClr val="accent1"/>
+          </a:fillRef>
+          <a:effectRef idx="2">
+            <a:schemeClr val="accent1"/>
+          </a:effectRef>
+          <a:fontRef idx="minor">
+            <a:schemeClr val="lt1"/>
+          </a:fontRef>
+        </p:style>
+        <p:txBody>
+          <a:bodyPr rtlCol="0" anchor="ctr" wrap="square"/>
+          <a:lstStyle/>
+          <a:p>
+            <a:pPr algn="ctr"/>
+            <a:r>
+              <a:rPr sz="1300">
+                <a:solidFill>
+                  <a:srgbClr val="C00000"/>
+                </a:solidFill>
+                <a:latin typeface="微软雅黑"/>
+                <a:ea typeface="微软雅黑"/>
+                <a:cs typeface="微软雅黑"/>
+              </a:rPr>
+              <a:t>【截图 3】
+自动出题页</a:t>
+            </a:r>
+          </a:p>
+          <a:p>
+            <a:pPr algn="ctr"/>
+            <a:r>
+              <a:rPr sz="1000">
+                <a:solidFill>
+                  <a:srgbClr val="808080"/>
+                </a:solidFill>
+                <a:latin typeface="微软雅黑"/>
+                <a:ea typeface="微软雅黑"/>
+                <a:cs typeface="微软雅黑"/>
+              </a:rPr>
+              <a:t>参数表单 + 题目卡片
+含判分结果</a:t>
+            </a:r>
+          </a:p>
+        </p:txBody>
+      </p:sp>
+      <p:sp>
+        <p:nvSpPr>
+          <p:cNvPr id="10" name="TextBox 9"/>
+          <p:cNvSpPr txBox="1"/>
+          <p:nvPr/>
+        </p:nvSpPr>
+        <p:spPr>
+          <a:xfrm>
+            <a:off x="7863840" y="5038344"/>
+            <a:ext cx="3566160" cy="310896"/>
+          </a:xfrm>
+          <a:prstGeom prst="rect">
+            <a:avLst/>
+          </a:prstGeom>
+          <a:noFill/>
+        </p:spPr>
+        <p:txBody>
+          <a:bodyPr wrap="square" anchor="t" lIns="0" rIns="0" tIns="0" bIns="0">
+            <a:spAutoFit/>
+          </a:bodyPr>
+          <a:lstStyle/>
+          <a:p>
+            <a:pPr algn="ctr">
+              <a:spcAft>
+                <a:spcPts val="600"/>
+              </a:spcAft>
+            </a:pPr>
+            <a:r>
+              <a:rPr sz="1050">
+                <a:solidFill>
+                  <a:srgbClr val="808080"/>
+                </a:solidFill>
+                <a:latin typeface="微软雅黑"/>
+                <a:ea typeface="微软雅黑"/>
+                <a:cs typeface="微软雅黑"/>
+              </a:rPr>
+              <a:t>图 3  自动出题页</a:t>
+            </a:r>
+          </a:p>
+        </p:txBody>
+      </p:sp>
+      <p:sp>
+        <p:nvSpPr>
+          <p:cNvPr id="11" name="Rectangle 10"/>
+          <p:cNvSpPr/>
+          <p:nvPr/>
+        </p:nvSpPr>
+        <p:spPr>
+          <a:xfrm>
+            <a:off x="1417320" y="1828800"/>
+            <a:ext cx="3566160" cy="1417320"/>
+          </a:xfrm>
+          <a:prstGeom prst="rect">
+            <a:avLst/>
+          </a:prstGeom>
+          <a:solidFill>
+            <a:srgbClr val="F2F2F2"/>
+          </a:solidFill>
+          <a:ln w="15240">
+            <a:solidFill>
+              <a:srgbClr val="C00000"/>
+            </a:solidFill>
+            <a:prstDash val="dash"/>
+          </a:ln>
+          <a:effectLst/>
+        </p:spPr>
+        <p:style>
+          <a:lnRef idx="1">
+            <a:schemeClr val="accent1"/>
+          </a:lnRef>
+          <a:fillRef idx="3">
+            <a:schemeClr val="accent1"/>
+          </a:fillRef>
+          <a:effectRef idx="2">
+            <a:schemeClr val="accent1"/>
+          </a:effectRef>
+          <a:fontRef idx="minor">
+            <a:schemeClr val="lt1"/>
+          </a:fontRef>
+        </p:style>
+        <p:txBody>
+          <a:bodyPr rtlCol="0" anchor="ctr" wrap="square"/>
+          <a:lstStyle/>
+          <a:p>
+            <a:pPr algn="ctr"/>
+            <a:r>
+              <a:rPr sz="1300">
+                <a:solidFill>
+                  <a:srgbClr val="C00000"/>
+                </a:solidFill>
+                <a:latin typeface="微软雅黑"/>
+                <a:ea typeface="微软雅黑"/>
+                <a:cs typeface="微软雅黑"/>
+              </a:rPr>
+              <a:t>【截图 4】
+错题本页</a:t>
+            </a:r>
+          </a:p>
+          <a:p>
+            <a:pPr algn="ctr"/>
+            <a:r>
+              <a:rPr sz="1000">
+                <a:solidFill>
+                  <a:srgbClr val="808080"/>
+                </a:solidFill>
+                <a:latin typeface="微软雅黑"/>
+                <a:ea typeface="微软雅黑"/>
+                <a:cs typeface="微软雅黑"/>
+              </a:rPr>
+              <a:t>错题卡片
+用户答案与正确答案对比</a:t>
+            </a:r>
+          </a:p>
+        </p:txBody>
+      </p:sp>
+      <p:sp>
+        <p:nvSpPr>
+          <p:cNvPr id="12" name="TextBox 11"/>
+          <p:cNvSpPr txBox="1"/>
+          <p:nvPr/>
+        </p:nvSpPr>
+        <p:spPr>
+          <a:xfrm>
+            <a:off x="1417320" y="3300984"/>
+            <a:ext cx="3566160" cy="310896"/>
+          </a:xfrm>
+          <a:prstGeom prst="rect">
+            <a:avLst/>
+          </a:prstGeom>
+          <a:noFill/>
+        </p:spPr>
+        <p:txBody>
+          <a:bodyPr wrap="square" anchor="t" lIns="0" rIns="0" tIns="0" bIns="0">
+            <a:spAutoFit/>
+          </a:bodyPr>
+          <a:lstStyle/>
+          <a:p>
+            <a:pPr algn="ctr">
+              <a:spcAft>
+                <a:spcPts val="600"/>
+              </a:spcAft>
+            </a:pPr>
+            <a:r>
+              <a:rPr sz="1050">
+                <a:solidFill>
+                  <a:srgbClr val="808080"/>
+                </a:solidFill>
+                <a:latin typeface="微软雅黑"/>
+                <a:ea typeface="微软雅黑"/>
+                <a:cs typeface="微软雅黑"/>
+              </a:rPr>
+              <a:t>图 4  错题本页</a:t>
+            </a:r>
+          </a:p>
+        </p:txBody>
+      </p:sp>
+      <p:sp>
+        <p:nvSpPr>
+          <p:cNvPr id="13" name="Rectangle 12"/>
+          <p:cNvSpPr/>
+          <p:nvPr/>
+        </p:nvSpPr>
+        <p:spPr>
+          <a:xfrm>
+            <a:off x="5074920" y="1828800"/>
+            <a:ext cx="3566160" cy="1417320"/>
+          </a:xfrm>
+          <a:prstGeom prst="rect">
+            <a:avLst/>
+          </a:prstGeom>
+          <a:solidFill>
+            <a:srgbClr val="F2F2F2"/>
+          </a:solidFill>
+          <a:ln w="15240">
+            <a:solidFill>
+              <a:srgbClr val="C00000"/>
+            </a:solidFill>
+            <a:prstDash val="dash"/>
+          </a:ln>
+          <a:effectLst/>
+        </p:spPr>
+        <p:style>
+          <a:lnRef idx="1">
+            <a:schemeClr val="accent1"/>
+          </a:lnRef>
+          <a:fillRef idx="3">
+            <a:schemeClr val="accent1"/>
+          </a:fillRef>
+          <a:effectRef idx="2">
+            <a:schemeClr val="accent1"/>
+          </a:effectRef>
+          <a:fontRef idx="minor">
+            <a:schemeClr val="lt1"/>
+          </a:fontRef>
+        </p:style>
+        <p:txBody>
+          <a:bodyPr rtlCol="0" anchor="ctr" wrap="square"/>
+          <a:lstStyle/>
+          <a:p>
+            <a:pPr algn="ctr"/>
+            <a:r>
+              <a:rPr sz="1300">
+                <a:solidFill>
+                  <a:srgbClr val="C00000"/>
+                </a:solidFill>
+                <a:latin typeface="微软雅黑"/>
+                <a:ea typeface="微软雅黑"/>
+                <a:cs typeface="微软雅黑"/>
+              </a:rPr>
+              <a:t>【截图 5】
+复习计划页</a:t>
+            </a:r>
+          </a:p>
+          <a:p>
+            <a:pPr algn="ctr"/>
+            <a:r>
+              <a:rPr sz="1000">
+                <a:solidFill>
+                  <a:srgbClr val="808080"/>
+                </a:solidFill>
+                <a:latin typeface="微软雅黑"/>
+                <a:ea typeface="微软雅黑"/>
+                <a:cs typeface="微软雅黑"/>
+              </a:rPr>
+              <a:t>按日期分组的复习条目
+含完成勾选</a:t>
+            </a:r>
+          </a:p>
+        </p:txBody>
+      </p:sp>
+      <p:sp>
+        <p:nvSpPr>
+          <p:cNvPr id="14" name="TextBox 13"/>
+          <p:cNvSpPr txBox="1"/>
+          <p:nvPr/>
+        </p:nvSpPr>
+        <p:spPr>
+          <a:xfrm>
+            <a:off x="5074920" y="3300984"/>
+            <a:ext cx="3566160" cy="310896"/>
+          </a:xfrm>
+          <a:prstGeom prst="rect">
+            <a:avLst/>
+          </a:prstGeom>
+          <a:noFill/>
+        </p:spPr>
+        <p:txBody>
+          <a:bodyPr wrap="square" anchor="t" lIns="0" rIns="0" tIns="0" bIns="0">
+            <a:spAutoFit/>
+          </a:bodyPr>
+          <a:lstStyle/>
+          <a:p>
+            <a:pPr algn="ctr">
+              <a:spcAft>
+                <a:spcPts val="600"/>
+              </a:spcAft>
+            </a:pPr>
+            <a:r>
+              <a:rPr sz="1050">
+                <a:solidFill>
+                  <a:srgbClr val="808080"/>
+                </a:solidFill>
+                <a:latin typeface="微软雅黑"/>
+                <a:ea typeface="微软雅黑"/>
+                <a:cs typeface="微软雅黑"/>
+              </a:rPr>
+              <a:t>图 5  复习计划页</a:t>
+            </a:r>
+          </a:p>
+        </p:txBody>
+      </p:sp>
+      <p:sp>
+        <p:nvSpPr>
+          <p:cNvPr id="15" name="TextBox 14"/>
+          <p:cNvSpPr txBox="1"/>
+          <p:nvPr/>
+        </p:nvSpPr>
+        <p:spPr>
+          <a:xfrm>
+            <a:off x="548640" y="6053328"/>
+            <a:ext cx="11091672" cy="640080"/>
+          </a:xfrm>
+          <a:prstGeom prst="rect">
+            <a:avLst/>
+          </a:prstGeom>
+          <a:noFill/>
+        </p:spPr>
+        <p:txBody>
+          <a:bodyPr wrap="square" anchor="t" lIns="0" rIns="0" tIns="0" bIns="0">
+            <a:spAutoFit/>
+          </a:bodyPr>
+          <a:lstStyle/>
+          <a:p>
+            <a:pPr algn="ctr">
+              <a:spcAft>
+                <a:spcPts val="600"/>
+              </a:spcAft>
+            </a:pPr>
+            <a:r>
+              <a:rPr sz="1200">
+                <a:solidFill>
+                  <a:srgbClr val="C00000"/>
+                </a:solidFill>
+                <a:latin typeface="微软雅黑"/>
+                <a:ea typeface="微软雅黑"/>
+                <a:cs typeface="微软雅黑"/>
+              </a:rPr>
+              <a:t>说明：本页五张截图需在系统实际运行后补充；截图要求与报告第三节“11．实现的界面”一致。</a:t>
+            </a:r>
+          </a:p>
+        </p:txBody>
+      </p:sp>
+      <p:sp>
+        <p:nvSpPr>
+          <p:cNvPr id="16" name="TextBox 15"/>
+          <p:cNvSpPr txBox="1"/>
+          <p:nvPr/>
+        </p:nvSpPr>
+        <p:spPr>
+          <a:xfrm>
+            <a:off x="11247120" y="6473952"/>
+            <a:ext cx="640080" cy="274320"/>
+          </a:xfrm>
+          <a:prstGeom prst="rect">
+            <a:avLst/>
+          </a:prstGeom>
+          <a:noFill/>
+        </p:spPr>
+        <p:txBody>
+          <a:bodyPr wrap="square" anchor="t" lIns="0" rIns="0" tIns="0" bIns="0">
+            <a:spAutoFit/>
+          </a:bodyPr>
+          <a:lstStyle/>
+          <a:p>
+            <a:pPr algn="r">
+              <a:spcAft>
+                <a:spcPts val="600"/>
+              </a:spcAft>
+            </a:pPr>
+            <a:r>
+              <a:rPr sz="1000">
+                <a:solidFill>
+                  <a:srgbClr val="808080"/>
+                </a:solidFill>
+                <a:latin typeface="微软雅黑"/>
+                <a:ea typeface="微软雅黑"/>
+                <a:cs typeface="微软雅黑"/>
+              </a:rPr>
+              <a:t>13</a:t>
+            </a:r>
+          </a:p>
+        </p:txBody>
+      </p:sp>
+    </p:spTree>
+  </p:cSld>
+  <p:clrMapOvr>
+    <a:masterClrMapping/>
+  </p:clrMapOvr>
+</p:sld>
+</file>
+
+<file path=ppt/slides/slide14.xml><?xml version="1.0" encoding="utf-8"?>
+<p:sld xmlns:a="http://schemas.openxmlformats.org/drawingml/2006/main" xmlns:p="http://schemas.openxmlformats.org/presentationml/2006/main" xmlns:r="http://schemas.openxmlformats.org/officeDocument/2006/relationships">
+  <p:cSld>
+    <p:spTree>
+      <p:nvGrpSpPr>
+        <p:cNvPr id="1" name=""/>
+        <p:cNvGrpSpPr/>
+        <p:nvPr/>
+      </p:nvGrpSpPr>
+      <p:grpSpPr/>
+      <p:sp>
+        <p:nvSpPr>
+          <p:cNvPr id="2" name="Rectangle 1"/>
+          <p:cNvSpPr/>
+          <p:nvPr/>
+        </p:nvSpPr>
+        <p:spPr>
+          <a:xfrm>
+            <a:off x="0" y="0"/>
+            <a:ext cx="12191695" cy="960120"/>
+          </a:xfrm>
+          <a:prstGeom prst="rect">
+            <a:avLst/>
+          </a:prstGeom>
+          <a:solidFill>
+            <a:srgbClr val="1F4E79"/>
+          </a:solidFill>
+          <a:ln>
+            <a:noFill/>
+          </a:ln>
+          <a:effectLst/>
+        </p:spPr>
+        <p:style>
+          <a:lnRef idx="1">
+            <a:schemeClr val="accent1"/>
+          </a:lnRef>
+          <a:fillRef idx="3">
+            <a:schemeClr val="accent1"/>
+          </a:fillRef>
+          <a:effectRef idx="2">
+            <a:schemeClr val="accent1"/>
+          </a:effectRef>
+          <a:fontRef idx="minor">
+            <a:schemeClr val="lt1"/>
+          </a:fontRef>
+        </p:style>
+        <p:txBody>
+          <a:bodyPr rtlCol="0" anchor="ctr"/>
+          <a:lstStyle/>
+          <a:p>
+            <a:pPr algn="ctr"/>
+          </a:p>
+        </p:txBody>
+      </p:sp>
+      <p:sp>
+        <p:nvSpPr>
+          <p:cNvPr id="3" name="TextBox 2"/>
+          <p:cNvSpPr txBox="1"/>
+          <p:nvPr/>
+        </p:nvSpPr>
+        <p:spPr>
+          <a:xfrm>
+            <a:off x="502920" y="182880"/>
             <a:ext cx="11185855" cy="621792"/>
           </a:xfrm>
           <a:prstGeom prst="rect">
@@ -8305,7 +9106,7 @@
 </p:sld>
 </file>
 
-<file path=ppt/slides/slide14.xml><?xml version="1.0" encoding="utf-8"?>
+<file path=ppt/slides/slide15.xml><?xml version="1.0" encoding="utf-8"?>
 <p:sld xmlns:a="http://schemas.openxmlformats.org/drawingml/2006/main" xmlns:p="http://schemas.openxmlformats.org/presentationml/2006/main" xmlns:r="http://schemas.openxmlformats.org/officeDocument/2006/relationships">
   <p:cSld>
     <p:spTree>
@@ -8745,7 +9546,7 @@
 </p:sld>
 </file>
 
-<file path=ppt/slides/slide15.xml><?xml version="1.0" encoding="utf-8"?>
+<file path=ppt/slides/slide16.xml><?xml version="1.0" encoding="utf-8"?>
 <p:sld xmlns:a="http://schemas.openxmlformats.org/drawingml/2006/main" xmlns:p="http://schemas.openxmlformats.org/presentationml/2006/main" xmlns:r="http://schemas.openxmlformats.org/officeDocument/2006/relationships">
   <p:cSld>
     <p:spTree>
@@ -9588,7 +10389,7 @@
 </p:sld>
 </file>
 
-<file path=ppt/slides/slide16.xml><?xml version="1.0" encoding="utf-8"?>
+<file path=ppt/slides/slide17.xml><?xml version="1.0" encoding="utf-8"?>
 <p:sld xmlns:a="http://schemas.openxmlformats.org/drawingml/2006/main" xmlns:p="http://schemas.openxmlformats.org/presentationml/2006/main" xmlns:r="http://schemas.openxmlformats.org/officeDocument/2006/relationships">
   <p:cSld>
     <p:spTree>
@@ -9815,7 +10616,7 @@
 </p:sld>
 </file>
 
-<file path=ppt/slides/slide17.xml><?xml version="1.0" encoding="utf-8"?>
+<file path=ppt/slides/slide2.xml><?xml version="1.0" encoding="utf-8"?>
 <p:sld xmlns:a="http://schemas.openxmlformats.org/drawingml/2006/main" xmlns:p="http://schemas.openxmlformats.org/presentationml/2006/main" xmlns:r="http://schemas.openxmlformats.org/officeDocument/2006/relationships">
   <p:cSld>
     <p:spTree>
@@ -9878,7 +10679,7 @@
         <p:spPr>
           <a:xfrm>
             <a:off x="502920" y="182880"/>
-            <a:ext cx="11155680" cy="621792"/>
+            <a:ext cx="11185855" cy="621792"/>
           </a:xfrm>
           <a:prstGeom prst="rect">
             <a:avLst/>
@@ -9892,12 +10693,18 @@
           <a:lstStyle/>
           <a:p>
             <a:pPr algn="l">
+              <a:lnSpc>
+                <a:spcPct val="125000"/>
+              </a:lnSpc>
+              <a:spcBef>
+                <a:spcPts val="0"/>
+              </a:spcBef>
               <a:spcAft>
                 <a:spcPts val="600"/>
               </a:spcAft>
             </a:pPr>
             <a:r>
-              <a:rPr sz="2600">
+              <a:rPr sz="2600" b="1">
                 <a:solidFill>
                   <a:srgbClr val="FFFFFF"/>
                 </a:solidFill>
@@ -9905,7 +10712,7 @@
                 <a:ea typeface="微软雅黑"/>
                 <a:cs typeface="微软雅黑"/>
               </a:rPr>
-              <a:t>5.4　系统界面展示（需补充截图）</a:t>
+              <a:t>目录</a:t>
             </a:r>
           </a:p>
         </p:txBody>
@@ -9918,7 +10725,7 @@
         </p:nvSpPr>
         <p:spPr>
           <a:xfrm>
-            <a:off x="8321040" y="274320"/>
+            <a:off x="8351215" y="274320"/>
             <a:ext cx="3383280" cy="457200"/>
           </a:xfrm>
           <a:prstGeom prst="rect">
@@ -9933,12 +10740,18 @@
           <a:lstStyle/>
           <a:p>
             <a:pPr algn="r">
+              <a:lnSpc>
+                <a:spcPct val="125000"/>
+              </a:lnSpc>
+              <a:spcBef>
+                <a:spcPts val="0"/>
+              </a:spcBef>
               <a:spcAft>
                 <a:spcPts val="600"/>
               </a:spcAft>
             </a:pPr>
             <a:r>
-              <a:rPr sz="1300">
+              <a:rPr sz="1300" b="0">
                 <a:solidFill>
                   <a:srgbClr val="BDD7EE"/>
                 </a:solidFill>
@@ -9946,70 +10759,44 @@
                 <a:ea typeface="微软雅黑"/>
                 <a:cs typeface="微软雅黑"/>
               </a:rPr>
-              <a:t>负责人：【姓名5】</a:t>
-            </a:r>
-          </a:p>
-        </p:txBody>
-      </p:sp>
-      <p:sp>
-        <p:nvSpPr>
-          <p:cNvPr id="5" name="Rectangle 4"/>
-          <p:cNvSpPr/>
+              <a:t>Contents</a:t>
+            </a:r>
+          </a:p>
+        </p:txBody>
+      </p:sp>
+      <p:sp>
+        <p:nvSpPr>
+          <p:cNvPr id="5" name="TextBox 4"/>
+          <p:cNvSpPr txBox="1"/>
           <p:nvPr/>
         </p:nvSpPr>
         <p:spPr>
           <a:xfrm>
-            <a:off x="548640" y="3566160"/>
-            <a:ext cx="3566160" cy="1417320"/>
+            <a:off x="11277295" y="6473952"/>
+            <a:ext cx="640080" cy="274320"/>
           </a:xfrm>
           <a:prstGeom prst="rect">
             <a:avLst/>
           </a:prstGeom>
-          <a:solidFill>
-            <a:srgbClr val="F2F2F2"/>
-          </a:solidFill>
-          <a:ln w="15240">
-            <a:solidFill>
-              <a:srgbClr val="C00000"/>
-            </a:solidFill>
-            <a:prstDash val="dash"/>
-          </a:ln>
-          <a:effectLst/>
+          <a:noFill/>
         </p:spPr>
-        <p:style>
-          <a:lnRef idx="1">
-            <a:schemeClr val="accent1"/>
-          </a:lnRef>
-          <a:fillRef idx="3">
-            <a:schemeClr val="accent1"/>
-          </a:fillRef>
-          <a:effectRef idx="2">
-            <a:schemeClr val="accent1"/>
-          </a:effectRef>
-          <a:fontRef idx="minor">
-            <a:schemeClr val="lt1"/>
-          </a:fontRef>
-        </p:style>
-        <p:txBody>
-          <a:bodyPr rtlCol="0" anchor="ctr" wrap="square"/>
-          <a:lstStyle/>
-          <a:p>
-            <a:pPr algn="ctr"/>
-            <a:r>
-              <a:rPr sz="1300">
-                <a:solidFill>
-                  <a:srgbClr val="C00000"/>
-                </a:solidFill>
-                <a:latin typeface="微软雅黑"/>
-                <a:ea typeface="微软雅黑"/>
-                <a:cs typeface="微软雅黑"/>
-              </a:rPr>
-              <a:t>【截图 1】
-文档管理页</a:t>
-            </a:r>
-          </a:p>
-          <a:p>
-            <a:pPr algn="ctr"/>
+        <p:txBody>
+          <a:bodyPr wrap="square" anchor="t" lIns="0" rIns="0" tIns="0" bIns="0">
+            <a:spAutoFit/>
+          </a:bodyPr>
+          <a:lstStyle/>
+          <a:p>
+            <a:pPr algn="r">
+              <a:lnSpc>
+                <a:spcPct val="125000"/>
+              </a:lnSpc>
+              <a:spcBef>
+                <a:spcPts val="0"/>
+              </a:spcBef>
+              <a:spcAft>
+                <a:spcPts val="600"/>
+              </a:spcAft>
+            </a:pPr>
             <a:r>
               <a:rPr sz="1000">
                 <a:solidFill>
@@ -10019,8 +10806,7 @@
                 <a:ea typeface="微软雅黑"/>
                 <a:cs typeface="微软雅黑"/>
               </a:rPr>
-              <a:t>已选课程 + 文档列表
-含文件名与切分块数</a:t>
+              <a:t>2</a:t>
             </a:r>
           </a:p>
         </p:txBody>
@@ -10033,8 +10819,8 @@
         </p:nvSpPr>
         <p:spPr>
           <a:xfrm>
-            <a:off x="548640" y="5038344"/>
-            <a:ext cx="3566160" cy="310896"/>
+            <a:off x="822960" y="1325880"/>
+            <a:ext cx="10515600" cy="4846320"/>
           </a:xfrm>
           <a:prstGeom prst="rect">
             <a:avLst/>
@@ -10047,13 +10833,27 @@
           </a:bodyPr>
           <a:lstStyle/>
           <a:p>
-            <a:pPr algn="ctr">
+            <a:pPr>
+              <a:lnSpc>
+                <a:spcPct val="115000"/>
+              </a:lnSpc>
               <a:spcAft>
-                <a:spcPts val="600"/>
+                <a:spcPts val="1400"/>
               </a:spcAft>
             </a:pPr>
             <a:r>
-              <a:rPr sz="1050">
+              <a:rPr sz="1900" b="1">
+                <a:solidFill>
+                  <a:srgbClr val="1F4E79"/>
+                </a:solidFill>
+                <a:latin typeface="微软雅黑"/>
+                <a:ea typeface="微软雅黑"/>
+                <a:cs typeface="微软雅黑"/>
+              </a:rPr>
+              <a:t>1　选题背景与意义</a:t>
+            </a:r>
+            <a:r>
+              <a:rPr sz="1400" b="0">
                 <a:solidFill>
                   <a:srgbClr val="808080"/>
                 </a:solidFill>
@@ -10061,72 +10861,31 @@
                 <a:ea typeface="微软雅黑"/>
                 <a:cs typeface="微软雅黑"/>
               </a:rPr>
-              <a:t>图 1  文档管理页</a:t>
-            </a:r>
-          </a:p>
-        </p:txBody>
-      </p:sp>
-      <p:sp>
-        <p:nvSpPr>
-          <p:cNvPr id="7" name="Rectangle 6"/>
-          <p:cNvSpPr/>
-          <p:nvPr/>
-        </p:nvSpPr>
-        <p:spPr>
-          <a:xfrm>
-            <a:off x="4206240" y="3566160"/>
-            <a:ext cx="3566160" cy="1417320"/>
-          </a:xfrm>
-          <a:prstGeom prst="rect">
-            <a:avLst/>
-          </a:prstGeom>
-          <a:solidFill>
-            <a:srgbClr val="F2F2F2"/>
-          </a:solidFill>
-          <a:ln w="15240">
-            <a:solidFill>
-              <a:srgbClr val="C00000"/>
-            </a:solidFill>
-            <a:prstDash val="dash"/>
-          </a:ln>
-          <a:effectLst/>
-        </p:spPr>
-        <p:style>
-          <a:lnRef idx="1">
-            <a:schemeClr val="accent1"/>
-          </a:lnRef>
-          <a:fillRef idx="3">
-            <a:schemeClr val="accent1"/>
-          </a:fillRef>
-          <a:effectRef idx="2">
-            <a:schemeClr val="accent1"/>
-          </a:effectRef>
-          <a:fontRef idx="minor">
-            <a:schemeClr val="lt1"/>
-          </a:fontRef>
-        </p:style>
-        <p:txBody>
-          <a:bodyPr rtlCol="0" anchor="ctr" wrap="square"/>
-          <a:lstStyle/>
-          <a:p>
-            <a:pPr algn="ctr"/>
-            <a:r>
-              <a:rPr sz="1300">
+              <a:t>　——　项目来源、待解决的主要问题</a:t>
+            </a:r>
+          </a:p>
+          <a:p>
+            <a:pPr>
+              <a:lnSpc>
+                <a:spcPct val="115000"/>
+              </a:lnSpc>
+              <a:spcAft>
+                <a:spcPts val="1400"/>
+              </a:spcAft>
+            </a:pPr>
+            <a:r>
+              <a:rPr sz="1900" b="1">
                 <a:solidFill>
-                  <a:srgbClr val="C00000"/>
+                  <a:srgbClr val="1F4E79"/>
                 </a:solidFill>
                 <a:latin typeface="微软雅黑"/>
                 <a:ea typeface="微软雅黑"/>
                 <a:cs typeface="微软雅黑"/>
               </a:rPr>
-              <a:t>【截图 2】
-智能问答页</a:t>
-            </a:r>
-          </a:p>
-          <a:p>
-            <a:pPr algn="ctr"/>
-            <a:r>
-              <a:rPr sz="1000">
+              <a:t>2　系统总体架构与技术选型</a:t>
+            </a:r>
+            <a:r>
+              <a:rPr sz="1400" b="0">
                 <a:solidFill>
                   <a:srgbClr val="808080"/>
                 </a:solidFill>
@@ -10134,41 +10893,31 @@
                 <a:ea typeface="微软雅黑"/>
                 <a:cs typeface="微软雅黑"/>
               </a:rPr>
-              <a:t>提问与 AI 回答
-下方显示引用来源卡片</a:t>
-            </a:r>
-          </a:p>
-        </p:txBody>
-      </p:sp>
-      <p:sp>
-        <p:nvSpPr>
-          <p:cNvPr id="8" name="TextBox 7"/>
-          <p:cNvSpPr txBox="1"/>
-          <p:nvPr/>
-        </p:nvSpPr>
-        <p:spPr>
-          <a:xfrm>
-            <a:off x="4206240" y="5038344"/>
-            <a:ext cx="3566160" cy="310896"/>
-          </a:xfrm>
-          <a:prstGeom prst="rect">
-            <a:avLst/>
-          </a:prstGeom>
-          <a:noFill/>
-        </p:spPr>
-        <p:txBody>
-          <a:bodyPr wrap="square" anchor="t" lIns="0" rIns="0" tIns="0" bIns="0">
-            <a:spAutoFit/>
-          </a:bodyPr>
-          <a:lstStyle/>
-          <a:p>
-            <a:pPr algn="ctr">
+              <a:t>　——　B/S 三层架构、双库存储</a:t>
+            </a:r>
+          </a:p>
+          <a:p>
+            <a:pPr>
+              <a:lnSpc>
+                <a:spcPct val="115000"/>
+              </a:lnSpc>
               <a:spcAft>
-                <a:spcPts val="600"/>
+                <a:spcPts val="1400"/>
               </a:spcAft>
             </a:pPr>
             <a:r>
-              <a:rPr sz="1050">
+              <a:rPr sz="1900" b="1">
+                <a:solidFill>
+                  <a:srgbClr val="1F4E79"/>
+                </a:solidFill>
+                <a:latin typeface="微软雅黑"/>
+                <a:ea typeface="微软雅黑"/>
+                <a:cs typeface="微软雅黑"/>
+              </a:rPr>
+              <a:t>3　核心原理：检索增强生成（RAG）</a:t>
+            </a:r>
+            <a:r>
+              <a:rPr sz="1400" b="0">
                 <a:solidFill>
                   <a:srgbClr val="808080"/>
                 </a:solidFill>
@@ -10176,72 +10925,31 @@
                 <a:ea typeface="微软雅黑"/>
                 <a:cs typeface="微软雅黑"/>
               </a:rPr>
-              <a:t>图 2  智能问答页</a:t>
-            </a:r>
-          </a:p>
-        </p:txBody>
-      </p:sp>
-      <p:sp>
-        <p:nvSpPr>
-          <p:cNvPr id="9" name="Rectangle 8"/>
-          <p:cNvSpPr/>
-          <p:nvPr/>
-        </p:nvSpPr>
-        <p:spPr>
-          <a:xfrm>
-            <a:off x="7863840" y="3566160"/>
-            <a:ext cx="3566160" cy="1417320"/>
-          </a:xfrm>
-          <a:prstGeom prst="rect">
-            <a:avLst/>
-          </a:prstGeom>
-          <a:solidFill>
-            <a:srgbClr val="F2F2F2"/>
-          </a:solidFill>
-          <a:ln w="15240">
-            <a:solidFill>
-              <a:srgbClr val="C00000"/>
-            </a:solidFill>
-            <a:prstDash val="dash"/>
-          </a:ln>
-          <a:effectLst/>
-        </p:spPr>
-        <p:style>
-          <a:lnRef idx="1">
-            <a:schemeClr val="accent1"/>
-          </a:lnRef>
-          <a:fillRef idx="3">
-            <a:schemeClr val="accent1"/>
-          </a:fillRef>
-          <a:effectRef idx="2">
-            <a:schemeClr val="accent1"/>
-          </a:effectRef>
-          <a:fontRef idx="minor">
-            <a:schemeClr val="lt1"/>
-          </a:fontRef>
-        </p:style>
-        <p:txBody>
-          <a:bodyPr rtlCol="0" anchor="ctr" wrap="square"/>
-          <a:lstStyle/>
-          <a:p>
-            <a:pPr algn="ctr"/>
-            <a:r>
-              <a:rPr sz="1300">
+              <a:t>　——　离线索引与在线问答两阶段</a:t>
+            </a:r>
+          </a:p>
+          <a:p>
+            <a:pPr>
+              <a:lnSpc>
+                <a:spcPct val="115000"/>
+              </a:lnSpc>
+              <a:spcAft>
+                <a:spcPts val="1400"/>
+              </a:spcAft>
+            </a:pPr>
+            <a:r>
+              <a:rPr sz="1900" b="1">
                 <a:solidFill>
-                  <a:srgbClr val="C00000"/>
+                  <a:srgbClr val="1F4E79"/>
                 </a:solidFill>
                 <a:latin typeface="微软雅黑"/>
                 <a:ea typeface="微软雅黑"/>
                 <a:cs typeface="微软雅黑"/>
               </a:rPr>
-              <a:t>【截图 3】
-自动出题页</a:t>
-            </a:r>
-          </a:p>
-          <a:p>
-            <a:pPr algn="ctr"/>
-            <a:r>
-              <a:rPr sz="1000">
+              <a:t>4　数据库设计</a:t>
+            </a:r>
+            <a:r>
+              <a:rPr sz="1400" b="0">
                 <a:solidFill>
                   <a:srgbClr val="808080"/>
                 </a:solidFill>
@@ -10249,41 +10957,31 @@
                 <a:ea typeface="微软雅黑"/>
                 <a:cs typeface="微软雅黑"/>
               </a:rPr>
-              <a:t>参数表单 + 题目卡片
-含判分结果</a:t>
-            </a:r>
-          </a:p>
-        </p:txBody>
-      </p:sp>
-      <p:sp>
-        <p:nvSpPr>
-          <p:cNvPr id="10" name="TextBox 9"/>
-          <p:cNvSpPr txBox="1"/>
-          <p:nvPr/>
-        </p:nvSpPr>
-        <p:spPr>
-          <a:xfrm>
-            <a:off x="7863840" y="5038344"/>
-            <a:ext cx="3566160" cy="310896"/>
-          </a:xfrm>
-          <a:prstGeom prst="rect">
-            <a:avLst/>
-          </a:prstGeom>
-          <a:noFill/>
-        </p:spPr>
-        <p:txBody>
-          <a:bodyPr wrap="square" anchor="t" lIns="0" rIns="0" tIns="0" bIns="0">
-            <a:spAutoFit/>
-          </a:bodyPr>
-          <a:lstStyle/>
-          <a:p>
-            <a:pPr algn="ctr">
+              <a:t>　——　E-R 图、CDM 图、PDM 表结构</a:t>
+            </a:r>
+          </a:p>
+          <a:p>
+            <a:pPr>
+              <a:lnSpc>
+                <a:spcPct val="115000"/>
+              </a:lnSpc>
               <a:spcAft>
-                <a:spcPts val="600"/>
+                <a:spcPts val="1400"/>
               </a:spcAft>
             </a:pPr>
             <a:r>
-              <a:rPr sz="1050">
+              <a:rPr sz="1900" b="1">
+                <a:solidFill>
+                  <a:srgbClr val="1F4E79"/>
+                </a:solidFill>
+                <a:latin typeface="微软雅黑"/>
+                <a:ea typeface="微软雅黑"/>
+                <a:cs typeface="微软雅黑"/>
+              </a:rPr>
+              <a:t>5　功能模块设计与实现</a:t>
+            </a:r>
+            <a:r>
+              <a:rPr sz="1400" b="0">
                 <a:solidFill>
                   <a:srgbClr val="808080"/>
                 </a:solidFill>
@@ -10291,72 +10989,31 @@
                 <a:ea typeface="微软雅黑"/>
                 <a:cs typeface="微软雅黑"/>
               </a:rPr>
-              <a:t>图 3  自动出题页</a:t>
-            </a:r>
-          </a:p>
-        </p:txBody>
-      </p:sp>
-      <p:sp>
-        <p:nvSpPr>
-          <p:cNvPr id="11" name="Rectangle 10"/>
-          <p:cNvSpPr/>
-          <p:nvPr/>
-        </p:nvSpPr>
-        <p:spPr>
-          <a:xfrm>
-            <a:off x="1417320" y="1828800"/>
-            <a:ext cx="3566160" cy="1417320"/>
-          </a:xfrm>
-          <a:prstGeom prst="rect">
-            <a:avLst/>
-          </a:prstGeom>
-          <a:solidFill>
-            <a:srgbClr val="F2F2F2"/>
-          </a:solidFill>
-          <a:ln w="15240">
-            <a:solidFill>
-              <a:srgbClr val="C00000"/>
-            </a:solidFill>
-            <a:prstDash val="dash"/>
-          </a:ln>
-          <a:effectLst/>
-        </p:spPr>
-        <p:style>
-          <a:lnRef idx="1">
-            <a:schemeClr val="accent1"/>
-          </a:lnRef>
-          <a:fillRef idx="3">
-            <a:schemeClr val="accent1"/>
-          </a:fillRef>
-          <a:effectRef idx="2">
-            <a:schemeClr val="accent1"/>
-          </a:effectRef>
-          <a:fontRef idx="minor">
-            <a:schemeClr val="lt1"/>
-          </a:fontRef>
-        </p:style>
-        <p:txBody>
-          <a:bodyPr rtlCol="0" anchor="ctr" wrap="square"/>
-          <a:lstStyle/>
-          <a:p>
-            <a:pPr algn="ctr"/>
-            <a:r>
-              <a:rPr sz="1300">
+              <a:t>　——　F1–F5 五大功能模块</a:t>
+            </a:r>
+          </a:p>
+          <a:p>
+            <a:pPr>
+              <a:lnSpc>
+                <a:spcPct val="115000"/>
+              </a:lnSpc>
+              <a:spcAft>
+                <a:spcPts val="1400"/>
+              </a:spcAft>
+            </a:pPr>
+            <a:r>
+              <a:rPr sz="1900">
                 <a:solidFill>
-                  <a:srgbClr val="C00000"/>
+                  <a:srgbClr val="1F4E79"/>
                 </a:solidFill>
                 <a:latin typeface="微软雅黑"/>
                 <a:ea typeface="微软雅黑"/>
                 <a:cs typeface="微软雅黑"/>
               </a:rPr>
-              <a:t>【截图 4】
-错题本页</a:t>
-            </a:r>
-          </a:p>
-          <a:p>
-            <a:pPr algn="ctr"/>
-            <a:r>
-              <a:rPr sz="1000">
+              <a:t>6　系统测试与结果分析　——　</a:t>
+            </a:r>
+            <a:r>
+              <a:rPr sz="1400">
                 <a:solidFill>
                   <a:srgbClr val="808080"/>
                 </a:solidFill>
@@ -10364,41 +11021,31 @@
                 <a:ea typeface="微软雅黑"/>
                 <a:cs typeface="微软雅黑"/>
               </a:rPr>
-              <a:t>错题卡片
-用户答案与正确答案对比</a:t>
-            </a:r>
-          </a:p>
-        </p:txBody>
-      </p:sp>
-      <p:sp>
-        <p:nvSpPr>
-          <p:cNvPr id="12" name="TextBox 11"/>
-          <p:cNvSpPr txBox="1"/>
-          <p:nvPr/>
-        </p:nvSpPr>
-        <p:spPr>
-          <a:xfrm>
-            <a:off x="1417320" y="3300984"/>
-            <a:ext cx="3566160" cy="310896"/>
-          </a:xfrm>
-          <a:prstGeom prst="rect">
-            <a:avLst/>
-          </a:prstGeom>
-          <a:noFill/>
-        </p:spPr>
-        <p:txBody>
-          <a:bodyPr wrap="square" anchor="t" lIns="0" rIns="0" tIns="0" bIns="0">
-            <a:spAutoFit/>
-          </a:bodyPr>
-          <a:lstStyle/>
-          <a:p>
-            <a:pPr algn="ctr">
+              <a:t>测试用例、数据与分析结论</a:t>
+            </a:r>
+          </a:p>
+          <a:p>
+            <a:pPr>
+              <a:lnSpc>
+                <a:spcPct val="115000"/>
+              </a:lnSpc>
               <a:spcAft>
-                <a:spcPts val="600"/>
+                <a:spcPts val="1400"/>
               </a:spcAft>
             </a:pPr>
             <a:r>
-              <a:rPr sz="1050">
+              <a:rPr sz="1900" b="1">
+                <a:solidFill>
+                  <a:srgbClr val="1F4E79"/>
+                </a:solidFill>
+                <a:latin typeface="微软雅黑"/>
+                <a:ea typeface="微软雅黑"/>
+                <a:cs typeface="微软雅黑"/>
+              </a:rPr>
+              <a:t>7　总结与展望</a:t>
+            </a:r>
+            <a:r>
+              <a:rPr sz="1400" b="0">
                 <a:solidFill>
                   <a:srgbClr val="808080"/>
                 </a:solidFill>
@@ -10406,204 +11053,7 @@
                 <a:ea typeface="微软雅黑"/>
                 <a:cs typeface="微软雅黑"/>
               </a:rPr>
-              <a:t>图 4  错题本页</a:t>
-            </a:r>
-          </a:p>
-        </p:txBody>
-      </p:sp>
-      <p:sp>
-        <p:nvSpPr>
-          <p:cNvPr id="13" name="Rectangle 12"/>
-          <p:cNvSpPr/>
-          <p:nvPr/>
-        </p:nvSpPr>
-        <p:spPr>
-          <a:xfrm>
-            <a:off x="5074920" y="1828800"/>
-            <a:ext cx="3566160" cy="1417320"/>
-          </a:xfrm>
-          <a:prstGeom prst="rect">
-            <a:avLst/>
-          </a:prstGeom>
-          <a:solidFill>
-            <a:srgbClr val="F2F2F2"/>
-          </a:solidFill>
-          <a:ln w="15240">
-            <a:solidFill>
-              <a:srgbClr val="C00000"/>
-            </a:solidFill>
-            <a:prstDash val="dash"/>
-          </a:ln>
-          <a:effectLst/>
-        </p:spPr>
-        <p:style>
-          <a:lnRef idx="1">
-            <a:schemeClr val="accent1"/>
-          </a:lnRef>
-          <a:fillRef idx="3">
-            <a:schemeClr val="accent1"/>
-          </a:fillRef>
-          <a:effectRef idx="2">
-            <a:schemeClr val="accent1"/>
-          </a:effectRef>
-          <a:fontRef idx="minor">
-            <a:schemeClr val="lt1"/>
-          </a:fontRef>
-        </p:style>
-        <p:txBody>
-          <a:bodyPr rtlCol="0" anchor="ctr" wrap="square"/>
-          <a:lstStyle/>
-          <a:p>
-            <a:pPr algn="ctr"/>
-            <a:r>
-              <a:rPr sz="1300">
-                <a:solidFill>
-                  <a:srgbClr val="C00000"/>
-                </a:solidFill>
-                <a:latin typeface="微软雅黑"/>
-                <a:ea typeface="微软雅黑"/>
-                <a:cs typeface="微软雅黑"/>
-              </a:rPr>
-              <a:t>【截图 5】
-复习计划页</a:t>
-            </a:r>
-          </a:p>
-          <a:p>
-            <a:pPr algn="ctr"/>
-            <a:r>
-              <a:rPr sz="1000">
-                <a:solidFill>
-                  <a:srgbClr val="808080"/>
-                </a:solidFill>
-                <a:latin typeface="微软雅黑"/>
-                <a:ea typeface="微软雅黑"/>
-                <a:cs typeface="微软雅黑"/>
-              </a:rPr>
-              <a:t>按日期分组的复习条目
-含完成勾选</a:t>
-            </a:r>
-          </a:p>
-        </p:txBody>
-      </p:sp>
-      <p:sp>
-        <p:nvSpPr>
-          <p:cNvPr id="14" name="TextBox 13"/>
-          <p:cNvSpPr txBox="1"/>
-          <p:nvPr/>
-        </p:nvSpPr>
-        <p:spPr>
-          <a:xfrm>
-            <a:off x="5074920" y="3300984"/>
-            <a:ext cx="3566160" cy="310896"/>
-          </a:xfrm>
-          <a:prstGeom prst="rect">
-            <a:avLst/>
-          </a:prstGeom>
-          <a:noFill/>
-        </p:spPr>
-        <p:txBody>
-          <a:bodyPr wrap="square" anchor="t" lIns="0" rIns="0" tIns="0" bIns="0">
-            <a:spAutoFit/>
-          </a:bodyPr>
-          <a:lstStyle/>
-          <a:p>
-            <a:pPr algn="ctr">
-              <a:spcAft>
-                <a:spcPts val="600"/>
-              </a:spcAft>
-            </a:pPr>
-            <a:r>
-              <a:rPr sz="1050">
-                <a:solidFill>
-                  <a:srgbClr val="808080"/>
-                </a:solidFill>
-                <a:latin typeface="微软雅黑"/>
-                <a:ea typeface="微软雅黑"/>
-                <a:cs typeface="微软雅黑"/>
-              </a:rPr>
-              <a:t>图 5  复习计划页</a:t>
-            </a:r>
-          </a:p>
-        </p:txBody>
-      </p:sp>
-      <p:sp>
-        <p:nvSpPr>
-          <p:cNvPr id="15" name="TextBox 14"/>
-          <p:cNvSpPr txBox="1"/>
-          <p:nvPr/>
-        </p:nvSpPr>
-        <p:spPr>
-          <a:xfrm>
-            <a:off x="548640" y="6053328"/>
-            <a:ext cx="11091672" cy="640080"/>
-          </a:xfrm>
-          <a:prstGeom prst="rect">
-            <a:avLst/>
-          </a:prstGeom>
-          <a:noFill/>
-        </p:spPr>
-        <p:txBody>
-          <a:bodyPr wrap="square" anchor="t" lIns="0" rIns="0" tIns="0" bIns="0">
-            <a:spAutoFit/>
-          </a:bodyPr>
-          <a:lstStyle/>
-          <a:p>
-            <a:pPr algn="ctr">
-              <a:spcAft>
-                <a:spcPts val="600"/>
-              </a:spcAft>
-            </a:pPr>
-            <a:r>
-              <a:rPr sz="1200">
-                <a:solidFill>
-                  <a:srgbClr val="C00000"/>
-                </a:solidFill>
-                <a:latin typeface="微软雅黑"/>
-                <a:ea typeface="微软雅黑"/>
-                <a:cs typeface="微软雅黑"/>
-              </a:rPr>
-              <a:t>说明：本页五张截图需在系统实际运行后补充；截图要求与报告第三节“11．实现的界面”一致。</a:t>
-            </a:r>
-          </a:p>
-        </p:txBody>
-      </p:sp>
-      <p:sp>
-        <p:nvSpPr>
-          <p:cNvPr id="16" name="TextBox 15"/>
-          <p:cNvSpPr txBox="1"/>
-          <p:nvPr/>
-        </p:nvSpPr>
-        <p:spPr>
-          <a:xfrm>
-            <a:off x="11247120" y="6473952"/>
-            <a:ext cx="640080" cy="274320"/>
-          </a:xfrm>
-          <a:prstGeom prst="rect">
-            <a:avLst/>
-          </a:prstGeom>
-          <a:noFill/>
-        </p:spPr>
-        <p:txBody>
-          <a:bodyPr wrap="square" anchor="t" lIns="0" rIns="0" tIns="0" bIns="0">
-            <a:spAutoFit/>
-          </a:bodyPr>
-          <a:lstStyle/>
-          <a:p>
-            <a:pPr algn="r">
-              <a:spcAft>
-                <a:spcPts val="600"/>
-              </a:spcAft>
-            </a:pPr>
-            <a:r>
-              <a:rPr sz="1000">
-                <a:solidFill>
-                  <a:srgbClr val="808080"/>
-                </a:solidFill>
-                <a:latin typeface="微软雅黑"/>
-                <a:ea typeface="微软雅黑"/>
-                <a:cs typeface="微软雅黑"/>
-              </a:rPr>
-              <a:t>13</a:t>
+              <a:t>　——　成果总结、后续改进方向</a:t>
             </a:r>
           </a:p>
         </p:txBody>
@@ -10616,7 +11066,7 @@
 </p:sld>
 </file>
 
-<file path=ppt/slides/slide2.xml><?xml version="1.0" encoding="utf-8"?>
+<file path=ppt/slides/slide3.xml><?xml version="1.0" encoding="utf-8"?>
 <p:sld xmlns:a="http://schemas.openxmlformats.org/drawingml/2006/main" xmlns:p="http://schemas.openxmlformats.org/presentationml/2006/main" xmlns:r="http://schemas.openxmlformats.org/officeDocument/2006/relationships">
   <p:cSld>
     <p:spTree>
@@ -10712,7 +11162,7 @@
                 <a:ea typeface="微软雅黑"/>
                 <a:cs typeface="微软雅黑"/>
               </a:rPr>
-              <a:t>目录</a:t>
+              <a:t>1　选题背景与意义</a:t>
             </a:r>
           </a:p>
         </p:txBody>
@@ -10725,8 +11175,8 @@
         </p:nvSpPr>
         <p:spPr>
           <a:xfrm>
-            <a:off x="8351215" y="274320"/>
-            <a:ext cx="3383280" cy="457200"/>
+            <a:off x="11277295" y="6473952"/>
+            <a:ext cx="640080" cy="274320"/>
           </a:xfrm>
           <a:prstGeom prst="rect">
             <a:avLst/>
@@ -10734,7 +11184,7 @@
           <a:noFill/>
         </p:spPr>
         <p:txBody>
-          <a:bodyPr wrap="square" anchor="ctr" lIns="0" rIns="0" tIns="0" bIns="0">
+          <a:bodyPr wrap="square" anchor="t" lIns="0" rIns="0" tIns="0" bIns="0">
             <a:spAutoFit/>
           </a:bodyPr>
           <a:lstStyle/>
@@ -10751,15 +11201,15 @@
               </a:spcAft>
             </a:pPr>
             <a:r>
-              <a:rPr sz="1300" b="0">
+              <a:rPr sz="1000">
                 <a:solidFill>
-                  <a:srgbClr val="BDD7EE"/>
+                  <a:srgbClr val="808080"/>
                 </a:solidFill>
                 <a:latin typeface="微软雅黑"/>
                 <a:ea typeface="微软雅黑"/>
                 <a:cs typeface="微软雅黑"/>
               </a:rPr>
-              <a:t>Contents</a:t>
+              <a:t>3</a:t>
             </a:r>
           </a:p>
         </p:txBody>
@@ -10772,8 +11222,8 @@
         </p:nvSpPr>
         <p:spPr>
           <a:xfrm>
-            <a:off x="11277295" y="6473952"/>
-            <a:ext cx="640080" cy="274320"/>
+            <a:off x="548640" y="1280160"/>
+            <a:ext cx="11064240" cy="5120640"/>
           </a:xfrm>
           <a:prstGeom prst="rect">
             <a:avLst/>
@@ -10786,7 +11236,170 @@
           </a:bodyPr>
           <a:lstStyle/>
           <a:p>
-            <a:pPr algn="r">
+            <a:pPr algn="l">
+              <a:lnSpc>
+                <a:spcPct val="125000"/>
+              </a:lnSpc>
+              <a:spcBef>
+                <a:spcPts val="0"/>
+              </a:spcBef>
+              <a:spcAft>
+                <a:spcPts val="1400"/>
+              </a:spcAft>
+            </a:pPr>
+            <a:r>
+              <a:rPr sz="1600" b="1">
+                <a:solidFill>
+                  <a:srgbClr val="1F4E79"/>
+                </a:solidFill>
+                <a:latin typeface="微软雅黑"/>
+                <a:ea typeface="微软雅黑"/>
+                <a:cs typeface="微软雅黑"/>
+              </a:rPr>
+              <a:t>• 课程资料多源异构（PDF / Word / Markdown / TXT），目录式与关键词检索只能匹配字面表述，难以按语义定位知识点</a:t>
+            </a:r>
+          </a:p>
+          <a:p>
+            <a:pPr algn="l">
+              <a:lnSpc>
+                <a:spcPct val="125000"/>
+              </a:lnSpc>
+              <a:spcBef>
+                <a:spcPts val="0"/>
+              </a:spcBef>
+              <a:spcAft>
+                <a:spcPts val="1400"/>
+              </a:spcAft>
+            </a:pPr>
+            <a:r>
+              <a:rPr sz="1600" b="1">
+                <a:solidFill>
+                  <a:srgbClr val="1F4E79"/>
+                </a:solidFill>
+                <a:latin typeface="微软雅黑"/>
+                <a:ea typeface="微软雅黑"/>
+                <a:cs typeface="微软雅黑"/>
+              </a:rPr>
+              <a:t>• 通用大语言模型不了解私有课程资料，直接提问易产生“幻觉”，且回答无法给出出处、难以溯源</a:t>
+            </a:r>
+          </a:p>
+          <a:p>
+            <a:pPr algn="l">
+              <a:lnSpc>
+                <a:spcPct val="125000"/>
+              </a:lnSpc>
+              <a:spcBef>
+                <a:spcPts val="0"/>
+              </a:spcBef>
+              <a:spcAft>
+                <a:spcPts val="1400"/>
+              </a:spcAft>
+            </a:pPr>
+            <a:r>
+              <a:rPr sz="1600" b="1">
+                <a:solidFill>
+                  <a:srgbClr val="1F4E79"/>
+                </a:solidFill>
+                <a:latin typeface="微软雅黑"/>
+                <a:ea typeface="微软雅黑"/>
+                <a:cs typeface="微软雅黑"/>
+              </a:rPr>
+              <a:t>• 错题散落各处、无法自动沉淀，复习缺少计划性，容易陷入“学了就忘、错了再错”的低效循环</a:t>
+            </a:r>
+          </a:p>
+        </p:txBody>
+      </p:sp>
+      <p:sp>
+        <p:nvSpPr>
+          <p:cNvPr id="6" name="Rectangle 5"/>
+          <p:cNvSpPr/>
+          <p:nvPr/>
+        </p:nvSpPr>
+        <p:spPr>
+          <a:xfrm>
+            <a:off x="548640" y="4160520"/>
+            <a:ext cx="11091672" cy="45720"/>
+          </a:xfrm>
+          <a:prstGeom prst="rect">
+            <a:avLst/>
+          </a:prstGeom>
+          <a:solidFill>
+            <a:srgbClr val="2E75B6"/>
+          </a:solidFill>
+          <a:ln>
+            <a:noFill/>
+          </a:ln>
+          <a:effectLst/>
+        </p:spPr>
+        <p:style>
+          <a:lnRef idx="1">
+            <a:schemeClr val="accent1"/>
+          </a:lnRef>
+          <a:fillRef idx="3">
+            <a:schemeClr val="accent1"/>
+          </a:fillRef>
+          <a:effectRef idx="2">
+            <a:schemeClr val="accent1"/>
+          </a:effectRef>
+          <a:fontRef idx="minor">
+            <a:schemeClr val="lt1"/>
+          </a:fontRef>
+        </p:style>
+        <p:txBody>
+          <a:bodyPr rtlCol="0" anchor="ctr"/>
+          <a:lstStyle/>
+          <a:p>
+            <a:pPr algn="ctr"/>
+          </a:p>
+        </p:txBody>
+      </p:sp>
+      <p:sp>
+        <p:nvSpPr>
+          <p:cNvPr id="7" name="TextBox 6"/>
+          <p:cNvSpPr txBox="1"/>
+          <p:nvPr/>
+        </p:nvSpPr>
+        <p:spPr>
+          <a:xfrm>
+            <a:off x="548640" y="4343400"/>
+            <a:ext cx="11091672" cy="1463040"/>
+          </a:xfrm>
+          <a:prstGeom prst="rect">
+            <a:avLst/>
+          </a:prstGeom>
+          <a:noFill/>
+        </p:spPr>
+        <p:txBody>
+          <a:bodyPr wrap="square" anchor="t" lIns="0" rIns="0" tIns="0" bIns="0">
+            <a:spAutoFit/>
+          </a:bodyPr>
+          <a:lstStyle/>
+          <a:p>
+            <a:pPr algn="l">
+              <a:lnSpc>
+                <a:spcPct val="125000"/>
+              </a:lnSpc>
+              <a:spcBef>
+                <a:spcPts val="0"/>
+              </a:spcBef>
+              <a:spcAft>
+                <a:spcPts val="800"/>
+              </a:spcAft>
+            </a:pPr>
+            <a:r>
+              <a:rPr sz="1800" b="1">
+                <a:solidFill>
+                  <a:srgbClr val="2E75B6"/>
+                </a:solidFill>
+                <a:latin typeface="微软雅黑"/>
+                <a:ea typeface="微软雅黑"/>
+                <a:cs typeface="微软雅黑"/>
+              </a:rPr>
+              <a:t>本课题的解决思路</a:t>
+            </a:r>
+          </a:p>
+          <a:p>
+            <a:pPr algn="l">
               <a:lnSpc>
                 <a:spcPct val="125000"/>
               </a:lnSpc>
@@ -10798,262 +11411,15 @@
               </a:spcAft>
             </a:pPr>
             <a:r>
-              <a:rPr sz="1000">
+              <a:rPr sz="1500" b="0">
                 <a:solidFill>
-                  <a:srgbClr val="808080"/>
+                  <a:srgbClr val="222222"/>
                 </a:solidFill>
                 <a:latin typeface="微软雅黑"/>
                 <a:ea typeface="微软雅黑"/>
                 <a:cs typeface="微软雅黑"/>
               </a:rPr>
-              <a:t>2</a:t>
-            </a:r>
-          </a:p>
-        </p:txBody>
-      </p:sp>
-      <p:sp>
-        <p:nvSpPr>
-          <p:cNvPr id="6" name="TextBox 5"/>
-          <p:cNvSpPr txBox="1"/>
-          <p:nvPr/>
-        </p:nvSpPr>
-        <p:spPr>
-          <a:xfrm>
-            <a:off x="822960" y="1325880"/>
-            <a:ext cx="10515600" cy="4846320"/>
-          </a:xfrm>
-          <a:prstGeom prst="rect">
-            <a:avLst/>
-          </a:prstGeom>
-          <a:noFill/>
-        </p:spPr>
-        <p:txBody>
-          <a:bodyPr wrap="square" anchor="t" lIns="0" rIns="0" tIns="0" bIns="0">
-            <a:spAutoFit/>
-          </a:bodyPr>
-          <a:lstStyle/>
-          <a:p>
-            <a:pPr>
-              <a:lnSpc>
-                <a:spcPct val="115000"/>
-              </a:lnSpc>
-              <a:spcAft>
-                <a:spcPts val="1400"/>
-              </a:spcAft>
-            </a:pPr>
-            <a:r>
-              <a:rPr sz="1900" b="1">
-                <a:solidFill>
-                  <a:srgbClr val="1F4E79"/>
-                </a:solidFill>
-                <a:latin typeface="微软雅黑"/>
-                <a:ea typeface="微软雅黑"/>
-                <a:cs typeface="微软雅黑"/>
-              </a:rPr>
-              <a:t>1　选题背景与意义</a:t>
-            </a:r>
-            <a:r>
-              <a:rPr sz="1400" b="0">
-                <a:solidFill>
-                  <a:srgbClr val="808080"/>
-                </a:solidFill>
-                <a:latin typeface="微软雅黑"/>
-                <a:ea typeface="微软雅黑"/>
-                <a:cs typeface="微软雅黑"/>
-              </a:rPr>
-              <a:t>　——　项目来源、待解决的主要问题</a:t>
-            </a:r>
-          </a:p>
-          <a:p>
-            <a:pPr>
-              <a:lnSpc>
-                <a:spcPct val="115000"/>
-              </a:lnSpc>
-              <a:spcAft>
-                <a:spcPts val="1400"/>
-              </a:spcAft>
-            </a:pPr>
-            <a:r>
-              <a:rPr sz="1900" b="1">
-                <a:solidFill>
-                  <a:srgbClr val="1F4E79"/>
-                </a:solidFill>
-                <a:latin typeface="微软雅黑"/>
-                <a:ea typeface="微软雅黑"/>
-                <a:cs typeface="微软雅黑"/>
-              </a:rPr>
-              <a:t>2　系统总体架构与技术选型</a:t>
-            </a:r>
-            <a:r>
-              <a:rPr sz="1400" b="0">
-                <a:solidFill>
-                  <a:srgbClr val="808080"/>
-                </a:solidFill>
-                <a:latin typeface="微软雅黑"/>
-                <a:ea typeface="微软雅黑"/>
-                <a:cs typeface="微软雅黑"/>
-              </a:rPr>
-              <a:t>　——　B/S 三层架构、双库存储</a:t>
-            </a:r>
-          </a:p>
-          <a:p>
-            <a:pPr>
-              <a:lnSpc>
-                <a:spcPct val="115000"/>
-              </a:lnSpc>
-              <a:spcAft>
-                <a:spcPts val="1400"/>
-              </a:spcAft>
-            </a:pPr>
-            <a:r>
-              <a:rPr sz="1900" b="1">
-                <a:solidFill>
-                  <a:srgbClr val="1F4E79"/>
-                </a:solidFill>
-                <a:latin typeface="微软雅黑"/>
-                <a:ea typeface="微软雅黑"/>
-                <a:cs typeface="微软雅黑"/>
-              </a:rPr>
-              <a:t>3　核心原理：检索增强生成（RAG）</a:t>
-            </a:r>
-            <a:r>
-              <a:rPr sz="1400" b="0">
-                <a:solidFill>
-                  <a:srgbClr val="808080"/>
-                </a:solidFill>
-                <a:latin typeface="微软雅黑"/>
-                <a:ea typeface="微软雅黑"/>
-                <a:cs typeface="微软雅黑"/>
-              </a:rPr>
-              <a:t>　——　离线索引与在线问答两阶段</a:t>
-            </a:r>
-          </a:p>
-          <a:p>
-            <a:pPr>
-              <a:lnSpc>
-                <a:spcPct val="115000"/>
-              </a:lnSpc>
-              <a:spcAft>
-                <a:spcPts val="1400"/>
-              </a:spcAft>
-            </a:pPr>
-            <a:r>
-              <a:rPr sz="1900" b="1">
-                <a:solidFill>
-                  <a:srgbClr val="1F4E79"/>
-                </a:solidFill>
-                <a:latin typeface="微软雅黑"/>
-                <a:ea typeface="微软雅黑"/>
-                <a:cs typeface="微软雅黑"/>
-              </a:rPr>
-              <a:t>4　数据库设计</a:t>
-            </a:r>
-            <a:r>
-              <a:rPr sz="1400" b="0">
-                <a:solidFill>
-                  <a:srgbClr val="808080"/>
-                </a:solidFill>
-                <a:latin typeface="微软雅黑"/>
-                <a:ea typeface="微软雅黑"/>
-                <a:cs typeface="微软雅黑"/>
-              </a:rPr>
-              <a:t>　——　E-R 图、CDM 图、PDM 表结构</a:t>
-            </a:r>
-          </a:p>
-          <a:p>
-            <a:pPr>
-              <a:lnSpc>
-                <a:spcPct val="115000"/>
-              </a:lnSpc>
-              <a:spcAft>
-                <a:spcPts val="1400"/>
-              </a:spcAft>
-            </a:pPr>
-            <a:r>
-              <a:rPr sz="1900" b="1">
-                <a:solidFill>
-                  <a:srgbClr val="1F4E79"/>
-                </a:solidFill>
-                <a:latin typeface="微软雅黑"/>
-                <a:ea typeface="微软雅黑"/>
-                <a:cs typeface="微软雅黑"/>
-              </a:rPr>
-              <a:t>5　功能模块设计与实现</a:t>
-            </a:r>
-            <a:r>
-              <a:rPr sz="1400" b="0">
-                <a:solidFill>
-                  <a:srgbClr val="808080"/>
-                </a:solidFill>
-                <a:latin typeface="微软雅黑"/>
-                <a:ea typeface="微软雅黑"/>
-                <a:cs typeface="微软雅黑"/>
-              </a:rPr>
-              <a:t>　——　F1–F5 五大功能模块</a:t>
-            </a:r>
-          </a:p>
-          <a:p>
-            <a:pPr>
-              <a:lnSpc>
-                <a:spcPct val="115000"/>
-              </a:lnSpc>
-              <a:spcAft>
-                <a:spcPts val="1400"/>
-              </a:spcAft>
-            </a:pPr>
-            <a:r>
-              <a:rPr sz="1900">
-                <a:solidFill>
-                  <a:srgbClr val="1F4E79"/>
-                </a:solidFill>
-                <a:latin typeface="微软雅黑"/>
-                <a:ea typeface="微软雅黑"/>
-                <a:cs typeface="微软雅黑"/>
-              </a:rPr>
-              <a:t>6　系统测试与结果分析　——　</a:t>
-            </a:r>
-            <a:r>
-              <a:rPr sz="1400">
-                <a:solidFill>
-                  <a:srgbClr val="808080"/>
-                </a:solidFill>
-                <a:latin typeface="微软雅黑"/>
-                <a:ea typeface="微软雅黑"/>
-                <a:cs typeface="微软雅黑"/>
-              </a:rPr>
-              <a:t>测试用例、数据与分析结论</a:t>
-            </a:r>
-          </a:p>
-          <a:p>
-            <a:pPr>
-              <a:lnSpc>
-                <a:spcPct val="115000"/>
-              </a:lnSpc>
-              <a:spcAft>
-                <a:spcPts val="1400"/>
-              </a:spcAft>
-            </a:pPr>
-            <a:r>
-              <a:rPr sz="1900" b="1">
-                <a:solidFill>
-                  <a:srgbClr val="1F4E79"/>
-                </a:solidFill>
-                <a:latin typeface="微软雅黑"/>
-                <a:ea typeface="微软雅黑"/>
-                <a:cs typeface="微软雅黑"/>
-              </a:rPr>
-              <a:t>7　总结与展望</a:t>
-            </a:r>
-            <a:r>
-              <a:rPr sz="1400" b="0">
-                <a:solidFill>
-                  <a:srgbClr val="808080"/>
-                </a:solidFill>
-                <a:latin typeface="微软雅黑"/>
-                <a:ea typeface="微软雅黑"/>
-                <a:cs typeface="微软雅黑"/>
-              </a:rPr>
-              <a:t>　——　成果总结、后续改进方向</a:t>
+              <a:t>以检索增强生成（RAG）为主线技术，将课程资料向量化构建专属知识库，使回答与题目均“有据可依”；围绕“学、问、练、测、复”五个环节构建完整学习闭环，把资料检索、知识问答、自动出题、错题沉淀与复习规划串成连续链路。</a:t>
             </a:r>
           </a:p>
         </p:txBody>
@@ -11066,7 +11432,7 @@
 </p:sld>
 </file>
 
-<file path=ppt/slides/slide3.xml><?xml version="1.0" encoding="utf-8"?>
+<file path=ppt/slides/slide4.xml><?xml version="1.0" encoding="utf-8"?>
 <p:sld xmlns:a="http://schemas.openxmlformats.org/drawingml/2006/main" xmlns:p="http://schemas.openxmlformats.org/presentationml/2006/main" xmlns:r="http://schemas.openxmlformats.org/officeDocument/2006/relationships">
   <p:cSld>
     <p:spTree>
@@ -11162,7 +11528,7 @@
                 <a:ea typeface="微软雅黑"/>
                 <a:cs typeface="微软雅黑"/>
               </a:rPr>
-              <a:t>1　选题背景与意义</a:t>
+              <a:t>2　系统总体架构与技术选型</a:t>
             </a:r>
           </a:p>
         </p:txBody>
@@ -11209,372 +11575,6 @@
                 <a:ea typeface="微软雅黑"/>
                 <a:cs typeface="微软雅黑"/>
               </a:rPr>
-              <a:t>3</a:t>
-            </a:r>
-          </a:p>
-        </p:txBody>
-      </p:sp>
-      <p:sp>
-        <p:nvSpPr>
-          <p:cNvPr id="5" name="TextBox 4"/>
-          <p:cNvSpPr txBox="1"/>
-          <p:nvPr/>
-        </p:nvSpPr>
-        <p:spPr>
-          <a:xfrm>
-            <a:off x="548640" y="1280160"/>
-            <a:ext cx="11064240" cy="5120640"/>
-          </a:xfrm>
-          <a:prstGeom prst="rect">
-            <a:avLst/>
-          </a:prstGeom>
-          <a:noFill/>
-        </p:spPr>
-        <p:txBody>
-          <a:bodyPr wrap="square" anchor="t" lIns="0" rIns="0" tIns="0" bIns="0">
-            <a:spAutoFit/>
-          </a:bodyPr>
-          <a:lstStyle/>
-          <a:p>
-            <a:pPr algn="l">
-              <a:lnSpc>
-                <a:spcPct val="125000"/>
-              </a:lnSpc>
-              <a:spcBef>
-                <a:spcPts val="0"/>
-              </a:spcBef>
-              <a:spcAft>
-                <a:spcPts val="1400"/>
-              </a:spcAft>
-            </a:pPr>
-            <a:r>
-              <a:rPr sz="1600" b="1">
-                <a:solidFill>
-                  <a:srgbClr val="1F4E79"/>
-                </a:solidFill>
-                <a:latin typeface="微软雅黑"/>
-                <a:ea typeface="微软雅黑"/>
-                <a:cs typeface="微软雅黑"/>
-              </a:rPr>
-              <a:t>• 课程资料多源异构（PDF / Word / Markdown / TXT），目录式与关键词检索只能匹配字面表述，难以按语义定位知识点</a:t>
-            </a:r>
-          </a:p>
-          <a:p>
-            <a:pPr algn="l">
-              <a:lnSpc>
-                <a:spcPct val="125000"/>
-              </a:lnSpc>
-              <a:spcBef>
-                <a:spcPts val="0"/>
-              </a:spcBef>
-              <a:spcAft>
-                <a:spcPts val="1400"/>
-              </a:spcAft>
-            </a:pPr>
-            <a:r>
-              <a:rPr sz="1600" b="1">
-                <a:solidFill>
-                  <a:srgbClr val="1F4E79"/>
-                </a:solidFill>
-                <a:latin typeface="微软雅黑"/>
-                <a:ea typeface="微软雅黑"/>
-                <a:cs typeface="微软雅黑"/>
-              </a:rPr>
-              <a:t>• 通用大语言模型不了解私有课程资料，直接提问易产生“幻觉”，且回答无法给出出处、难以溯源</a:t>
-            </a:r>
-          </a:p>
-          <a:p>
-            <a:pPr algn="l">
-              <a:lnSpc>
-                <a:spcPct val="125000"/>
-              </a:lnSpc>
-              <a:spcBef>
-                <a:spcPts val="0"/>
-              </a:spcBef>
-              <a:spcAft>
-                <a:spcPts val="1400"/>
-              </a:spcAft>
-            </a:pPr>
-            <a:r>
-              <a:rPr sz="1600" b="1">
-                <a:solidFill>
-                  <a:srgbClr val="1F4E79"/>
-                </a:solidFill>
-                <a:latin typeface="微软雅黑"/>
-                <a:ea typeface="微软雅黑"/>
-                <a:cs typeface="微软雅黑"/>
-              </a:rPr>
-              <a:t>• 错题散落各处、无法自动沉淀，复习缺少计划性，容易陷入“学了就忘、错了再错”的低效循环</a:t>
-            </a:r>
-          </a:p>
-        </p:txBody>
-      </p:sp>
-      <p:sp>
-        <p:nvSpPr>
-          <p:cNvPr id="6" name="Rectangle 5"/>
-          <p:cNvSpPr/>
-          <p:nvPr/>
-        </p:nvSpPr>
-        <p:spPr>
-          <a:xfrm>
-            <a:off x="548640" y="4160520"/>
-            <a:ext cx="11091672" cy="45720"/>
-          </a:xfrm>
-          <a:prstGeom prst="rect">
-            <a:avLst/>
-          </a:prstGeom>
-          <a:solidFill>
-            <a:srgbClr val="2E75B6"/>
-          </a:solidFill>
-          <a:ln>
-            <a:noFill/>
-          </a:ln>
-          <a:effectLst/>
-        </p:spPr>
-        <p:style>
-          <a:lnRef idx="1">
-            <a:schemeClr val="accent1"/>
-          </a:lnRef>
-          <a:fillRef idx="3">
-            <a:schemeClr val="accent1"/>
-          </a:fillRef>
-          <a:effectRef idx="2">
-            <a:schemeClr val="accent1"/>
-          </a:effectRef>
-          <a:fontRef idx="minor">
-            <a:schemeClr val="lt1"/>
-          </a:fontRef>
-        </p:style>
-        <p:txBody>
-          <a:bodyPr rtlCol="0" anchor="ctr"/>
-          <a:lstStyle/>
-          <a:p>
-            <a:pPr algn="ctr"/>
-          </a:p>
-        </p:txBody>
-      </p:sp>
-      <p:sp>
-        <p:nvSpPr>
-          <p:cNvPr id="7" name="TextBox 6"/>
-          <p:cNvSpPr txBox="1"/>
-          <p:nvPr/>
-        </p:nvSpPr>
-        <p:spPr>
-          <a:xfrm>
-            <a:off x="548640" y="4343400"/>
-            <a:ext cx="11091672" cy="1463040"/>
-          </a:xfrm>
-          <a:prstGeom prst="rect">
-            <a:avLst/>
-          </a:prstGeom>
-          <a:noFill/>
-        </p:spPr>
-        <p:txBody>
-          <a:bodyPr wrap="square" anchor="t" lIns="0" rIns="0" tIns="0" bIns="0">
-            <a:spAutoFit/>
-          </a:bodyPr>
-          <a:lstStyle/>
-          <a:p>
-            <a:pPr algn="l">
-              <a:lnSpc>
-                <a:spcPct val="125000"/>
-              </a:lnSpc>
-              <a:spcBef>
-                <a:spcPts val="0"/>
-              </a:spcBef>
-              <a:spcAft>
-                <a:spcPts val="800"/>
-              </a:spcAft>
-            </a:pPr>
-            <a:r>
-              <a:rPr sz="1800" b="1">
-                <a:solidFill>
-                  <a:srgbClr val="2E75B6"/>
-                </a:solidFill>
-                <a:latin typeface="微软雅黑"/>
-                <a:ea typeface="微软雅黑"/>
-                <a:cs typeface="微软雅黑"/>
-              </a:rPr>
-              <a:t>本课题的解决思路</a:t>
-            </a:r>
-          </a:p>
-          <a:p>
-            <a:pPr algn="l">
-              <a:lnSpc>
-                <a:spcPct val="125000"/>
-              </a:lnSpc>
-              <a:spcBef>
-                <a:spcPts val="0"/>
-              </a:spcBef>
-              <a:spcAft>
-                <a:spcPts val="600"/>
-              </a:spcAft>
-            </a:pPr>
-            <a:r>
-              <a:rPr sz="1500" b="0">
-                <a:solidFill>
-                  <a:srgbClr val="222222"/>
-                </a:solidFill>
-                <a:latin typeface="微软雅黑"/>
-                <a:ea typeface="微软雅黑"/>
-                <a:cs typeface="微软雅黑"/>
-              </a:rPr>
-              <a:t>以检索增强生成（RAG）为主线技术，将课程资料向量化构建专属知识库，使回答与题目均“有据可依”；围绕“学、问、练、测、复”五个环节构建完整学习闭环，把资料检索、知识问答、自动出题、错题沉淀与复习规划串成连续链路。</a:t>
-            </a:r>
-          </a:p>
-        </p:txBody>
-      </p:sp>
-    </p:spTree>
-  </p:cSld>
-  <p:clrMapOvr>
-    <a:masterClrMapping/>
-  </p:clrMapOvr>
-</p:sld>
-</file>
-
-<file path=ppt/slides/slide4.xml><?xml version="1.0" encoding="utf-8"?>
-<p:sld xmlns:a="http://schemas.openxmlformats.org/drawingml/2006/main" xmlns:p="http://schemas.openxmlformats.org/presentationml/2006/main" xmlns:r="http://schemas.openxmlformats.org/officeDocument/2006/relationships">
-  <p:cSld>
-    <p:spTree>
-      <p:nvGrpSpPr>
-        <p:cNvPr id="1" name=""/>
-        <p:cNvGrpSpPr/>
-        <p:nvPr/>
-      </p:nvGrpSpPr>
-      <p:grpSpPr/>
-      <p:sp>
-        <p:nvSpPr>
-          <p:cNvPr id="2" name="Rectangle 1"/>
-          <p:cNvSpPr/>
-          <p:nvPr/>
-        </p:nvSpPr>
-        <p:spPr>
-          <a:xfrm>
-            <a:off x="0" y="0"/>
-            <a:ext cx="12191695" cy="960120"/>
-          </a:xfrm>
-          <a:prstGeom prst="rect">
-            <a:avLst/>
-          </a:prstGeom>
-          <a:solidFill>
-            <a:srgbClr val="1F4E79"/>
-          </a:solidFill>
-          <a:ln>
-            <a:noFill/>
-          </a:ln>
-          <a:effectLst/>
-        </p:spPr>
-        <p:style>
-          <a:lnRef idx="1">
-            <a:schemeClr val="accent1"/>
-          </a:lnRef>
-          <a:fillRef idx="3">
-            <a:schemeClr val="accent1"/>
-          </a:fillRef>
-          <a:effectRef idx="2">
-            <a:schemeClr val="accent1"/>
-          </a:effectRef>
-          <a:fontRef idx="minor">
-            <a:schemeClr val="lt1"/>
-          </a:fontRef>
-        </p:style>
-        <p:txBody>
-          <a:bodyPr rtlCol="0" anchor="ctr"/>
-          <a:lstStyle/>
-          <a:p>
-            <a:pPr algn="ctr"/>
-          </a:p>
-        </p:txBody>
-      </p:sp>
-      <p:sp>
-        <p:nvSpPr>
-          <p:cNvPr id="3" name="TextBox 2"/>
-          <p:cNvSpPr txBox="1"/>
-          <p:nvPr/>
-        </p:nvSpPr>
-        <p:spPr>
-          <a:xfrm>
-            <a:off x="502920" y="182880"/>
-            <a:ext cx="11185855" cy="621792"/>
-          </a:xfrm>
-          <a:prstGeom prst="rect">
-            <a:avLst/>
-          </a:prstGeom>
-          <a:noFill/>
-        </p:spPr>
-        <p:txBody>
-          <a:bodyPr wrap="square" anchor="ctr" lIns="0" rIns="0" tIns="0" bIns="0">
-            <a:spAutoFit/>
-          </a:bodyPr>
-          <a:lstStyle/>
-          <a:p>
-            <a:pPr algn="l">
-              <a:lnSpc>
-                <a:spcPct val="125000"/>
-              </a:lnSpc>
-              <a:spcBef>
-                <a:spcPts val="0"/>
-              </a:spcBef>
-              <a:spcAft>
-                <a:spcPts val="600"/>
-              </a:spcAft>
-            </a:pPr>
-            <a:r>
-              <a:rPr sz="2600" b="1">
-                <a:solidFill>
-                  <a:srgbClr val="FFFFFF"/>
-                </a:solidFill>
-                <a:latin typeface="微软雅黑"/>
-                <a:ea typeface="微软雅黑"/>
-                <a:cs typeface="微软雅黑"/>
-              </a:rPr>
-              <a:t>2　系统总体架构与技术选型</a:t>
-            </a:r>
-          </a:p>
-        </p:txBody>
-      </p:sp>
-      <p:sp>
-        <p:nvSpPr>
-          <p:cNvPr id="4" name="TextBox 3"/>
-          <p:cNvSpPr txBox="1"/>
-          <p:nvPr/>
-        </p:nvSpPr>
-        <p:spPr>
-          <a:xfrm>
-            <a:off x="11277295" y="6473952"/>
-            <a:ext cx="640080" cy="274320"/>
-          </a:xfrm>
-          <a:prstGeom prst="rect">
-            <a:avLst/>
-          </a:prstGeom>
-          <a:noFill/>
-        </p:spPr>
-        <p:txBody>
-          <a:bodyPr wrap="square" anchor="t" lIns="0" rIns="0" tIns="0" bIns="0">
-            <a:spAutoFit/>
-          </a:bodyPr>
-          <a:lstStyle/>
-          <a:p>
-            <a:pPr algn="r">
-              <a:lnSpc>
-                <a:spcPct val="125000"/>
-              </a:lnSpc>
-              <a:spcBef>
-                <a:spcPts val="0"/>
-              </a:spcBef>
-              <a:spcAft>
-                <a:spcPts val="600"/>
-              </a:spcAft>
-            </a:pPr>
-            <a:r>
-              <a:rPr sz="1000">
-                <a:solidFill>
-                  <a:srgbClr val="808080"/>
-                </a:solidFill>
-                <a:latin typeface="微软雅黑"/>
-                <a:ea typeface="微软雅黑"/>
-                <a:cs typeface="微软雅黑"/>
-              </a:rPr>
               <a:t>4</a:t>
             </a:r>
           </a:p>
@@ -11694,7 +11694,7 @@
                 <a:ea typeface="微软雅黑"/>
                 <a:cs typeface="微软雅黑"/>
               </a:rPr>
-              <a:t>• 模型服务：SiliconFlow（OpenAI 兼容接口），LLM 采用 Qwen 系列，Embedding 采用 BAAI/bge-m3</a:t>
+              <a:t>• 模型服务：SiliconFlow（OpenAI 兼容接口），LLM 采用 deepseek-ai/DeepSeek-V4-Flash，Embedding 采用 BAAI/bge-m3</a:t>
             </a:r>
           </a:p>
         </p:txBody>

--- a/defense/智学助手-课程设计答辩.pptx
+++ b/defense/智学助手-课程设计答辩.pptx
@@ -603,7 +603,7 @@
           <a:lstStyle/>
           <a:p>
             <a:r>
-              <a:t>【预留页 — 负责人补全后再讲】</a:t>
+              <a:t>【主讲：周承锦】</a:t>
             </a:r>
           </a:p>
           <a:p>
@@ -683,7 +683,7 @@
           <a:lstStyle/>
           <a:p>
             <a:r>
-              <a:t>【预留页 — 负责人补全后再讲】</a:t>
+              <a:t>【主讲：霍飞腾】</a:t>
             </a:r>
           </a:p>
           <a:p>
@@ -768,7 +768,7 @@
           <a:lstStyle/>
           <a:p>
             <a:r>
-              <a:t>【预留页 — 负责人补全后再讲】</a:t>
+              <a:t>【主讲：陈果】</a:t>
             </a:r>
           </a:p>
           <a:p>
@@ -1018,7 +1018,7 @@
           <a:lstStyle/>
           <a:p>
             <a:r>
-              <a:t>【★ 你要熟悉 — 分工页】</a:t>
+              <a:t>【主讲：霍飞腾 — 分工页】</a:t>
             </a:r>
           </a:p>
           <a:p>
@@ -1188,7 +1188,7 @@
           <a:lstStyle/>
           <a:p>
             <a:r>
-              <a:t>【预留页 — 负责人补全截图】</a:t>
+              <a:t>【主讲：陈果】</a:t>
             </a:r>
           </a:p>
           <a:p>
@@ -5194,15 +5194,15 @@
               </a:spcAft>
             </a:pPr>
             <a:r>
-              <a:rPr sz="1500" b="0">
+              <a:rPr sz="1500">
                 <a:solidFill>
-                  <a:srgbClr val="D6E4F0"/>
+                  <a:srgbClr val="FFE699"/>
                 </a:solidFill>
                 <a:latin typeface="微软雅黑"/>
                 <a:ea typeface="微软雅黑"/>
                 <a:cs typeface="微软雅黑"/>
               </a:rPr>
-              <a:t>课程名称：工程实践4（计算机应用系统综合实践）</a:t>
+              <a:t>答辩成员：袁钟其（组长）　周承锦　霍飞腾　陈果　刘纲正</a:t>
             </a:r>
           </a:p>
           <a:p>
@@ -5218,15 +5218,15 @@
               </a:spcAft>
             </a:pPr>
             <a:r>
-              <a:rPr sz="1500" b="0">
+              <a:rPr sz="1500">
                 <a:solidFill>
-                  <a:srgbClr val="D6E4F0"/>
+                  <a:srgbClr val="FFE699"/>
                 </a:solidFill>
                 <a:latin typeface="微软雅黑"/>
                 <a:ea typeface="微软雅黑"/>
                 <a:cs typeface="微软雅黑"/>
               </a:rPr>
-              <a:t>院（系）：计算机工程学院　　专　　业：计算机科学与技术</a:t>
+              <a:t>答辩成员：袁钟其（组长）　周承锦　霍飞腾　陈果　刘纲正</a:t>
             </a:r>
           </a:p>
           <a:p>
@@ -5242,15 +5242,15 @@
               </a:spcAft>
             </a:pPr>
             <a:r>
-              <a:rPr sz="1500" b="0">
+              <a:rPr sz="1500">
                 <a:solidFill>
-                  <a:srgbClr val="D6E4F0"/>
+                  <a:srgbClr val="FFE699"/>
                 </a:solidFill>
                 <a:latin typeface="微软雅黑"/>
                 <a:ea typeface="微软雅黑"/>
                 <a:cs typeface="微软雅黑"/>
               </a:rPr>
-              <a:t>组　　别：第 1 组　　　　　班　　级：23级计算机科学与技术1班</a:t>
+              <a:t>答辩成员：袁钟其（组长）　周承锦　霍飞腾　陈果　刘纲正</a:t>
             </a:r>
           </a:p>
           <a:p>
@@ -5266,15 +5266,15 @@
               </a:spcAft>
             </a:pPr>
             <a:r>
-              <a:rPr sz="1500" b="0">
+              <a:rPr sz="1500">
                 <a:solidFill>
-                  <a:srgbClr val="D6E4F0"/>
+                  <a:srgbClr val="FFE699"/>
                 </a:solidFill>
                 <a:latin typeface="微软雅黑"/>
                 <a:ea typeface="微软雅黑"/>
                 <a:cs typeface="微软雅黑"/>
               </a:rPr>
-              <a:t>指导教师：刘泓志　　　　　起止日期：2026.9.7 至 2026.9.30</a:t>
+              <a:t>答辩成员：袁钟其（组长）　周承锦　霍飞腾　陈果　刘纲正</a:t>
             </a:r>
           </a:p>
           <a:p>
@@ -5290,7 +5290,7 @@
               </a:spcAft>
             </a:pPr>
             <a:r>
-              <a:rPr sz="1500" b="0">
+              <a:rPr sz="1500">
                 <a:solidFill>
                   <a:srgbClr val="FFE699"/>
                 </a:solidFill>
@@ -5298,7 +5298,7 @@
                 <a:ea typeface="微软雅黑"/>
                 <a:cs typeface="微软雅黑"/>
               </a:rPr>
-              <a:t>答辩成员：【姓名1】【姓名2】张三【姓名4】【姓名5】</a:t>
+              <a:t>答辩成员：袁钟其（组长）　周承锦　霍飞腾　陈果　刘纲正</a:t>
             </a:r>
           </a:p>
         </p:txBody>
@@ -5454,7 +5454,7 @@
                 <a:ea typeface="微软雅黑"/>
                 <a:cs typeface="微软雅黑"/>
               </a:rPr>
-              <a:t>负责人：【姓名3】</a:t>
+              <a:t>负责人：周承锦</a:t>
             </a:r>
           </a:p>
         </p:txBody>
@@ -5498,8 +5498,6 @@
                   <a:srgbClr val="808080"/>
                 </a:solidFill>
                 <a:latin typeface="微软雅黑"/>
-                <a:ea typeface="微软雅黑"/>
-                <a:cs typeface="微软雅黑"/>
               </a:rPr>
               <a:t>10</a:t>
             </a:r>
@@ -6165,7 +6163,7 @@
                 <a:ea typeface="微软雅黑"/>
                 <a:cs typeface="微软雅黑"/>
               </a:rPr>
-              <a:t>负责人：【姓名4】</a:t>
+              <a:t>负责人：霍飞腾</a:t>
             </a:r>
           </a:p>
         </p:txBody>
@@ -6209,8 +6207,6 @@
                   <a:srgbClr val="808080"/>
                 </a:solidFill>
                 <a:latin typeface="微软雅黑"/>
-                <a:ea typeface="微软雅黑"/>
-                <a:cs typeface="微软雅黑"/>
               </a:rPr>
               <a:t>11</a:t>
             </a:r>
@@ -6876,7 +6872,7 @@
                 <a:ea typeface="微软雅黑"/>
                 <a:cs typeface="微软雅黑"/>
               </a:rPr>
-              <a:t>负责人：【姓名5】</a:t>
+              <a:t>负责人：陈果</a:t>
             </a:r>
           </a:p>
         </p:txBody>
@@ -6920,8 +6916,6 @@
                   <a:srgbClr val="808080"/>
                 </a:solidFill>
                 <a:latin typeface="微软雅黑"/>
-                <a:ea typeface="微软雅黑"/>
-                <a:cs typeface="微软雅黑"/>
               </a:rPr>
               <a:t>12</a:t>
             </a:r>
@@ -7975,7 +7969,7 @@
                 <a:ea typeface="微软雅黑"/>
                 <a:cs typeface="微软雅黑"/>
               </a:rPr>
-              <a:t>负责人：【姓名5】</a:t>
+              <a:t>负责人：陈果</a:t>
             </a:r>
           </a:p>
         </p:txBody>
@@ -8629,8 +8623,6 @@
                   <a:srgbClr val="808080"/>
                 </a:solidFill>
                 <a:latin typeface="微软雅黑"/>
-                <a:ea typeface="微软雅黑"/>
-                <a:cs typeface="微软雅黑"/>
               </a:rPr>
               <a:t>13</a:t>
             </a:r>
@@ -8788,7 +8780,7 @@
                 <a:ea typeface="微软雅黑"/>
                 <a:cs typeface="微软雅黑"/>
               </a:rPr>
-              <a:t>负责人：【姓名1】</a:t>
+              <a:t>负责人：袁钟其</a:t>
             </a:r>
           </a:p>
         </p:txBody>
@@ -8832,8 +8824,6 @@
                   <a:srgbClr val="808080"/>
                 </a:solidFill>
                 <a:latin typeface="微软雅黑"/>
-                <a:ea typeface="微软雅黑"/>
-                <a:cs typeface="微软雅黑"/>
               </a:rPr>
               <a:t>14</a:t>
             </a:r>
@@ -9246,8 +9236,6 @@
                   <a:srgbClr val="808080"/>
                 </a:solidFill>
                 <a:latin typeface="微软雅黑"/>
-                <a:ea typeface="微软雅黑"/>
-                <a:cs typeface="微软雅黑"/>
               </a:rPr>
               <a:t>15</a:t>
             </a:r>
@@ -9686,8 +9674,6 @@
                   <a:srgbClr val="808080"/>
                 </a:solidFill>
                 <a:latin typeface="微软雅黑"/>
-                <a:ea typeface="微软雅黑"/>
-                <a:cs typeface="微软雅黑"/>
               </a:rPr>
               <a:t>16</a:t>
             </a:r>
@@ -9828,7 +9814,7 @@
                     <a:p>
                       <a:pPr algn="ctr"/>
                       <a:r>
-                        <a:rPr sz="1200" b="0">
+                        <a:rPr sz="1100">
                           <a:solidFill>
                             <a:srgbClr val="222222"/>
                           </a:solidFill>
@@ -9853,7 +9839,7 @@
                     <a:p>
                       <a:pPr algn="ctr"/>
                       <a:r>
-                        <a:rPr sz="1200" b="0">
+                        <a:rPr sz="1100">
                           <a:solidFill>
                             <a:srgbClr val="222222"/>
                           </a:solidFill>
@@ -9861,7 +9847,7 @@
                           <a:ea typeface="微软雅黑"/>
                           <a:cs typeface="微软雅黑"/>
                         </a:rPr>
-                        <a:t>【姓名1】</a:t>
+                        <a:t>袁钟其</a:t>
                       </a:r>
                     </a:p>
                   </a:txBody>
@@ -9878,7 +9864,7 @@
                     <a:p>
                       <a:pPr algn="ctr"/>
                       <a:r>
-                        <a:rPr sz="1200" b="0">
+                        <a:rPr sz="1100">
                           <a:solidFill>
                             <a:srgbClr val="222222"/>
                           </a:solidFill>
@@ -9886,7 +9872,7 @@
                           <a:ea typeface="微软雅黑"/>
                           <a:cs typeface="微软雅黑"/>
                         </a:rPr>
-                        <a:t>【学号1】</a:t>
+                        <a:t>2306007106</a:t>
                       </a:r>
                     </a:p>
                   </a:txBody>
@@ -9903,7 +9889,7 @@
                     <a:p>
                       <a:pPr algn="l"/>
                       <a:r>
-                        <a:rPr sz="1200" b="0">
+                        <a:rPr sz="1100">
                           <a:solidFill>
                             <a:srgbClr val="222222"/>
                           </a:solidFill>
@@ -9930,7 +9916,7 @@
                     <a:p>
                       <a:pPr algn="ctr"/>
                       <a:r>
-                        <a:rPr sz="1200" b="0">
+                        <a:rPr sz="1100">
                           <a:solidFill>
                             <a:srgbClr val="222222"/>
                           </a:solidFill>
@@ -9955,7 +9941,7 @@
                     <a:p>
                       <a:pPr algn="ctr"/>
                       <a:r>
-                        <a:rPr sz="1200" b="0">
+                        <a:rPr sz="1100">
                           <a:solidFill>
                             <a:srgbClr val="222222"/>
                           </a:solidFill>
@@ -9963,7 +9949,7 @@
                           <a:ea typeface="微软雅黑"/>
                           <a:cs typeface="微软雅黑"/>
                         </a:rPr>
-                        <a:t>张三</a:t>
+                        <a:t>周承锦</a:t>
                       </a:r>
                     </a:p>
                   </a:txBody>
@@ -9980,7 +9966,7 @@
                     <a:p>
                       <a:pPr algn="ctr"/>
                       <a:r>
-                        <a:rPr sz="1200" b="0">
+                        <a:rPr sz="1100">
                           <a:solidFill>
                             <a:srgbClr val="222222"/>
                           </a:solidFill>
@@ -9988,7 +9974,7 @@
                           <a:ea typeface="微软雅黑"/>
                           <a:cs typeface="微软雅黑"/>
                         </a:rPr>
-                        <a:t>【学号】</a:t>
+                        <a:t>2306007108</a:t>
                       </a:r>
                     </a:p>
                   </a:txBody>
@@ -10005,7 +9991,7 @@
                     <a:p>
                       <a:pPr algn="l"/>
                       <a:r>
-                        <a:rPr sz="1200" b="0">
+                        <a:rPr sz="1100">
                           <a:solidFill>
                             <a:srgbClr val="222222"/>
                           </a:solidFill>
@@ -10013,7 +9999,7 @@
                           <a:ea typeface="微软雅黑"/>
                           <a:cs typeface="微软雅黑"/>
                         </a:rPr>
-                        <a:t>数据库设计（E-R / CDM / PDM）、课程设计报告撰写与统稿</a:t>
+                        <a:t>F3 自动出题与判题：出题提示词与 JSON 解析重试、客观题与简答题判分、文件大小校验</a:t>
                       </a:r>
                     </a:p>
                   </a:txBody>
@@ -10032,7 +10018,7 @@
                     <a:p>
                       <a:pPr algn="ctr"/>
                       <a:r>
-                        <a:rPr sz="1200" b="0">
+                        <a:rPr sz="1100">
                           <a:solidFill>
                             <a:srgbClr val="222222"/>
                           </a:solidFill>
@@ -10057,7 +10043,7 @@
                     <a:p>
                       <a:pPr algn="ctr"/>
                       <a:r>
-                        <a:rPr sz="1200" b="0">
+                        <a:rPr sz="1100">
                           <a:solidFill>
                             <a:srgbClr val="222222"/>
                           </a:solidFill>
@@ -10065,7 +10051,7 @@
                           <a:ea typeface="微软雅黑"/>
                           <a:cs typeface="微软雅黑"/>
                         </a:rPr>
-                        <a:t>【姓名3】</a:t>
+                        <a:t>霍飞腾</a:t>
                       </a:r>
                     </a:p>
                   </a:txBody>
@@ -10082,7 +10068,7 @@
                     <a:p>
                       <a:pPr algn="ctr"/>
                       <a:r>
-                        <a:rPr sz="1200" b="0">
+                        <a:rPr sz="1100">
                           <a:solidFill>
                             <a:srgbClr val="222222"/>
                           </a:solidFill>
@@ -10090,7 +10076,7 @@
                           <a:ea typeface="微软雅黑"/>
                           <a:cs typeface="微软雅黑"/>
                         </a:rPr>
-                        <a:t>【学号3】</a:t>
+                        <a:t>2306007127</a:t>
                       </a:r>
                     </a:p>
                   </a:txBody>
@@ -10107,7 +10093,7 @@
                     <a:p>
                       <a:pPr algn="l"/>
                       <a:r>
-                        <a:rPr sz="1200" b="0">
+                        <a:rPr sz="1100">
                           <a:solidFill>
                             <a:srgbClr val="222222"/>
                           </a:solidFill>
@@ -10115,7 +10101,7 @@
                           <a:ea typeface="微软雅黑"/>
                           <a:cs typeface="微软雅黑"/>
                         </a:rPr>
-                        <a:t>F3 自动出题与判题：quiz_service、quiz 路由、出题 Prompt、文件大小校验</a:t>
+                        <a:t>F4 错题本与 F5 复习计划：错题沉淀与掌握管理、七天复习计划生成与日期计算；报告统稿</a:t>
                       </a:r>
                     </a:p>
                   </a:txBody>
@@ -10134,7 +10120,7 @@
                     <a:p>
                       <a:pPr algn="ctr"/>
                       <a:r>
-                        <a:rPr sz="1200" b="0">
+                        <a:rPr sz="1100">
                           <a:solidFill>
                             <a:srgbClr val="222222"/>
                           </a:solidFill>
@@ -10159,7 +10145,7 @@
                     <a:p>
                       <a:pPr algn="ctr"/>
                       <a:r>
-                        <a:rPr sz="1200" b="0">
+                        <a:rPr sz="1100">
                           <a:solidFill>
                             <a:srgbClr val="222222"/>
                           </a:solidFill>
@@ -10167,7 +10153,7 @@
                           <a:ea typeface="微软雅黑"/>
                           <a:cs typeface="微软雅黑"/>
                         </a:rPr>
-                        <a:t>【姓名4】</a:t>
+                        <a:t>陈果</a:t>
                       </a:r>
                     </a:p>
                   </a:txBody>
@@ -10184,7 +10170,7 @@
                     <a:p>
                       <a:pPr algn="ctr"/>
                       <a:r>
-                        <a:rPr sz="1200" b="0">
+                        <a:rPr sz="1100">
                           <a:solidFill>
                             <a:srgbClr val="222222"/>
                           </a:solidFill>
@@ -10192,7 +10178,7 @@
                           <a:ea typeface="微软雅黑"/>
                           <a:cs typeface="微软雅黑"/>
                         </a:rPr>
-                        <a:t>【学号4】</a:t>
+                        <a:t>2306007120</a:t>
                       </a:r>
                     </a:p>
                   </a:txBody>
@@ -10209,7 +10195,7 @@
                     <a:p>
                       <a:pPr algn="l"/>
                       <a:r>
-                        <a:rPr sz="1200" b="0">
+                        <a:rPr sz="1100">
                           <a:solidFill>
                             <a:srgbClr val="222222"/>
                           </a:solidFill>
@@ -10217,7 +10203,7 @@
                           <a:ea typeface="微软雅黑"/>
                           <a:cs typeface="微软雅黑"/>
                         </a:rPr>
-                        <a:t>F4 错题本与 F5 复习计划：mistake_service、review_service 及对应路由与 Prompt</a:t>
+                        <a:t>前端页面与系统测试：五个功能标签页交互实现；功能测试与结构测试用例设计与执行</a:t>
                       </a:r>
                     </a:p>
                   </a:txBody>
@@ -10236,7 +10222,7 @@
                     <a:p>
                       <a:pPr algn="ctr"/>
                       <a:r>
-                        <a:rPr sz="1200" b="0">
+                        <a:rPr sz="1100">
                           <a:solidFill>
                             <a:srgbClr val="222222"/>
                           </a:solidFill>
@@ -10261,7 +10247,7 @@
                     <a:p>
                       <a:pPr algn="ctr"/>
                       <a:r>
-                        <a:rPr sz="1200" b="0">
+                        <a:rPr sz="1100">
                           <a:solidFill>
                             <a:srgbClr val="222222"/>
                           </a:solidFill>
@@ -10269,7 +10255,7 @@
                           <a:ea typeface="微软雅黑"/>
                           <a:cs typeface="微软雅黑"/>
                         </a:rPr>
-                        <a:t>【姓名5】</a:t>
+                        <a:t>刘纲正</a:t>
                       </a:r>
                     </a:p>
                   </a:txBody>
@@ -10286,7 +10272,7 @@
                     <a:p>
                       <a:pPr algn="ctr"/>
                       <a:r>
-                        <a:rPr sz="1200" b="0">
+                        <a:rPr sz="1100">
                           <a:solidFill>
                             <a:srgbClr val="222222"/>
                           </a:solidFill>
@@ -10294,7 +10280,7 @@
                           <a:ea typeface="微软雅黑"/>
                           <a:cs typeface="微软雅黑"/>
                         </a:rPr>
-                        <a:t>【学号5】</a:t>
+                        <a:t>2306007103</a:t>
                       </a:r>
                     </a:p>
                   </a:txBody>
@@ -10311,7 +10297,7 @@
                     <a:p>
                       <a:pPr algn="l"/>
                       <a:r>
-                        <a:rPr sz="1200" b="0">
+                        <a:rPr sz="1100">
                           <a:solidFill>
                             <a:srgbClr val="222222"/>
                           </a:solidFill>
@@ -10319,7 +10305,7 @@
                           <a:ea typeface="微软雅黑"/>
                           <a:cs typeface="微软雅黑"/>
                         </a:rPr>
-                        <a:t>前端页面（出题/错题本/复习计划标签页）与系统测试、结果分析</a:t>
+                        <a:t>数据库设计与数据契约：七张表三层建模（E-R/CDM/PDM）、完整性与级联删除、ORM 与 Schema</a:t>
                       </a:r>
                     </a:p>
                   </a:txBody>
@@ -10438,8 +10424,6 @@
                   <a:srgbClr val="808080"/>
                 </a:solidFill>
                 <a:latin typeface="微软雅黑"/>
-                <a:ea typeface="微软雅黑"/>
-                <a:cs typeface="微软雅黑"/>
               </a:rPr>
               <a:t>17</a:t>
             </a:r>
@@ -10803,8 +10787,6 @@
                   <a:srgbClr val="808080"/>
                 </a:solidFill>
                 <a:latin typeface="微软雅黑"/>
-                <a:ea typeface="微软雅黑"/>
-                <a:cs typeface="微软雅黑"/>
               </a:rPr>
               <a:t>2</a:t>
             </a:r>
@@ -11206,8 +11188,6 @@
                   <a:srgbClr val="808080"/>
                 </a:solidFill>
                 <a:latin typeface="微软雅黑"/>
-                <a:ea typeface="微软雅黑"/>
-                <a:cs typeface="微软雅黑"/>
               </a:rPr>
               <a:t>3</a:t>
             </a:r>
@@ -11572,8 +11552,6 @@
                   <a:srgbClr val="808080"/>
                 </a:solidFill>
                 <a:latin typeface="微软雅黑"/>
-                <a:ea typeface="微软雅黑"/>
-                <a:cs typeface="微软雅黑"/>
               </a:rPr>
               <a:t>4</a:t>
             </a:r>
@@ -12476,8 +12454,6 @@
                   <a:srgbClr val="808080"/>
                 </a:solidFill>
                 <a:latin typeface="微软雅黑"/>
-                <a:ea typeface="微软雅黑"/>
-                <a:cs typeface="微软雅黑"/>
               </a:rPr>
               <a:t>5</a:t>
             </a:r>
@@ -12750,8 +12726,6 @@
                   <a:srgbClr val="808080"/>
                 </a:solidFill>
                 <a:latin typeface="微软雅黑"/>
-                <a:ea typeface="微软雅黑"/>
-                <a:cs typeface="微软雅黑"/>
               </a:rPr>
               <a:t>6</a:t>
             </a:r>
@@ -12977,8 +12951,6 @@
                   <a:srgbClr val="808080"/>
                 </a:solidFill>
                 <a:latin typeface="微软雅黑"/>
-                <a:ea typeface="微软雅黑"/>
-                <a:cs typeface="微软雅黑"/>
               </a:rPr>
               <a:t>7</a:t>
             </a:r>
@@ -13204,8 +13176,6 @@
                   <a:srgbClr val="808080"/>
                 </a:solidFill>
                 <a:latin typeface="微软雅黑"/>
-                <a:ea typeface="微软雅黑"/>
-                <a:cs typeface="微软雅黑"/>
               </a:rPr>
               <a:t>8</a:t>
             </a:r>
@@ -14275,8 +14245,6 @@
                   <a:srgbClr val="808080"/>
                 </a:solidFill>
                 <a:latin typeface="微软雅黑"/>
-                <a:ea typeface="微软雅黑"/>
-                <a:cs typeface="微软雅黑"/>
               </a:rPr>
               <a:t>9</a:t>
             </a:r>

--- a/defense/智学助手-课程设计答辩.pptx
+++ b/defense/智学助手-课程设计答辩.pptx
@@ -683,7 +683,7 @@
           <a:lstStyle/>
           <a:p>
             <a:r>
-              <a:t>【主讲：霍飞腾】</a:t>
+              <a:t>【主讲：周承锦】</a:t>
             </a:r>
           </a:p>
           <a:p>
@@ -768,7 +768,7 @@
           <a:lstStyle/>
           <a:p>
             <a:r>
-              <a:t>【主讲：陈果】</a:t>
+              <a:t>【主讲：霍飞腾】</a:t>
             </a:r>
           </a:p>
           <a:p>
@@ -848,7 +848,7 @@
           <a:lstStyle/>
           <a:p>
             <a:r>
-              <a:t>【主讲：负责核心架构的同学】</a:t>
+              <a:t>【主讲：袁钟其】</a:t>
             </a:r>
           </a:p>
           <a:p>
@@ -933,6 +933,11 @@
           <a:lstStyle/>
           <a:p>
             <a:r>
+              <a:t>【主讲：袁钟其】</a:t>
+            </a:r>
+          </a:p>
+          <a:p>
+            <a:r>
               <a:t>【收尾】</a:t>
             </a:r>
           </a:p>
@@ -1018,7 +1023,7 @@
           <a:lstStyle/>
           <a:p>
             <a:r>
-              <a:t>【主讲：霍飞腾 — 分工页】</a:t>
+              <a:t>【主讲：袁钟其】</a:t>
             </a:r>
           </a:p>
           <a:p>
@@ -1373,7 +1378,7 @@
           <a:lstStyle/>
           <a:p>
             <a:r>
-              <a:t>【主讲：建议由组长或你来讲】</a:t>
+              <a:t>【主讲：袁钟其】</a:t>
             </a:r>
           </a:p>
           <a:p>
@@ -1473,7 +1478,7 @@
           <a:lstStyle/>
           <a:p>
             <a:r>
-              <a:t>【主讲：负责核心架构的同学】</a:t>
+              <a:t>【主讲：周承锦】</a:t>
             </a:r>
           </a:p>
           <a:p>
@@ -1558,7 +1563,7 @@
           <a:lstStyle/>
           <a:p>
             <a:r>
-              <a:t>【主讲：负责核心架构的同学】</a:t>
+              <a:t>【主讲：周承锦】</a:t>
             </a:r>
           </a:p>
           <a:p>
@@ -1643,6 +1648,11 @@
           <a:lstStyle/>
           <a:p>
             <a:r>
+              <a:t>【主讲：刘纲正】</a:t>
+            </a:r>
+          </a:p>
+          <a:p>
+            <a:r>
               <a:t>【★ 你主讲 — 数据库设计（一）】</a:t>
             </a:r>
           </a:p>
@@ -1743,6 +1753,11 @@
           <a:lstStyle/>
           <a:p>
             <a:r>
+              <a:t>【主讲：刘纲正】</a:t>
+            </a:r>
+          </a:p>
+          <a:p>
+            <a:r>
               <a:t>【★ 你主讲 — 数据库设计（二）】</a:t>
             </a:r>
           </a:p>
@@ -1833,6 +1848,11 @@
           <a:lstStyle/>
           <a:p>
             <a:r>
+              <a:t>【主讲：刘纲正】</a:t>
+            </a:r>
+          </a:p>
+          <a:p>
+            <a:r>
               <a:t>【★ 你主讲 — 数据库设计（三）】</a:t>
             </a:r>
           </a:p>
@@ -1936,6 +1956,11 @@
         <p:txBody>
           <a:bodyPr/>
           <a:lstStyle/>
+          <a:p>
+            <a:r>
+              <a:t>【主讲：周承锦】</a:t>
+            </a:r>
+          </a:p>
           <a:p>
             <a:r>
               <a:t>【过渡页】</a:t>
@@ -5446,13 +5471,11 @@
               </a:spcAft>
             </a:pPr>
             <a:r>
-              <a:rPr sz="1300" b="0">
+              <a:rPr sz="1300">
                 <a:solidFill>
                   <a:srgbClr val="BDD7EE"/>
                 </a:solidFill>
                 <a:latin typeface="微软雅黑"/>
-                <a:ea typeface="微软雅黑"/>
-                <a:cs typeface="微软雅黑"/>
               </a:rPr>
               <a:t>负责人：周承锦</a:t>
             </a:r>
@@ -6155,15 +6178,13 @@
               </a:spcAft>
             </a:pPr>
             <a:r>
-              <a:rPr sz="1300" b="0">
+              <a:rPr sz="1300">
                 <a:solidFill>
                   <a:srgbClr val="BDD7EE"/>
                 </a:solidFill>
                 <a:latin typeface="微软雅黑"/>
-                <a:ea typeface="微软雅黑"/>
-                <a:cs typeface="微软雅黑"/>
               </a:rPr>
-              <a:t>负责人：霍飞腾</a:t>
+              <a:t>负责人：周承锦</a:t>
             </a:r>
           </a:p>
         </p:txBody>
@@ -6864,15 +6885,13 @@
               </a:spcAft>
             </a:pPr>
             <a:r>
-              <a:rPr sz="1300" b="0">
+              <a:rPr sz="1300">
                 <a:solidFill>
                   <a:srgbClr val="BDD7EE"/>
                 </a:solidFill>
                 <a:latin typeface="微软雅黑"/>
-                <a:ea typeface="微软雅黑"/>
-                <a:cs typeface="微软雅黑"/>
               </a:rPr>
-              <a:t>负责人：陈果</a:t>
+              <a:t>负责人：霍飞腾</a:t>
             </a:r>
           </a:p>
         </p:txBody>
@@ -7966,8 +7985,6 @@
                   <a:srgbClr val="BDD7EE"/>
                 </a:solidFill>
                 <a:latin typeface="微软雅黑"/>
-                <a:ea typeface="微软雅黑"/>
-                <a:cs typeface="微软雅黑"/>
               </a:rPr>
               <a:t>负责人：陈果</a:t>
             </a:r>
@@ -8772,13 +8789,11 @@
               </a:spcAft>
             </a:pPr>
             <a:r>
-              <a:rPr sz="1300" b="0">
+              <a:rPr sz="1300">
                 <a:solidFill>
                   <a:srgbClr val="BDD7EE"/>
                 </a:solidFill>
                 <a:latin typeface="微软雅黑"/>
-                <a:ea typeface="微软雅黑"/>
-                <a:cs typeface="微软雅黑"/>
               </a:rPr>
               <a:t>负责人：袁钟其</a:t>
             </a:r>
@@ -9815,9 +9830,6 @@
                       <a:pPr algn="ctr"/>
                       <a:r>
                         <a:rPr sz="1100">
-                          <a:solidFill>
-                            <a:srgbClr val="222222"/>
-                          </a:solidFill>
                           <a:latin typeface="微软雅黑"/>
                           <a:ea typeface="微软雅黑"/>
                           <a:cs typeface="微软雅黑"/>
@@ -9840,9 +9852,6 @@
                       <a:pPr algn="ctr"/>
                       <a:r>
                         <a:rPr sz="1100">
-                          <a:solidFill>
-                            <a:srgbClr val="222222"/>
-                          </a:solidFill>
                           <a:latin typeface="微软雅黑"/>
                           <a:ea typeface="微软雅黑"/>
                           <a:cs typeface="微软雅黑"/>
@@ -9865,9 +9874,6 @@
                       <a:pPr algn="ctr"/>
                       <a:r>
                         <a:rPr sz="1100">
-                          <a:solidFill>
-                            <a:srgbClr val="222222"/>
-                          </a:solidFill>
                           <a:latin typeface="微软雅黑"/>
                           <a:ea typeface="微软雅黑"/>
                           <a:cs typeface="微软雅黑"/>
@@ -9890,14 +9896,11 @@
                       <a:pPr algn="l"/>
                       <a:r>
                         <a:rPr sz="1100">
-                          <a:solidFill>
-                            <a:srgbClr val="222222"/>
-                          </a:solidFill>
                           <a:latin typeface="微软雅黑"/>
                           <a:ea typeface="微软雅黑"/>
                           <a:cs typeface="微软雅黑"/>
                         </a:rPr>
-                        <a:t>系统架构与 RAG 核心链路：FastAPI 分层、MySQL/Chroma 双库、文档入库、RAG 问答；部署</a:t>
+                        <a:t>项目管理与协调：方案设计、任务分解与进度把控；环境搭建与部署验证；答辩组织</a:t>
                       </a:r>
                     </a:p>
                   </a:txBody>
@@ -9917,9 +9920,6 @@
                       <a:pPr algn="ctr"/>
                       <a:r>
                         <a:rPr sz="1100">
-                          <a:solidFill>
-                            <a:srgbClr val="222222"/>
-                          </a:solidFill>
                           <a:latin typeface="微软雅黑"/>
                           <a:ea typeface="微软雅黑"/>
                           <a:cs typeface="微软雅黑"/>
@@ -9942,9 +9942,6 @@
                       <a:pPr algn="ctr"/>
                       <a:r>
                         <a:rPr sz="1100">
-                          <a:solidFill>
-                            <a:srgbClr val="222222"/>
-                          </a:solidFill>
                           <a:latin typeface="微软雅黑"/>
                           <a:ea typeface="微软雅黑"/>
                           <a:cs typeface="微软雅黑"/>
@@ -9967,9 +9964,6 @@
                       <a:pPr algn="ctr"/>
                       <a:r>
                         <a:rPr sz="1100">
-                          <a:solidFill>
-                            <a:srgbClr val="222222"/>
-                          </a:solidFill>
                           <a:latin typeface="微软雅黑"/>
                           <a:ea typeface="微软雅黑"/>
                           <a:cs typeface="微软雅黑"/>
@@ -9992,14 +9986,11 @@
                       <a:pPr algn="l"/>
                       <a:r>
                         <a:rPr sz="1100">
-                          <a:solidFill>
-                            <a:srgbClr val="222222"/>
-                          </a:solidFill>
                           <a:latin typeface="微软雅黑"/>
                           <a:ea typeface="微软雅黑"/>
                           <a:cs typeface="微软雅黑"/>
                         </a:rPr>
-                        <a:t>F3 自动出题与判题：出题提示词与 JSON 解析重试、客观题与简答题判分、文件大小校验</a:t>
+                        <a:t>系统全部功能代码实现：分层架构、双库接入、文档入库、RAG 问答、出题判题、错题本、复习计划、前端</a:t>
                       </a:r>
                     </a:p>
                   </a:txBody>
@@ -10019,9 +10010,6 @@
                       <a:pPr algn="ctr"/>
                       <a:r>
                         <a:rPr sz="1100">
-                          <a:solidFill>
-                            <a:srgbClr val="222222"/>
-                          </a:solidFill>
                           <a:latin typeface="微软雅黑"/>
                           <a:ea typeface="微软雅黑"/>
                           <a:cs typeface="微软雅黑"/>
@@ -10044,9 +10032,6 @@
                       <a:pPr algn="ctr"/>
                       <a:r>
                         <a:rPr sz="1100">
-                          <a:solidFill>
-                            <a:srgbClr val="222222"/>
-                          </a:solidFill>
                           <a:latin typeface="微软雅黑"/>
                           <a:ea typeface="微软雅黑"/>
                           <a:cs typeface="微软雅黑"/>
@@ -10069,9 +10054,6 @@
                       <a:pPr algn="ctr"/>
                       <a:r>
                         <a:rPr sz="1100">
-                          <a:solidFill>
-                            <a:srgbClr val="222222"/>
-                          </a:solidFill>
                           <a:latin typeface="微软雅黑"/>
                           <a:ea typeface="微软雅黑"/>
                           <a:cs typeface="微软雅黑"/>
@@ -10094,14 +10076,11 @@
                       <a:pPr algn="l"/>
                       <a:r>
                         <a:rPr sz="1100">
-                          <a:solidFill>
-                            <a:srgbClr val="222222"/>
-                          </a:solidFill>
                           <a:latin typeface="微软雅黑"/>
                           <a:ea typeface="微软雅黑"/>
                           <a:cs typeface="微软雅黑"/>
                         </a:rPr>
-                        <a:t>F4 错题本与 F5 复习计划：错题沉淀与掌握管理、七天复习计划生成与日期计算；报告统稿</a:t>
+                        <a:t>系统测试与数据整理：测试用例设计与执行、记录结果数据、整理结果分析指标</a:t>
                       </a:r>
                     </a:p>
                   </a:txBody>
@@ -10121,9 +10100,6 @@
                       <a:pPr algn="ctr"/>
                       <a:r>
                         <a:rPr sz="1100">
-                          <a:solidFill>
-                            <a:srgbClr val="222222"/>
-                          </a:solidFill>
                           <a:latin typeface="微软雅黑"/>
                           <a:ea typeface="微软雅黑"/>
                           <a:cs typeface="微软雅黑"/>
@@ -10146,9 +10122,6 @@
                       <a:pPr algn="ctr"/>
                       <a:r>
                         <a:rPr sz="1100">
-                          <a:solidFill>
-                            <a:srgbClr val="222222"/>
-                          </a:solidFill>
                           <a:latin typeface="微软雅黑"/>
                           <a:ea typeface="微软雅黑"/>
                           <a:cs typeface="微软雅黑"/>
@@ -10171,9 +10144,6 @@
                       <a:pPr algn="ctr"/>
                       <a:r>
                         <a:rPr sz="1100">
-                          <a:solidFill>
-                            <a:srgbClr val="222222"/>
-                          </a:solidFill>
                           <a:latin typeface="微软雅黑"/>
                           <a:ea typeface="微软雅黑"/>
                           <a:cs typeface="微软雅黑"/>
@@ -10196,14 +10166,11 @@
                       <a:pPr algn="l"/>
                       <a:r>
                         <a:rPr sz="1100">
-                          <a:solidFill>
-                            <a:srgbClr val="222222"/>
-                          </a:solidFill>
                           <a:latin typeface="微软雅黑"/>
                           <a:ea typeface="微软雅黑"/>
                           <a:cs typeface="微软雅黑"/>
                         </a:rPr>
-                        <a:t>前端页面与系统测试：五个功能标签页交互实现；功能测试与结构测试用例设计与执行</a:t>
+                        <a:t>界面验证与使用文档：五页面操作验证、界面截图采集、使用说明与部署手册</a:t>
                       </a:r>
                     </a:p>
                   </a:txBody>
@@ -10223,9 +10190,6 @@
                       <a:pPr algn="ctr"/>
                       <a:r>
                         <a:rPr sz="1100">
-                          <a:solidFill>
-                            <a:srgbClr val="222222"/>
-                          </a:solidFill>
                           <a:latin typeface="微软雅黑"/>
                           <a:ea typeface="微软雅黑"/>
                           <a:cs typeface="微软雅黑"/>
@@ -10248,9 +10212,6 @@
                       <a:pPr algn="ctr"/>
                       <a:r>
                         <a:rPr sz="1100">
-                          <a:solidFill>
-                            <a:srgbClr val="222222"/>
-                          </a:solidFill>
                           <a:latin typeface="微软雅黑"/>
                           <a:ea typeface="微软雅黑"/>
                           <a:cs typeface="微软雅黑"/>
@@ -10273,9 +10234,6 @@
                       <a:pPr algn="ctr"/>
                       <a:r>
                         <a:rPr sz="1100">
-                          <a:solidFill>
-                            <a:srgbClr val="222222"/>
-                          </a:solidFill>
                           <a:latin typeface="微软雅黑"/>
                           <a:ea typeface="微软雅黑"/>
                           <a:cs typeface="微软雅黑"/>
@@ -10298,14 +10256,11 @@
                       <a:pPr algn="l"/>
                       <a:r>
                         <a:rPr sz="1100">
-                          <a:solidFill>
-                            <a:srgbClr val="222222"/>
-                          </a:solidFill>
                           <a:latin typeface="微软雅黑"/>
                           <a:ea typeface="微软雅黑"/>
                           <a:cs typeface="微软雅黑"/>
                         </a:rPr>
-                        <a:t>数据库设计与数据契约：七张表三层建模（E-R/CDM/PDM）、完整性与级联删除、ORM 与 Schema</a:t>
+                        <a:t>报告撰写与统稿：数据库三层建模设计、过程论述与结果分析撰写、全文统稿</a:t>
                       </a:r>
                     </a:p>
                   </a:txBody>
@@ -11400,6 +11355,43 @@
                 <a:cs typeface="微软雅黑"/>
               </a:rPr>
               <a:t>以检索增强生成（RAG）为主线技术，将课程资料向量化构建专属知识库，使回答与题目均“有据可依”；围绕“学、问、练、测、复”五个环节构建完整学习闭环，把资料检索、知识问答、自动出题、错题沉淀与复习规划串成连续链路。</a:t>
+            </a:r>
+          </a:p>
+        </p:txBody>
+      </p:sp>
+      <p:sp>
+        <p:nvSpPr>
+          <p:cNvPr id="8" name="TextBox 7"/>
+          <p:cNvSpPr txBox="1"/>
+          <p:nvPr/>
+        </p:nvSpPr>
+        <p:spPr>
+          <a:xfrm>
+            <a:off x="8321040" y="274320"/>
+            <a:ext cx="3383280" cy="457200"/>
+          </a:xfrm>
+          <a:prstGeom prst="rect">
+            <a:avLst/>
+          </a:prstGeom>
+          <a:noFill/>
+        </p:spPr>
+        <p:txBody>
+          <a:bodyPr wrap="square">
+            <a:spAutoFit/>
+          </a:bodyPr>
+          <a:lstStyle/>
+          <a:p>
+            <a:pPr algn="r"/>
+            <a:r>
+              <a:rPr sz="1300">
+                <a:solidFill>
+                  <a:srgbClr val="BDD7EE"/>
+                </a:solidFill>
+                <a:latin typeface="微软雅黑"/>
+                <a:ea typeface="微软雅黑"/>
+                <a:cs typeface="微软雅黑"/>
+              </a:rPr>
+              <a:t>负责人：袁钟其</a:t>
             </a:r>
           </a:p>
         </p:txBody>
@@ -12306,6 +12298,43 @@
           </a:graphicData>
         </a:graphic>
       </p:graphicFrame>
+      <p:sp>
+        <p:nvSpPr>
+          <p:cNvPr id="9" name="TextBox 8"/>
+          <p:cNvSpPr txBox="1"/>
+          <p:nvPr/>
+        </p:nvSpPr>
+        <p:spPr>
+          <a:xfrm>
+            <a:off x="8321040" y="274320"/>
+            <a:ext cx="3383280" cy="457200"/>
+          </a:xfrm>
+          <a:prstGeom prst="rect">
+            <a:avLst/>
+          </a:prstGeom>
+          <a:noFill/>
+        </p:spPr>
+        <p:txBody>
+          <a:bodyPr wrap="square">
+            <a:spAutoFit/>
+          </a:bodyPr>
+          <a:lstStyle/>
+          <a:p>
+            <a:pPr algn="r"/>
+            <a:r>
+              <a:rPr sz="1300">
+                <a:solidFill>
+                  <a:srgbClr val="BDD7EE"/>
+                </a:solidFill>
+                <a:latin typeface="微软雅黑"/>
+                <a:ea typeface="微软雅黑"/>
+                <a:cs typeface="微软雅黑"/>
+              </a:rPr>
+              <a:t>负责人：周承锦</a:t>
+            </a:r>
+          </a:p>
+        </p:txBody>
+      </p:sp>
     </p:spTree>
   </p:cSld>
   <p:clrMapOvr>
@@ -12578,6 +12607,43 @@
           </a:p>
         </p:txBody>
       </p:sp>
+      <p:sp>
+        <p:nvSpPr>
+          <p:cNvPr id="8" name="TextBox 7"/>
+          <p:cNvSpPr txBox="1"/>
+          <p:nvPr/>
+        </p:nvSpPr>
+        <p:spPr>
+          <a:xfrm>
+            <a:off x="8321040" y="274320"/>
+            <a:ext cx="3383280" cy="457200"/>
+          </a:xfrm>
+          <a:prstGeom prst="rect">
+            <a:avLst/>
+          </a:prstGeom>
+          <a:noFill/>
+        </p:spPr>
+        <p:txBody>
+          <a:bodyPr wrap="square">
+            <a:spAutoFit/>
+          </a:bodyPr>
+          <a:lstStyle/>
+          <a:p>
+            <a:pPr algn="r"/>
+            <a:r>
+              <a:rPr sz="1300">
+                <a:solidFill>
+                  <a:srgbClr val="BDD7EE"/>
+                </a:solidFill>
+                <a:latin typeface="微软雅黑"/>
+                <a:ea typeface="微软雅黑"/>
+                <a:cs typeface="微软雅黑"/>
+              </a:rPr>
+              <a:t>负责人：周承锦</a:t>
+            </a:r>
+          </a:p>
+        </p:txBody>
+      </p:sp>
     </p:spTree>
   </p:cSld>
   <p:clrMapOvr>
@@ -12803,6 +12869,43 @@
           </a:p>
         </p:txBody>
       </p:sp>
+      <p:sp>
+        <p:nvSpPr>
+          <p:cNvPr id="7" name="TextBox 6"/>
+          <p:cNvSpPr txBox="1"/>
+          <p:nvPr/>
+        </p:nvSpPr>
+        <p:spPr>
+          <a:xfrm>
+            <a:off x="8321040" y="274320"/>
+            <a:ext cx="3383280" cy="457200"/>
+          </a:xfrm>
+          <a:prstGeom prst="rect">
+            <a:avLst/>
+          </a:prstGeom>
+          <a:noFill/>
+        </p:spPr>
+        <p:txBody>
+          <a:bodyPr wrap="square">
+            <a:spAutoFit/>
+          </a:bodyPr>
+          <a:lstStyle/>
+          <a:p>
+            <a:pPr algn="r"/>
+            <a:r>
+              <a:rPr sz="1300">
+                <a:solidFill>
+                  <a:srgbClr val="BDD7EE"/>
+                </a:solidFill>
+                <a:latin typeface="微软雅黑"/>
+                <a:ea typeface="微软雅黑"/>
+                <a:cs typeface="微软雅黑"/>
+              </a:rPr>
+              <a:t>负责人：刘纲正</a:t>
+            </a:r>
+          </a:p>
+        </p:txBody>
+      </p:sp>
     </p:spTree>
   </p:cSld>
   <p:clrMapOvr>
@@ -13024,6 +13127,43 @@
                 <a:cs typeface="微软雅黑"/>
               </a:rPr>
               <a:t>图 3　智学助手系统概念数据模型（CDM）图</a:t>
+            </a:r>
+          </a:p>
+        </p:txBody>
+      </p:sp>
+      <p:sp>
+        <p:nvSpPr>
+          <p:cNvPr id="7" name="TextBox 6"/>
+          <p:cNvSpPr txBox="1"/>
+          <p:nvPr/>
+        </p:nvSpPr>
+        <p:spPr>
+          <a:xfrm>
+            <a:off x="8321040" y="274320"/>
+            <a:ext cx="3383280" cy="457200"/>
+          </a:xfrm>
+          <a:prstGeom prst="rect">
+            <a:avLst/>
+          </a:prstGeom>
+          <a:noFill/>
+        </p:spPr>
+        <p:txBody>
+          <a:bodyPr wrap="square">
+            <a:spAutoFit/>
+          </a:bodyPr>
+          <a:lstStyle/>
+          <a:p>
+            <a:pPr algn="r"/>
+            <a:r>
+              <a:rPr sz="1300">
+                <a:solidFill>
+                  <a:srgbClr val="BDD7EE"/>
+                </a:solidFill>
+                <a:latin typeface="微软雅黑"/>
+                <a:ea typeface="微软雅黑"/>
+                <a:cs typeface="微软雅黑"/>
+              </a:rPr>
+              <a:t>负责人：刘纲正</a:t>
             </a:r>
           </a:p>
         </p:txBody>
@@ -14097,6 +14237,43 @@
           </a:p>
         </p:txBody>
       </p:sp>
+      <p:sp>
+        <p:nvSpPr>
+          <p:cNvPr id="7" name="TextBox 6"/>
+          <p:cNvSpPr txBox="1"/>
+          <p:nvPr/>
+        </p:nvSpPr>
+        <p:spPr>
+          <a:xfrm>
+            <a:off x="8321040" y="274320"/>
+            <a:ext cx="3383280" cy="457200"/>
+          </a:xfrm>
+          <a:prstGeom prst="rect">
+            <a:avLst/>
+          </a:prstGeom>
+          <a:noFill/>
+        </p:spPr>
+        <p:txBody>
+          <a:bodyPr wrap="square">
+            <a:spAutoFit/>
+          </a:bodyPr>
+          <a:lstStyle/>
+          <a:p>
+            <a:pPr algn="r"/>
+            <a:r>
+              <a:rPr sz="1300">
+                <a:solidFill>
+                  <a:srgbClr val="BDD7EE"/>
+                </a:solidFill>
+                <a:latin typeface="微软雅黑"/>
+                <a:ea typeface="微软雅黑"/>
+                <a:cs typeface="微软雅黑"/>
+              </a:rPr>
+              <a:t>负责人：刘纲正</a:t>
+            </a:r>
+          </a:p>
+        </p:txBody>
+      </p:sp>
     </p:spTree>
   </p:cSld>
   <p:clrMapOvr>
@@ -15051,6 +15228,43 @@
           </a:p>
         </p:txBody>
       </p:sp>
+      <p:sp>
+        <p:nvSpPr>
+          <p:cNvPr id="7" name="TextBox 6"/>
+          <p:cNvSpPr txBox="1"/>
+          <p:nvPr/>
+        </p:nvSpPr>
+        <p:spPr>
+          <a:xfrm>
+            <a:off x="8321040" y="274320"/>
+            <a:ext cx="3383280" cy="457200"/>
+          </a:xfrm>
+          <a:prstGeom prst="rect">
+            <a:avLst/>
+          </a:prstGeom>
+          <a:noFill/>
+        </p:spPr>
+        <p:txBody>
+          <a:bodyPr wrap="square">
+            <a:spAutoFit/>
+          </a:bodyPr>
+          <a:lstStyle/>
+          <a:p>
+            <a:pPr algn="r"/>
+            <a:r>
+              <a:rPr sz="1300">
+                <a:solidFill>
+                  <a:srgbClr val="BDD7EE"/>
+                </a:solidFill>
+                <a:latin typeface="微软雅黑"/>
+                <a:ea typeface="微软雅黑"/>
+                <a:cs typeface="微软雅黑"/>
+              </a:rPr>
+              <a:t>负责人：周承锦</a:t>
+            </a:r>
+          </a:p>
+        </p:txBody>
+      </p:sp>
     </p:spTree>
   </p:cSld>
   <p:clrMapOvr>

--- a/defense/智学助手-课程设计答辩.pptx
+++ b/defense/智学助手-课程设计答辩.pptx
@@ -1,29 +1,32 @@
 
 <file path=ppt/presentation.xml><?xml version="1.0" encoding="utf-8"?>
-<p:presentation xmlns:a="http://schemas.openxmlformats.org/drawingml/2006/main" xmlns:r="http://schemas.openxmlformats.org/officeDocument/2006/relationships" xmlns:p="http://schemas.openxmlformats.org/presentationml/2006/main" saveSubsetFonts="1" autoCompressPictures="0">
+<p:presentation xmlns:a="http://schemas.openxmlformats.org/drawingml/2006/main" xmlns:r="http://schemas.openxmlformats.org/officeDocument/2006/relationships" xmlns:p="http://schemas.openxmlformats.org/presentationml/2006/main" autoCompressPictures="0">
   <p:sldMasterIdLst>
     <p:sldMasterId id="2147483648" r:id="rId1"/>
   </p:sldMasterIdLst>
+  <p:notesMasterIdLst>
+    <p:notesMasterId r:id="rId4"/>
+  </p:notesMasterIdLst>
   <p:sldIdLst>
-    <p:sldId id="256" r:id="rId7"/>
-    <p:sldId id="257" r:id="rId8"/>
-    <p:sldId id="258" r:id="rId9"/>
-    <p:sldId id="259" r:id="rId10"/>
-    <p:sldId id="260" r:id="rId11"/>
-    <p:sldId id="261" r:id="rId12"/>
-    <p:sldId id="262" r:id="rId13"/>
-    <p:sldId id="263" r:id="rId14"/>
-    <p:sldId id="264" r:id="rId15"/>
-    <p:sldId id="265" r:id="rId16"/>
-    <p:sldId id="266" r:id="rId17"/>
-    <p:sldId id="267" r:id="rId18"/>
-    <p:sldId id="272" r:id="rId24"/>
-    <p:sldId id="268" r:id="rId19"/>
-    <p:sldId id="269" r:id="rId20"/>
-    <p:sldId id="270" r:id="rId21"/>
-    <p:sldId id="271" r:id="rId22"/>
+    <p:sldId id="256" r:id="rId3"/>
+    <p:sldId id="257" r:id="rId5"/>
+    <p:sldId id="258" r:id="rId6"/>
+    <p:sldId id="259" r:id="rId7"/>
+    <p:sldId id="260" r:id="rId8"/>
+    <p:sldId id="261" r:id="rId9"/>
+    <p:sldId id="262" r:id="rId10"/>
+    <p:sldId id="263" r:id="rId11"/>
+    <p:sldId id="264" r:id="rId12"/>
+    <p:sldId id="265" r:id="rId13"/>
+    <p:sldId id="266" r:id="rId14"/>
+    <p:sldId id="267" r:id="rId15"/>
+    <p:sldId id="272" r:id="rId16"/>
+    <p:sldId id="268" r:id="rId17"/>
+    <p:sldId id="269" r:id="rId18"/>
+    <p:sldId id="270" r:id="rId19"/>
+    <p:sldId id="271" r:id="rId20"/>
   </p:sldIdLst>
-  <p:sldSz cx="12191695" cy="6858000" type="screen4x3"/>
+  <p:sldSz cx="12191365" cy="6858000" type="screen4x3"/>
   <p:notesSz cx="6858000" cy="9144000"/>
   <p:defaultTextStyle>
     <a:defPPr>
@@ -120,11 +123,27 @@
       </a:defRPr>
     </a:lvl9pPr>
   </p:defaultTextStyle>
+  <p:extLst>
+    <p:ext uri="{EFAFB233-063F-42B5-8137-9DF3F51BA10A}">
+      <p15:sldGuideLst xmlns:p15="http://schemas.microsoft.com/office/powerpoint/2012/main">
+        <p15:guide id="1" orient="horz" pos="2160" userDrawn="1">
+          <p15:clr>
+            <a:srgbClr val="A4A3A4"/>
+          </p15:clr>
+        </p15:guide>
+        <p15:guide id="2" pos="2880" userDrawn="1">
+          <p15:clr>
+            <a:srgbClr val="A4A3A4"/>
+          </p15:clr>
+        </p15:guide>
+      </p15:sldGuideLst>
+    </p:ext>
+  </p:extLst>
 </p:presentation>
 </file>
 
 <file path=ppt/notesMasters/notesMaster1.xml><?xml version="1.0" encoding="utf-8"?>
-<p:notesMaster xmlns:a="http://schemas.openxmlformats.org/drawingml/2006/main" xmlns:p="http://schemas.openxmlformats.org/presentationml/2006/main" xmlns:r="http://schemas.openxmlformats.org/officeDocument/2006/relationships">
+<p:notesMaster xmlns:a="http://schemas.openxmlformats.org/drawingml/2006/main" xmlns:r="http://schemas.openxmlformats.org/officeDocument/2006/relationships" xmlns:p="http://schemas.openxmlformats.org/presentationml/2006/main">
   <p:cSld>
     <p:bg>
       <p:bgRef idx="1001">
@@ -205,7 +224,6 @@
           <a:p>
             <a:fld id="{0F89C1C7-3DCD-1040-A9CF-14679D8B5DDD}" type="datetimeFigureOut">
               <a:rPr lang="en-US" smtClean="0"/>
-              <a:t>10/17/16</a:t>
             </a:fld>
             <a:endParaRPr lang="en-US"/>
           </a:p>
@@ -272,6 +290,7 @@
               <a:rPr lang="en-US" smtClean="0"/>
               <a:t>Click to edit Master text styles</a:t>
             </a:r>
+            <a:endParaRPr lang="en-US" smtClean="0"/>
           </a:p>
           <a:p>
             <a:pPr lvl="1"/>
@@ -279,6 +298,7 @@
               <a:rPr lang="en-US" smtClean="0"/>
               <a:t>Second level</a:t>
             </a:r>
+            <a:endParaRPr lang="en-US" smtClean="0"/>
           </a:p>
           <a:p>
             <a:pPr lvl="2"/>
@@ -286,6 +306,7 @@
               <a:rPr lang="en-US" smtClean="0"/>
               <a:t>Third level</a:t>
             </a:r>
+            <a:endParaRPr lang="en-US" smtClean="0"/>
           </a:p>
           <a:p>
             <a:pPr lvl="3"/>
@@ -293,6 +314,7 @@
               <a:rPr lang="en-US" smtClean="0"/>
               <a:t>Fourth level</a:t>
             </a:r>
+            <a:endParaRPr lang="en-US" smtClean="0"/>
           </a:p>
           <a:p>
             <a:pPr lvl="4"/>
@@ -364,18 +386,12 @@
           <a:p>
             <a:fld id="{BB5E49A5-4136-284D-997B-48E1D791AD67}" type="slidenum">
               <a:rPr lang="en-US" smtClean="0"/>
-              <a:t>‹#›</a:t>
             </a:fld>
             <a:endParaRPr lang="en-US"/>
           </a:p>
         </p:txBody>
       </p:sp>
     </p:spTree>
-    <p:extLst>
-      <p:ext uri="{BB962C8B-B14F-4D97-AF65-F5344CB8AC3E}">
-        <p14:creationId xmlns:p14="http://schemas.microsoft.com/office/powerpoint/2010/main" val="2623252185"/>
-      </p:ext>
-    </p:extLst>
   </p:cSld>
   <p:clrMap bg1="lt1" tx1="dk1" bg2="lt2" tx2="dk2" accent1="accent1" accent2="accent2" accent3="accent3" accent4="accent4" accent5="accent5" accent6="accent6" hlink="hlink" folHlink="folHlink"/>
   <p:notesStyle>
@@ -474,7 +490,7 @@
 </file>
 
 <file path=ppt/notesSlides/notesSlide1.xml><?xml version="1.0" encoding="utf-8"?>
-<p:notes xmlns:a="http://schemas.openxmlformats.org/drawingml/2006/main" xmlns:p="http://schemas.openxmlformats.org/presentationml/2006/main" xmlns:r="http://schemas.openxmlformats.org/officeDocument/2006/relationships">
+<p:notes xmlns:a="http://schemas.openxmlformats.org/drawingml/2006/main" xmlns:r="http://schemas.openxmlformats.org/officeDocument/2006/relationships" xmlns:p="http://schemas.openxmlformats.org/presentationml/2006/main">
   <p:cSld>
     <p:spTree>
       <p:nvGrpSpPr>
@@ -509,7 +525,7 @@
             <a:spLocks noGrp="1"/>
           </p:cNvSpPr>
           <p:nvPr>
-            <p:ph type="body" idx="3" sz="quarter"/>
+            <p:ph type="body" sz="quarter" idx="3"/>
           </p:nvPr>
         </p:nvSpPr>
         <p:spPr/>
@@ -545,7 +561,7 @@
             <a:spLocks noGrp="1"/>
           </p:cNvSpPr>
           <p:nvPr>
-            <p:ph type="sldNum" idx="5" sz="quarter"/>
+            <p:ph type="sldNum" sz="quarter" idx="5"/>
           </p:nvPr>
         </p:nvSpPr>
         <p:spPr/>
@@ -559,7 +575,7 @@
 </file>
 
 <file path=ppt/notesSlides/notesSlide10.xml><?xml version="1.0" encoding="utf-8"?>
-<p:notes xmlns:a="http://schemas.openxmlformats.org/drawingml/2006/main" xmlns:p="http://schemas.openxmlformats.org/presentationml/2006/main" xmlns:r="http://schemas.openxmlformats.org/officeDocument/2006/relationships">
+<p:notes xmlns:a="http://schemas.openxmlformats.org/drawingml/2006/main" xmlns:r="http://schemas.openxmlformats.org/officeDocument/2006/relationships" xmlns:p="http://schemas.openxmlformats.org/presentationml/2006/main">
   <p:cSld>
     <p:spTree>
       <p:nvGrpSpPr>
@@ -594,7 +610,7 @@
             <a:spLocks noGrp="1"/>
           </p:cNvSpPr>
           <p:nvPr>
-            <p:ph type="body" idx="3" sz="quarter"/>
+            <p:ph type="body" sz="quarter" idx="3"/>
           </p:nvPr>
         </p:nvSpPr>
         <p:spPr/>
@@ -625,7 +641,7 @@
             <a:spLocks noGrp="1"/>
           </p:cNvSpPr>
           <p:nvPr>
-            <p:ph type="sldNum" idx="5" sz="quarter"/>
+            <p:ph type="sldNum" sz="quarter" idx="5"/>
           </p:nvPr>
         </p:nvSpPr>
         <p:spPr/>
@@ -639,7 +655,7 @@
 </file>
 
 <file path=ppt/notesSlides/notesSlide11.xml><?xml version="1.0" encoding="utf-8"?>
-<p:notes xmlns:a="http://schemas.openxmlformats.org/drawingml/2006/main" xmlns:p="http://schemas.openxmlformats.org/presentationml/2006/main" xmlns:r="http://schemas.openxmlformats.org/officeDocument/2006/relationships">
+<p:notes xmlns:a="http://schemas.openxmlformats.org/drawingml/2006/main" xmlns:r="http://schemas.openxmlformats.org/officeDocument/2006/relationships" xmlns:p="http://schemas.openxmlformats.org/presentationml/2006/main">
   <p:cSld>
     <p:spTree>
       <p:nvGrpSpPr>
@@ -674,7 +690,7 @@
             <a:spLocks noGrp="1"/>
           </p:cNvSpPr>
           <p:nvPr>
-            <p:ph type="body" idx="3" sz="quarter"/>
+            <p:ph type="body" sz="quarter" idx="3"/>
           </p:nvPr>
         </p:nvSpPr>
         <p:spPr/>
@@ -710,7 +726,7 @@
             <a:spLocks noGrp="1"/>
           </p:cNvSpPr>
           <p:nvPr>
-            <p:ph type="sldNum" idx="5" sz="quarter"/>
+            <p:ph type="sldNum" sz="quarter" idx="5"/>
           </p:nvPr>
         </p:nvSpPr>
         <p:spPr/>
@@ -724,7 +740,7 @@
 </file>
 
 <file path=ppt/notesSlides/notesSlide12.xml><?xml version="1.0" encoding="utf-8"?>
-<p:notes xmlns:a="http://schemas.openxmlformats.org/drawingml/2006/main" xmlns:p="http://schemas.openxmlformats.org/presentationml/2006/main" xmlns:r="http://schemas.openxmlformats.org/officeDocument/2006/relationships">
+<p:notes xmlns:a="http://schemas.openxmlformats.org/drawingml/2006/main" xmlns:r="http://schemas.openxmlformats.org/officeDocument/2006/relationships" xmlns:p="http://schemas.openxmlformats.org/presentationml/2006/main">
   <p:cSld>
     <p:spTree>
       <p:nvGrpSpPr>
@@ -759,7 +775,7 @@
             <a:spLocks noGrp="1"/>
           </p:cNvSpPr>
           <p:nvPr>
-            <p:ph type="body" idx="3" sz="quarter"/>
+            <p:ph type="body" sz="quarter" idx="3"/>
           </p:nvPr>
         </p:nvSpPr>
         <p:spPr/>
@@ -790,7 +806,7 @@
             <a:spLocks noGrp="1"/>
           </p:cNvSpPr>
           <p:nvPr>
-            <p:ph type="sldNum" idx="5" sz="quarter"/>
+            <p:ph type="sldNum" sz="quarter" idx="5"/>
           </p:nvPr>
         </p:nvSpPr>
         <p:spPr/>
@@ -804,7 +820,7 @@
 </file>
 
 <file path=ppt/notesSlides/notesSlide13.xml><?xml version="1.0" encoding="utf-8"?>
-<p:notes xmlns:a="http://schemas.openxmlformats.org/drawingml/2006/main" xmlns:p="http://schemas.openxmlformats.org/presentationml/2006/main" xmlns:r="http://schemas.openxmlformats.org/officeDocument/2006/relationships">
+<p:notes xmlns:a="http://schemas.openxmlformats.org/drawingml/2006/main" xmlns:r="http://schemas.openxmlformats.org/officeDocument/2006/relationships" xmlns:p="http://schemas.openxmlformats.org/presentationml/2006/main">
   <p:cSld>
     <p:spTree>
       <p:nvGrpSpPr>
@@ -839,7 +855,7 @@
             <a:spLocks noGrp="1"/>
           </p:cNvSpPr>
           <p:nvPr>
-            <p:ph type="body" idx="3" sz="quarter"/>
+            <p:ph type="body" sz="quarter" idx="3"/>
           </p:nvPr>
         </p:nvSpPr>
         <p:spPr/>
@@ -848,22 +864,42 @@
           <a:lstStyle/>
           <a:p>
             <a:r>
-              <a:t>【主讲：袁钟其】</a:t>
-            </a:r>
-          </a:p>
-          <a:p>
-            <a:r>
-              <a:t>四点：MySQL 走 Docker Compose（端口 3307）、后端 Uvicorn 启动、Chroma 进程内本地持久化、敏感信息走 .env。</a:t>
-            </a:r>
-          </a:p>
-          <a:p>
-            <a:r>
-              <a:t>⚠ 注意：后端不在 Docker 里跑，别口误说成“Docker 一键启动整个系统”。</a:t>
-            </a:r>
-          </a:p>
-          <a:p>
-            <a:r>
-              <a:t>末尾的“运行截图”位置需补全。</a:t>
+              <a:t>【主讲：陈果】</a:t>
+            </a:r>
+          </a:p>
+          <a:p>
+            <a:r>
+              <a:t>本页需补充五张界面截图，截图要求与报告第三节“11．实现的界面”一致：</a:t>
+            </a:r>
+          </a:p>
+          <a:p>
+            <a:r>
+              <a:t>1. 文档管理页（已选课程 + 文档列表，能看到切分块数）</a:t>
+            </a:r>
+          </a:p>
+          <a:p>
+            <a:r>
+              <a:t>2. 智能问答页（提问与回答，下方显示引用来源卡片）</a:t>
+            </a:r>
+          </a:p>
+          <a:p>
+            <a:r>
+              <a:t>3. 自动出题页（参数表单 + 题目卡片，含判分结果）</a:t>
+            </a:r>
+          </a:p>
+          <a:p>
+            <a:r>
+              <a:t>4. 错题本页（错题卡片，用户答案与正确答案对比）</a:t>
+            </a:r>
+          </a:p>
+          <a:p>
+            <a:r>
+              <a:t>5. 复习计划页（按日期分组的条目，含完成勾选）</a:t>
+            </a:r>
+          </a:p>
+          <a:p>
+            <a:r>
+              <a:t>讲的时候按“选课程 → 传文档 → 提问 → 出题 → 判错 → 排复习”的顺序讲，完整演示一遍学习闭环。</a:t>
             </a:r>
           </a:p>
         </p:txBody>
@@ -875,7 +911,7 @@
             <a:spLocks noGrp="1"/>
           </p:cNvSpPr>
           <p:nvPr>
-            <p:ph type="sldNum" idx="5" sz="quarter"/>
+            <p:ph type="sldNum" sz="quarter" idx="5"/>
           </p:nvPr>
         </p:nvSpPr>
         <p:spPr/>
@@ -889,7 +925,7 @@
 </file>
 
 <file path=ppt/notesSlides/notesSlide14.xml><?xml version="1.0" encoding="utf-8"?>
-<p:notes xmlns:a="http://schemas.openxmlformats.org/drawingml/2006/main" xmlns:p="http://schemas.openxmlformats.org/presentationml/2006/main" xmlns:r="http://schemas.openxmlformats.org/officeDocument/2006/relationships">
+<p:notes xmlns:a="http://schemas.openxmlformats.org/drawingml/2006/main" xmlns:r="http://schemas.openxmlformats.org/officeDocument/2006/relationships" xmlns:p="http://schemas.openxmlformats.org/presentationml/2006/main">
   <p:cSld>
     <p:spTree>
       <p:nvGrpSpPr>
@@ -924,7 +960,7 @@
             <a:spLocks noGrp="1"/>
           </p:cNvSpPr>
           <p:nvPr>
-            <p:ph type="body" idx="3" sz="quarter"/>
+            <p:ph type="body" sz="quarter" idx="3"/>
           </p:nvPr>
         </p:nvSpPr>
         <p:spPr/>
@@ -938,22 +974,17 @@
           </a:p>
           <a:p>
             <a:r>
-              <a:t>【收尾】</a:t>
-            </a:r>
-          </a:p>
-          <a:p>
-            <a:r>
-              <a:t>成果三条、展望三条。</a:t>
-            </a:r>
-          </a:p>
-          <a:p>
-            <a:r>
-              <a:t>展望部分可以提：多用户隔离、学习统计可视化、混合检索（向量+关键词）、Chroma 迁移 Milvus（requirements.txt 里已预留依赖）。</a:t>
-            </a:r>
-          </a:p>
-          <a:p>
-            <a:r>
-              <a:t>提到“已预留 Milvus 依赖”会显得有前瞻性。</a:t>
+              <a:t>四点：MySQL 走 Docker Compose（端口 3307）、后端 Uvicorn 启动、Chroma 进程内本地持久化、敏感信息走 .env。</a:t>
+            </a:r>
+          </a:p>
+          <a:p>
+            <a:r>
+              <a:t>⚠ 注意：后端不在 Docker 里跑，别口误说成“Docker 一键启动整个系统”。</a:t>
+            </a:r>
+          </a:p>
+          <a:p>
+            <a:r>
+              <a:t>末尾的“运行截图”位置需补全。</a:t>
             </a:r>
           </a:p>
         </p:txBody>
@@ -965,7 +996,7 @@
             <a:spLocks noGrp="1"/>
           </p:cNvSpPr>
           <p:nvPr>
-            <p:ph type="sldNum" idx="5" sz="quarter"/>
+            <p:ph type="sldNum" sz="quarter" idx="5"/>
           </p:nvPr>
         </p:nvSpPr>
         <p:spPr/>
@@ -979,7 +1010,7 @@
 </file>
 
 <file path=ppt/notesSlides/notesSlide15.xml><?xml version="1.0" encoding="utf-8"?>
-<p:notes xmlns:a="http://schemas.openxmlformats.org/drawingml/2006/main" xmlns:p="http://schemas.openxmlformats.org/presentationml/2006/main" xmlns:r="http://schemas.openxmlformats.org/officeDocument/2006/relationships">
+<p:notes xmlns:a="http://schemas.openxmlformats.org/drawingml/2006/main" xmlns:r="http://schemas.openxmlformats.org/officeDocument/2006/relationships" xmlns:p="http://schemas.openxmlformats.org/presentationml/2006/main">
   <p:cSld>
     <p:spTree>
       <p:nvGrpSpPr>
@@ -1014,7 +1045,7 @@
             <a:spLocks noGrp="1"/>
           </p:cNvSpPr>
           <p:nvPr>
-            <p:ph type="body" idx="3" sz="quarter"/>
+            <p:ph type="body" sz="quarter" idx="3"/>
           </p:nvPr>
         </p:nvSpPr>
         <p:spPr/>
@@ -1028,22 +1059,22 @@
           </a:p>
           <a:p>
             <a:r>
-              <a:t>你负责：数据库设计（E-R / CDM / PDM）、课程设计报告撰写与统稿。</a:t>
-            </a:r>
-          </a:p>
-          <a:p>
-            <a:r>
-              <a:t>⚠ 答辩前务必把姓名、学号补全。</a:t>
-            </a:r>
-          </a:p>
-          <a:p>
-            <a:r>
-              <a:t>预计提问：你设计的表和别人的模块怎么对接？——答：我先把 ORM 模型和 Pydantic Schema 定好，其他同学服务层直接引用这些模型读写，保证字段统一。</a:t>
-            </a:r>
-          </a:p>
-          <a:p>
-            <a:r>
-              <a:t>预计提问：你这部分工作量体现在哪？——答：7 张表三层建模、完整性设计、级联删除顺序设计，以及报告全文统稿。</a:t>
+              <a:t>【收尾】</a:t>
+            </a:r>
+          </a:p>
+          <a:p>
+            <a:r>
+              <a:t>成果三条、展望三条。</a:t>
+            </a:r>
+          </a:p>
+          <a:p>
+            <a:r>
+              <a:t>展望部分可以提：多用户隔离、学习统计可视化、混合检索（向量+关键词）、Chroma 迁移 Milvus（requirements.txt 里已预留依赖）。</a:t>
+            </a:r>
+          </a:p>
+          <a:p>
+            <a:r>
+              <a:t>提到“已预留 Milvus 依赖”会显得有前瞻性。</a:t>
             </a:r>
           </a:p>
         </p:txBody>
@@ -1055,7 +1086,7 @@
             <a:spLocks noGrp="1"/>
           </p:cNvSpPr>
           <p:nvPr>
-            <p:ph type="sldNum" idx="5" sz="quarter"/>
+            <p:ph type="sldNum" sz="quarter" idx="5"/>
           </p:nvPr>
         </p:nvSpPr>
         <p:spPr/>
@@ -1069,7 +1100,7 @@
 </file>
 
 <file path=ppt/notesSlides/notesSlide16.xml><?xml version="1.0" encoding="utf-8"?>
-<p:notes xmlns:a="http://schemas.openxmlformats.org/drawingml/2006/main" xmlns:p="http://schemas.openxmlformats.org/presentationml/2006/main" xmlns:r="http://schemas.openxmlformats.org/officeDocument/2006/relationships">
+<p:notes xmlns:a="http://schemas.openxmlformats.org/drawingml/2006/main" xmlns:r="http://schemas.openxmlformats.org/officeDocument/2006/relationships" xmlns:p="http://schemas.openxmlformats.org/presentationml/2006/main">
   <p:cSld>
     <p:spTree>
       <p:nvGrpSpPr>
@@ -1104,7 +1135,7 @@
             <a:spLocks noGrp="1"/>
           </p:cNvSpPr>
           <p:nvPr>
-            <p:ph type="body" idx="3" sz="quarter"/>
+            <p:ph type="body" sz="quarter" idx="3"/>
           </p:nvPr>
         </p:nvSpPr>
         <p:spPr/>
@@ -1113,17 +1144,27 @@
           <a:lstStyle/>
           <a:p>
             <a:r>
-              <a:t>【结束语】</a:t>
-            </a:r>
-          </a:p>
-          <a:p>
-            <a:r>
-              <a:t>感谢各位老师，请老师批评指正。</a:t>
-            </a:r>
-          </a:p>
-          <a:p>
-            <a:r>
-              <a:t>（答谢后准备进入提问环节，把讲解稿和 Q&amp;A 文档放在手边。）</a:t>
+              <a:t>【主讲：袁钟其】</a:t>
+            </a:r>
+          </a:p>
+          <a:p>
+            <a:r>
+              <a:t>你负责：数据库设计（E-R / CDM / PDM）、课程设计报告撰写与统稿。</a:t>
+            </a:r>
+          </a:p>
+          <a:p>
+            <a:r>
+              <a:t>⚠ 答辩前务必把姓名、学号补全。</a:t>
+            </a:r>
+          </a:p>
+          <a:p>
+            <a:r>
+              <a:t>预计提问：你设计的表和别人的模块怎么对接？——答：我先把 ORM 模型和 Pydantic Schema 定好，其他同学服务层直接引用这些模型读写，保证字段统一。</a:t>
+            </a:r>
+          </a:p>
+          <a:p>
+            <a:r>
+              <a:t>预计提问：你这部分工作量体现在哪？——答：7 张表三层建模、完整性设计、级联删除顺序设计，以及报告全文统稿。</a:t>
             </a:r>
           </a:p>
         </p:txBody>
@@ -1135,7 +1176,7 @@
             <a:spLocks noGrp="1"/>
           </p:cNvSpPr>
           <p:nvPr>
-            <p:ph type="sldNum" idx="5" sz="quarter"/>
+            <p:ph type="sldNum" sz="quarter" idx="5"/>
           </p:nvPr>
         </p:nvSpPr>
         <p:spPr/>
@@ -1149,7 +1190,7 @@
 </file>
 
 <file path=ppt/notesSlides/notesSlide17.xml><?xml version="1.0" encoding="utf-8"?>
-<p:notes xmlns:a="http://schemas.openxmlformats.org/drawingml/2006/main" xmlns:p="http://schemas.openxmlformats.org/presentationml/2006/main" xmlns:r="http://schemas.openxmlformats.org/officeDocument/2006/relationships">
+<p:notes xmlns:a="http://schemas.openxmlformats.org/drawingml/2006/main" xmlns:r="http://schemas.openxmlformats.org/officeDocument/2006/relationships" xmlns:p="http://schemas.openxmlformats.org/presentationml/2006/main">
   <p:cSld>
     <p:spTree>
       <p:nvGrpSpPr>
@@ -1184,7 +1225,7 @@
             <a:spLocks noGrp="1"/>
           </p:cNvSpPr>
           <p:nvPr>
-            <p:ph type="body" idx="3" sz="quarter"/>
+            <p:ph type="body" sz="quarter" idx="3"/>
           </p:nvPr>
         </p:nvSpPr>
         <p:spPr/>
@@ -1193,42 +1234,17 @@
           <a:lstStyle/>
           <a:p>
             <a:r>
-              <a:t>【主讲：陈果】</a:t>
-            </a:r>
-          </a:p>
-          <a:p>
-            <a:r>
-              <a:t>本页需补充五张界面截图，截图要求与报告第三节“11．实现的界面”一致：</a:t>
-            </a:r>
-          </a:p>
-          <a:p>
-            <a:r>
-              <a:t>1. 文档管理页（已选课程 + 文档列表，能看到切分块数）</a:t>
-            </a:r>
-          </a:p>
-          <a:p>
-            <a:r>
-              <a:t>2. 智能问答页（提问与回答，下方显示引用来源卡片）</a:t>
-            </a:r>
-          </a:p>
-          <a:p>
-            <a:r>
-              <a:t>3. 自动出题页（参数表单 + 题目卡片，含判分结果）</a:t>
-            </a:r>
-          </a:p>
-          <a:p>
-            <a:r>
-              <a:t>4. 错题本页（错题卡片，用户答案与正确答案对比）</a:t>
-            </a:r>
-          </a:p>
-          <a:p>
-            <a:r>
-              <a:t>5. 复习计划页（按日期分组的条目，含完成勾选）</a:t>
-            </a:r>
-          </a:p>
-          <a:p>
-            <a:r>
-              <a:t>讲的时候按“选课程 → 传文档 → 提问 → 出题 → 判错 → 排复习”的顺序讲，完整演示一遍学习闭环。</a:t>
+              <a:t>【结束语】</a:t>
+            </a:r>
+          </a:p>
+          <a:p>
+            <a:r>
+              <a:t>感谢各位老师，请老师批评指正。</a:t>
+            </a:r>
+          </a:p>
+          <a:p>
+            <a:r>
+              <a:t>（答谢后准备进入提问环节，把讲解稿和 Q&amp;A 文档放在手边。）</a:t>
             </a:r>
           </a:p>
         </p:txBody>
@@ -1240,7 +1256,7 @@
             <a:spLocks noGrp="1"/>
           </p:cNvSpPr>
           <p:nvPr>
-            <p:ph type="sldNum" idx="5" sz="quarter"/>
+            <p:ph type="sldNum" sz="quarter" idx="5"/>
           </p:nvPr>
         </p:nvSpPr>
         <p:spPr/>
@@ -1254,7 +1270,7 @@
 </file>
 
 <file path=ppt/notesSlides/notesSlide2.xml><?xml version="1.0" encoding="utf-8"?>
-<p:notes xmlns:a="http://schemas.openxmlformats.org/drawingml/2006/main" xmlns:p="http://schemas.openxmlformats.org/presentationml/2006/main" xmlns:r="http://schemas.openxmlformats.org/officeDocument/2006/relationships">
+<p:notes xmlns:a="http://schemas.openxmlformats.org/drawingml/2006/main" xmlns:r="http://schemas.openxmlformats.org/officeDocument/2006/relationships" xmlns:p="http://schemas.openxmlformats.org/presentationml/2006/main">
   <p:cSld>
     <p:spTree>
       <p:nvGrpSpPr>
@@ -1289,7 +1305,7 @@
             <a:spLocks noGrp="1"/>
           </p:cNvSpPr>
           <p:nvPr>
-            <p:ph type="body" idx="3" sz="quarter"/>
+            <p:ph type="body" sz="quarter" idx="3"/>
           </p:nvPr>
         </p:nvSpPr>
         <p:spPr/>
@@ -1320,7 +1336,7 @@
             <a:spLocks noGrp="1"/>
           </p:cNvSpPr>
           <p:nvPr>
-            <p:ph type="sldNum" idx="5" sz="quarter"/>
+            <p:ph type="sldNum" sz="quarter" idx="5"/>
           </p:nvPr>
         </p:nvSpPr>
         <p:spPr/>
@@ -1334,7 +1350,7 @@
 </file>
 
 <file path=ppt/notesSlides/notesSlide3.xml><?xml version="1.0" encoding="utf-8"?>
-<p:notes xmlns:a="http://schemas.openxmlformats.org/drawingml/2006/main" xmlns:p="http://schemas.openxmlformats.org/presentationml/2006/main" xmlns:r="http://schemas.openxmlformats.org/officeDocument/2006/relationships">
+<p:notes xmlns:a="http://schemas.openxmlformats.org/drawingml/2006/main" xmlns:r="http://schemas.openxmlformats.org/officeDocument/2006/relationships" xmlns:p="http://schemas.openxmlformats.org/presentationml/2006/main">
   <p:cSld>
     <p:spTree>
       <p:nvGrpSpPr>
@@ -1369,7 +1385,7 @@
             <a:spLocks noGrp="1"/>
           </p:cNvSpPr>
           <p:nvPr>
-            <p:ph type="body" idx="3" sz="quarter"/>
+            <p:ph type="body" sz="quarter" idx="3"/>
           </p:nvPr>
         </p:nvSpPr>
         <p:spPr/>
@@ -1420,7 +1436,7 @@
             <a:spLocks noGrp="1"/>
           </p:cNvSpPr>
           <p:nvPr>
-            <p:ph type="sldNum" idx="5" sz="quarter"/>
+            <p:ph type="sldNum" sz="quarter" idx="5"/>
           </p:nvPr>
         </p:nvSpPr>
         <p:spPr/>
@@ -1434,7 +1450,7 @@
 </file>
 
 <file path=ppt/notesSlides/notesSlide4.xml><?xml version="1.0" encoding="utf-8"?>
-<p:notes xmlns:a="http://schemas.openxmlformats.org/drawingml/2006/main" xmlns:p="http://schemas.openxmlformats.org/presentationml/2006/main" xmlns:r="http://schemas.openxmlformats.org/officeDocument/2006/relationships">
+<p:notes xmlns:a="http://schemas.openxmlformats.org/drawingml/2006/main" xmlns:r="http://schemas.openxmlformats.org/officeDocument/2006/relationships" xmlns:p="http://schemas.openxmlformats.org/presentationml/2006/main">
   <p:cSld>
     <p:spTree>
       <p:nvGrpSpPr>
@@ -1469,7 +1485,7 @@
             <a:spLocks noGrp="1"/>
           </p:cNvSpPr>
           <p:nvPr>
-            <p:ph type="body" idx="3" sz="quarter"/>
+            <p:ph type="body" sz="quarter" idx="3"/>
           </p:nvPr>
         </p:nvSpPr>
         <p:spPr/>
@@ -1505,7 +1521,7 @@
             <a:spLocks noGrp="1"/>
           </p:cNvSpPr>
           <p:nvPr>
-            <p:ph type="sldNum" idx="5" sz="quarter"/>
+            <p:ph type="sldNum" sz="quarter" idx="5"/>
           </p:nvPr>
         </p:nvSpPr>
         <p:spPr/>
@@ -1519,7 +1535,7 @@
 </file>
 
 <file path=ppt/notesSlides/notesSlide5.xml><?xml version="1.0" encoding="utf-8"?>
-<p:notes xmlns:a="http://schemas.openxmlformats.org/drawingml/2006/main" xmlns:p="http://schemas.openxmlformats.org/presentationml/2006/main" xmlns:r="http://schemas.openxmlformats.org/officeDocument/2006/relationships">
+<p:notes xmlns:a="http://schemas.openxmlformats.org/drawingml/2006/main" xmlns:r="http://schemas.openxmlformats.org/officeDocument/2006/relationships" xmlns:p="http://schemas.openxmlformats.org/presentationml/2006/main">
   <p:cSld>
     <p:spTree>
       <p:nvGrpSpPr>
@@ -1554,7 +1570,7 @@
             <a:spLocks noGrp="1"/>
           </p:cNvSpPr>
           <p:nvPr>
-            <p:ph type="body" idx="3" sz="quarter"/>
+            <p:ph type="body" sz="quarter" idx="3"/>
           </p:nvPr>
         </p:nvSpPr>
         <p:spPr/>
@@ -1590,7 +1606,7 @@
             <a:spLocks noGrp="1"/>
           </p:cNvSpPr>
           <p:nvPr>
-            <p:ph type="sldNum" idx="5" sz="quarter"/>
+            <p:ph type="sldNum" sz="quarter" idx="5"/>
           </p:nvPr>
         </p:nvSpPr>
         <p:spPr/>
@@ -1604,7 +1620,7 @@
 </file>
 
 <file path=ppt/notesSlides/notesSlide6.xml><?xml version="1.0" encoding="utf-8"?>
-<p:notes xmlns:a="http://schemas.openxmlformats.org/drawingml/2006/main" xmlns:p="http://schemas.openxmlformats.org/presentationml/2006/main" xmlns:r="http://schemas.openxmlformats.org/officeDocument/2006/relationships">
+<p:notes xmlns:a="http://schemas.openxmlformats.org/drawingml/2006/main" xmlns:r="http://schemas.openxmlformats.org/officeDocument/2006/relationships" xmlns:p="http://schemas.openxmlformats.org/presentationml/2006/main">
   <p:cSld>
     <p:spTree>
       <p:nvGrpSpPr>
@@ -1639,7 +1655,7 @@
             <a:spLocks noGrp="1"/>
           </p:cNvSpPr>
           <p:nvPr>
-            <p:ph type="body" idx="3" sz="quarter"/>
+            <p:ph type="body" sz="quarter" idx="3"/>
           </p:nvPr>
         </p:nvSpPr>
         <p:spPr/>
@@ -1695,7 +1711,7 @@
             <a:spLocks noGrp="1"/>
           </p:cNvSpPr>
           <p:nvPr>
-            <p:ph type="sldNum" idx="5" sz="quarter"/>
+            <p:ph type="sldNum" sz="quarter" idx="5"/>
           </p:nvPr>
         </p:nvSpPr>
         <p:spPr/>
@@ -1709,7 +1725,7 @@
 </file>
 
 <file path=ppt/notesSlides/notesSlide7.xml><?xml version="1.0" encoding="utf-8"?>
-<p:notes xmlns:a="http://schemas.openxmlformats.org/drawingml/2006/main" xmlns:p="http://schemas.openxmlformats.org/presentationml/2006/main" xmlns:r="http://schemas.openxmlformats.org/officeDocument/2006/relationships">
+<p:notes xmlns:a="http://schemas.openxmlformats.org/drawingml/2006/main" xmlns:r="http://schemas.openxmlformats.org/officeDocument/2006/relationships" xmlns:p="http://schemas.openxmlformats.org/presentationml/2006/main">
   <p:cSld>
     <p:spTree>
       <p:nvGrpSpPr>
@@ -1744,7 +1760,7 @@
             <a:spLocks noGrp="1"/>
           </p:cNvSpPr>
           <p:nvPr>
-            <p:ph type="body" idx="3" sz="quarter"/>
+            <p:ph type="body" sz="quarter" idx="3"/>
           </p:nvPr>
         </p:nvSpPr>
         <p:spPr/>
@@ -1790,7 +1806,7 @@
             <a:spLocks noGrp="1"/>
           </p:cNvSpPr>
           <p:nvPr>
-            <p:ph type="sldNum" idx="5" sz="quarter"/>
+            <p:ph type="sldNum" sz="quarter" idx="5"/>
           </p:nvPr>
         </p:nvSpPr>
         <p:spPr/>
@@ -1804,7 +1820,7 @@
 </file>
 
 <file path=ppt/notesSlides/notesSlide8.xml><?xml version="1.0" encoding="utf-8"?>
-<p:notes xmlns:a="http://schemas.openxmlformats.org/drawingml/2006/main" xmlns:p="http://schemas.openxmlformats.org/presentationml/2006/main" xmlns:r="http://schemas.openxmlformats.org/officeDocument/2006/relationships">
+<p:notes xmlns:a="http://schemas.openxmlformats.org/drawingml/2006/main" xmlns:r="http://schemas.openxmlformats.org/officeDocument/2006/relationships" xmlns:p="http://schemas.openxmlformats.org/presentationml/2006/main">
   <p:cSld>
     <p:spTree>
       <p:nvGrpSpPr>
@@ -1839,7 +1855,7 @@
             <a:spLocks noGrp="1"/>
           </p:cNvSpPr>
           <p:nvPr>
-            <p:ph type="body" idx="3" sz="quarter"/>
+            <p:ph type="body" sz="quarter" idx="3"/>
           </p:nvPr>
         </p:nvSpPr>
         <p:spPr/>
@@ -1900,7 +1916,7 @@
             <a:spLocks noGrp="1"/>
           </p:cNvSpPr>
           <p:nvPr>
-            <p:ph type="sldNum" idx="5" sz="quarter"/>
+            <p:ph type="sldNum" sz="quarter" idx="5"/>
           </p:nvPr>
         </p:nvSpPr>
         <p:spPr/>
@@ -1914,7 +1930,7 @@
 </file>
 
 <file path=ppt/notesSlides/notesSlide9.xml><?xml version="1.0" encoding="utf-8"?>
-<p:notes xmlns:a="http://schemas.openxmlformats.org/drawingml/2006/main" xmlns:p="http://schemas.openxmlformats.org/presentationml/2006/main" xmlns:r="http://schemas.openxmlformats.org/officeDocument/2006/relationships">
+<p:notes xmlns:a="http://schemas.openxmlformats.org/drawingml/2006/main" xmlns:r="http://schemas.openxmlformats.org/officeDocument/2006/relationships" xmlns:p="http://schemas.openxmlformats.org/presentationml/2006/main">
   <p:cSld>
     <p:spTree>
       <p:nvGrpSpPr>
@@ -1949,7 +1965,7 @@
             <a:spLocks noGrp="1"/>
           </p:cNvSpPr>
           <p:nvPr>
-            <p:ph type="body" idx="3" sz="quarter"/>
+            <p:ph type="body" sz="quarter" idx="3"/>
           </p:nvPr>
         </p:nvSpPr>
         <p:spPr/>
@@ -1985,7 +2001,7 @@
             <a:spLocks noGrp="1"/>
           </p:cNvSpPr>
           <p:nvPr>
-            <p:ph type="sldNum" idx="5" sz="quarter"/>
+            <p:ph type="sldNum" sz="quarter" idx="5"/>
           </p:nvPr>
         </p:nvSpPr>
         <p:spPr/>
@@ -2179,7 +2195,6 @@
           <a:p>
             <a:fld id="{5BCAD085-E8A6-8845-BD4E-CB4CCA059FC4}" type="datetimeFigureOut">
               <a:rPr lang="en-US" smtClean="0"/>
-              <a:t>1/27/13</a:t>
             </a:fld>
             <a:endParaRPr lang="en-US"/>
           </a:p>
@@ -2221,18 +2236,12 @@
           <a:p>
             <a:fld id="{C1FF6DA9-008F-8B48-92A6-B652298478BF}" type="slidenum">
               <a:rPr lang="en-US" smtClean="0"/>
-              <a:t>‹#›</a:t>
             </a:fld>
             <a:endParaRPr lang="en-US"/>
           </a:p>
         </p:txBody>
       </p:sp>
     </p:spTree>
-    <p:extLst>
-      <p:ext uri="{BB962C8B-B14F-4D97-AF65-F5344CB8AC3E}">
-        <p14:creationId xmlns:p14="http://schemas.microsoft.com/office/powerpoint/2010/main" val="3168075583"/>
-      </p:ext>
-    </p:extLst>
   </p:cSld>
   <p:clrMapOvr>
     <a:masterClrMapping/>
@@ -2300,6 +2309,7 @@
               <a:rPr lang="en-US" smtClean="0"/>
               <a:t>Click to edit Master text styles</a:t>
             </a:r>
+            <a:endParaRPr lang="en-US" smtClean="0"/>
           </a:p>
           <a:p>
             <a:pPr lvl="1"/>
@@ -2307,6 +2317,7 @@
               <a:rPr lang="en-US" smtClean="0"/>
               <a:t>Second level</a:t>
             </a:r>
+            <a:endParaRPr lang="en-US" smtClean="0"/>
           </a:p>
           <a:p>
             <a:pPr lvl="2"/>
@@ -2314,6 +2325,7 @@
               <a:rPr lang="en-US" smtClean="0"/>
               <a:t>Third level</a:t>
             </a:r>
+            <a:endParaRPr lang="en-US" smtClean="0"/>
           </a:p>
           <a:p>
             <a:pPr lvl="3"/>
@@ -2321,6 +2333,7 @@
               <a:rPr lang="en-US" smtClean="0"/>
               <a:t>Fourth level</a:t>
             </a:r>
+            <a:endParaRPr lang="en-US" smtClean="0"/>
           </a:p>
           <a:p>
             <a:pPr lvl="4"/>
@@ -2349,7 +2362,6 @@
           <a:p>
             <a:fld id="{5BCAD085-E8A6-8845-BD4E-CB4CCA059FC4}" type="datetimeFigureOut">
               <a:rPr lang="en-US" smtClean="0"/>
-              <a:t>1/27/13</a:t>
             </a:fld>
             <a:endParaRPr lang="en-US"/>
           </a:p>
@@ -2391,18 +2403,12 @@
           <a:p>
             <a:fld id="{C1FF6DA9-008F-8B48-92A6-B652298478BF}" type="slidenum">
               <a:rPr lang="en-US" smtClean="0"/>
-              <a:t>‹#›</a:t>
             </a:fld>
             <a:endParaRPr lang="en-US"/>
           </a:p>
         </p:txBody>
       </p:sp>
     </p:spTree>
-    <p:extLst>
-      <p:ext uri="{BB962C8B-B14F-4D97-AF65-F5344CB8AC3E}">
-        <p14:creationId xmlns:p14="http://schemas.microsoft.com/office/powerpoint/2010/main" val="2910927964"/>
-      </p:ext>
-    </p:extLst>
   </p:cSld>
   <p:clrMapOvr>
     <a:masterClrMapping/>
@@ -2480,6 +2486,7 @@
               <a:rPr lang="en-US" smtClean="0"/>
               <a:t>Click to edit Master text styles</a:t>
             </a:r>
+            <a:endParaRPr lang="en-US" smtClean="0"/>
           </a:p>
           <a:p>
             <a:pPr lvl="1"/>
@@ -2487,6 +2494,7 @@
               <a:rPr lang="en-US" smtClean="0"/>
               <a:t>Second level</a:t>
             </a:r>
+            <a:endParaRPr lang="en-US" smtClean="0"/>
           </a:p>
           <a:p>
             <a:pPr lvl="2"/>
@@ -2494,6 +2502,7 @@
               <a:rPr lang="en-US" smtClean="0"/>
               <a:t>Third level</a:t>
             </a:r>
+            <a:endParaRPr lang="en-US" smtClean="0"/>
           </a:p>
           <a:p>
             <a:pPr lvl="3"/>
@@ -2501,6 +2510,7 @@
               <a:rPr lang="en-US" smtClean="0"/>
               <a:t>Fourth level</a:t>
             </a:r>
+            <a:endParaRPr lang="en-US" smtClean="0"/>
           </a:p>
           <a:p>
             <a:pPr lvl="4"/>
@@ -2529,7 +2539,6 @@
           <a:p>
             <a:fld id="{5BCAD085-E8A6-8845-BD4E-CB4CCA059FC4}" type="datetimeFigureOut">
               <a:rPr lang="en-US" smtClean="0"/>
-              <a:t>1/27/13</a:t>
             </a:fld>
             <a:endParaRPr lang="en-US"/>
           </a:p>
@@ -2571,18 +2580,12 @@
           <a:p>
             <a:fld id="{C1FF6DA9-008F-8B48-92A6-B652298478BF}" type="slidenum">
               <a:rPr lang="en-US" smtClean="0"/>
-              <a:t>‹#›</a:t>
             </a:fld>
             <a:endParaRPr lang="en-US"/>
           </a:p>
         </p:txBody>
       </p:sp>
     </p:spTree>
-    <p:extLst>
-      <p:ext uri="{BB962C8B-B14F-4D97-AF65-F5344CB8AC3E}">
-        <p14:creationId xmlns:p14="http://schemas.microsoft.com/office/powerpoint/2010/main" val="3612223792"/>
-      </p:ext>
-    </p:extLst>
   </p:cSld>
   <p:clrMapOvr>
     <a:masterClrMapping/>
@@ -2650,6 +2653,7 @@
               <a:rPr lang="en-US" smtClean="0"/>
               <a:t>Click to edit Master text styles</a:t>
             </a:r>
+            <a:endParaRPr lang="en-US" smtClean="0"/>
           </a:p>
           <a:p>
             <a:pPr lvl="1"/>
@@ -2657,6 +2661,7 @@
               <a:rPr lang="en-US" smtClean="0"/>
               <a:t>Second level</a:t>
             </a:r>
+            <a:endParaRPr lang="en-US" smtClean="0"/>
           </a:p>
           <a:p>
             <a:pPr lvl="2"/>
@@ -2664,6 +2669,7 @@
               <a:rPr lang="en-US" smtClean="0"/>
               <a:t>Third level</a:t>
             </a:r>
+            <a:endParaRPr lang="en-US" smtClean="0"/>
           </a:p>
           <a:p>
             <a:pPr lvl="3"/>
@@ -2671,6 +2677,7 @@
               <a:rPr lang="en-US" smtClean="0"/>
               <a:t>Fourth level</a:t>
             </a:r>
+            <a:endParaRPr lang="en-US" smtClean="0"/>
           </a:p>
           <a:p>
             <a:pPr lvl="4"/>
@@ -2699,7 +2706,6 @@
           <a:p>
             <a:fld id="{5BCAD085-E8A6-8845-BD4E-CB4CCA059FC4}" type="datetimeFigureOut">
               <a:rPr lang="en-US" smtClean="0"/>
-              <a:t>1/27/13</a:t>
             </a:fld>
             <a:endParaRPr lang="en-US"/>
           </a:p>
@@ -2741,18 +2747,12 @@
           <a:p>
             <a:fld id="{C1FF6DA9-008F-8B48-92A6-B652298478BF}" type="slidenum">
               <a:rPr lang="en-US" smtClean="0"/>
-              <a:t>‹#›</a:t>
             </a:fld>
             <a:endParaRPr lang="en-US"/>
           </a:p>
         </p:txBody>
       </p:sp>
     </p:spTree>
-    <p:extLst>
-      <p:ext uri="{BB962C8B-B14F-4D97-AF65-F5344CB8AC3E}">
-        <p14:creationId xmlns:p14="http://schemas.microsoft.com/office/powerpoint/2010/main" val="2614314258"/>
-      </p:ext>
-    </p:extLst>
   </p:cSld>
   <p:clrMapOvr>
     <a:masterClrMapping/>
@@ -2925,6 +2925,7 @@
               <a:rPr lang="en-US" smtClean="0"/>
               <a:t>Click to edit Master text styles</a:t>
             </a:r>
+            <a:endParaRPr lang="en-US" smtClean="0"/>
           </a:p>
         </p:txBody>
       </p:sp>
@@ -2945,7 +2946,6 @@
           <a:p>
             <a:fld id="{5BCAD085-E8A6-8845-BD4E-CB4CCA059FC4}" type="datetimeFigureOut">
               <a:rPr lang="en-US" smtClean="0"/>
-              <a:t>1/27/13</a:t>
             </a:fld>
             <a:endParaRPr lang="en-US"/>
           </a:p>
@@ -2987,18 +2987,12 @@
           <a:p>
             <a:fld id="{C1FF6DA9-008F-8B48-92A6-B652298478BF}" type="slidenum">
               <a:rPr lang="en-US" smtClean="0"/>
-              <a:t>‹#›</a:t>
             </a:fld>
             <a:endParaRPr lang="en-US"/>
           </a:p>
         </p:txBody>
       </p:sp>
     </p:spTree>
-    <p:extLst>
-      <p:ext uri="{BB962C8B-B14F-4D97-AF65-F5344CB8AC3E}">
-        <p14:creationId xmlns:p14="http://schemas.microsoft.com/office/powerpoint/2010/main" val="960648375"/>
-      </p:ext>
-    </p:extLst>
   </p:cSld>
   <p:clrMapOvr>
     <a:masterClrMapping/>
@@ -3099,6 +3093,7 @@
               <a:rPr lang="en-US" smtClean="0"/>
               <a:t>Click to edit Master text styles</a:t>
             </a:r>
+            <a:endParaRPr lang="en-US" smtClean="0"/>
           </a:p>
           <a:p>
             <a:pPr lvl="1"/>
@@ -3106,6 +3101,7 @@
               <a:rPr lang="en-US" smtClean="0"/>
               <a:t>Second level</a:t>
             </a:r>
+            <a:endParaRPr lang="en-US" smtClean="0"/>
           </a:p>
           <a:p>
             <a:pPr lvl="2"/>
@@ -3113,6 +3109,7 @@
               <a:rPr lang="en-US" smtClean="0"/>
               <a:t>Third level</a:t>
             </a:r>
+            <a:endParaRPr lang="en-US" smtClean="0"/>
           </a:p>
           <a:p>
             <a:pPr lvl="3"/>
@@ -3120,6 +3117,7 @@
               <a:rPr lang="en-US" smtClean="0"/>
               <a:t>Fourth level</a:t>
             </a:r>
+            <a:endParaRPr lang="en-US" smtClean="0"/>
           </a:p>
           <a:p>
             <a:pPr lvl="4"/>
@@ -3184,6 +3182,7 @@
               <a:rPr lang="en-US" smtClean="0"/>
               <a:t>Click to edit Master text styles</a:t>
             </a:r>
+            <a:endParaRPr lang="en-US" smtClean="0"/>
           </a:p>
           <a:p>
             <a:pPr lvl="1"/>
@@ -3191,6 +3190,7 @@
               <a:rPr lang="en-US" smtClean="0"/>
               <a:t>Second level</a:t>
             </a:r>
+            <a:endParaRPr lang="en-US" smtClean="0"/>
           </a:p>
           <a:p>
             <a:pPr lvl="2"/>
@@ -3198,6 +3198,7 @@
               <a:rPr lang="en-US" smtClean="0"/>
               <a:t>Third level</a:t>
             </a:r>
+            <a:endParaRPr lang="en-US" smtClean="0"/>
           </a:p>
           <a:p>
             <a:pPr lvl="3"/>
@@ -3205,6 +3206,7 @@
               <a:rPr lang="en-US" smtClean="0"/>
               <a:t>Fourth level</a:t>
             </a:r>
+            <a:endParaRPr lang="en-US" smtClean="0"/>
           </a:p>
           <a:p>
             <a:pPr lvl="4"/>
@@ -3233,7 +3235,6 @@
           <a:p>
             <a:fld id="{5BCAD085-E8A6-8845-BD4E-CB4CCA059FC4}" type="datetimeFigureOut">
               <a:rPr lang="en-US" smtClean="0"/>
-              <a:t>1/27/13</a:t>
             </a:fld>
             <a:endParaRPr lang="en-US"/>
           </a:p>
@@ -3275,18 +3276,12 @@
           <a:p>
             <a:fld id="{C1FF6DA9-008F-8B48-92A6-B652298478BF}" type="slidenum">
               <a:rPr lang="en-US" smtClean="0"/>
-              <a:t>‹#›</a:t>
             </a:fld>
             <a:endParaRPr lang="en-US"/>
           </a:p>
         </p:txBody>
       </p:sp>
     </p:spTree>
-    <p:extLst>
-      <p:ext uri="{BB962C8B-B14F-4D97-AF65-F5344CB8AC3E}">
-        <p14:creationId xmlns:p14="http://schemas.microsoft.com/office/powerpoint/2010/main" val="2782244947"/>
-      </p:ext>
-    </p:extLst>
   </p:cSld>
   <p:clrMapOvr>
     <a:masterClrMapping/>
@@ -3400,6 +3395,7 @@
               <a:rPr lang="en-US" smtClean="0"/>
               <a:t>Click to edit Master text styles</a:t>
             </a:r>
+            <a:endParaRPr lang="en-US" smtClean="0"/>
           </a:p>
         </p:txBody>
       </p:sp>
@@ -3456,6 +3452,7 @@
               <a:rPr lang="en-US" smtClean="0"/>
               <a:t>Click to edit Master text styles</a:t>
             </a:r>
+            <a:endParaRPr lang="en-US" smtClean="0"/>
           </a:p>
           <a:p>
             <a:pPr lvl="1"/>
@@ -3463,6 +3460,7 @@
               <a:rPr lang="en-US" smtClean="0"/>
               <a:t>Second level</a:t>
             </a:r>
+            <a:endParaRPr lang="en-US" smtClean="0"/>
           </a:p>
           <a:p>
             <a:pPr lvl="2"/>
@@ -3470,6 +3468,7 @@
               <a:rPr lang="en-US" smtClean="0"/>
               <a:t>Third level</a:t>
             </a:r>
+            <a:endParaRPr lang="en-US" smtClean="0"/>
           </a:p>
           <a:p>
             <a:pPr lvl="3"/>
@@ -3477,6 +3476,7 @@
               <a:rPr lang="en-US" smtClean="0"/>
               <a:t>Fourth level</a:t>
             </a:r>
+            <a:endParaRPr lang="en-US" smtClean="0"/>
           </a:p>
           <a:p>
             <a:pPr lvl="4"/>
@@ -3550,6 +3550,7 @@
               <a:rPr lang="en-US" smtClean="0"/>
               <a:t>Click to edit Master text styles</a:t>
             </a:r>
+            <a:endParaRPr lang="en-US" smtClean="0"/>
           </a:p>
         </p:txBody>
       </p:sp>
@@ -3606,6 +3607,7 @@
               <a:rPr lang="en-US" smtClean="0"/>
               <a:t>Click to edit Master text styles</a:t>
             </a:r>
+            <a:endParaRPr lang="en-US" smtClean="0"/>
           </a:p>
           <a:p>
             <a:pPr lvl="1"/>
@@ -3613,6 +3615,7 @@
               <a:rPr lang="en-US" smtClean="0"/>
               <a:t>Second level</a:t>
             </a:r>
+            <a:endParaRPr lang="en-US" smtClean="0"/>
           </a:p>
           <a:p>
             <a:pPr lvl="2"/>
@@ -3620,6 +3623,7 @@
               <a:rPr lang="en-US" smtClean="0"/>
               <a:t>Third level</a:t>
             </a:r>
+            <a:endParaRPr lang="en-US" smtClean="0"/>
           </a:p>
           <a:p>
             <a:pPr lvl="3"/>
@@ -3627,6 +3631,7 @@
               <a:rPr lang="en-US" smtClean="0"/>
               <a:t>Fourth level</a:t>
             </a:r>
+            <a:endParaRPr lang="en-US" smtClean="0"/>
           </a:p>
           <a:p>
             <a:pPr lvl="4"/>
@@ -3655,7 +3660,6 @@
           <a:p>
             <a:fld id="{5BCAD085-E8A6-8845-BD4E-CB4CCA059FC4}" type="datetimeFigureOut">
               <a:rPr lang="en-US" smtClean="0"/>
-              <a:t>1/27/13</a:t>
             </a:fld>
             <a:endParaRPr lang="en-US"/>
           </a:p>
@@ -3697,18 +3701,12 @@
           <a:p>
             <a:fld id="{C1FF6DA9-008F-8B48-92A6-B652298478BF}" type="slidenum">
               <a:rPr lang="en-US" smtClean="0"/>
-              <a:t>‹#›</a:t>
             </a:fld>
             <a:endParaRPr lang="en-US"/>
           </a:p>
         </p:txBody>
       </p:sp>
     </p:spTree>
-    <p:extLst>
-      <p:ext uri="{BB962C8B-B14F-4D97-AF65-F5344CB8AC3E}">
-        <p14:creationId xmlns:p14="http://schemas.microsoft.com/office/powerpoint/2010/main" val="990158736"/>
-      </p:ext>
-    </p:extLst>
   </p:cSld>
   <p:clrMapOvr>
     <a:masterClrMapping/>
@@ -3773,7 +3771,6 @@
           <a:p>
             <a:fld id="{5BCAD085-E8A6-8845-BD4E-CB4CCA059FC4}" type="datetimeFigureOut">
               <a:rPr lang="en-US" smtClean="0"/>
-              <a:t>1/27/13</a:t>
             </a:fld>
             <a:endParaRPr lang="en-US"/>
           </a:p>
@@ -3815,18 +3812,12 @@
           <a:p>
             <a:fld id="{C1FF6DA9-008F-8B48-92A6-B652298478BF}" type="slidenum">
               <a:rPr lang="en-US" smtClean="0"/>
-              <a:t>‹#›</a:t>
             </a:fld>
             <a:endParaRPr lang="en-US"/>
           </a:p>
         </p:txBody>
       </p:sp>
     </p:spTree>
-    <p:extLst>
-      <p:ext uri="{BB962C8B-B14F-4D97-AF65-F5344CB8AC3E}">
-        <p14:creationId xmlns:p14="http://schemas.microsoft.com/office/powerpoint/2010/main" val="727027711"/>
-      </p:ext>
-    </p:extLst>
   </p:cSld>
   <p:clrMapOvr>
     <a:masterClrMapping/>
@@ -3868,7 +3859,6 @@
           <a:p>
             <a:fld id="{5BCAD085-E8A6-8845-BD4E-CB4CCA059FC4}" type="datetimeFigureOut">
               <a:rPr lang="en-US" smtClean="0"/>
-              <a:t>1/27/13</a:t>
             </a:fld>
             <a:endParaRPr lang="en-US"/>
           </a:p>
@@ -3910,18 +3900,12 @@
           <a:p>
             <a:fld id="{C1FF6DA9-008F-8B48-92A6-B652298478BF}" type="slidenum">
               <a:rPr lang="en-US" smtClean="0"/>
-              <a:t>‹#›</a:t>
             </a:fld>
             <a:endParaRPr lang="en-US"/>
           </a:p>
         </p:txBody>
       </p:sp>
     </p:spTree>
-    <p:extLst>
-      <p:ext uri="{BB962C8B-B14F-4D97-AF65-F5344CB8AC3E}">
-        <p14:creationId xmlns:p14="http://schemas.microsoft.com/office/powerpoint/2010/main" val="1212999818"/>
-      </p:ext>
-    </p:extLst>
   </p:cSld>
   <p:clrMapOvr>
     <a:masterClrMapping/>
@@ -4031,6 +4015,7 @@
               <a:rPr lang="en-US" smtClean="0"/>
               <a:t>Click to edit Master text styles</a:t>
             </a:r>
+            <a:endParaRPr lang="en-US" smtClean="0"/>
           </a:p>
           <a:p>
             <a:pPr lvl="1"/>
@@ -4038,6 +4023,7 @@
               <a:rPr lang="en-US" smtClean="0"/>
               <a:t>Second level</a:t>
             </a:r>
+            <a:endParaRPr lang="en-US" smtClean="0"/>
           </a:p>
           <a:p>
             <a:pPr lvl="2"/>
@@ -4045,6 +4031,7 @@
               <a:rPr lang="en-US" smtClean="0"/>
               <a:t>Third level</a:t>
             </a:r>
+            <a:endParaRPr lang="en-US" smtClean="0"/>
           </a:p>
           <a:p>
             <a:pPr lvl="3"/>
@@ -4052,6 +4039,7 @@
               <a:rPr lang="en-US" smtClean="0"/>
               <a:t>Fourth level</a:t>
             </a:r>
+            <a:endParaRPr lang="en-US" smtClean="0"/>
           </a:p>
           <a:p>
             <a:pPr lvl="4"/>
@@ -4125,6 +4113,7 @@
               <a:rPr lang="en-US" smtClean="0"/>
               <a:t>Click to edit Master text styles</a:t>
             </a:r>
+            <a:endParaRPr lang="en-US" smtClean="0"/>
           </a:p>
         </p:txBody>
       </p:sp>
@@ -4145,7 +4134,6 @@
           <a:p>
             <a:fld id="{5BCAD085-E8A6-8845-BD4E-CB4CCA059FC4}" type="datetimeFigureOut">
               <a:rPr lang="en-US" smtClean="0"/>
-              <a:t>1/27/13</a:t>
             </a:fld>
             <a:endParaRPr lang="en-US"/>
           </a:p>
@@ -4187,18 +4175,12 @@
           <a:p>
             <a:fld id="{C1FF6DA9-008F-8B48-92A6-B652298478BF}" type="slidenum">
               <a:rPr lang="en-US" smtClean="0"/>
-              <a:t>‹#›</a:t>
             </a:fld>
             <a:endParaRPr lang="en-US"/>
           </a:p>
         </p:txBody>
       </p:sp>
     </p:spTree>
-    <p:extLst>
-      <p:ext uri="{BB962C8B-B14F-4D97-AF65-F5344CB8AC3E}">
-        <p14:creationId xmlns:p14="http://schemas.microsoft.com/office/powerpoint/2010/main" val="1840726560"/>
-      </p:ext>
-    </p:extLst>
   </p:cSld>
   <p:clrMapOvr>
     <a:masterClrMapping/>
@@ -4378,6 +4360,7 @@
               <a:rPr lang="en-US" smtClean="0"/>
               <a:t>Click to edit Master text styles</a:t>
             </a:r>
+            <a:endParaRPr lang="en-US" smtClean="0"/>
           </a:p>
         </p:txBody>
       </p:sp>
@@ -4398,7 +4381,6 @@
           <a:p>
             <a:fld id="{5BCAD085-E8A6-8845-BD4E-CB4CCA059FC4}" type="datetimeFigureOut">
               <a:rPr lang="en-US" smtClean="0"/>
-              <a:t>1/27/13</a:t>
             </a:fld>
             <a:endParaRPr lang="en-US"/>
           </a:p>
@@ -4440,18 +4422,12 @@
           <a:p>
             <a:fld id="{C1FF6DA9-008F-8B48-92A6-B652298478BF}" type="slidenum">
               <a:rPr lang="en-US" smtClean="0"/>
-              <a:t>‹#›</a:t>
             </a:fld>
             <a:endParaRPr lang="en-US"/>
           </a:p>
         </p:txBody>
       </p:sp>
     </p:spTree>
-    <p:extLst>
-      <p:ext uri="{BB962C8B-B14F-4D97-AF65-F5344CB8AC3E}">
-        <p14:creationId xmlns:p14="http://schemas.microsoft.com/office/powerpoint/2010/main" val="3889236939"/>
-      </p:ext>
-    </p:extLst>
   </p:cSld>
   <p:clrMapOvr>
     <a:masterClrMapping/>
@@ -4544,6 +4520,7 @@
               <a:rPr lang="en-US" smtClean="0"/>
               <a:t>Click to edit Master text styles</a:t>
             </a:r>
+            <a:endParaRPr lang="en-US" smtClean="0"/>
           </a:p>
           <a:p>
             <a:pPr lvl="1"/>
@@ -4551,6 +4528,7 @@
               <a:rPr lang="en-US" smtClean="0"/>
               <a:t>Second level</a:t>
             </a:r>
+            <a:endParaRPr lang="en-US" smtClean="0"/>
           </a:p>
           <a:p>
             <a:pPr lvl="2"/>
@@ -4558,6 +4536,7 @@
               <a:rPr lang="en-US" smtClean="0"/>
               <a:t>Third level</a:t>
             </a:r>
+            <a:endParaRPr lang="en-US" smtClean="0"/>
           </a:p>
           <a:p>
             <a:pPr lvl="3"/>
@@ -4565,6 +4544,7 @@
               <a:rPr lang="en-US" smtClean="0"/>
               <a:t>Fourth level</a:t>
             </a:r>
+            <a:endParaRPr lang="en-US" smtClean="0"/>
           </a:p>
           <a:p>
             <a:pPr lvl="4"/>
@@ -4611,7 +4591,6 @@
           <a:p>
             <a:fld id="{5BCAD085-E8A6-8845-BD4E-CB4CCA059FC4}" type="datetimeFigureOut">
               <a:rPr lang="en-US" smtClean="0"/>
-              <a:t>1/27/13</a:t>
             </a:fld>
             <a:endParaRPr lang="en-US"/>
           </a:p>
@@ -4689,18 +4668,12 @@
           <a:p>
             <a:fld id="{C1FF6DA9-008F-8B48-92A6-B652298478BF}" type="slidenum">
               <a:rPr lang="en-US" smtClean="0"/>
-              <a:t>‹#›</a:t>
             </a:fld>
             <a:endParaRPr lang="en-US"/>
           </a:p>
         </p:txBody>
       </p:sp>
     </p:spTree>
-    <p:extLst>
-      <p:ext uri="{BB962C8B-B14F-4D97-AF65-F5344CB8AC3E}">
-        <p14:creationId xmlns:p14="http://schemas.microsoft.com/office/powerpoint/2010/main" val="2209977519"/>
-      </p:ext>
-    </p:extLst>
   </p:cSld>
   <p:clrMap bg1="lt1" tx1="dk1" bg2="lt2" tx2="dk2" accent1="accent1" accent2="accent2" accent3="accent3" accent4="accent4" accent5="accent5" accent6="accent6" hlink="hlink" folHlink="folHlink"/>
   <p:sldLayoutIdLst>
@@ -4738,7 +4711,7 @@
         <a:spcBef>
           <a:spcPct val="20000"/>
         </a:spcBef>
-        <a:buFont typeface="Arial"/>
+        <a:buFont typeface="Arial" panose="020B0604020202020204"/>
         <a:buChar char="•"/>
         <a:defRPr sz="3200" kern="1200">
           <a:solidFill>
@@ -4753,7 +4726,7 @@
         <a:spcBef>
           <a:spcPct val="20000"/>
         </a:spcBef>
-        <a:buFont typeface="Arial"/>
+        <a:buFont typeface="Arial" panose="020B0604020202020204"/>
         <a:buChar char="–"/>
         <a:defRPr sz="2800" kern="1200">
           <a:solidFill>
@@ -4768,7 +4741,7 @@
         <a:spcBef>
           <a:spcPct val="20000"/>
         </a:spcBef>
-        <a:buFont typeface="Arial"/>
+        <a:buFont typeface="Arial" panose="020B0604020202020204"/>
         <a:buChar char="•"/>
         <a:defRPr sz="2400" kern="1200">
           <a:solidFill>
@@ -4783,7 +4756,7 @@
         <a:spcBef>
           <a:spcPct val="20000"/>
         </a:spcBef>
-        <a:buFont typeface="Arial"/>
+        <a:buFont typeface="Arial" panose="020B0604020202020204"/>
         <a:buChar char="–"/>
         <a:defRPr sz="2000" kern="1200">
           <a:solidFill>
@@ -4798,7 +4771,7 @@
         <a:spcBef>
           <a:spcPct val="20000"/>
         </a:spcBef>
-        <a:buFont typeface="Arial"/>
+        <a:buFont typeface="Arial" panose="020B0604020202020204"/>
         <a:buChar char="»"/>
         <a:defRPr sz="2000" kern="1200">
           <a:solidFill>
@@ -4813,7 +4786,7 @@
         <a:spcBef>
           <a:spcPct val="20000"/>
         </a:spcBef>
-        <a:buFont typeface="Arial"/>
+        <a:buFont typeface="Arial" panose="020B0604020202020204"/>
         <a:buChar char="•"/>
         <a:defRPr sz="2000" kern="1200">
           <a:solidFill>
@@ -4828,7 +4801,7 @@
         <a:spcBef>
           <a:spcPct val="20000"/>
         </a:spcBef>
-        <a:buFont typeface="Arial"/>
+        <a:buFont typeface="Arial" panose="020B0604020202020204"/>
         <a:buChar char="•"/>
         <a:defRPr sz="2000" kern="1200">
           <a:solidFill>
@@ -4843,7 +4816,7 @@
         <a:spcBef>
           <a:spcPct val="20000"/>
         </a:spcBef>
-        <a:buFont typeface="Arial"/>
+        <a:buFont typeface="Arial" panose="020B0604020202020204"/>
         <a:buChar char="•"/>
         <a:defRPr sz="2000" kern="1200">
           <a:solidFill>
@@ -4858,7 +4831,7 @@
         <a:spcBef>
           <a:spcPct val="20000"/>
         </a:spcBef>
-        <a:buFont typeface="Arial"/>
+        <a:buFont typeface="Arial" panose="020B0604020202020204"/>
         <a:buChar char="•"/>
         <a:defRPr sz="2000" kern="1200">
           <a:solidFill>
@@ -4970,7 +4943,7 @@
 </file>
 
 <file path=ppt/slides/slide1.xml><?xml version="1.0" encoding="utf-8"?>
-<p:sld xmlns:a="http://schemas.openxmlformats.org/drawingml/2006/main" xmlns:p="http://schemas.openxmlformats.org/presentationml/2006/main" xmlns:r="http://schemas.openxmlformats.org/officeDocument/2006/relationships">
+<p:sld xmlns:a="http://schemas.openxmlformats.org/drawingml/2006/main" xmlns:r="http://schemas.openxmlformats.org/officeDocument/2006/relationships" xmlns:p="http://schemas.openxmlformats.org/presentationml/2006/main">
   <p:cSld>
     <p:spTree>
       <p:nvGrpSpPr>
@@ -5084,7 +5057,7 @@
           <a:noFill/>
         </p:spPr>
         <p:txBody>
-          <a:bodyPr wrap="square" anchor="ctr" lIns="0" rIns="0" tIns="0" bIns="0">
+          <a:bodyPr wrap="square" lIns="0" tIns="0" rIns="0" bIns="0" anchor="ctr">
             <a:spAutoFit/>
           </a:bodyPr>
           <a:lstStyle/>
@@ -5105,12 +5078,20 @@
                 <a:solidFill>
                   <a:srgbClr val="BDD7EE"/>
                 </a:solidFill>
-                <a:latin typeface="微软雅黑"/>
-                <a:ea typeface="微软雅黑"/>
-                <a:cs typeface="微软雅黑"/>
+                <a:latin typeface="微软雅黑" panose="020B0503020204020204" charset="-122"/>
+                <a:ea typeface="微软雅黑" panose="020B0503020204020204" charset="-122"/>
+                <a:cs typeface="微软雅黑" panose="020B0503020204020204" charset="-122"/>
               </a:rPr>
               <a:t>课程设计（实践）答辩</a:t>
             </a:r>
+            <a:endParaRPr sz="2200" b="0">
+              <a:solidFill>
+                <a:srgbClr val="BDD7EE"/>
+              </a:solidFill>
+              <a:latin typeface="微软雅黑" panose="020B0503020204020204" charset="-122"/>
+              <a:ea typeface="微软雅黑" panose="020B0503020204020204" charset="-122"/>
+              <a:cs typeface="微软雅黑" panose="020B0503020204020204" charset="-122"/>
+            </a:endParaRPr>
           </a:p>
         </p:txBody>
       </p:sp>
@@ -5131,7 +5112,7 @@
           <a:noFill/>
         </p:spPr>
         <p:txBody>
-          <a:bodyPr wrap="square" anchor="ctr" lIns="0" rIns="0" tIns="0" bIns="0">
+          <a:bodyPr wrap="square" lIns="0" tIns="0" rIns="0" bIns="0" anchor="ctr">
             <a:spAutoFit/>
           </a:bodyPr>
           <a:lstStyle/>
@@ -5152,12 +5133,20 @@
                 <a:solidFill>
                   <a:srgbClr val="FFFFFF"/>
                 </a:solidFill>
-                <a:latin typeface="微软雅黑"/>
-                <a:ea typeface="微软雅黑"/>
-                <a:cs typeface="微软雅黑"/>
+                <a:latin typeface="微软雅黑" panose="020B0503020204020204" charset="-122"/>
+                <a:ea typeface="微软雅黑" panose="020B0503020204020204" charset="-122"/>
+                <a:cs typeface="微软雅黑" panose="020B0503020204020204" charset="-122"/>
               </a:rPr>
               <a:t>智学助手</a:t>
             </a:r>
+            <a:endParaRPr sz="5400" b="1">
+              <a:solidFill>
+                <a:srgbClr val="FFFFFF"/>
+              </a:solidFill>
+              <a:latin typeface="微软雅黑" panose="020B0503020204020204" charset="-122"/>
+              <a:ea typeface="微软雅黑" panose="020B0503020204020204" charset="-122"/>
+              <a:cs typeface="微软雅黑" panose="020B0503020204020204" charset="-122"/>
+            </a:endParaRPr>
           </a:p>
           <a:p>
             <a:pPr algn="ctr">
@@ -5176,12 +5165,20 @@
                 <a:solidFill>
                   <a:srgbClr val="FFFFFF"/>
                 </a:solidFill>
-                <a:latin typeface="微软雅黑"/>
-                <a:ea typeface="微软雅黑"/>
-                <a:cs typeface="微软雅黑"/>
+                <a:latin typeface="微软雅黑" panose="020B0503020204020204" charset="-122"/>
+                <a:ea typeface="微软雅黑" panose="020B0503020204020204" charset="-122"/>
+                <a:cs typeface="微软雅黑" panose="020B0503020204020204" charset="-122"/>
               </a:rPr>
               <a:t>基于 LangChain 的课程知识库问答与出题系统</a:t>
             </a:r>
+            <a:endParaRPr sz="2400" b="0">
+              <a:solidFill>
+                <a:srgbClr val="FFFFFF"/>
+              </a:solidFill>
+              <a:latin typeface="微软雅黑" panose="020B0503020204020204" charset="-122"/>
+              <a:ea typeface="微软雅黑" panose="020B0503020204020204" charset="-122"/>
+              <a:cs typeface="微软雅黑" panose="020B0503020204020204" charset="-122"/>
+            </a:endParaRPr>
           </a:p>
         </p:txBody>
       </p:sp>
@@ -5194,7 +5191,7 @@
         <p:spPr>
           <a:xfrm>
             <a:off x="822960" y="4526280"/>
-            <a:ext cx="10515600" cy="1554480"/>
+            <a:ext cx="10515600" cy="628015"/>
           </a:xfrm>
           <a:prstGeom prst="rect">
             <a:avLst/>
@@ -5202,7 +5199,7 @@
           <a:noFill/>
         </p:spPr>
         <p:txBody>
-          <a:bodyPr wrap="square" anchor="t" lIns="0" rIns="0" tIns="0" bIns="0">
+          <a:bodyPr wrap="square" lIns="0" tIns="0" rIns="0" bIns="0" anchor="t">
             <a:spAutoFit/>
           </a:bodyPr>
           <a:lstStyle/>
@@ -5223,12 +5220,20 @@
                 <a:solidFill>
                   <a:srgbClr val="FFE699"/>
                 </a:solidFill>
-                <a:latin typeface="微软雅黑"/>
-                <a:ea typeface="微软雅黑"/>
-                <a:cs typeface="微软雅黑"/>
+                <a:latin typeface="微软雅黑" panose="020B0503020204020204" charset="-122"/>
+                <a:ea typeface="微软雅黑" panose="020B0503020204020204" charset="-122"/>
+                <a:cs typeface="微软雅黑" panose="020B0503020204020204" charset="-122"/>
               </a:rPr>
               <a:t>答辩成员：袁钟其（组长）　周承锦　霍飞腾　陈果　刘纲正</a:t>
             </a:r>
+            <a:endParaRPr sz="1500">
+              <a:solidFill>
+                <a:srgbClr val="FFE699"/>
+              </a:solidFill>
+              <a:latin typeface="微软雅黑" panose="020B0503020204020204" charset="-122"/>
+              <a:ea typeface="微软雅黑" panose="020B0503020204020204" charset="-122"/>
+              <a:cs typeface="微软雅黑" panose="020B0503020204020204" charset="-122"/>
+            </a:endParaRPr>
           </a:p>
           <a:p>
             <a:pPr algn="ctr">
@@ -5242,89 +5247,14 @@
                 <a:spcPts val="400"/>
               </a:spcAft>
             </a:pPr>
-            <a:r>
-              <a:rPr sz="1500">
-                <a:solidFill>
-                  <a:srgbClr val="FFE699"/>
-                </a:solidFill>
-                <a:latin typeface="微软雅黑"/>
-                <a:ea typeface="微软雅黑"/>
-                <a:cs typeface="微软雅黑"/>
-              </a:rPr>
-              <a:t>答辩成员：袁钟其（组长）　周承锦　霍飞腾　陈果　刘纲正</a:t>
-            </a:r>
-          </a:p>
-          <a:p>
-            <a:pPr algn="ctr">
-              <a:lnSpc>
-                <a:spcPct val="125000"/>
-              </a:lnSpc>
-              <a:spcBef>
-                <a:spcPts val="0"/>
-              </a:spcBef>
-              <a:spcAft>
-                <a:spcPts val="400"/>
-              </a:spcAft>
-            </a:pPr>
-            <a:r>
-              <a:rPr sz="1500">
-                <a:solidFill>
-                  <a:srgbClr val="FFE699"/>
-                </a:solidFill>
-                <a:latin typeface="微软雅黑"/>
-                <a:ea typeface="微软雅黑"/>
-                <a:cs typeface="微软雅黑"/>
-              </a:rPr>
-              <a:t>答辩成员：袁钟其（组长）　周承锦　霍飞腾　陈果　刘纲正</a:t>
-            </a:r>
-          </a:p>
-          <a:p>
-            <a:pPr algn="ctr">
-              <a:lnSpc>
-                <a:spcPct val="125000"/>
-              </a:lnSpc>
-              <a:spcBef>
-                <a:spcPts val="0"/>
-              </a:spcBef>
-              <a:spcAft>
-                <a:spcPts val="400"/>
-              </a:spcAft>
-            </a:pPr>
-            <a:r>
-              <a:rPr sz="1500">
-                <a:solidFill>
-                  <a:srgbClr val="FFE699"/>
-                </a:solidFill>
-                <a:latin typeface="微软雅黑"/>
-                <a:ea typeface="微软雅黑"/>
-                <a:cs typeface="微软雅黑"/>
-              </a:rPr>
-              <a:t>答辩成员：袁钟其（组长）　周承锦　霍飞腾　陈果　刘纲正</a:t>
-            </a:r>
-          </a:p>
-          <a:p>
-            <a:pPr algn="ctr">
-              <a:lnSpc>
-                <a:spcPct val="125000"/>
-              </a:lnSpc>
-              <a:spcBef>
-                <a:spcPts val="0"/>
-              </a:spcBef>
-              <a:spcAft>
-                <a:spcPts val="600"/>
-              </a:spcAft>
-            </a:pPr>
-            <a:r>
-              <a:rPr sz="1500">
-                <a:solidFill>
-                  <a:srgbClr val="FFE699"/>
-                </a:solidFill>
-                <a:latin typeface="微软雅黑"/>
-                <a:ea typeface="微软雅黑"/>
-                <a:cs typeface="微软雅黑"/>
-              </a:rPr>
-              <a:t>答辩成员：袁钟其（组长）　周承锦　霍飞腾　陈果　刘纲正</a:t>
-            </a:r>
+            <a:endParaRPr sz="1500">
+              <a:solidFill>
+                <a:srgbClr val="FFE699"/>
+              </a:solidFill>
+              <a:latin typeface="微软雅黑" panose="020B0503020204020204" charset="-122"/>
+              <a:ea typeface="微软雅黑" panose="020B0503020204020204" charset="-122"/>
+              <a:cs typeface="微软雅黑" panose="020B0503020204020204" charset="-122"/>
+            </a:endParaRPr>
           </a:p>
         </p:txBody>
       </p:sp>
@@ -5337,7 +5267,7 @@
 </file>
 
 <file path=ppt/slides/slide10.xml><?xml version="1.0" encoding="utf-8"?>
-<p:sld xmlns:a="http://schemas.openxmlformats.org/drawingml/2006/main" xmlns:p="http://schemas.openxmlformats.org/presentationml/2006/main" xmlns:r="http://schemas.openxmlformats.org/officeDocument/2006/relationships">
+<p:sld xmlns:a="http://schemas.openxmlformats.org/drawingml/2006/main" xmlns:r="http://schemas.openxmlformats.org/officeDocument/2006/relationships" xmlns:p="http://schemas.openxmlformats.org/presentationml/2006/main">
   <p:cSld>
     <p:spTree>
       <p:nvGrpSpPr>
@@ -5407,7 +5337,7 @@
           <a:noFill/>
         </p:spPr>
         <p:txBody>
-          <a:bodyPr wrap="square" anchor="ctr" lIns="0" rIns="0" tIns="0" bIns="0">
+          <a:bodyPr wrap="square" lIns="0" tIns="0" rIns="0" bIns="0" anchor="ctr">
             <a:spAutoFit/>
           </a:bodyPr>
           <a:lstStyle/>
@@ -5428,12 +5358,20 @@
                 <a:solidFill>
                   <a:srgbClr val="FFFFFF"/>
                 </a:solidFill>
-                <a:latin typeface="微软雅黑"/>
-                <a:ea typeface="微软雅黑"/>
-                <a:cs typeface="微软雅黑"/>
+                <a:latin typeface="微软雅黑" panose="020B0503020204020204" charset="-122"/>
+                <a:ea typeface="微软雅黑" panose="020B0503020204020204" charset="-122"/>
+                <a:cs typeface="微软雅黑" panose="020B0503020204020204" charset="-122"/>
               </a:rPr>
               <a:t>5.1　F3 自动出题与判题模块</a:t>
             </a:r>
+            <a:endParaRPr sz="2600" b="1">
+              <a:solidFill>
+                <a:srgbClr val="FFFFFF"/>
+              </a:solidFill>
+              <a:latin typeface="微软雅黑" panose="020B0503020204020204" charset="-122"/>
+              <a:ea typeface="微软雅黑" panose="020B0503020204020204" charset="-122"/>
+              <a:cs typeface="微软雅黑" panose="020B0503020204020204" charset="-122"/>
+            </a:endParaRPr>
           </a:p>
         </p:txBody>
       </p:sp>
@@ -5454,7 +5392,7 @@
           <a:noFill/>
         </p:spPr>
         <p:txBody>
-          <a:bodyPr wrap="square" anchor="ctr" lIns="0" rIns="0" tIns="0" bIns="0">
+          <a:bodyPr wrap="square" lIns="0" tIns="0" rIns="0" bIns="0" anchor="ctr">
             <a:spAutoFit/>
           </a:bodyPr>
           <a:lstStyle/>
@@ -5475,10 +5413,16 @@
                 <a:solidFill>
                   <a:srgbClr val="BDD7EE"/>
                 </a:solidFill>
-                <a:latin typeface="微软雅黑"/>
+                <a:latin typeface="微软雅黑" panose="020B0503020204020204" charset="-122"/>
               </a:rPr>
               <a:t>负责人：周承锦</a:t>
             </a:r>
+            <a:endParaRPr sz="1300">
+              <a:solidFill>
+                <a:srgbClr val="BDD7EE"/>
+              </a:solidFill>
+              <a:latin typeface="微软雅黑" panose="020B0503020204020204" charset="-122"/>
+            </a:endParaRPr>
           </a:p>
         </p:txBody>
       </p:sp>
@@ -5499,7 +5443,7 @@
           <a:noFill/>
         </p:spPr>
         <p:txBody>
-          <a:bodyPr wrap="square" anchor="t" lIns="0" rIns="0" tIns="0" bIns="0">
+          <a:bodyPr wrap="square" lIns="0" tIns="0" rIns="0" bIns="0" anchor="t">
             <a:spAutoFit/>
           </a:bodyPr>
           <a:lstStyle/>
@@ -5520,10 +5464,16 @@
                 <a:solidFill>
                   <a:srgbClr val="808080"/>
                 </a:solidFill>
-                <a:latin typeface="微软雅黑"/>
+                <a:latin typeface="微软雅黑" panose="020B0503020204020204" charset="-122"/>
               </a:rPr>
               <a:t>10</a:t>
             </a:r>
+            <a:endParaRPr sz="1000">
+              <a:solidFill>
+                <a:srgbClr val="808080"/>
+              </a:solidFill>
+              <a:latin typeface="微软雅黑" panose="020B0503020204020204" charset="-122"/>
+            </a:endParaRPr>
           </a:p>
         </p:txBody>
       </p:sp>
@@ -5544,7 +5494,7 @@
           <a:noFill/>
         </p:spPr>
         <p:txBody>
-          <a:bodyPr wrap="square" anchor="t" lIns="0" rIns="0" tIns="0" bIns="0">
+          <a:bodyPr wrap="square" lIns="0" tIns="0" rIns="0" bIns="0" anchor="t">
             <a:spAutoFit/>
           </a:bodyPr>
           <a:lstStyle/>
@@ -5565,12 +5515,20 @@
                 <a:solidFill>
                   <a:srgbClr val="2E75B6"/>
                 </a:solidFill>
-                <a:latin typeface="微软雅黑"/>
-                <a:ea typeface="微软雅黑"/>
-                <a:cs typeface="微软雅黑"/>
+                <a:latin typeface="微软雅黑" panose="020B0503020204020204" charset="-122"/>
+                <a:ea typeface="微软雅黑" panose="020B0503020204020204" charset="-122"/>
+                <a:cs typeface="微软雅黑" panose="020B0503020204020204" charset="-122"/>
               </a:rPr>
               <a:t>出题流程</a:t>
             </a:r>
+            <a:endParaRPr sz="1700" b="1">
+              <a:solidFill>
+                <a:srgbClr val="2E75B6"/>
+              </a:solidFill>
+              <a:latin typeface="微软雅黑" panose="020B0503020204020204" charset="-122"/>
+              <a:ea typeface="微软雅黑" panose="020B0503020204020204" charset="-122"/>
+              <a:cs typeface="微软雅黑" panose="020B0503020204020204" charset="-122"/>
+            </a:endParaRPr>
           </a:p>
         </p:txBody>
       </p:sp>
@@ -5608,12 +5566,20 @@
                           <a:solidFill>
                             <a:srgbClr val="FFFFFF"/>
                           </a:solidFill>
-                          <a:latin typeface="微软雅黑"/>
-                          <a:ea typeface="微软雅黑"/>
-                          <a:cs typeface="微软雅黑"/>
+                          <a:latin typeface="微软雅黑" panose="020B0503020204020204" charset="-122"/>
+                          <a:ea typeface="微软雅黑" panose="020B0503020204020204" charset="-122"/>
+                          <a:cs typeface="微软雅黑" panose="020B0503020204020204" charset="-122"/>
                         </a:rPr>
                         <a:t>步骤</a:t>
                       </a:r>
+                      <a:endParaRPr sz="1300" b="1">
+                        <a:solidFill>
+                          <a:srgbClr val="FFFFFF"/>
+                        </a:solidFill>
+                        <a:latin typeface="微软雅黑" panose="020B0503020204020204" charset="-122"/>
+                        <a:ea typeface="微软雅黑" panose="020B0503020204020204" charset="-122"/>
+                        <a:cs typeface="微软雅黑" panose="020B0503020204020204" charset="-122"/>
+                      </a:endParaRPr>
                     </a:p>
                   </a:txBody>
                   <a:tcPr anchor="ctr">
@@ -5633,12 +5599,20 @@
                           <a:solidFill>
                             <a:srgbClr val="FFFFFF"/>
                           </a:solidFill>
-                          <a:latin typeface="微软雅黑"/>
-                          <a:ea typeface="微软雅黑"/>
-                          <a:cs typeface="微软雅黑"/>
+                          <a:latin typeface="微软雅黑" panose="020B0503020204020204" charset="-122"/>
+                          <a:ea typeface="微软雅黑" panose="020B0503020204020204" charset="-122"/>
+                          <a:cs typeface="微软雅黑" panose="020B0503020204020204" charset="-122"/>
                         </a:rPr>
                         <a:t>处理内容</a:t>
                       </a:r>
+                      <a:endParaRPr sz="1300" b="1">
+                        <a:solidFill>
+                          <a:srgbClr val="FFFFFF"/>
+                        </a:solidFill>
+                        <a:latin typeface="微软雅黑" panose="020B0503020204020204" charset="-122"/>
+                        <a:ea typeface="微软雅黑" panose="020B0503020204020204" charset="-122"/>
+                        <a:cs typeface="微软雅黑" panose="020B0503020204020204" charset="-122"/>
+                      </a:endParaRPr>
                     </a:p>
                   </a:txBody>
                   <a:tcPr anchor="ctr">
@@ -5660,12 +5634,20 @@
                           <a:solidFill>
                             <a:srgbClr val="222222"/>
                           </a:solidFill>
-                          <a:latin typeface="微软雅黑"/>
-                          <a:ea typeface="微软雅黑"/>
-                          <a:cs typeface="微软雅黑"/>
+                          <a:latin typeface="微软雅黑" panose="020B0503020204020204" charset="-122"/>
+                          <a:ea typeface="微软雅黑" panose="020B0503020204020204" charset="-122"/>
+                          <a:cs typeface="微软雅黑" panose="020B0503020204020204" charset="-122"/>
                         </a:rPr>
                         <a:t>① 检索</a:t>
                       </a:r>
+                      <a:endParaRPr sz="1200" b="0">
+                        <a:solidFill>
+                          <a:srgbClr val="222222"/>
+                        </a:solidFill>
+                        <a:latin typeface="微软雅黑" panose="020B0503020204020204" charset="-122"/>
+                        <a:ea typeface="微软雅黑" panose="020B0503020204020204" charset="-122"/>
+                        <a:cs typeface="微软雅黑" panose="020B0503020204020204" charset="-122"/>
+                      </a:endParaRPr>
                     </a:p>
                   </a:txBody>
                   <a:tcPr anchor="ctr">
@@ -5685,12 +5667,20 @@
                           <a:solidFill>
                             <a:srgbClr val="222222"/>
                           </a:solidFill>
-                          <a:latin typeface="微软雅黑"/>
-                          <a:ea typeface="微软雅黑"/>
-                          <a:cs typeface="微软雅黑"/>
+                          <a:latin typeface="微软雅黑" panose="020B0503020204020204" charset="-122"/>
+                          <a:ea typeface="微软雅黑" panose="020B0503020204020204" charset="-122"/>
+                          <a:cs typeface="微软雅黑" panose="020B0503020204020204" charset="-122"/>
                         </a:rPr>
                         <a:t>按出题主题从 Chroma 检索相关文本片段，拼接为参考资料</a:t>
                       </a:r>
+                      <a:endParaRPr sz="1200" b="0">
+                        <a:solidFill>
+                          <a:srgbClr val="222222"/>
+                        </a:solidFill>
+                        <a:latin typeface="微软雅黑" panose="020B0503020204020204" charset="-122"/>
+                        <a:ea typeface="微软雅黑" panose="020B0503020204020204" charset="-122"/>
+                        <a:cs typeface="微软雅黑" panose="020B0503020204020204" charset="-122"/>
+                      </a:endParaRPr>
                     </a:p>
                   </a:txBody>
                   <a:tcPr anchor="ctr">
@@ -5712,12 +5702,20 @@
                           <a:solidFill>
                             <a:srgbClr val="222222"/>
                           </a:solidFill>
-                          <a:latin typeface="微软雅黑"/>
-                          <a:ea typeface="微软雅黑"/>
-                          <a:cs typeface="微软雅黑"/>
+                          <a:latin typeface="微软雅黑" panose="020B0503020204020204" charset="-122"/>
+                          <a:ea typeface="微软雅黑" panose="020B0503020204020204" charset="-122"/>
+                          <a:cs typeface="微软雅黑" panose="020B0503020204020204" charset="-122"/>
                         </a:rPr>
                         <a:t>② 生成</a:t>
                       </a:r>
+                      <a:endParaRPr sz="1200" b="0">
+                        <a:solidFill>
+                          <a:srgbClr val="222222"/>
+                        </a:solidFill>
+                        <a:latin typeface="微软雅黑" panose="020B0503020204020204" charset="-122"/>
+                        <a:ea typeface="微软雅黑" panose="020B0503020204020204" charset="-122"/>
+                        <a:cs typeface="微软雅黑" panose="020B0503020204020204" charset="-122"/>
+                      </a:endParaRPr>
                     </a:p>
                   </a:txBody>
                   <a:tcPr anchor="ctr">
@@ -5737,12 +5735,20 @@
                           <a:solidFill>
                             <a:srgbClr val="222222"/>
                           </a:solidFill>
-                          <a:latin typeface="微软雅黑"/>
-                          <a:ea typeface="微软雅黑"/>
-                          <a:cs typeface="微软雅黑"/>
+                          <a:latin typeface="微软雅黑" panose="020B0503020204020204" charset="-122"/>
+                          <a:ea typeface="微软雅黑" panose="020B0503020204020204" charset="-122"/>
+                          <a:cs typeface="微软雅黑" panose="020B0503020204020204" charset="-122"/>
                         </a:rPr>
                         <a:t>将题型、难度、数量与参考资料填入提示词，交由大模型生成</a:t>
                       </a:r>
+                      <a:endParaRPr sz="1200" b="0">
+                        <a:solidFill>
+                          <a:srgbClr val="222222"/>
+                        </a:solidFill>
+                        <a:latin typeface="微软雅黑" panose="020B0503020204020204" charset="-122"/>
+                        <a:ea typeface="微软雅黑" panose="020B0503020204020204" charset="-122"/>
+                        <a:cs typeface="微软雅黑" panose="020B0503020204020204" charset="-122"/>
+                      </a:endParaRPr>
                     </a:p>
                   </a:txBody>
                   <a:tcPr anchor="ctr">
@@ -5764,12 +5770,20 @@
                           <a:solidFill>
                             <a:srgbClr val="222222"/>
                           </a:solidFill>
-                          <a:latin typeface="微软雅黑"/>
-                          <a:ea typeface="微软雅黑"/>
-                          <a:cs typeface="微软雅黑"/>
+                          <a:latin typeface="微软雅黑" panose="020B0503020204020204" charset="-122"/>
+                          <a:ea typeface="微软雅黑" panose="020B0503020204020204" charset="-122"/>
+                          <a:cs typeface="微软雅黑" panose="020B0503020204020204" charset="-122"/>
                         </a:rPr>
                         <a:t>③ 校验</a:t>
                       </a:r>
+                      <a:endParaRPr sz="1200" b="0">
+                        <a:solidFill>
+                          <a:srgbClr val="222222"/>
+                        </a:solidFill>
+                        <a:latin typeface="微软雅黑" panose="020B0503020204020204" charset="-122"/>
+                        <a:ea typeface="微软雅黑" panose="020B0503020204020204" charset="-122"/>
+                        <a:cs typeface="微软雅黑" panose="020B0503020204020204" charset="-122"/>
+                      </a:endParaRPr>
                     </a:p>
                   </a:txBody>
                   <a:tcPr anchor="ctr">
@@ -5789,12 +5803,20 @@
                           <a:solidFill>
                             <a:srgbClr val="222222"/>
                           </a:solidFill>
-                          <a:latin typeface="微软雅黑"/>
-                          <a:ea typeface="微软雅黑"/>
-                          <a:cs typeface="微软雅黑"/>
+                          <a:latin typeface="微软雅黑" panose="020B0503020204020204" charset="-122"/>
+                          <a:ea typeface="微软雅黑" panose="020B0503020204020204" charset="-122"/>
+                          <a:cs typeface="微软雅黑" panose="020B0503020204020204" charset="-122"/>
                         </a:rPr>
                         <a:t>去除代码块标记后解析 JSON 并校验字段，失败最多重试 2 次</a:t>
                       </a:r>
+                      <a:endParaRPr sz="1200" b="0">
+                        <a:solidFill>
+                          <a:srgbClr val="222222"/>
+                        </a:solidFill>
+                        <a:latin typeface="微软雅黑" panose="020B0503020204020204" charset="-122"/>
+                        <a:ea typeface="微软雅黑" panose="020B0503020204020204" charset="-122"/>
+                        <a:cs typeface="微软雅黑" panose="020B0503020204020204" charset="-122"/>
+                      </a:endParaRPr>
                     </a:p>
                   </a:txBody>
                   <a:tcPr anchor="ctr">
@@ -5816,12 +5838,20 @@
                           <a:solidFill>
                             <a:srgbClr val="222222"/>
                           </a:solidFill>
-                          <a:latin typeface="微软雅黑"/>
-                          <a:ea typeface="微软雅黑"/>
-                          <a:cs typeface="微软雅黑"/>
+                          <a:latin typeface="微软雅黑" panose="020B0503020204020204" charset="-122"/>
+                          <a:ea typeface="微软雅黑" panose="020B0503020204020204" charset="-122"/>
+                          <a:cs typeface="微软雅黑" panose="020B0503020204020204" charset="-122"/>
                         </a:rPr>
                         <a:t>④ 入库</a:t>
                       </a:r>
+                      <a:endParaRPr sz="1200" b="0">
+                        <a:solidFill>
+                          <a:srgbClr val="222222"/>
+                        </a:solidFill>
+                        <a:latin typeface="微软雅黑" panose="020B0503020204020204" charset="-122"/>
+                        <a:ea typeface="微软雅黑" panose="020B0503020204020204" charset="-122"/>
+                        <a:cs typeface="微软雅黑" panose="020B0503020204020204" charset="-122"/>
+                      </a:endParaRPr>
                     </a:p>
                   </a:txBody>
                   <a:tcPr anchor="ctr">
@@ -5841,12 +5871,20 @@
                           <a:solidFill>
                             <a:srgbClr val="222222"/>
                           </a:solidFill>
-                          <a:latin typeface="微软雅黑"/>
-                          <a:ea typeface="微软雅黑"/>
-                          <a:cs typeface="微软雅黑"/>
+                          <a:latin typeface="微软雅黑" panose="020B0503020204020204" charset="-122"/>
+                          <a:ea typeface="微软雅黑" panose="020B0503020204020204" charset="-122"/>
+                          <a:cs typeface="微软雅黑" panose="020B0503020204020204" charset="-122"/>
                         </a:rPr>
                         <a:t>同一会话中先写出题批次获取编号，再批量写入题目后提交</a:t>
                       </a:r>
+                      <a:endParaRPr sz="1200" b="0">
+                        <a:solidFill>
+                          <a:srgbClr val="222222"/>
+                        </a:solidFill>
+                        <a:latin typeface="微软雅黑" panose="020B0503020204020204" charset="-122"/>
+                        <a:ea typeface="微软雅黑" panose="020B0503020204020204" charset="-122"/>
+                        <a:cs typeface="微软雅黑" panose="020B0503020204020204" charset="-122"/>
+                      </a:endParaRPr>
                     </a:p>
                   </a:txBody>
                   <a:tcPr anchor="ctr">
@@ -5877,7 +5915,7 @@
           <a:noFill/>
         </p:spPr>
         <p:txBody>
-          <a:bodyPr wrap="square" anchor="t" lIns="0" rIns="0" tIns="0" bIns="0">
+          <a:bodyPr wrap="square" lIns="0" tIns="0" rIns="0" bIns="0" anchor="t">
             <a:spAutoFit/>
           </a:bodyPr>
           <a:lstStyle/>
@@ -5898,12 +5936,20 @@
                 <a:solidFill>
                   <a:srgbClr val="2E75B6"/>
                 </a:solidFill>
-                <a:latin typeface="微软雅黑"/>
-                <a:ea typeface="微软雅黑"/>
-                <a:cs typeface="微软雅黑"/>
+                <a:latin typeface="微软雅黑" panose="020B0503020204020204" charset="-122"/>
+                <a:ea typeface="微软雅黑" panose="020B0503020204020204" charset="-122"/>
+                <a:cs typeface="微软雅黑" panose="020B0503020204020204" charset="-122"/>
               </a:rPr>
               <a:t>判题策略（按题型区分）</a:t>
             </a:r>
+            <a:endParaRPr sz="1700" b="1">
+              <a:solidFill>
+                <a:srgbClr val="2E75B6"/>
+              </a:solidFill>
+              <a:latin typeface="微软雅黑" panose="020B0503020204020204" charset="-122"/>
+              <a:ea typeface="微软雅黑" panose="020B0503020204020204" charset="-122"/>
+              <a:cs typeface="微软雅黑" panose="020B0503020204020204" charset="-122"/>
+            </a:endParaRPr>
           </a:p>
         </p:txBody>
       </p:sp>
@@ -5924,7 +5970,7 @@
           <a:noFill/>
         </p:spPr>
         <p:txBody>
-          <a:bodyPr wrap="square" anchor="t" lIns="0" rIns="0" tIns="0" bIns="0">
+          <a:bodyPr wrap="square" lIns="0" tIns="0" rIns="0" bIns="0" anchor="t">
             <a:spAutoFit/>
           </a:bodyPr>
           <a:lstStyle/>
@@ -5945,9 +5991,9 @@
                 <a:solidFill>
                   <a:srgbClr val="222222"/>
                 </a:solidFill>
-                <a:latin typeface="微软雅黑"/>
-                <a:ea typeface="微软雅黑"/>
-                <a:cs typeface="微软雅黑"/>
+                <a:latin typeface="微软雅黑" panose="020B0503020204020204" charset="-122"/>
+                <a:ea typeface="微软雅黑" panose="020B0503020204020204" charset="-122"/>
+                <a:cs typeface="微软雅黑" panose="020B0503020204020204" charset="-122"/>
               </a:rPr>
               <a:t>• </a:t>
             </a:r>
@@ -5956,12 +6002,20 @@
                 <a:solidFill>
                   <a:srgbClr val="222222"/>
                 </a:solidFill>
-                <a:latin typeface="微软雅黑"/>
-                <a:ea typeface="微软雅黑"/>
-                <a:cs typeface="微软雅黑"/>
+                <a:latin typeface="微软雅黑" panose="020B0503020204020204" charset="-122"/>
+                <a:ea typeface="微软雅黑" panose="020B0503020204020204" charset="-122"/>
+                <a:cs typeface="微软雅黑" panose="020B0503020204020204" charset="-122"/>
               </a:rPr>
               <a:t>单选 / 判断：直接比对答案字符串</a:t>
             </a:r>
+            <a:endParaRPr sz="1400" b="0">
+              <a:solidFill>
+                <a:srgbClr val="222222"/>
+              </a:solidFill>
+              <a:latin typeface="微软雅黑" panose="020B0503020204020204" charset="-122"/>
+              <a:ea typeface="微软雅黑" panose="020B0503020204020204" charset="-122"/>
+              <a:cs typeface="微软雅黑" panose="020B0503020204020204" charset="-122"/>
+            </a:endParaRPr>
           </a:p>
           <a:p>
             <a:pPr algn="l">
@@ -5980,9 +6034,9 @@
                 <a:solidFill>
                   <a:srgbClr val="222222"/>
                 </a:solidFill>
-                <a:latin typeface="微软雅黑"/>
-                <a:ea typeface="微软雅黑"/>
-                <a:cs typeface="微软雅黑"/>
+                <a:latin typeface="微软雅黑" panose="020B0503020204020204" charset="-122"/>
+                <a:ea typeface="微软雅黑" panose="020B0503020204020204" charset="-122"/>
+                <a:cs typeface="微软雅黑" panose="020B0503020204020204" charset="-122"/>
               </a:rPr>
               <a:t>• </a:t>
             </a:r>
@@ -5991,12 +6045,20 @@
                 <a:solidFill>
                   <a:srgbClr val="222222"/>
                 </a:solidFill>
-                <a:latin typeface="微软雅黑"/>
-                <a:ea typeface="微软雅黑"/>
-                <a:cs typeface="微软雅黑"/>
+                <a:latin typeface="微软雅黑" panose="020B0503020204020204" charset="-122"/>
+                <a:ea typeface="微软雅黑" panose="020B0503020204020204" charset="-122"/>
+                <a:cs typeface="微软雅黑" panose="020B0503020204020204" charset="-122"/>
               </a:rPr>
               <a:t>多选：先将用户答案与正确答案分别排序再比对，使“AB”与“BA”等价</a:t>
             </a:r>
+            <a:endParaRPr sz="1400" b="0">
+              <a:solidFill>
+                <a:srgbClr val="222222"/>
+              </a:solidFill>
+              <a:latin typeface="微软雅黑" panose="020B0503020204020204" charset="-122"/>
+              <a:ea typeface="微软雅黑" panose="020B0503020204020204" charset="-122"/>
+              <a:cs typeface="微软雅黑" panose="020B0503020204020204" charset="-122"/>
+            </a:endParaRPr>
           </a:p>
           <a:p>
             <a:pPr algn="l">
@@ -6015,9 +6077,9 @@
                 <a:solidFill>
                   <a:srgbClr val="222222"/>
                 </a:solidFill>
-                <a:latin typeface="微软雅黑"/>
-                <a:ea typeface="微软雅黑"/>
-                <a:cs typeface="微软雅黑"/>
+                <a:latin typeface="微软雅黑" panose="020B0503020204020204" charset="-122"/>
+                <a:ea typeface="微软雅黑" panose="020B0503020204020204" charset="-122"/>
+                <a:cs typeface="微软雅黑" panose="020B0503020204020204" charset="-122"/>
               </a:rPr>
               <a:t>• </a:t>
             </a:r>
@@ -6026,12 +6088,20 @@
                 <a:solidFill>
                   <a:srgbClr val="222222"/>
                 </a:solidFill>
-                <a:latin typeface="微软雅黑"/>
-                <a:ea typeface="微软雅黑"/>
-                <a:cs typeface="微软雅黑"/>
+                <a:latin typeface="微软雅黑" panose="020B0503020204020204" charset="-122"/>
+                <a:ea typeface="微软雅黑" panose="020B0503020204020204" charset="-122"/>
+                <a:cs typeface="微软雅黑" panose="020B0503020204020204" charset="-122"/>
               </a:rPr>
               <a:t>简答：调用大模型做语义评分；失败时降级为关键词匹配（命中率 60% 判正确）；仍无法判断则记为待复习</a:t>
             </a:r>
+            <a:endParaRPr sz="1400" b="0">
+              <a:solidFill>
+                <a:srgbClr val="222222"/>
+              </a:solidFill>
+              <a:latin typeface="微软雅黑" panose="020B0503020204020204" charset="-122"/>
+              <a:ea typeface="微软雅黑" panose="020B0503020204020204" charset="-122"/>
+              <a:cs typeface="微软雅黑" panose="020B0503020204020204" charset="-122"/>
+            </a:endParaRPr>
           </a:p>
         </p:txBody>
       </p:sp>
@@ -6044,7 +6114,7 @@
 </file>
 
 <file path=ppt/slides/slide11.xml><?xml version="1.0" encoding="utf-8"?>
-<p:sld xmlns:a="http://schemas.openxmlformats.org/drawingml/2006/main" xmlns:p="http://schemas.openxmlformats.org/presentationml/2006/main" xmlns:r="http://schemas.openxmlformats.org/officeDocument/2006/relationships">
+<p:sld xmlns:a="http://schemas.openxmlformats.org/drawingml/2006/main" xmlns:r="http://schemas.openxmlformats.org/officeDocument/2006/relationships" xmlns:p="http://schemas.openxmlformats.org/presentationml/2006/main">
   <p:cSld>
     <p:spTree>
       <p:nvGrpSpPr>
@@ -6114,7 +6184,7 @@
           <a:noFill/>
         </p:spPr>
         <p:txBody>
-          <a:bodyPr wrap="square" anchor="ctr" lIns="0" rIns="0" tIns="0" bIns="0">
+          <a:bodyPr wrap="square" lIns="0" tIns="0" rIns="0" bIns="0" anchor="ctr">
             <a:spAutoFit/>
           </a:bodyPr>
           <a:lstStyle/>
@@ -6135,12 +6205,20 @@
                 <a:solidFill>
                   <a:srgbClr val="FFFFFF"/>
                 </a:solidFill>
-                <a:latin typeface="微软雅黑"/>
-                <a:ea typeface="微软雅黑"/>
-                <a:cs typeface="微软雅黑"/>
+                <a:latin typeface="微软雅黑" panose="020B0503020204020204" charset="-122"/>
+                <a:ea typeface="微软雅黑" panose="020B0503020204020204" charset="-122"/>
+                <a:cs typeface="微软雅黑" panose="020B0503020204020204" charset="-122"/>
               </a:rPr>
               <a:t>5.2　F4 错题本与 F5 复习计划模块</a:t>
             </a:r>
+            <a:endParaRPr sz="2600" b="1">
+              <a:solidFill>
+                <a:srgbClr val="FFFFFF"/>
+              </a:solidFill>
+              <a:latin typeface="微软雅黑" panose="020B0503020204020204" charset="-122"/>
+              <a:ea typeface="微软雅黑" panose="020B0503020204020204" charset="-122"/>
+              <a:cs typeface="微软雅黑" panose="020B0503020204020204" charset="-122"/>
+            </a:endParaRPr>
           </a:p>
         </p:txBody>
       </p:sp>
@@ -6161,7 +6239,7 @@
           <a:noFill/>
         </p:spPr>
         <p:txBody>
-          <a:bodyPr wrap="square" anchor="ctr" lIns="0" rIns="0" tIns="0" bIns="0">
+          <a:bodyPr wrap="square" lIns="0" tIns="0" rIns="0" bIns="0" anchor="ctr">
             <a:spAutoFit/>
           </a:bodyPr>
           <a:lstStyle/>
@@ -6182,10 +6260,16 @@
                 <a:solidFill>
                   <a:srgbClr val="BDD7EE"/>
                 </a:solidFill>
-                <a:latin typeface="微软雅黑"/>
+                <a:latin typeface="微软雅黑" panose="020B0503020204020204" charset="-122"/>
               </a:rPr>
               <a:t>负责人：周承锦</a:t>
             </a:r>
+            <a:endParaRPr sz="1300">
+              <a:solidFill>
+                <a:srgbClr val="BDD7EE"/>
+              </a:solidFill>
+              <a:latin typeface="微软雅黑" panose="020B0503020204020204" charset="-122"/>
+            </a:endParaRPr>
           </a:p>
         </p:txBody>
       </p:sp>
@@ -6206,7 +6290,7 @@
           <a:noFill/>
         </p:spPr>
         <p:txBody>
-          <a:bodyPr wrap="square" anchor="t" lIns="0" rIns="0" tIns="0" bIns="0">
+          <a:bodyPr wrap="square" lIns="0" tIns="0" rIns="0" bIns="0" anchor="t">
             <a:spAutoFit/>
           </a:bodyPr>
           <a:lstStyle/>
@@ -6227,10 +6311,16 @@
                 <a:solidFill>
                   <a:srgbClr val="808080"/>
                 </a:solidFill>
-                <a:latin typeface="微软雅黑"/>
+                <a:latin typeface="微软雅黑" panose="020B0503020204020204" charset="-122"/>
               </a:rPr>
               <a:t>11</a:t>
             </a:r>
+            <a:endParaRPr sz="1000">
+              <a:solidFill>
+                <a:srgbClr val="808080"/>
+              </a:solidFill>
+              <a:latin typeface="微软雅黑" panose="020B0503020204020204" charset="-122"/>
+            </a:endParaRPr>
           </a:p>
         </p:txBody>
       </p:sp>
@@ -6251,7 +6341,7 @@
           <a:noFill/>
         </p:spPr>
         <p:txBody>
-          <a:bodyPr wrap="square" anchor="t" lIns="0" rIns="0" tIns="0" bIns="0">
+          <a:bodyPr wrap="square" lIns="0" tIns="0" rIns="0" bIns="0" anchor="t">
             <a:spAutoFit/>
           </a:bodyPr>
           <a:lstStyle/>
@@ -6272,12 +6362,20 @@
                 <a:solidFill>
                   <a:srgbClr val="2E75B6"/>
                 </a:solidFill>
-                <a:latin typeface="微软雅黑"/>
-                <a:ea typeface="微软雅黑"/>
-                <a:cs typeface="微软雅黑"/>
+                <a:latin typeface="微软雅黑" panose="020B0503020204020204" charset="-122"/>
+                <a:ea typeface="微软雅黑" panose="020B0503020204020204" charset="-122"/>
+                <a:cs typeface="微软雅黑" panose="020B0503020204020204" charset="-122"/>
               </a:rPr>
               <a:t>错题本</a:t>
             </a:r>
+            <a:endParaRPr sz="1700" b="1">
+              <a:solidFill>
+                <a:srgbClr val="2E75B6"/>
+              </a:solidFill>
+              <a:latin typeface="微软雅黑" panose="020B0503020204020204" charset="-122"/>
+              <a:ea typeface="微软雅黑" panose="020B0503020204020204" charset="-122"/>
+              <a:cs typeface="微软雅黑" panose="020B0503020204020204" charset="-122"/>
+            </a:endParaRPr>
           </a:p>
         </p:txBody>
       </p:sp>
@@ -6298,7 +6396,7 @@
           <a:noFill/>
         </p:spPr>
         <p:txBody>
-          <a:bodyPr wrap="square" anchor="t" lIns="0" rIns="0" tIns="0" bIns="0">
+          <a:bodyPr wrap="square" lIns="0" tIns="0" rIns="0" bIns="0" anchor="t">
             <a:spAutoFit/>
           </a:bodyPr>
           <a:lstStyle/>
@@ -6319,9 +6417,9 @@
                 <a:solidFill>
                   <a:srgbClr val="222222"/>
                 </a:solidFill>
-                <a:latin typeface="微软雅黑"/>
-                <a:ea typeface="微软雅黑"/>
-                <a:cs typeface="微软雅黑"/>
+                <a:latin typeface="微软雅黑" panose="020B0503020204020204" charset="-122"/>
+                <a:ea typeface="微软雅黑" panose="020B0503020204020204" charset="-122"/>
+                <a:cs typeface="微软雅黑" panose="020B0503020204020204" charset="-122"/>
               </a:rPr>
               <a:t>• </a:t>
             </a:r>
@@ -6330,12 +6428,20 @@
                 <a:solidFill>
                   <a:srgbClr val="222222"/>
                 </a:solidFill>
-                <a:latin typeface="微软雅黑"/>
-                <a:ea typeface="微软雅黑"/>
-                <a:cs typeface="微软雅黑"/>
+                <a:latin typeface="微软雅黑" panose="020B0503020204020204" charset="-122"/>
+                <a:ea typeface="微软雅黑" panose="020B0503020204020204" charset="-122"/>
+                <a:cs typeface="微软雅黑" panose="020B0503020204020204" charset="-122"/>
               </a:rPr>
               <a:t>判为错误的题目自动写入错题本，记录用户答案、正确答案与解析</a:t>
             </a:r>
+            <a:endParaRPr sz="1400" b="0">
+              <a:solidFill>
+                <a:srgbClr val="222222"/>
+              </a:solidFill>
+              <a:latin typeface="微软雅黑" panose="020B0503020204020204" charset="-122"/>
+              <a:ea typeface="微软雅黑" panose="020B0503020204020204" charset="-122"/>
+              <a:cs typeface="微软雅黑" panose="020B0503020204020204" charset="-122"/>
+            </a:endParaRPr>
           </a:p>
           <a:p>
             <a:pPr algn="l">
@@ -6354,9 +6460,9 @@
                 <a:solidFill>
                   <a:srgbClr val="222222"/>
                 </a:solidFill>
-                <a:latin typeface="微软雅黑"/>
-                <a:ea typeface="微软雅黑"/>
-                <a:cs typeface="微软雅黑"/>
+                <a:latin typeface="微软雅黑" panose="020B0503020204020204" charset="-122"/>
+                <a:ea typeface="微软雅黑" panose="020B0503020204020204" charset="-122"/>
+                <a:cs typeface="微软雅黑" panose="020B0503020204020204" charset="-122"/>
               </a:rPr>
               <a:t>• </a:t>
             </a:r>
@@ -6365,12 +6471,20 @@
                 <a:solidFill>
                   <a:srgbClr val="222222"/>
                 </a:solidFill>
-                <a:latin typeface="微软雅黑"/>
-                <a:ea typeface="微软雅黑"/>
-                <a:cs typeface="微软雅黑"/>
+                <a:latin typeface="微软雅黑" panose="020B0503020204020204" charset="-122"/>
+                <a:ea typeface="微软雅黑" panose="020B0503020204020204" charset="-122"/>
+                <a:cs typeface="微软雅黑" panose="020B0503020204020204" charset="-122"/>
               </a:rPr>
               <a:t>同一题目若已存在未掌握记录则不重复插入，避免错题堆积</a:t>
             </a:r>
+            <a:endParaRPr sz="1400" b="0">
+              <a:solidFill>
+                <a:srgbClr val="222222"/>
+              </a:solidFill>
+              <a:latin typeface="微软雅黑" panose="020B0503020204020204" charset="-122"/>
+              <a:ea typeface="微软雅黑" panose="020B0503020204020204" charset="-122"/>
+              <a:cs typeface="微软雅黑" panose="020B0503020204020204" charset="-122"/>
+            </a:endParaRPr>
           </a:p>
           <a:p>
             <a:pPr algn="l">
@@ -6389,9 +6503,9 @@
                 <a:solidFill>
                   <a:srgbClr val="222222"/>
                 </a:solidFill>
-                <a:latin typeface="微软雅黑"/>
-                <a:ea typeface="微软雅黑"/>
-                <a:cs typeface="微软雅黑"/>
+                <a:latin typeface="微软雅黑" panose="020B0503020204020204" charset="-122"/>
+                <a:ea typeface="微软雅黑" panose="020B0503020204020204" charset="-122"/>
+                <a:cs typeface="微软雅黑" panose="020B0503020204020204" charset="-122"/>
               </a:rPr>
               <a:t>• </a:t>
             </a:r>
@@ -6400,12 +6514,20 @@
                 <a:solidFill>
                   <a:srgbClr val="222222"/>
                 </a:solidFill>
-                <a:latin typeface="微软雅黑"/>
-                <a:ea typeface="微软雅黑"/>
-                <a:cs typeface="微软雅黑"/>
+                <a:latin typeface="微软雅黑" panose="020B0503020204020204" charset="-122"/>
+                <a:ea typeface="微软雅黑" panose="020B0503020204020204" charset="-122"/>
+                <a:cs typeface="微软雅黑" panose="020B0503020204020204" charset="-122"/>
               </a:rPr>
               <a:t>支持按课程查看、按掌握状态筛选、标记掌握与移除</a:t>
             </a:r>
+            <a:endParaRPr sz="1400" b="0">
+              <a:solidFill>
+                <a:srgbClr val="222222"/>
+              </a:solidFill>
+              <a:latin typeface="微软雅黑" panose="020B0503020204020204" charset="-122"/>
+              <a:ea typeface="微软雅黑" panose="020B0503020204020204" charset="-122"/>
+              <a:cs typeface="微软雅黑" panose="020B0503020204020204" charset="-122"/>
+            </a:endParaRPr>
           </a:p>
         </p:txBody>
       </p:sp>
@@ -6426,7 +6548,7 @@
           <a:noFill/>
         </p:spPr>
         <p:txBody>
-          <a:bodyPr wrap="square" anchor="t" lIns="0" rIns="0" tIns="0" bIns="0">
+          <a:bodyPr wrap="square" lIns="0" tIns="0" rIns="0" bIns="0" anchor="t">
             <a:spAutoFit/>
           </a:bodyPr>
           <a:lstStyle/>
@@ -6447,12 +6569,20 @@
                 <a:solidFill>
                   <a:srgbClr val="2E75B6"/>
                 </a:solidFill>
-                <a:latin typeface="微软雅黑"/>
-                <a:ea typeface="微软雅黑"/>
-                <a:cs typeface="微软雅黑"/>
+                <a:latin typeface="微软雅黑" panose="020B0503020204020204" charset="-122"/>
+                <a:ea typeface="微软雅黑" panose="020B0503020204020204" charset="-122"/>
+                <a:cs typeface="微软雅黑" panose="020B0503020204020204" charset="-122"/>
               </a:rPr>
               <a:t>复习计划生成</a:t>
             </a:r>
+            <a:endParaRPr sz="1700" b="1">
+              <a:solidFill>
+                <a:srgbClr val="2E75B6"/>
+              </a:solidFill>
+              <a:latin typeface="微软雅黑" panose="020B0503020204020204" charset="-122"/>
+              <a:ea typeface="微软雅黑" panose="020B0503020204020204" charset="-122"/>
+              <a:cs typeface="微软雅黑" panose="020B0503020204020204" charset="-122"/>
+            </a:endParaRPr>
           </a:p>
         </p:txBody>
       </p:sp>
@@ -6490,12 +6620,20 @@
                           <a:solidFill>
                             <a:srgbClr val="FFFFFF"/>
                           </a:solidFill>
-                          <a:latin typeface="微软雅黑"/>
-                          <a:ea typeface="微软雅黑"/>
-                          <a:cs typeface="微软雅黑"/>
+                          <a:latin typeface="微软雅黑" panose="020B0503020204020204" charset="-122"/>
+                          <a:ea typeface="微软雅黑" panose="020B0503020204020204" charset="-122"/>
+                          <a:cs typeface="微软雅黑" panose="020B0503020204020204" charset="-122"/>
                         </a:rPr>
                         <a:t>步骤</a:t>
                       </a:r>
+                      <a:endParaRPr sz="1300" b="1">
+                        <a:solidFill>
+                          <a:srgbClr val="FFFFFF"/>
+                        </a:solidFill>
+                        <a:latin typeface="微软雅黑" panose="020B0503020204020204" charset="-122"/>
+                        <a:ea typeface="微软雅黑" panose="020B0503020204020204" charset="-122"/>
+                        <a:cs typeface="微软雅黑" panose="020B0503020204020204" charset="-122"/>
+                      </a:endParaRPr>
                     </a:p>
                   </a:txBody>
                   <a:tcPr anchor="ctr">
@@ -6515,12 +6653,20 @@
                           <a:solidFill>
                             <a:srgbClr val="FFFFFF"/>
                           </a:solidFill>
-                          <a:latin typeface="微软雅黑"/>
-                          <a:ea typeface="微软雅黑"/>
-                          <a:cs typeface="微软雅黑"/>
+                          <a:latin typeface="微软雅黑" panose="020B0503020204020204" charset="-122"/>
+                          <a:ea typeface="微软雅黑" panose="020B0503020204020204" charset="-122"/>
+                          <a:cs typeface="微软雅黑" panose="020B0503020204020204" charset="-122"/>
                         </a:rPr>
                         <a:t>处理内容</a:t>
                       </a:r>
+                      <a:endParaRPr sz="1300" b="1">
+                        <a:solidFill>
+                          <a:srgbClr val="FFFFFF"/>
+                        </a:solidFill>
+                        <a:latin typeface="微软雅黑" panose="020B0503020204020204" charset="-122"/>
+                        <a:ea typeface="微软雅黑" panose="020B0503020204020204" charset="-122"/>
+                        <a:cs typeface="微软雅黑" panose="020B0503020204020204" charset="-122"/>
+                      </a:endParaRPr>
                     </a:p>
                   </a:txBody>
                   <a:tcPr anchor="ctr">
@@ -6542,12 +6688,20 @@
                           <a:solidFill>
                             <a:srgbClr val="222222"/>
                           </a:solidFill>
-                          <a:latin typeface="微软雅黑"/>
-                          <a:ea typeface="微软雅黑"/>
-                          <a:cs typeface="微软雅黑"/>
+                          <a:latin typeface="微软雅黑" panose="020B0503020204020204" charset="-122"/>
+                          <a:ea typeface="微软雅黑" panose="020B0503020204020204" charset="-122"/>
+                          <a:cs typeface="微软雅黑" panose="020B0503020204020204" charset="-122"/>
                         </a:rPr>
                         <a:t>① 取错题</a:t>
                       </a:r>
+                      <a:endParaRPr sz="1200" b="0">
+                        <a:solidFill>
+                          <a:srgbClr val="222222"/>
+                        </a:solidFill>
+                        <a:latin typeface="微软雅黑" panose="020B0503020204020204" charset="-122"/>
+                        <a:ea typeface="微软雅黑" panose="020B0503020204020204" charset="-122"/>
+                        <a:cs typeface="微软雅黑" panose="020B0503020204020204" charset="-122"/>
+                      </a:endParaRPr>
                     </a:p>
                   </a:txBody>
                   <a:tcPr anchor="ctr">
@@ -6567,12 +6721,20 @@
                           <a:solidFill>
                             <a:srgbClr val="222222"/>
                           </a:solidFill>
-                          <a:latin typeface="微软雅黑"/>
-                          <a:ea typeface="微软雅黑"/>
-                          <a:cs typeface="微软雅黑"/>
+                          <a:latin typeface="微软雅黑" panose="020B0503020204020204" charset="-122"/>
+                          <a:ea typeface="微软雅黑" panose="020B0503020204020204" charset="-122"/>
+                          <a:cs typeface="微软雅黑" panose="020B0503020204020204" charset="-122"/>
                         </a:rPr>
                         <a:t>读取该课程所有未掌握的错题及其解析</a:t>
                       </a:r>
+                      <a:endParaRPr sz="1200" b="0">
+                        <a:solidFill>
+                          <a:srgbClr val="222222"/>
+                        </a:solidFill>
+                        <a:latin typeface="微软雅黑" panose="020B0503020204020204" charset="-122"/>
+                        <a:ea typeface="微软雅黑" panose="020B0503020204020204" charset="-122"/>
+                        <a:cs typeface="微软雅黑" panose="020B0503020204020204" charset="-122"/>
+                      </a:endParaRPr>
                     </a:p>
                   </a:txBody>
                   <a:tcPr anchor="ctr">
@@ -6594,12 +6756,20 @@
                           <a:solidFill>
                             <a:srgbClr val="222222"/>
                           </a:solidFill>
-                          <a:latin typeface="微软雅黑"/>
-                          <a:ea typeface="微软雅黑"/>
-                          <a:cs typeface="微软雅黑"/>
+                          <a:latin typeface="微软雅黑" panose="020B0503020204020204" charset="-122"/>
+                          <a:ea typeface="微软雅黑" panose="020B0503020204020204" charset="-122"/>
+                          <a:cs typeface="微软雅黑" panose="020B0503020204020204" charset="-122"/>
                         </a:rPr>
                         <a:t>② 分配</a:t>
                       </a:r>
+                      <a:endParaRPr sz="1200" b="0">
+                        <a:solidFill>
+                          <a:srgbClr val="222222"/>
+                        </a:solidFill>
+                        <a:latin typeface="微软雅黑" panose="020B0503020204020204" charset="-122"/>
+                        <a:ea typeface="微软雅黑" panose="020B0503020204020204" charset="-122"/>
+                        <a:cs typeface="微软雅黑" panose="020B0503020204020204" charset="-122"/>
+                      </a:endParaRPr>
                     </a:p>
                   </a:txBody>
                   <a:tcPr anchor="ctr">
@@ -6619,12 +6789,20 @@
                           <a:solidFill>
                             <a:srgbClr val="222222"/>
                           </a:solidFill>
-                          <a:latin typeface="微软雅黑"/>
-                          <a:ea typeface="微软雅黑"/>
-                          <a:cs typeface="微软雅黑"/>
+                          <a:latin typeface="微软雅黑" panose="020B0503020204020204" charset="-122"/>
+                          <a:ea typeface="微软雅黑" panose="020B0503020204020204" charset="-122"/>
+                          <a:cs typeface="微软雅黑" panose="020B0503020204020204" charset="-122"/>
                         </a:rPr>
                         <a:t>交由大模型将知识点分配到 7 天，输出“第几天 + 知识点”</a:t>
                       </a:r>
+                      <a:endParaRPr sz="1200" b="0">
+                        <a:solidFill>
+                          <a:srgbClr val="222222"/>
+                        </a:solidFill>
+                        <a:latin typeface="微软雅黑" panose="020B0503020204020204" charset="-122"/>
+                        <a:ea typeface="微软雅黑" panose="020B0503020204020204" charset="-122"/>
+                        <a:cs typeface="微软雅黑" panose="020B0503020204020204" charset="-122"/>
+                      </a:endParaRPr>
                     </a:p>
                   </a:txBody>
                   <a:tcPr anchor="ctr">
@@ -6646,12 +6824,20 @@
                           <a:solidFill>
                             <a:srgbClr val="222222"/>
                           </a:solidFill>
-                          <a:latin typeface="微软雅黑"/>
-                          <a:ea typeface="微软雅黑"/>
-                          <a:cs typeface="微软雅黑"/>
+                          <a:latin typeface="微软雅黑" panose="020B0503020204020204" charset="-122"/>
+                          <a:ea typeface="微软雅黑" panose="020B0503020204020204" charset="-122"/>
+                          <a:cs typeface="微软雅黑" panose="020B0503020204020204" charset="-122"/>
                         </a:rPr>
                         <a:t>③ 算日期</a:t>
                       </a:r>
+                      <a:endParaRPr sz="1200" b="0">
+                        <a:solidFill>
+                          <a:srgbClr val="222222"/>
+                        </a:solidFill>
+                        <a:latin typeface="微软雅黑" panose="020B0503020204020204" charset="-122"/>
+                        <a:ea typeface="微软雅黑" panose="020B0503020204020204" charset="-122"/>
+                        <a:cs typeface="微软雅黑" panose="020B0503020204020204" charset="-122"/>
+                      </a:endParaRPr>
                     </a:p>
                   </a:txBody>
                   <a:tcPr anchor="ctr">
@@ -6671,12 +6857,20 @@
                           <a:solidFill>
                             <a:srgbClr val="222222"/>
                           </a:solidFill>
-                          <a:latin typeface="微软雅黑"/>
-                          <a:ea typeface="微软雅黑"/>
-                          <a:cs typeface="微软雅黑"/>
+                          <a:latin typeface="微软雅黑" panose="020B0503020204020204" charset="-122"/>
+                          <a:ea typeface="微软雅黑" panose="020B0503020204020204" charset="-122"/>
+                          <a:cs typeface="微软雅黑" panose="020B0503020204020204" charset="-122"/>
                         </a:rPr>
                         <a:t>服务端以当天为基准计算具体日期后写入条目，避免模型不知当前日期</a:t>
                       </a:r>
+                      <a:endParaRPr sz="1200" b="0">
+                        <a:solidFill>
+                          <a:srgbClr val="222222"/>
+                        </a:solidFill>
+                        <a:latin typeface="微软雅黑" panose="020B0503020204020204" charset="-122"/>
+                        <a:ea typeface="微软雅黑" panose="020B0503020204020204" charset="-122"/>
+                        <a:cs typeface="微软雅黑" panose="020B0503020204020204" charset="-122"/>
+                      </a:endParaRPr>
                     </a:p>
                   </a:txBody>
                   <a:tcPr anchor="ctr">
@@ -6698,12 +6892,20 @@
                           <a:solidFill>
                             <a:srgbClr val="222222"/>
                           </a:solidFill>
-                          <a:latin typeface="微软雅黑"/>
-                          <a:ea typeface="微软雅黑"/>
-                          <a:cs typeface="微软雅黑"/>
+                          <a:latin typeface="微软雅黑" panose="020B0503020204020204" charset="-122"/>
+                          <a:ea typeface="微软雅黑" panose="020B0503020204020204" charset="-122"/>
+                          <a:cs typeface="微软雅黑" panose="020B0503020204020204" charset="-122"/>
                         </a:rPr>
                         <a:t>④ 跟踪</a:t>
                       </a:r>
+                      <a:endParaRPr sz="1200" b="0">
+                        <a:solidFill>
+                          <a:srgbClr val="222222"/>
+                        </a:solidFill>
+                        <a:latin typeface="微软雅黑" panose="020B0503020204020204" charset="-122"/>
+                        <a:ea typeface="微软雅黑" panose="020B0503020204020204" charset="-122"/>
+                        <a:cs typeface="微软雅黑" panose="020B0503020204020204" charset="-122"/>
+                      </a:endParaRPr>
                     </a:p>
                   </a:txBody>
                   <a:tcPr anchor="ctr">
@@ -6723,12 +6925,20 @@
                           <a:solidFill>
                             <a:srgbClr val="222222"/>
                           </a:solidFill>
-                          <a:latin typeface="微软雅黑"/>
-                          <a:ea typeface="微软雅黑"/>
-                          <a:cs typeface="微软雅黑"/>
+                          <a:latin typeface="微软雅黑" panose="020B0503020204020204" charset="-122"/>
+                          <a:ea typeface="微软雅黑" panose="020B0503020204020204" charset="-122"/>
+                          <a:cs typeface="微软雅黑" panose="020B0503020204020204" charset="-122"/>
                         </a:rPr>
                         <a:t>支持查看计划详情与标记完成；无错题时返回明确提示</a:t>
                       </a:r>
+                      <a:endParaRPr sz="1200" b="0">
+                        <a:solidFill>
+                          <a:srgbClr val="222222"/>
+                        </a:solidFill>
+                        <a:latin typeface="微软雅黑" panose="020B0503020204020204" charset="-122"/>
+                        <a:ea typeface="微软雅黑" panose="020B0503020204020204" charset="-122"/>
+                        <a:cs typeface="微软雅黑" panose="020B0503020204020204" charset="-122"/>
+                      </a:endParaRPr>
                     </a:p>
                   </a:txBody>
                   <a:tcPr anchor="ctr">
@@ -6751,7 +6961,7 @@
 </file>
 
 <file path=ppt/slides/slide12.xml><?xml version="1.0" encoding="utf-8"?>
-<p:sld xmlns:a="http://schemas.openxmlformats.org/drawingml/2006/main" xmlns:p="http://schemas.openxmlformats.org/presentationml/2006/main" xmlns:r="http://schemas.openxmlformats.org/officeDocument/2006/relationships">
+<p:sld xmlns:a="http://schemas.openxmlformats.org/drawingml/2006/main" xmlns:r="http://schemas.openxmlformats.org/officeDocument/2006/relationships" xmlns:p="http://schemas.openxmlformats.org/presentationml/2006/main">
   <p:cSld>
     <p:spTree>
       <p:nvGrpSpPr>
@@ -6821,7 +7031,7 @@
           <a:noFill/>
         </p:spPr>
         <p:txBody>
-          <a:bodyPr wrap="square" anchor="ctr" lIns="0" rIns="0" tIns="0" bIns="0">
+          <a:bodyPr wrap="square" lIns="0" tIns="0" rIns="0" bIns="0" anchor="ctr">
             <a:spAutoFit/>
           </a:bodyPr>
           <a:lstStyle/>
@@ -6842,12 +7052,20 @@
                 <a:solidFill>
                   <a:srgbClr val="FFFFFF"/>
                 </a:solidFill>
-                <a:latin typeface="微软雅黑"/>
-                <a:ea typeface="微软雅黑"/>
-                <a:cs typeface="微软雅黑"/>
+                <a:latin typeface="微软雅黑" panose="020B0503020204020204" charset="-122"/>
+                <a:ea typeface="微软雅黑" panose="020B0503020204020204" charset="-122"/>
+                <a:cs typeface="微软雅黑" panose="020B0503020204020204" charset="-122"/>
               </a:rPr>
               <a:t>5.3　前端界面与系统测试</a:t>
             </a:r>
+            <a:endParaRPr sz="2600" b="1">
+              <a:solidFill>
+                <a:srgbClr val="FFFFFF"/>
+              </a:solidFill>
+              <a:latin typeface="微软雅黑" panose="020B0503020204020204" charset="-122"/>
+              <a:ea typeface="微软雅黑" panose="020B0503020204020204" charset="-122"/>
+              <a:cs typeface="微软雅黑" panose="020B0503020204020204" charset="-122"/>
+            </a:endParaRPr>
           </a:p>
         </p:txBody>
       </p:sp>
@@ -6868,7 +7086,7 @@
           <a:noFill/>
         </p:spPr>
         <p:txBody>
-          <a:bodyPr wrap="square" anchor="ctr" lIns="0" rIns="0" tIns="0" bIns="0">
+          <a:bodyPr wrap="square" lIns="0" tIns="0" rIns="0" bIns="0" anchor="ctr">
             <a:spAutoFit/>
           </a:bodyPr>
           <a:lstStyle/>
@@ -6889,10 +7107,16 @@
                 <a:solidFill>
                   <a:srgbClr val="BDD7EE"/>
                 </a:solidFill>
-                <a:latin typeface="微软雅黑"/>
+                <a:latin typeface="微软雅黑" panose="020B0503020204020204" charset="-122"/>
               </a:rPr>
               <a:t>负责人：霍飞腾</a:t>
             </a:r>
+            <a:endParaRPr sz="1300">
+              <a:solidFill>
+                <a:srgbClr val="BDD7EE"/>
+              </a:solidFill>
+              <a:latin typeface="微软雅黑" panose="020B0503020204020204" charset="-122"/>
+            </a:endParaRPr>
           </a:p>
         </p:txBody>
       </p:sp>
@@ -6913,7 +7137,7 @@
           <a:noFill/>
         </p:spPr>
         <p:txBody>
-          <a:bodyPr wrap="square" anchor="t" lIns="0" rIns="0" tIns="0" bIns="0">
+          <a:bodyPr wrap="square" lIns="0" tIns="0" rIns="0" bIns="0" anchor="t">
             <a:spAutoFit/>
           </a:bodyPr>
           <a:lstStyle/>
@@ -6934,10 +7158,16 @@
                 <a:solidFill>
                   <a:srgbClr val="808080"/>
                 </a:solidFill>
-                <a:latin typeface="微软雅黑"/>
+                <a:latin typeface="微软雅黑" panose="020B0503020204020204" charset="-122"/>
               </a:rPr>
               <a:t>12</a:t>
             </a:r>
+            <a:endParaRPr sz="1000">
+              <a:solidFill>
+                <a:srgbClr val="808080"/>
+              </a:solidFill>
+              <a:latin typeface="微软雅黑" panose="020B0503020204020204" charset="-122"/>
+            </a:endParaRPr>
           </a:p>
         </p:txBody>
       </p:sp>
@@ -6958,7 +7188,7 @@
           <a:noFill/>
         </p:spPr>
         <p:txBody>
-          <a:bodyPr wrap="square" anchor="t" lIns="0" rIns="0" tIns="0" bIns="0">
+          <a:bodyPr wrap="square" lIns="0" tIns="0" rIns="0" bIns="0" anchor="t">
             <a:spAutoFit/>
           </a:bodyPr>
           <a:lstStyle/>
@@ -6979,12 +7209,20 @@
                 <a:solidFill>
                   <a:srgbClr val="2E75B6"/>
                 </a:solidFill>
-                <a:latin typeface="微软雅黑"/>
-                <a:ea typeface="微软雅黑"/>
-                <a:cs typeface="微软雅黑"/>
+                <a:latin typeface="微软雅黑" panose="020B0503020204020204" charset="-122"/>
+                <a:ea typeface="微软雅黑" panose="020B0503020204020204" charset="-122"/>
+                <a:cs typeface="微软雅黑" panose="020B0503020204020204" charset="-122"/>
               </a:rPr>
               <a:t>前端界面</a:t>
             </a:r>
+            <a:endParaRPr sz="1700" b="1">
+              <a:solidFill>
+                <a:srgbClr val="2E75B6"/>
+              </a:solidFill>
+              <a:latin typeface="微软雅黑" panose="020B0503020204020204" charset="-122"/>
+              <a:ea typeface="微软雅黑" panose="020B0503020204020204" charset="-122"/>
+              <a:cs typeface="微软雅黑" panose="020B0503020204020204" charset="-122"/>
+            </a:endParaRPr>
           </a:p>
         </p:txBody>
       </p:sp>
@@ -7005,7 +7243,7 @@
           <a:noFill/>
         </p:spPr>
         <p:txBody>
-          <a:bodyPr wrap="square" anchor="t" lIns="0" rIns="0" tIns="0" bIns="0">
+          <a:bodyPr wrap="square" lIns="0" tIns="0" rIns="0" bIns="0" anchor="t">
             <a:spAutoFit/>
           </a:bodyPr>
           <a:lstStyle/>
@@ -7026,12 +7264,20 @@
                 <a:solidFill>
                   <a:srgbClr val="222222"/>
                 </a:solidFill>
-                <a:latin typeface="微软雅黑"/>
-                <a:ea typeface="微软雅黑"/>
-                <a:cs typeface="微软雅黑"/>
+                <a:latin typeface="微软雅黑" panose="020B0503020204020204" charset="-122"/>
+                <a:ea typeface="微软雅黑" panose="020B0503020204020204" charset="-122"/>
+                <a:cs typeface="微软雅黑" panose="020B0503020204020204" charset="-122"/>
               </a:rPr>
               <a:t>左侧为课程列表，右侧顶部为五个功能标签页：文档管理、智能问答、自动出题、错题本、复习计划；采用原生 HTML / CSS / JavaScript 实现，无框架依赖，通过 fetch 调用后端 REST 接口。</a:t>
             </a:r>
+            <a:endParaRPr sz="1400" b="0">
+              <a:solidFill>
+                <a:srgbClr val="222222"/>
+              </a:solidFill>
+              <a:latin typeface="微软雅黑" panose="020B0503020204020204" charset="-122"/>
+              <a:ea typeface="微软雅黑" panose="020B0503020204020204" charset="-122"/>
+              <a:cs typeface="微软雅黑" panose="020B0503020204020204" charset="-122"/>
+            </a:endParaRPr>
           </a:p>
         </p:txBody>
       </p:sp>
@@ -7052,7 +7298,7 @@
           <a:noFill/>
         </p:spPr>
         <p:txBody>
-          <a:bodyPr wrap="square" anchor="t" lIns="0" rIns="0" tIns="0" bIns="0">
+          <a:bodyPr wrap="square" lIns="0" tIns="0" rIns="0" bIns="0" anchor="t">
             <a:spAutoFit/>
           </a:bodyPr>
           <a:lstStyle/>
@@ -7073,12 +7319,20 @@
                 <a:solidFill>
                   <a:srgbClr val="2E75B6"/>
                 </a:solidFill>
-                <a:latin typeface="微软雅黑"/>
-                <a:ea typeface="微软雅黑"/>
-                <a:cs typeface="微软雅黑"/>
+                <a:latin typeface="微软雅黑" panose="020B0503020204020204" charset="-122"/>
+                <a:ea typeface="微软雅黑" panose="020B0503020204020204" charset="-122"/>
+                <a:cs typeface="微软雅黑" panose="020B0503020204020204" charset="-122"/>
               </a:rPr>
               <a:t>系统测试（功能测试 + 结构测试）</a:t>
             </a:r>
+            <a:endParaRPr sz="1700" b="1">
+              <a:solidFill>
+                <a:srgbClr val="2E75B6"/>
+              </a:solidFill>
+              <a:latin typeface="微软雅黑" panose="020B0503020204020204" charset="-122"/>
+              <a:ea typeface="微软雅黑" panose="020B0503020204020204" charset="-122"/>
+              <a:cs typeface="微软雅黑" panose="020B0503020204020204" charset="-122"/>
+            </a:endParaRPr>
           </a:p>
         </p:txBody>
       </p:sp>
@@ -7117,12 +7371,20 @@
                           <a:solidFill>
                             <a:srgbClr val="FFFFFF"/>
                           </a:solidFill>
-                          <a:latin typeface="微软雅黑"/>
-                          <a:ea typeface="微软雅黑"/>
-                          <a:cs typeface="微软雅黑"/>
+                          <a:latin typeface="微软雅黑" panose="020B0503020204020204" charset="-122"/>
+                          <a:ea typeface="微软雅黑" panose="020B0503020204020204" charset="-122"/>
+                          <a:cs typeface="微软雅黑" panose="020B0503020204020204" charset="-122"/>
                         </a:rPr>
                         <a:t>类型</a:t>
                       </a:r>
+                      <a:endParaRPr sz="1300" b="1">
+                        <a:solidFill>
+                          <a:srgbClr val="FFFFFF"/>
+                        </a:solidFill>
+                        <a:latin typeface="微软雅黑" panose="020B0503020204020204" charset="-122"/>
+                        <a:ea typeface="微软雅黑" panose="020B0503020204020204" charset="-122"/>
+                        <a:cs typeface="微软雅黑" panose="020B0503020204020204" charset="-122"/>
+                      </a:endParaRPr>
                     </a:p>
                   </a:txBody>
                   <a:tcPr anchor="ctr">
@@ -7142,12 +7404,20 @@
                           <a:solidFill>
                             <a:srgbClr val="FFFFFF"/>
                           </a:solidFill>
-                          <a:latin typeface="微软雅黑"/>
-                          <a:ea typeface="微软雅黑"/>
-                          <a:cs typeface="微软雅黑"/>
+                          <a:latin typeface="微软雅黑" panose="020B0503020204020204" charset="-122"/>
+                          <a:ea typeface="微软雅黑" panose="020B0503020204020204" charset="-122"/>
+                          <a:cs typeface="微软雅黑" panose="020B0503020204020204" charset="-122"/>
                         </a:rPr>
                         <a:t>测试内容</a:t>
                       </a:r>
+                      <a:endParaRPr sz="1300" b="1">
+                        <a:solidFill>
+                          <a:srgbClr val="FFFFFF"/>
+                        </a:solidFill>
+                        <a:latin typeface="微软雅黑" panose="020B0503020204020204" charset="-122"/>
+                        <a:ea typeface="微软雅黑" panose="020B0503020204020204" charset="-122"/>
+                        <a:cs typeface="微软雅黑" panose="020B0503020204020204" charset="-122"/>
+                      </a:endParaRPr>
                     </a:p>
                   </a:txBody>
                   <a:tcPr anchor="ctr">
@@ -7167,12 +7437,20 @@
                           <a:solidFill>
                             <a:srgbClr val="FFFFFF"/>
                           </a:solidFill>
-                          <a:latin typeface="微软雅黑"/>
-                          <a:ea typeface="微软雅黑"/>
-                          <a:cs typeface="微软雅黑"/>
+                          <a:latin typeface="微软雅黑" panose="020B0503020204020204" charset="-122"/>
+                          <a:ea typeface="微软雅黑" panose="020B0503020204020204" charset="-122"/>
+                          <a:cs typeface="微软雅黑" panose="020B0503020204020204" charset="-122"/>
                         </a:rPr>
                         <a:t>预期结果</a:t>
                       </a:r>
+                      <a:endParaRPr sz="1300" b="1">
+                        <a:solidFill>
+                          <a:srgbClr val="FFFFFF"/>
+                        </a:solidFill>
+                        <a:latin typeface="微软雅黑" panose="020B0503020204020204" charset="-122"/>
+                        <a:ea typeface="微软雅黑" panose="020B0503020204020204" charset="-122"/>
+                        <a:cs typeface="微软雅黑" panose="020B0503020204020204" charset="-122"/>
+                      </a:endParaRPr>
                     </a:p>
                   </a:txBody>
                   <a:tcPr anchor="ctr">
@@ -7194,12 +7472,20 @@
                           <a:solidFill>
                             <a:srgbClr val="222222"/>
                           </a:solidFill>
-                          <a:latin typeface="微软雅黑"/>
-                          <a:ea typeface="微软雅黑"/>
-                          <a:cs typeface="微软雅黑"/>
+                          <a:latin typeface="微软雅黑" panose="020B0503020204020204" charset="-122"/>
+                          <a:ea typeface="微软雅黑" panose="020B0503020204020204" charset="-122"/>
+                          <a:cs typeface="微软雅黑" panose="020B0503020204020204" charset="-122"/>
                         </a:rPr>
                         <a:t>功能</a:t>
                       </a:r>
+                      <a:endParaRPr sz="1200" b="0">
+                        <a:solidFill>
+                          <a:srgbClr val="222222"/>
+                        </a:solidFill>
+                        <a:latin typeface="微软雅黑" panose="020B0503020204020204" charset="-122"/>
+                        <a:ea typeface="微软雅黑" panose="020B0503020204020204" charset="-122"/>
+                        <a:cs typeface="微软雅黑" panose="020B0503020204020204" charset="-122"/>
+                      </a:endParaRPr>
                     </a:p>
                   </a:txBody>
                   <a:tcPr anchor="ctr">
@@ -7219,12 +7505,20 @@
                           <a:solidFill>
                             <a:srgbClr val="222222"/>
                           </a:solidFill>
-                          <a:latin typeface="微软雅黑"/>
-                          <a:ea typeface="微软雅黑"/>
-                          <a:cs typeface="微软雅黑"/>
+                          <a:latin typeface="微软雅黑" panose="020B0503020204020204" charset="-122"/>
+                          <a:ea typeface="微软雅黑" panose="020B0503020204020204" charset="-122"/>
+                          <a:cs typeface="微软雅黑" panose="020B0503020204020204" charset="-122"/>
                         </a:rPr>
                         <a:t>文档上传与入库</a:t>
                       </a:r>
+                      <a:endParaRPr sz="1200" b="0">
+                        <a:solidFill>
+                          <a:srgbClr val="222222"/>
+                        </a:solidFill>
+                        <a:latin typeface="微软雅黑" panose="020B0503020204020204" charset="-122"/>
+                        <a:ea typeface="微软雅黑" panose="020B0503020204020204" charset="-122"/>
+                        <a:cs typeface="微软雅黑" panose="020B0503020204020204" charset="-122"/>
+                      </a:endParaRPr>
                     </a:p>
                   </a:txBody>
                   <a:tcPr anchor="ctr">
@@ -7244,12 +7538,20 @@
                           <a:solidFill>
                             <a:srgbClr val="222222"/>
                           </a:solidFill>
-                          <a:latin typeface="微软雅黑"/>
-                          <a:ea typeface="微软雅黑"/>
-                          <a:cs typeface="微软雅黑"/>
+                          <a:latin typeface="微软雅黑" panose="020B0503020204020204" charset="-122"/>
+                          <a:ea typeface="微软雅黑" panose="020B0503020204020204" charset="-122"/>
+                          <a:cs typeface="微软雅黑" panose="020B0503020204020204" charset="-122"/>
                         </a:rPr>
                         <a:t>返回切分块数，状态 completed</a:t>
                       </a:r>
+                      <a:endParaRPr sz="1200" b="0">
+                        <a:solidFill>
+                          <a:srgbClr val="222222"/>
+                        </a:solidFill>
+                        <a:latin typeface="微软雅黑" panose="020B0503020204020204" charset="-122"/>
+                        <a:ea typeface="微软雅黑" panose="020B0503020204020204" charset="-122"/>
+                        <a:cs typeface="微软雅黑" panose="020B0503020204020204" charset="-122"/>
+                      </a:endParaRPr>
                     </a:p>
                   </a:txBody>
                   <a:tcPr anchor="ctr">
@@ -7271,12 +7573,20 @@
                           <a:solidFill>
                             <a:srgbClr val="222222"/>
                           </a:solidFill>
-                          <a:latin typeface="微软雅黑"/>
-                          <a:ea typeface="微软雅黑"/>
-                          <a:cs typeface="微软雅黑"/>
+                          <a:latin typeface="微软雅黑" panose="020B0503020204020204" charset="-122"/>
+                          <a:ea typeface="微软雅黑" panose="020B0503020204020204" charset="-122"/>
+                          <a:cs typeface="微软雅黑" panose="020B0503020204020204" charset="-122"/>
                         </a:rPr>
                         <a:t>功能</a:t>
                       </a:r>
+                      <a:endParaRPr sz="1200" b="0">
+                        <a:solidFill>
+                          <a:srgbClr val="222222"/>
+                        </a:solidFill>
+                        <a:latin typeface="微软雅黑" panose="020B0503020204020204" charset="-122"/>
+                        <a:ea typeface="微软雅黑" panose="020B0503020204020204" charset="-122"/>
+                        <a:cs typeface="微软雅黑" panose="020B0503020204020204" charset="-122"/>
+                      </a:endParaRPr>
                     </a:p>
                   </a:txBody>
                   <a:tcPr anchor="ctr">
@@ -7296,12 +7606,20 @@
                           <a:solidFill>
                             <a:srgbClr val="222222"/>
                           </a:solidFill>
-                          <a:latin typeface="微软雅黑"/>
-                          <a:ea typeface="微软雅黑"/>
-                          <a:cs typeface="微软雅黑"/>
+                          <a:latin typeface="微软雅黑" panose="020B0503020204020204" charset="-122"/>
+                          <a:ea typeface="微软雅黑" panose="020B0503020204020204" charset="-122"/>
+                          <a:cs typeface="微软雅黑" panose="020B0503020204020204" charset="-122"/>
                         </a:rPr>
                         <a:t>文档类型校验</a:t>
                       </a:r>
+                      <a:endParaRPr sz="1200" b="0">
+                        <a:solidFill>
+                          <a:srgbClr val="222222"/>
+                        </a:solidFill>
+                        <a:latin typeface="微软雅黑" panose="020B0503020204020204" charset="-122"/>
+                        <a:ea typeface="微软雅黑" panose="020B0503020204020204" charset="-122"/>
+                        <a:cs typeface="微软雅黑" panose="020B0503020204020204" charset="-122"/>
+                      </a:endParaRPr>
                     </a:p>
                   </a:txBody>
                   <a:tcPr anchor="ctr">
@@ -7321,12 +7639,20 @@
                           <a:solidFill>
                             <a:srgbClr val="222222"/>
                           </a:solidFill>
-                          <a:latin typeface="微软雅黑"/>
-                          <a:ea typeface="微软雅黑"/>
-                          <a:cs typeface="微软雅黑"/>
+                          <a:latin typeface="微软雅黑" panose="020B0503020204020204" charset="-122"/>
+                          <a:ea typeface="微软雅黑" panose="020B0503020204020204" charset="-122"/>
+                          <a:cs typeface="微软雅黑" panose="020B0503020204020204" charset="-122"/>
                         </a:rPr>
                         <a:t>拒绝并提示支持的类型</a:t>
                       </a:r>
+                      <a:endParaRPr sz="1200" b="0">
+                        <a:solidFill>
+                          <a:srgbClr val="222222"/>
+                        </a:solidFill>
+                        <a:latin typeface="微软雅黑" panose="020B0503020204020204" charset="-122"/>
+                        <a:ea typeface="微软雅黑" panose="020B0503020204020204" charset="-122"/>
+                        <a:cs typeface="微软雅黑" panose="020B0503020204020204" charset="-122"/>
+                      </a:endParaRPr>
                     </a:p>
                   </a:txBody>
                   <a:tcPr anchor="ctr">
@@ -7348,12 +7674,20 @@
                           <a:solidFill>
                             <a:srgbClr val="222222"/>
                           </a:solidFill>
-                          <a:latin typeface="微软雅黑"/>
-                          <a:ea typeface="微软雅黑"/>
-                          <a:cs typeface="微软雅黑"/>
+                          <a:latin typeface="微软雅黑" panose="020B0503020204020204" charset="-122"/>
+                          <a:ea typeface="微软雅黑" panose="020B0503020204020204" charset="-122"/>
+                          <a:cs typeface="微软雅黑" panose="020B0503020204020204" charset="-122"/>
                         </a:rPr>
                         <a:t>功能</a:t>
                       </a:r>
+                      <a:endParaRPr sz="1200" b="0">
+                        <a:solidFill>
+                          <a:srgbClr val="222222"/>
+                        </a:solidFill>
+                        <a:latin typeface="微软雅黑" panose="020B0503020204020204" charset="-122"/>
+                        <a:ea typeface="微软雅黑" panose="020B0503020204020204" charset="-122"/>
+                        <a:cs typeface="微软雅黑" panose="020B0503020204020204" charset="-122"/>
+                      </a:endParaRPr>
                     </a:p>
                   </a:txBody>
                   <a:tcPr anchor="ctr">
@@ -7373,12 +7707,20 @@
                           <a:solidFill>
                             <a:srgbClr val="222222"/>
                           </a:solidFill>
-                          <a:latin typeface="微软雅黑"/>
-                          <a:ea typeface="微软雅黑"/>
-                          <a:cs typeface="微软雅黑"/>
+                          <a:latin typeface="微软雅黑" panose="020B0503020204020204" charset="-122"/>
+                          <a:ea typeface="微软雅黑" panose="020B0503020204020204" charset="-122"/>
+                          <a:cs typeface="微软雅黑" panose="020B0503020204020204" charset="-122"/>
                         </a:rPr>
                         <a:t>智能问答 / 空库提问</a:t>
                       </a:r>
+                      <a:endParaRPr sz="1200" b="0">
+                        <a:solidFill>
+                          <a:srgbClr val="222222"/>
+                        </a:solidFill>
+                        <a:latin typeface="微软雅黑" panose="020B0503020204020204" charset="-122"/>
+                        <a:ea typeface="微软雅黑" panose="020B0503020204020204" charset="-122"/>
+                        <a:cs typeface="微软雅黑" panose="020B0503020204020204" charset="-122"/>
+                      </a:endParaRPr>
                     </a:p>
                   </a:txBody>
                   <a:tcPr anchor="ctr">
@@ -7398,12 +7740,20 @@
                           <a:solidFill>
                             <a:srgbClr val="222222"/>
                           </a:solidFill>
-                          <a:latin typeface="微软雅黑"/>
-                          <a:ea typeface="微软雅黑"/>
-                          <a:cs typeface="微软雅黑"/>
+                          <a:latin typeface="微软雅黑" panose="020B0503020204020204" charset="-122"/>
+                          <a:ea typeface="微软雅黑" panose="020B0503020204020204" charset="-122"/>
+                          <a:cs typeface="微软雅黑" panose="020B0503020204020204" charset="-122"/>
                         </a:rPr>
                         <a:t>分别返回带来源的回答 / 上传引导</a:t>
                       </a:r>
+                      <a:endParaRPr sz="1200" b="0">
+                        <a:solidFill>
+                          <a:srgbClr val="222222"/>
+                        </a:solidFill>
+                        <a:latin typeface="微软雅黑" panose="020B0503020204020204" charset="-122"/>
+                        <a:ea typeface="微软雅黑" panose="020B0503020204020204" charset="-122"/>
+                        <a:cs typeface="微软雅黑" panose="020B0503020204020204" charset="-122"/>
+                      </a:endParaRPr>
                     </a:p>
                   </a:txBody>
                   <a:tcPr anchor="ctr">
@@ -7425,12 +7775,20 @@
                           <a:solidFill>
                             <a:srgbClr val="222222"/>
                           </a:solidFill>
-                          <a:latin typeface="微软雅黑"/>
-                          <a:ea typeface="微软雅黑"/>
-                          <a:cs typeface="微软雅黑"/>
+                          <a:latin typeface="微软雅黑" panose="020B0503020204020204" charset="-122"/>
+                          <a:ea typeface="微软雅黑" panose="020B0503020204020204" charset="-122"/>
+                          <a:cs typeface="微软雅黑" panose="020B0503020204020204" charset="-122"/>
                         </a:rPr>
                         <a:t>功能</a:t>
                       </a:r>
+                      <a:endParaRPr sz="1200" b="0">
+                        <a:solidFill>
+                          <a:srgbClr val="222222"/>
+                        </a:solidFill>
+                        <a:latin typeface="微软雅黑" panose="020B0503020204020204" charset="-122"/>
+                        <a:ea typeface="微软雅黑" panose="020B0503020204020204" charset="-122"/>
+                        <a:cs typeface="微软雅黑" panose="020B0503020204020204" charset="-122"/>
+                      </a:endParaRPr>
                     </a:p>
                   </a:txBody>
                   <a:tcPr anchor="ctr">
@@ -7450,12 +7808,20 @@
                           <a:solidFill>
                             <a:srgbClr val="222222"/>
                           </a:solidFill>
-                          <a:latin typeface="微软雅黑"/>
-                          <a:ea typeface="微软雅黑"/>
-                          <a:cs typeface="微软雅黑"/>
+                          <a:latin typeface="微软雅黑" panose="020B0503020204020204" charset="-122"/>
+                          <a:ea typeface="微软雅黑" panose="020B0503020204020204" charset="-122"/>
+                          <a:cs typeface="微软雅黑" panose="020B0503020204020204" charset="-122"/>
                         </a:rPr>
                         <a:t>自动出题</a:t>
                       </a:r>
+                      <a:endParaRPr sz="1200" b="0">
+                        <a:solidFill>
+                          <a:srgbClr val="222222"/>
+                        </a:solidFill>
+                        <a:latin typeface="微软雅黑" panose="020B0503020204020204" charset="-122"/>
+                        <a:ea typeface="微软雅黑" panose="020B0503020204020204" charset="-122"/>
+                        <a:cs typeface="微软雅黑" panose="020B0503020204020204" charset="-122"/>
+                      </a:endParaRPr>
                     </a:p>
                   </a:txBody>
                   <a:tcPr anchor="ctr">
@@ -7475,12 +7841,20 @@
                           <a:solidFill>
                             <a:srgbClr val="222222"/>
                           </a:solidFill>
-                          <a:latin typeface="微软雅黑"/>
-                          <a:ea typeface="微软雅黑"/>
-                          <a:cs typeface="微软雅黑"/>
+                          <a:latin typeface="微软雅黑" panose="020B0503020204020204" charset="-122"/>
+                          <a:ea typeface="微软雅黑" panose="020B0503020204020204" charset="-122"/>
+                          <a:cs typeface="微软雅黑" panose="020B0503020204020204" charset="-122"/>
                         </a:rPr>
                         <a:t>返回结构化题目，含选项、答案、解析</a:t>
                       </a:r>
+                      <a:endParaRPr sz="1200" b="0">
+                        <a:solidFill>
+                          <a:srgbClr val="222222"/>
+                        </a:solidFill>
+                        <a:latin typeface="微软雅黑" panose="020B0503020204020204" charset="-122"/>
+                        <a:ea typeface="微软雅黑" panose="020B0503020204020204" charset="-122"/>
+                        <a:cs typeface="微软雅黑" panose="020B0503020204020204" charset="-122"/>
+                      </a:endParaRPr>
                     </a:p>
                   </a:txBody>
                   <a:tcPr anchor="ctr">
@@ -7502,12 +7876,20 @@
                           <a:solidFill>
                             <a:srgbClr val="222222"/>
                           </a:solidFill>
-                          <a:latin typeface="微软雅黑"/>
-                          <a:ea typeface="微软雅黑"/>
-                          <a:cs typeface="微软雅黑"/>
+                          <a:latin typeface="微软雅黑" panose="020B0503020204020204" charset="-122"/>
+                          <a:ea typeface="微软雅黑" panose="020B0503020204020204" charset="-122"/>
+                          <a:cs typeface="微软雅黑" panose="020B0503020204020204" charset="-122"/>
                         </a:rPr>
                         <a:t>功能</a:t>
                       </a:r>
+                      <a:endParaRPr sz="1200" b="0">
+                        <a:solidFill>
+                          <a:srgbClr val="222222"/>
+                        </a:solidFill>
+                        <a:latin typeface="微软雅黑" panose="020B0503020204020204" charset="-122"/>
+                        <a:ea typeface="微软雅黑" panose="020B0503020204020204" charset="-122"/>
+                        <a:cs typeface="微软雅黑" panose="020B0503020204020204" charset="-122"/>
+                      </a:endParaRPr>
                     </a:p>
                   </a:txBody>
                   <a:tcPr anchor="ctr">
@@ -7527,12 +7909,20 @@
                           <a:solidFill>
                             <a:srgbClr val="222222"/>
                           </a:solidFill>
-                          <a:latin typeface="微软雅黑"/>
-                          <a:ea typeface="微软雅黑"/>
-                          <a:cs typeface="微软雅黑"/>
+                          <a:latin typeface="微软雅黑" panose="020B0503020204020204" charset="-122"/>
+                          <a:ea typeface="微软雅黑" panose="020B0503020204020204" charset="-122"/>
+                          <a:cs typeface="微软雅黑" panose="020B0503020204020204" charset="-122"/>
                         </a:rPr>
                         <a:t>判题与错题沉淀</a:t>
                       </a:r>
+                      <a:endParaRPr sz="1200" b="0">
+                        <a:solidFill>
+                          <a:srgbClr val="222222"/>
+                        </a:solidFill>
+                        <a:latin typeface="微软雅黑" panose="020B0503020204020204" charset="-122"/>
+                        <a:ea typeface="微软雅黑" panose="020B0503020204020204" charset="-122"/>
+                        <a:cs typeface="微软雅黑" panose="020B0503020204020204" charset="-122"/>
+                      </a:endParaRPr>
                     </a:p>
                   </a:txBody>
                   <a:tcPr anchor="ctr">
@@ -7552,12 +7942,20 @@
                           <a:solidFill>
                             <a:srgbClr val="222222"/>
                           </a:solidFill>
-                          <a:latin typeface="微软雅黑"/>
-                          <a:ea typeface="微软雅黑"/>
-                          <a:cs typeface="微软雅黑"/>
+                          <a:latin typeface="微软雅黑" panose="020B0503020204020204" charset="-122"/>
+                          <a:ea typeface="微软雅黑" panose="020B0503020204020204" charset="-122"/>
+                          <a:cs typeface="微软雅黑" panose="020B0503020204020204" charset="-122"/>
                         </a:rPr>
                         <a:t>答错自动写入错题本，不重复插入</a:t>
                       </a:r>
+                      <a:endParaRPr sz="1200" b="0">
+                        <a:solidFill>
+                          <a:srgbClr val="222222"/>
+                        </a:solidFill>
+                        <a:latin typeface="微软雅黑" panose="020B0503020204020204" charset="-122"/>
+                        <a:ea typeface="微软雅黑" panose="020B0503020204020204" charset="-122"/>
+                        <a:cs typeface="微软雅黑" panose="020B0503020204020204" charset="-122"/>
+                      </a:endParaRPr>
                     </a:p>
                   </a:txBody>
                   <a:tcPr anchor="ctr">
@@ -7579,12 +7977,20 @@
                           <a:solidFill>
                             <a:srgbClr val="222222"/>
                           </a:solidFill>
-                          <a:latin typeface="微软雅黑"/>
-                          <a:ea typeface="微软雅黑"/>
-                          <a:cs typeface="微软雅黑"/>
+                          <a:latin typeface="微软雅黑" panose="020B0503020204020204" charset="-122"/>
+                          <a:ea typeface="微软雅黑" panose="020B0503020204020204" charset="-122"/>
+                          <a:cs typeface="微软雅黑" panose="020B0503020204020204" charset="-122"/>
                         </a:rPr>
                         <a:t>功能</a:t>
                       </a:r>
+                      <a:endParaRPr sz="1200" b="0">
+                        <a:solidFill>
+                          <a:srgbClr val="222222"/>
+                        </a:solidFill>
+                        <a:latin typeface="微软雅黑" panose="020B0503020204020204" charset="-122"/>
+                        <a:ea typeface="微软雅黑" panose="020B0503020204020204" charset="-122"/>
+                        <a:cs typeface="微软雅黑" panose="020B0503020204020204" charset="-122"/>
+                      </a:endParaRPr>
                     </a:p>
                   </a:txBody>
                   <a:tcPr anchor="ctr">
@@ -7604,12 +8010,20 @@
                           <a:solidFill>
                             <a:srgbClr val="222222"/>
                           </a:solidFill>
-                          <a:latin typeface="微软雅黑"/>
-                          <a:ea typeface="微软雅黑"/>
-                          <a:cs typeface="微软雅黑"/>
+                          <a:latin typeface="微软雅黑" panose="020B0503020204020204" charset="-122"/>
+                          <a:ea typeface="微软雅黑" panose="020B0503020204020204" charset="-122"/>
+                          <a:cs typeface="微软雅黑" panose="020B0503020204020204" charset="-122"/>
                         </a:rPr>
                         <a:t>复习计划生成 / 无错题</a:t>
                       </a:r>
+                      <a:endParaRPr sz="1200" b="0">
+                        <a:solidFill>
+                          <a:srgbClr val="222222"/>
+                        </a:solidFill>
+                        <a:latin typeface="微软雅黑" panose="020B0503020204020204" charset="-122"/>
+                        <a:ea typeface="微软雅黑" panose="020B0503020204020204" charset="-122"/>
+                        <a:cs typeface="微软雅黑" panose="020B0503020204020204" charset="-122"/>
+                      </a:endParaRPr>
                     </a:p>
                   </a:txBody>
                   <a:tcPr anchor="ctr">
@@ -7629,12 +8043,20 @@
                           <a:solidFill>
                             <a:srgbClr val="222222"/>
                           </a:solidFill>
-                          <a:latin typeface="微软雅黑"/>
-                          <a:ea typeface="微软雅黑"/>
-                          <a:cs typeface="微软雅黑"/>
+                          <a:latin typeface="微软雅黑" panose="020B0503020204020204" charset="-122"/>
+                          <a:ea typeface="微软雅黑" panose="020B0503020204020204" charset="-122"/>
+                          <a:cs typeface="微软雅黑" panose="020B0503020204020204" charset="-122"/>
                         </a:rPr>
                         <a:t>分别返回 7 天条目 / 明确提示</a:t>
                       </a:r>
+                      <a:endParaRPr sz="1200" b="0">
+                        <a:solidFill>
+                          <a:srgbClr val="222222"/>
+                        </a:solidFill>
+                        <a:latin typeface="微软雅黑" panose="020B0503020204020204" charset="-122"/>
+                        <a:ea typeface="微软雅黑" panose="020B0503020204020204" charset="-122"/>
+                        <a:cs typeface="微软雅黑" panose="020B0503020204020204" charset="-122"/>
+                      </a:endParaRPr>
                     </a:p>
                   </a:txBody>
                   <a:tcPr anchor="ctr">
@@ -7656,12 +8078,20 @@
                           <a:solidFill>
                             <a:srgbClr val="222222"/>
                           </a:solidFill>
-                          <a:latin typeface="微软雅黑"/>
-                          <a:ea typeface="微软雅黑"/>
-                          <a:cs typeface="微软雅黑"/>
+                          <a:latin typeface="微软雅黑" panose="020B0503020204020204" charset="-122"/>
+                          <a:ea typeface="微软雅黑" panose="020B0503020204020204" charset="-122"/>
+                          <a:cs typeface="微软雅黑" panose="020B0503020204020204" charset="-122"/>
                         </a:rPr>
                         <a:t>结构</a:t>
                       </a:r>
+                      <a:endParaRPr sz="1200" b="0">
+                        <a:solidFill>
+                          <a:srgbClr val="222222"/>
+                        </a:solidFill>
+                        <a:latin typeface="微软雅黑" panose="020B0503020204020204" charset="-122"/>
+                        <a:ea typeface="微软雅黑" panose="020B0503020204020204" charset="-122"/>
+                        <a:cs typeface="微软雅黑" panose="020B0503020204020204" charset="-122"/>
+                      </a:endParaRPr>
                     </a:p>
                   </a:txBody>
                   <a:tcPr anchor="ctr">
@@ -7681,12 +8111,20 @@
                           <a:solidFill>
                             <a:srgbClr val="222222"/>
                           </a:solidFill>
-                          <a:latin typeface="微软雅黑"/>
-                          <a:ea typeface="微软雅黑"/>
-                          <a:cs typeface="微软雅黑"/>
+                          <a:latin typeface="微软雅黑" panose="020B0503020204020204" charset="-122"/>
+                          <a:ea typeface="微软雅黑" panose="020B0503020204020204" charset="-122"/>
+                          <a:cs typeface="微软雅黑" panose="020B0503020204020204" charset="-122"/>
                         </a:rPr>
                         <a:t>多选题答案比对</a:t>
                       </a:r>
+                      <a:endParaRPr sz="1200" b="0">
+                        <a:solidFill>
+                          <a:srgbClr val="222222"/>
+                        </a:solidFill>
+                        <a:latin typeface="微软雅黑" panose="020B0503020204020204" charset="-122"/>
+                        <a:ea typeface="微软雅黑" panose="020B0503020204020204" charset="-122"/>
+                        <a:cs typeface="微软雅黑" panose="020B0503020204020204" charset="-122"/>
+                      </a:endParaRPr>
                     </a:p>
                   </a:txBody>
                   <a:tcPr anchor="ctr">
@@ -7706,12 +8144,20 @@
                           <a:solidFill>
                             <a:srgbClr val="222222"/>
                           </a:solidFill>
-                          <a:latin typeface="微软雅黑"/>
-                          <a:ea typeface="微软雅黑"/>
-                          <a:cs typeface="微软雅黑"/>
+                          <a:latin typeface="微软雅黑" panose="020B0503020204020204" charset="-122"/>
+                          <a:ea typeface="微软雅黑" panose="020B0503020204020204" charset="-122"/>
+                          <a:cs typeface="微软雅黑" panose="020B0503020204020204" charset="-122"/>
                         </a:rPr>
                         <a:t>“BA”与“AB”判为正确</a:t>
                       </a:r>
+                      <a:endParaRPr sz="1200" b="0">
+                        <a:solidFill>
+                          <a:srgbClr val="222222"/>
+                        </a:solidFill>
+                        <a:latin typeface="微软雅黑" panose="020B0503020204020204" charset="-122"/>
+                        <a:ea typeface="微软雅黑" panose="020B0503020204020204" charset="-122"/>
+                        <a:cs typeface="微软雅黑" panose="020B0503020204020204" charset="-122"/>
+                      </a:endParaRPr>
                     </a:p>
                   </a:txBody>
                   <a:tcPr anchor="ctr">
@@ -7733,12 +8179,20 @@
                           <a:solidFill>
                             <a:srgbClr val="222222"/>
                           </a:solidFill>
-                          <a:latin typeface="微软雅黑"/>
-                          <a:ea typeface="微软雅黑"/>
-                          <a:cs typeface="微软雅黑"/>
+                          <a:latin typeface="微软雅黑" panose="020B0503020204020204" charset="-122"/>
+                          <a:ea typeface="微软雅黑" panose="020B0503020204020204" charset="-122"/>
+                          <a:cs typeface="微软雅黑" panose="020B0503020204020204" charset="-122"/>
                         </a:rPr>
                         <a:t>结构</a:t>
                       </a:r>
+                      <a:endParaRPr sz="1200" b="0">
+                        <a:solidFill>
+                          <a:srgbClr val="222222"/>
+                        </a:solidFill>
+                        <a:latin typeface="微软雅黑" panose="020B0503020204020204" charset="-122"/>
+                        <a:ea typeface="微软雅黑" panose="020B0503020204020204" charset="-122"/>
+                        <a:cs typeface="微软雅黑" panose="020B0503020204020204" charset="-122"/>
+                      </a:endParaRPr>
                     </a:p>
                   </a:txBody>
                   <a:tcPr anchor="ctr">
@@ -7758,12 +8212,20 @@
                           <a:solidFill>
                             <a:srgbClr val="222222"/>
                           </a:solidFill>
-                          <a:latin typeface="微软雅黑"/>
-                          <a:ea typeface="微软雅黑"/>
-                          <a:cs typeface="微软雅黑"/>
+                          <a:latin typeface="微软雅黑" panose="020B0503020204020204" charset="-122"/>
+                          <a:ea typeface="微软雅黑" panose="020B0503020204020204" charset="-122"/>
+                          <a:cs typeface="微软雅黑" panose="020B0503020204020204" charset="-122"/>
                         </a:rPr>
                         <a:t>JSON 解析降级</a:t>
                       </a:r>
+                      <a:endParaRPr sz="1200" b="0">
+                        <a:solidFill>
+                          <a:srgbClr val="222222"/>
+                        </a:solidFill>
+                        <a:latin typeface="微软雅黑" panose="020B0503020204020204" charset="-122"/>
+                        <a:ea typeface="微软雅黑" panose="020B0503020204020204" charset="-122"/>
+                        <a:cs typeface="微软雅黑" panose="020B0503020204020204" charset="-122"/>
+                      </a:endParaRPr>
                     </a:p>
                   </a:txBody>
                   <a:tcPr anchor="ctr">
@@ -7783,12 +8245,20 @@
                           <a:solidFill>
                             <a:srgbClr val="222222"/>
                           </a:solidFill>
-                          <a:latin typeface="微软雅黑"/>
-                          <a:ea typeface="微软雅黑"/>
-                          <a:cs typeface="微软雅黑"/>
+                          <a:latin typeface="微软雅黑" panose="020B0503020204020204" charset="-122"/>
+                          <a:ea typeface="微软雅黑" panose="020B0503020204020204" charset="-122"/>
+                          <a:cs typeface="微软雅黑" panose="020B0503020204020204" charset="-122"/>
                         </a:rPr>
                         <a:t>含代码块标记亦可解析成功</a:t>
                       </a:r>
+                      <a:endParaRPr sz="1200" b="0">
+                        <a:solidFill>
+                          <a:srgbClr val="222222"/>
+                        </a:solidFill>
+                        <a:latin typeface="微软雅黑" panose="020B0503020204020204" charset="-122"/>
+                        <a:ea typeface="微软雅黑" panose="020B0503020204020204" charset="-122"/>
+                        <a:cs typeface="微软雅黑" panose="020B0503020204020204" charset="-122"/>
+                      </a:endParaRPr>
                     </a:p>
                   </a:txBody>
                   <a:tcPr anchor="ctr">
@@ -7819,7 +8289,7 @@
           <a:noFill/>
         </p:spPr>
         <p:txBody>
-          <a:bodyPr wrap="square" anchor="t" lIns="0" rIns="0" tIns="0" bIns="0">
+          <a:bodyPr wrap="square" lIns="0" tIns="0" rIns="0" bIns="0" anchor="t">
             <a:spAutoFit/>
           </a:bodyPr>
           <a:lstStyle/>
@@ -7840,12 +8310,20 @@
                 <a:solidFill>
                   <a:srgbClr val="1E8449"/>
                 </a:solidFill>
-                <a:latin typeface="微软雅黑"/>
-                <a:ea typeface="微软雅黑"/>
-                <a:cs typeface="微软雅黑"/>
+                <a:latin typeface="微软雅黑" panose="020B0503020204020204" charset="-122"/>
+                <a:ea typeface="微软雅黑" panose="020B0503020204020204" charset="-122"/>
+                <a:cs typeface="微软雅黑" panose="020B0503020204020204" charset="-122"/>
               </a:rPr>
               <a:t>测试结果：六项核心功能均按预期工作；边界场景均能返回明确提示而不产生异常。</a:t>
             </a:r>
+            <a:endParaRPr sz="1400" b="1">
+              <a:solidFill>
+                <a:srgbClr val="1E8449"/>
+              </a:solidFill>
+              <a:latin typeface="微软雅黑" panose="020B0503020204020204" charset="-122"/>
+              <a:ea typeface="微软雅黑" panose="020B0503020204020204" charset="-122"/>
+              <a:cs typeface="微软雅黑" panose="020B0503020204020204" charset="-122"/>
+            </a:endParaRPr>
           </a:p>
         </p:txBody>
       </p:sp>
@@ -7858,7 +8336,7 @@
 </file>
 
 <file path=ppt/slides/slide13.xml><?xml version="1.0" encoding="utf-8"?>
-<p:sld xmlns:a="http://schemas.openxmlformats.org/drawingml/2006/main" xmlns:p="http://schemas.openxmlformats.org/presentationml/2006/main" xmlns:r="http://schemas.openxmlformats.org/officeDocument/2006/relationships">
+<p:sld xmlns:a="http://schemas.openxmlformats.org/drawingml/2006/main" xmlns:r="http://schemas.openxmlformats.org/officeDocument/2006/relationships" xmlns:p="http://schemas.openxmlformats.org/presentationml/2006/main">
   <p:cSld>
     <p:spTree>
       <p:nvGrpSpPr>
@@ -7928,7 +8406,7 @@
           <a:noFill/>
         </p:spPr>
         <p:txBody>
-          <a:bodyPr wrap="square" anchor="ctr" lIns="0" rIns="0" tIns="0" bIns="0">
+          <a:bodyPr wrap="square" lIns="0" tIns="0" rIns="0" bIns="0" anchor="ctr">
             <a:spAutoFit/>
           </a:bodyPr>
           <a:lstStyle/>
@@ -7943,12 +8421,20 @@
                 <a:solidFill>
                   <a:srgbClr val="FFFFFF"/>
                 </a:solidFill>
-                <a:latin typeface="微软雅黑"/>
-                <a:ea typeface="微软雅黑"/>
-                <a:cs typeface="微软雅黑"/>
+                <a:latin typeface="微软雅黑" panose="020B0503020204020204" charset="-122"/>
+                <a:ea typeface="微软雅黑" panose="020B0503020204020204" charset="-122"/>
+                <a:cs typeface="微软雅黑" panose="020B0503020204020204" charset="-122"/>
               </a:rPr>
               <a:t>5.4　系统界面展示（需补充截图）</a:t>
             </a:r>
+            <a:endParaRPr sz="2600">
+              <a:solidFill>
+                <a:srgbClr val="FFFFFF"/>
+              </a:solidFill>
+              <a:latin typeface="微软雅黑" panose="020B0503020204020204" charset="-122"/>
+              <a:ea typeface="微软雅黑" panose="020B0503020204020204" charset="-122"/>
+              <a:cs typeface="微软雅黑" panose="020B0503020204020204" charset="-122"/>
+            </a:endParaRPr>
           </a:p>
         </p:txBody>
       </p:sp>
@@ -7969,7 +8455,7 @@
           <a:noFill/>
         </p:spPr>
         <p:txBody>
-          <a:bodyPr wrap="square" anchor="ctr" lIns="0" rIns="0" tIns="0" bIns="0">
+          <a:bodyPr wrap="square" lIns="0" tIns="0" rIns="0" bIns="0" anchor="ctr">
             <a:spAutoFit/>
           </a:bodyPr>
           <a:lstStyle/>
@@ -7984,10 +8470,16 @@
                 <a:solidFill>
                   <a:srgbClr val="BDD7EE"/>
                 </a:solidFill>
-                <a:latin typeface="微软雅黑"/>
+                <a:latin typeface="微软雅黑" panose="020B0503020204020204" charset="-122"/>
               </a:rPr>
               <a:t>负责人：陈果</a:t>
             </a:r>
+            <a:endParaRPr sz="1300">
+              <a:solidFill>
+                <a:srgbClr val="BDD7EE"/>
+              </a:solidFill>
+              <a:latin typeface="微软雅黑" panose="020B0503020204020204" charset="-122"/>
+            </a:endParaRPr>
           </a:p>
         </p:txBody>
       </p:sp>
@@ -8031,7 +8523,7 @@
           </a:fontRef>
         </p:style>
         <p:txBody>
-          <a:bodyPr rtlCol="0" anchor="ctr" wrap="square"/>
+          <a:bodyPr wrap="square" rtlCol="0" anchor="ctr"/>
           <a:lstStyle/>
           <a:p>
             <a:pPr algn="ctr"/>
@@ -8040,13 +8532,21 @@
                 <a:solidFill>
                   <a:srgbClr val="C00000"/>
                 </a:solidFill>
-                <a:latin typeface="微软雅黑"/>
-                <a:ea typeface="微软雅黑"/>
-                <a:cs typeface="微软雅黑"/>
+                <a:latin typeface="微软雅黑" panose="020B0503020204020204" charset="-122"/>
+                <a:ea typeface="微软雅黑" panose="020B0503020204020204" charset="-122"/>
+                <a:cs typeface="微软雅黑" panose="020B0503020204020204" charset="-122"/>
               </a:rPr>
               <a:t>【截图 1】
 文档管理页</a:t>
             </a:r>
+            <a:endParaRPr sz="1300">
+              <a:solidFill>
+                <a:srgbClr val="C00000"/>
+              </a:solidFill>
+              <a:latin typeface="微软雅黑" panose="020B0503020204020204" charset="-122"/>
+              <a:ea typeface="微软雅黑" panose="020B0503020204020204" charset="-122"/>
+              <a:cs typeface="微软雅黑" panose="020B0503020204020204" charset="-122"/>
+            </a:endParaRPr>
           </a:p>
           <a:p>
             <a:pPr algn="ctr"/>
@@ -8055,13 +8555,21 @@
                 <a:solidFill>
                   <a:srgbClr val="808080"/>
                 </a:solidFill>
-                <a:latin typeface="微软雅黑"/>
-                <a:ea typeface="微软雅黑"/>
-                <a:cs typeface="微软雅黑"/>
+                <a:latin typeface="微软雅黑" panose="020B0503020204020204" charset="-122"/>
+                <a:ea typeface="微软雅黑" panose="020B0503020204020204" charset="-122"/>
+                <a:cs typeface="微软雅黑" panose="020B0503020204020204" charset="-122"/>
               </a:rPr>
               <a:t>已选课程 + 文档列表
 含文件名与切分块数</a:t>
             </a:r>
+            <a:endParaRPr sz="1000">
+              <a:solidFill>
+                <a:srgbClr val="808080"/>
+              </a:solidFill>
+              <a:latin typeface="微软雅黑" panose="020B0503020204020204" charset="-122"/>
+              <a:ea typeface="微软雅黑" panose="020B0503020204020204" charset="-122"/>
+              <a:cs typeface="微软雅黑" panose="020B0503020204020204" charset="-122"/>
+            </a:endParaRPr>
           </a:p>
         </p:txBody>
       </p:sp>
@@ -8082,7 +8590,7 @@
           <a:noFill/>
         </p:spPr>
         <p:txBody>
-          <a:bodyPr wrap="square" anchor="t" lIns="0" rIns="0" tIns="0" bIns="0">
+          <a:bodyPr wrap="square" lIns="0" tIns="0" rIns="0" bIns="0" anchor="t">
             <a:spAutoFit/>
           </a:bodyPr>
           <a:lstStyle/>
@@ -8097,12 +8605,20 @@
                 <a:solidFill>
                   <a:srgbClr val="808080"/>
                 </a:solidFill>
-                <a:latin typeface="微软雅黑"/>
-                <a:ea typeface="微软雅黑"/>
-                <a:cs typeface="微软雅黑"/>
+                <a:latin typeface="微软雅黑" panose="020B0503020204020204" charset="-122"/>
+                <a:ea typeface="微软雅黑" panose="020B0503020204020204" charset="-122"/>
+                <a:cs typeface="微软雅黑" panose="020B0503020204020204" charset="-122"/>
               </a:rPr>
               <a:t>图 1  文档管理页</a:t>
             </a:r>
+            <a:endParaRPr sz="1050">
+              <a:solidFill>
+                <a:srgbClr val="808080"/>
+              </a:solidFill>
+              <a:latin typeface="微软雅黑" panose="020B0503020204020204" charset="-122"/>
+              <a:ea typeface="微软雅黑" panose="020B0503020204020204" charset="-122"/>
+              <a:cs typeface="微软雅黑" panose="020B0503020204020204" charset="-122"/>
+            </a:endParaRPr>
           </a:p>
         </p:txBody>
       </p:sp>
@@ -8146,7 +8662,7 @@
           </a:fontRef>
         </p:style>
         <p:txBody>
-          <a:bodyPr rtlCol="0" anchor="ctr" wrap="square"/>
+          <a:bodyPr wrap="square" rtlCol="0" anchor="ctr"/>
           <a:lstStyle/>
           <a:p>
             <a:pPr algn="ctr"/>
@@ -8155,13 +8671,21 @@
                 <a:solidFill>
                   <a:srgbClr val="C00000"/>
                 </a:solidFill>
-                <a:latin typeface="微软雅黑"/>
-                <a:ea typeface="微软雅黑"/>
-                <a:cs typeface="微软雅黑"/>
+                <a:latin typeface="微软雅黑" panose="020B0503020204020204" charset="-122"/>
+                <a:ea typeface="微软雅黑" panose="020B0503020204020204" charset="-122"/>
+                <a:cs typeface="微软雅黑" panose="020B0503020204020204" charset="-122"/>
               </a:rPr>
               <a:t>【截图 2】
 智能问答页</a:t>
             </a:r>
+            <a:endParaRPr sz="1300">
+              <a:solidFill>
+                <a:srgbClr val="C00000"/>
+              </a:solidFill>
+              <a:latin typeface="微软雅黑" panose="020B0503020204020204" charset="-122"/>
+              <a:ea typeface="微软雅黑" panose="020B0503020204020204" charset="-122"/>
+              <a:cs typeface="微软雅黑" panose="020B0503020204020204" charset="-122"/>
+            </a:endParaRPr>
           </a:p>
           <a:p>
             <a:pPr algn="ctr"/>
@@ -8170,13 +8694,21 @@
                 <a:solidFill>
                   <a:srgbClr val="808080"/>
                 </a:solidFill>
-                <a:latin typeface="微软雅黑"/>
-                <a:ea typeface="微软雅黑"/>
-                <a:cs typeface="微软雅黑"/>
+                <a:latin typeface="微软雅黑" panose="020B0503020204020204" charset="-122"/>
+                <a:ea typeface="微软雅黑" panose="020B0503020204020204" charset="-122"/>
+                <a:cs typeface="微软雅黑" panose="020B0503020204020204" charset="-122"/>
               </a:rPr>
               <a:t>提问与 AI 回答
 下方显示引用来源卡片</a:t>
             </a:r>
+            <a:endParaRPr sz="1000">
+              <a:solidFill>
+                <a:srgbClr val="808080"/>
+              </a:solidFill>
+              <a:latin typeface="微软雅黑" panose="020B0503020204020204" charset="-122"/>
+              <a:ea typeface="微软雅黑" panose="020B0503020204020204" charset="-122"/>
+              <a:cs typeface="微软雅黑" panose="020B0503020204020204" charset="-122"/>
+            </a:endParaRPr>
           </a:p>
         </p:txBody>
       </p:sp>
@@ -8197,7 +8729,7 @@
           <a:noFill/>
         </p:spPr>
         <p:txBody>
-          <a:bodyPr wrap="square" anchor="t" lIns="0" rIns="0" tIns="0" bIns="0">
+          <a:bodyPr wrap="square" lIns="0" tIns="0" rIns="0" bIns="0" anchor="t">
             <a:spAutoFit/>
           </a:bodyPr>
           <a:lstStyle/>
@@ -8212,12 +8744,20 @@
                 <a:solidFill>
                   <a:srgbClr val="808080"/>
                 </a:solidFill>
-                <a:latin typeface="微软雅黑"/>
-                <a:ea typeface="微软雅黑"/>
-                <a:cs typeface="微软雅黑"/>
+                <a:latin typeface="微软雅黑" panose="020B0503020204020204" charset="-122"/>
+                <a:ea typeface="微软雅黑" panose="020B0503020204020204" charset="-122"/>
+                <a:cs typeface="微软雅黑" panose="020B0503020204020204" charset="-122"/>
               </a:rPr>
               <a:t>图 2  智能问答页</a:t>
             </a:r>
+            <a:endParaRPr sz="1050">
+              <a:solidFill>
+                <a:srgbClr val="808080"/>
+              </a:solidFill>
+              <a:latin typeface="微软雅黑" panose="020B0503020204020204" charset="-122"/>
+              <a:ea typeface="微软雅黑" panose="020B0503020204020204" charset="-122"/>
+              <a:cs typeface="微软雅黑" panose="020B0503020204020204" charset="-122"/>
+            </a:endParaRPr>
           </a:p>
         </p:txBody>
       </p:sp>
@@ -8261,7 +8801,7 @@
           </a:fontRef>
         </p:style>
         <p:txBody>
-          <a:bodyPr rtlCol="0" anchor="ctr" wrap="square"/>
+          <a:bodyPr wrap="square" rtlCol="0" anchor="ctr"/>
           <a:lstStyle/>
           <a:p>
             <a:pPr algn="ctr"/>
@@ -8270,13 +8810,21 @@
                 <a:solidFill>
                   <a:srgbClr val="C00000"/>
                 </a:solidFill>
-                <a:latin typeface="微软雅黑"/>
-                <a:ea typeface="微软雅黑"/>
-                <a:cs typeface="微软雅黑"/>
+                <a:latin typeface="微软雅黑" panose="020B0503020204020204" charset="-122"/>
+                <a:ea typeface="微软雅黑" panose="020B0503020204020204" charset="-122"/>
+                <a:cs typeface="微软雅黑" panose="020B0503020204020204" charset="-122"/>
               </a:rPr>
               <a:t>【截图 3】
 自动出题页</a:t>
             </a:r>
+            <a:endParaRPr sz="1300">
+              <a:solidFill>
+                <a:srgbClr val="C00000"/>
+              </a:solidFill>
+              <a:latin typeface="微软雅黑" panose="020B0503020204020204" charset="-122"/>
+              <a:ea typeface="微软雅黑" panose="020B0503020204020204" charset="-122"/>
+              <a:cs typeface="微软雅黑" panose="020B0503020204020204" charset="-122"/>
+            </a:endParaRPr>
           </a:p>
           <a:p>
             <a:pPr algn="ctr"/>
@@ -8285,13 +8833,21 @@
                 <a:solidFill>
                   <a:srgbClr val="808080"/>
                 </a:solidFill>
-                <a:latin typeface="微软雅黑"/>
-                <a:ea typeface="微软雅黑"/>
-                <a:cs typeface="微软雅黑"/>
+                <a:latin typeface="微软雅黑" panose="020B0503020204020204" charset="-122"/>
+                <a:ea typeface="微软雅黑" panose="020B0503020204020204" charset="-122"/>
+                <a:cs typeface="微软雅黑" panose="020B0503020204020204" charset="-122"/>
               </a:rPr>
               <a:t>参数表单 + 题目卡片
 含判分结果</a:t>
             </a:r>
+            <a:endParaRPr sz="1000">
+              <a:solidFill>
+                <a:srgbClr val="808080"/>
+              </a:solidFill>
+              <a:latin typeface="微软雅黑" panose="020B0503020204020204" charset="-122"/>
+              <a:ea typeface="微软雅黑" panose="020B0503020204020204" charset="-122"/>
+              <a:cs typeface="微软雅黑" panose="020B0503020204020204" charset="-122"/>
+            </a:endParaRPr>
           </a:p>
         </p:txBody>
       </p:sp>
@@ -8312,7 +8868,7 @@
           <a:noFill/>
         </p:spPr>
         <p:txBody>
-          <a:bodyPr wrap="square" anchor="t" lIns="0" rIns="0" tIns="0" bIns="0">
+          <a:bodyPr wrap="square" lIns="0" tIns="0" rIns="0" bIns="0" anchor="t">
             <a:spAutoFit/>
           </a:bodyPr>
           <a:lstStyle/>
@@ -8327,12 +8883,20 @@
                 <a:solidFill>
                   <a:srgbClr val="808080"/>
                 </a:solidFill>
-                <a:latin typeface="微软雅黑"/>
-                <a:ea typeface="微软雅黑"/>
-                <a:cs typeface="微软雅黑"/>
+                <a:latin typeface="微软雅黑" panose="020B0503020204020204" charset="-122"/>
+                <a:ea typeface="微软雅黑" panose="020B0503020204020204" charset="-122"/>
+                <a:cs typeface="微软雅黑" panose="020B0503020204020204" charset="-122"/>
               </a:rPr>
               <a:t>图 3  自动出题页</a:t>
             </a:r>
+            <a:endParaRPr sz="1050">
+              <a:solidFill>
+                <a:srgbClr val="808080"/>
+              </a:solidFill>
+              <a:latin typeface="微软雅黑" panose="020B0503020204020204" charset="-122"/>
+              <a:ea typeface="微软雅黑" panose="020B0503020204020204" charset="-122"/>
+              <a:cs typeface="微软雅黑" panose="020B0503020204020204" charset="-122"/>
+            </a:endParaRPr>
           </a:p>
         </p:txBody>
       </p:sp>
@@ -8376,7 +8940,7 @@
           </a:fontRef>
         </p:style>
         <p:txBody>
-          <a:bodyPr rtlCol="0" anchor="ctr" wrap="square"/>
+          <a:bodyPr wrap="square" rtlCol="0" anchor="ctr"/>
           <a:lstStyle/>
           <a:p>
             <a:pPr algn="ctr"/>
@@ -8385,13 +8949,21 @@
                 <a:solidFill>
                   <a:srgbClr val="C00000"/>
                 </a:solidFill>
-                <a:latin typeface="微软雅黑"/>
-                <a:ea typeface="微软雅黑"/>
-                <a:cs typeface="微软雅黑"/>
+                <a:latin typeface="微软雅黑" panose="020B0503020204020204" charset="-122"/>
+                <a:ea typeface="微软雅黑" panose="020B0503020204020204" charset="-122"/>
+                <a:cs typeface="微软雅黑" panose="020B0503020204020204" charset="-122"/>
               </a:rPr>
               <a:t>【截图 4】
 错题本页</a:t>
             </a:r>
+            <a:endParaRPr sz="1300">
+              <a:solidFill>
+                <a:srgbClr val="C00000"/>
+              </a:solidFill>
+              <a:latin typeface="微软雅黑" panose="020B0503020204020204" charset="-122"/>
+              <a:ea typeface="微软雅黑" panose="020B0503020204020204" charset="-122"/>
+              <a:cs typeface="微软雅黑" panose="020B0503020204020204" charset="-122"/>
+            </a:endParaRPr>
           </a:p>
           <a:p>
             <a:pPr algn="ctr"/>
@@ -8400,13 +8972,21 @@
                 <a:solidFill>
                   <a:srgbClr val="808080"/>
                 </a:solidFill>
-                <a:latin typeface="微软雅黑"/>
-                <a:ea typeface="微软雅黑"/>
-                <a:cs typeface="微软雅黑"/>
+                <a:latin typeface="微软雅黑" panose="020B0503020204020204" charset="-122"/>
+                <a:ea typeface="微软雅黑" panose="020B0503020204020204" charset="-122"/>
+                <a:cs typeface="微软雅黑" panose="020B0503020204020204" charset="-122"/>
               </a:rPr>
               <a:t>错题卡片
 用户答案与正确答案对比</a:t>
             </a:r>
+            <a:endParaRPr sz="1000">
+              <a:solidFill>
+                <a:srgbClr val="808080"/>
+              </a:solidFill>
+              <a:latin typeface="微软雅黑" panose="020B0503020204020204" charset="-122"/>
+              <a:ea typeface="微软雅黑" panose="020B0503020204020204" charset="-122"/>
+              <a:cs typeface="微软雅黑" panose="020B0503020204020204" charset="-122"/>
+            </a:endParaRPr>
           </a:p>
         </p:txBody>
       </p:sp>
@@ -8427,7 +9007,7 @@
           <a:noFill/>
         </p:spPr>
         <p:txBody>
-          <a:bodyPr wrap="square" anchor="t" lIns="0" rIns="0" tIns="0" bIns="0">
+          <a:bodyPr wrap="square" lIns="0" tIns="0" rIns="0" bIns="0" anchor="t">
             <a:spAutoFit/>
           </a:bodyPr>
           <a:lstStyle/>
@@ -8442,12 +9022,20 @@
                 <a:solidFill>
                   <a:srgbClr val="808080"/>
                 </a:solidFill>
-                <a:latin typeface="微软雅黑"/>
-                <a:ea typeface="微软雅黑"/>
-                <a:cs typeface="微软雅黑"/>
+                <a:latin typeface="微软雅黑" panose="020B0503020204020204" charset="-122"/>
+                <a:ea typeface="微软雅黑" panose="020B0503020204020204" charset="-122"/>
+                <a:cs typeface="微软雅黑" panose="020B0503020204020204" charset="-122"/>
               </a:rPr>
               <a:t>图 4  错题本页</a:t>
             </a:r>
+            <a:endParaRPr sz="1050">
+              <a:solidFill>
+                <a:srgbClr val="808080"/>
+              </a:solidFill>
+              <a:latin typeface="微软雅黑" panose="020B0503020204020204" charset="-122"/>
+              <a:ea typeface="微软雅黑" panose="020B0503020204020204" charset="-122"/>
+              <a:cs typeface="微软雅黑" panose="020B0503020204020204" charset="-122"/>
+            </a:endParaRPr>
           </a:p>
         </p:txBody>
       </p:sp>
@@ -8491,7 +9079,7 @@
           </a:fontRef>
         </p:style>
         <p:txBody>
-          <a:bodyPr rtlCol="0" anchor="ctr" wrap="square"/>
+          <a:bodyPr wrap="square" rtlCol="0" anchor="ctr"/>
           <a:lstStyle/>
           <a:p>
             <a:pPr algn="ctr"/>
@@ -8500,13 +9088,21 @@
                 <a:solidFill>
                   <a:srgbClr val="C00000"/>
                 </a:solidFill>
-                <a:latin typeface="微软雅黑"/>
-                <a:ea typeface="微软雅黑"/>
-                <a:cs typeface="微软雅黑"/>
+                <a:latin typeface="微软雅黑" panose="020B0503020204020204" charset="-122"/>
+                <a:ea typeface="微软雅黑" panose="020B0503020204020204" charset="-122"/>
+                <a:cs typeface="微软雅黑" panose="020B0503020204020204" charset="-122"/>
               </a:rPr>
               <a:t>【截图 5】
 复习计划页</a:t>
             </a:r>
+            <a:endParaRPr sz="1300">
+              <a:solidFill>
+                <a:srgbClr val="C00000"/>
+              </a:solidFill>
+              <a:latin typeface="微软雅黑" panose="020B0503020204020204" charset="-122"/>
+              <a:ea typeface="微软雅黑" panose="020B0503020204020204" charset="-122"/>
+              <a:cs typeface="微软雅黑" panose="020B0503020204020204" charset="-122"/>
+            </a:endParaRPr>
           </a:p>
           <a:p>
             <a:pPr algn="ctr"/>
@@ -8515,13 +9111,21 @@
                 <a:solidFill>
                   <a:srgbClr val="808080"/>
                 </a:solidFill>
-                <a:latin typeface="微软雅黑"/>
-                <a:ea typeface="微软雅黑"/>
-                <a:cs typeface="微软雅黑"/>
+                <a:latin typeface="微软雅黑" panose="020B0503020204020204" charset="-122"/>
+                <a:ea typeface="微软雅黑" panose="020B0503020204020204" charset="-122"/>
+                <a:cs typeface="微软雅黑" panose="020B0503020204020204" charset="-122"/>
               </a:rPr>
               <a:t>按日期分组的复习条目
 含完成勾选</a:t>
             </a:r>
+            <a:endParaRPr sz="1000">
+              <a:solidFill>
+                <a:srgbClr val="808080"/>
+              </a:solidFill>
+              <a:latin typeface="微软雅黑" panose="020B0503020204020204" charset="-122"/>
+              <a:ea typeface="微软雅黑" panose="020B0503020204020204" charset="-122"/>
+              <a:cs typeface="微软雅黑" panose="020B0503020204020204" charset="-122"/>
+            </a:endParaRPr>
           </a:p>
         </p:txBody>
       </p:sp>
@@ -8542,7 +9146,7 @@
           <a:noFill/>
         </p:spPr>
         <p:txBody>
-          <a:bodyPr wrap="square" anchor="t" lIns="0" rIns="0" tIns="0" bIns="0">
+          <a:bodyPr wrap="square" lIns="0" tIns="0" rIns="0" bIns="0" anchor="t">
             <a:spAutoFit/>
           </a:bodyPr>
           <a:lstStyle/>
@@ -8557,12 +9161,20 @@
                 <a:solidFill>
                   <a:srgbClr val="808080"/>
                 </a:solidFill>
-                <a:latin typeface="微软雅黑"/>
-                <a:ea typeface="微软雅黑"/>
-                <a:cs typeface="微软雅黑"/>
+                <a:latin typeface="微软雅黑" panose="020B0503020204020204" charset="-122"/>
+                <a:ea typeface="微软雅黑" panose="020B0503020204020204" charset="-122"/>
+                <a:cs typeface="微软雅黑" panose="020B0503020204020204" charset="-122"/>
               </a:rPr>
               <a:t>图 5  复习计划页</a:t>
             </a:r>
+            <a:endParaRPr sz="1050">
+              <a:solidFill>
+                <a:srgbClr val="808080"/>
+              </a:solidFill>
+              <a:latin typeface="微软雅黑" panose="020B0503020204020204" charset="-122"/>
+              <a:ea typeface="微软雅黑" panose="020B0503020204020204" charset="-122"/>
+              <a:cs typeface="微软雅黑" panose="020B0503020204020204" charset="-122"/>
+            </a:endParaRPr>
           </a:p>
         </p:txBody>
       </p:sp>
@@ -8583,7 +9195,7 @@
           <a:noFill/>
         </p:spPr>
         <p:txBody>
-          <a:bodyPr wrap="square" anchor="t" lIns="0" rIns="0" tIns="0" bIns="0">
+          <a:bodyPr wrap="square" lIns="0" tIns="0" rIns="0" bIns="0" anchor="t">
             <a:spAutoFit/>
           </a:bodyPr>
           <a:lstStyle/>
@@ -8598,12 +9210,20 @@
                 <a:solidFill>
                   <a:srgbClr val="C00000"/>
                 </a:solidFill>
-                <a:latin typeface="微软雅黑"/>
-                <a:ea typeface="微软雅黑"/>
-                <a:cs typeface="微软雅黑"/>
+                <a:latin typeface="微软雅黑" panose="020B0503020204020204" charset="-122"/>
+                <a:ea typeface="微软雅黑" panose="020B0503020204020204" charset="-122"/>
+                <a:cs typeface="微软雅黑" panose="020B0503020204020204" charset="-122"/>
               </a:rPr>
               <a:t>说明：本页五张截图需在系统实际运行后补充；截图要求与报告第三节“11．实现的界面”一致。</a:t>
             </a:r>
+            <a:endParaRPr sz="1200">
+              <a:solidFill>
+                <a:srgbClr val="C00000"/>
+              </a:solidFill>
+              <a:latin typeface="微软雅黑" panose="020B0503020204020204" charset="-122"/>
+              <a:ea typeface="微软雅黑" panose="020B0503020204020204" charset="-122"/>
+              <a:cs typeface="微软雅黑" panose="020B0503020204020204" charset="-122"/>
+            </a:endParaRPr>
           </a:p>
         </p:txBody>
       </p:sp>
@@ -8624,7 +9244,7 @@
           <a:noFill/>
         </p:spPr>
         <p:txBody>
-          <a:bodyPr wrap="square" anchor="t" lIns="0" rIns="0" tIns="0" bIns="0">
+          <a:bodyPr wrap="square" lIns="0" tIns="0" rIns="0" bIns="0" anchor="t">
             <a:spAutoFit/>
           </a:bodyPr>
           <a:lstStyle/>
@@ -8639,10 +9259,16 @@
                 <a:solidFill>
                   <a:srgbClr val="808080"/>
                 </a:solidFill>
-                <a:latin typeface="微软雅黑"/>
+                <a:latin typeface="微软雅黑" panose="020B0503020204020204" charset="-122"/>
               </a:rPr>
               <a:t>13</a:t>
             </a:r>
+            <a:endParaRPr sz="1000">
+              <a:solidFill>
+                <a:srgbClr val="808080"/>
+              </a:solidFill>
+              <a:latin typeface="微软雅黑" panose="020B0503020204020204" charset="-122"/>
+            </a:endParaRPr>
           </a:p>
         </p:txBody>
       </p:sp>
@@ -8655,7 +9281,7 @@
 </file>
 
 <file path=ppt/slides/slide14.xml><?xml version="1.0" encoding="utf-8"?>
-<p:sld xmlns:a="http://schemas.openxmlformats.org/drawingml/2006/main" xmlns:p="http://schemas.openxmlformats.org/presentationml/2006/main" xmlns:r="http://schemas.openxmlformats.org/officeDocument/2006/relationships">
+<p:sld xmlns:a="http://schemas.openxmlformats.org/drawingml/2006/main" xmlns:r="http://schemas.openxmlformats.org/officeDocument/2006/relationships" xmlns:p="http://schemas.openxmlformats.org/presentationml/2006/main">
   <p:cSld>
     <p:spTree>
       <p:nvGrpSpPr>
@@ -8725,7 +9351,7 @@
           <a:noFill/>
         </p:spPr>
         <p:txBody>
-          <a:bodyPr wrap="square" anchor="ctr" lIns="0" rIns="0" tIns="0" bIns="0">
+          <a:bodyPr wrap="square" lIns="0" tIns="0" rIns="0" bIns="0" anchor="ctr">
             <a:spAutoFit/>
           </a:bodyPr>
           <a:lstStyle/>
@@ -8746,12 +9372,20 @@
                 <a:solidFill>
                   <a:srgbClr val="FFFFFF"/>
                 </a:solidFill>
-                <a:latin typeface="微软雅黑"/>
-                <a:ea typeface="微软雅黑"/>
-                <a:cs typeface="微软雅黑"/>
+                <a:latin typeface="微软雅黑" panose="020B0503020204020204" charset="-122"/>
+                <a:ea typeface="微软雅黑" panose="020B0503020204020204" charset="-122"/>
+                <a:cs typeface="微软雅黑" panose="020B0503020204020204" charset="-122"/>
               </a:rPr>
               <a:t>5.5　系统部署与运行</a:t>
             </a:r>
+            <a:endParaRPr sz="2600">
+              <a:solidFill>
+                <a:srgbClr val="FFFFFF"/>
+              </a:solidFill>
+              <a:latin typeface="微软雅黑" panose="020B0503020204020204" charset="-122"/>
+              <a:ea typeface="微软雅黑" panose="020B0503020204020204" charset="-122"/>
+              <a:cs typeface="微软雅黑" panose="020B0503020204020204" charset="-122"/>
+            </a:endParaRPr>
           </a:p>
         </p:txBody>
       </p:sp>
@@ -8772,7 +9406,7 @@
           <a:noFill/>
         </p:spPr>
         <p:txBody>
-          <a:bodyPr wrap="square" anchor="ctr" lIns="0" rIns="0" tIns="0" bIns="0">
+          <a:bodyPr wrap="square" lIns="0" tIns="0" rIns="0" bIns="0" anchor="ctr">
             <a:spAutoFit/>
           </a:bodyPr>
           <a:lstStyle/>
@@ -8793,10 +9427,16 @@
                 <a:solidFill>
                   <a:srgbClr val="BDD7EE"/>
                 </a:solidFill>
-                <a:latin typeface="微软雅黑"/>
+                <a:latin typeface="微软雅黑" panose="020B0503020204020204" charset="-122"/>
               </a:rPr>
               <a:t>负责人：袁钟其</a:t>
             </a:r>
+            <a:endParaRPr sz="1300">
+              <a:solidFill>
+                <a:srgbClr val="BDD7EE"/>
+              </a:solidFill>
+              <a:latin typeface="微软雅黑" panose="020B0503020204020204" charset="-122"/>
+            </a:endParaRPr>
           </a:p>
         </p:txBody>
       </p:sp>
@@ -8817,7 +9457,7 @@
           <a:noFill/>
         </p:spPr>
         <p:txBody>
-          <a:bodyPr wrap="square" anchor="t" lIns="0" rIns="0" tIns="0" bIns="0">
+          <a:bodyPr wrap="square" lIns="0" tIns="0" rIns="0" bIns="0" anchor="t">
             <a:spAutoFit/>
           </a:bodyPr>
           <a:lstStyle/>
@@ -8838,10 +9478,16 @@
                 <a:solidFill>
                   <a:srgbClr val="808080"/>
                 </a:solidFill>
-                <a:latin typeface="微软雅黑"/>
+                <a:latin typeface="微软雅黑" panose="020B0503020204020204" charset="-122"/>
               </a:rPr>
               <a:t>14</a:t>
             </a:r>
+            <a:endParaRPr sz="1000">
+              <a:solidFill>
+                <a:srgbClr val="808080"/>
+              </a:solidFill>
+              <a:latin typeface="微软雅黑" panose="020B0503020204020204" charset="-122"/>
+            </a:endParaRPr>
           </a:p>
         </p:txBody>
       </p:sp>
@@ -8862,7 +9508,7 @@
           <a:noFill/>
         </p:spPr>
         <p:txBody>
-          <a:bodyPr wrap="square" anchor="t" lIns="0" rIns="0" tIns="0" bIns="0">
+          <a:bodyPr wrap="square" lIns="0" tIns="0" rIns="0" bIns="0" anchor="t">
             <a:spAutoFit/>
           </a:bodyPr>
           <a:lstStyle/>
@@ -8883,12 +9529,20 @@
                 <a:solidFill>
                   <a:srgbClr val="222222"/>
                 </a:solidFill>
-                <a:latin typeface="微软雅黑"/>
-                <a:ea typeface="微软雅黑"/>
-                <a:cs typeface="微软雅黑"/>
+                <a:latin typeface="微软雅黑" panose="020B0503020204020204" charset="-122"/>
+                <a:ea typeface="微软雅黑" panose="020B0503020204020204" charset="-122"/>
+                <a:cs typeface="微软雅黑" panose="020B0503020204020204" charset="-122"/>
               </a:rPr>
               <a:t>• 业务数据库 MySQL 8.0 由 Docker Compose 一键启动，映射端口 3307，数据卷持久化</a:t>
             </a:r>
+            <a:endParaRPr sz="1600" b="0">
+              <a:solidFill>
+                <a:srgbClr val="222222"/>
+              </a:solidFill>
+              <a:latin typeface="微软雅黑" panose="020B0503020204020204" charset="-122"/>
+              <a:ea typeface="微软雅黑" panose="020B0503020204020204" charset="-122"/>
+              <a:cs typeface="微软雅黑" panose="020B0503020204020204" charset="-122"/>
+            </a:endParaRPr>
           </a:p>
           <a:p>
             <a:pPr algn="l">
@@ -8907,12 +9561,20 @@
                 <a:solidFill>
                   <a:srgbClr val="222222"/>
                 </a:solidFill>
-                <a:latin typeface="微软雅黑"/>
-                <a:ea typeface="微软雅黑"/>
-                <a:cs typeface="微软雅黑"/>
+                <a:latin typeface="微软雅黑" panose="020B0503020204020204" charset="-122"/>
+                <a:ea typeface="微软雅黑" panose="020B0503020204020204" charset="-122"/>
+                <a:cs typeface="微软雅黑" panose="020B0503020204020204" charset="-122"/>
               </a:rPr>
               <a:t>• 后端服务由 Uvicorn 启动：uvicorn app.main:app --reload --port 8000</a:t>
             </a:r>
+            <a:endParaRPr sz="1600" b="0">
+              <a:solidFill>
+                <a:srgbClr val="222222"/>
+              </a:solidFill>
+              <a:latin typeface="微软雅黑" panose="020B0503020204020204" charset="-122"/>
+              <a:ea typeface="微软雅黑" panose="020B0503020204020204" charset="-122"/>
+              <a:cs typeface="微软雅黑" panose="020B0503020204020204" charset="-122"/>
+            </a:endParaRPr>
           </a:p>
           <a:p>
             <a:pPr algn="l">
@@ -8931,12 +9593,20 @@
                 <a:solidFill>
                   <a:srgbClr val="222222"/>
                 </a:solidFill>
-                <a:latin typeface="微软雅黑"/>
-                <a:ea typeface="微软雅黑"/>
-                <a:cs typeface="微软雅黑"/>
+                <a:latin typeface="微软雅黑" panose="020B0503020204020204" charset="-122"/>
+                <a:ea typeface="微软雅黑" panose="020B0503020204020204" charset="-122"/>
+                <a:cs typeface="微软雅黑" panose="020B0503020204020204" charset="-122"/>
               </a:rPr>
               <a:t>• Chroma 以进程内本地持久化方式运行，向量数据落盘至 ./chroma_db，无需独立容器</a:t>
             </a:r>
+            <a:endParaRPr sz="1600" b="0">
+              <a:solidFill>
+                <a:srgbClr val="222222"/>
+              </a:solidFill>
+              <a:latin typeface="微软雅黑" panose="020B0503020204020204" charset="-122"/>
+              <a:ea typeface="微软雅黑" panose="020B0503020204020204" charset="-122"/>
+              <a:cs typeface="微软雅黑" panose="020B0503020204020204" charset="-122"/>
+            </a:endParaRPr>
           </a:p>
           <a:p>
             <a:pPr algn="l">
@@ -8955,12 +9625,20 @@
                 <a:solidFill>
                   <a:srgbClr val="222222"/>
                 </a:solidFill>
-                <a:latin typeface="微软雅黑"/>
-                <a:ea typeface="微软雅黑"/>
-                <a:cs typeface="微软雅黑"/>
+                <a:latin typeface="微软雅黑" panose="020B0503020204020204" charset="-122"/>
+                <a:ea typeface="微软雅黑" panose="020B0503020204020204" charset="-122"/>
+                <a:cs typeface="微软雅黑" panose="020B0503020204020204" charset="-122"/>
               </a:rPr>
               <a:t>• 敏感信息（API Key、数据库口令）统一由 .env 读取，不入库、不硬编码</a:t>
             </a:r>
+            <a:endParaRPr sz="1600" b="0">
+              <a:solidFill>
+                <a:srgbClr val="222222"/>
+              </a:solidFill>
+              <a:latin typeface="微软雅黑" panose="020B0503020204020204" charset="-122"/>
+              <a:ea typeface="微软雅黑" panose="020B0503020204020204" charset="-122"/>
+              <a:cs typeface="微软雅黑" panose="020B0503020204020204" charset="-122"/>
+            </a:endParaRPr>
           </a:p>
         </p:txBody>
       </p:sp>
@@ -9025,7 +9703,7 @@
           <a:noFill/>
         </p:spPr>
         <p:txBody>
-          <a:bodyPr wrap="square" anchor="t" lIns="0" rIns="0" tIns="0" bIns="0">
+          <a:bodyPr wrap="square" lIns="0" tIns="0" rIns="0" bIns="0" anchor="t">
             <a:spAutoFit/>
           </a:bodyPr>
           <a:lstStyle/>
@@ -9046,12 +9724,20 @@
                 <a:solidFill>
                   <a:srgbClr val="2E75B6"/>
                 </a:solidFill>
-                <a:latin typeface="微软雅黑"/>
-                <a:ea typeface="微软雅黑"/>
-                <a:cs typeface="微软雅黑"/>
+                <a:latin typeface="微软雅黑" panose="020B0503020204020204" charset="-122"/>
+                <a:ea typeface="微软雅黑" panose="020B0503020204020204" charset="-122"/>
+                <a:cs typeface="微软雅黑" panose="020B0503020204020204" charset="-122"/>
               </a:rPr>
               <a:t>运行效果与接口自测</a:t>
             </a:r>
+            <a:endParaRPr sz="1700" b="1">
+              <a:solidFill>
+                <a:srgbClr val="2E75B6"/>
+              </a:solidFill>
+              <a:latin typeface="微软雅黑" panose="020B0503020204020204" charset="-122"/>
+              <a:ea typeface="微软雅黑" panose="020B0503020204020204" charset="-122"/>
+              <a:cs typeface="微软雅黑" panose="020B0503020204020204" charset="-122"/>
+            </a:endParaRPr>
           </a:p>
           <a:p>
             <a:pPr algn="l">
@@ -9070,12 +9756,20 @@
                 <a:solidFill>
                   <a:srgbClr val="222222"/>
                 </a:solidFill>
-                <a:latin typeface="微软雅黑"/>
-                <a:ea typeface="微软雅黑"/>
-                <a:cs typeface="微软雅黑"/>
+                <a:latin typeface="微软雅黑" panose="020B0503020204020204" charset="-122"/>
+                <a:ea typeface="微软雅黑" panose="020B0503020204020204" charset="-122"/>
+                <a:cs typeface="微软雅黑" panose="020B0503020204020204" charset="-122"/>
               </a:rPr>
               <a:t>访问 http://127.0.0.1:8000 打开前端页面；/docs 查看自动生成的 API 文档；/api/health 可同时检查 MySQL 与 Chroma 的连通性。</a:t>
             </a:r>
+            <a:endParaRPr sz="1500" b="0">
+              <a:solidFill>
+                <a:srgbClr val="222222"/>
+              </a:solidFill>
+              <a:latin typeface="微软雅黑" panose="020B0503020204020204" charset="-122"/>
+              <a:ea typeface="微软雅黑" panose="020B0503020204020204" charset="-122"/>
+              <a:cs typeface="微软雅黑" panose="020B0503020204020204" charset="-122"/>
+            </a:endParaRPr>
           </a:p>
           <a:p>
             <a:pPr algn="l">
@@ -9094,12 +9788,20 @@
                 <a:solidFill>
                   <a:srgbClr val="1E8449"/>
                 </a:solidFill>
-                <a:latin typeface="微软雅黑"/>
-                <a:ea typeface="微软雅黑"/>
-                <a:cs typeface="微软雅黑"/>
+                <a:latin typeface="微软雅黑" panose="020B0503020204020204" charset="-122"/>
+                <a:ea typeface="微软雅黑" panose="020B0503020204020204" charset="-122"/>
+                <a:cs typeface="微软雅黑" panose="020B0503020204020204" charset="-122"/>
               </a:rPr>
               <a:t>已挂载路由：课程、文档、问答、出题、错题、复习共 6 组接口</a:t>
             </a:r>
+            <a:endParaRPr sz="1500" b="1">
+              <a:solidFill>
+                <a:srgbClr val="1E8449"/>
+              </a:solidFill>
+              <a:latin typeface="微软雅黑" panose="020B0503020204020204" charset="-122"/>
+              <a:ea typeface="微软雅黑" panose="020B0503020204020204" charset="-122"/>
+              <a:cs typeface="微软雅黑" panose="020B0503020204020204" charset="-122"/>
+            </a:endParaRPr>
           </a:p>
         </p:txBody>
       </p:sp>
@@ -9112,7 +9814,7 @@
 </file>
 
 <file path=ppt/slides/slide15.xml><?xml version="1.0" encoding="utf-8"?>
-<p:sld xmlns:a="http://schemas.openxmlformats.org/drawingml/2006/main" xmlns:p="http://schemas.openxmlformats.org/presentationml/2006/main" xmlns:r="http://schemas.openxmlformats.org/officeDocument/2006/relationships">
+<p:sld xmlns:a="http://schemas.openxmlformats.org/drawingml/2006/main" xmlns:r="http://schemas.openxmlformats.org/officeDocument/2006/relationships" xmlns:p="http://schemas.openxmlformats.org/presentationml/2006/main">
   <p:cSld>
     <p:spTree>
       <p:nvGrpSpPr>
@@ -9182,7 +9884,7 @@
           <a:noFill/>
         </p:spPr>
         <p:txBody>
-          <a:bodyPr wrap="square" anchor="ctr" lIns="0" rIns="0" tIns="0" bIns="0">
+          <a:bodyPr wrap="square" lIns="0" tIns="0" rIns="0" bIns="0" anchor="ctr">
             <a:spAutoFit/>
           </a:bodyPr>
           <a:lstStyle/>
@@ -9203,12 +9905,20 @@
                 <a:solidFill>
                   <a:srgbClr val="FFFFFF"/>
                 </a:solidFill>
-                <a:latin typeface="微软雅黑"/>
-                <a:ea typeface="微软雅黑"/>
-                <a:cs typeface="微软雅黑"/>
+                <a:latin typeface="微软雅黑" panose="020B0503020204020204" charset="-122"/>
+                <a:ea typeface="微软雅黑" panose="020B0503020204020204" charset="-122"/>
+                <a:cs typeface="微软雅黑" panose="020B0503020204020204" charset="-122"/>
               </a:rPr>
               <a:t>6　总结与展望</a:t>
             </a:r>
+            <a:endParaRPr sz="2600" b="1">
+              <a:solidFill>
+                <a:srgbClr val="FFFFFF"/>
+              </a:solidFill>
+              <a:latin typeface="微软雅黑" panose="020B0503020204020204" charset="-122"/>
+              <a:ea typeface="微软雅黑" panose="020B0503020204020204" charset="-122"/>
+              <a:cs typeface="微软雅黑" panose="020B0503020204020204" charset="-122"/>
+            </a:endParaRPr>
           </a:p>
         </p:txBody>
       </p:sp>
@@ -9229,7 +9939,7 @@
           <a:noFill/>
         </p:spPr>
         <p:txBody>
-          <a:bodyPr wrap="square" anchor="t" lIns="0" rIns="0" tIns="0" bIns="0">
+          <a:bodyPr wrap="square" lIns="0" tIns="0" rIns="0" bIns="0" anchor="t">
             <a:spAutoFit/>
           </a:bodyPr>
           <a:lstStyle/>
@@ -9250,10 +9960,16 @@
                 <a:solidFill>
                   <a:srgbClr val="808080"/>
                 </a:solidFill>
-                <a:latin typeface="微软雅黑"/>
+                <a:latin typeface="微软雅黑" panose="020B0503020204020204" charset="-122"/>
               </a:rPr>
               <a:t>15</a:t>
             </a:r>
+            <a:endParaRPr sz="1000">
+              <a:solidFill>
+                <a:srgbClr val="808080"/>
+              </a:solidFill>
+              <a:latin typeface="微软雅黑" panose="020B0503020204020204" charset="-122"/>
+            </a:endParaRPr>
           </a:p>
         </p:txBody>
       </p:sp>
@@ -9274,7 +9990,7 @@
           <a:noFill/>
         </p:spPr>
         <p:txBody>
-          <a:bodyPr wrap="square" anchor="t" lIns="0" rIns="0" tIns="0" bIns="0">
+          <a:bodyPr wrap="square" lIns="0" tIns="0" rIns="0" bIns="0" anchor="t">
             <a:spAutoFit/>
           </a:bodyPr>
           <a:lstStyle/>
@@ -9295,12 +10011,20 @@
                 <a:solidFill>
                   <a:srgbClr val="2E75B6"/>
                 </a:solidFill>
-                <a:latin typeface="微软雅黑"/>
-                <a:ea typeface="微软雅黑"/>
-                <a:cs typeface="微软雅黑"/>
+                <a:latin typeface="微软雅黑" panose="020B0503020204020204" charset="-122"/>
+                <a:ea typeface="微软雅黑" panose="020B0503020204020204" charset="-122"/>
+                <a:cs typeface="微软雅黑" panose="020B0503020204020204" charset="-122"/>
               </a:rPr>
               <a:t>成果总结</a:t>
             </a:r>
+            <a:endParaRPr sz="1800" b="1">
+              <a:solidFill>
+                <a:srgbClr val="2E75B6"/>
+              </a:solidFill>
+              <a:latin typeface="微软雅黑" panose="020B0503020204020204" charset="-122"/>
+              <a:ea typeface="微软雅黑" panose="020B0503020204020204" charset="-122"/>
+              <a:cs typeface="微软雅黑" panose="020B0503020204020204" charset="-122"/>
+            </a:endParaRPr>
           </a:p>
         </p:txBody>
       </p:sp>
@@ -9321,7 +10045,7 @@
           <a:noFill/>
         </p:spPr>
         <p:txBody>
-          <a:bodyPr wrap="square" anchor="t" lIns="0" rIns="0" tIns="0" bIns="0">
+          <a:bodyPr wrap="square" lIns="0" tIns="0" rIns="0" bIns="0" anchor="t">
             <a:spAutoFit/>
           </a:bodyPr>
           <a:lstStyle/>
@@ -9342,12 +10066,20 @@
                 <a:solidFill>
                   <a:srgbClr val="222222"/>
                 </a:solidFill>
-                <a:latin typeface="微软雅黑"/>
-                <a:ea typeface="微软雅黑"/>
-                <a:cs typeface="微软雅黑"/>
+                <a:latin typeface="微软雅黑" panose="020B0503020204020204" charset="-122"/>
+                <a:ea typeface="微软雅黑" panose="020B0503020204020204" charset="-122"/>
+                <a:cs typeface="微软雅黑" panose="020B0503020204020204" charset="-122"/>
               </a:rPr>
               <a:t>• 构建了“上传文档 → 智能问答 → 自动出题”的核心链路，回答可溯源、幻觉可控</a:t>
             </a:r>
+            <a:endParaRPr sz="1500" b="0">
+              <a:solidFill>
+                <a:srgbClr val="222222"/>
+              </a:solidFill>
+              <a:latin typeface="微软雅黑" panose="020B0503020204020204" charset="-122"/>
+              <a:ea typeface="微软雅黑" panose="020B0503020204020204" charset="-122"/>
+              <a:cs typeface="微软雅黑" panose="020B0503020204020204" charset="-122"/>
+            </a:endParaRPr>
           </a:p>
           <a:p>
             <a:pPr algn="l">
@@ -9366,12 +10098,20 @@
                 <a:solidFill>
                   <a:srgbClr val="222222"/>
                 </a:solidFill>
-                <a:latin typeface="微软雅黑"/>
-                <a:ea typeface="微软雅黑"/>
-                <a:cs typeface="微软雅黑"/>
+                <a:latin typeface="微软雅黑" panose="020B0503020204020204" charset="-122"/>
+                <a:ea typeface="微软雅黑" panose="020B0503020204020204" charset="-122"/>
+                <a:cs typeface="微软雅黑" panose="020B0503020204020204" charset="-122"/>
               </a:rPr>
               <a:t>• 完成 7 张表的数据库设计并实现 ORM 建模，E-R / CDM / PDM 三层模型完整</a:t>
             </a:r>
+            <a:endParaRPr sz="1500" b="0">
+              <a:solidFill>
+                <a:srgbClr val="222222"/>
+              </a:solidFill>
+              <a:latin typeface="微软雅黑" panose="020B0503020204020204" charset="-122"/>
+              <a:ea typeface="微软雅黑" panose="020B0503020204020204" charset="-122"/>
+              <a:cs typeface="微软雅黑" panose="020B0503020204020204" charset="-122"/>
+            </a:endParaRPr>
           </a:p>
           <a:p>
             <a:pPr algn="l">
@@ -9390,12 +10130,20 @@
                 <a:solidFill>
                   <a:srgbClr val="222222"/>
                 </a:solidFill>
-                <a:latin typeface="微软雅黑"/>
-                <a:ea typeface="微软雅黑"/>
-                <a:cs typeface="微软雅黑"/>
+                <a:latin typeface="微软雅黑" panose="020B0503020204020204" charset="-122"/>
+                <a:ea typeface="微软雅黑" panose="020B0503020204020204" charset="-122"/>
+                <a:cs typeface="微软雅黑" panose="020B0503020204020204" charset="-122"/>
               </a:rPr>
               <a:t>• 系统轻量可控，除 MySQL 外不引入分布式中间件，可在普通个人计算机上一键启动</a:t>
             </a:r>
+            <a:endParaRPr sz="1500" b="0">
+              <a:solidFill>
+                <a:srgbClr val="222222"/>
+              </a:solidFill>
+              <a:latin typeface="微软雅黑" panose="020B0503020204020204" charset="-122"/>
+              <a:ea typeface="微软雅黑" panose="020B0503020204020204" charset="-122"/>
+              <a:cs typeface="微软雅黑" panose="020B0503020204020204" charset="-122"/>
+            </a:endParaRPr>
           </a:p>
         </p:txBody>
       </p:sp>
@@ -9416,7 +10164,7 @@
           <a:noFill/>
         </p:spPr>
         <p:txBody>
-          <a:bodyPr wrap="square" anchor="t" lIns="0" rIns="0" tIns="0" bIns="0">
+          <a:bodyPr wrap="square" lIns="0" tIns="0" rIns="0" bIns="0" anchor="t">
             <a:spAutoFit/>
           </a:bodyPr>
           <a:lstStyle/>
@@ -9437,12 +10185,20 @@
                 <a:solidFill>
                   <a:srgbClr val="2E75B6"/>
                 </a:solidFill>
-                <a:latin typeface="微软雅黑"/>
-                <a:ea typeface="微软雅黑"/>
-                <a:cs typeface="微软雅黑"/>
+                <a:latin typeface="微软雅黑" panose="020B0503020204020204" charset="-122"/>
+                <a:ea typeface="微软雅黑" panose="020B0503020204020204" charset="-122"/>
+                <a:cs typeface="微软雅黑" panose="020B0503020204020204" charset="-122"/>
               </a:rPr>
               <a:t>后续展望</a:t>
             </a:r>
+            <a:endParaRPr sz="1800" b="1">
+              <a:solidFill>
+                <a:srgbClr val="2E75B6"/>
+              </a:solidFill>
+              <a:latin typeface="微软雅黑" panose="020B0503020204020204" charset="-122"/>
+              <a:ea typeface="微软雅黑" panose="020B0503020204020204" charset="-122"/>
+              <a:cs typeface="微软雅黑" panose="020B0503020204020204" charset="-122"/>
+            </a:endParaRPr>
           </a:p>
         </p:txBody>
       </p:sp>
@@ -9463,7 +10219,7 @@
           <a:noFill/>
         </p:spPr>
         <p:txBody>
-          <a:bodyPr wrap="square" anchor="t" lIns="0" rIns="0" tIns="0" bIns="0">
+          <a:bodyPr wrap="square" lIns="0" tIns="0" rIns="0" bIns="0" anchor="t">
             <a:spAutoFit/>
           </a:bodyPr>
           <a:lstStyle/>
@@ -9484,12 +10240,20 @@
                 <a:solidFill>
                   <a:srgbClr val="222222"/>
                 </a:solidFill>
-                <a:latin typeface="微软雅黑"/>
-                <a:ea typeface="微软雅黑"/>
-                <a:cs typeface="微软雅黑"/>
+                <a:latin typeface="微软雅黑" panose="020B0503020204020204" charset="-122"/>
+                <a:ea typeface="微软雅黑" panose="020B0503020204020204" charset="-122"/>
+                <a:cs typeface="微软雅黑" panose="020B0503020204020204" charset="-122"/>
               </a:rPr>
               <a:t>• 完善 F3–F5 模块，补齐“练、测、复”环节，形成完整学习闭环</a:t>
             </a:r>
+            <a:endParaRPr sz="1500" b="0">
+              <a:solidFill>
+                <a:srgbClr val="222222"/>
+              </a:solidFill>
+              <a:latin typeface="微软雅黑" panose="020B0503020204020204" charset="-122"/>
+              <a:ea typeface="微软雅黑" panose="020B0503020204020204" charset="-122"/>
+              <a:cs typeface="微软雅黑" panose="020B0503020204020204" charset="-122"/>
+            </a:endParaRPr>
           </a:p>
           <a:p>
             <a:pPr algn="l">
@@ -9508,12 +10272,20 @@
                 <a:solidFill>
                   <a:srgbClr val="222222"/>
                 </a:solidFill>
-                <a:latin typeface="微软雅黑"/>
-                <a:ea typeface="微软雅黑"/>
-                <a:cs typeface="微软雅黑"/>
+                <a:latin typeface="微软雅黑" panose="020B0503020204020204" charset="-122"/>
+                <a:ea typeface="微软雅黑" panose="020B0503020204020204" charset="-122"/>
+                <a:cs typeface="微软雅黑" panose="020B0503020204020204" charset="-122"/>
               </a:rPr>
               <a:t>• 增加多用户与登录隔离、学习统计可视化、题目与对话导出</a:t>
             </a:r>
+            <a:endParaRPr sz="1500" b="0">
+              <a:solidFill>
+                <a:srgbClr val="222222"/>
+              </a:solidFill>
+              <a:latin typeface="微软雅黑" panose="020B0503020204020204" charset="-122"/>
+              <a:ea typeface="微软雅黑" panose="020B0503020204020204" charset="-122"/>
+              <a:cs typeface="微软雅黑" panose="020B0503020204020204" charset="-122"/>
+            </a:endParaRPr>
           </a:p>
           <a:p>
             <a:pPr algn="l">
@@ -9532,12 +10304,20 @@
                 <a:solidFill>
                   <a:srgbClr val="222222"/>
                 </a:solidFill>
-                <a:latin typeface="微软雅黑"/>
-                <a:ea typeface="微软雅黑"/>
-                <a:cs typeface="微软雅黑"/>
+                <a:latin typeface="微软雅黑" panose="020B0503020204020204" charset="-122"/>
+                <a:ea typeface="微软雅黑" panose="020B0503020204020204" charset="-122"/>
+                <a:cs typeface="微软雅黑" panose="020B0503020204020204" charset="-122"/>
               </a:rPr>
               <a:t>• 探索多轮对话记忆、混合检索（向量 + 关键词）以进一步提升召回质量</a:t>
             </a:r>
+            <a:endParaRPr sz="1500" b="0">
+              <a:solidFill>
+                <a:srgbClr val="222222"/>
+              </a:solidFill>
+              <a:latin typeface="微软雅黑" panose="020B0503020204020204" charset="-122"/>
+              <a:ea typeface="微软雅黑" panose="020B0503020204020204" charset="-122"/>
+              <a:cs typeface="微软雅黑" panose="020B0503020204020204" charset="-122"/>
+            </a:endParaRPr>
           </a:p>
         </p:txBody>
       </p:sp>
@@ -9550,7 +10330,7 @@
 </file>
 
 <file path=ppt/slides/slide16.xml><?xml version="1.0" encoding="utf-8"?>
-<p:sld xmlns:a="http://schemas.openxmlformats.org/drawingml/2006/main" xmlns:p="http://schemas.openxmlformats.org/presentationml/2006/main" xmlns:r="http://schemas.openxmlformats.org/officeDocument/2006/relationships">
+<p:sld xmlns:a="http://schemas.openxmlformats.org/drawingml/2006/main" xmlns:r="http://schemas.openxmlformats.org/officeDocument/2006/relationships" xmlns:p="http://schemas.openxmlformats.org/presentationml/2006/main">
   <p:cSld>
     <p:spTree>
       <p:nvGrpSpPr>
@@ -9620,7 +10400,7 @@
           <a:noFill/>
         </p:spPr>
         <p:txBody>
-          <a:bodyPr wrap="square" anchor="ctr" lIns="0" rIns="0" tIns="0" bIns="0">
+          <a:bodyPr wrap="square" lIns="0" tIns="0" rIns="0" bIns="0" anchor="ctr">
             <a:spAutoFit/>
           </a:bodyPr>
           <a:lstStyle/>
@@ -9641,12 +10421,20 @@
                 <a:solidFill>
                   <a:srgbClr val="FFFFFF"/>
                 </a:solidFill>
-                <a:latin typeface="微软雅黑"/>
-                <a:ea typeface="微软雅黑"/>
-                <a:cs typeface="微软雅黑"/>
+                <a:latin typeface="微软雅黑" panose="020B0503020204020204" charset="-122"/>
+                <a:ea typeface="微软雅黑" panose="020B0503020204020204" charset="-122"/>
+                <a:cs typeface="微软雅黑" panose="020B0503020204020204" charset="-122"/>
               </a:rPr>
               <a:t>7　项目分工</a:t>
             </a:r>
+            <a:endParaRPr sz="2600" b="1">
+              <a:solidFill>
+                <a:srgbClr val="FFFFFF"/>
+              </a:solidFill>
+              <a:latin typeface="微软雅黑" panose="020B0503020204020204" charset="-122"/>
+              <a:ea typeface="微软雅黑" panose="020B0503020204020204" charset="-122"/>
+              <a:cs typeface="微软雅黑" panose="020B0503020204020204" charset="-122"/>
+            </a:endParaRPr>
           </a:p>
         </p:txBody>
       </p:sp>
@@ -9667,7 +10455,7 @@
           <a:noFill/>
         </p:spPr>
         <p:txBody>
-          <a:bodyPr wrap="square" anchor="t" lIns="0" rIns="0" tIns="0" bIns="0">
+          <a:bodyPr wrap="square" lIns="0" tIns="0" rIns="0" bIns="0" anchor="t">
             <a:spAutoFit/>
           </a:bodyPr>
           <a:lstStyle/>
@@ -9688,10 +10476,16 @@
                 <a:solidFill>
                   <a:srgbClr val="808080"/>
                 </a:solidFill>
-                <a:latin typeface="微软雅黑"/>
+                <a:latin typeface="微软雅黑" panose="020B0503020204020204" charset="-122"/>
               </a:rPr>
               <a:t>16</a:t>
             </a:r>
+            <a:endParaRPr sz="1000">
+              <a:solidFill>
+                <a:srgbClr val="808080"/>
+              </a:solidFill>
+              <a:latin typeface="微软雅黑" panose="020B0503020204020204" charset="-122"/>
+            </a:endParaRPr>
           </a:p>
         </p:txBody>
       </p:sp>
@@ -9731,12 +10525,20 @@
                           <a:solidFill>
                             <a:srgbClr val="FFFFFF"/>
                           </a:solidFill>
-                          <a:latin typeface="微软雅黑"/>
-                          <a:ea typeface="微软雅黑"/>
-                          <a:cs typeface="微软雅黑"/>
+                          <a:latin typeface="微软雅黑" panose="020B0503020204020204" charset="-122"/>
+                          <a:ea typeface="微软雅黑" panose="020B0503020204020204" charset="-122"/>
+                          <a:cs typeface="微软雅黑" panose="020B0503020204020204" charset="-122"/>
                         </a:rPr>
                         <a:t>序号</a:t>
                       </a:r>
+                      <a:endParaRPr sz="1300" b="1">
+                        <a:solidFill>
+                          <a:srgbClr val="FFFFFF"/>
+                        </a:solidFill>
+                        <a:latin typeface="微软雅黑" panose="020B0503020204020204" charset="-122"/>
+                        <a:ea typeface="微软雅黑" panose="020B0503020204020204" charset="-122"/>
+                        <a:cs typeface="微软雅黑" panose="020B0503020204020204" charset="-122"/>
+                      </a:endParaRPr>
                     </a:p>
                   </a:txBody>
                   <a:tcPr anchor="ctr">
@@ -9756,12 +10558,20 @@
                           <a:solidFill>
                             <a:srgbClr val="FFFFFF"/>
                           </a:solidFill>
-                          <a:latin typeface="微软雅黑"/>
-                          <a:ea typeface="微软雅黑"/>
-                          <a:cs typeface="微软雅黑"/>
+                          <a:latin typeface="微软雅黑" panose="020B0503020204020204" charset="-122"/>
+                          <a:ea typeface="微软雅黑" panose="020B0503020204020204" charset="-122"/>
+                          <a:cs typeface="微软雅黑" panose="020B0503020204020204" charset="-122"/>
                         </a:rPr>
                         <a:t>姓名</a:t>
                       </a:r>
+                      <a:endParaRPr sz="1300" b="1">
+                        <a:solidFill>
+                          <a:srgbClr val="FFFFFF"/>
+                        </a:solidFill>
+                        <a:latin typeface="微软雅黑" panose="020B0503020204020204" charset="-122"/>
+                        <a:ea typeface="微软雅黑" panose="020B0503020204020204" charset="-122"/>
+                        <a:cs typeface="微软雅黑" panose="020B0503020204020204" charset="-122"/>
+                      </a:endParaRPr>
                     </a:p>
                   </a:txBody>
                   <a:tcPr anchor="ctr">
@@ -9781,12 +10591,20 @@
                           <a:solidFill>
                             <a:srgbClr val="FFFFFF"/>
                           </a:solidFill>
-                          <a:latin typeface="微软雅黑"/>
-                          <a:ea typeface="微软雅黑"/>
-                          <a:cs typeface="微软雅黑"/>
+                          <a:latin typeface="微软雅黑" panose="020B0503020204020204" charset="-122"/>
+                          <a:ea typeface="微软雅黑" panose="020B0503020204020204" charset="-122"/>
+                          <a:cs typeface="微软雅黑" panose="020B0503020204020204" charset="-122"/>
                         </a:rPr>
                         <a:t>学号</a:t>
                       </a:r>
+                      <a:endParaRPr sz="1300" b="1">
+                        <a:solidFill>
+                          <a:srgbClr val="FFFFFF"/>
+                        </a:solidFill>
+                        <a:latin typeface="微软雅黑" panose="020B0503020204020204" charset="-122"/>
+                        <a:ea typeface="微软雅黑" panose="020B0503020204020204" charset="-122"/>
+                        <a:cs typeface="微软雅黑" panose="020B0503020204020204" charset="-122"/>
+                      </a:endParaRPr>
                     </a:p>
                   </a:txBody>
                   <a:tcPr anchor="ctr">
@@ -9806,12 +10624,20 @@
                           <a:solidFill>
                             <a:srgbClr val="FFFFFF"/>
                           </a:solidFill>
-                          <a:latin typeface="微软雅黑"/>
-                          <a:ea typeface="微软雅黑"/>
-                          <a:cs typeface="微软雅黑"/>
+                          <a:latin typeface="微软雅黑" panose="020B0503020204020204" charset="-122"/>
+                          <a:ea typeface="微软雅黑" panose="020B0503020204020204" charset="-122"/>
+                          <a:cs typeface="微软雅黑" panose="020B0503020204020204" charset="-122"/>
                         </a:rPr>
                         <a:t>具体分工</a:t>
                       </a:r>
+                      <a:endParaRPr sz="1300" b="1">
+                        <a:solidFill>
+                          <a:srgbClr val="FFFFFF"/>
+                        </a:solidFill>
+                        <a:latin typeface="微软雅黑" panose="020B0503020204020204" charset="-122"/>
+                        <a:ea typeface="微软雅黑" panose="020B0503020204020204" charset="-122"/>
+                        <a:cs typeface="微软雅黑" panose="020B0503020204020204" charset="-122"/>
+                      </a:endParaRPr>
                     </a:p>
                   </a:txBody>
                   <a:tcPr anchor="ctr">
@@ -9830,12 +10656,17 @@
                       <a:pPr algn="ctr"/>
                       <a:r>
                         <a:rPr sz="1100">
-                          <a:latin typeface="微软雅黑"/>
-                          <a:ea typeface="微软雅黑"/>
-                          <a:cs typeface="微软雅黑"/>
+                          <a:latin typeface="微软雅黑" panose="020B0503020204020204" charset="-122"/>
+                          <a:ea typeface="微软雅黑" panose="020B0503020204020204" charset="-122"/>
+                          <a:cs typeface="微软雅黑" panose="020B0503020204020204" charset="-122"/>
                         </a:rPr>
                         <a:t>1</a:t>
                       </a:r>
+                      <a:endParaRPr sz="1100">
+                        <a:latin typeface="微软雅黑" panose="020B0503020204020204" charset="-122"/>
+                        <a:ea typeface="微软雅黑" panose="020B0503020204020204" charset="-122"/>
+                        <a:cs typeface="微软雅黑" panose="020B0503020204020204" charset="-122"/>
+                      </a:endParaRPr>
                     </a:p>
                   </a:txBody>
                   <a:tcPr anchor="ctr">
@@ -9852,12 +10683,17 @@
                       <a:pPr algn="ctr"/>
                       <a:r>
                         <a:rPr sz="1100">
-                          <a:latin typeface="微软雅黑"/>
-                          <a:ea typeface="微软雅黑"/>
-                          <a:cs typeface="微软雅黑"/>
+                          <a:latin typeface="微软雅黑" panose="020B0503020204020204" charset="-122"/>
+                          <a:ea typeface="微软雅黑" panose="020B0503020204020204" charset="-122"/>
+                          <a:cs typeface="微软雅黑" panose="020B0503020204020204" charset="-122"/>
                         </a:rPr>
                         <a:t>袁钟其</a:t>
                       </a:r>
+                      <a:endParaRPr sz="1100">
+                        <a:latin typeface="微软雅黑" panose="020B0503020204020204" charset="-122"/>
+                        <a:ea typeface="微软雅黑" panose="020B0503020204020204" charset="-122"/>
+                        <a:cs typeface="微软雅黑" panose="020B0503020204020204" charset="-122"/>
+                      </a:endParaRPr>
                     </a:p>
                   </a:txBody>
                   <a:tcPr anchor="ctr">
@@ -9874,12 +10710,17 @@
                       <a:pPr algn="ctr"/>
                       <a:r>
                         <a:rPr sz="1100">
-                          <a:latin typeface="微软雅黑"/>
-                          <a:ea typeface="微软雅黑"/>
-                          <a:cs typeface="微软雅黑"/>
+                          <a:latin typeface="微软雅黑" panose="020B0503020204020204" charset="-122"/>
+                          <a:ea typeface="微软雅黑" panose="020B0503020204020204" charset="-122"/>
+                          <a:cs typeface="微软雅黑" panose="020B0503020204020204" charset="-122"/>
                         </a:rPr>
                         <a:t>2306007106</a:t>
                       </a:r>
+                      <a:endParaRPr sz="1100">
+                        <a:latin typeface="微软雅黑" panose="020B0503020204020204" charset="-122"/>
+                        <a:ea typeface="微软雅黑" panose="020B0503020204020204" charset="-122"/>
+                        <a:cs typeface="微软雅黑" panose="020B0503020204020204" charset="-122"/>
+                      </a:endParaRPr>
                     </a:p>
                   </a:txBody>
                   <a:tcPr anchor="ctr">
@@ -9896,12 +10737,17 @@
                       <a:pPr algn="l"/>
                       <a:r>
                         <a:rPr sz="1100">
-                          <a:latin typeface="微软雅黑"/>
-                          <a:ea typeface="微软雅黑"/>
-                          <a:cs typeface="微软雅黑"/>
+                          <a:latin typeface="微软雅黑" panose="020B0503020204020204" charset="-122"/>
+                          <a:ea typeface="微软雅黑" panose="020B0503020204020204" charset="-122"/>
+                          <a:cs typeface="微软雅黑" panose="020B0503020204020204" charset="-122"/>
                         </a:rPr>
                         <a:t>项目管理与协调：方案设计、任务分解与进度把控；环境搭建与部署验证；答辩组织</a:t>
                       </a:r>
+                      <a:endParaRPr sz="1100">
+                        <a:latin typeface="微软雅黑" panose="020B0503020204020204" charset="-122"/>
+                        <a:ea typeface="微软雅黑" panose="020B0503020204020204" charset="-122"/>
+                        <a:cs typeface="微软雅黑" panose="020B0503020204020204" charset="-122"/>
+                      </a:endParaRPr>
                     </a:p>
                   </a:txBody>
                   <a:tcPr anchor="ctr">
@@ -9920,12 +10766,17 @@
                       <a:pPr algn="ctr"/>
                       <a:r>
                         <a:rPr sz="1100">
-                          <a:latin typeface="微软雅黑"/>
-                          <a:ea typeface="微软雅黑"/>
-                          <a:cs typeface="微软雅黑"/>
+                          <a:latin typeface="微软雅黑" panose="020B0503020204020204" charset="-122"/>
+                          <a:ea typeface="微软雅黑" panose="020B0503020204020204" charset="-122"/>
+                          <a:cs typeface="微软雅黑" panose="020B0503020204020204" charset="-122"/>
                         </a:rPr>
                         <a:t>2</a:t>
                       </a:r>
+                      <a:endParaRPr sz="1100">
+                        <a:latin typeface="微软雅黑" panose="020B0503020204020204" charset="-122"/>
+                        <a:ea typeface="微软雅黑" panose="020B0503020204020204" charset="-122"/>
+                        <a:cs typeface="微软雅黑" panose="020B0503020204020204" charset="-122"/>
+                      </a:endParaRPr>
                     </a:p>
                   </a:txBody>
                   <a:tcPr anchor="ctr">
@@ -9942,12 +10793,17 @@
                       <a:pPr algn="ctr"/>
                       <a:r>
                         <a:rPr sz="1100">
-                          <a:latin typeface="微软雅黑"/>
-                          <a:ea typeface="微软雅黑"/>
-                          <a:cs typeface="微软雅黑"/>
+                          <a:latin typeface="微软雅黑" panose="020B0503020204020204" charset="-122"/>
+                          <a:ea typeface="微软雅黑" panose="020B0503020204020204" charset="-122"/>
+                          <a:cs typeface="微软雅黑" panose="020B0503020204020204" charset="-122"/>
                         </a:rPr>
                         <a:t>周承锦</a:t>
                       </a:r>
+                      <a:endParaRPr sz="1100">
+                        <a:latin typeface="微软雅黑" panose="020B0503020204020204" charset="-122"/>
+                        <a:ea typeface="微软雅黑" panose="020B0503020204020204" charset="-122"/>
+                        <a:cs typeface="微软雅黑" panose="020B0503020204020204" charset="-122"/>
+                      </a:endParaRPr>
                     </a:p>
                   </a:txBody>
                   <a:tcPr anchor="ctr">
@@ -9964,12 +10820,17 @@
                       <a:pPr algn="ctr"/>
                       <a:r>
                         <a:rPr sz="1100">
-                          <a:latin typeface="微软雅黑"/>
-                          <a:ea typeface="微软雅黑"/>
-                          <a:cs typeface="微软雅黑"/>
+                          <a:latin typeface="微软雅黑" panose="020B0503020204020204" charset="-122"/>
+                          <a:ea typeface="微软雅黑" panose="020B0503020204020204" charset="-122"/>
+                          <a:cs typeface="微软雅黑" panose="020B0503020204020204" charset="-122"/>
                         </a:rPr>
                         <a:t>2306007108</a:t>
                       </a:r>
+                      <a:endParaRPr sz="1100">
+                        <a:latin typeface="微软雅黑" panose="020B0503020204020204" charset="-122"/>
+                        <a:ea typeface="微软雅黑" panose="020B0503020204020204" charset="-122"/>
+                        <a:cs typeface="微软雅黑" panose="020B0503020204020204" charset="-122"/>
+                      </a:endParaRPr>
                     </a:p>
                   </a:txBody>
                   <a:tcPr anchor="ctr">
@@ -9986,12 +10847,17 @@
                       <a:pPr algn="l"/>
                       <a:r>
                         <a:rPr sz="1100">
-                          <a:latin typeface="微软雅黑"/>
-                          <a:ea typeface="微软雅黑"/>
-                          <a:cs typeface="微软雅黑"/>
+                          <a:latin typeface="微软雅黑" panose="020B0503020204020204" charset="-122"/>
+                          <a:ea typeface="微软雅黑" panose="020B0503020204020204" charset="-122"/>
+                          <a:cs typeface="微软雅黑" panose="020B0503020204020204" charset="-122"/>
                         </a:rPr>
                         <a:t>系统全部功能代码实现：分层架构、双库接入、文档入库、RAG 问答、出题判题、错题本、复习计划、前端</a:t>
                       </a:r>
+                      <a:endParaRPr sz="1100">
+                        <a:latin typeface="微软雅黑" panose="020B0503020204020204" charset="-122"/>
+                        <a:ea typeface="微软雅黑" panose="020B0503020204020204" charset="-122"/>
+                        <a:cs typeface="微软雅黑" panose="020B0503020204020204" charset="-122"/>
+                      </a:endParaRPr>
                     </a:p>
                   </a:txBody>
                   <a:tcPr anchor="ctr">
@@ -10010,12 +10876,17 @@
                       <a:pPr algn="ctr"/>
                       <a:r>
                         <a:rPr sz="1100">
-                          <a:latin typeface="微软雅黑"/>
-                          <a:ea typeface="微软雅黑"/>
-                          <a:cs typeface="微软雅黑"/>
+                          <a:latin typeface="微软雅黑" panose="020B0503020204020204" charset="-122"/>
+                          <a:ea typeface="微软雅黑" panose="020B0503020204020204" charset="-122"/>
+                          <a:cs typeface="微软雅黑" panose="020B0503020204020204" charset="-122"/>
                         </a:rPr>
                         <a:t>3</a:t>
                       </a:r>
+                      <a:endParaRPr sz="1100">
+                        <a:latin typeface="微软雅黑" panose="020B0503020204020204" charset="-122"/>
+                        <a:ea typeface="微软雅黑" panose="020B0503020204020204" charset="-122"/>
+                        <a:cs typeface="微软雅黑" panose="020B0503020204020204" charset="-122"/>
+                      </a:endParaRPr>
                     </a:p>
                   </a:txBody>
                   <a:tcPr anchor="ctr">
@@ -10032,12 +10903,17 @@
                       <a:pPr algn="ctr"/>
                       <a:r>
                         <a:rPr sz="1100">
-                          <a:latin typeface="微软雅黑"/>
-                          <a:ea typeface="微软雅黑"/>
-                          <a:cs typeface="微软雅黑"/>
+                          <a:latin typeface="微软雅黑" panose="020B0503020204020204" charset="-122"/>
+                          <a:ea typeface="微软雅黑" panose="020B0503020204020204" charset="-122"/>
+                          <a:cs typeface="微软雅黑" panose="020B0503020204020204" charset="-122"/>
                         </a:rPr>
                         <a:t>霍飞腾</a:t>
                       </a:r>
+                      <a:endParaRPr sz="1100">
+                        <a:latin typeface="微软雅黑" panose="020B0503020204020204" charset="-122"/>
+                        <a:ea typeface="微软雅黑" panose="020B0503020204020204" charset="-122"/>
+                        <a:cs typeface="微软雅黑" panose="020B0503020204020204" charset="-122"/>
+                      </a:endParaRPr>
                     </a:p>
                   </a:txBody>
                   <a:tcPr anchor="ctr">
@@ -10054,12 +10930,17 @@
                       <a:pPr algn="ctr"/>
                       <a:r>
                         <a:rPr sz="1100">
-                          <a:latin typeface="微软雅黑"/>
-                          <a:ea typeface="微软雅黑"/>
-                          <a:cs typeface="微软雅黑"/>
+                          <a:latin typeface="微软雅黑" panose="020B0503020204020204" charset="-122"/>
+                          <a:ea typeface="微软雅黑" panose="020B0503020204020204" charset="-122"/>
+                          <a:cs typeface="微软雅黑" panose="020B0503020204020204" charset="-122"/>
                         </a:rPr>
                         <a:t>2306007127</a:t>
                       </a:r>
+                      <a:endParaRPr sz="1100">
+                        <a:latin typeface="微软雅黑" panose="020B0503020204020204" charset="-122"/>
+                        <a:ea typeface="微软雅黑" panose="020B0503020204020204" charset="-122"/>
+                        <a:cs typeface="微软雅黑" panose="020B0503020204020204" charset="-122"/>
+                      </a:endParaRPr>
                     </a:p>
                   </a:txBody>
                   <a:tcPr anchor="ctr">
@@ -10076,12 +10957,17 @@
                       <a:pPr algn="l"/>
                       <a:r>
                         <a:rPr sz="1100">
-                          <a:latin typeface="微软雅黑"/>
-                          <a:ea typeface="微软雅黑"/>
-                          <a:cs typeface="微软雅黑"/>
+                          <a:latin typeface="微软雅黑" panose="020B0503020204020204" charset="-122"/>
+                          <a:ea typeface="微软雅黑" panose="020B0503020204020204" charset="-122"/>
+                          <a:cs typeface="微软雅黑" panose="020B0503020204020204" charset="-122"/>
                         </a:rPr>
                         <a:t>系统测试与数据整理：测试用例设计与执行、记录结果数据、整理结果分析指标</a:t>
                       </a:r>
+                      <a:endParaRPr sz="1100">
+                        <a:latin typeface="微软雅黑" panose="020B0503020204020204" charset="-122"/>
+                        <a:ea typeface="微软雅黑" panose="020B0503020204020204" charset="-122"/>
+                        <a:cs typeface="微软雅黑" panose="020B0503020204020204" charset="-122"/>
+                      </a:endParaRPr>
                     </a:p>
                   </a:txBody>
                   <a:tcPr anchor="ctr">
@@ -10100,12 +10986,17 @@
                       <a:pPr algn="ctr"/>
                       <a:r>
                         <a:rPr sz="1100">
-                          <a:latin typeface="微软雅黑"/>
-                          <a:ea typeface="微软雅黑"/>
-                          <a:cs typeface="微软雅黑"/>
+                          <a:latin typeface="微软雅黑" panose="020B0503020204020204" charset="-122"/>
+                          <a:ea typeface="微软雅黑" panose="020B0503020204020204" charset="-122"/>
+                          <a:cs typeface="微软雅黑" panose="020B0503020204020204" charset="-122"/>
                         </a:rPr>
                         <a:t>4</a:t>
                       </a:r>
+                      <a:endParaRPr sz="1100">
+                        <a:latin typeface="微软雅黑" panose="020B0503020204020204" charset="-122"/>
+                        <a:ea typeface="微软雅黑" panose="020B0503020204020204" charset="-122"/>
+                        <a:cs typeface="微软雅黑" panose="020B0503020204020204" charset="-122"/>
+                      </a:endParaRPr>
                     </a:p>
                   </a:txBody>
                   <a:tcPr anchor="ctr">
@@ -10122,12 +11013,17 @@
                       <a:pPr algn="ctr"/>
                       <a:r>
                         <a:rPr sz="1100">
-                          <a:latin typeface="微软雅黑"/>
-                          <a:ea typeface="微软雅黑"/>
-                          <a:cs typeface="微软雅黑"/>
+                          <a:latin typeface="微软雅黑" panose="020B0503020204020204" charset="-122"/>
+                          <a:ea typeface="微软雅黑" panose="020B0503020204020204" charset="-122"/>
+                          <a:cs typeface="微软雅黑" panose="020B0503020204020204" charset="-122"/>
                         </a:rPr>
                         <a:t>陈果</a:t>
                       </a:r>
+                      <a:endParaRPr sz="1100">
+                        <a:latin typeface="微软雅黑" panose="020B0503020204020204" charset="-122"/>
+                        <a:ea typeface="微软雅黑" panose="020B0503020204020204" charset="-122"/>
+                        <a:cs typeface="微软雅黑" panose="020B0503020204020204" charset="-122"/>
+                      </a:endParaRPr>
                     </a:p>
                   </a:txBody>
                   <a:tcPr anchor="ctr">
@@ -10144,12 +11040,17 @@
                       <a:pPr algn="ctr"/>
                       <a:r>
                         <a:rPr sz="1100">
-                          <a:latin typeface="微软雅黑"/>
-                          <a:ea typeface="微软雅黑"/>
-                          <a:cs typeface="微软雅黑"/>
+                          <a:latin typeface="微软雅黑" panose="020B0503020204020204" charset="-122"/>
+                          <a:ea typeface="微软雅黑" panose="020B0503020204020204" charset="-122"/>
+                          <a:cs typeface="微软雅黑" panose="020B0503020204020204" charset="-122"/>
                         </a:rPr>
                         <a:t>2306007120</a:t>
                       </a:r>
+                      <a:endParaRPr sz="1100">
+                        <a:latin typeface="微软雅黑" panose="020B0503020204020204" charset="-122"/>
+                        <a:ea typeface="微软雅黑" panose="020B0503020204020204" charset="-122"/>
+                        <a:cs typeface="微软雅黑" panose="020B0503020204020204" charset="-122"/>
+                      </a:endParaRPr>
                     </a:p>
                   </a:txBody>
                   <a:tcPr anchor="ctr">
@@ -10166,12 +11067,17 @@
                       <a:pPr algn="l"/>
                       <a:r>
                         <a:rPr sz="1100">
-                          <a:latin typeface="微软雅黑"/>
-                          <a:ea typeface="微软雅黑"/>
-                          <a:cs typeface="微软雅黑"/>
+                          <a:latin typeface="微软雅黑" panose="020B0503020204020204" charset="-122"/>
+                          <a:ea typeface="微软雅黑" panose="020B0503020204020204" charset="-122"/>
+                          <a:cs typeface="微软雅黑" panose="020B0503020204020204" charset="-122"/>
                         </a:rPr>
                         <a:t>界面验证与使用文档：五页面操作验证、界面截图采集、使用说明与部署手册</a:t>
                       </a:r>
+                      <a:endParaRPr sz="1100">
+                        <a:latin typeface="微软雅黑" panose="020B0503020204020204" charset="-122"/>
+                        <a:ea typeface="微软雅黑" panose="020B0503020204020204" charset="-122"/>
+                        <a:cs typeface="微软雅黑" panose="020B0503020204020204" charset="-122"/>
+                      </a:endParaRPr>
                     </a:p>
                   </a:txBody>
                   <a:tcPr anchor="ctr">
@@ -10190,12 +11096,17 @@
                       <a:pPr algn="ctr"/>
                       <a:r>
                         <a:rPr sz="1100">
-                          <a:latin typeface="微软雅黑"/>
-                          <a:ea typeface="微软雅黑"/>
-                          <a:cs typeface="微软雅黑"/>
+                          <a:latin typeface="微软雅黑" panose="020B0503020204020204" charset="-122"/>
+                          <a:ea typeface="微软雅黑" panose="020B0503020204020204" charset="-122"/>
+                          <a:cs typeface="微软雅黑" panose="020B0503020204020204" charset="-122"/>
                         </a:rPr>
                         <a:t>5</a:t>
                       </a:r>
+                      <a:endParaRPr sz="1100">
+                        <a:latin typeface="微软雅黑" panose="020B0503020204020204" charset="-122"/>
+                        <a:ea typeface="微软雅黑" panose="020B0503020204020204" charset="-122"/>
+                        <a:cs typeface="微软雅黑" panose="020B0503020204020204" charset="-122"/>
+                      </a:endParaRPr>
                     </a:p>
                   </a:txBody>
                   <a:tcPr anchor="ctr">
@@ -10212,12 +11123,17 @@
                       <a:pPr algn="ctr"/>
                       <a:r>
                         <a:rPr sz="1100">
-                          <a:latin typeface="微软雅黑"/>
-                          <a:ea typeface="微软雅黑"/>
-                          <a:cs typeface="微软雅黑"/>
+                          <a:latin typeface="微软雅黑" panose="020B0503020204020204" charset="-122"/>
+                          <a:ea typeface="微软雅黑" panose="020B0503020204020204" charset="-122"/>
+                          <a:cs typeface="微软雅黑" panose="020B0503020204020204" charset="-122"/>
                         </a:rPr>
                         <a:t>刘纲正</a:t>
                       </a:r>
+                      <a:endParaRPr sz="1100">
+                        <a:latin typeface="微软雅黑" panose="020B0503020204020204" charset="-122"/>
+                        <a:ea typeface="微软雅黑" panose="020B0503020204020204" charset="-122"/>
+                        <a:cs typeface="微软雅黑" panose="020B0503020204020204" charset="-122"/>
+                      </a:endParaRPr>
                     </a:p>
                   </a:txBody>
                   <a:tcPr anchor="ctr">
@@ -10234,12 +11150,17 @@
                       <a:pPr algn="ctr"/>
                       <a:r>
                         <a:rPr sz="1100">
-                          <a:latin typeface="微软雅黑"/>
-                          <a:ea typeface="微软雅黑"/>
-                          <a:cs typeface="微软雅黑"/>
+                          <a:latin typeface="微软雅黑" panose="020B0503020204020204" charset="-122"/>
+                          <a:ea typeface="微软雅黑" panose="020B0503020204020204" charset="-122"/>
+                          <a:cs typeface="微软雅黑" panose="020B0503020204020204" charset="-122"/>
                         </a:rPr>
                         <a:t>2306007103</a:t>
                       </a:r>
+                      <a:endParaRPr sz="1100">
+                        <a:latin typeface="微软雅黑" panose="020B0503020204020204" charset="-122"/>
+                        <a:ea typeface="微软雅黑" panose="020B0503020204020204" charset="-122"/>
+                        <a:cs typeface="微软雅黑" panose="020B0503020204020204" charset="-122"/>
+                      </a:endParaRPr>
                     </a:p>
                   </a:txBody>
                   <a:tcPr anchor="ctr">
@@ -10256,12 +11177,17 @@
                       <a:pPr algn="l"/>
                       <a:r>
                         <a:rPr sz="1100">
-                          <a:latin typeface="微软雅黑"/>
-                          <a:ea typeface="微软雅黑"/>
-                          <a:cs typeface="微软雅黑"/>
+                          <a:latin typeface="微软雅黑" panose="020B0503020204020204" charset="-122"/>
+                          <a:ea typeface="微软雅黑" panose="020B0503020204020204" charset="-122"/>
+                          <a:cs typeface="微软雅黑" panose="020B0503020204020204" charset="-122"/>
                         </a:rPr>
                         <a:t>报告撰写与统稿：数据库三层建模设计、过程论述与结果分析撰写、全文统稿</a:t>
                       </a:r>
+                      <a:endParaRPr sz="1100">
+                        <a:latin typeface="微软雅黑" panose="020B0503020204020204" charset="-122"/>
+                        <a:ea typeface="微软雅黑" panose="020B0503020204020204" charset="-122"/>
+                        <a:cs typeface="微软雅黑" panose="020B0503020204020204" charset="-122"/>
+                      </a:endParaRPr>
                     </a:p>
                   </a:txBody>
                   <a:tcPr anchor="ctr">
@@ -10292,7 +11218,7 @@
           <a:noFill/>
         </p:spPr>
         <p:txBody>
-          <a:bodyPr wrap="square" anchor="t" lIns="0" rIns="0" tIns="0" bIns="0">
+          <a:bodyPr wrap="square" lIns="0" tIns="0" rIns="0" bIns="0" anchor="t">
             <a:spAutoFit/>
           </a:bodyPr>
           <a:lstStyle/>
@@ -10313,12 +11239,20 @@
                 <a:solidFill>
                   <a:srgbClr val="808080"/>
                 </a:solidFill>
-                <a:latin typeface="微软雅黑"/>
-                <a:ea typeface="微软雅黑"/>
-                <a:cs typeface="微软雅黑"/>
+                <a:latin typeface="微软雅黑" panose="020B0503020204020204" charset="-122"/>
+                <a:ea typeface="微软雅黑" panose="020B0503020204020204" charset="-122"/>
+                <a:cs typeface="微软雅黑" panose="020B0503020204020204" charset="-122"/>
               </a:rPr>
               <a:t>注：表格中标注“【姓名】”“【学号】”的位置需补全；各成员的功能模块建议对应独立的 Git 提交记录，便于体现贡献度。</a:t>
             </a:r>
+            <a:endParaRPr sz="1300" b="0">
+              <a:solidFill>
+                <a:srgbClr val="808080"/>
+              </a:solidFill>
+              <a:latin typeface="微软雅黑" panose="020B0503020204020204" charset="-122"/>
+              <a:ea typeface="微软雅黑" panose="020B0503020204020204" charset="-122"/>
+              <a:cs typeface="微软雅黑" panose="020B0503020204020204" charset="-122"/>
+            </a:endParaRPr>
           </a:p>
         </p:txBody>
       </p:sp>
@@ -10331,7 +11265,7 @@
 </file>
 
 <file path=ppt/slides/slide17.xml><?xml version="1.0" encoding="utf-8"?>
-<p:sld xmlns:a="http://schemas.openxmlformats.org/drawingml/2006/main" xmlns:p="http://schemas.openxmlformats.org/presentationml/2006/main" xmlns:r="http://schemas.openxmlformats.org/officeDocument/2006/relationships">
+<p:sld xmlns:a="http://schemas.openxmlformats.org/drawingml/2006/main" xmlns:r="http://schemas.openxmlformats.org/officeDocument/2006/relationships" xmlns:p="http://schemas.openxmlformats.org/presentationml/2006/main">
   <p:cSld>
     <p:spTree>
       <p:nvGrpSpPr>
@@ -10357,7 +11291,7 @@
           <a:noFill/>
         </p:spPr>
         <p:txBody>
-          <a:bodyPr wrap="square" anchor="t" lIns="0" rIns="0" tIns="0" bIns="0">
+          <a:bodyPr wrap="square" lIns="0" tIns="0" rIns="0" bIns="0" anchor="t">
             <a:spAutoFit/>
           </a:bodyPr>
           <a:lstStyle/>
@@ -10378,10 +11312,16 @@
                 <a:solidFill>
                   <a:srgbClr val="808080"/>
                 </a:solidFill>
-                <a:latin typeface="微软雅黑"/>
+                <a:latin typeface="微软雅黑" panose="020B0503020204020204" charset="-122"/>
               </a:rPr>
               <a:t>17</a:t>
             </a:r>
+            <a:endParaRPr sz="1000">
+              <a:solidFill>
+                <a:srgbClr val="808080"/>
+              </a:solidFill>
+              <a:latin typeface="微软雅黑" panose="020B0503020204020204" charset="-122"/>
+            </a:endParaRPr>
           </a:p>
         </p:txBody>
       </p:sp>
@@ -10446,7 +11386,7 @@
           <a:noFill/>
         </p:spPr>
         <p:txBody>
-          <a:bodyPr wrap="square" anchor="ctr" lIns="0" rIns="0" tIns="0" bIns="0">
+          <a:bodyPr wrap="square" lIns="0" tIns="0" rIns="0" bIns="0" anchor="ctr">
             <a:spAutoFit/>
           </a:bodyPr>
           <a:lstStyle/>
@@ -10467,12 +11407,20 @@
                 <a:solidFill>
                   <a:srgbClr val="FFFFFF"/>
                 </a:solidFill>
-                <a:latin typeface="微软雅黑"/>
-                <a:ea typeface="微软雅黑"/>
-                <a:cs typeface="微软雅黑"/>
+                <a:latin typeface="微软雅黑" panose="020B0503020204020204" charset="-122"/>
+                <a:ea typeface="微软雅黑" panose="020B0503020204020204" charset="-122"/>
+                <a:cs typeface="微软雅黑" panose="020B0503020204020204" charset="-122"/>
               </a:rPr>
               <a:t>感谢各位老师的聆听与指导</a:t>
             </a:r>
+            <a:endParaRPr sz="4000" b="1">
+              <a:solidFill>
+                <a:srgbClr val="FFFFFF"/>
+              </a:solidFill>
+              <a:latin typeface="微软雅黑" panose="020B0503020204020204" charset="-122"/>
+              <a:ea typeface="微软雅黑" panose="020B0503020204020204" charset="-122"/>
+              <a:cs typeface="微软雅黑" panose="020B0503020204020204" charset="-122"/>
+            </a:endParaRPr>
           </a:p>
         </p:txBody>
       </p:sp>
@@ -10493,7 +11441,7 @@
           <a:noFill/>
         </p:spPr>
         <p:txBody>
-          <a:bodyPr wrap="square" anchor="ctr" lIns="0" rIns="0" tIns="0" bIns="0">
+          <a:bodyPr wrap="square" lIns="0" tIns="0" rIns="0" bIns="0" anchor="ctr">
             <a:spAutoFit/>
           </a:bodyPr>
           <a:lstStyle/>
@@ -10514,12 +11462,20 @@
                 <a:solidFill>
                   <a:srgbClr val="BDD7EE"/>
                 </a:solidFill>
-                <a:latin typeface="微软雅黑"/>
-                <a:ea typeface="微软雅黑"/>
-                <a:cs typeface="微软雅黑"/>
+                <a:latin typeface="微软雅黑" panose="020B0503020204020204" charset="-122"/>
+                <a:ea typeface="微软雅黑" panose="020B0503020204020204" charset="-122"/>
+                <a:cs typeface="微软雅黑" panose="020B0503020204020204" charset="-122"/>
               </a:rPr>
               <a:t>敬请批评指正</a:t>
             </a:r>
+            <a:endParaRPr sz="2400" b="0">
+              <a:solidFill>
+                <a:srgbClr val="BDD7EE"/>
+              </a:solidFill>
+              <a:latin typeface="微软雅黑" panose="020B0503020204020204" charset="-122"/>
+              <a:ea typeface="微软雅黑" panose="020B0503020204020204" charset="-122"/>
+              <a:cs typeface="微软雅黑" panose="020B0503020204020204" charset="-122"/>
+            </a:endParaRPr>
           </a:p>
           <a:p>
             <a:pPr algn="ctr">
@@ -10538,12 +11494,20 @@
                 <a:solidFill>
                   <a:srgbClr val="BDD7EE"/>
                 </a:solidFill>
-                <a:latin typeface="微软雅黑"/>
-                <a:ea typeface="微软雅黑"/>
-                <a:cs typeface="微软雅黑"/>
+                <a:latin typeface="微软雅黑" panose="020B0503020204020204" charset="-122"/>
+                <a:ea typeface="微软雅黑" panose="020B0503020204020204" charset="-122"/>
+                <a:cs typeface="微软雅黑" panose="020B0503020204020204" charset="-122"/>
               </a:rPr>
               <a:t>第 1 组 · 智学助手</a:t>
             </a:r>
+            <a:endParaRPr sz="1800" b="0">
+              <a:solidFill>
+                <a:srgbClr val="BDD7EE"/>
+              </a:solidFill>
+              <a:latin typeface="微软雅黑" panose="020B0503020204020204" charset="-122"/>
+              <a:ea typeface="微软雅黑" panose="020B0503020204020204" charset="-122"/>
+              <a:cs typeface="微软雅黑" panose="020B0503020204020204" charset="-122"/>
+            </a:endParaRPr>
           </a:p>
         </p:txBody>
       </p:sp>
@@ -10556,7 +11520,7 @@
 </file>
 
 <file path=ppt/slides/slide2.xml><?xml version="1.0" encoding="utf-8"?>
-<p:sld xmlns:a="http://schemas.openxmlformats.org/drawingml/2006/main" xmlns:p="http://schemas.openxmlformats.org/presentationml/2006/main" xmlns:r="http://schemas.openxmlformats.org/officeDocument/2006/relationships">
+<p:sld xmlns:a="http://schemas.openxmlformats.org/drawingml/2006/main" xmlns:r="http://schemas.openxmlformats.org/officeDocument/2006/relationships" xmlns:p="http://schemas.openxmlformats.org/presentationml/2006/main">
   <p:cSld>
     <p:spTree>
       <p:nvGrpSpPr>
@@ -10626,7 +11590,7 @@
           <a:noFill/>
         </p:spPr>
         <p:txBody>
-          <a:bodyPr wrap="square" anchor="ctr" lIns="0" rIns="0" tIns="0" bIns="0">
+          <a:bodyPr wrap="square" lIns="0" tIns="0" rIns="0" bIns="0" anchor="ctr">
             <a:spAutoFit/>
           </a:bodyPr>
           <a:lstStyle/>
@@ -10647,12 +11611,20 @@
                 <a:solidFill>
                   <a:srgbClr val="FFFFFF"/>
                 </a:solidFill>
-                <a:latin typeface="微软雅黑"/>
-                <a:ea typeface="微软雅黑"/>
-                <a:cs typeface="微软雅黑"/>
+                <a:latin typeface="微软雅黑" panose="020B0503020204020204" charset="-122"/>
+                <a:ea typeface="微软雅黑" panose="020B0503020204020204" charset="-122"/>
+                <a:cs typeface="微软雅黑" panose="020B0503020204020204" charset="-122"/>
               </a:rPr>
               <a:t>目录</a:t>
             </a:r>
+            <a:endParaRPr sz="2600" b="1">
+              <a:solidFill>
+                <a:srgbClr val="FFFFFF"/>
+              </a:solidFill>
+              <a:latin typeface="微软雅黑" panose="020B0503020204020204" charset="-122"/>
+              <a:ea typeface="微软雅黑" panose="020B0503020204020204" charset="-122"/>
+              <a:cs typeface="微软雅黑" panose="020B0503020204020204" charset="-122"/>
+            </a:endParaRPr>
           </a:p>
         </p:txBody>
       </p:sp>
@@ -10673,7 +11645,7 @@
           <a:noFill/>
         </p:spPr>
         <p:txBody>
-          <a:bodyPr wrap="square" anchor="ctr" lIns="0" rIns="0" tIns="0" bIns="0">
+          <a:bodyPr wrap="square" lIns="0" tIns="0" rIns="0" bIns="0" anchor="ctr">
             <a:spAutoFit/>
           </a:bodyPr>
           <a:lstStyle/>
@@ -10694,12 +11666,20 @@
                 <a:solidFill>
                   <a:srgbClr val="BDD7EE"/>
                 </a:solidFill>
-                <a:latin typeface="微软雅黑"/>
-                <a:ea typeface="微软雅黑"/>
-                <a:cs typeface="微软雅黑"/>
+                <a:latin typeface="微软雅黑" panose="020B0503020204020204" charset="-122"/>
+                <a:ea typeface="微软雅黑" panose="020B0503020204020204" charset="-122"/>
+                <a:cs typeface="微软雅黑" panose="020B0503020204020204" charset="-122"/>
               </a:rPr>
               <a:t>Contents</a:t>
             </a:r>
+            <a:endParaRPr sz="1300" b="0">
+              <a:solidFill>
+                <a:srgbClr val="BDD7EE"/>
+              </a:solidFill>
+              <a:latin typeface="微软雅黑" panose="020B0503020204020204" charset="-122"/>
+              <a:ea typeface="微软雅黑" panose="020B0503020204020204" charset="-122"/>
+              <a:cs typeface="微软雅黑" panose="020B0503020204020204" charset="-122"/>
+            </a:endParaRPr>
           </a:p>
         </p:txBody>
       </p:sp>
@@ -10720,7 +11700,7 @@
           <a:noFill/>
         </p:spPr>
         <p:txBody>
-          <a:bodyPr wrap="square" anchor="t" lIns="0" rIns="0" tIns="0" bIns="0">
+          <a:bodyPr wrap="square" lIns="0" tIns="0" rIns="0" bIns="0" anchor="t">
             <a:spAutoFit/>
           </a:bodyPr>
           <a:lstStyle/>
@@ -10741,10 +11721,16 @@
                 <a:solidFill>
                   <a:srgbClr val="808080"/>
                 </a:solidFill>
-                <a:latin typeface="微软雅黑"/>
+                <a:latin typeface="微软雅黑" panose="020B0503020204020204" charset="-122"/>
               </a:rPr>
               <a:t>2</a:t>
             </a:r>
+            <a:endParaRPr sz="1000">
+              <a:solidFill>
+                <a:srgbClr val="808080"/>
+              </a:solidFill>
+              <a:latin typeface="微软雅黑" panose="020B0503020204020204" charset="-122"/>
+            </a:endParaRPr>
           </a:p>
         </p:txBody>
       </p:sp>
@@ -10765,7 +11751,7 @@
           <a:noFill/>
         </p:spPr>
         <p:txBody>
-          <a:bodyPr wrap="square" anchor="t" lIns="0" rIns="0" tIns="0" bIns="0">
+          <a:bodyPr wrap="square" lIns="0" tIns="0" rIns="0" bIns="0" anchor="t">
             <a:spAutoFit/>
           </a:bodyPr>
           <a:lstStyle/>
@@ -10783,9 +11769,9 @@
                 <a:solidFill>
                   <a:srgbClr val="1F4E79"/>
                 </a:solidFill>
-                <a:latin typeface="微软雅黑"/>
-                <a:ea typeface="微软雅黑"/>
-                <a:cs typeface="微软雅黑"/>
+                <a:latin typeface="微软雅黑" panose="020B0503020204020204" charset="-122"/>
+                <a:ea typeface="微软雅黑" panose="020B0503020204020204" charset="-122"/>
+                <a:cs typeface="微软雅黑" panose="020B0503020204020204" charset="-122"/>
               </a:rPr>
               <a:t>1　选题背景与意义</a:t>
             </a:r>
@@ -10794,12 +11780,20 @@
                 <a:solidFill>
                   <a:srgbClr val="808080"/>
                 </a:solidFill>
-                <a:latin typeface="微软雅黑"/>
-                <a:ea typeface="微软雅黑"/>
-                <a:cs typeface="微软雅黑"/>
+                <a:latin typeface="微软雅黑" panose="020B0503020204020204" charset="-122"/>
+                <a:ea typeface="微软雅黑" panose="020B0503020204020204" charset="-122"/>
+                <a:cs typeface="微软雅黑" panose="020B0503020204020204" charset="-122"/>
               </a:rPr>
               <a:t>　——　项目来源、待解决的主要问题</a:t>
             </a:r>
+            <a:endParaRPr sz="1400" b="0">
+              <a:solidFill>
+                <a:srgbClr val="808080"/>
+              </a:solidFill>
+              <a:latin typeface="微软雅黑" panose="020B0503020204020204" charset="-122"/>
+              <a:ea typeface="微软雅黑" panose="020B0503020204020204" charset="-122"/>
+              <a:cs typeface="微软雅黑" panose="020B0503020204020204" charset="-122"/>
+            </a:endParaRPr>
           </a:p>
           <a:p>
             <a:pPr>
@@ -10815,9 +11809,9 @@
                 <a:solidFill>
                   <a:srgbClr val="1F4E79"/>
                 </a:solidFill>
-                <a:latin typeface="微软雅黑"/>
-                <a:ea typeface="微软雅黑"/>
-                <a:cs typeface="微软雅黑"/>
+                <a:latin typeface="微软雅黑" panose="020B0503020204020204" charset="-122"/>
+                <a:ea typeface="微软雅黑" panose="020B0503020204020204" charset="-122"/>
+                <a:cs typeface="微软雅黑" panose="020B0503020204020204" charset="-122"/>
               </a:rPr>
               <a:t>2　系统总体架构与技术选型</a:t>
             </a:r>
@@ -10826,12 +11820,20 @@
                 <a:solidFill>
                   <a:srgbClr val="808080"/>
                 </a:solidFill>
-                <a:latin typeface="微软雅黑"/>
-                <a:ea typeface="微软雅黑"/>
-                <a:cs typeface="微软雅黑"/>
+                <a:latin typeface="微软雅黑" panose="020B0503020204020204" charset="-122"/>
+                <a:ea typeface="微软雅黑" panose="020B0503020204020204" charset="-122"/>
+                <a:cs typeface="微软雅黑" panose="020B0503020204020204" charset="-122"/>
               </a:rPr>
               <a:t>　——　B/S 三层架构、双库存储</a:t>
             </a:r>
+            <a:endParaRPr sz="1400" b="0">
+              <a:solidFill>
+                <a:srgbClr val="808080"/>
+              </a:solidFill>
+              <a:latin typeface="微软雅黑" panose="020B0503020204020204" charset="-122"/>
+              <a:ea typeface="微软雅黑" panose="020B0503020204020204" charset="-122"/>
+              <a:cs typeface="微软雅黑" panose="020B0503020204020204" charset="-122"/>
+            </a:endParaRPr>
           </a:p>
           <a:p>
             <a:pPr>
@@ -10847,9 +11849,9 @@
                 <a:solidFill>
                   <a:srgbClr val="1F4E79"/>
                 </a:solidFill>
-                <a:latin typeface="微软雅黑"/>
-                <a:ea typeface="微软雅黑"/>
-                <a:cs typeface="微软雅黑"/>
+                <a:latin typeface="微软雅黑" panose="020B0503020204020204" charset="-122"/>
+                <a:ea typeface="微软雅黑" panose="020B0503020204020204" charset="-122"/>
+                <a:cs typeface="微软雅黑" panose="020B0503020204020204" charset="-122"/>
               </a:rPr>
               <a:t>3　核心原理：检索增强生成（RAG）</a:t>
             </a:r>
@@ -10858,12 +11860,20 @@
                 <a:solidFill>
                   <a:srgbClr val="808080"/>
                 </a:solidFill>
-                <a:latin typeface="微软雅黑"/>
-                <a:ea typeface="微软雅黑"/>
-                <a:cs typeface="微软雅黑"/>
+                <a:latin typeface="微软雅黑" panose="020B0503020204020204" charset="-122"/>
+                <a:ea typeface="微软雅黑" panose="020B0503020204020204" charset="-122"/>
+                <a:cs typeface="微软雅黑" panose="020B0503020204020204" charset="-122"/>
               </a:rPr>
               <a:t>　——　离线索引与在线问答两阶段</a:t>
             </a:r>
+            <a:endParaRPr sz="1400" b="0">
+              <a:solidFill>
+                <a:srgbClr val="808080"/>
+              </a:solidFill>
+              <a:latin typeface="微软雅黑" panose="020B0503020204020204" charset="-122"/>
+              <a:ea typeface="微软雅黑" panose="020B0503020204020204" charset="-122"/>
+              <a:cs typeface="微软雅黑" panose="020B0503020204020204" charset="-122"/>
+            </a:endParaRPr>
           </a:p>
           <a:p>
             <a:pPr>
@@ -10879,9 +11889,9 @@
                 <a:solidFill>
                   <a:srgbClr val="1F4E79"/>
                 </a:solidFill>
-                <a:latin typeface="微软雅黑"/>
-                <a:ea typeface="微软雅黑"/>
-                <a:cs typeface="微软雅黑"/>
+                <a:latin typeface="微软雅黑" panose="020B0503020204020204" charset="-122"/>
+                <a:ea typeface="微软雅黑" panose="020B0503020204020204" charset="-122"/>
+                <a:cs typeface="微软雅黑" panose="020B0503020204020204" charset="-122"/>
               </a:rPr>
               <a:t>4　数据库设计</a:t>
             </a:r>
@@ -10890,12 +11900,20 @@
                 <a:solidFill>
                   <a:srgbClr val="808080"/>
                 </a:solidFill>
-                <a:latin typeface="微软雅黑"/>
-                <a:ea typeface="微软雅黑"/>
-                <a:cs typeface="微软雅黑"/>
+                <a:latin typeface="微软雅黑" panose="020B0503020204020204" charset="-122"/>
+                <a:ea typeface="微软雅黑" panose="020B0503020204020204" charset="-122"/>
+                <a:cs typeface="微软雅黑" panose="020B0503020204020204" charset="-122"/>
               </a:rPr>
               <a:t>　——　E-R 图、CDM 图、PDM 表结构</a:t>
             </a:r>
+            <a:endParaRPr sz="1400" b="0">
+              <a:solidFill>
+                <a:srgbClr val="808080"/>
+              </a:solidFill>
+              <a:latin typeface="微软雅黑" panose="020B0503020204020204" charset="-122"/>
+              <a:ea typeface="微软雅黑" panose="020B0503020204020204" charset="-122"/>
+              <a:cs typeface="微软雅黑" panose="020B0503020204020204" charset="-122"/>
+            </a:endParaRPr>
           </a:p>
           <a:p>
             <a:pPr>
@@ -10911,9 +11929,9 @@
                 <a:solidFill>
                   <a:srgbClr val="1F4E79"/>
                 </a:solidFill>
-                <a:latin typeface="微软雅黑"/>
-                <a:ea typeface="微软雅黑"/>
-                <a:cs typeface="微软雅黑"/>
+                <a:latin typeface="微软雅黑" panose="020B0503020204020204" charset="-122"/>
+                <a:ea typeface="微软雅黑" panose="020B0503020204020204" charset="-122"/>
+                <a:cs typeface="微软雅黑" panose="020B0503020204020204" charset="-122"/>
               </a:rPr>
               <a:t>5　功能模块设计与实现</a:t>
             </a:r>
@@ -10922,12 +11940,20 @@
                 <a:solidFill>
                   <a:srgbClr val="808080"/>
                 </a:solidFill>
-                <a:latin typeface="微软雅黑"/>
-                <a:ea typeface="微软雅黑"/>
-                <a:cs typeface="微软雅黑"/>
+                <a:latin typeface="微软雅黑" panose="020B0503020204020204" charset="-122"/>
+                <a:ea typeface="微软雅黑" panose="020B0503020204020204" charset="-122"/>
+                <a:cs typeface="微软雅黑" panose="020B0503020204020204" charset="-122"/>
               </a:rPr>
               <a:t>　——　F1–F5 五大功能模块</a:t>
             </a:r>
+            <a:endParaRPr sz="1400" b="0">
+              <a:solidFill>
+                <a:srgbClr val="808080"/>
+              </a:solidFill>
+              <a:latin typeface="微软雅黑" panose="020B0503020204020204" charset="-122"/>
+              <a:ea typeface="微软雅黑" panose="020B0503020204020204" charset="-122"/>
+              <a:cs typeface="微软雅黑" panose="020B0503020204020204" charset="-122"/>
+            </a:endParaRPr>
           </a:p>
           <a:p>
             <a:pPr>
@@ -10943,9 +11969,9 @@
                 <a:solidFill>
                   <a:srgbClr val="1F4E79"/>
                 </a:solidFill>
-                <a:latin typeface="微软雅黑"/>
-                <a:ea typeface="微软雅黑"/>
-                <a:cs typeface="微软雅黑"/>
+                <a:latin typeface="微软雅黑" panose="020B0503020204020204" charset="-122"/>
+                <a:ea typeface="微软雅黑" panose="020B0503020204020204" charset="-122"/>
+                <a:cs typeface="微软雅黑" panose="020B0503020204020204" charset="-122"/>
               </a:rPr>
               <a:t>6　系统测试与结果分析　——　</a:t>
             </a:r>
@@ -10954,12 +11980,20 @@
                 <a:solidFill>
                   <a:srgbClr val="808080"/>
                 </a:solidFill>
-                <a:latin typeface="微软雅黑"/>
-                <a:ea typeface="微软雅黑"/>
-                <a:cs typeface="微软雅黑"/>
+                <a:latin typeface="微软雅黑" panose="020B0503020204020204" charset="-122"/>
+                <a:ea typeface="微软雅黑" panose="020B0503020204020204" charset="-122"/>
+                <a:cs typeface="微软雅黑" panose="020B0503020204020204" charset="-122"/>
               </a:rPr>
               <a:t>测试用例、数据与分析结论</a:t>
             </a:r>
+            <a:endParaRPr sz="1400">
+              <a:solidFill>
+                <a:srgbClr val="808080"/>
+              </a:solidFill>
+              <a:latin typeface="微软雅黑" panose="020B0503020204020204" charset="-122"/>
+              <a:ea typeface="微软雅黑" panose="020B0503020204020204" charset="-122"/>
+              <a:cs typeface="微软雅黑" panose="020B0503020204020204" charset="-122"/>
+            </a:endParaRPr>
           </a:p>
           <a:p>
             <a:pPr>
@@ -10975,9 +12009,9 @@
                 <a:solidFill>
                   <a:srgbClr val="1F4E79"/>
                 </a:solidFill>
-                <a:latin typeface="微软雅黑"/>
-                <a:ea typeface="微软雅黑"/>
-                <a:cs typeface="微软雅黑"/>
+                <a:latin typeface="微软雅黑" panose="020B0503020204020204" charset="-122"/>
+                <a:ea typeface="微软雅黑" panose="020B0503020204020204" charset="-122"/>
+                <a:cs typeface="微软雅黑" panose="020B0503020204020204" charset="-122"/>
               </a:rPr>
               <a:t>7　总结与展望</a:t>
             </a:r>
@@ -10986,12 +12020,20 @@
                 <a:solidFill>
                   <a:srgbClr val="808080"/>
                 </a:solidFill>
-                <a:latin typeface="微软雅黑"/>
-                <a:ea typeface="微软雅黑"/>
-                <a:cs typeface="微软雅黑"/>
+                <a:latin typeface="微软雅黑" panose="020B0503020204020204" charset="-122"/>
+                <a:ea typeface="微软雅黑" panose="020B0503020204020204" charset="-122"/>
+                <a:cs typeface="微软雅黑" panose="020B0503020204020204" charset="-122"/>
               </a:rPr>
               <a:t>　——　成果总结、后续改进方向</a:t>
             </a:r>
+            <a:endParaRPr sz="1400" b="0">
+              <a:solidFill>
+                <a:srgbClr val="808080"/>
+              </a:solidFill>
+              <a:latin typeface="微软雅黑" panose="020B0503020204020204" charset="-122"/>
+              <a:ea typeface="微软雅黑" panose="020B0503020204020204" charset="-122"/>
+              <a:cs typeface="微软雅黑" panose="020B0503020204020204" charset="-122"/>
+            </a:endParaRPr>
           </a:p>
         </p:txBody>
       </p:sp>
@@ -11004,7 +12046,7 @@
 </file>
 
 <file path=ppt/slides/slide3.xml><?xml version="1.0" encoding="utf-8"?>
-<p:sld xmlns:a="http://schemas.openxmlformats.org/drawingml/2006/main" xmlns:p="http://schemas.openxmlformats.org/presentationml/2006/main" xmlns:r="http://schemas.openxmlformats.org/officeDocument/2006/relationships">
+<p:sld xmlns:a="http://schemas.openxmlformats.org/drawingml/2006/main" xmlns:r="http://schemas.openxmlformats.org/officeDocument/2006/relationships" xmlns:p="http://schemas.openxmlformats.org/presentationml/2006/main">
   <p:cSld>
     <p:spTree>
       <p:nvGrpSpPr>
@@ -11074,7 +12116,7 @@
           <a:noFill/>
         </p:spPr>
         <p:txBody>
-          <a:bodyPr wrap="square" anchor="ctr" lIns="0" rIns="0" tIns="0" bIns="0">
+          <a:bodyPr wrap="square" lIns="0" tIns="0" rIns="0" bIns="0" anchor="ctr">
             <a:spAutoFit/>
           </a:bodyPr>
           <a:lstStyle/>
@@ -11095,12 +12137,20 @@
                 <a:solidFill>
                   <a:srgbClr val="FFFFFF"/>
                 </a:solidFill>
-                <a:latin typeface="微软雅黑"/>
-                <a:ea typeface="微软雅黑"/>
-                <a:cs typeface="微软雅黑"/>
+                <a:latin typeface="微软雅黑" panose="020B0503020204020204" charset="-122"/>
+                <a:ea typeface="微软雅黑" panose="020B0503020204020204" charset="-122"/>
+                <a:cs typeface="微软雅黑" panose="020B0503020204020204" charset="-122"/>
               </a:rPr>
               <a:t>1　选题背景与意义</a:t>
             </a:r>
+            <a:endParaRPr sz="2600" b="1">
+              <a:solidFill>
+                <a:srgbClr val="FFFFFF"/>
+              </a:solidFill>
+              <a:latin typeface="微软雅黑" panose="020B0503020204020204" charset="-122"/>
+              <a:ea typeface="微软雅黑" panose="020B0503020204020204" charset="-122"/>
+              <a:cs typeface="微软雅黑" panose="020B0503020204020204" charset="-122"/>
+            </a:endParaRPr>
           </a:p>
         </p:txBody>
       </p:sp>
@@ -11121,7 +12171,7 @@
           <a:noFill/>
         </p:spPr>
         <p:txBody>
-          <a:bodyPr wrap="square" anchor="t" lIns="0" rIns="0" tIns="0" bIns="0">
+          <a:bodyPr wrap="square" lIns="0" tIns="0" rIns="0" bIns="0" anchor="t">
             <a:spAutoFit/>
           </a:bodyPr>
           <a:lstStyle/>
@@ -11142,10 +12192,16 @@
                 <a:solidFill>
                   <a:srgbClr val="808080"/>
                 </a:solidFill>
-                <a:latin typeface="微软雅黑"/>
+                <a:latin typeface="微软雅黑" panose="020B0503020204020204" charset="-122"/>
               </a:rPr>
               <a:t>3</a:t>
             </a:r>
+            <a:endParaRPr sz="1000">
+              <a:solidFill>
+                <a:srgbClr val="808080"/>
+              </a:solidFill>
+              <a:latin typeface="微软雅黑" panose="020B0503020204020204" charset="-122"/>
+            </a:endParaRPr>
           </a:p>
         </p:txBody>
       </p:sp>
@@ -11166,7 +12222,7 @@
           <a:noFill/>
         </p:spPr>
         <p:txBody>
-          <a:bodyPr wrap="square" anchor="t" lIns="0" rIns="0" tIns="0" bIns="0">
+          <a:bodyPr wrap="square" lIns="0" tIns="0" rIns="0" bIns="0" anchor="t">
             <a:spAutoFit/>
           </a:bodyPr>
           <a:lstStyle/>
@@ -11187,12 +12243,20 @@
                 <a:solidFill>
                   <a:srgbClr val="1F4E79"/>
                 </a:solidFill>
-                <a:latin typeface="微软雅黑"/>
-                <a:ea typeface="微软雅黑"/>
-                <a:cs typeface="微软雅黑"/>
+                <a:latin typeface="微软雅黑" panose="020B0503020204020204" charset="-122"/>
+                <a:ea typeface="微软雅黑" panose="020B0503020204020204" charset="-122"/>
+                <a:cs typeface="微软雅黑" panose="020B0503020204020204" charset="-122"/>
               </a:rPr>
               <a:t>• 课程资料多源异构（PDF / Word / Markdown / TXT），目录式与关键词检索只能匹配字面表述，难以按语义定位知识点</a:t>
             </a:r>
+            <a:endParaRPr sz="1600" b="1">
+              <a:solidFill>
+                <a:srgbClr val="1F4E79"/>
+              </a:solidFill>
+              <a:latin typeface="微软雅黑" panose="020B0503020204020204" charset="-122"/>
+              <a:ea typeface="微软雅黑" panose="020B0503020204020204" charset="-122"/>
+              <a:cs typeface="微软雅黑" panose="020B0503020204020204" charset="-122"/>
+            </a:endParaRPr>
           </a:p>
           <a:p>
             <a:pPr algn="l">
@@ -11211,12 +12275,20 @@
                 <a:solidFill>
                   <a:srgbClr val="1F4E79"/>
                 </a:solidFill>
-                <a:latin typeface="微软雅黑"/>
-                <a:ea typeface="微软雅黑"/>
-                <a:cs typeface="微软雅黑"/>
+                <a:latin typeface="微软雅黑" panose="020B0503020204020204" charset="-122"/>
+                <a:ea typeface="微软雅黑" panose="020B0503020204020204" charset="-122"/>
+                <a:cs typeface="微软雅黑" panose="020B0503020204020204" charset="-122"/>
               </a:rPr>
               <a:t>• 通用大语言模型不了解私有课程资料，直接提问易产生“幻觉”，且回答无法给出出处、难以溯源</a:t>
             </a:r>
+            <a:endParaRPr sz="1600" b="1">
+              <a:solidFill>
+                <a:srgbClr val="1F4E79"/>
+              </a:solidFill>
+              <a:latin typeface="微软雅黑" panose="020B0503020204020204" charset="-122"/>
+              <a:ea typeface="微软雅黑" panose="020B0503020204020204" charset="-122"/>
+              <a:cs typeface="微软雅黑" panose="020B0503020204020204" charset="-122"/>
+            </a:endParaRPr>
           </a:p>
           <a:p>
             <a:pPr algn="l">
@@ -11235,12 +12307,20 @@
                 <a:solidFill>
                   <a:srgbClr val="1F4E79"/>
                 </a:solidFill>
-                <a:latin typeface="微软雅黑"/>
-                <a:ea typeface="微软雅黑"/>
-                <a:cs typeface="微软雅黑"/>
+                <a:latin typeface="微软雅黑" panose="020B0503020204020204" charset="-122"/>
+                <a:ea typeface="微软雅黑" panose="020B0503020204020204" charset="-122"/>
+                <a:cs typeface="微软雅黑" panose="020B0503020204020204" charset="-122"/>
               </a:rPr>
               <a:t>• 错题散落各处、无法自动沉淀，复习缺少计划性，容易陷入“学了就忘、错了再错”的低效循环</a:t>
             </a:r>
+            <a:endParaRPr sz="1600" b="1">
+              <a:solidFill>
+                <a:srgbClr val="1F4E79"/>
+              </a:solidFill>
+              <a:latin typeface="微软雅黑" panose="020B0503020204020204" charset="-122"/>
+              <a:ea typeface="微软雅黑" panose="020B0503020204020204" charset="-122"/>
+              <a:cs typeface="微软雅黑" panose="020B0503020204020204" charset="-122"/>
+            </a:endParaRPr>
           </a:p>
         </p:txBody>
       </p:sp>
@@ -11305,7 +12385,7 @@
           <a:noFill/>
         </p:spPr>
         <p:txBody>
-          <a:bodyPr wrap="square" anchor="t" lIns="0" rIns="0" tIns="0" bIns="0">
+          <a:bodyPr wrap="square" lIns="0" tIns="0" rIns="0" bIns="0" anchor="t">
             <a:spAutoFit/>
           </a:bodyPr>
           <a:lstStyle/>
@@ -11326,12 +12406,20 @@
                 <a:solidFill>
                   <a:srgbClr val="2E75B6"/>
                 </a:solidFill>
-                <a:latin typeface="微软雅黑"/>
-                <a:ea typeface="微软雅黑"/>
-                <a:cs typeface="微软雅黑"/>
+                <a:latin typeface="微软雅黑" panose="020B0503020204020204" charset="-122"/>
+                <a:ea typeface="微软雅黑" panose="020B0503020204020204" charset="-122"/>
+                <a:cs typeface="微软雅黑" panose="020B0503020204020204" charset="-122"/>
               </a:rPr>
               <a:t>本课题的解决思路</a:t>
             </a:r>
+            <a:endParaRPr sz="1800" b="1">
+              <a:solidFill>
+                <a:srgbClr val="2E75B6"/>
+              </a:solidFill>
+              <a:latin typeface="微软雅黑" panose="020B0503020204020204" charset="-122"/>
+              <a:ea typeface="微软雅黑" panose="020B0503020204020204" charset="-122"/>
+              <a:cs typeface="微软雅黑" panose="020B0503020204020204" charset="-122"/>
+            </a:endParaRPr>
           </a:p>
           <a:p>
             <a:pPr algn="l">
@@ -11350,12 +12438,20 @@
                 <a:solidFill>
                   <a:srgbClr val="222222"/>
                 </a:solidFill>
-                <a:latin typeface="微软雅黑"/>
-                <a:ea typeface="微软雅黑"/>
-                <a:cs typeface="微软雅黑"/>
+                <a:latin typeface="微软雅黑" panose="020B0503020204020204" charset="-122"/>
+                <a:ea typeface="微软雅黑" panose="020B0503020204020204" charset="-122"/>
+                <a:cs typeface="微软雅黑" panose="020B0503020204020204" charset="-122"/>
               </a:rPr>
               <a:t>以检索增强生成（RAG）为主线技术，将课程资料向量化构建专属知识库，使回答与题目均“有据可依”；围绕“学、问、练、测、复”五个环节构建完整学习闭环，把资料检索、知识问答、自动出题、错题沉淀与复习规划串成连续链路。</a:t>
             </a:r>
+            <a:endParaRPr sz="1500" b="0">
+              <a:solidFill>
+                <a:srgbClr val="222222"/>
+              </a:solidFill>
+              <a:latin typeface="微软雅黑" panose="020B0503020204020204" charset="-122"/>
+              <a:ea typeface="微软雅黑" panose="020B0503020204020204" charset="-122"/>
+              <a:cs typeface="微软雅黑" panose="020B0503020204020204" charset="-122"/>
+            </a:endParaRPr>
           </a:p>
         </p:txBody>
       </p:sp>
@@ -11387,12 +12483,20 @@
                 <a:solidFill>
                   <a:srgbClr val="BDD7EE"/>
                 </a:solidFill>
-                <a:latin typeface="微软雅黑"/>
-                <a:ea typeface="微软雅黑"/>
-                <a:cs typeface="微软雅黑"/>
+                <a:latin typeface="微软雅黑" panose="020B0503020204020204" charset="-122"/>
+                <a:ea typeface="微软雅黑" panose="020B0503020204020204" charset="-122"/>
+                <a:cs typeface="微软雅黑" panose="020B0503020204020204" charset="-122"/>
               </a:rPr>
               <a:t>负责人：袁钟其</a:t>
             </a:r>
+            <a:endParaRPr sz="1300">
+              <a:solidFill>
+                <a:srgbClr val="BDD7EE"/>
+              </a:solidFill>
+              <a:latin typeface="微软雅黑" panose="020B0503020204020204" charset="-122"/>
+              <a:ea typeface="微软雅黑" panose="020B0503020204020204" charset="-122"/>
+              <a:cs typeface="微软雅黑" panose="020B0503020204020204" charset="-122"/>
+            </a:endParaRPr>
           </a:p>
         </p:txBody>
       </p:sp>
@@ -11405,7 +12509,7 @@
 </file>
 
 <file path=ppt/slides/slide4.xml><?xml version="1.0" encoding="utf-8"?>
-<p:sld xmlns:a="http://schemas.openxmlformats.org/drawingml/2006/main" xmlns:p="http://schemas.openxmlformats.org/presentationml/2006/main" xmlns:r="http://schemas.openxmlformats.org/officeDocument/2006/relationships">
+<p:sld xmlns:a="http://schemas.openxmlformats.org/drawingml/2006/main" xmlns:r="http://schemas.openxmlformats.org/officeDocument/2006/relationships" xmlns:p="http://schemas.openxmlformats.org/presentationml/2006/main">
   <p:cSld>
     <p:spTree>
       <p:nvGrpSpPr>
@@ -11475,7 +12579,7 @@
           <a:noFill/>
         </p:spPr>
         <p:txBody>
-          <a:bodyPr wrap="square" anchor="ctr" lIns="0" rIns="0" tIns="0" bIns="0">
+          <a:bodyPr wrap="square" lIns="0" tIns="0" rIns="0" bIns="0" anchor="ctr">
             <a:spAutoFit/>
           </a:bodyPr>
           <a:lstStyle/>
@@ -11496,12 +12600,20 @@
                 <a:solidFill>
                   <a:srgbClr val="FFFFFF"/>
                 </a:solidFill>
-                <a:latin typeface="微软雅黑"/>
-                <a:ea typeface="微软雅黑"/>
-                <a:cs typeface="微软雅黑"/>
+                <a:latin typeface="微软雅黑" panose="020B0503020204020204" charset="-122"/>
+                <a:ea typeface="微软雅黑" panose="020B0503020204020204" charset="-122"/>
+                <a:cs typeface="微软雅黑" panose="020B0503020204020204" charset="-122"/>
               </a:rPr>
               <a:t>2　系统总体架构与技术选型</a:t>
             </a:r>
+            <a:endParaRPr sz="2600" b="1">
+              <a:solidFill>
+                <a:srgbClr val="FFFFFF"/>
+              </a:solidFill>
+              <a:latin typeface="微软雅黑" panose="020B0503020204020204" charset="-122"/>
+              <a:ea typeface="微软雅黑" panose="020B0503020204020204" charset="-122"/>
+              <a:cs typeface="微软雅黑" panose="020B0503020204020204" charset="-122"/>
+            </a:endParaRPr>
           </a:p>
         </p:txBody>
       </p:sp>
@@ -11522,7 +12634,7 @@
           <a:noFill/>
         </p:spPr>
         <p:txBody>
-          <a:bodyPr wrap="square" anchor="t" lIns="0" rIns="0" tIns="0" bIns="0">
+          <a:bodyPr wrap="square" lIns="0" tIns="0" rIns="0" bIns="0" anchor="t">
             <a:spAutoFit/>
           </a:bodyPr>
           <a:lstStyle/>
@@ -11543,10 +12655,16 @@
                 <a:solidFill>
                   <a:srgbClr val="808080"/>
                 </a:solidFill>
-                <a:latin typeface="微软雅黑"/>
+                <a:latin typeface="微软雅黑" panose="020B0503020204020204" charset="-122"/>
               </a:rPr>
               <a:t>4</a:t>
             </a:r>
+            <a:endParaRPr sz="1000">
+              <a:solidFill>
+                <a:srgbClr val="808080"/>
+              </a:solidFill>
+              <a:latin typeface="微软雅黑" panose="020B0503020204020204" charset="-122"/>
+            </a:endParaRPr>
           </a:p>
         </p:txBody>
       </p:sp>
@@ -11567,7 +12685,7 @@
           <a:noFill/>
         </p:spPr>
         <p:txBody>
-          <a:bodyPr wrap="square" anchor="t" lIns="0" rIns="0" tIns="0" bIns="0">
+          <a:bodyPr wrap="square" lIns="0" tIns="0" rIns="0" bIns="0" anchor="t">
             <a:spAutoFit/>
           </a:bodyPr>
           <a:lstStyle/>
@@ -11588,12 +12706,20 @@
                 <a:solidFill>
                   <a:srgbClr val="1F4E79"/>
                 </a:solidFill>
-                <a:latin typeface="微软雅黑"/>
-                <a:ea typeface="微软雅黑"/>
-                <a:cs typeface="微软雅黑"/>
+                <a:latin typeface="微软雅黑" panose="020B0503020204020204" charset="-122"/>
+                <a:ea typeface="微软雅黑" panose="020B0503020204020204" charset="-122"/>
+                <a:cs typeface="微软雅黑" panose="020B0503020204020204" charset="-122"/>
               </a:rPr>
               <a:t>• 表现层：原生 HTML / CSS / JavaScript，课程管理、文档上传、问答、出题、错题本、复习计划</a:t>
             </a:r>
+            <a:endParaRPr sz="1500" b="1">
+              <a:solidFill>
+                <a:srgbClr val="1F4E79"/>
+              </a:solidFill>
+              <a:latin typeface="微软雅黑" panose="020B0503020204020204" charset="-122"/>
+              <a:ea typeface="微软雅黑" panose="020B0503020204020204" charset="-122"/>
+              <a:cs typeface="微软雅黑" panose="020B0503020204020204" charset="-122"/>
+            </a:endParaRPr>
           </a:p>
           <a:p>
             <a:pPr algn="l">
@@ -11612,12 +12738,20 @@
                 <a:solidFill>
                   <a:srgbClr val="1F4E79"/>
                 </a:solidFill>
-                <a:latin typeface="微软雅黑"/>
-                <a:ea typeface="微软雅黑"/>
-                <a:cs typeface="微软雅黑"/>
+                <a:latin typeface="微软雅黑" panose="020B0503020204020204" charset="-122"/>
+                <a:ea typeface="微软雅黑" panose="020B0503020204020204" charset="-122"/>
+                <a:cs typeface="微软雅黑" panose="020B0503020204020204" charset="-122"/>
               </a:rPr>
               <a:t>• 应用层：FastAPI，按接口路由、业务逻辑、LangChain 编排、数据模型与数据契约分层组织</a:t>
             </a:r>
+            <a:endParaRPr sz="1500" b="1">
+              <a:solidFill>
+                <a:srgbClr val="1F4E79"/>
+              </a:solidFill>
+              <a:latin typeface="微软雅黑" panose="020B0503020204020204" charset="-122"/>
+              <a:ea typeface="微软雅黑" panose="020B0503020204020204" charset="-122"/>
+              <a:cs typeface="微软雅黑" panose="020B0503020204020204" charset="-122"/>
+            </a:endParaRPr>
           </a:p>
           <a:p>
             <a:pPr algn="l">
@@ -11636,12 +12770,20 @@
                 <a:solidFill>
                   <a:srgbClr val="1F4E79"/>
                 </a:solidFill>
-                <a:latin typeface="微软雅黑"/>
-                <a:ea typeface="微软雅黑"/>
-                <a:cs typeface="微软雅黑"/>
+                <a:latin typeface="微软雅黑" panose="020B0503020204020204" charset="-122"/>
+                <a:ea typeface="微软雅黑" panose="020B0503020204020204" charset="-122"/>
+                <a:cs typeface="微软雅黑" panose="020B0503020204020204" charset="-122"/>
               </a:rPr>
               <a:t>• 数据层：MySQL 8.0 存储结构化数据 + Chroma 本地持久化向量库，二者职责互不重叠</a:t>
             </a:r>
+            <a:endParaRPr sz="1500" b="1">
+              <a:solidFill>
+                <a:srgbClr val="1F4E79"/>
+              </a:solidFill>
+              <a:latin typeface="微软雅黑" panose="020B0503020204020204" charset="-122"/>
+              <a:ea typeface="微软雅黑" panose="020B0503020204020204" charset="-122"/>
+              <a:cs typeface="微软雅黑" panose="020B0503020204020204" charset="-122"/>
+            </a:endParaRPr>
           </a:p>
           <a:p>
             <a:pPr algn="l">
@@ -11660,12 +12802,20 @@
                 <a:solidFill>
                   <a:srgbClr val="1F4E79"/>
                 </a:solidFill>
-                <a:latin typeface="微软雅黑"/>
-                <a:ea typeface="微软雅黑"/>
-                <a:cs typeface="微软雅黑"/>
+                <a:latin typeface="微软雅黑" panose="020B0503020204020204" charset="-122"/>
+                <a:ea typeface="微软雅黑" panose="020B0503020204020204" charset="-122"/>
+                <a:cs typeface="微软雅黑" panose="020B0503020204020204" charset="-122"/>
               </a:rPr>
               <a:t>• 模型服务：SiliconFlow（OpenAI 兼容接口），LLM 采用 deepseek-ai/DeepSeek-V4-Flash，Embedding 采用 BAAI/bge-m3</a:t>
             </a:r>
+            <a:endParaRPr sz="1500" b="1">
+              <a:solidFill>
+                <a:srgbClr val="1F4E79"/>
+              </a:solidFill>
+              <a:latin typeface="微软雅黑" panose="020B0503020204020204" charset="-122"/>
+              <a:ea typeface="微软雅黑" panose="020B0503020204020204" charset="-122"/>
+              <a:cs typeface="微软雅黑" panose="020B0503020204020204" charset="-122"/>
+            </a:endParaRPr>
           </a:p>
         </p:txBody>
       </p:sp>
@@ -11730,7 +12880,7 @@
           <a:noFill/>
         </p:spPr>
         <p:txBody>
-          <a:bodyPr wrap="square" anchor="t" lIns="0" rIns="0" tIns="0" bIns="0">
+          <a:bodyPr wrap="square" lIns="0" tIns="0" rIns="0" bIns="0" anchor="t">
             <a:spAutoFit/>
           </a:bodyPr>
           <a:lstStyle/>
@@ -11751,12 +12901,20 @@
                 <a:solidFill>
                   <a:srgbClr val="2E75B6"/>
                 </a:solidFill>
-                <a:latin typeface="微软雅黑"/>
-                <a:ea typeface="微软雅黑"/>
-                <a:cs typeface="微软雅黑"/>
+                <a:latin typeface="微软雅黑" panose="020B0503020204020204" charset="-122"/>
+                <a:ea typeface="微软雅黑" panose="020B0503020204020204" charset="-122"/>
+                <a:cs typeface="微软雅黑" panose="020B0503020204020204" charset="-122"/>
               </a:rPr>
               <a:t>主要技术选型</a:t>
             </a:r>
+            <a:endParaRPr sz="1700" b="1">
+              <a:solidFill>
+                <a:srgbClr val="2E75B6"/>
+              </a:solidFill>
+              <a:latin typeface="微软雅黑" panose="020B0503020204020204" charset="-122"/>
+              <a:ea typeface="微软雅黑" panose="020B0503020204020204" charset="-122"/>
+              <a:cs typeface="微软雅黑" panose="020B0503020204020204" charset="-122"/>
+            </a:endParaRPr>
           </a:p>
         </p:txBody>
       </p:sp>
@@ -11796,12 +12954,20 @@
                           <a:solidFill>
                             <a:srgbClr val="FFFFFF"/>
                           </a:solidFill>
-                          <a:latin typeface="微软雅黑"/>
-                          <a:ea typeface="微软雅黑"/>
-                          <a:cs typeface="微软雅黑"/>
+                          <a:latin typeface="微软雅黑" panose="020B0503020204020204" charset="-122"/>
+                          <a:ea typeface="微软雅黑" panose="020B0503020204020204" charset="-122"/>
+                          <a:cs typeface="微软雅黑" panose="020B0503020204020204" charset="-122"/>
                         </a:rPr>
                         <a:t>层次</a:t>
                       </a:r>
+                      <a:endParaRPr sz="1300" b="1">
+                        <a:solidFill>
+                          <a:srgbClr val="FFFFFF"/>
+                        </a:solidFill>
+                        <a:latin typeface="微软雅黑" panose="020B0503020204020204" charset="-122"/>
+                        <a:ea typeface="微软雅黑" panose="020B0503020204020204" charset="-122"/>
+                        <a:cs typeface="微软雅黑" panose="020B0503020204020204" charset="-122"/>
+                      </a:endParaRPr>
                     </a:p>
                   </a:txBody>
                   <a:tcPr anchor="ctr">
@@ -11821,12 +12987,20 @@
                           <a:solidFill>
                             <a:srgbClr val="FFFFFF"/>
                           </a:solidFill>
-                          <a:latin typeface="微软雅黑"/>
-                          <a:ea typeface="微软雅黑"/>
-                          <a:cs typeface="微软雅黑"/>
+                          <a:latin typeface="微软雅黑" panose="020B0503020204020204" charset="-122"/>
+                          <a:ea typeface="微软雅黑" panose="020B0503020204020204" charset="-122"/>
+                          <a:cs typeface="微软雅黑" panose="020B0503020204020204" charset="-122"/>
                         </a:rPr>
                         <a:t>选型</a:t>
                       </a:r>
+                      <a:endParaRPr sz="1300" b="1">
+                        <a:solidFill>
+                          <a:srgbClr val="FFFFFF"/>
+                        </a:solidFill>
+                        <a:latin typeface="微软雅黑" panose="020B0503020204020204" charset="-122"/>
+                        <a:ea typeface="微软雅黑" panose="020B0503020204020204" charset="-122"/>
+                        <a:cs typeface="微软雅黑" panose="020B0503020204020204" charset="-122"/>
+                      </a:endParaRPr>
                     </a:p>
                   </a:txBody>
                   <a:tcPr anchor="ctr">
@@ -11846,12 +13020,20 @@
                           <a:solidFill>
                             <a:srgbClr val="FFFFFF"/>
                           </a:solidFill>
-                          <a:latin typeface="微软雅黑"/>
-                          <a:ea typeface="微软雅黑"/>
-                          <a:cs typeface="微软雅黑"/>
+                          <a:latin typeface="微软雅黑" panose="020B0503020204020204" charset="-122"/>
+                          <a:ea typeface="微软雅黑" panose="020B0503020204020204" charset="-122"/>
+                          <a:cs typeface="微软雅黑" panose="020B0503020204020204" charset="-122"/>
                         </a:rPr>
                         <a:t>层次</a:t>
                       </a:r>
+                      <a:endParaRPr sz="1300" b="1">
+                        <a:solidFill>
+                          <a:srgbClr val="FFFFFF"/>
+                        </a:solidFill>
+                        <a:latin typeface="微软雅黑" panose="020B0503020204020204" charset="-122"/>
+                        <a:ea typeface="微软雅黑" panose="020B0503020204020204" charset="-122"/>
+                        <a:cs typeface="微软雅黑" panose="020B0503020204020204" charset="-122"/>
+                      </a:endParaRPr>
                     </a:p>
                   </a:txBody>
                   <a:tcPr anchor="ctr">
@@ -11871,12 +13053,20 @@
                           <a:solidFill>
                             <a:srgbClr val="FFFFFF"/>
                           </a:solidFill>
-                          <a:latin typeface="微软雅黑"/>
-                          <a:ea typeface="微软雅黑"/>
-                          <a:cs typeface="微软雅黑"/>
+                          <a:latin typeface="微软雅黑" panose="020B0503020204020204" charset="-122"/>
+                          <a:ea typeface="微软雅黑" panose="020B0503020204020204" charset="-122"/>
+                          <a:cs typeface="微软雅黑" panose="020B0503020204020204" charset="-122"/>
                         </a:rPr>
                         <a:t>选型</a:t>
                       </a:r>
+                      <a:endParaRPr sz="1300" b="1">
+                        <a:solidFill>
+                          <a:srgbClr val="FFFFFF"/>
+                        </a:solidFill>
+                        <a:latin typeface="微软雅黑" panose="020B0503020204020204" charset="-122"/>
+                        <a:ea typeface="微软雅黑" panose="020B0503020204020204" charset="-122"/>
+                        <a:cs typeface="微软雅黑" panose="020B0503020204020204" charset="-122"/>
+                      </a:endParaRPr>
                     </a:p>
                   </a:txBody>
                   <a:tcPr anchor="ctr">
@@ -11898,12 +13088,20 @@
                           <a:solidFill>
                             <a:srgbClr val="222222"/>
                           </a:solidFill>
-                          <a:latin typeface="微软雅黑"/>
-                          <a:ea typeface="微软雅黑"/>
-                          <a:cs typeface="微软雅黑"/>
+                          <a:latin typeface="微软雅黑" panose="020B0503020204020204" charset="-122"/>
+                          <a:ea typeface="微软雅黑" panose="020B0503020204020204" charset="-122"/>
+                          <a:cs typeface="微软雅黑" panose="020B0503020204020204" charset="-122"/>
                         </a:rPr>
                         <a:t>开发语言</a:t>
                       </a:r>
+                      <a:endParaRPr sz="1200" b="0">
+                        <a:solidFill>
+                          <a:srgbClr val="222222"/>
+                        </a:solidFill>
+                        <a:latin typeface="微软雅黑" panose="020B0503020204020204" charset="-122"/>
+                        <a:ea typeface="微软雅黑" panose="020B0503020204020204" charset="-122"/>
+                        <a:cs typeface="微软雅黑" panose="020B0503020204020204" charset="-122"/>
+                      </a:endParaRPr>
                     </a:p>
                   </a:txBody>
                   <a:tcPr anchor="ctr">
@@ -11923,12 +13121,20 @@
                           <a:solidFill>
                             <a:srgbClr val="222222"/>
                           </a:solidFill>
-                          <a:latin typeface="微软雅黑"/>
-                          <a:ea typeface="微软雅黑"/>
-                          <a:cs typeface="微软雅黑"/>
+                          <a:latin typeface="微软雅黑" panose="020B0503020204020204" charset="-122"/>
+                          <a:ea typeface="微软雅黑" panose="020B0503020204020204" charset="-122"/>
+                          <a:cs typeface="微软雅黑" panose="020B0503020204020204" charset="-122"/>
                         </a:rPr>
                         <a:t>Python 3.11</a:t>
                       </a:r>
+                      <a:endParaRPr sz="1200" b="0">
+                        <a:solidFill>
+                          <a:srgbClr val="222222"/>
+                        </a:solidFill>
+                        <a:latin typeface="微软雅黑" panose="020B0503020204020204" charset="-122"/>
+                        <a:ea typeface="微软雅黑" panose="020B0503020204020204" charset="-122"/>
+                        <a:cs typeface="微软雅黑" panose="020B0503020204020204" charset="-122"/>
+                      </a:endParaRPr>
                     </a:p>
                   </a:txBody>
                   <a:tcPr anchor="ctr">
@@ -11948,12 +13154,20 @@
                           <a:solidFill>
                             <a:srgbClr val="222222"/>
                           </a:solidFill>
-                          <a:latin typeface="微软雅黑"/>
-                          <a:ea typeface="微软雅黑"/>
-                          <a:cs typeface="微软雅黑"/>
+                          <a:latin typeface="微软雅黑" panose="020B0503020204020204" charset="-122"/>
+                          <a:ea typeface="微软雅黑" panose="020B0503020204020204" charset="-122"/>
+                          <a:cs typeface="微软雅黑" panose="020B0503020204020204" charset="-122"/>
                         </a:rPr>
                         <a:t>AI 编排</a:t>
                       </a:r>
+                      <a:endParaRPr sz="1200" b="0">
+                        <a:solidFill>
+                          <a:srgbClr val="222222"/>
+                        </a:solidFill>
+                        <a:latin typeface="微软雅黑" panose="020B0503020204020204" charset="-122"/>
+                        <a:ea typeface="微软雅黑" panose="020B0503020204020204" charset="-122"/>
+                        <a:cs typeface="微软雅黑" panose="020B0503020204020204" charset="-122"/>
+                      </a:endParaRPr>
                     </a:p>
                   </a:txBody>
                   <a:tcPr anchor="ctr">
@@ -11973,12 +13187,20 @@
                           <a:solidFill>
                             <a:srgbClr val="222222"/>
                           </a:solidFill>
-                          <a:latin typeface="微软雅黑"/>
-                          <a:ea typeface="微软雅黑"/>
-                          <a:cs typeface="微软雅黑"/>
+                          <a:latin typeface="微软雅黑" panose="020B0503020204020204" charset="-122"/>
+                          <a:ea typeface="微软雅黑" panose="020B0503020204020204" charset="-122"/>
+                          <a:cs typeface="微软雅黑" panose="020B0503020204020204" charset="-122"/>
                         </a:rPr>
                         <a:t>LangChain</a:t>
                       </a:r>
+                      <a:endParaRPr sz="1200" b="0">
+                        <a:solidFill>
+                          <a:srgbClr val="222222"/>
+                        </a:solidFill>
+                        <a:latin typeface="微软雅黑" panose="020B0503020204020204" charset="-122"/>
+                        <a:ea typeface="微软雅黑" panose="020B0503020204020204" charset="-122"/>
+                        <a:cs typeface="微软雅黑" panose="020B0503020204020204" charset="-122"/>
+                      </a:endParaRPr>
                     </a:p>
                   </a:txBody>
                   <a:tcPr anchor="ctr">
@@ -12000,12 +13222,20 @@
                           <a:solidFill>
                             <a:srgbClr val="222222"/>
                           </a:solidFill>
-                          <a:latin typeface="微软雅黑"/>
-                          <a:ea typeface="微软雅黑"/>
-                          <a:cs typeface="微软雅黑"/>
+                          <a:latin typeface="微软雅黑" panose="020B0503020204020204" charset="-122"/>
+                          <a:ea typeface="微软雅黑" panose="020B0503020204020204" charset="-122"/>
+                          <a:cs typeface="微软雅黑" panose="020B0503020204020204" charset="-122"/>
                         </a:rPr>
                         <a:t>Web 框架</a:t>
                       </a:r>
+                      <a:endParaRPr sz="1200" b="0">
+                        <a:solidFill>
+                          <a:srgbClr val="222222"/>
+                        </a:solidFill>
+                        <a:latin typeface="微软雅黑" panose="020B0503020204020204" charset="-122"/>
+                        <a:ea typeface="微软雅黑" panose="020B0503020204020204" charset="-122"/>
+                        <a:cs typeface="微软雅黑" panose="020B0503020204020204" charset="-122"/>
+                      </a:endParaRPr>
                     </a:p>
                   </a:txBody>
                   <a:tcPr anchor="ctr">
@@ -12025,12 +13255,20 @@
                           <a:solidFill>
                             <a:srgbClr val="222222"/>
                           </a:solidFill>
-                          <a:latin typeface="微软雅黑"/>
-                          <a:ea typeface="微软雅黑"/>
-                          <a:cs typeface="微软雅黑"/>
+                          <a:latin typeface="微软雅黑" panose="020B0503020204020204" charset="-122"/>
+                          <a:ea typeface="微软雅黑" panose="020B0503020204020204" charset="-122"/>
+                          <a:cs typeface="微软雅黑" panose="020B0503020204020204" charset="-122"/>
                         </a:rPr>
                         <a:t>FastAPI + Uvicorn</a:t>
                       </a:r>
+                      <a:endParaRPr sz="1200" b="0">
+                        <a:solidFill>
+                          <a:srgbClr val="222222"/>
+                        </a:solidFill>
+                        <a:latin typeface="微软雅黑" panose="020B0503020204020204" charset="-122"/>
+                        <a:ea typeface="微软雅黑" panose="020B0503020204020204" charset="-122"/>
+                        <a:cs typeface="微软雅黑" panose="020B0503020204020204" charset="-122"/>
+                      </a:endParaRPr>
                     </a:p>
                   </a:txBody>
                   <a:tcPr anchor="ctr">
@@ -12050,12 +13288,20 @@
                           <a:solidFill>
                             <a:srgbClr val="222222"/>
                           </a:solidFill>
-                          <a:latin typeface="微软雅黑"/>
-                          <a:ea typeface="微软雅黑"/>
-                          <a:cs typeface="微软雅黑"/>
+                          <a:latin typeface="微软雅黑" panose="020B0503020204020204" charset="-122"/>
+                          <a:ea typeface="微软雅黑" panose="020B0503020204020204" charset="-122"/>
+                          <a:cs typeface="微软雅黑" panose="020B0503020204020204" charset="-122"/>
                         </a:rPr>
                         <a:t>业务数据库</a:t>
                       </a:r>
+                      <a:endParaRPr sz="1200" b="0">
+                        <a:solidFill>
+                          <a:srgbClr val="222222"/>
+                        </a:solidFill>
+                        <a:latin typeface="微软雅黑" panose="020B0503020204020204" charset="-122"/>
+                        <a:ea typeface="微软雅黑" panose="020B0503020204020204" charset="-122"/>
+                        <a:cs typeface="微软雅黑" panose="020B0503020204020204" charset="-122"/>
+                      </a:endParaRPr>
                     </a:p>
                   </a:txBody>
                   <a:tcPr anchor="ctr">
@@ -12075,12 +13321,20 @@
                           <a:solidFill>
                             <a:srgbClr val="222222"/>
                           </a:solidFill>
-                          <a:latin typeface="微软雅黑"/>
-                          <a:ea typeface="微软雅黑"/>
-                          <a:cs typeface="微软雅黑"/>
+                          <a:latin typeface="微软雅黑" panose="020B0503020204020204" charset="-122"/>
+                          <a:ea typeface="微软雅黑" panose="020B0503020204020204" charset="-122"/>
+                          <a:cs typeface="微软雅黑" panose="020B0503020204020204" charset="-122"/>
                         </a:rPr>
                         <a:t>MySQL 8.0</a:t>
                       </a:r>
+                      <a:endParaRPr sz="1200" b="0">
+                        <a:solidFill>
+                          <a:srgbClr val="222222"/>
+                        </a:solidFill>
+                        <a:latin typeface="微软雅黑" panose="020B0503020204020204" charset="-122"/>
+                        <a:ea typeface="微软雅黑" panose="020B0503020204020204" charset="-122"/>
+                        <a:cs typeface="微软雅黑" panose="020B0503020204020204" charset="-122"/>
+                      </a:endParaRPr>
                     </a:p>
                   </a:txBody>
                   <a:tcPr anchor="ctr">
@@ -12102,12 +13356,20 @@
                           <a:solidFill>
                             <a:srgbClr val="222222"/>
                           </a:solidFill>
-                          <a:latin typeface="微软雅黑"/>
-                          <a:ea typeface="微软雅黑"/>
-                          <a:cs typeface="微软雅黑"/>
+                          <a:latin typeface="微软雅黑" panose="020B0503020204020204" charset="-122"/>
+                          <a:ea typeface="微软雅黑" panose="020B0503020204020204" charset="-122"/>
+                          <a:cs typeface="微软雅黑" panose="020B0503020204020204" charset="-122"/>
                         </a:rPr>
                         <a:t>向量数据库</a:t>
                       </a:r>
+                      <a:endParaRPr sz="1200" b="0">
+                        <a:solidFill>
+                          <a:srgbClr val="222222"/>
+                        </a:solidFill>
+                        <a:latin typeface="微软雅黑" panose="020B0503020204020204" charset="-122"/>
+                        <a:ea typeface="微软雅黑" panose="020B0503020204020204" charset="-122"/>
+                        <a:cs typeface="微软雅黑" panose="020B0503020204020204" charset="-122"/>
+                      </a:endParaRPr>
                     </a:p>
                   </a:txBody>
                   <a:tcPr anchor="ctr">
@@ -12127,12 +13389,20 @@
                           <a:solidFill>
                             <a:srgbClr val="222222"/>
                           </a:solidFill>
-                          <a:latin typeface="微软雅黑"/>
-                          <a:ea typeface="微软雅黑"/>
-                          <a:cs typeface="微软雅黑"/>
+                          <a:latin typeface="微软雅黑" panose="020B0503020204020204" charset="-122"/>
+                          <a:ea typeface="微软雅黑" panose="020B0503020204020204" charset="-122"/>
+                          <a:cs typeface="微软雅黑" panose="020B0503020204020204" charset="-122"/>
                         </a:rPr>
                         <a:t>Chroma（本地持久化）</a:t>
                       </a:r>
+                      <a:endParaRPr sz="1200" b="0">
+                        <a:solidFill>
+                          <a:srgbClr val="222222"/>
+                        </a:solidFill>
+                        <a:latin typeface="微软雅黑" panose="020B0503020204020204" charset="-122"/>
+                        <a:ea typeface="微软雅黑" panose="020B0503020204020204" charset="-122"/>
+                        <a:cs typeface="微软雅黑" panose="020B0503020204020204" charset="-122"/>
+                      </a:endParaRPr>
                     </a:p>
                   </a:txBody>
                   <a:tcPr anchor="ctr">
@@ -12152,12 +13422,20 @@
                           <a:solidFill>
                             <a:srgbClr val="222222"/>
                           </a:solidFill>
-                          <a:latin typeface="微软雅黑"/>
-                          <a:ea typeface="微软雅黑"/>
-                          <a:cs typeface="微软雅黑"/>
+                          <a:latin typeface="微软雅黑" panose="020B0503020204020204" charset="-122"/>
+                          <a:ea typeface="微软雅黑" panose="020B0503020204020204" charset="-122"/>
+                          <a:cs typeface="微软雅黑" panose="020B0503020204020204" charset="-122"/>
                         </a:rPr>
                         <a:t>模型服务</a:t>
                       </a:r>
+                      <a:endParaRPr sz="1200" b="0">
+                        <a:solidFill>
+                          <a:srgbClr val="222222"/>
+                        </a:solidFill>
+                        <a:latin typeface="微软雅黑" panose="020B0503020204020204" charset="-122"/>
+                        <a:ea typeface="微软雅黑" panose="020B0503020204020204" charset="-122"/>
+                        <a:cs typeface="微软雅黑" panose="020B0503020204020204" charset="-122"/>
+                      </a:endParaRPr>
                     </a:p>
                   </a:txBody>
                   <a:tcPr anchor="ctr">
@@ -12177,12 +13455,20 @@
                           <a:solidFill>
                             <a:srgbClr val="222222"/>
                           </a:solidFill>
-                          <a:latin typeface="微软雅黑"/>
-                          <a:ea typeface="微软雅黑"/>
-                          <a:cs typeface="微软雅黑"/>
+                          <a:latin typeface="微软雅黑" panose="020B0503020204020204" charset="-122"/>
+                          <a:ea typeface="微软雅黑" panose="020B0503020204020204" charset="-122"/>
+                          <a:cs typeface="微软雅黑" panose="020B0503020204020204" charset="-122"/>
                         </a:rPr>
                         <a:t>SiliconFlow</a:t>
                       </a:r>
+                      <a:endParaRPr sz="1200" b="0">
+                        <a:solidFill>
+                          <a:srgbClr val="222222"/>
+                        </a:solidFill>
+                        <a:latin typeface="微软雅黑" panose="020B0503020204020204" charset="-122"/>
+                        <a:ea typeface="微软雅黑" panose="020B0503020204020204" charset="-122"/>
+                        <a:cs typeface="微软雅黑" panose="020B0503020204020204" charset="-122"/>
+                      </a:endParaRPr>
                     </a:p>
                   </a:txBody>
                   <a:tcPr anchor="ctr">
@@ -12204,12 +13490,20 @@
                           <a:solidFill>
                             <a:srgbClr val="222222"/>
                           </a:solidFill>
-                          <a:latin typeface="微软雅黑"/>
-                          <a:ea typeface="微软雅黑"/>
-                          <a:cs typeface="微软雅黑"/>
+                          <a:latin typeface="微软雅黑" panose="020B0503020204020204" charset="-122"/>
+                          <a:ea typeface="微软雅黑" panose="020B0503020204020204" charset="-122"/>
+                          <a:cs typeface="微软雅黑" panose="020B0503020204020204" charset="-122"/>
                         </a:rPr>
                         <a:t>前端</a:t>
                       </a:r>
+                      <a:endParaRPr sz="1200" b="0">
+                        <a:solidFill>
+                          <a:srgbClr val="222222"/>
+                        </a:solidFill>
+                        <a:latin typeface="微软雅黑" panose="020B0503020204020204" charset="-122"/>
+                        <a:ea typeface="微软雅黑" panose="020B0503020204020204" charset="-122"/>
+                        <a:cs typeface="微软雅黑" panose="020B0503020204020204" charset="-122"/>
+                      </a:endParaRPr>
                     </a:p>
                   </a:txBody>
                   <a:tcPr anchor="ctr">
@@ -12229,12 +13523,20 @@
                           <a:solidFill>
                             <a:srgbClr val="222222"/>
                           </a:solidFill>
-                          <a:latin typeface="微软雅黑"/>
-                          <a:ea typeface="微软雅黑"/>
-                          <a:cs typeface="微软雅黑"/>
+                          <a:latin typeface="微软雅黑" panose="020B0503020204020204" charset="-122"/>
+                          <a:ea typeface="微软雅黑" panose="020B0503020204020204" charset="-122"/>
+                          <a:cs typeface="微软雅黑" panose="020B0503020204020204" charset="-122"/>
                         </a:rPr>
                         <a:t>原生 HTML/CSS/JS</a:t>
                       </a:r>
+                      <a:endParaRPr sz="1200" b="0">
+                        <a:solidFill>
+                          <a:srgbClr val="222222"/>
+                        </a:solidFill>
+                        <a:latin typeface="微软雅黑" panose="020B0503020204020204" charset="-122"/>
+                        <a:ea typeface="微软雅黑" panose="020B0503020204020204" charset="-122"/>
+                        <a:cs typeface="微软雅黑" panose="020B0503020204020204" charset="-122"/>
+                      </a:endParaRPr>
                     </a:p>
                   </a:txBody>
                   <a:tcPr anchor="ctr">
@@ -12254,12 +13556,20 @@
                           <a:solidFill>
                             <a:srgbClr val="222222"/>
                           </a:solidFill>
-                          <a:latin typeface="微软雅黑"/>
-                          <a:ea typeface="微软雅黑"/>
-                          <a:cs typeface="微软雅黑"/>
+                          <a:latin typeface="微软雅黑" panose="020B0503020204020204" charset="-122"/>
+                          <a:ea typeface="微软雅黑" panose="020B0503020204020204" charset="-122"/>
+                          <a:cs typeface="微软雅黑" panose="020B0503020204020204" charset="-122"/>
                         </a:rPr>
                         <a:t>部署方式</a:t>
                       </a:r>
+                      <a:endParaRPr sz="1200" b="0">
+                        <a:solidFill>
+                          <a:srgbClr val="222222"/>
+                        </a:solidFill>
+                        <a:latin typeface="微软雅黑" panose="020B0503020204020204" charset="-122"/>
+                        <a:ea typeface="微软雅黑" panose="020B0503020204020204" charset="-122"/>
+                        <a:cs typeface="微软雅黑" panose="020B0503020204020204" charset="-122"/>
+                      </a:endParaRPr>
                     </a:p>
                   </a:txBody>
                   <a:tcPr anchor="ctr">
@@ -12279,12 +13589,20 @@
                           <a:solidFill>
                             <a:srgbClr val="222222"/>
                           </a:solidFill>
-                          <a:latin typeface="微软雅黑"/>
-                          <a:ea typeface="微软雅黑"/>
-                          <a:cs typeface="微软雅黑"/>
+                          <a:latin typeface="微软雅黑" panose="020B0503020204020204" charset="-122"/>
+                          <a:ea typeface="微软雅黑" panose="020B0503020204020204" charset="-122"/>
+                          <a:cs typeface="微软雅黑" panose="020B0503020204020204" charset="-122"/>
                         </a:rPr>
                         <a:t>Docker Compose</a:t>
                       </a:r>
+                      <a:endParaRPr sz="1200" b="0">
+                        <a:solidFill>
+                          <a:srgbClr val="222222"/>
+                        </a:solidFill>
+                        <a:latin typeface="微软雅黑" panose="020B0503020204020204" charset="-122"/>
+                        <a:ea typeface="微软雅黑" panose="020B0503020204020204" charset="-122"/>
+                        <a:cs typeface="微软雅黑" panose="020B0503020204020204" charset="-122"/>
+                      </a:endParaRPr>
                     </a:p>
                   </a:txBody>
                   <a:tcPr anchor="ctr">
@@ -12326,12 +13644,20 @@
                 <a:solidFill>
                   <a:srgbClr val="BDD7EE"/>
                 </a:solidFill>
-                <a:latin typeface="微软雅黑"/>
-                <a:ea typeface="微软雅黑"/>
-                <a:cs typeface="微软雅黑"/>
+                <a:latin typeface="微软雅黑" panose="020B0503020204020204" charset="-122"/>
+                <a:ea typeface="微软雅黑" panose="020B0503020204020204" charset="-122"/>
+                <a:cs typeface="微软雅黑" panose="020B0503020204020204" charset="-122"/>
               </a:rPr>
               <a:t>负责人：周承锦</a:t>
             </a:r>
+            <a:endParaRPr sz="1300">
+              <a:solidFill>
+                <a:srgbClr val="BDD7EE"/>
+              </a:solidFill>
+              <a:latin typeface="微软雅黑" panose="020B0503020204020204" charset="-122"/>
+              <a:ea typeface="微软雅黑" panose="020B0503020204020204" charset="-122"/>
+              <a:cs typeface="微软雅黑" panose="020B0503020204020204" charset="-122"/>
+            </a:endParaRPr>
           </a:p>
         </p:txBody>
       </p:sp>
@@ -12344,7 +13670,7 @@
 </file>
 
 <file path=ppt/slides/slide5.xml><?xml version="1.0" encoding="utf-8"?>
-<p:sld xmlns:a="http://schemas.openxmlformats.org/drawingml/2006/main" xmlns:p="http://schemas.openxmlformats.org/presentationml/2006/main" xmlns:r="http://schemas.openxmlformats.org/officeDocument/2006/relationships">
+<p:sld xmlns:a="http://schemas.openxmlformats.org/drawingml/2006/main" xmlns:r="http://schemas.openxmlformats.org/officeDocument/2006/relationships" xmlns:p="http://schemas.openxmlformats.org/presentationml/2006/main">
   <p:cSld>
     <p:spTree>
       <p:nvGrpSpPr>
@@ -12414,7 +13740,7 @@
           <a:noFill/>
         </p:spPr>
         <p:txBody>
-          <a:bodyPr wrap="square" anchor="ctr" lIns="0" rIns="0" tIns="0" bIns="0">
+          <a:bodyPr wrap="square" lIns="0" tIns="0" rIns="0" bIns="0" anchor="ctr">
             <a:spAutoFit/>
           </a:bodyPr>
           <a:lstStyle/>
@@ -12435,12 +13761,20 @@
                 <a:solidFill>
                   <a:srgbClr val="FFFFFF"/>
                 </a:solidFill>
-                <a:latin typeface="微软雅黑"/>
-                <a:ea typeface="微软雅黑"/>
-                <a:cs typeface="微软雅黑"/>
+                <a:latin typeface="微软雅黑" panose="020B0503020204020204" charset="-122"/>
+                <a:ea typeface="微软雅黑" panose="020B0503020204020204" charset="-122"/>
+                <a:cs typeface="微软雅黑" panose="020B0503020204020204" charset="-122"/>
               </a:rPr>
               <a:t>3　核心原理：检索增强生成（RAG）</a:t>
             </a:r>
+            <a:endParaRPr sz="2600" b="1">
+              <a:solidFill>
+                <a:srgbClr val="FFFFFF"/>
+              </a:solidFill>
+              <a:latin typeface="微软雅黑" panose="020B0503020204020204" charset="-122"/>
+              <a:ea typeface="微软雅黑" panose="020B0503020204020204" charset="-122"/>
+              <a:cs typeface="微软雅黑" panose="020B0503020204020204" charset="-122"/>
+            </a:endParaRPr>
           </a:p>
         </p:txBody>
       </p:sp>
@@ -12461,7 +13795,7 @@
           <a:noFill/>
         </p:spPr>
         <p:txBody>
-          <a:bodyPr wrap="square" anchor="t" lIns="0" rIns="0" tIns="0" bIns="0">
+          <a:bodyPr wrap="square" lIns="0" tIns="0" rIns="0" bIns="0" anchor="t">
             <a:spAutoFit/>
           </a:bodyPr>
           <a:lstStyle/>
@@ -12482,10 +13816,16 @@
                 <a:solidFill>
                   <a:srgbClr val="808080"/>
                 </a:solidFill>
-                <a:latin typeface="微软雅黑"/>
+                <a:latin typeface="微软雅黑" panose="020B0503020204020204" charset="-122"/>
               </a:rPr>
               <a:t>5</a:t>
             </a:r>
+            <a:endParaRPr sz="1000">
+              <a:solidFill>
+                <a:srgbClr val="808080"/>
+              </a:solidFill>
+              <a:latin typeface="微软雅黑" panose="020B0503020204020204" charset="-122"/>
+            </a:endParaRPr>
           </a:p>
         </p:txBody>
       </p:sp>
@@ -12498,7 +13838,7 @@
           <p:nvPr/>
         </p:nvPicPr>
         <p:blipFill>
-          <a:blip r:embed="rId2"/>
+          <a:blip r:embed="rId1"/>
           <a:stretch>
             <a:fillRect/>
           </a:stretch>
@@ -12530,7 +13870,7 @@
           <a:noFill/>
         </p:spPr>
         <p:txBody>
-          <a:bodyPr wrap="square" anchor="t" lIns="0" rIns="0" tIns="0" bIns="0">
+          <a:bodyPr wrap="square" lIns="0" tIns="0" rIns="0" bIns="0" anchor="t">
             <a:spAutoFit/>
           </a:bodyPr>
           <a:lstStyle/>
@@ -12551,12 +13891,20 @@
                 <a:solidFill>
                   <a:srgbClr val="808080"/>
                 </a:solidFill>
-                <a:latin typeface="微软雅黑"/>
-                <a:ea typeface="微软雅黑"/>
-                <a:cs typeface="微软雅黑"/>
+                <a:latin typeface="微软雅黑" panose="020B0503020204020204" charset="-122"/>
+                <a:ea typeface="微软雅黑" panose="020B0503020204020204" charset="-122"/>
+                <a:cs typeface="微软雅黑" panose="020B0503020204020204" charset="-122"/>
               </a:rPr>
               <a:t>图 1　RAG 工作原理流程图</a:t>
             </a:r>
+            <a:endParaRPr sz="1200" b="0">
+              <a:solidFill>
+                <a:srgbClr val="808080"/>
+              </a:solidFill>
+              <a:latin typeface="微软雅黑" panose="020B0503020204020204" charset="-122"/>
+              <a:ea typeface="微软雅黑" panose="020B0503020204020204" charset="-122"/>
+              <a:cs typeface="微软雅黑" panose="020B0503020204020204" charset="-122"/>
+            </a:endParaRPr>
           </a:p>
         </p:txBody>
       </p:sp>
@@ -12577,7 +13925,7 @@
           <a:noFill/>
         </p:spPr>
         <p:txBody>
-          <a:bodyPr wrap="square" anchor="t" lIns="0" rIns="0" tIns="0" bIns="0">
+          <a:bodyPr wrap="square" lIns="0" tIns="0" rIns="0" bIns="0" anchor="t">
             <a:spAutoFit/>
           </a:bodyPr>
           <a:lstStyle/>
@@ -12598,12 +13946,20 @@
                 <a:solidFill>
                   <a:srgbClr val="808080"/>
                 </a:solidFill>
-                <a:latin typeface="微软雅黑"/>
-                <a:ea typeface="微软雅黑"/>
-                <a:cs typeface="微软雅黑"/>
+                <a:latin typeface="微软雅黑" panose="020B0503020204020204" charset="-122"/>
+                <a:ea typeface="微软雅黑" panose="020B0503020204020204" charset="-122"/>
+                <a:cs typeface="微软雅黑" panose="020B0503020204020204" charset="-122"/>
               </a:rPr>
               <a:t>关键约束：文档入库与问题检索必须使用同一个 Embedding 模型（BAAI/bge-m3），否则二者处于不同向量空间，检索将失效。</a:t>
             </a:r>
+            <a:endParaRPr sz="1300" b="0">
+              <a:solidFill>
+                <a:srgbClr val="808080"/>
+              </a:solidFill>
+              <a:latin typeface="微软雅黑" panose="020B0503020204020204" charset="-122"/>
+              <a:ea typeface="微软雅黑" panose="020B0503020204020204" charset="-122"/>
+              <a:cs typeface="微软雅黑" panose="020B0503020204020204" charset="-122"/>
+            </a:endParaRPr>
           </a:p>
         </p:txBody>
       </p:sp>
@@ -12635,12 +13991,20 @@
                 <a:solidFill>
                   <a:srgbClr val="BDD7EE"/>
                 </a:solidFill>
-                <a:latin typeface="微软雅黑"/>
-                <a:ea typeface="微软雅黑"/>
-                <a:cs typeface="微软雅黑"/>
+                <a:latin typeface="微软雅黑" panose="020B0503020204020204" charset="-122"/>
+                <a:ea typeface="微软雅黑" panose="020B0503020204020204" charset="-122"/>
+                <a:cs typeface="微软雅黑" panose="020B0503020204020204" charset="-122"/>
               </a:rPr>
               <a:t>负责人：周承锦</a:t>
             </a:r>
+            <a:endParaRPr sz="1300">
+              <a:solidFill>
+                <a:srgbClr val="BDD7EE"/>
+              </a:solidFill>
+              <a:latin typeface="微软雅黑" panose="020B0503020204020204" charset="-122"/>
+              <a:ea typeface="微软雅黑" panose="020B0503020204020204" charset="-122"/>
+              <a:cs typeface="微软雅黑" panose="020B0503020204020204" charset="-122"/>
+            </a:endParaRPr>
           </a:p>
         </p:txBody>
       </p:sp>
@@ -12653,7 +14017,7 @@
 </file>
 
 <file path=ppt/slides/slide6.xml><?xml version="1.0" encoding="utf-8"?>
-<p:sld xmlns:a="http://schemas.openxmlformats.org/drawingml/2006/main" xmlns:p="http://schemas.openxmlformats.org/presentationml/2006/main" xmlns:r="http://schemas.openxmlformats.org/officeDocument/2006/relationships">
+<p:sld xmlns:a="http://schemas.openxmlformats.org/drawingml/2006/main" xmlns:r="http://schemas.openxmlformats.org/officeDocument/2006/relationships" xmlns:p="http://schemas.openxmlformats.org/presentationml/2006/main">
   <p:cSld>
     <p:spTree>
       <p:nvGrpSpPr>
@@ -12723,7 +14087,7 @@
           <a:noFill/>
         </p:spPr>
         <p:txBody>
-          <a:bodyPr wrap="square" anchor="ctr" lIns="0" rIns="0" tIns="0" bIns="0">
+          <a:bodyPr wrap="square" lIns="0" tIns="0" rIns="0" bIns="0" anchor="ctr">
             <a:spAutoFit/>
           </a:bodyPr>
           <a:lstStyle/>
@@ -12744,12 +14108,20 @@
                 <a:solidFill>
                   <a:srgbClr val="FFFFFF"/>
                 </a:solidFill>
-                <a:latin typeface="微软雅黑"/>
-                <a:ea typeface="微软雅黑"/>
-                <a:cs typeface="微软雅黑"/>
+                <a:latin typeface="微软雅黑" panose="020B0503020204020204" charset="-122"/>
+                <a:ea typeface="微软雅黑" panose="020B0503020204020204" charset="-122"/>
+                <a:cs typeface="微软雅黑" panose="020B0503020204020204" charset="-122"/>
               </a:rPr>
               <a:t>4　数据库设计（一）：E-R 图</a:t>
             </a:r>
+            <a:endParaRPr sz="2600" b="1">
+              <a:solidFill>
+                <a:srgbClr val="FFFFFF"/>
+              </a:solidFill>
+              <a:latin typeface="微软雅黑" panose="020B0503020204020204" charset="-122"/>
+              <a:ea typeface="微软雅黑" panose="020B0503020204020204" charset="-122"/>
+              <a:cs typeface="微软雅黑" panose="020B0503020204020204" charset="-122"/>
+            </a:endParaRPr>
           </a:p>
         </p:txBody>
       </p:sp>
@@ -12770,7 +14142,7 @@
           <a:noFill/>
         </p:spPr>
         <p:txBody>
-          <a:bodyPr wrap="square" anchor="t" lIns="0" rIns="0" tIns="0" bIns="0">
+          <a:bodyPr wrap="square" lIns="0" tIns="0" rIns="0" bIns="0" anchor="t">
             <a:spAutoFit/>
           </a:bodyPr>
           <a:lstStyle/>
@@ -12791,10 +14163,16 @@
                 <a:solidFill>
                   <a:srgbClr val="808080"/>
                 </a:solidFill>
-                <a:latin typeface="微软雅黑"/>
+                <a:latin typeface="微软雅黑" panose="020B0503020204020204" charset="-122"/>
               </a:rPr>
               <a:t>6</a:t>
             </a:r>
+            <a:endParaRPr sz="1000">
+              <a:solidFill>
+                <a:srgbClr val="808080"/>
+              </a:solidFill>
+              <a:latin typeface="微软雅黑" panose="020B0503020204020204" charset="-122"/>
+            </a:endParaRPr>
           </a:p>
         </p:txBody>
       </p:sp>
@@ -12807,7 +14185,7 @@
           <p:nvPr/>
         </p:nvPicPr>
         <p:blipFill>
-          <a:blip r:embed="rId2"/>
+          <a:blip r:embed="rId1"/>
           <a:stretch>
             <a:fillRect/>
           </a:stretch>
@@ -12839,7 +14217,7 @@
           <a:noFill/>
         </p:spPr>
         <p:txBody>
-          <a:bodyPr wrap="square" anchor="t" lIns="0" rIns="0" tIns="0" bIns="0">
+          <a:bodyPr wrap="square" lIns="0" tIns="0" rIns="0" bIns="0" anchor="t">
             <a:spAutoFit/>
           </a:bodyPr>
           <a:lstStyle/>
@@ -12860,12 +14238,20 @@
                 <a:solidFill>
                   <a:srgbClr val="808080"/>
                 </a:solidFill>
-                <a:latin typeface="微软雅黑"/>
-                <a:ea typeface="微软雅黑"/>
-                <a:cs typeface="微软雅黑"/>
+                <a:latin typeface="微软雅黑" panose="020B0503020204020204" charset="-122"/>
+                <a:ea typeface="微软雅黑" panose="020B0503020204020204" charset="-122"/>
+                <a:cs typeface="微软雅黑" panose="020B0503020204020204" charset="-122"/>
               </a:rPr>
               <a:t>图 2　智学助手系统 E-R 图</a:t>
             </a:r>
+            <a:endParaRPr sz="1200" b="0">
+              <a:solidFill>
+                <a:srgbClr val="808080"/>
+              </a:solidFill>
+              <a:latin typeface="微软雅黑" panose="020B0503020204020204" charset="-122"/>
+              <a:ea typeface="微软雅黑" panose="020B0503020204020204" charset="-122"/>
+              <a:cs typeface="微软雅黑" panose="020B0503020204020204" charset="-122"/>
+            </a:endParaRPr>
           </a:p>
         </p:txBody>
       </p:sp>
@@ -12897,12 +14283,20 @@
                 <a:solidFill>
                   <a:srgbClr val="BDD7EE"/>
                 </a:solidFill>
-                <a:latin typeface="微软雅黑"/>
-                <a:ea typeface="微软雅黑"/>
-                <a:cs typeface="微软雅黑"/>
+                <a:latin typeface="微软雅黑" panose="020B0503020204020204" charset="-122"/>
+                <a:ea typeface="微软雅黑" panose="020B0503020204020204" charset="-122"/>
+                <a:cs typeface="微软雅黑" panose="020B0503020204020204" charset="-122"/>
               </a:rPr>
               <a:t>负责人：刘纲正</a:t>
             </a:r>
+            <a:endParaRPr sz="1300">
+              <a:solidFill>
+                <a:srgbClr val="BDD7EE"/>
+              </a:solidFill>
+              <a:latin typeface="微软雅黑" panose="020B0503020204020204" charset="-122"/>
+              <a:ea typeface="微软雅黑" panose="020B0503020204020204" charset="-122"/>
+              <a:cs typeface="微软雅黑" panose="020B0503020204020204" charset="-122"/>
+            </a:endParaRPr>
           </a:p>
         </p:txBody>
       </p:sp>
@@ -12915,7 +14309,7 @@
 </file>
 
 <file path=ppt/slides/slide7.xml><?xml version="1.0" encoding="utf-8"?>
-<p:sld xmlns:a="http://schemas.openxmlformats.org/drawingml/2006/main" xmlns:p="http://schemas.openxmlformats.org/presentationml/2006/main" xmlns:r="http://schemas.openxmlformats.org/officeDocument/2006/relationships">
+<p:sld xmlns:a="http://schemas.openxmlformats.org/drawingml/2006/main" xmlns:r="http://schemas.openxmlformats.org/officeDocument/2006/relationships" xmlns:p="http://schemas.openxmlformats.org/presentationml/2006/main">
   <p:cSld>
     <p:spTree>
       <p:nvGrpSpPr>
@@ -12985,7 +14379,7 @@
           <a:noFill/>
         </p:spPr>
         <p:txBody>
-          <a:bodyPr wrap="square" anchor="ctr" lIns="0" rIns="0" tIns="0" bIns="0">
+          <a:bodyPr wrap="square" lIns="0" tIns="0" rIns="0" bIns="0" anchor="ctr">
             <a:spAutoFit/>
           </a:bodyPr>
           <a:lstStyle/>
@@ -13006,12 +14400,20 @@
                 <a:solidFill>
                   <a:srgbClr val="FFFFFF"/>
                 </a:solidFill>
-                <a:latin typeface="微软雅黑"/>
-                <a:ea typeface="微软雅黑"/>
-                <a:cs typeface="微软雅黑"/>
+                <a:latin typeface="微软雅黑" panose="020B0503020204020204" charset="-122"/>
+                <a:ea typeface="微软雅黑" panose="020B0503020204020204" charset="-122"/>
+                <a:cs typeface="微软雅黑" panose="020B0503020204020204" charset="-122"/>
               </a:rPr>
               <a:t>4　数据库设计（二）：概念数据模型 CDM</a:t>
             </a:r>
+            <a:endParaRPr sz="2600" b="1">
+              <a:solidFill>
+                <a:srgbClr val="FFFFFF"/>
+              </a:solidFill>
+              <a:latin typeface="微软雅黑" panose="020B0503020204020204" charset="-122"/>
+              <a:ea typeface="微软雅黑" panose="020B0503020204020204" charset="-122"/>
+              <a:cs typeface="微软雅黑" panose="020B0503020204020204" charset="-122"/>
+            </a:endParaRPr>
           </a:p>
         </p:txBody>
       </p:sp>
@@ -13032,7 +14434,7 @@
           <a:noFill/>
         </p:spPr>
         <p:txBody>
-          <a:bodyPr wrap="square" anchor="t" lIns="0" rIns="0" tIns="0" bIns="0">
+          <a:bodyPr wrap="square" lIns="0" tIns="0" rIns="0" bIns="0" anchor="t">
             <a:spAutoFit/>
           </a:bodyPr>
           <a:lstStyle/>
@@ -13053,10 +14455,16 @@
                 <a:solidFill>
                   <a:srgbClr val="808080"/>
                 </a:solidFill>
-                <a:latin typeface="微软雅黑"/>
+                <a:latin typeface="微软雅黑" panose="020B0503020204020204" charset="-122"/>
               </a:rPr>
               <a:t>7</a:t>
             </a:r>
+            <a:endParaRPr sz="1000">
+              <a:solidFill>
+                <a:srgbClr val="808080"/>
+              </a:solidFill>
+              <a:latin typeface="微软雅黑" panose="020B0503020204020204" charset="-122"/>
+            </a:endParaRPr>
           </a:p>
         </p:txBody>
       </p:sp>
@@ -13069,7 +14477,7 @@
           <p:nvPr/>
         </p:nvPicPr>
         <p:blipFill>
-          <a:blip r:embed="rId2"/>
+          <a:blip r:embed="rId1"/>
           <a:stretch>
             <a:fillRect/>
           </a:stretch>
@@ -13101,7 +14509,7 @@
           <a:noFill/>
         </p:spPr>
         <p:txBody>
-          <a:bodyPr wrap="square" anchor="t" lIns="0" rIns="0" tIns="0" bIns="0">
+          <a:bodyPr wrap="square" lIns="0" tIns="0" rIns="0" bIns="0" anchor="t">
             <a:spAutoFit/>
           </a:bodyPr>
           <a:lstStyle/>
@@ -13122,12 +14530,20 @@
                 <a:solidFill>
                   <a:srgbClr val="808080"/>
                 </a:solidFill>
-                <a:latin typeface="微软雅黑"/>
-                <a:ea typeface="微软雅黑"/>
-                <a:cs typeface="微软雅黑"/>
+                <a:latin typeface="微软雅黑" panose="020B0503020204020204" charset="-122"/>
+                <a:ea typeface="微软雅黑" panose="020B0503020204020204" charset="-122"/>
+                <a:cs typeface="微软雅黑" panose="020B0503020204020204" charset="-122"/>
               </a:rPr>
               <a:t>图 3　智学助手系统概念数据模型（CDM）图</a:t>
             </a:r>
+            <a:endParaRPr sz="1200" b="0">
+              <a:solidFill>
+                <a:srgbClr val="808080"/>
+              </a:solidFill>
+              <a:latin typeface="微软雅黑" panose="020B0503020204020204" charset="-122"/>
+              <a:ea typeface="微软雅黑" panose="020B0503020204020204" charset="-122"/>
+              <a:cs typeface="微软雅黑" panose="020B0503020204020204" charset="-122"/>
+            </a:endParaRPr>
           </a:p>
         </p:txBody>
       </p:sp>
@@ -13159,12 +14575,20 @@
                 <a:solidFill>
                   <a:srgbClr val="BDD7EE"/>
                 </a:solidFill>
-                <a:latin typeface="微软雅黑"/>
-                <a:ea typeface="微软雅黑"/>
-                <a:cs typeface="微软雅黑"/>
+                <a:latin typeface="微软雅黑" panose="020B0503020204020204" charset="-122"/>
+                <a:ea typeface="微软雅黑" panose="020B0503020204020204" charset="-122"/>
+                <a:cs typeface="微软雅黑" panose="020B0503020204020204" charset="-122"/>
               </a:rPr>
               <a:t>负责人：刘纲正</a:t>
             </a:r>
+            <a:endParaRPr sz="1300">
+              <a:solidFill>
+                <a:srgbClr val="BDD7EE"/>
+              </a:solidFill>
+              <a:latin typeface="微软雅黑" panose="020B0503020204020204" charset="-122"/>
+              <a:ea typeface="微软雅黑" panose="020B0503020204020204" charset="-122"/>
+              <a:cs typeface="微软雅黑" panose="020B0503020204020204" charset="-122"/>
+            </a:endParaRPr>
           </a:p>
         </p:txBody>
       </p:sp>
@@ -13177,7 +14601,7 @@
 </file>
 
 <file path=ppt/slides/slide8.xml><?xml version="1.0" encoding="utf-8"?>
-<p:sld xmlns:a="http://schemas.openxmlformats.org/drawingml/2006/main" xmlns:p="http://schemas.openxmlformats.org/presentationml/2006/main" xmlns:r="http://schemas.openxmlformats.org/officeDocument/2006/relationships">
+<p:sld xmlns:a="http://schemas.openxmlformats.org/drawingml/2006/main" xmlns:r="http://schemas.openxmlformats.org/officeDocument/2006/relationships" xmlns:p="http://schemas.openxmlformats.org/presentationml/2006/main">
   <p:cSld>
     <p:spTree>
       <p:nvGrpSpPr>
@@ -13247,7 +14671,7 @@
           <a:noFill/>
         </p:spPr>
         <p:txBody>
-          <a:bodyPr wrap="square" anchor="ctr" lIns="0" rIns="0" tIns="0" bIns="0">
+          <a:bodyPr wrap="square" lIns="0" tIns="0" rIns="0" bIns="0" anchor="ctr">
             <a:spAutoFit/>
           </a:bodyPr>
           <a:lstStyle/>
@@ -13268,12 +14692,20 @@
                 <a:solidFill>
                   <a:srgbClr val="FFFFFF"/>
                 </a:solidFill>
-                <a:latin typeface="微软雅黑"/>
-                <a:ea typeface="微软雅黑"/>
-                <a:cs typeface="微软雅黑"/>
+                <a:latin typeface="微软雅黑" panose="020B0503020204020204" charset="-122"/>
+                <a:ea typeface="微软雅黑" panose="020B0503020204020204" charset="-122"/>
+                <a:cs typeface="微软雅黑" panose="020B0503020204020204" charset="-122"/>
               </a:rPr>
               <a:t>4　数据库设计（三）：物理数据模型 PDM</a:t>
             </a:r>
+            <a:endParaRPr sz="2600" b="1">
+              <a:solidFill>
+                <a:srgbClr val="FFFFFF"/>
+              </a:solidFill>
+              <a:latin typeface="微软雅黑" panose="020B0503020204020204" charset="-122"/>
+              <a:ea typeface="微软雅黑" panose="020B0503020204020204" charset="-122"/>
+              <a:cs typeface="微软雅黑" panose="020B0503020204020204" charset="-122"/>
+            </a:endParaRPr>
           </a:p>
         </p:txBody>
       </p:sp>
@@ -13294,7 +14726,7 @@
           <a:noFill/>
         </p:spPr>
         <p:txBody>
-          <a:bodyPr wrap="square" anchor="t" lIns="0" rIns="0" tIns="0" bIns="0">
+          <a:bodyPr wrap="square" lIns="0" tIns="0" rIns="0" bIns="0" anchor="t">
             <a:spAutoFit/>
           </a:bodyPr>
           <a:lstStyle/>
@@ -13315,10 +14747,16 @@
                 <a:solidFill>
                   <a:srgbClr val="808080"/>
                 </a:solidFill>
-                <a:latin typeface="微软雅黑"/>
+                <a:latin typeface="微软雅黑" panose="020B0503020204020204" charset="-122"/>
               </a:rPr>
               <a:t>8</a:t>
             </a:r>
+            <a:endParaRPr sz="1000">
+              <a:solidFill>
+                <a:srgbClr val="808080"/>
+              </a:solidFill>
+              <a:latin typeface="微软雅黑" panose="020B0503020204020204" charset="-122"/>
+            </a:endParaRPr>
           </a:p>
         </p:txBody>
       </p:sp>
@@ -13358,12 +14796,20 @@
                           <a:solidFill>
                             <a:srgbClr val="FFFFFF"/>
                           </a:solidFill>
-                          <a:latin typeface="微软雅黑"/>
-                          <a:ea typeface="微软雅黑"/>
-                          <a:cs typeface="微软雅黑"/>
+                          <a:latin typeface="微软雅黑" panose="020B0503020204020204" charset="-122"/>
+                          <a:ea typeface="微软雅黑" panose="020B0503020204020204" charset="-122"/>
+                          <a:cs typeface="微软雅黑" panose="020B0503020204020204" charset="-122"/>
                         </a:rPr>
                         <a:t>序号</a:t>
                       </a:r>
+                      <a:endParaRPr sz="1300" b="1">
+                        <a:solidFill>
+                          <a:srgbClr val="FFFFFF"/>
+                        </a:solidFill>
+                        <a:latin typeface="微软雅黑" panose="020B0503020204020204" charset="-122"/>
+                        <a:ea typeface="微软雅黑" panose="020B0503020204020204" charset="-122"/>
+                        <a:cs typeface="微软雅黑" panose="020B0503020204020204" charset="-122"/>
+                      </a:endParaRPr>
                     </a:p>
                   </a:txBody>
                   <a:tcPr anchor="ctr">
@@ -13383,12 +14829,20 @@
                           <a:solidFill>
                             <a:srgbClr val="FFFFFF"/>
                           </a:solidFill>
-                          <a:latin typeface="微软雅黑"/>
-                          <a:ea typeface="微软雅黑"/>
-                          <a:cs typeface="微软雅黑"/>
+                          <a:latin typeface="微软雅黑" panose="020B0503020204020204" charset="-122"/>
+                          <a:ea typeface="微软雅黑" panose="020B0503020204020204" charset="-122"/>
+                          <a:cs typeface="微软雅黑" panose="020B0503020204020204" charset="-122"/>
                         </a:rPr>
                         <a:t>数据表名</a:t>
                       </a:r>
+                      <a:endParaRPr sz="1300" b="1">
+                        <a:solidFill>
+                          <a:srgbClr val="FFFFFF"/>
+                        </a:solidFill>
+                        <a:latin typeface="微软雅黑" panose="020B0503020204020204" charset="-122"/>
+                        <a:ea typeface="微软雅黑" panose="020B0503020204020204" charset="-122"/>
+                        <a:cs typeface="微软雅黑" panose="020B0503020204020204" charset="-122"/>
+                      </a:endParaRPr>
                     </a:p>
                   </a:txBody>
                   <a:tcPr anchor="ctr">
@@ -13408,12 +14862,20 @@
                           <a:solidFill>
                             <a:srgbClr val="FFFFFF"/>
                           </a:solidFill>
-                          <a:latin typeface="微软雅黑"/>
-                          <a:ea typeface="微软雅黑"/>
-                          <a:cs typeface="微软雅黑"/>
+                          <a:latin typeface="微软雅黑" panose="020B0503020204020204" charset="-122"/>
+                          <a:ea typeface="微软雅黑" panose="020B0503020204020204" charset="-122"/>
+                          <a:cs typeface="微软雅黑" panose="020B0503020204020204" charset="-122"/>
                         </a:rPr>
                         <a:t>用途说明</a:t>
                       </a:r>
+                      <a:endParaRPr sz="1300" b="1">
+                        <a:solidFill>
+                          <a:srgbClr val="FFFFFF"/>
+                        </a:solidFill>
+                        <a:latin typeface="微软雅黑" panose="020B0503020204020204" charset="-122"/>
+                        <a:ea typeface="微软雅黑" panose="020B0503020204020204" charset="-122"/>
+                        <a:cs typeface="微软雅黑" panose="020B0503020204020204" charset="-122"/>
+                      </a:endParaRPr>
                     </a:p>
                   </a:txBody>
                   <a:tcPr anchor="ctr">
@@ -13433,12 +14895,20 @@
                           <a:solidFill>
                             <a:srgbClr val="FFFFFF"/>
                           </a:solidFill>
-                          <a:latin typeface="微软雅黑"/>
-                          <a:ea typeface="微软雅黑"/>
-                          <a:cs typeface="微软雅黑"/>
+                          <a:latin typeface="微软雅黑" panose="020B0503020204020204" charset="-122"/>
+                          <a:ea typeface="微软雅黑" panose="020B0503020204020204" charset="-122"/>
+                          <a:cs typeface="微软雅黑" panose="020B0503020204020204" charset="-122"/>
                         </a:rPr>
                         <a:t>核心字段</a:t>
                       </a:r>
+                      <a:endParaRPr sz="1300" b="1">
+                        <a:solidFill>
+                          <a:srgbClr val="FFFFFF"/>
+                        </a:solidFill>
+                        <a:latin typeface="微软雅黑" panose="020B0503020204020204" charset="-122"/>
+                        <a:ea typeface="微软雅黑" panose="020B0503020204020204" charset="-122"/>
+                        <a:cs typeface="微软雅黑" panose="020B0503020204020204" charset="-122"/>
+                      </a:endParaRPr>
                     </a:p>
                   </a:txBody>
                   <a:tcPr anchor="ctr">
@@ -13460,12 +14930,20 @@
                           <a:solidFill>
                             <a:srgbClr val="222222"/>
                           </a:solidFill>
-                          <a:latin typeface="微软雅黑"/>
-                          <a:ea typeface="微软雅黑"/>
-                          <a:cs typeface="微软雅黑"/>
+                          <a:latin typeface="微软雅黑" panose="020B0503020204020204" charset="-122"/>
+                          <a:ea typeface="微软雅黑" panose="020B0503020204020204" charset="-122"/>
+                          <a:cs typeface="微软雅黑" panose="020B0503020204020204" charset="-122"/>
                         </a:rPr>
                         <a:t>1</a:t>
                       </a:r>
+                      <a:endParaRPr sz="1200" b="0">
+                        <a:solidFill>
+                          <a:srgbClr val="222222"/>
+                        </a:solidFill>
+                        <a:latin typeface="微软雅黑" panose="020B0503020204020204" charset="-122"/>
+                        <a:ea typeface="微软雅黑" panose="020B0503020204020204" charset="-122"/>
+                        <a:cs typeface="微软雅黑" panose="020B0503020204020204" charset="-122"/>
+                      </a:endParaRPr>
                     </a:p>
                   </a:txBody>
                   <a:tcPr anchor="ctr">
@@ -13485,12 +14963,20 @@
                           <a:solidFill>
                             <a:srgbClr val="222222"/>
                           </a:solidFill>
-                          <a:latin typeface="微软雅黑"/>
-                          <a:ea typeface="微软雅黑"/>
-                          <a:cs typeface="微软雅黑"/>
+                          <a:latin typeface="微软雅黑" panose="020B0503020204020204" charset="-122"/>
+                          <a:ea typeface="微软雅黑" panose="020B0503020204020204" charset="-122"/>
+                          <a:cs typeface="微软雅黑" panose="020B0503020204020204" charset="-122"/>
                         </a:rPr>
                         <a:t>courses</a:t>
                       </a:r>
+                      <a:endParaRPr sz="1200" b="0">
+                        <a:solidFill>
+                          <a:srgbClr val="222222"/>
+                        </a:solidFill>
+                        <a:latin typeface="微软雅黑" panose="020B0503020204020204" charset="-122"/>
+                        <a:ea typeface="微软雅黑" panose="020B0503020204020204" charset="-122"/>
+                        <a:cs typeface="微软雅黑" panose="020B0503020204020204" charset="-122"/>
+                      </a:endParaRPr>
                     </a:p>
                   </a:txBody>
                   <a:tcPr anchor="ctr">
@@ -13510,12 +14996,20 @@
                           <a:solidFill>
                             <a:srgbClr val="222222"/>
                           </a:solidFill>
-                          <a:latin typeface="微软雅黑"/>
-                          <a:ea typeface="微软雅黑"/>
-                          <a:cs typeface="微软雅黑"/>
+                          <a:latin typeface="微软雅黑" panose="020B0503020204020204" charset="-122"/>
+                          <a:ea typeface="微软雅黑" panose="020B0503020204020204" charset="-122"/>
+                          <a:cs typeface="微软雅黑" panose="020B0503020204020204" charset="-122"/>
                         </a:rPr>
                         <a:t>课程表，系统的数据组织单位</a:t>
                       </a:r>
+                      <a:endParaRPr sz="1200" b="0">
+                        <a:solidFill>
+                          <a:srgbClr val="222222"/>
+                        </a:solidFill>
+                        <a:latin typeface="微软雅黑" panose="020B0503020204020204" charset="-122"/>
+                        <a:ea typeface="微软雅黑" panose="020B0503020204020204" charset="-122"/>
+                        <a:cs typeface="微软雅黑" panose="020B0503020204020204" charset="-122"/>
+                      </a:endParaRPr>
                     </a:p>
                   </a:txBody>
                   <a:tcPr anchor="ctr">
@@ -13535,12 +15029,20 @@
                           <a:solidFill>
                             <a:srgbClr val="222222"/>
                           </a:solidFill>
-                          <a:latin typeface="微软雅黑"/>
-                          <a:ea typeface="微软雅黑"/>
-                          <a:cs typeface="微软雅黑"/>
+                          <a:latin typeface="微软雅黑" panose="020B0503020204020204" charset="-122"/>
+                          <a:ea typeface="微软雅黑" panose="020B0503020204020204" charset="-122"/>
+                          <a:cs typeface="微软雅黑" panose="020B0503020204020204" charset="-122"/>
                         </a:rPr>
                         <a:t>id、name、description</a:t>
                       </a:r>
+                      <a:endParaRPr sz="1200" b="0">
+                        <a:solidFill>
+                          <a:srgbClr val="222222"/>
+                        </a:solidFill>
+                        <a:latin typeface="微软雅黑" panose="020B0503020204020204" charset="-122"/>
+                        <a:ea typeface="微软雅黑" panose="020B0503020204020204" charset="-122"/>
+                        <a:cs typeface="微软雅黑" panose="020B0503020204020204" charset="-122"/>
+                      </a:endParaRPr>
                     </a:p>
                   </a:txBody>
                   <a:tcPr anchor="ctr">
@@ -13562,12 +15064,20 @@
                           <a:solidFill>
                             <a:srgbClr val="222222"/>
                           </a:solidFill>
-                          <a:latin typeface="微软雅黑"/>
-                          <a:ea typeface="微软雅黑"/>
-                          <a:cs typeface="微软雅黑"/>
+                          <a:latin typeface="微软雅黑" panose="020B0503020204020204" charset="-122"/>
+                          <a:ea typeface="微软雅黑" panose="020B0503020204020204" charset="-122"/>
+                          <a:cs typeface="微软雅黑" panose="020B0503020204020204" charset="-122"/>
                         </a:rPr>
                         <a:t>2</a:t>
                       </a:r>
+                      <a:endParaRPr sz="1200" b="0">
+                        <a:solidFill>
+                          <a:srgbClr val="222222"/>
+                        </a:solidFill>
+                        <a:latin typeface="微软雅黑" panose="020B0503020204020204" charset="-122"/>
+                        <a:ea typeface="微软雅黑" panose="020B0503020204020204" charset="-122"/>
+                        <a:cs typeface="微软雅黑" panose="020B0503020204020204" charset="-122"/>
+                      </a:endParaRPr>
                     </a:p>
                   </a:txBody>
                   <a:tcPr anchor="ctr">
@@ -13587,12 +15097,20 @@
                           <a:solidFill>
                             <a:srgbClr val="222222"/>
                           </a:solidFill>
-                          <a:latin typeface="微软雅黑"/>
-                          <a:ea typeface="微软雅黑"/>
-                          <a:cs typeface="微软雅黑"/>
+                          <a:latin typeface="微软雅黑" panose="020B0503020204020204" charset="-122"/>
+                          <a:ea typeface="微软雅黑" panose="020B0503020204020204" charset="-122"/>
+                          <a:cs typeface="微软雅黑" panose="020B0503020204020204" charset="-122"/>
                         </a:rPr>
                         <a:t>documents</a:t>
                       </a:r>
+                      <a:endParaRPr sz="1200" b="0">
+                        <a:solidFill>
+                          <a:srgbClr val="222222"/>
+                        </a:solidFill>
+                        <a:latin typeface="微软雅黑" panose="020B0503020204020204" charset="-122"/>
+                        <a:ea typeface="微软雅黑" panose="020B0503020204020204" charset="-122"/>
+                        <a:cs typeface="微软雅黑" panose="020B0503020204020204" charset="-122"/>
+                      </a:endParaRPr>
                     </a:p>
                   </a:txBody>
                   <a:tcPr anchor="ctr">
@@ -13612,12 +15130,20 @@
                           <a:solidFill>
                             <a:srgbClr val="222222"/>
                           </a:solidFill>
-                          <a:latin typeface="微软雅黑"/>
-                          <a:ea typeface="微软雅黑"/>
-                          <a:cs typeface="微软雅黑"/>
+                          <a:latin typeface="微软雅黑" panose="020B0503020204020204" charset="-122"/>
+                          <a:ea typeface="微软雅黑" panose="020B0503020204020204" charset="-122"/>
+                          <a:cs typeface="微软雅黑" panose="020B0503020204020204" charset="-122"/>
                         </a:rPr>
                         <a:t>文档表，记录上传资料与入库状态</a:t>
                       </a:r>
+                      <a:endParaRPr sz="1200" b="0">
+                        <a:solidFill>
+                          <a:srgbClr val="222222"/>
+                        </a:solidFill>
+                        <a:latin typeface="微软雅黑" panose="020B0503020204020204" charset="-122"/>
+                        <a:ea typeface="微软雅黑" panose="020B0503020204020204" charset="-122"/>
+                        <a:cs typeface="微软雅黑" panose="020B0503020204020204" charset="-122"/>
+                      </a:endParaRPr>
                     </a:p>
                   </a:txBody>
                   <a:tcPr anchor="ctr">
@@ -13637,12 +15163,20 @@
                           <a:solidFill>
                             <a:srgbClr val="222222"/>
                           </a:solidFill>
-                          <a:latin typeface="微软雅黑"/>
-                          <a:ea typeface="微软雅黑"/>
-                          <a:cs typeface="微软雅黑"/>
+                          <a:latin typeface="微软雅黑" panose="020B0503020204020204" charset="-122"/>
+                          <a:ea typeface="微软雅黑" panose="020B0503020204020204" charset="-122"/>
+                          <a:cs typeface="微软雅黑" panose="020B0503020204020204" charset="-122"/>
                         </a:rPr>
                         <a:t>course_id、filename、chunk_count、status</a:t>
                       </a:r>
+                      <a:endParaRPr sz="1200" b="0">
+                        <a:solidFill>
+                          <a:srgbClr val="222222"/>
+                        </a:solidFill>
+                        <a:latin typeface="微软雅黑" panose="020B0503020204020204" charset="-122"/>
+                        <a:ea typeface="微软雅黑" panose="020B0503020204020204" charset="-122"/>
+                        <a:cs typeface="微软雅黑" panose="020B0503020204020204" charset="-122"/>
+                      </a:endParaRPr>
                     </a:p>
                   </a:txBody>
                   <a:tcPr anchor="ctr">
@@ -13664,12 +15198,20 @@
                           <a:solidFill>
                             <a:srgbClr val="222222"/>
                           </a:solidFill>
-                          <a:latin typeface="微软雅黑"/>
-                          <a:ea typeface="微软雅黑"/>
-                          <a:cs typeface="微软雅黑"/>
+                          <a:latin typeface="微软雅黑" panose="020B0503020204020204" charset="-122"/>
+                          <a:ea typeface="微软雅黑" panose="020B0503020204020204" charset="-122"/>
+                          <a:cs typeface="微软雅黑" panose="020B0503020204020204" charset="-122"/>
                         </a:rPr>
                         <a:t>3</a:t>
                       </a:r>
+                      <a:endParaRPr sz="1200" b="0">
+                        <a:solidFill>
+                          <a:srgbClr val="222222"/>
+                        </a:solidFill>
+                        <a:latin typeface="微软雅黑" panose="020B0503020204020204" charset="-122"/>
+                        <a:ea typeface="微软雅黑" panose="020B0503020204020204" charset="-122"/>
+                        <a:cs typeface="微软雅黑" panose="020B0503020204020204" charset="-122"/>
+                      </a:endParaRPr>
                     </a:p>
                   </a:txBody>
                   <a:tcPr anchor="ctr">
@@ -13689,12 +15231,20 @@
                           <a:solidFill>
                             <a:srgbClr val="222222"/>
                           </a:solidFill>
-                          <a:latin typeface="微软雅黑"/>
-                          <a:ea typeface="微软雅黑"/>
-                          <a:cs typeface="微软雅黑"/>
+                          <a:latin typeface="微软雅黑" panose="020B0503020204020204" charset="-122"/>
+                          <a:ea typeface="微软雅黑" panose="020B0503020204020204" charset="-122"/>
+                          <a:cs typeface="微软雅黑" panose="020B0503020204020204" charset="-122"/>
                         </a:rPr>
                         <a:t>quiz_batches</a:t>
                       </a:r>
+                      <a:endParaRPr sz="1200" b="0">
+                        <a:solidFill>
+                          <a:srgbClr val="222222"/>
+                        </a:solidFill>
+                        <a:latin typeface="微软雅黑" panose="020B0503020204020204" charset="-122"/>
+                        <a:ea typeface="微软雅黑" panose="020B0503020204020204" charset="-122"/>
+                        <a:cs typeface="微软雅黑" panose="020B0503020204020204" charset="-122"/>
+                      </a:endParaRPr>
                     </a:p>
                   </a:txBody>
                   <a:tcPr anchor="ctr">
@@ -13714,12 +15264,20 @@
                           <a:solidFill>
                             <a:srgbClr val="222222"/>
                           </a:solidFill>
-                          <a:latin typeface="微软雅黑"/>
-                          <a:ea typeface="微软雅黑"/>
-                          <a:cs typeface="微软雅黑"/>
+                          <a:latin typeface="微软雅黑" panose="020B0503020204020204" charset="-122"/>
+                          <a:ea typeface="微软雅黑" panose="020B0503020204020204" charset="-122"/>
+                          <a:cs typeface="微软雅黑" panose="020B0503020204020204" charset="-122"/>
                         </a:rPr>
                         <a:t>出题批次表，记录一次出题参数</a:t>
                       </a:r>
+                      <a:endParaRPr sz="1200" b="0">
+                        <a:solidFill>
+                          <a:srgbClr val="222222"/>
+                        </a:solidFill>
+                        <a:latin typeface="微软雅黑" panose="020B0503020204020204" charset="-122"/>
+                        <a:ea typeface="微软雅黑" panose="020B0503020204020204" charset="-122"/>
+                        <a:cs typeface="微软雅黑" panose="020B0503020204020204" charset="-122"/>
+                      </a:endParaRPr>
                     </a:p>
                   </a:txBody>
                   <a:tcPr anchor="ctr">
@@ -13739,12 +15297,20 @@
                           <a:solidFill>
                             <a:srgbClr val="222222"/>
                           </a:solidFill>
-                          <a:latin typeface="微软雅黑"/>
-                          <a:ea typeface="微软雅黑"/>
-                          <a:cs typeface="微软雅黑"/>
+                          <a:latin typeface="微软雅黑" panose="020B0503020204020204" charset="-122"/>
+                          <a:ea typeface="微软雅黑" panose="020B0503020204020204" charset="-122"/>
+                          <a:cs typeface="微软雅黑" panose="020B0503020204020204" charset="-122"/>
                         </a:rPr>
                         <a:t>course_id、question_type、difficulty、count</a:t>
                       </a:r>
+                      <a:endParaRPr sz="1200" b="0">
+                        <a:solidFill>
+                          <a:srgbClr val="222222"/>
+                        </a:solidFill>
+                        <a:latin typeface="微软雅黑" panose="020B0503020204020204" charset="-122"/>
+                        <a:ea typeface="微软雅黑" panose="020B0503020204020204" charset="-122"/>
+                        <a:cs typeface="微软雅黑" panose="020B0503020204020204" charset="-122"/>
+                      </a:endParaRPr>
                     </a:p>
                   </a:txBody>
                   <a:tcPr anchor="ctr">
@@ -13766,12 +15332,20 @@
                           <a:solidFill>
                             <a:srgbClr val="222222"/>
                           </a:solidFill>
-                          <a:latin typeface="微软雅黑"/>
-                          <a:ea typeface="微软雅黑"/>
-                          <a:cs typeface="微软雅黑"/>
+                          <a:latin typeface="微软雅黑" panose="020B0503020204020204" charset="-122"/>
+                          <a:ea typeface="微软雅黑" panose="020B0503020204020204" charset="-122"/>
+                          <a:cs typeface="微软雅黑" panose="020B0503020204020204" charset="-122"/>
                         </a:rPr>
                         <a:t>4</a:t>
                       </a:r>
+                      <a:endParaRPr sz="1200" b="0">
+                        <a:solidFill>
+                          <a:srgbClr val="222222"/>
+                        </a:solidFill>
+                        <a:latin typeface="微软雅黑" panose="020B0503020204020204" charset="-122"/>
+                        <a:ea typeface="微软雅黑" panose="020B0503020204020204" charset="-122"/>
+                        <a:cs typeface="微软雅黑" panose="020B0503020204020204" charset="-122"/>
+                      </a:endParaRPr>
                     </a:p>
                   </a:txBody>
                   <a:tcPr anchor="ctr">
@@ -13791,12 +15365,20 @@
                           <a:solidFill>
                             <a:srgbClr val="222222"/>
                           </a:solidFill>
-                          <a:latin typeface="微软雅黑"/>
-                          <a:ea typeface="微软雅黑"/>
-                          <a:cs typeface="微软雅黑"/>
+                          <a:latin typeface="微软雅黑" panose="020B0503020204020204" charset="-122"/>
+                          <a:ea typeface="微软雅黑" panose="020B0503020204020204" charset="-122"/>
+                          <a:cs typeface="微软雅黑" panose="020B0503020204020204" charset="-122"/>
                         </a:rPr>
                         <a:t>questions</a:t>
                       </a:r>
+                      <a:endParaRPr sz="1200" b="0">
+                        <a:solidFill>
+                          <a:srgbClr val="222222"/>
+                        </a:solidFill>
+                        <a:latin typeface="微软雅黑" panose="020B0503020204020204" charset="-122"/>
+                        <a:ea typeface="微软雅黑" panose="020B0503020204020204" charset="-122"/>
+                        <a:cs typeface="微软雅黑" panose="020B0503020204020204" charset="-122"/>
+                      </a:endParaRPr>
                     </a:p>
                   </a:txBody>
                   <a:tcPr anchor="ctr">
@@ -13816,12 +15398,20 @@
                           <a:solidFill>
                             <a:srgbClr val="222222"/>
                           </a:solidFill>
-                          <a:latin typeface="微软雅黑"/>
-                          <a:ea typeface="微软雅黑"/>
-                          <a:cs typeface="微软雅黑"/>
+                          <a:latin typeface="微软雅黑" panose="020B0503020204020204" charset="-122"/>
+                          <a:ea typeface="微软雅黑" panose="020B0503020204020204" charset="-122"/>
+                          <a:cs typeface="微软雅黑" panose="020B0503020204020204" charset="-122"/>
                         </a:rPr>
                         <a:t>题目表，存储生成的题目</a:t>
                       </a:r>
+                      <a:endParaRPr sz="1200" b="0">
+                        <a:solidFill>
+                          <a:srgbClr val="222222"/>
+                        </a:solidFill>
+                        <a:latin typeface="微软雅黑" panose="020B0503020204020204" charset="-122"/>
+                        <a:ea typeface="微软雅黑" panose="020B0503020204020204" charset="-122"/>
+                        <a:cs typeface="微软雅黑" panose="020B0503020204020204" charset="-122"/>
+                      </a:endParaRPr>
                     </a:p>
                   </a:txBody>
                   <a:tcPr anchor="ctr">
@@ -13841,12 +15431,20 @@
                           <a:solidFill>
                             <a:srgbClr val="222222"/>
                           </a:solidFill>
-                          <a:latin typeface="微软雅黑"/>
-                          <a:ea typeface="微软雅黑"/>
-                          <a:cs typeface="微软雅黑"/>
+                          <a:latin typeface="微软雅黑" panose="020B0503020204020204" charset="-122"/>
+                          <a:ea typeface="微软雅黑" panose="020B0503020204020204" charset="-122"/>
+                          <a:cs typeface="微软雅黑" panose="020B0503020204020204" charset="-122"/>
                         </a:rPr>
                         <a:t>batch_id、course_id、type、options、answer</a:t>
                       </a:r>
+                      <a:endParaRPr sz="1200" b="0">
+                        <a:solidFill>
+                          <a:srgbClr val="222222"/>
+                        </a:solidFill>
+                        <a:latin typeface="微软雅黑" panose="020B0503020204020204" charset="-122"/>
+                        <a:ea typeface="微软雅黑" panose="020B0503020204020204" charset="-122"/>
+                        <a:cs typeface="微软雅黑" panose="020B0503020204020204" charset="-122"/>
+                      </a:endParaRPr>
                     </a:p>
                   </a:txBody>
                   <a:tcPr anchor="ctr">
@@ -13868,12 +15466,20 @@
                           <a:solidFill>
                             <a:srgbClr val="222222"/>
                           </a:solidFill>
-                          <a:latin typeface="微软雅黑"/>
-                          <a:ea typeface="微软雅黑"/>
-                          <a:cs typeface="微软雅黑"/>
+                          <a:latin typeface="微软雅黑" panose="020B0503020204020204" charset="-122"/>
+                          <a:ea typeface="微软雅黑" panose="020B0503020204020204" charset="-122"/>
+                          <a:cs typeface="微软雅黑" panose="020B0503020204020204" charset="-122"/>
                         </a:rPr>
                         <a:t>5</a:t>
                       </a:r>
+                      <a:endParaRPr sz="1200" b="0">
+                        <a:solidFill>
+                          <a:srgbClr val="222222"/>
+                        </a:solidFill>
+                        <a:latin typeface="微软雅黑" panose="020B0503020204020204" charset="-122"/>
+                        <a:ea typeface="微软雅黑" panose="020B0503020204020204" charset="-122"/>
+                        <a:cs typeface="微软雅黑" panose="020B0503020204020204" charset="-122"/>
+                      </a:endParaRPr>
                     </a:p>
                   </a:txBody>
                   <a:tcPr anchor="ctr">
@@ -13893,12 +15499,20 @@
                           <a:solidFill>
                             <a:srgbClr val="222222"/>
                           </a:solidFill>
-                          <a:latin typeface="微软雅黑"/>
-                          <a:ea typeface="微软雅黑"/>
-                          <a:cs typeface="微软雅黑"/>
+                          <a:latin typeface="微软雅黑" panose="020B0503020204020204" charset="-122"/>
+                          <a:ea typeface="微软雅黑" panose="020B0503020204020204" charset="-122"/>
+                          <a:cs typeface="微软雅黑" panose="020B0503020204020204" charset="-122"/>
                         </a:rPr>
                         <a:t>mistakes</a:t>
                       </a:r>
+                      <a:endParaRPr sz="1200" b="0">
+                        <a:solidFill>
+                          <a:srgbClr val="222222"/>
+                        </a:solidFill>
+                        <a:latin typeface="微软雅黑" panose="020B0503020204020204" charset="-122"/>
+                        <a:ea typeface="微软雅黑" panose="020B0503020204020204" charset="-122"/>
+                        <a:cs typeface="微软雅黑" panose="020B0503020204020204" charset="-122"/>
+                      </a:endParaRPr>
                     </a:p>
                   </a:txBody>
                   <a:tcPr anchor="ctr">
@@ -13918,12 +15532,20 @@
                           <a:solidFill>
                             <a:srgbClr val="222222"/>
                           </a:solidFill>
-                          <a:latin typeface="微软雅黑"/>
-                          <a:ea typeface="微软雅黑"/>
-                          <a:cs typeface="微软雅黑"/>
+                          <a:latin typeface="微软雅黑" panose="020B0503020204020204" charset="-122"/>
+                          <a:ea typeface="微软雅黑" panose="020B0503020204020204" charset="-122"/>
+                          <a:cs typeface="微软雅黑" panose="020B0503020204020204" charset="-122"/>
                         </a:rPr>
                         <a:t>错题表，沉淀答错题目</a:t>
                       </a:r>
+                      <a:endParaRPr sz="1200" b="0">
+                        <a:solidFill>
+                          <a:srgbClr val="222222"/>
+                        </a:solidFill>
+                        <a:latin typeface="微软雅黑" panose="020B0503020204020204" charset="-122"/>
+                        <a:ea typeface="微软雅黑" panose="020B0503020204020204" charset="-122"/>
+                        <a:cs typeface="微软雅黑" panose="020B0503020204020204" charset="-122"/>
+                      </a:endParaRPr>
                     </a:p>
                   </a:txBody>
                   <a:tcPr anchor="ctr">
@@ -13943,12 +15565,20 @@
                           <a:solidFill>
                             <a:srgbClr val="222222"/>
                           </a:solidFill>
-                          <a:latin typeface="微软雅黑"/>
-                          <a:ea typeface="微软雅黑"/>
-                          <a:cs typeface="微软雅黑"/>
+                          <a:latin typeface="微软雅黑" panose="020B0503020204020204" charset="-122"/>
+                          <a:ea typeface="微软雅黑" panose="020B0503020204020204" charset="-122"/>
+                          <a:cs typeface="微软雅黑" panose="020B0503020204020204" charset="-122"/>
                         </a:rPr>
                         <a:t>course_id、question_id、user_answer、status</a:t>
                       </a:r>
+                      <a:endParaRPr sz="1200" b="0">
+                        <a:solidFill>
+                          <a:srgbClr val="222222"/>
+                        </a:solidFill>
+                        <a:latin typeface="微软雅黑" panose="020B0503020204020204" charset="-122"/>
+                        <a:ea typeface="微软雅黑" panose="020B0503020204020204" charset="-122"/>
+                        <a:cs typeface="微软雅黑" panose="020B0503020204020204" charset="-122"/>
+                      </a:endParaRPr>
                     </a:p>
                   </a:txBody>
                   <a:tcPr anchor="ctr">
@@ -13970,12 +15600,20 @@
                           <a:solidFill>
                             <a:srgbClr val="222222"/>
                           </a:solidFill>
-                          <a:latin typeface="微软雅黑"/>
-                          <a:ea typeface="微软雅黑"/>
-                          <a:cs typeface="微软雅黑"/>
+                          <a:latin typeface="微软雅黑" panose="020B0503020204020204" charset="-122"/>
+                          <a:ea typeface="微软雅黑" panose="020B0503020204020204" charset="-122"/>
+                          <a:cs typeface="微软雅黑" panose="020B0503020204020204" charset="-122"/>
                         </a:rPr>
                         <a:t>6</a:t>
                       </a:r>
+                      <a:endParaRPr sz="1200" b="0">
+                        <a:solidFill>
+                          <a:srgbClr val="222222"/>
+                        </a:solidFill>
+                        <a:latin typeface="微软雅黑" panose="020B0503020204020204" charset="-122"/>
+                        <a:ea typeface="微软雅黑" panose="020B0503020204020204" charset="-122"/>
+                        <a:cs typeface="微软雅黑" panose="020B0503020204020204" charset="-122"/>
+                      </a:endParaRPr>
                     </a:p>
                   </a:txBody>
                   <a:tcPr anchor="ctr">
@@ -13995,12 +15633,20 @@
                           <a:solidFill>
                             <a:srgbClr val="222222"/>
                           </a:solidFill>
-                          <a:latin typeface="微软雅黑"/>
-                          <a:ea typeface="微软雅黑"/>
-                          <a:cs typeface="微软雅黑"/>
+                          <a:latin typeface="微软雅黑" panose="020B0503020204020204" charset="-122"/>
+                          <a:ea typeface="微软雅黑" panose="020B0503020204020204" charset="-122"/>
+                          <a:cs typeface="微软雅黑" panose="020B0503020204020204" charset="-122"/>
                         </a:rPr>
                         <a:t>review_plans</a:t>
                       </a:r>
+                      <a:endParaRPr sz="1200" b="0">
+                        <a:solidFill>
+                          <a:srgbClr val="222222"/>
+                        </a:solidFill>
+                        <a:latin typeface="微软雅黑" panose="020B0503020204020204" charset="-122"/>
+                        <a:ea typeface="微软雅黑" panose="020B0503020204020204" charset="-122"/>
+                        <a:cs typeface="微软雅黑" panose="020B0503020204020204" charset="-122"/>
+                      </a:endParaRPr>
                     </a:p>
                   </a:txBody>
                   <a:tcPr anchor="ctr">
@@ -14020,12 +15666,20 @@
                           <a:solidFill>
                             <a:srgbClr val="222222"/>
                           </a:solidFill>
-                          <a:latin typeface="微软雅黑"/>
-                          <a:ea typeface="微软雅黑"/>
-                          <a:cs typeface="微软雅黑"/>
+                          <a:latin typeface="微软雅黑" panose="020B0503020204020204" charset="-122"/>
+                          <a:ea typeface="微软雅黑" panose="020B0503020204020204" charset="-122"/>
+                          <a:cs typeface="微软雅黑" panose="020B0503020204020204" charset="-122"/>
                         </a:rPr>
                         <a:t>复习计划表</a:t>
                       </a:r>
+                      <a:endParaRPr sz="1200" b="0">
+                        <a:solidFill>
+                          <a:srgbClr val="222222"/>
+                        </a:solidFill>
+                        <a:latin typeface="微软雅黑" panose="020B0503020204020204" charset="-122"/>
+                        <a:ea typeface="微软雅黑" panose="020B0503020204020204" charset="-122"/>
+                        <a:cs typeface="微软雅黑" panose="020B0503020204020204" charset="-122"/>
+                      </a:endParaRPr>
                     </a:p>
                   </a:txBody>
                   <a:tcPr anchor="ctr">
@@ -14045,12 +15699,20 @@
                           <a:solidFill>
                             <a:srgbClr val="222222"/>
                           </a:solidFill>
-                          <a:latin typeface="微软雅黑"/>
-                          <a:ea typeface="微软雅黑"/>
-                          <a:cs typeface="微软雅黑"/>
+                          <a:latin typeface="微软雅黑" panose="020B0503020204020204" charset="-122"/>
+                          <a:ea typeface="微软雅黑" panose="020B0503020204020204" charset="-122"/>
+                          <a:cs typeface="微软雅黑" panose="020B0503020204020204" charset="-122"/>
                         </a:rPr>
                         <a:t>course_id、name、status</a:t>
                       </a:r>
+                      <a:endParaRPr sz="1200" b="0">
+                        <a:solidFill>
+                          <a:srgbClr val="222222"/>
+                        </a:solidFill>
+                        <a:latin typeface="微软雅黑" panose="020B0503020204020204" charset="-122"/>
+                        <a:ea typeface="微软雅黑" panose="020B0503020204020204" charset="-122"/>
+                        <a:cs typeface="微软雅黑" panose="020B0503020204020204" charset="-122"/>
+                      </a:endParaRPr>
                     </a:p>
                   </a:txBody>
                   <a:tcPr anchor="ctr">
@@ -14072,12 +15734,20 @@
                           <a:solidFill>
                             <a:srgbClr val="222222"/>
                           </a:solidFill>
-                          <a:latin typeface="微软雅黑"/>
-                          <a:ea typeface="微软雅黑"/>
-                          <a:cs typeface="微软雅黑"/>
+                          <a:latin typeface="微软雅黑" panose="020B0503020204020204" charset="-122"/>
+                          <a:ea typeface="微软雅黑" panose="020B0503020204020204" charset="-122"/>
+                          <a:cs typeface="微软雅黑" panose="020B0503020204020204" charset="-122"/>
                         </a:rPr>
                         <a:t>7</a:t>
                       </a:r>
+                      <a:endParaRPr sz="1200" b="0">
+                        <a:solidFill>
+                          <a:srgbClr val="222222"/>
+                        </a:solidFill>
+                        <a:latin typeface="微软雅黑" panose="020B0503020204020204" charset="-122"/>
+                        <a:ea typeface="微软雅黑" panose="020B0503020204020204" charset="-122"/>
+                        <a:cs typeface="微软雅黑" panose="020B0503020204020204" charset="-122"/>
+                      </a:endParaRPr>
                     </a:p>
                   </a:txBody>
                   <a:tcPr anchor="ctr">
@@ -14097,12 +15767,20 @@
                           <a:solidFill>
                             <a:srgbClr val="222222"/>
                           </a:solidFill>
-                          <a:latin typeface="微软雅黑"/>
-                          <a:ea typeface="微软雅黑"/>
-                          <a:cs typeface="微软雅黑"/>
+                          <a:latin typeface="微软雅黑" panose="020B0503020204020204" charset="-122"/>
+                          <a:ea typeface="微软雅黑" panose="020B0503020204020204" charset="-122"/>
+                          <a:cs typeface="微软雅黑" panose="020B0503020204020204" charset="-122"/>
                         </a:rPr>
                         <a:t>review_items</a:t>
                       </a:r>
+                      <a:endParaRPr sz="1200" b="0">
+                        <a:solidFill>
+                          <a:srgbClr val="222222"/>
+                        </a:solidFill>
+                        <a:latin typeface="微软雅黑" panose="020B0503020204020204" charset="-122"/>
+                        <a:ea typeface="微软雅黑" panose="020B0503020204020204" charset="-122"/>
+                        <a:cs typeface="微软雅黑" panose="020B0503020204020204" charset="-122"/>
+                      </a:endParaRPr>
                     </a:p>
                   </a:txBody>
                   <a:tcPr anchor="ctr">
@@ -14122,12 +15800,20 @@
                           <a:solidFill>
                             <a:srgbClr val="222222"/>
                           </a:solidFill>
-                          <a:latin typeface="微软雅黑"/>
-                          <a:ea typeface="微软雅黑"/>
-                          <a:cs typeface="微软雅黑"/>
+                          <a:latin typeface="微软雅黑" panose="020B0503020204020204" charset="-122"/>
+                          <a:ea typeface="微软雅黑" panose="020B0503020204020204" charset="-122"/>
+                          <a:cs typeface="微软雅黑" panose="020B0503020204020204" charset="-122"/>
                         </a:rPr>
                         <a:t>复习条目表，按日期组织</a:t>
                       </a:r>
+                      <a:endParaRPr sz="1200" b="0">
+                        <a:solidFill>
+                          <a:srgbClr val="222222"/>
+                        </a:solidFill>
+                        <a:latin typeface="微软雅黑" panose="020B0503020204020204" charset="-122"/>
+                        <a:ea typeface="微软雅黑" panose="020B0503020204020204" charset="-122"/>
+                        <a:cs typeface="微软雅黑" panose="020B0503020204020204" charset="-122"/>
+                      </a:endParaRPr>
                     </a:p>
                   </a:txBody>
                   <a:tcPr anchor="ctr">
@@ -14147,12 +15833,20 @@
                           <a:solidFill>
                             <a:srgbClr val="222222"/>
                           </a:solidFill>
-                          <a:latin typeface="微软雅黑"/>
-                          <a:ea typeface="微软雅黑"/>
-                          <a:cs typeface="微软雅黑"/>
+                          <a:latin typeface="微软雅黑" panose="020B0503020204020204" charset="-122"/>
+                          <a:ea typeface="微软雅黑" panose="020B0503020204020204" charset="-122"/>
+                          <a:cs typeface="微软雅黑" panose="020B0503020204020204" charset="-122"/>
                         </a:rPr>
                         <a:t>plan_id、question_id、review_date、completed</a:t>
                       </a:r>
+                      <a:endParaRPr sz="1200" b="0">
+                        <a:solidFill>
+                          <a:srgbClr val="222222"/>
+                        </a:solidFill>
+                        <a:latin typeface="微软雅黑" panose="020B0503020204020204" charset="-122"/>
+                        <a:ea typeface="微软雅黑" panose="020B0503020204020204" charset="-122"/>
+                        <a:cs typeface="微软雅黑" panose="020B0503020204020204" charset="-122"/>
+                      </a:endParaRPr>
                     </a:p>
                   </a:txBody>
                   <a:tcPr anchor="ctr">
@@ -14183,7 +15877,7 @@
           <a:noFill/>
         </p:spPr>
         <p:txBody>
-          <a:bodyPr wrap="square" anchor="t" lIns="0" rIns="0" tIns="0" bIns="0">
+          <a:bodyPr wrap="square" lIns="0" tIns="0" rIns="0" bIns="0" anchor="t">
             <a:spAutoFit/>
           </a:bodyPr>
           <a:lstStyle/>
@@ -14204,12 +15898,20 @@
                 <a:solidFill>
                   <a:srgbClr val="2E75B6"/>
                 </a:solidFill>
-                <a:latin typeface="微软雅黑"/>
-                <a:ea typeface="微软雅黑"/>
-                <a:cs typeface="微软雅黑"/>
+                <a:latin typeface="微软雅黑" panose="020B0503020204020204" charset="-122"/>
+                <a:ea typeface="微软雅黑" panose="020B0503020204020204" charset="-122"/>
+                <a:cs typeface="微软雅黑" panose="020B0503020204020204" charset="-122"/>
               </a:rPr>
               <a:t>实现要点：</a:t>
             </a:r>
+            <a:endParaRPr sz="1500" b="1">
+              <a:solidFill>
+                <a:srgbClr val="2E75B6"/>
+              </a:solidFill>
+              <a:latin typeface="微软雅黑" panose="020B0503020204020204" charset="-122"/>
+              <a:ea typeface="微软雅黑" panose="020B0503020204020204" charset="-122"/>
+              <a:cs typeface="微软雅黑" panose="020B0503020204020204" charset="-122"/>
+            </a:endParaRPr>
           </a:p>
           <a:p>
             <a:pPr algn="l">
@@ -14228,12 +15930,20 @@
                 <a:solidFill>
                   <a:srgbClr val="222222"/>
                 </a:solidFill>
-                <a:latin typeface="微软雅黑"/>
-                <a:ea typeface="微软雅黑"/>
-                <a:cs typeface="微软雅黑"/>
+                <a:latin typeface="微软雅黑" panose="020B0503020204020204" charset="-122"/>
+                <a:ea typeface="微软雅黑" panose="020B0503020204020204" charset="-122"/>
+                <a:cs typeface="微软雅黑" panose="020B0503020204020204" charset="-122"/>
               </a:rPr>
               <a:t>全部表由 app/models 下的 SQLAlchemy ORM 模型声明，应用启动时自动建表，字符集 utf8mb4；删除课程时按“复习条目—复习计划—错题—题目—出题批次—文档—课程”逆序级联清理，并同步删除 Chroma 中对应集合。</a:t>
             </a:r>
+            <a:endParaRPr sz="1400" b="0">
+              <a:solidFill>
+                <a:srgbClr val="222222"/>
+              </a:solidFill>
+              <a:latin typeface="微软雅黑" panose="020B0503020204020204" charset="-122"/>
+              <a:ea typeface="微软雅黑" panose="020B0503020204020204" charset="-122"/>
+              <a:cs typeface="微软雅黑" panose="020B0503020204020204" charset="-122"/>
+            </a:endParaRPr>
           </a:p>
         </p:txBody>
       </p:sp>
@@ -14265,12 +15975,20 @@
                 <a:solidFill>
                   <a:srgbClr val="BDD7EE"/>
                 </a:solidFill>
-                <a:latin typeface="微软雅黑"/>
-                <a:ea typeface="微软雅黑"/>
-                <a:cs typeface="微软雅黑"/>
+                <a:latin typeface="微软雅黑" panose="020B0503020204020204" charset="-122"/>
+                <a:ea typeface="微软雅黑" panose="020B0503020204020204" charset="-122"/>
+                <a:cs typeface="微软雅黑" panose="020B0503020204020204" charset="-122"/>
               </a:rPr>
               <a:t>负责人：刘纲正</a:t>
             </a:r>
+            <a:endParaRPr sz="1300">
+              <a:solidFill>
+                <a:srgbClr val="BDD7EE"/>
+              </a:solidFill>
+              <a:latin typeface="微软雅黑" panose="020B0503020204020204" charset="-122"/>
+              <a:ea typeface="微软雅黑" panose="020B0503020204020204" charset="-122"/>
+              <a:cs typeface="微软雅黑" panose="020B0503020204020204" charset="-122"/>
+            </a:endParaRPr>
           </a:p>
         </p:txBody>
       </p:sp>
@@ -14283,7 +16001,7 @@
 </file>
 
 <file path=ppt/slides/slide9.xml><?xml version="1.0" encoding="utf-8"?>
-<p:sld xmlns:a="http://schemas.openxmlformats.org/drawingml/2006/main" xmlns:p="http://schemas.openxmlformats.org/presentationml/2006/main" xmlns:r="http://schemas.openxmlformats.org/officeDocument/2006/relationships">
+<p:sld xmlns:a="http://schemas.openxmlformats.org/drawingml/2006/main" xmlns:r="http://schemas.openxmlformats.org/officeDocument/2006/relationships" xmlns:p="http://schemas.openxmlformats.org/presentationml/2006/main">
   <p:cSld>
     <p:spTree>
       <p:nvGrpSpPr>
@@ -14353,7 +16071,7 @@
           <a:noFill/>
         </p:spPr>
         <p:txBody>
-          <a:bodyPr wrap="square" anchor="ctr" lIns="0" rIns="0" tIns="0" bIns="0">
+          <a:bodyPr wrap="square" lIns="0" tIns="0" rIns="0" bIns="0" anchor="ctr">
             <a:spAutoFit/>
           </a:bodyPr>
           <a:lstStyle/>
@@ -14374,12 +16092,20 @@
                 <a:solidFill>
                   <a:srgbClr val="FFFFFF"/>
                 </a:solidFill>
-                <a:latin typeface="微软雅黑"/>
-                <a:ea typeface="微软雅黑"/>
-                <a:cs typeface="微软雅黑"/>
+                <a:latin typeface="微软雅黑" panose="020B0503020204020204" charset="-122"/>
+                <a:ea typeface="微软雅黑" panose="020B0503020204020204" charset="-122"/>
+                <a:cs typeface="微软雅黑" panose="020B0503020204020204" charset="-122"/>
               </a:rPr>
               <a:t>5　功能模块设计与实现</a:t>
             </a:r>
+            <a:endParaRPr sz="2600" b="1">
+              <a:solidFill>
+                <a:srgbClr val="FFFFFF"/>
+              </a:solidFill>
+              <a:latin typeface="微软雅黑" panose="020B0503020204020204" charset="-122"/>
+              <a:ea typeface="微软雅黑" panose="020B0503020204020204" charset="-122"/>
+              <a:cs typeface="微软雅黑" panose="020B0503020204020204" charset="-122"/>
+            </a:endParaRPr>
           </a:p>
         </p:txBody>
       </p:sp>
@@ -14400,7 +16126,7 @@
           <a:noFill/>
         </p:spPr>
         <p:txBody>
-          <a:bodyPr wrap="square" anchor="t" lIns="0" rIns="0" tIns="0" bIns="0">
+          <a:bodyPr wrap="square" lIns="0" tIns="0" rIns="0" bIns="0" anchor="t">
             <a:spAutoFit/>
           </a:bodyPr>
           <a:lstStyle/>
@@ -14421,10 +16147,16 @@
                 <a:solidFill>
                   <a:srgbClr val="808080"/>
                 </a:solidFill>
-                <a:latin typeface="微软雅黑"/>
+                <a:latin typeface="微软雅黑" panose="020B0503020204020204" charset="-122"/>
               </a:rPr>
               <a:t>9</a:t>
             </a:r>
+            <a:endParaRPr sz="1000">
+              <a:solidFill>
+                <a:srgbClr val="808080"/>
+              </a:solidFill>
+              <a:latin typeface="微软雅黑" panose="020B0503020204020204" charset="-122"/>
+            </a:endParaRPr>
           </a:p>
         </p:txBody>
       </p:sp>
@@ -14464,12 +16196,20 @@
                           <a:solidFill>
                             <a:srgbClr val="FFFFFF"/>
                           </a:solidFill>
-                          <a:latin typeface="微软雅黑"/>
-                          <a:ea typeface="微软雅黑"/>
-                          <a:cs typeface="微软雅黑"/>
+                          <a:latin typeface="微软雅黑" panose="020B0503020204020204" charset="-122"/>
+                          <a:ea typeface="微软雅黑" panose="020B0503020204020204" charset="-122"/>
+                          <a:cs typeface="微软雅黑" panose="020B0503020204020204" charset="-122"/>
                         </a:rPr>
                         <a:t>编号</a:t>
                       </a:r>
+                      <a:endParaRPr sz="1300" b="1">
+                        <a:solidFill>
+                          <a:srgbClr val="FFFFFF"/>
+                        </a:solidFill>
+                        <a:latin typeface="微软雅黑" panose="020B0503020204020204" charset="-122"/>
+                        <a:ea typeface="微软雅黑" panose="020B0503020204020204" charset="-122"/>
+                        <a:cs typeface="微软雅黑" panose="020B0503020204020204" charset="-122"/>
+                      </a:endParaRPr>
                     </a:p>
                   </a:txBody>
                   <a:tcPr anchor="ctr">
@@ -14489,12 +16229,20 @@
                           <a:solidFill>
                             <a:srgbClr val="FFFFFF"/>
                           </a:solidFill>
-                          <a:latin typeface="微软雅黑"/>
-                          <a:ea typeface="微软雅黑"/>
-                          <a:cs typeface="微软雅黑"/>
+                          <a:latin typeface="微软雅黑" panose="020B0503020204020204" charset="-122"/>
+                          <a:ea typeface="微软雅黑" panose="020B0503020204020204" charset="-122"/>
+                          <a:cs typeface="微软雅黑" panose="020B0503020204020204" charset="-122"/>
                         </a:rPr>
                         <a:t>功能模块</a:t>
                       </a:r>
+                      <a:endParaRPr sz="1300" b="1">
+                        <a:solidFill>
+                          <a:srgbClr val="FFFFFF"/>
+                        </a:solidFill>
+                        <a:latin typeface="微软雅黑" panose="020B0503020204020204" charset="-122"/>
+                        <a:ea typeface="微软雅黑" panose="020B0503020204020204" charset="-122"/>
+                        <a:cs typeface="微软雅黑" panose="020B0503020204020204" charset="-122"/>
+                      </a:endParaRPr>
                     </a:p>
                   </a:txBody>
                   <a:tcPr anchor="ctr">
@@ -14514,12 +16262,20 @@
                           <a:solidFill>
                             <a:srgbClr val="FFFFFF"/>
                           </a:solidFill>
-                          <a:latin typeface="微软雅黑"/>
-                          <a:ea typeface="微软雅黑"/>
-                          <a:cs typeface="微软雅黑"/>
+                          <a:latin typeface="微软雅黑" panose="020B0503020204020204" charset="-122"/>
+                          <a:ea typeface="微软雅黑" panose="020B0503020204020204" charset="-122"/>
+                          <a:cs typeface="微软雅黑" panose="020B0503020204020204" charset="-122"/>
                         </a:rPr>
                         <a:t>功能要求</a:t>
                       </a:r>
+                      <a:endParaRPr sz="1300" b="1">
+                        <a:solidFill>
+                          <a:srgbClr val="FFFFFF"/>
+                        </a:solidFill>
+                        <a:latin typeface="微软雅黑" panose="020B0503020204020204" charset="-122"/>
+                        <a:ea typeface="微软雅黑" panose="020B0503020204020204" charset="-122"/>
+                        <a:cs typeface="微软雅黑" panose="020B0503020204020204" charset="-122"/>
+                      </a:endParaRPr>
                     </a:p>
                   </a:txBody>
                   <a:tcPr anchor="ctr">
@@ -14539,12 +16295,20 @@
                           <a:solidFill>
                             <a:srgbClr val="FFFFFF"/>
                           </a:solidFill>
-                          <a:latin typeface="微软雅黑"/>
-                          <a:ea typeface="微软雅黑"/>
-                          <a:cs typeface="微软雅黑"/>
+                          <a:latin typeface="微软雅黑" panose="020B0503020204020204" charset="-122"/>
+                          <a:ea typeface="微软雅黑" panose="020B0503020204020204" charset="-122"/>
+                          <a:cs typeface="微软雅黑" panose="020B0503020204020204" charset="-122"/>
                         </a:rPr>
                         <a:t>状态</a:t>
                       </a:r>
+                      <a:endParaRPr sz="1300" b="1">
+                        <a:solidFill>
+                          <a:srgbClr val="FFFFFF"/>
+                        </a:solidFill>
+                        <a:latin typeface="微软雅黑" panose="020B0503020204020204" charset="-122"/>
+                        <a:ea typeface="微软雅黑" panose="020B0503020204020204" charset="-122"/>
+                        <a:cs typeface="微软雅黑" panose="020B0503020204020204" charset="-122"/>
+                      </a:endParaRPr>
                     </a:p>
                   </a:txBody>
                   <a:tcPr anchor="ctr">
@@ -14566,12 +16330,20 @@
                           <a:solidFill>
                             <a:srgbClr val="222222"/>
                           </a:solidFill>
-                          <a:latin typeface="微软雅黑"/>
-                          <a:ea typeface="微软雅黑"/>
-                          <a:cs typeface="微软雅黑"/>
+                          <a:latin typeface="微软雅黑" panose="020B0503020204020204" charset="-122"/>
+                          <a:ea typeface="微软雅黑" panose="020B0503020204020204" charset="-122"/>
+                          <a:cs typeface="微软雅黑" panose="020B0503020204020204" charset="-122"/>
                         </a:rPr>
                         <a:t>基础</a:t>
                       </a:r>
+                      <a:endParaRPr sz="1200" b="0">
+                        <a:solidFill>
+                          <a:srgbClr val="222222"/>
+                        </a:solidFill>
+                        <a:latin typeface="微软雅黑" panose="020B0503020204020204" charset="-122"/>
+                        <a:ea typeface="微软雅黑" panose="020B0503020204020204" charset="-122"/>
+                        <a:cs typeface="微软雅黑" panose="020B0503020204020204" charset="-122"/>
+                      </a:endParaRPr>
                     </a:p>
                   </a:txBody>
                   <a:tcPr anchor="ctr">
@@ -14591,12 +16363,20 @@
                           <a:solidFill>
                             <a:srgbClr val="222222"/>
                           </a:solidFill>
-                          <a:latin typeface="微软雅黑"/>
-                          <a:ea typeface="微软雅黑"/>
-                          <a:cs typeface="微软雅黑"/>
+                          <a:latin typeface="微软雅黑" panose="020B0503020204020204" charset="-122"/>
+                          <a:ea typeface="微软雅黑" panose="020B0503020204020204" charset="-122"/>
+                          <a:cs typeface="微软雅黑" panose="020B0503020204020204" charset="-122"/>
                         </a:rPr>
                         <a:t>课程管理</a:t>
                       </a:r>
+                      <a:endParaRPr sz="1200" b="0">
+                        <a:solidFill>
+                          <a:srgbClr val="222222"/>
+                        </a:solidFill>
+                        <a:latin typeface="微软雅黑" panose="020B0503020204020204" charset="-122"/>
+                        <a:ea typeface="微软雅黑" panose="020B0503020204020204" charset="-122"/>
+                        <a:cs typeface="微软雅黑" panose="020B0503020204020204" charset="-122"/>
+                      </a:endParaRPr>
                     </a:p>
                   </a:txBody>
                   <a:tcPr anchor="ctr">
@@ -14616,12 +16396,20 @@
                           <a:solidFill>
                             <a:srgbClr val="222222"/>
                           </a:solidFill>
-                          <a:latin typeface="微软雅黑"/>
-                          <a:ea typeface="微软雅黑"/>
-                          <a:cs typeface="微软雅黑"/>
+                          <a:latin typeface="微软雅黑" panose="020B0503020204020204" charset="-122"/>
+                          <a:ea typeface="微软雅黑" panose="020B0503020204020204" charset="-122"/>
+                          <a:cs typeface="微软雅黑" panose="020B0503020204020204" charset="-122"/>
                         </a:rPr>
                         <a:t>课程的创建、列表、详情与删除，级联清理全部关联数据</a:t>
                       </a:r>
+                      <a:endParaRPr sz="1200" b="0">
+                        <a:solidFill>
+                          <a:srgbClr val="222222"/>
+                        </a:solidFill>
+                        <a:latin typeface="微软雅黑" panose="020B0503020204020204" charset="-122"/>
+                        <a:ea typeface="微软雅黑" panose="020B0503020204020204" charset="-122"/>
+                        <a:cs typeface="微软雅黑" panose="020B0503020204020204" charset="-122"/>
+                      </a:endParaRPr>
                     </a:p>
                   </a:txBody>
                   <a:tcPr anchor="ctr">
@@ -14641,12 +16429,20 @@
                           <a:solidFill>
                             <a:srgbClr val="1E8449"/>
                           </a:solidFill>
-                          <a:latin typeface="微软雅黑"/>
-                          <a:ea typeface="微软雅黑"/>
-                          <a:cs typeface="微软雅黑"/>
+                          <a:latin typeface="微软雅黑" panose="020B0503020204020204" charset="-122"/>
+                          <a:ea typeface="微软雅黑" panose="020B0503020204020204" charset="-122"/>
+                          <a:cs typeface="微软雅黑" panose="020B0503020204020204" charset="-122"/>
                         </a:rPr>
                         <a:t>已实现</a:t>
                       </a:r>
+                      <a:endParaRPr sz="1200" b="1">
+                        <a:solidFill>
+                          <a:srgbClr val="1E8449"/>
+                        </a:solidFill>
+                        <a:latin typeface="微软雅黑" panose="020B0503020204020204" charset="-122"/>
+                        <a:ea typeface="微软雅黑" panose="020B0503020204020204" charset="-122"/>
+                        <a:cs typeface="微软雅黑" panose="020B0503020204020204" charset="-122"/>
+                      </a:endParaRPr>
                     </a:p>
                   </a:txBody>
                   <a:tcPr anchor="ctr">
@@ -14668,12 +16464,20 @@
                           <a:solidFill>
                             <a:srgbClr val="222222"/>
                           </a:solidFill>
-                          <a:latin typeface="微软雅黑"/>
-                          <a:ea typeface="微软雅黑"/>
-                          <a:cs typeface="微软雅黑"/>
+                          <a:latin typeface="微软雅黑" panose="020B0503020204020204" charset="-122"/>
+                          <a:ea typeface="微软雅黑" panose="020B0503020204020204" charset="-122"/>
+                          <a:cs typeface="微软雅黑" panose="020B0503020204020204" charset="-122"/>
                         </a:rPr>
                         <a:t>F1</a:t>
                       </a:r>
+                      <a:endParaRPr sz="1200" b="0">
+                        <a:solidFill>
+                          <a:srgbClr val="222222"/>
+                        </a:solidFill>
+                        <a:latin typeface="微软雅黑" panose="020B0503020204020204" charset="-122"/>
+                        <a:ea typeface="微软雅黑" panose="020B0503020204020204" charset="-122"/>
+                        <a:cs typeface="微软雅黑" panose="020B0503020204020204" charset="-122"/>
+                      </a:endParaRPr>
                     </a:p>
                   </a:txBody>
                   <a:tcPr anchor="ctr">
@@ -14693,12 +16497,20 @@
                           <a:solidFill>
                             <a:srgbClr val="222222"/>
                           </a:solidFill>
-                          <a:latin typeface="微软雅黑"/>
-                          <a:ea typeface="微软雅黑"/>
-                          <a:cs typeface="微软雅黑"/>
+                          <a:latin typeface="微软雅黑" panose="020B0503020204020204" charset="-122"/>
+                          <a:ea typeface="微软雅黑" panose="020B0503020204020204" charset="-122"/>
+                          <a:cs typeface="微软雅黑" panose="020B0503020204020204" charset="-122"/>
                         </a:rPr>
                         <a:t>上传文档</a:t>
                       </a:r>
+                      <a:endParaRPr sz="1200" b="0">
+                        <a:solidFill>
+                          <a:srgbClr val="222222"/>
+                        </a:solidFill>
+                        <a:latin typeface="微软雅黑" panose="020B0503020204020204" charset="-122"/>
+                        <a:ea typeface="微软雅黑" panose="020B0503020204020204" charset="-122"/>
+                        <a:cs typeface="微软雅黑" panose="020B0503020204020204" charset="-122"/>
+                      </a:endParaRPr>
                     </a:p>
                   </a:txBody>
                   <a:tcPr anchor="ctr">
@@ -14718,12 +16530,20 @@
                           <a:solidFill>
                             <a:srgbClr val="222222"/>
                           </a:solidFill>
-                          <a:latin typeface="微软雅黑"/>
-                          <a:ea typeface="微软雅黑"/>
-                          <a:cs typeface="微软雅黑"/>
+                          <a:latin typeface="微软雅黑" panose="020B0503020204020204" charset="-122"/>
+                          <a:ea typeface="微软雅黑" panose="020B0503020204020204" charset="-122"/>
+                          <a:cs typeface="微软雅黑" panose="020B0503020204020204" charset="-122"/>
                         </a:rPr>
                         <a:t>支持 PDF/DOCX/DOC/MD/TXT，解析、切分、向量化，返回切分块数</a:t>
                       </a:r>
+                      <a:endParaRPr sz="1200" b="0">
+                        <a:solidFill>
+                          <a:srgbClr val="222222"/>
+                        </a:solidFill>
+                        <a:latin typeface="微软雅黑" panose="020B0503020204020204" charset="-122"/>
+                        <a:ea typeface="微软雅黑" panose="020B0503020204020204" charset="-122"/>
+                        <a:cs typeface="微软雅黑" panose="020B0503020204020204" charset="-122"/>
+                      </a:endParaRPr>
                     </a:p>
                   </a:txBody>
                   <a:tcPr anchor="ctr">
@@ -14743,12 +16563,20 @@
                           <a:solidFill>
                             <a:srgbClr val="1E8449"/>
                           </a:solidFill>
-                          <a:latin typeface="微软雅黑"/>
-                          <a:ea typeface="微软雅黑"/>
-                          <a:cs typeface="微软雅黑"/>
+                          <a:latin typeface="微软雅黑" panose="020B0503020204020204" charset="-122"/>
+                          <a:ea typeface="微软雅黑" panose="020B0503020204020204" charset="-122"/>
+                          <a:cs typeface="微软雅黑" panose="020B0503020204020204" charset="-122"/>
                         </a:rPr>
                         <a:t>已实现</a:t>
                       </a:r>
+                      <a:endParaRPr sz="1200" b="1">
+                        <a:solidFill>
+                          <a:srgbClr val="1E8449"/>
+                        </a:solidFill>
+                        <a:latin typeface="微软雅黑" panose="020B0503020204020204" charset="-122"/>
+                        <a:ea typeface="微软雅黑" panose="020B0503020204020204" charset="-122"/>
+                        <a:cs typeface="微软雅黑" panose="020B0503020204020204" charset="-122"/>
+                      </a:endParaRPr>
                     </a:p>
                   </a:txBody>
                   <a:tcPr anchor="ctr">
@@ -14770,12 +16598,20 @@
                           <a:solidFill>
                             <a:srgbClr val="222222"/>
                           </a:solidFill>
-                          <a:latin typeface="微软雅黑"/>
-                          <a:ea typeface="微软雅黑"/>
-                          <a:cs typeface="微软雅黑"/>
+                          <a:latin typeface="微软雅黑" panose="020B0503020204020204" charset="-122"/>
+                          <a:ea typeface="微软雅黑" panose="020B0503020204020204" charset="-122"/>
+                          <a:cs typeface="微软雅黑" panose="020B0503020204020204" charset="-122"/>
                         </a:rPr>
                         <a:t>F2</a:t>
                       </a:r>
+                      <a:endParaRPr sz="1200" b="0">
+                        <a:solidFill>
+                          <a:srgbClr val="222222"/>
+                        </a:solidFill>
+                        <a:latin typeface="微软雅黑" panose="020B0503020204020204" charset="-122"/>
+                        <a:ea typeface="微软雅黑" panose="020B0503020204020204" charset="-122"/>
+                        <a:cs typeface="微软雅黑" panose="020B0503020204020204" charset="-122"/>
+                      </a:endParaRPr>
                     </a:p>
                   </a:txBody>
                   <a:tcPr anchor="ctr">
@@ -14795,12 +16631,20 @@
                           <a:solidFill>
                             <a:srgbClr val="222222"/>
                           </a:solidFill>
-                          <a:latin typeface="微软雅黑"/>
-                          <a:ea typeface="微软雅黑"/>
-                          <a:cs typeface="微软雅黑"/>
+                          <a:latin typeface="微软雅黑" panose="020B0503020204020204" charset="-122"/>
+                          <a:ea typeface="微软雅黑" panose="020B0503020204020204" charset="-122"/>
+                          <a:cs typeface="微软雅黑" panose="020B0503020204020204" charset="-122"/>
                         </a:rPr>
                         <a:t>智能问答</a:t>
                       </a:r>
+                      <a:endParaRPr sz="1200" b="0">
+                        <a:solidFill>
+                          <a:srgbClr val="222222"/>
+                        </a:solidFill>
+                        <a:latin typeface="微软雅黑" panose="020B0503020204020204" charset="-122"/>
+                        <a:ea typeface="微软雅黑" panose="020B0503020204020204" charset="-122"/>
+                        <a:cs typeface="微软雅黑" panose="020B0503020204020204" charset="-122"/>
+                      </a:endParaRPr>
                     </a:p>
                   </a:txBody>
                   <a:tcPr anchor="ctr">
@@ -14820,12 +16664,20 @@
                           <a:solidFill>
                             <a:srgbClr val="222222"/>
                           </a:solidFill>
-                          <a:latin typeface="微软雅黑"/>
-                          <a:ea typeface="微软雅黑"/>
-                          <a:cs typeface="微软雅黑"/>
+                          <a:latin typeface="微软雅黑" panose="020B0503020204020204" charset="-122"/>
+                          <a:ea typeface="微软雅黑" panose="020B0503020204020204" charset="-122"/>
+                          <a:cs typeface="微软雅黑" panose="020B0503020204020204" charset="-122"/>
                         </a:rPr>
                         <a:t>检索相关片段后生成回答，附引用来源，结果可溯源</a:t>
                       </a:r>
+                      <a:endParaRPr sz="1200" b="0">
+                        <a:solidFill>
+                          <a:srgbClr val="222222"/>
+                        </a:solidFill>
+                        <a:latin typeface="微软雅黑" panose="020B0503020204020204" charset="-122"/>
+                        <a:ea typeface="微软雅黑" panose="020B0503020204020204" charset="-122"/>
+                        <a:cs typeface="微软雅黑" panose="020B0503020204020204" charset="-122"/>
+                      </a:endParaRPr>
                     </a:p>
                   </a:txBody>
                   <a:tcPr anchor="ctr">
@@ -14845,12 +16697,20 @@
                           <a:solidFill>
                             <a:srgbClr val="1E8449"/>
                           </a:solidFill>
-                          <a:latin typeface="微软雅黑"/>
-                          <a:ea typeface="微软雅黑"/>
-                          <a:cs typeface="微软雅黑"/>
+                          <a:latin typeface="微软雅黑" panose="020B0503020204020204" charset="-122"/>
+                          <a:ea typeface="微软雅黑" panose="020B0503020204020204" charset="-122"/>
+                          <a:cs typeface="微软雅黑" panose="020B0503020204020204" charset="-122"/>
                         </a:rPr>
                         <a:t>已实现</a:t>
                       </a:r>
+                      <a:endParaRPr sz="1200" b="1">
+                        <a:solidFill>
+                          <a:srgbClr val="1E8449"/>
+                        </a:solidFill>
+                        <a:latin typeface="微软雅黑" panose="020B0503020204020204" charset="-122"/>
+                        <a:ea typeface="微软雅黑" panose="020B0503020204020204" charset="-122"/>
+                        <a:cs typeface="微软雅黑" panose="020B0503020204020204" charset="-122"/>
+                      </a:endParaRPr>
                     </a:p>
                   </a:txBody>
                   <a:tcPr anchor="ctr">
@@ -14872,12 +16732,20 @@
                           <a:solidFill>
                             <a:srgbClr val="222222"/>
                           </a:solidFill>
-                          <a:latin typeface="微软雅黑"/>
-                          <a:ea typeface="微软雅黑"/>
-                          <a:cs typeface="微软雅黑"/>
+                          <a:latin typeface="微软雅黑" panose="020B0503020204020204" charset="-122"/>
+                          <a:ea typeface="微软雅黑" panose="020B0503020204020204" charset="-122"/>
+                          <a:cs typeface="微软雅黑" panose="020B0503020204020204" charset="-122"/>
                         </a:rPr>
                         <a:t>F3</a:t>
                       </a:r>
+                      <a:endParaRPr sz="1200" b="0">
+                        <a:solidFill>
+                          <a:srgbClr val="222222"/>
+                        </a:solidFill>
+                        <a:latin typeface="微软雅黑" panose="020B0503020204020204" charset="-122"/>
+                        <a:ea typeface="微软雅黑" panose="020B0503020204020204" charset="-122"/>
+                        <a:cs typeface="微软雅黑" panose="020B0503020204020204" charset="-122"/>
+                      </a:endParaRPr>
                     </a:p>
                   </a:txBody>
                   <a:tcPr anchor="ctr">
@@ -14897,12 +16765,20 @@
                           <a:solidFill>
                             <a:srgbClr val="222222"/>
                           </a:solidFill>
-                          <a:latin typeface="微软雅黑"/>
-                          <a:ea typeface="微软雅黑"/>
-                          <a:cs typeface="微软雅黑"/>
+                          <a:latin typeface="微软雅黑" panose="020B0503020204020204" charset="-122"/>
+                          <a:ea typeface="微软雅黑" panose="020B0503020204020204" charset="-122"/>
+                          <a:cs typeface="微软雅黑" panose="020B0503020204020204" charset="-122"/>
                         </a:rPr>
                         <a:t>自动出题</a:t>
                       </a:r>
+                      <a:endParaRPr sz="1200" b="0">
+                        <a:solidFill>
+                          <a:srgbClr val="222222"/>
+                        </a:solidFill>
+                        <a:latin typeface="微软雅黑" panose="020B0503020204020204" charset="-122"/>
+                        <a:ea typeface="微软雅黑" panose="020B0503020204020204" charset="-122"/>
+                        <a:cs typeface="微软雅黑" panose="020B0503020204020204" charset="-122"/>
+                      </a:endParaRPr>
                     </a:p>
                   </a:txBody>
                   <a:tcPr anchor="ctr">
@@ -14922,12 +16798,20 @@
                           <a:solidFill>
                             <a:srgbClr val="222222"/>
                           </a:solidFill>
-                          <a:latin typeface="微软雅黑"/>
-                          <a:ea typeface="微软雅黑"/>
-                          <a:cs typeface="微软雅黑"/>
+                          <a:latin typeface="微软雅黑" panose="020B0503020204020204" charset="-122"/>
+                          <a:ea typeface="微软雅黑" panose="020B0503020204020204" charset="-122"/>
+                          <a:cs typeface="微软雅黑" panose="020B0503020204020204" charset="-122"/>
                         </a:rPr>
                         <a:t>按题型、难度、数量生成题目，含答案与解析</a:t>
                       </a:r>
+                      <a:endParaRPr sz="1200" b="0">
+                        <a:solidFill>
+                          <a:srgbClr val="222222"/>
+                        </a:solidFill>
+                        <a:latin typeface="微软雅黑" panose="020B0503020204020204" charset="-122"/>
+                        <a:ea typeface="微软雅黑" panose="020B0503020204020204" charset="-122"/>
+                        <a:cs typeface="微软雅黑" panose="020B0503020204020204" charset="-122"/>
+                      </a:endParaRPr>
                     </a:p>
                   </a:txBody>
                   <a:tcPr anchor="ctr">
@@ -14947,12 +16831,20 @@
                           <a:solidFill>
                             <a:srgbClr val="1E8449"/>
                           </a:solidFill>
-                          <a:latin typeface="微软雅黑"/>
-                          <a:ea typeface="微软雅黑"/>
-                          <a:cs typeface="微软雅黑"/>
+                          <a:latin typeface="微软雅黑" panose="020B0503020204020204" charset="-122"/>
+                          <a:ea typeface="微软雅黑" panose="020B0503020204020204" charset="-122"/>
+                          <a:cs typeface="微软雅黑" panose="020B0503020204020204" charset="-122"/>
                         </a:rPr>
                         <a:t>已实现</a:t>
                       </a:r>
+                      <a:endParaRPr sz="1200" b="1">
+                        <a:solidFill>
+                          <a:srgbClr val="1E8449"/>
+                        </a:solidFill>
+                        <a:latin typeface="微软雅黑" panose="020B0503020204020204" charset="-122"/>
+                        <a:ea typeface="微软雅黑" panose="020B0503020204020204" charset="-122"/>
+                        <a:cs typeface="微软雅黑" panose="020B0503020204020204" charset="-122"/>
+                      </a:endParaRPr>
                     </a:p>
                   </a:txBody>
                   <a:tcPr anchor="ctr">
@@ -14974,12 +16866,20 @@
                           <a:solidFill>
                             <a:srgbClr val="222222"/>
                           </a:solidFill>
-                          <a:latin typeface="微软雅黑"/>
-                          <a:ea typeface="微软雅黑"/>
-                          <a:cs typeface="微软雅黑"/>
+                          <a:latin typeface="微软雅黑" panose="020B0503020204020204" charset="-122"/>
+                          <a:ea typeface="微软雅黑" panose="020B0503020204020204" charset="-122"/>
+                          <a:cs typeface="微软雅黑" panose="020B0503020204020204" charset="-122"/>
                         </a:rPr>
                         <a:t>F4</a:t>
                       </a:r>
+                      <a:endParaRPr sz="1200" b="0">
+                        <a:solidFill>
+                          <a:srgbClr val="222222"/>
+                        </a:solidFill>
+                        <a:latin typeface="微软雅黑" panose="020B0503020204020204" charset="-122"/>
+                        <a:ea typeface="微软雅黑" panose="020B0503020204020204" charset="-122"/>
+                        <a:cs typeface="微软雅黑" panose="020B0503020204020204" charset="-122"/>
+                      </a:endParaRPr>
                     </a:p>
                   </a:txBody>
                   <a:tcPr anchor="ctr">
@@ -14999,12 +16899,20 @@
                           <a:solidFill>
                             <a:srgbClr val="222222"/>
                           </a:solidFill>
-                          <a:latin typeface="微软雅黑"/>
-                          <a:ea typeface="微软雅黑"/>
-                          <a:cs typeface="微软雅黑"/>
+                          <a:latin typeface="微软雅黑" panose="020B0503020204020204" charset="-122"/>
+                          <a:ea typeface="微软雅黑" panose="020B0503020204020204" charset="-122"/>
+                          <a:cs typeface="微软雅黑" panose="020B0503020204020204" charset="-122"/>
                         </a:rPr>
                         <a:t>错题本</a:t>
                       </a:r>
+                      <a:endParaRPr sz="1200" b="0">
+                        <a:solidFill>
+                          <a:srgbClr val="222222"/>
+                        </a:solidFill>
+                        <a:latin typeface="微软雅黑" panose="020B0503020204020204" charset="-122"/>
+                        <a:ea typeface="微软雅黑" panose="020B0503020204020204" charset="-122"/>
+                        <a:cs typeface="微软雅黑" panose="020B0503020204020204" charset="-122"/>
+                      </a:endParaRPr>
                     </a:p>
                   </a:txBody>
                   <a:tcPr anchor="ctr">
@@ -15024,12 +16932,20 @@
                           <a:solidFill>
                             <a:srgbClr val="222222"/>
                           </a:solidFill>
-                          <a:latin typeface="微软雅黑"/>
-                          <a:ea typeface="微软雅黑"/>
-                          <a:cs typeface="微软雅黑"/>
+                          <a:latin typeface="微软雅黑" panose="020B0503020204020204" charset="-122"/>
+                          <a:ea typeface="微软雅黑" panose="020B0503020204020204" charset="-122"/>
+                          <a:cs typeface="微软雅黑" panose="020B0503020204020204" charset="-122"/>
                         </a:rPr>
                         <a:t>即时判分，答错自动沉淀，支持标记掌握与移除</a:t>
                       </a:r>
+                      <a:endParaRPr sz="1200" b="0">
+                        <a:solidFill>
+                          <a:srgbClr val="222222"/>
+                        </a:solidFill>
+                        <a:latin typeface="微软雅黑" panose="020B0503020204020204" charset="-122"/>
+                        <a:ea typeface="微软雅黑" panose="020B0503020204020204" charset="-122"/>
+                        <a:cs typeface="微软雅黑" panose="020B0503020204020204" charset="-122"/>
+                      </a:endParaRPr>
                     </a:p>
                   </a:txBody>
                   <a:tcPr anchor="ctr">
@@ -15049,12 +16965,20 @@
                           <a:solidFill>
                             <a:srgbClr val="1E8449"/>
                           </a:solidFill>
-                          <a:latin typeface="微软雅黑"/>
-                          <a:ea typeface="微软雅黑"/>
-                          <a:cs typeface="微软雅黑"/>
+                          <a:latin typeface="微软雅黑" panose="020B0503020204020204" charset="-122"/>
+                          <a:ea typeface="微软雅黑" panose="020B0503020204020204" charset="-122"/>
+                          <a:cs typeface="微软雅黑" panose="020B0503020204020204" charset="-122"/>
                         </a:rPr>
                         <a:t>已实现</a:t>
                       </a:r>
+                      <a:endParaRPr sz="1200" b="1">
+                        <a:solidFill>
+                          <a:srgbClr val="1E8449"/>
+                        </a:solidFill>
+                        <a:latin typeface="微软雅黑" panose="020B0503020204020204" charset="-122"/>
+                        <a:ea typeface="微软雅黑" panose="020B0503020204020204" charset="-122"/>
+                        <a:cs typeface="微软雅黑" panose="020B0503020204020204" charset="-122"/>
+                      </a:endParaRPr>
                     </a:p>
                   </a:txBody>
                   <a:tcPr anchor="ctr">
@@ -15076,12 +17000,20 @@
                           <a:solidFill>
                             <a:srgbClr val="222222"/>
                           </a:solidFill>
-                          <a:latin typeface="微软雅黑"/>
-                          <a:ea typeface="微软雅黑"/>
-                          <a:cs typeface="微软雅黑"/>
+                          <a:latin typeface="微软雅黑" panose="020B0503020204020204" charset="-122"/>
+                          <a:ea typeface="微软雅黑" panose="020B0503020204020204" charset="-122"/>
+                          <a:cs typeface="微软雅黑" panose="020B0503020204020204" charset="-122"/>
                         </a:rPr>
                         <a:t>F5</a:t>
                       </a:r>
+                      <a:endParaRPr sz="1200" b="0">
+                        <a:solidFill>
+                          <a:srgbClr val="222222"/>
+                        </a:solidFill>
+                        <a:latin typeface="微软雅黑" panose="020B0503020204020204" charset="-122"/>
+                        <a:ea typeface="微软雅黑" panose="020B0503020204020204" charset="-122"/>
+                        <a:cs typeface="微软雅黑" panose="020B0503020204020204" charset="-122"/>
+                      </a:endParaRPr>
                     </a:p>
                   </a:txBody>
                   <a:tcPr anchor="ctr">
@@ -15101,12 +17033,20 @@
                           <a:solidFill>
                             <a:srgbClr val="222222"/>
                           </a:solidFill>
-                          <a:latin typeface="微软雅黑"/>
-                          <a:ea typeface="微软雅黑"/>
-                          <a:cs typeface="微软雅黑"/>
+                          <a:latin typeface="微软雅黑" panose="020B0503020204020204" charset="-122"/>
+                          <a:ea typeface="微软雅黑" panose="020B0503020204020204" charset="-122"/>
+                          <a:cs typeface="微软雅黑" panose="020B0503020204020204" charset="-122"/>
                         </a:rPr>
                         <a:t>复习计划</a:t>
                       </a:r>
+                      <a:endParaRPr sz="1200" b="0">
+                        <a:solidFill>
+                          <a:srgbClr val="222222"/>
+                        </a:solidFill>
+                        <a:latin typeface="微软雅黑" panose="020B0503020204020204" charset="-122"/>
+                        <a:ea typeface="微软雅黑" panose="020B0503020204020204" charset="-122"/>
+                        <a:cs typeface="微软雅黑" panose="020B0503020204020204" charset="-122"/>
+                      </a:endParaRPr>
                     </a:p>
                   </a:txBody>
                   <a:tcPr anchor="ctr">
@@ -15126,12 +17066,20 @@
                           <a:solidFill>
                             <a:srgbClr val="222222"/>
                           </a:solidFill>
-                          <a:latin typeface="微软雅黑"/>
-                          <a:ea typeface="微软雅黑"/>
-                          <a:cs typeface="微软雅黑"/>
+                          <a:latin typeface="微软雅黑" panose="020B0503020204020204" charset="-122"/>
+                          <a:ea typeface="微软雅黑" panose="020B0503020204020204" charset="-122"/>
+                          <a:cs typeface="微软雅黑" panose="020B0503020204020204" charset="-122"/>
                         </a:rPr>
                         <a:t>基于错题与知识库生成复习计划，按日期安排并跟踪完成</a:t>
                       </a:r>
+                      <a:endParaRPr sz="1200" b="0">
+                        <a:solidFill>
+                          <a:srgbClr val="222222"/>
+                        </a:solidFill>
+                        <a:latin typeface="微软雅黑" panose="020B0503020204020204" charset="-122"/>
+                        <a:ea typeface="微软雅黑" panose="020B0503020204020204" charset="-122"/>
+                        <a:cs typeface="微软雅黑" panose="020B0503020204020204" charset="-122"/>
+                      </a:endParaRPr>
                     </a:p>
                   </a:txBody>
                   <a:tcPr anchor="ctr">
@@ -15151,12 +17099,20 @@
                           <a:solidFill>
                             <a:srgbClr val="1E8449"/>
                           </a:solidFill>
-                          <a:latin typeface="微软雅黑"/>
-                          <a:ea typeface="微软雅黑"/>
-                          <a:cs typeface="微软雅黑"/>
+                          <a:latin typeface="微软雅黑" panose="020B0503020204020204" charset="-122"/>
+                          <a:ea typeface="微软雅黑" panose="020B0503020204020204" charset="-122"/>
+                          <a:cs typeface="微软雅黑" panose="020B0503020204020204" charset="-122"/>
                         </a:rPr>
                         <a:t>已实现</a:t>
                       </a:r>
+                      <a:endParaRPr sz="1200" b="1">
+                        <a:solidFill>
+                          <a:srgbClr val="1E8449"/>
+                        </a:solidFill>
+                        <a:latin typeface="微软雅黑" panose="020B0503020204020204" charset="-122"/>
+                        <a:ea typeface="微软雅黑" panose="020B0503020204020204" charset="-122"/>
+                        <a:cs typeface="微软雅黑" panose="020B0503020204020204" charset="-122"/>
+                      </a:endParaRPr>
                     </a:p>
                   </a:txBody>
                   <a:tcPr anchor="ctr">
@@ -15187,7 +17143,7 @@
           <a:noFill/>
         </p:spPr>
         <p:txBody>
-          <a:bodyPr wrap="square" anchor="t" lIns="0" rIns="0" tIns="0" bIns="0">
+          <a:bodyPr wrap="square" lIns="0" tIns="0" rIns="0" bIns="0" anchor="t">
             <a:spAutoFit/>
           </a:bodyPr>
           <a:lstStyle/>
@@ -15208,9 +17164,9 @@
                 <a:solidFill>
                   <a:srgbClr val="808080"/>
                 </a:solidFill>
-                <a:latin typeface="微软雅黑"/>
-                <a:ea typeface="微软雅黑"/>
-                <a:cs typeface="微软雅黑"/>
+                <a:latin typeface="微软雅黑" panose="020B0503020204020204" charset="-122"/>
+                <a:ea typeface="微软雅黑" panose="020B0503020204020204" charset="-122"/>
+                <a:cs typeface="微软雅黑" panose="020B0503020204020204" charset="-122"/>
               </a:rPr>
               <a:t>说明：F1–F5 五大功能模块与课程管理均已实现，</a:t>
             </a:r>
@@ -15219,12 +17175,20 @@
                 <a:solidFill>
                   <a:srgbClr val="1E8449"/>
                 </a:solidFill>
-                <a:latin typeface="微软雅黑"/>
-                <a:ea typeface="微软雅黑"/>
-                <a:cs typeface="微软雅黑"/>
+                <a:latin typeface="微软雅黑" panose="020B0503020204020204" charset="-122"/>
+                <a:ea typeface="微软雅黑" panose="020B0503020204020204" charset="-122"/>
+                <a:cs typeface="微软雅黑" panose="020B0503020204020204" charset="-122"/>
               </a:rPr>
               <a:t>系统已打通“上传—问答—出题—错题—复习”完整学习闭环。</a:t>
             </a:r>
+            <a:endParaRPr sz="1400" b="1">
+              <a:solidFill>
+                <a:srgbClr val="1E8449"/>
+              </a:solidFill>
+              <a:latin typeface="微软雅黑" panose="020B0503020204020204" charset="-122"/>
+              <a:ea typeface="微软雅黑" panose="020B0503020204020204" charset="-122"/>
+              <a:cs typeface="微软雅黑" panose="020B0503020204020204" charset="-122"/>
+            </a:endParaRPr>
           </a:p>
         </p:txBody>
       </p:sp>
@@ -15256,12 +17220,20 @@
                 <a:solidFill>
                   <a:srgbClr val="BDD7EE"/>
                 </a:solidFill>
-                <a:latin typeface="微软雅黑"/>
-                <a:ea typeface="微软雅黑"/>
-                <a:cs typeface="微软雅黑"/>
+                <a:latin typeface="微软雅黑" panose="020B0503020204020204" charset="-122"/>
+                <a:ea typeface="微软雅黑" panose="020B0503020204020204" charset="-122"/>
+                <a:cs typeface="微软雅黑" panose="020B0503020204020204" charset="-122"/>
               </a:rPr>
               <a:t>负责人：周承锦</a:t>
             </a:r>
+            <a:endParaRPr sz="1300">
+              <a:solidFill>
+                <a:srgbClr val="BDD7EE"/>
+              </a:solidFill>
+              <a:latin typeface="微软雅黑" panose="020B0503020204020204" charset="-122"/>
+              <a:ea typeface="微软雅黑" panose="020B0503020204020204" charset="-122"/>
+              <a:cs typeface="微软雅黑" panose="020B0503020204020204" charset="-122"/>
+            </a:endParaRPr>
           </a:p>
         </p:txBody>
       </p:sp>
@@ -15589,7 +17561,11 @@
       </a:style>
     </a:lnDef>
   </a:objectDefaults>
-  <a:extraClrSchemeLst/>
+  <a:extLst>
+    <a:ext uri="{05A4C25C-085E-4340-85A3-A5531E510DB2}">
+      <thm15:themeFamily xmlns:thm15="http://schemas.microsoft.com/office/thememl/2012/main" name="Office Theme" id="{62F939B6-93AF-4DB8-9C6B-D6C7DFDC589F}" vid="{4A3C46E8-61CC-4603-A589-7422A47A8E4A}"/>
+    </a:ext>
+  </a:extLst>
 </a:theme>
 </file>
 
@@ -15909,6 +17885,10 @@
       </a:style>
     </a:lnDef>
   </a:objectDefaults>
-  <a:extraClrSchemeLst/>
+  <a:extLst>
+    <a:ext uri="{05A4C25C-085E-4340-85A3-A5531E510DB2}">
+      <thm15:themeFamily xmlns:thm15="http://schemas.microsoft.com/office/thememl/2012/main" name="Office Theme" id="{62F939B6-93AF-4DB8-9C6B-D6C7DFDC589F}" vid="{4A3C46E8-61CC-4603-A589-7422A47A8E4A}"/>
+    </a:ext>
+  </a:extLst>
 </a:theme>
 </file>
--- a/defense/智学助手-课程设计答辩.pptx
+++ b/defense/智学助手-课程设计答辩.pptx
@@ -17,14 +17,16 @@
     <p:sldId id="262" r:id="rId10"/>
     <p:sldId id="263" r:id="rId11"/>
     <p:sldId id="264" r:id="rId12"/>
-    <p:sldId id="265" r:id="rId13"/>
-    <p:sldId id="266" r:id="rId14"/>
-    <p:sldId id="267" r:id="rId15"/>
-    <p:sldId id="272" r:id="rId16"/>
-    <p:sldId id="268" r:id="rId17"/>
-    <p:sldId id="269" r:id="rId18"/>
-    <p:sldId id="270" r:id="rId19"/>
-    <p:sldId id="271" r:id="rId20"/>
+    <p:sldId id="273" r:id="rId13"/>
+    <p:sldId id="274" r:id="rId14"/>
+    <p:sldId id="265" r:id="rId15"/>
+    <p:sldId id="266" r:id="rId16"/>
+    <p:sldId id="267" r:id="rId17"/>
+    <p:sldId id="275" r:id="rId18"/>
+    <p:sldId id="268" r:id="rId19"/>
+    <p:sldId id="269" r:id="rId20"/>
+    <p:sldId id="270" r:id="rId21"/>
+    <p:sldId id="271" r:id="rId22"/>
   </p:sldIdLst>
   <p:sldSz cx="12191365" cy="6858000" type="screen4x3"/>
   <p:notesSz cx="6858000" cy="9144000"/>
@@ -864,42 +866,22 @@
           <a:lstStyle/>
           <a:p>
             <a:r>
-              <a:t>【主讲：陈果】</a:t>
-            </a:r>
-          </a:p>
-          <a:p>
-            <a:r>
-              <a:t>本页需补充五张界面截图，截图要求与报告第三节“11．实现的界面”一致：</a:t>
-            </a:r>
-          </a:p>
-          <a:p>
-            <a:r>
-              <a:t>1. 文档管理页（已选课程 + 文档列表，能看到切分块数）</a:t>
-            </a:r>
-          </a:p>
-          <a:p>
-            <a:r>
-              <a:t>2. 智能问答页（提问与回答，下方显示引用来源卡片）</a:t>
-            </a:r>
-          </a:p>
-          <a:p>
-            <a:r>
-              <a:t>3. 自动出题页（参数表单 + 题目卡片，含判分结果）</a:t>
-            </a:r>
-          </a:p>
-          <a:p>
-            <a:r>
-              <a:t>4. 错题本页（错题卡片，用户答案与正确答案对比）</a:t>
-            </a:r>
-          </a:p>
-          <a:p>
-            <a:r>
-              <a:t>5. 复习计划页（按日期分组的条目，含完成勾选）</a:t>
-            </a:r>
-          </a:p>
-          <a:p>
-            <a:r>
-              <a:t>讲的时候按“选课程 → 传文档 → 提问 → 出题 → 判错 → 排复习”的顺序讲，完整演示一遍学习闭环。</a:t>
+              <a:t>【主讲：袁钟其】</a:t>
+            </a:r>
+          </a:p>
+          <a:p>
+            <a:r>
+              <a:t>四点：MySQL 走 Docker Compose（端口 3307）、后端 Uvicorn 启动、Chroma 进程内本地持久化、敏感信息走 .env。</a:t>
+            </a:r>
+          </a:p>
+          <a:p>
+            <a:r>
+              <a:t>⚠ 注意：后端不在 Docker 里跑，别口误说成“Docker 一键启动整个系统”。</a:t>
+            </a:r>
+          </a:p>
+          <a:p>
+            <a:r>
+              <a:t>末尾的“运行截图”位置需补全。</a:t>
             </a:r>
           </a:p>
         </p:txBody>
@@ -974,17 +956,22 @@
           </a:p>
           <a:p>
             <a:r>
-              <a:t>四点：MySQL 走 Docker Compose（端口 3307）、后端 Uvicorn 启动、Chroma 进程内本地持久化、敏感信息走 .env。</a:t>
-            </a:r>
-          </a:p>
-          <a:p>
-            <a:r>
-              <a:t>⚠ 注意：后端不在 Docker 里跑，别口误说成“Docker 一键启动整个系统”。</a:t>
-            </a:r>
-          </a:p>
-          <a:p>
-            <a:r>
-              <a:t>末尾的“运行截图”位置需补全。</a:t>
+              <a:t>【收尾】</a:t>
+            </a:r>
+          </a:p>
+          <a:p>
+            <a:r>
+              <a:t>成果三条、展望三条。</a:t>
+            </a:r>
+          </a:p>
+          <a:p>
+            <a:r>
+              <a:t>展望部分可以提：多用户隔离、学习统计可视化、混合检索（向量+关键词）、Chroma 迁移 Milvus（requirements.txt 里已预留依赖）。</a:t>
+            </a:r>
+          </a:p>
+          <a:p>
+            <a:r>
+              <a:t>提到“已预留 Milvus 依赖”会显得有前瞻性。</a:t>
             </a:r>
           </a:p>
         </p:txBody>
@@ -1059,22 +1046,22 @@
           </a:p>
           <a:p>
             <a:r>
-              <a:t>【收尾】</a:t>
-            </a:r>
-          </a:p>
-          <a:p>
-            <a:r>
-              <a:t>成果三条、展望三条。</a:t>
-            </a:r>
-          </a:p>
-          <a:p>
-            <a:r>
-              <a:t>展望部分可以提：多用户隔离、学习统计可视化、混合检索（向量+关键词）、Chroma 迁移 Milvus（requirements.txt 里已预留依赖）。</a:t>
-            </a:r>
-          </a:p>
-          <a:p>
-            <a:r>
-              <a:t>提到“已预留 Milvus 依赖”会显得有前瞻性。</a:t>
+              <a:t>你负责：数据库设计（E-R / CDM / PDM）、课程设计报告撰写与统稿。</a:t>
+            </a:r>
+          </a:p>
+          <a:p>
+            <a:r>
+              <a:t>⚠ 答辩前务必把姓名、学号补全。</a:t>
+            </a:r>
+          </a:p>
+          <a:p>
+            <a:r>
+              <a:t>预计提问：你设计的表和别人的模块怎么对接？——答：我先把 ORM 模型和 Pydantic Schema 定好，其他同学服务层直接引用这些模型读写，保证字段统一。</a:t>
+            </a:r>
+          </a:p>
+          <a:p>
+            <a:r>
+              <a:t>预计提问：你这部分工作量体现在哪？——答：7 张表三层建模、完整性设计、级联删除顺序设计，以及报告全文统稿。</a:t>
             </a:r>
           </a:p>
         </p:txBody>
@@ -1100,96 +1087,6 @@
 </file>
 
 <file path=ppt/notesSlides/notesSlide16.xml><?xml version="1.0" encoding="utf-8"?>
-<p:notes xmlns:a="http://schemas.openxmlformats.org/drawingml/2006/main" xmlns:r="http://schemas.openxmlformats.org/officeDocument/2006/relationships" xmlns:p="http://schemas.openxmlformats.org/presentationml/2006/main">
-  <p:cSld>
-    <p:spTree>
-      <p:nvGrpSpPr>
-        <p:cNvPr id="1" name=""/>
-        <p:cNvGrpSpPr/>
-        <p:nvPr/>
-      </p:nvGrpSpPr>
-      <p:grpSpPr>
-        <a:xfrm>
-          <a:off x="0" y="0"/>
-          <a:ext cx="0" cy="0"/>
-          <a:chOff x="0" y="0"/>
-          <a:chExt cx="0" cy="0"/>
-        </a:xfrm>
-      </p:grpSpPr>
-      <p:sp>
-        <p:nvSpPr>
-          <p:cNvPr id="2" name="Slide Image Placeholder 1"/>
-          <p:cNvSpPr>
-            <a:spLocks noGrp="1"/>
-          </p:cNvSpPr>
-          <p:nvPr>
-            <p:ph type="sldImg" idx="2"/>
-          </p:nvPr>
-        </p:nvSpPr>
-        <p:spPr/>
-      </p:sp>
-      <p:sp>
-        <p:nvSpPr>
-          <p:cNvPr id="3" name="Notes Placeholder 2"/>
-          <p:cNvSpPr>
-            <a:spLocks noGrp="1"/>
-          </p:cNvSpPr>
-          <p:nvPr>
-            <p:ph type="body" sz="quarter" idx="3"/>
-          </p:nvPr>
-        </p:nvSpPr>
-        <p:spPr/>
-        <p:txBody>
-          <a:bodyPr/>
-          <a:lstStyle/>
-          <a:p>
-            <a:r>
-              <a:t>【主讲：袁钟其】</a:t>
-            </a:r>
-          </a:p>
-          <a:p>
-            <a:r>
-              <a:t>你负责：数据库设计（E-R / CDM / PDM）、课程设计报告撰写与统稿。</a:t>
-            </a:r>
-          </a:p>
-          <a:p>
-            <a:r>
-              <a:t>⚠ 答辩前务必把姓名、学号补全。</a:t>
-            </a:r>
-          </a:p>
-          <a:p>
-            <a:r>
-              <a:t>预计提问：你设计的表和别人的模块怎么对接？——答：我先把 ORM 模型和 Pydantic Schema 定好，其他同学服务层直接引用这些模型读写，保证字段统一。</a:t>
-            </a:r>
-          </a:p>
-          <a:p>
-            <a:r>
-              <a:t>预计提问：你这部分工作量体现在哪？——答：7 张表三层建模、完整性设计、级联删除顺序设计，以及报告全文统稿。</a:t>
-            </a:r>
-          </a:p>
-        </p:txBody>
-      </p:sp>
-      <p:sp>
-        <p:nvSpPr>
-          <p:cNvPr id="4" name="Slide Number Placeholder 3"/>
-          <p:cNvSpPr>
-            <a:spLocks noGrp="1"/>
-          </p:cNvSpPr>
-          <p:nvPr>
-            <p:ph type="sldNum" sz="quarter" idx="5"/>
-          </p:nvPr>
-        </p:nvSpPr>
-        <p:spPr/>
-      </p:sp>
-    </p:spTree>
-  </p:cSld>
-  <p:clrMapOvr>
-    <a:masterClrMapping/>
-  </p:clrMapOvr>
-</p:notes>
-</file>
-
-<file path=ppt/notesSlides/notesSlide17.xml><?xml version="1.0" encoding="utf-8"?>
 <p:notes xmlns:a="http://schemas.openxmlformats.org/drawingml/2006/main" xmlns:r="http://schemas.openxmlformats.org/officeDocument/2006/relationships" xmlns:p="http://schemas.openxmlformats.org/presentationml/2006/main">
   <p:cSld>
     <p:spTree>
@@ -5190,7 +5087,7 @@
         </p:nvSpPr>
         <p:spPr>
           <a:xfrm>
-            <a:off x="822960" y="4526280"/>
+            <a:off x="838200" y="4526280"/>
             <a:ext cx="10515600" cy="628015"/>
           </a:xfrm>
           <a:prstGeom prst="rect">
@@ -5343,6 +5240,1946 @@
           <a:lstStyle/>
           <a:p>
             <a:pPr algn="l">
+              <a:spcAft>
+                <a:spcPts val="600"/>
+              </a:spcAft>
+            </a:pPr>
+            <a:r>
+              <a:rPr sz="2600">
+                <a:solidFill>
+                  <a:srgbClr val="FFFFFF"/>
+                </a:solidFill>
+                <a:latin typeface="微软雅黑" panose="020B0503020204020204" charset="-122"/>
+                <a:ea typeface="微软雅黑" panose="020B0503020204020204" charset="-122"/>
+                <a:cs typeface="微软雅黑" panose="020B0503020204020204" charset="-122"/>
+              </a:rPr>
+              <a:t>5.1　功能演示（一）：文档入库</a:t>
+            </a:r>
+            <a:endParaRPr sz="2600">
+              <a:solidFill>
+                <a:srgbClr val="FFFFFF"/>
+              </a:solidFill>
+              <a:latin typeface="微软雅黑" panose="020B0503020204020204" charset="-122"/>
+              <a:ea typeface="微软雅黑" panose="020B0503020204020204" charset="-122"/>
+              <a:cs typeface="微软雅黑" panose="020B0503020204020204" charset="-122"/>
+            </a:endParaRPr>
+          </a:p>
+        </p:txBody>
+      </p:sp>
+      <p:sp>
+        <p:nvSpPr>
+          <p:cNvPr id="4" name="TextBox 3"/>
+          <p:cNvSpPr txBox="1"/>
+          <p:nvPr/>
+        </p:nvSpPr>
+        <p:spPr>
+          <a:xfrm>
+            <a:off x="8321040" y="274320"/>
+            <a:ext cx="3383280" cy="457200"/>
+          </a:xfrm>
+          <a:prstGeom prst="rect">
+            <a:avLst/>
+          </a:prstGeom>
+          <a:noFill/>
+        </p:spPr>
+        <p:txBody>
+          <a:bodyPr wrap="square" lIns="0" tIns="0" rIns="0" bIns="0" anchor="ctr">
+            <a:spAutoFit/>
+          </a:bodyPr>
+          <a:lstStyle/>
+          <a:p>
+            <a:pPr algn="r">
+              <a:spcAft>
+                <a:spcPts val="600"/>
+              </a:spcAft>
+            </a:pPr>
+            <a:r>
+              <a:rPr sz="1300">
+                <a:solidFill>
+                  <a:srgbClr val="BDD7EE"/>
+                </a:solidFill>
+                <a:latin typeface="微软雅黑" panose="020B0503020204020204" charset="-122"/>
+                <a:ea typeface="微软雅黑" panose="020B0503020204020204" charset="-122"/>
+                <a:cs typeface="微软雅黑" panose="020B0503020204020204" charset="-122"/>
+              </a:rPr>
+              <a:t>负责人：周承锦</a:t>
+            </a:r>
+            <a:endParaRPr sz="1300">
+              <a:solidFill>
+                <a:srgbClr val="BDD7EE"/>
+              </a:solidFill>
+              <a:latin typeface="微软雅黑" panose="020B0503020204020204" charset="-122"/>
+              <a:ea typeface="微软雅黑" panose="020B0503020204020204" charset="-122"/>
+              <a:cs typeface="微软雅黑" panose="020B0503020204020204" charset="-122"/>
+            </a:endParaRPr>
+          </a:p>
+        </p:txBody>
+      </p:sp>
+      <p:sp>
+        <p:nvSpPr>
+          <p:cNvPr id="5" name="TextBox 4"/>
+          <p:cNvSpPr txBox="1"/>
+          <p:nvPr/>
+        </p:nvSpPr>
+        <p:spPr>
+          <a:xfrm>
+            <a:off x="502920" y="1115568"/>
+            <a:ext cx="5120640" cy="365760"/>
+          </a:xfrm>
+          <a:prstGeom prst="rect">
+            <a:avLst/>
+          </a:prstGeom>
+          <a:noFill/>
+        </p:spPr>
+        <p:txBody>
+          <a:bodyPr wrap="square" lIns="0" tIns="0" rIns="0" bIns="0" anchor="t">
+            <a:spAutoFit/>
+          </a:bodyPr>
+          <a:lstStyle/>
+          <a:p>
+            <a:pPr algn="l">
+              <a:spcAft>
+                <a:spcPts val="600"/>
+              </a:spcAft>
+            </a:pPr>
+            <a:r>
+              <a:rPr sz="1800">
+                <a:solidFill>
+                  <a:srgbClr val="2E75B6"/>
+                </a:solidFill>
+                <a:latin typeface="微软雅黑" panose="020B0503020204020204" charset="-122"/>
+                <a:ea typeface="微软雅黑" panose="020B0503020204020204" charset="-122"/>
+                <a:cs typeface="微软雅黑" panose="020B0503020204020204" charset="-122"/>
+              </a:rPr>
+              <a:t>操作流程</a:t>
+            </a:r>
+            <a:endParaRPr sz="1800">
+              <a:solidFill>
+                <a:srgbClr val="2E75B6"/>
+              </a:solidFill>
+              <a:latin typeface="微软雅黑" panose="020B0503020204020204" charset="-122"/>
+              <a:ea typeface="微软雅黑" panose="020B0503020204020204" charset="-122"/>
+              <a:cs typeface="微软雅黑" panose="020B0503020204020204" charset="-122"/>
+            </a:endParaRPr>
+          </a:p>
+        </p:txBody>
+      </p:sp>
+      <p:sp>
+        <p:nvSpPr>
+          <p:cNvPr id="6" name="Rounded Rectangle 5"/>
+          <p:cNvSpPr/>
+          <p:nvPr/>
+        </p:nvSpPr>
+        <p:spPr>
+          <a:xfrm>
+            <a:off x="502920" y="1572768"/>
+            <a:ext cx="4480560" cy="658368"/>
+          </a:xfrm>
+          <a:prstGeom prst="roundRect">
+            <a:avLst/>
+          </a:prstGeom>
+          <a:solidFill>
+            <a:srgbClr val="EAF3FB"/>
+          </a:solidFill>
+          <a:ln w="16510">
+            <a:solidFill>
+              <a:srgbClr val="1F4E79"/>
+            </a:solidFill>
+          </a:ln>
+          <a:effectLst/>
+        </p:spPr>
+        <p:style>
+          <a:lnRef idx="1">
+            <a:schemeClr val="accent1"/>
+          </a:lnRef>
+          <a:fillRef idx="3">
+            <a:schemeClr val="accent1"/>
+          </a:fillRef>
+          <a:effectRef idx="2">
+            <a:schemeClr val="accent1"/>
+          </a:effectRef>
+          <a:fontRef idx="minor">
+            <a:schemeClr val="lt1"/>
+          </a:fontRef>
+        </p:style>
+        <p:txBody>
+          <a:bodyPr wrap="square" rtlCol="0" anchor="ctr"/>
+          <a:lstStyle/>
+          <a:p>
+            <a:pPr algn="ctr"/>
+            <a:r>
+              <a:rPr sz="1200">
+                <a:solidFill>
+                  <a:srgbClr val="1F4E79"/>
+                </a:solidFill>
+                <a:latin typeface="微软雅黑" panose="020B0503020204020204" charset="-122"/>
+                <a:ea typeface="微软雅黑" panose="020B0503020204020204" charset="-122"/>
+                <a:cs typeface="微软雅黑" panose="020B0503020204020204" charset="-122"/>
+              </a:rPr>
+              <a:t>① 新建课程</a:t>
+            </a:r>
+            <a:endParaRPr sz="1200">
+              <a:solidFill>
+                <a:srgbClr val="1F4E79"/>
+              </a:solidFill>
+              <a:latin typeface="微软雅黑" panose="020B0503020204020204" charset="-122"/>
+              <a:ea typeface="微软雅黑" panose="020B0503020204020204" charset="-122"/>
+              <a:cs typeface="微软雅黑" panose="020B0503020204020204" charset="-122"/>
+            </a:endParaRPr>
+          </a:p>
+        </p:txBody>
+      </p:sp>
+      <p:sp>
+        <p:nvSpPr>
+          <p:cNvPr id="7" name="Down Arrow 6"/>
+          <p:cNvSpPr/>
+          <p:nvPr/>
+        </p:nvSpPr>
+        <p:spPr>
+          <a:xfrm>
+            <a:off x="2697480" y="2231136"/>
+            <a:ext cx="182880" cy="256032"/>
+          </a:xfrm>
+          <a:prstGeom prst="downArrow">
+            <a:avLst/>
+          </a:prstGeom>
+          <a:solidFill>
+            <a:srgbClr val="2E75B6"/>
+          </a:solidFill>
+          <a:ln>
+            <a:noFill/>
+          </a:ln>
+          <a:effectLst/>
+        </p:spPr>
+        <p:style>
+          <a:lnRef idx="1">
+            <a:schemeClr val="accent1"/>
+          </a:lnRef>
+          <a:fillRef idx="3">
+            <a:schemeClr val="accent1"/>
+          </a:fillRef>
+          <a:effectRef idx="2">
+            <a:schemeClr val="accent1"/>
+          </a:effectRef>
+          <a:fontRef idx="minor">
+            <a:schemeClr val="lt1"/>
+          </a:fontRef>
+        </p:style>
+        <p:txBody>
+          <a:bodyPr rtlCol="0" anchor="ctr"/>
+          <a:lstStyle/>
+          <a:p>
+            <a:pPr algn="ctr"/>
+          </a:p>
+        </p:txBody>
+      </p:sp>
+      <p:sp>
+        <p:nvSpPr>
+          <p:cNvPr id="8" name="Rounded Rectangle 7"/>
+          <p:cNvSpPr/>
+          <p:nvPr/>
+        </p:nvSpPr>
+        <p:spPr>
+          <a:xfrm>
+            <a:off x="502920" y="2487168"/>
+            <a:ext cx="4480560" cy="658368"/>
+          </a:xfrm>
+          <a:prstGeom prst="roundRect">
+            <a:avLst/>
+          </a:prstGeom>
+          <a:solidFill>
+            <a:srgbClr val="EAF3FB"/>
+          </a:solidFill>
+          <a:ln w="16510">
+            <a:solidFill>
+              <a:srgbClr val="1F4E79"/>
+            </a:solidFill>
+          </a:ln>
+          <a:effectLst/>
+        </p:spPr>
+        <p:style>
+          <a:lnRef idx="1">
+            <a:schemeClr val="accent1"/>
+          </a:lnRef>
+          <a:fillRef idx="3">
+            <a:schemeClr val="accent1"/>
+          </a:fillRef>
+          <a:effectRef idx="2">
+            <a:schemeClr val="accent1"/>
+          </a:effectRef>
+          <a:fontRef idx="minor">
+            <a:schemeClr val="lt1"/>
+          </a:fontRef>
+        </p:style>
+        <p:txBody>
+          <a:bodyPr wrap="square" rtlCol="0" anchor="ctr"/>
+          <a:lstStyle/>
+          <a:p>
+            <a:pPr algn="ctr"/>
+            <a:r>
+              <a:rPr sz="1200">
+                <a:solidFill>
+                  <a:srgbClr val="1F4E79"/>
+                </a:solidFill>
+                <a:latin typeface="微软雅黑" panose="020B0503020204020204" charset="-122"/>
+                <a:ea typeface="微软雅黑" panose="020B0503020204020204" charset="-122"/>
+                <a:cs typeface="微软雅黑" panose="020B0503020204020204" charset="-122"/>
+              </a:rPr>
+              <a:t>② 上传文档
+(PDF/Word/MD/TXT)</a:t>
+            </a:r>
+            <a:endParaRPr sz="1200">
+              <a:solidFill>
+                <a:srgbClr val="1F4E79"/>
+              </a:solidFill>
+              <a:latin typeface="微软雅黑" panose="020B0503020204020204" charset="-122"/>
+              <a:ea typeface="微软雅黑" panose="020B0503020204020204" charset="-122"/>
+              <a:cs typeface="微软雅黑" panose="020B0503020204020204" charset="-122"/>
+            </a:endParaRPr>
+          </a:p>
+        </p:txBody>
+      </p:sp>
+      <p:sp>
+        <p:nvSpPr>
+          <p:cNvPr id="9" name="Down Arrow 8"/>
+          <p:cNvSpPr/>
+          <p:nvPr/>
+        </p:nvSpPr>
+        <p:spPr>
+          <a:xfrm>
+            <a:off x="2697480" y="3145535"/>
+            <a:ext cx="182880" cy="256032"/>
+          </a:xfrm>
+          <a:prstGeom prst="downArrow">
+            <a:avLst/>
+          </a:prstGeom>
+          <a:solidFill>
+            <a:srgbClr val="2E75B6"/>
+          </a:solidFill>
+          <a:ln>
+            <a:noFill/>
+          </a:ln>
+          <a:effectLst/>
+        </p:spPr>
+        <p:style>
+          <a:lnRef idx="1">
+            <a:schemeClr val="accent1"/>
+          </a:lnRef>
+          <a:fillRef idx="3">
+            <a:schemeClr val="accent1"/>
+          </a:fillRef>
+          <a:effectRef idx="2">
+            <a:schemeClr val="accent1"/>
+          </a:effectRef>
+          <a:fontRef idx="minor">
+            <a:schemeClr val="lt1"/>
+          </a:fontRef>
+        </p:style>
+        <p:txBody>
+          <a:bodyPr rtlCol="0" anchor="ctr"/>
+          <a:lstStyle/>
+          <a:p>
+            <a:pPr algn="ctr"/>
+          </a:p>
+        </p:txBody>
+      </p:sp>
+      <p:sp>
+        <p:nvSpPr>
+          <p:cNvPr id="10" name="Rounded Rectangle 9"/>
+          <p:cNvSpPr/>
+          <p:nvPr/>
+        </p:nvSpPr>
+        <p:spPr>
+          <a:xfrm>
+            <a:off x="502920" y="3401568"/>
+            <a:ext cx="4480560" cy="658368"/>
+          </a:xfrm>
+          <a:prstGeom prst="roundRect">
+            <a:avLst/>
+          </a:prstGeom>
+          <a:solidFill>
+            <a:srgbClr val="EAF3FB"/>
+          </a:solidFill>
+          <a:ln w="16510">
+            <a:solidFill>
+              <a:srgbClr val="1F4E79"/>
+            </a:solidFill>
+          </a:ln>
+          <a:effectLst/>
+        </p:spPr>
+        <p:style>
+          <a:lnRef idx="1">
+            <a:schemeClr val="accent1"/>
+          </a:lnRef>
+          <a:fillRef idx="3">
+            <a:schemeClr val="accent1"/>
+          </a:fillRef>
+          <a:effectRef idx="2">
+            <a:schemeClr val="accent1"/>
+          </a:effectRef>
+          <a:fontRef idx="minor">
+            <a:schemeClr val="lt1"/>
+          </a:fontRef>
+        </p:style>
+        <p:txBody>
+          <a:bodyPr wrap="square" rtlCol="0" anchor="ctr"/>
+          <a:lstStyle/>
+          <a:p>
+            <a:pPr algn="ctr"/>
+            <a:r>
+              <a:rPr sz="1200">
+                <a:solidFill>
+                  <a:srgbClr val="1F4E79"/>
+                </a:solidFill>
+                <a:latin typeface="微软雅黑" panose="020B0503020204020204" charset="-122"/>
+                <a:ea typeface="微软雅黑" panose="020B0503020204020204" charset="-122"/>
+                <a:cs typeface="微软雅黑" panose="020B0503020204020204" charset="-122"/>
+              </a:rPr>
+              <a:t>③ 自动解析切分
+(500字符/重叠50)</a:t>
+            </a:r>
+            <a:endParaRPr sz="1200">
+              <a:solidFill>
+                <a:srgbClr val="1F4E79"/>
+              </a:solidFill>
+              <a:latin typeface="微软雅黑" panose="020B0503020204020204" charset="-122"/>
+              <a:ea typeface="微软雅黑" panose="020B0503020204020204" charset="-122"/>
+              <a:cs typeface="微软雅黑" panose="020B0503020204020204" charset="-122"/>
+            </a:endParaRPr>
+          </a:p>
+        </p:txBody>
+      </p:sp>
+      <p:sp>
+        <p:nvSpPr>
+          <p:cNvPr id="11" name="Down Arrow 10"/>
+          <p:cNvSpPr/>
+          <p:nvPr/>
+        </p:nvSpPr>
+        <p:spPr>
+          <a:xfrm>
+            <a:off x="2697480" y="4059935"/>
+            <a:ext cx="182880" cy="256032"/>
+          </a:xfrm>
+          <a:prstGeom prst="downArrow">
+            <a:avLst/>
+          </a:prstGeom>
+          <a:solidFill>
+            <a:srgbClr val="2E75B6"/>
+          </a:solidFill>
+          <a:ln>
+            <a:noFill/>
+          </a:ln>
+          <a:effectLst/>
+        </p:spPr>
+        <p:style>
+          <a:lnRef idx="1">
+            <a:schemeClr val="accent1"/>
+          </a:lnRef>
+          <a:fillRef idx="3">
+            <a:schemeClr val="accent1"/>
+          </a:fillRef>
+          <a:effectRef idx="2">
+            <a:schemeClr val="accent1"/>
+          </a:effectRef>
+          <a:fontRef idx="minor">
+            <a:schemeClr val="lt1"/>
+          </a:fontRef>
+        </p:style>
+        <p:txBody>
+          <a:bodyPr rtlCol="0" anchor="ctr"/>
+          <a:lstStyle/>
+          <a:p>
+            <a:pPr algn="ctr"/>
+          </a:p>
+        </p:txBody>
+      </p:sp>
+      <p:sp>
+        <p:nvSpPr>
+          <p:cNvPr id="12" name="Rounded Rectangle 11"/>
+          <p:cNvSpPr/>
+          <p:nvPr/>
+        </p:nvSpPr>
+        <p:spPr>
+          <a:xfrm>
+            <a:off x="502920" y="4315968"/>
+            <a:ext cx="4480560" cy="658368"/>
+          </a:xfrm>
+          <a:prstGeom prst="roundRect">
+            <a:avLst/>
+          </a:prstGeom>
+          <a:solidFill>
+            <a:srgbClr val="EAF3FB"/>
+          </a:solidFill>
+          <a:ln w="16510">
+            <a:solidFill>
+              <a:srgbClr val="1F4E79"/>
+            </a:solidFill>
+          </a:ln>
+          <a:effectLst/>
+        </p:spPr>
+        <p:style>
+          <a:lnRef idx="1">
+            <a:schemeClr val="accent1"/>
+          </a:lnRef>
+          <a:fillRef idx="3">
+            <a:schemeClr val="accent1"/>
+          </a:fillRef>
+          <a:effectRef idx="2">
+            <a:schemeClr val="accent1"/>
+          </a:effectRef>
+          <a:fontRef idx="minor">
+            <a:schemeClr val="lt1"/>
+          </a:fontRef>
+        </p:style>
+        <p:txBody>
+          <a:bodyPr wrap="square" rtlCol="0" anchor="ctr"/>
+          <a:lstStyle/>
+          <a:p>
+            <a:pPr algn="ctr"/>
+            <a:r>
+              <a:rPr sz="1200">
+                <a:solidFill>
+                  <a:srgbClr val="1F4E79"/>
+                </a:solidFill>
+                <a:latin typeface="微软雅黑" panose="020B0503020204020204" charset="-122"/>
+                <a:ea typeface="微软雅黑" panose="020B0503020204020204" charset="-122"/>
+                <a:cs typeface="微软雅黑" panose="020B0503020204020204" charset="-122"/>
+              </a:rPr>
+              <a:t>④ 向量化入库
+(BGE-M3)</a:t>
+            </a:r>
+            <a:endParaRPr sz="1200">
+              <a:solidFill>
+                <a:srgbClr val="1F4E79"/>
+              </a:solidFill>
+              <a:latin typeface="微软雅黑" panose="020B0503020204020204" charset="-122"/>
+              <a:ea typeface="微软雅黑" panose="020B0503020204020204" charset="-122"/>
+              <a:cs typeface="微软雅黑" panose="020B0503020204020204" charset="-122"/>
+            </a:endParaRPr>
+          </a:p>
+        </p:txBody>
+      </p:sp>
+      <p:sp>
+        <p:nvSpPr>
+          <p:cNvPr id="13" name="Down Arrow 12"/>
+          <p:cNvSpPr/>
+          <p:nvPr/>
+        </p:nvSpPr>
+        <p:spPr>
+          <a:xfrm>
+            <a:off x="2697480" y="4974336"/>
+            <a:ext cx="182880" cy="256032"/>
+          </a:xfrm>
+          <a:prstGeom prst="downArrow">
+            <a:avLst/>
+          </a:prstGeom>
+          <a:solidFill>
+            <a:srgbClr val="2E75B6"/>
+          </a:solidFill>
+          <a:ln>
+            <a:noFill/>
+          </a:ln>
+          <a:effectLst/>
+        </p:spPr>
+        <p:style>
+          <a:lnRef idx="1">
+            <a:schemeClr val="accent1"/>
+          </a:lnRef>
+          <a:fillRef idx="3">
+            <a:schemeClr val="accent1"/>
+          </a:fillRef>
+          <a:effectRef idx="2">
+            <a:schemeClr val="accent1"/>
+          </a:effectRef>
+          <a:fontRef idx="minor">
+            <a:schemeClr val="lt1"/>
+          </a:fontRef>
+        </p:style>
+        <p:txBody>
+          <a:bodyPr rtlCol="0" anchor="ctr"/>
+          <a:lstStyle/>
+          <a:p>
+            <a:pPr algn="ctr"/>
+          </a:p>
+        </p:txBody>
+      </p:sp>
+      <p:sp>
+        <p:nvSpPr>
+          <p:cNvPr id="14" name="Rounded Rectangle 13"/>
+          <p:cNvSpPr/>
+          <p:nvPr/>
+        </p:nvSpPr>
+        <p:spPr>
+          <a:xfrm>
+            <a:off x="502920" y="5230368"/>
+            <a:ext cx="4480560" cy="658368"/>
+          </a:xfrm>
+          <a:prstGeom prst="roundRect">
+            <a:avLst/>
+          </a:prstGeom>
+          <a:solidFill>
+            <a:srgbClr val="EAF3FB"/>
+          </a:solidFill>
+          <a:ln w="16510">
+            <a:solidFill>
+              <a:srgbClr val="1F4E79"/>
+            </a:solidFill>
+          </a:ln>
+          <a:effectLst/>
+        </p:spPr>
+        <p:style>
+          <a:lnRef idx="1">
+            <a:schemeClr val="accent1"/>
+          </a:lnRef>
+          <a:fillRef idx="3">
+            <a:schemeClr val="accent1"/>
+          </a:fillRef>
+          <a:effectRef idx="2">
+            <a:schemeClr val="accent1"/>
+          </a:effectRef>
+          <a:fontRef idx="minor">
+            <a:schemeClr val="lt1"/>
+          </a:fontRef>
+        </p:style>
+        <p:txBody>
+          <a:bodyPr wrap="square" rtlCol="0" anchor="ctr"/>
+          <a:lstStyle/>
+          <a:p>
+            <a:pPr algn="ctr"/>
+            <a:r>
+              <a:rPr sz="1200">
+                <a:solidFill>
+                  <a:srgbClr val="1F4E79"/>
+                </a:solidFill>
+                <a:latin typeface="微软雅黑" panose="020B0503020204020204" charset="-122"/>
+                <a:ea typeface="微软雅黑" panose="020B0503020204020204" charset="-122"/>
+                <a:cs typeface="微软雅黑" panose="020B0503020204020204" charset="-122"/>
+              </a:rPr>
+              <a:t>⑤ 状态变 completed</a:t>
+            </a:r>
+            <a:endParaRPr sz="1200">
+              <a:solidFill>
+                <a:srgbClr val="1F4E79"/>
+              </a:solidFill>
+              <a:latin typeface="微软雅黑" panose="020B0503020204020204" charset="-122"/>
+              <a:ea typeface="微软雅黑" panose="020B0503020204020204" charset="-122"/>
+              <a:cs typeface="微软雅黑" panose="020B0503020204020204" charset="-122"/>
+            </a:endParaRPr>
+          </a:p>
+        </p:txBody>
+      </p:sp>
+      <p:sp>
+        <p:nvSpPr>
+          <p:cNvPr id="15" name="TextBox 14"/>
+          <p:cNvSpPr txBox="1"/>
+          <p:nvPr/>
+        </p:nvSpPr>
+        <p:spPr>
+          <a:xfrm>
+            <a:off x="502920" y="6144768"/>
+            <a:ext cx="4572000" cy="457200"/>
+          </a:xfrm>
+          <a:prstGeom prst="rect">
+            <a:avLst/>
+          </a:prstGeom>
+          <a:noFill/>
+        </p:spPr>
+        <p:txBody>
+          <a:bodyPr wrap="square" lIns="0" tIns="0" rIns="0" bIns="0" anchor="t">
+            <a:spAutoFit/>
+          </a:bodyPr>
+          <a:lstStyle/>
+          <a:p>
+            <a:pPr algn="l">
+              <a:spcAft>
+                <a:spcPts val="600"/>
+              </a:spcAft>
+            </a:pPr>
+            <a:r>
+              <a:rPr sz="1200">
+                <a:solidFill>
+                  <a:srgbClr val="808080"/>
+                </a:solidFill>
+                <a:latin typeface="微软雅黑" panose="020B0503020204020204" charset="-122"/>
+                <a:ea typeface="微软雅黑" panose="020B0503020204020204" charset="-122"/>
+                <a:cs typeface="微软雅黑" panose="020B0503020204020204" charset="-122"/>
+              </a:rPr>
+              <a:t>支持 5 类格式 · 单文件 ≤10MB · 入库 &lt;30 秒</a:t>
+            </a:r>
+            <a:endParaRPr sz="1200">
+              <a:solidFill>
+                <a:srgbClr val="808080"/>
+              </a:solidFill>
+              <a:latin typeface="微软雅黑" panose="020B0503020204020204" charset="-122"/>
+              <a:ea typeface="微软雅黑" panose="020B0503020204020204" charset="-122"/>
+              <a:cs typeface="微软雅黑" panose="020B0503020204020204" charset="-122"/>
+            </a:endParaRPr>
+          </a:p>
+        </p:txBody>
+      </p:sp>
+      <p:sp>
+        <p:nvSpPr>
+          <p:cNvPr id="16" name="Rectangle 15"/>
+          <p:cNvSpPr/>
+          <p:nvPr/>
+        </p:nvSpPr>
+        <p:spPr>
+          <a:xfrm>
+            <a:off x="5577840" y="1280160"/>
+            <a:ext cx="5943600" cy="3931920"/>
+          </a:xfrm>
+          <a:prstGeom prst="rect">
+            <a:avLst/>
+          </a:prstGeom>
+          <a:solidFill>
+            <a:srgbClr val="F2F2F2"/>
+          </a:solidFill>
+          <a:ln w="15240">
+            <a:solidFill>
+              <a:srgbClr val="C00000"/>
+            </a:solidFill>
+            <a:prstDash val="dash"/>
+          </a:ln>
+          <a:effectLst/>
+        </p:spPr>
+        <p:style>
+          <a:lnRef idx="1">
+            <a:schemeClr val="accent1"/>
+          </a:lnRef>
+          <a:fillRef idx="3">
+            <a:schemeClr val="accent1"/>
+          </a:fillRef>
+          <a:effectRef idx="2">
+            <a:schemeClr val="accent1"/>
+          </a:effectRef>
+          <a:fontRef idx="minor">
+            <a:schemeClr val="lt1"/>
+          </a:fontRef>
+        </p:style>
+        <p:txBody>
+          <a:bodyPr wrap="square" rtlCol="0" anchor="ctr"/>
+          <a:lstStyle/>
+          <a:p>
+            <a:pPr algn="ctr"/>
+            <a:r>
+              <a:rPr sz="1300">
+                <a:solidFill>
+                  <a:srgbClr val="C00000"/>
+                </a:solidFill>
+                <a:latin typeface="微软雅黑" panose="020B0503020204020204" charset="-122"/>
+                <a:ea typeface="微软雅黑" panose="020B0503020204020204" charset="-122"/>
+                <a:cs typeface="微软雅黑" panose="020B0503020204020204" charset="-122"/>
+              </a:rPr>
+              <a:t>【截图 A】
+文档管理页演示</a:t>
+            </a:r>
+            <a:endParaRPr sz="1300">
+              <a:solidFill>
+                <a:srgbClr val="C00000"/>
+              </a:solidFill>
+              <a:latin typeface="微软雅黑" panose="020B0503020204020204" charset="-122"/>
+              <a:ea typeface="微软雅黑" panose="020B0503020204020204" charset="-122"/>
+              <a:cs typeface="微软雅黑" panose="020B0503020204020204" charset="-122"/>
+            </a:endParaRPr>
+          </a:p>
+          <a:p>
+            <a:pPr algn="ctr"/>
+            <a:r>
+              <a:rPr sz="1000">
+                <a:solidFill>
+                  <a:srgbClr val="808080"/>
+                </a:solidFill>
+                <a:latin typeface="微软雅黑" panose="020B0503020204020204" charset="-122"/>
+                <a:ea typeface="微软雅黑" panose="020B0503020204020204" charset="-122"/>
+                <a:cs typeface="微软雅黑" panose="020B0503020204020204" charset="-122"/>
+              </a:rPr>
+              <a:t>已选课程 + 上传中的加载提示
++ 完成后的文档列表（含切分块数与状态）</a:t>
+            </a:r>
+            <a:endParaRPr sz="1000">
+              <a:solidFill>
+                <a:srgbClr val="808080"/>
+              </a:solidFill>
+              <a:latin typeface="微软雅黑" panose="020B0503020204020204" charset="-122"/>
+              <a:ea typeface="微软雅黑" panose="020B0503020204020204" charset="-122"/>
+              <a:cs typeface="微软雅黑" panose="020B0503020204020204" charset="-122"/>
+            </a:endParaRPr>
+          </a:p>
+        </p:txBody>
+      </p:sp>
+      <p:sp>
+        <p:nvSpPr>
+          <p:cNvPr id="17" name="TextBox 16"/>
+          <p:cNvSpPr txBox="1"/>
+          <p:nvPr/>
+        </p:nvSpPr>
+        <p:spPr>
+          <a:xfrm>
+            <a:off x="5577840" y="5321808"/>
+            <a:ext cx="5943600" cy="168910"/>
+          </a:xfrm>
+          <a:prstGeom prst="rect">
+            <a:avLst/>
+          </a:prstGeom>
+          <a:noFill/>
+        </p:spPr>
+        <p:txBody>
+          <a:bodyPr wrap="square" lIns="0" tIns="0" rIns="0" bIns="0" anchor="t">
+            <a:spAutoFit/>
+          </a:bodyPr>
+          <a:lstStyle/>
+          <a:p>
+            <a:pPr algn="ctr">
+              <a:spcAft>
+                <a:spcPts val="600"/>
+              </a:spcAft>
+            </a:pPr>
+            <a:r>
+              <a:rPr sz="1100">
+                <a:solidFill>
+                  <a:srgbClr val="808080"/>
+                </a:solidFill>
+                <a:latin typeface="微软雅黑" panose="020B0503020204020204" charset="-122"/>
+                <a:ea typeface="微软雅黑" panose="020B0503020204020204" charset="-122"/>
+                <a:cs typeface="微软雅黑" panose="020B0503020204020204" charset="-122"/>
+              </a:rPr>
+              <a:t>演示截图</a:t>
+            </a:r>
+            <a:endParaRPr sz="1100">
+              <a:solidFill>
+                <a:srgbClr val="808080"/>
+              </a:solidFill>
+              <a:latin typeface="微软雅黑" panose="020B0503020204020204" charset="-122"/>
+              <a:ea typeface="微软雅黑" panose="020B0503020204020204" charset="-122"/>
+              <a:cs typeface="微软雅黑" panose="020B0503020204020204" charset="-122"/>
+            </a:endParaRPr>
+          </a:p>
+        </p:txBody>
+      </p:sp>
+      <p:sp>
+        <p:nvSpPr>
+          <p:cNvPr id="18" name="TextBox 17"/>
+          <p:cNvSpPr txBox="1"/>
+          <p:nvPr/>
+        </p:nvSpPr>
+        <p:spPr>
+          <a:xfrm>
+            <a:off x="11247120" y="6473952"/>
+            <a:ext cx="640080" cy="274320"/>
+          </a:xfrm>
+          <a:prstGeom prst="rect">
+            <a:avLst/>
+          </a:prstGeom>
+          <a:noFill/>
+        </p:spPr>
+        <p:txBody>
+          <a:bodyPr wrap="none">
+            <a:spAutoFit/>
+          </a:bodyPr>
+          <a:lstStyle/>
+          <a:p>
+            <a:pPr algn="r"/>
+            <a:r>
+              <a:rPr sz="1000">
+                <a:solidFill>
+                  <a:srgbClr val="808080"/>
+                </a:solidFill>
+                <a:latin typeface="微软雅黑" panose="020B0503020204020204" charset="-122"/>
+                <a:ea typeface="微软雅黑" panose="020B0503020204020204" charset="-122"/>
+                <a:cs typeface="微软雅黑" panose="020B0503020204020204" charset="-122"/>
+              </a:rPr>
+              <a:t>10</a:t>
+            </a:r>
+            <a:endParaRPr sz="1000">
+              <a:solidFill>
+                <a:srgbClr val="808080"/>
+              </a:solidFill>
+              <a:latin typeface="微软雅黑" panose="020B0503020204020204" charset="-122"/>
+              <a:ea typeface="微软雅黑" panose="020B0503020204020204" charset="-122"/>
+              <a:cs typeface="微软雅黑" panose="020B0503020204020204" charset="-122"/>
+            </a:endParaRPr>
+          </a:p>
+        </p:txBody>
+      </p:sp>
+      <p:pic>
+        <p:nvPicPr>
+          <p:cNvPr id="20" name="图片 19" descr="bfb5efee686c257c6dd3f16ee3f716c2"/>
+          <p:cNvPicPr>
+            <a:picLocks noChangeAspect="1"/>
+          </p:cNvPicPr>
+          <p:nvPr/>
+        </p:nvPicPr>
+        <p:blipFill>
+          <a:blip r:embed="rId1"/>
+          <a:stretch>
+            <a:fillRect/>
+          </a:stretch>
+        </p:blipFill>
+        <p:spPr>
+          <a:xfrm>
+            <a:off x="5369560" y="1251585"/>
+            <a:ext cx="6289040" cy="4070350"/>
+          </a:xfrm>
+          <a:prstGeom prst="rect">
+            <a:avLst/>
+          </a:prstGeom>
+        </p:spPr>
+      </p:pic>
+    </p:spTree>
+  </p:cSld>
+  <p:clrMapOvr>
+    <a:masterClrMapping/>
+  </p:clrMapOvr>
+</p:sld>
+</file>
+
+<file path=ppt/slides/slide11.xml><?xml version="1.0" encoding="utf-8"?>
+<p:sld xmlns:a="http://schemas.openxmlformats.org/drawingml/2006/main" xmlns:r="http://schemas.openxmlformats.org/officeDocument/2006/relationships" xmlns:p="http://schemas.openxmlformats.org/presentationml/2006/main">
+  <p:cSld>
+    <p:spTree>
+      <p:nvGrpSpPr>
+        <p:cNvPr id="1" name=""/>
+        <p:cNvGrpSpPr/>
+        <p:nvPr/>
+      </p:nvGrpSpPr>
+      <p:grpSpPr/>
+      <p:sp>
+        <p:nvSpPr>
+          <p:cNvPr id="2" name="Rectangle 1"/>
+          <p:cNvSpPr/>
+          <p:nvPr/>
+        </p:nvSpPr>
+        <p:spPr>
+          <a:xfrm>
+            <a:off x="0" y="0"/>
+            <a:ext cx="12191695" cy="960120"/>
+          </a:xfrm>
+          <a:prstGeom prst="rect">
+            <a:avLst/>
+          </a:prstGeom>
+          <a:solidFill>
+            <a:srgbClr val="1F4E79"/>
+          </a:solidFill>
+          <a:ln>
+            <a:noFill/>
+          </a:ln>
+          <a:effectLst/>
+        </p:spPr>
+        <p:style>
+          <a:lnRef idx="1">
+            <a:schemeClr val="accent1"/>
+          </a:lnRef>
+          <a:fillRef idx="3">
+            <a:schemeClr val="accent1"/>
+          </a:fillRef>
+          <a:effectRef idx="2">
+            <a:schemeClr val="accent1"/>
+          </a:effectRef>
+          <a:fontRef idx="minor">
+            <a:schemeClr val="lt1"/>
+          </a:fontRef>
+        </p:style>
+        <p:txBody>
+          <a:bodyPr rtlCol="0" anchor="ctr"/>
+          <a:lstStyle/>
+          <a:p>
+            <a:pPr algn="ctr"/>
+          </a:p>
+        </p:txBody>
+      </p:sp>
+      <p:sp>
+        <p:nvSpPr>
+          <p:cNvPr id="3" name="TextBox 2"/>
+          <p:cNvSpPr txBox="1"/>
+          <p:nvPr/>
+        </p:nvSpPr>
+        <p:spPr>
+          <a:xfrm>
+            <a:off x="502920" y="182880"/>
+            <a:ext cx="11155680" cy="621792"/>
+          </a:xfrm>
+          <a:prstGeom prst="rect">
+            <a:avLst/>
+          </a:prstGeom>
+          <a:noFill/>
+        </p:spPr>
+        <p:txBody>
+          <a:bodyPr wrap="square" lIns="0" tIns="0" rIns="0" bIns="0" anchor="ctr">
+            <a:spAutoFit/>
+          </a:bodyPr>
+          <a:lstStyle/>
+          <a:p>
+            <a:pPr algn="l">
+              <a:spcAft>
+                <a:spcPts val="600"/>
+              </a:spcAft>
+            </a:pPr>
+            <a:r>
+              <a:rPr sz="2600">
+                <a:solidFill>
+                  <a:srgbClr val="FFFFFF"/>
+                </a:solidFill>
+                <a:latin typeface="微软雅黑" panose="020B0503020204020204" charset="-122"/>
+                <a:ea typeface="微软雅黑" panose="020B0503020204020204" charset="-122"/>
+                <a:cs typeface="微软雅黑" panose="020B0503020204020204" charset="-122"/>
+              </a:rPr>
+              <a:t>5.2　功能演示（二）：智能问答</a:t>
+            </a:r>
+            <a:endParaRPr sz="2600">
+              <a:solidFill>
+                <a:srgbClr val="FFFFFF"/>
+              </a:solidFill>
+              <a:latin typeface="微软雅黑" panose="020B0503020204020204" charset="-122"/>
+              <a:ea typeface="微软雅黑" panose="020B0503020204020204" charset="-122"/>
+              <a:cs typeface="微软雅黑" panose="020B0503020204020204" charset="-122"/>
+            </a:endParaRPr>
+          </a:p>
+        </p:txBody>
+      </p:sp>
+      <p:sp>
+        <p:nvSpPr>
+          <p:cNvPr id="4" name="TextBox 3"/>
+          <p:cNvSpPr txBox="1"/>
+          <p:nvPr/>
+        </p:nvSpPr>
+        <p:spPr>
+          <a:xfrm>
+            <a:off x="8321040" y="274320"/>
+            <a:ext cx="3383280" cy="457200"/>
+          </a:xfrm>
+          <a:prstGeom prst="rect">
+            <a:avLst/>
+          </a:prstGeom>
+          <a:noFill/>
+        </p:spPr>
+        <p:txBody>
+          <a:bodyPr wrap="square" lIns="0" tIns="0" rIns="0" bIns="0" anchor="ctr">
+            <a:spAutoFit/>
+          </a:bodyPr>
+          <a:lstStyle/>
+          <a:p>
+            <a:pPr algn="r">
+              <a:spcAft>
+                <a:spcPts val="600"/>
+              </a:spcAft>
+            </a:pPr>
+            <a:r>
+              <a:rPr sz="1300">
+                <a:solidFill>
+                  <a:srgbClr val="BDD7EE"/>
+                </a:solidFill>
+                <a:latin typeface="微软雅黑" panose="020B0503020204020204" charset="-122"/>
+                <a:ea typeface="微软雅黑" panose="020B0503020204020204" charset="-122"/>
+                <a:cs typeface="微软雅黑" panose="020B0503020204020204" charset="-122"/>
+              </a:rPr>
+              <a:t>负责人：周承锦</a:t>
+            </a:r>
+            <a:endParaRPr sz="1300">
+              <a:solidFill>
+                <a:srgbClr val="BDD7EE"/>
+              </a:solidFill>
+              <a:latin typeface="微软雅黑" panose="020B0503020204020204" charset="-122"/>
+              <a:ea typeface="微软雅黑" panose="020B0503020204020204" charset="-122"/>
+              <a:cs typeface="微软雅黑" panose="020B0503020204020204" charset="-122"/>
+            </a:endParaRPr>
+          </a:p>
+        </p:txBody>
+      </p:sp>
+      <p:sp>
+        <p:nvSpPr>
+          <p:cNvPr id="5" name="TextBox 4"/>
+          <p:cNvSpPr txBox="1"/>
+          <p:nvPr/>
+        </p:nvSpPr>
+        <p:spPr>
+          <a:xfrm>
+            <a:off x="502920" y="1115568"/>
+            <a:ext cx="5120640" cy="365760"/>
+          </a:xfrm>
+          <a:prstGeom prst="rect">
+            <a:avLst/>
+          </a:prstGeom>
+          <a:noFill/>
+        </p:spPr>
+        <p:txBody>
+          <a:bodyPr wrap="square" lIns="0" tIns="0" rIns="0" bIns="0" anchor="t">
+            <a:spAutoFit/>
+          </a:bodyPr>
+          <a:lstStyle/>
+          <a:p>
+            <a:pPr algn="l">
+              <a:spcAft>
+                <a:spcPts val="600"/>
+              </a:spcAft>
+            </a:pPr>
+            <a:r>
+              <a:rPr sz="1800">
+                <a:solidFill>
+                  <a:srgbClr val="2E75B6"/>
+                </a:solidFill>
+                <a:latin typeface="微软雅黑" panose="020B0503020204020204" charset="-122"/>
+                <a:ea typeface="微软雅黑" panose="020B0503020204020204" charset="-122"/>
+                <a:cs typeface="微软雅黑" panose="020B0503020204020204" charset="-122"/>
+              </a:rPr>
+              <a:t>问答过程</a:t>
+            </a:r>
+            <a:endParaRPr sz="1800">
+              <a:solidFill>
+                <a:srgbClr val="2E75B6"/>
+              </a:solidFill>
+              <a:latin typeface="微软雅黑" panose="020B0503020204020204" charset="-122"/>
+              <a:ea typeface="微软雅黑" panose="020B0503020204020204" charset="-122"/>
+              <a:cs typeface="微软雅黑" panose="020B0503020204020204" charset="-122"/>
+            </a:endParaRPr>
+          </a:p>
+        </p:txBody>
+      </p:sp>
+      <p:sp>
+        <p:nvSpPr>
+          <p:cNvPr id="6" name="Rounded Rectangle 5"/>
+          <p:cNvSpPr/>
+          <p:nvPr/>
+        </p:nvSpPr>
+        <p:spPr>
+          <a:xfrm>
+            <a:off x="502920" y="1572768"/>
+            <a:ext cx="4480560" cy="658368"/>
+          </a:xfrm>
+          <a:prstGeom prst="roundRect">
+            <a:avLst/>
+          </a:prstGeom>
+          <a:solidFill>
+            <a:srgbClr val="EAF3FB"/>
+          </a:solidFill>
+          <a:ln w="16510">
+            <a:solidFill>
+              <a:srgbClr val="1F4E79"/>
+            </a:solidFill>
+          </a:ln>
+          <a:effectLst/>
+        </p:spPr>
+        <p:style>
+          <a:lnRef idx="1">
+            <a:schemeClr val="accent1"/>
+          </a:lnRef>
+          <a:fillRef idx="3">
+            <a:schemeClr val="accent1"/>
+          </a:fillRef>
+          <a:effectRef idx="2">
+            <a:schemeClr val="accent1"/>
+          </a:effectRef>
+          <a:fontRef idx="minor">
+            <a:schemeClr val="lt1"/>
+          </a:fontRef>
+        </p:style>
+        <p:txBody>
+          <a:bodyPr wrap="square" rtlCol="0" anchor="ctr"/>
+          <a:lstStyle/>
+          <a:p>
+            <a:pPr algn="ctr"/>
+            <a:r>
+              <a:rPr sz="1200">
+                <a:solidFill>
+                  <a:srgbClr val="1F4E79"/>
+                </a:solidFill>
+                <a:latin typeface="微软雅黑" panose="020B0503020204020204" charset="-122"/>
+                <a:ea typeface="微软雅黑" panose="020B0503020204020204" charset="-122"/>
+                <a:cs typeface="微软雅黑" panose="020B0503020204020204" charset="-122"/>
+              </a:rPr>
+              <a:t>① 选择课程</a:t>
+            </a:r>
+            <a:endParaRPr sz="1200">
+              <a:solidFill>
+                <a:srgbClr val="1F4E79"/>
+              </a:solidFill>
+              <a:latin typeface="微软雅黑" panose="020B0503020204020204" charset="-122"/>
+              <a:ea typeface="微软雅黑" panose="020B0503020204020204" charset="-122"/>
+              <a:cs typeface="微软雅黑" panose="020B0503020204020204" charset="-122"/>
+            </a:endParaRPr>
+          </a:p>
+        </p:txBody>
+      </p:sp>
+      <p:sp>
+        <p:nvSpPr>
+          <p:cNvPr id="7" name="Down Arrow 6"/>
+          <p:cNvSpPr/>
+          <p:nvPr/>
+        </p:nvSpPr>
+        <p:spPr>
+          <a:xfrm>
+            <a:off x="2697480" y="2231136"/>
+            <a:ext cx="182880" cy="256032"/>
+          </a:xfrm>
+          <a:prstGeom prst="downArrow">
+            <a:avLst/>
+          </a:prstGeom>
+          <a:solidFill>
+            <a:srgbClr val="2E75B6"/>
+          </a:solidFill>
+          <a:ln>
+            <a:noFill/>
+          </a:ln>
+          <a:effectLst/>
+        </p:spPr>
+        <p:style>
+          <a:lnRef idx="1">
+            <a:schemeClr val="accent1"/>
+          </a:lnRef>
+          <a:fillRef idx="3">
+            <a:schemeClr val="accent1"/>
+          </a:fillRef>
+          <a:effectRef idx="2">
+            <a:schemeClr val="accent1"/>
+          </a:effectRef>
+          <a:fontRef idx="minor">
+            <a:schemeClr val="lt1"/>
+          </a:fontRef>
+        </p:style>
+        <p:txBody>
+          <a:bodyPr rtlCol="0" anchor="ctr"/>
+          <a:lstStyle/>
+          <a:p>
+            <a:pPr algn="ctr"/>
+          </a:p>
+        </p:txBody>
+      </p:sp>
+      <p:sp>
+        <p:nvSpPr>
+          <p:cNvPr id="8" name="Rounded Rectangle 7"/>
+          <p:cNvSpPr/>
+          <p:nvPr/>
+        </p:nvSpPr>
+        <p:spPr>
+          <a:xfrm>
+            <a:off x="502920" y="2487168"/>
+            <a:ext cx="4480560" cy="658368"/>
+          </a:xfrm>
+          <a:prstGeom prst="roundRect">
+            <a:avLst/>
+          </a:prstGeom>
+          <a:solidFill>
+            <a:srgbClr val="EAF3FB"/>
+          </a:solidFill>
+          <a:ln w="16510">
+            <a:solidFill>
+              <a:srgbClr val="1F4E79"/>
+            </a:solidFill>
+          </a:ln>
+          <a:effectLst/>
+        </p:spPr>
+        <p:style>
+          <a:lnRef idx="1">
+            <a:schemeClr val="accent1"/>
+          </a:lnRef>
+          <a:fillRef idx="3">
+            <a:schemeClr val="accent1"/>
+          </a:fillRef>
+          <a:effectRef idx="2">
+            <a:schemeClr val="accent1"/>
+          </a:effectRef>
+          <a:fontRef idx="minor">
+            <a:schemeClr val="lt1"/>
+          </a:fontRef>
+        </p:style>
+        <p:txBody>
+          <a:bodyPr wrap="square" rtlCol="0" anchor="ctr"/>
+          <a:lstStyle/>
+          <a:p>
+            <a:pPr algn="ctr"/>
+            <a:r>
+              <a:rPr sz="1200">
+                <a:solidFill>
+                  <a:srgbClr val="1F4E79"/>
+                </a:solidFill>
+                <a:latin typeface="微软雅黑" panose="020B0503020204020204" charset="-122"/>
+                <a:ea typeface="微软雅黑" panose="020B0503020204020204" charset="-122"/>
+                <a:cs typeface="微软雅黑" panose="020B0503020204020204" charset="-122"/>
+              </a:rPr>
+              <a:t>② 输入问题</a:t>
+            </a:r>
+            <a:endParaRPr sz="1200">
+              <a:solidFill>
+                <a:srgbClr val="1F4E79"/>
+              </a:solidFill>
+              <a:latin typeface="微软雅黑" panose="020B0503020204020204" charset="-122"/>
+              <a:ea typeface="微软雅黑" panose="020B0503020204020204" charset="-122"/>
+              <a:cs typeface="微软雅黑" panose="020B0503020204020204" charset="-122"/>
+            </a:endParaRPr>
+          </a:p>
+        </p:txBody>
+      </p:sp>
+      <p:sp>
+        <p:nvSpPr>
+          <p:cNvPr id="9" name="Down Arrow 8"/>
+          <p:cNvSpPr/>
+          <p:nvPr/>
+        </p:nvSpPr>
+        <p:spPr>
+          <a:xfrm>
+            <a:off x="2697480" y="3145535"/>
+            <a:ext cx="182880" cy="256032"/>
+          </a:xfrm>
+          <a:prstGeom prst="downArrow">
+            <a:avLst/>
+          </a:prstGeom>
+          <a:solidFill>
+            <a:srgbClr val="2E75B6"/>
+          </a:solidFill>
+          <a:ln>
+            <a:noFill/>
+          </a:ln>
+          <a:effectLst/>
+        </p:spPr>
+        <p:style>
+          <a:lnRef idx="1">
+            <a:schemeClr val="accent1"/>
+          </a:lnRef>
+          <a:fillRef idx="3">
+            <a:schemeClr val="accent1"/>
+          </a:fillRef>
+          <a:effectRef idx="2">
+            <a:schemeClr val="accent1"/>
+          </a:effectRef>
+          <a:fontRef idx="minor">
+            <a:schemeClr val="lt1"/>
+          </a:fontRef>
+        </p:style>
+        <p:txBody>
+          <a:bodyPr rtlCol="0" anchor="ctr"/>
+          <a:lstStyle/>
+          <a:p>
+            <a:pPr algn="ctr"/>
+          </a:p>
+        </p:txBody>
+      </p:sp>
+      <p:sp>
+        <p:nvSpPr>
+          <p:cNvPr id="10" name="Rounded Rectangle 9"/>
+          <p:cNvSpPr/>
+          <p:nvPr/>
+        </p:nvSpPr>
+        <p:spPr>
+          <a:xfrm>
+            <a:off x="502920" y="3401568"/>
+            <a:ext cx="4480560" cy="658368"/>
+          </a:xfrm>
+          <a:prstGeom prst="roundRect">
+            <a:avLst/>
+          </a:prstGeom>
+          <a:solidFill>
+            <a:srgbClr val="EAF3FB"/>
+          </a:solidFill>
+          <a:ln w="16510">
+            <a:solidFill>
+              <a:srgbClr val="1F4E79"/>
+            </a:solidFill>
+          </a:ln>
+          <a:effectLst/>
+        </p:spPr>
+        <p:style>
+          <a:lnRef idx="1">
+            <a:schemeClr val="accent1"/>
+          </a:lnRef>
+          <a:fillRef idx="3">
+            <a:schemeClr val="accent1"/>
+          </a:fillRef>
+          <a:effectRef idx="2">
+            <a:schemeClr val="accent1"/>
+          </a:effectRef>
+          <a:fontRef idx="minor">
+            <a:schemeClr val="lt1"/>
+          </a:fontRef>
+        </p:style>
+        <p:txBody>
+          <a:bodyPr wrap="square" rtlCol="0" anchor="ctr"/>
+          <a:lstStyle/>
+          <a:p>
+            <a:pPr algn="ctr"/>
+            <a:r>
+              <a:rPr sz="1200">
+                <a:solidFill>
+                  <a:srgbClr val="1F4E79"/>
+                </a:solidFill>
+                <a:latin typeface="微软雅黑" panose="020B0503020204020204" charset="-122"/>
+                <a:ea typeface="微软雅黑" panose="020B0503020204020204" charset="-122"/>
+                <a:cs typeface="微软雅黑" panose="020B0503020204020204" charset="-122"/>
+              </a:rPr>
+              <a:t>③ 向量化并
+检索 top_k 片段</a:t>
+            </a:r>
+            <a:endParaRPr sz="1200">
+              <a:solidFill>
+                <a:srgbClr val="1F4E79"/>
+              </a:solidFill>
+              <a:latin typeface="微软雅黑" panose="020B0503020204020204" charset="-122"/>
+              <a:ea typeface="微软雅黑" panose="020B0503020204020204" charset="-122"/>
+              <a:cs typeface="微软雅黑" panose="020B0503020204020204" charset="-122"/>
+            </a:endParaRPr>
+          </a:p>
+        </p:txBody>
+      </p:sp>
+      <p:sp>
+        <p:nvSpPr>
+          <p:cNvPr id="11" name="Down Arrow 10"/>
+          <p:cNvSpPr/>
+          <p:nvPr/>
+        </p:nvSpPr>
+        <p:spPr>
+          <a:xfrm>
+            <a:off x="2697480" y="4059935"/>
+            <a:ext cx="182880" cy="256032"/>
+          </a:xfrm>
+          <a:prstGeom prst="downArrow">
+            <a:avLst/>
+          </a:prstGeom>
+          <a:solidFill>
+            <a:srgbClr val="2E75B6"/>
+          </a:solidFill>
+          <a:ln>
+            <a:noFill/>
+          </a:ln>
+          <a:effectLst/>
+        </p:spPr>
+        <p:style>
+          <a:lnRef idx="1">
+            <a:schemeClr val="accent1"/>
+          </a:lnRef>
+          <a:fillRef idx="3">
+            <a:schemeClr val="accent1"/>
+          </a:fillRef>
+          <a:effectRef idx="2">
+            <a:schemeClr val="accent1"/>
+          </a:effectRef>
+          <a:fontRef idx="minor">
+            <a:schemeClr val="lt1"/>
+          </a:fontRef>
+        </p:style>
+        <p:txBody>
+          <a:bodyPr rtlCol="0" anchor="ctr"/>
+          <a:lstStyle/>
+          <a:p>
+            <a:pPr algn="ctr"/>
+          </a:p>
+        </p:txBody>
+      </p:sp>
+      <p:sp>
+        <p:nvSpPr>
+          <p:cNvPr id="12" name="Rounded Rectangle 11"/>
+          <p:cNvSpPr/>
+          <p:nvPr/>
+        </p:nvSpPr>
+        <p:spPr>
+          <a:xfrm>
+            <a:off x="502920" y="4315968"/>
+            <a:ext cx="4480560" cy="658368"/>
+          </a:xfrm>
+          <a:prstGeom prst="roundRect">
+            <a:avLst/>
+          </a:prstGeom>
+          <a:solidFill>
+            <a:srgbClr val="EAF3FB"/>
+          </a:solidFill>
+          <a:ln w="16510">
+            <a:solidFill>
+              <a:srgbClr val="1F4E79"/>
+            </a:solidFill>
+          </a:ln>
+          <a:effectLst/>
+        </p:spPr>
+        <p:style>
+          <a:lnRef idx="1">
+            <a:schemeClr val="accent1"/>
+          </a:lnRef>
+          <a:fillRef idx="3">
+            <a:schemeClr val="accent1"/>
+          </a:fillRef>
+          <a:effectRef idx="2">
+            <a:schemeClr val="accent1"/>
+          </a:effectRef>
+          <a:fontRef idx="minor">
+            <a:schemeClr val="lt1"/>
+          </a:fontRef>
+        </p:style>
+        <p:txBody>
+          <a:bodyPr wrap="square" rtlCol="0" anchor="ctr"/>
+          <a:lstStyle/>
+          <a:p>
+            <a:pPr algn="ctr"/>
+            <a:r>
+              <a:rPr sz="1200">
+                <a:solidFill>
+                  <a:srgbClr val="1F4E79"/>
+                </a:solidFill>
+                <a:latin typeface="微软雅黑" panose="020B0503020204020204" charset="-122"/>
+                <a:ea typeface="微软雅黑" panose="020B0503020204020204" charset="-122"/>
+                <a:cs typeface="微软雅黑" panose="020B0503020204020204" charset="-122"/>
+              </a:rPr>
+              <a:t>④ 拼接上下文
+大模型生成</a:t>
+            </a:r>
+            <a:endParaRPr sz="1200">
+              <a:solidFill>
+                <a:srgbClr val="1F4E79"/>
+              </a:solidFill>
+              <a:latin typeface="微软雅黑" panose="020B0503020204020204" charset="-122"/>
+              <a:ea typeface="微软雅黑" panose="020B0503020204020204" charset="-122"/>
+              <a:cs typeface="微软雅黑" panose="020B0503020204020204" charset="-122"/>
+            </a:endParaRPr>
+          </a:p>
+        </p:txBody>
+      </p:sp>
+      <p:sp>
+        <p:nvSpPr>
+          <p:cNvPr id="13" name="Down Arrow 12"/>
+          <p:cNvSpPr/>
+          <p:nvPr/>
+        </p:nvSpPr>
+        <p:spPr>
+          <a:xfrm>
+            <a:off x="2697480" y="4974336"/>
+            <a:ext cx="182880" cy="256032"/>
+          </a:xfrm>
+          <a:prstGeom prst="downArrow">
+            <a:avLst/>
+          </a:prstGeom>
+          <a:solidFill>
+            <a:srgbClr val="2E75B6"/>
+          </a:solidFill>
+          <a:ln>
+            <a:noFill/>
+          </a:ln>
+          <a:effectLst/>
+        </p:spPr>
+        <p:style>
+          <a:lnRef idx="1">
+            <a:schemeClr val="accent1"/>
+          </a:lnRef>
+          <a:fillRef idx="3">
+            <a:schemeClr val="accent1"/>
+          </a:fillRef>
+          <a:effectRef idx="2">
+            <a:schemeClr val="accent1"/>
+          </a:effectRef>
+          <a:fontRef idx="minor">
+            <a:schemeClr val="lt1"/>
+          </a:fontRef>
+        </p:style>
+        <p:txBody>
+          <a:bodyPr rtlCol="0" anchor="ctr"/>
+          <a:lstStyle/>
+          <a:p>
+            <a:pPr algn="ctr"/>
+          </a:p>
+        </p:txBody>
+      </p:sp>
+      <p:sp>
+        <p:nvSpPr>
+          <p:cNvPr id="14" name="Rounded Rectangle 13"/>
+          <p:cNvSpPr/>
+          <p:nvPr/>
+        </p:nvSpPr>
+        <p:spPr>
+          <a:xfrm>
+            <a:off x="502920" y="5230368"/>
+            <a:ext cx="4480560" cy="658368"/>
+          </a:xfrm>
+          <a:prstGeom prst="roundRect">
+            <a:avLst/>
+          </a:prstGeom>
+          <a:solidFill>
+            <a:srgbClr val="EAF3FB"/>
+          </a:solidFill>
+          <a:ln w="16510">
+            <a:solidFill>
+              <a:srgbClr val="1F4E79"/>
+            </a:solidFill>
+          </a:ln>
+          <a:effectLst/>
+        </p:spPr>
+        <p:style>
+          <a:lnRef idx="1">
+            <a:schemeClr val="accent1"/>
+          </a:lnRef>
+          <a:fillRef idx="3">
+            <a:schemeClr val="accent1"/>
+          </a:fillRef>
+          <a:effectRef idx="2">
+            <a:schemeClr val="accent1"/>
+          </a:effectRef>
+          <a:fontRef idx="minor">
+            <a:schemeClr val="lt1"/>
+          </a:fontRef>
+        </p:style>
+        <p:txBody>
+          <a:bodyPr wrap="square" rtlCol="0" anchor="ctr"/>
+          <a:lstStyle/>
+          <a:p>
+            <a:pPr algn="ctr"/>
+            <a:r>
+              <a:rPr sz="1200">
+                <a:solidFill>
+                  <a:srgbClr val="1F4E79"/>
+                </a:solidFill>
+                <a:latin typeface="微软雅黑" panose="020B0503020204020204" charset="-122"/>
+                <a:ea typeface="微软雅黑" panose="020B0503020204020204" charset="-122"/>
+                <a:cs typeface="微软雅黑" panose="020B0503020204020204" charset="-122"/>
+              </a:rPr>
+              <a:t>⑤ 返回回答
++ 引用来源</a:t>
+            </a:r>
+            <a:endParaRPr sz="1200">
+              <a:solidFill>
+                <a:srgbClr val="1F4E79"/>
+              </a:solidFill>
+              <a:latin typeface="微软雅黑" panose="020B0503020204020204" charset="-122"/>
+              <a:ea typeface="微软雅黑" panose="020B0503020204020204" charset="-122"/>
+              <a:cs typeface="微软雅黑" panose="020B0503020204020204" charset="-122"/>
+            </a:endParaRPr>
+          </a:p>
+        </p:txBody>
+      </p:sp>
+      <p:sp>
+        <p:nvSpPr>
+          <p:cNvPr id="15" name="TextBox 14"/>
+          <p:cNvSpPr txBox="1"/>
+          <p:nvPr/>
+        </p:nvSpPr>
+        <p:spPr>
+          <a:xfrm>
+            <a:off x="502920" y="6144768"/>
+            <a:ext cx="4572000" cy="457200"/>
+          </a:xfrm>
+          <a:prstGeom prst="rect">
+            <a:avLst/>
+          </a:prstGeom>
+          <a:noFill/>
+        </p:spPr>
+        <p:txBody>
+          <a:bodyPr wrap="square" lIns="0" tIns="0" rIns="0" bIns="0" anchor="t">
+            <a:spAutoFit/>
+          </a:bodyPr>
+          <a:lstStyle/>
+          <a:p>
+            <a:pPr algn="l">
+              <a:spcAft>
+                <a:spcPts val="600"/>
+              </a:spcAft>
+            </a:pPr>
+            <a:r>
+              <a:rPr sz="1200">
+                <a:solidFill>
+                  <a:srgbClr val="808080"/>
+                </a:solidFill>
+                <a:latin typeface="微软雅黑" panose="020B0503020204020204" charset="-122"/>
+                <a:ea typeface="微软雅黑" panose="020B0503020204020204" charset="-122"/>
+                <a:cs typeface="微软雅黑" panose="020B0503020204020204" charset="-122"/>
+              </a:rPr>
+              <a:t>亮点：答案可溯源，附文件名与原文片段摘要</a:t>
+            </a:r>
+            <a:endParaRPr sz="1200">
+              <a:solidFill>
+                <a:srgbClr val="808080"/>
+              </a:solidFill>
+              <a:latin typeface="微软雅黑" panose="020B0503020204020204" charset="-122"/>
+              <a:ea typeface="微软雅黑" panose="020B0503020204020204" charset="-122"/>
+              <a:cs typeface="微软雅黑" panose="020B0503020204020204" charset="-122"/>
+            </a:endParaRPr>
+          </a:p>
+        </p:txBody>
+      </p:sp>
+      <p:sp>
+        <p:nvSpPr>
+          <p:cNvPr id="16" name="Rectangle 15"/>
+          <p:cNvSpPr/>
+          <p:nvPr/>
+        </p:nvSpPr>
+        <p:spPr>
+          <a:xfrm>
+            <a:off x="5577840" y="1280160"/>
+            <a:ext cx="5943600" cy="3931920"/>
+          </a:xfrm>
+          <a:prstGeom prst="rect">
+            <a:avLst/>
+          </a:prstGeom>
+          <a:solidFill>
+            <a:srgbClr val="F2F2F2"/>
+          </a:solidFill>
+          <a:ln w="15240">
+            <a:solidFill>
+              <a:srgbClr val="C00000"/>
+            </a:solidFill>
+            <a:prstDash val="dash"/>
+          </a:ln>
+          <a:effectLst/>
+        </p:spPr>
+        <p:style>
+          <a:lnRef idx="1">
+            <a:schemeClr val="accent1"/>
+          </a:lnRef>
+          <a:fillRef idx="3">
+            <a:schemeClr val="accent1"/>
+          </a:fillRef>
+          <a:effectRef idx="2">
+            <a:schemeClr val="accent1"/>
+          </a:effectRef>
+          <a:fontRef idx="minor">
+            <a:schemeClr val="lt1"/>
+          </a:fontRef>
+        </p:style>
+        <p:txBody>
+          <a:bodyPr wrap="square" rtlCol="0" anchor="ctr"/>
+          <a:lstStyle/>
+          <a:p>
+            <a:pPr algn="ctr"/>
+            <a:r>
+              <a:rPr sz="1300">
+                <a:solidFill>
+                  <a:srgbClr val="C00000"/>
+                </a:solidFill>
+                <a:latin typeface="微软雅黑" panose="020B0503020204020204" charset="-122"/>
+                <a:ea typeface="微软雅黑" panose="020B0503020204020204" charset="-122"/>
+                <a:cs typeface="微软雅黑" panose="020B0503020204020204" charset="-122"/>
+              </a:rPr>
+              <a:t>【截图 B】
+智能问答页演示</a:t>
+            </a:r>
+            <a:endParaRPr sz="1300">
+              <a:solidFill>
+                <a:srgbClr val="C00000"/>
+              </a:solidFill>
+              <a:latin typeface="微软雅黑" panose="020B0503020204020204" charset="-122"/>
+              <a:ea typeface="微软雅黑" panose="020B0503020204020204" charset="-122"/>
+              <a:cs typeface="微软雅黑" panose="020B0503020204020204" charset="-122"/>
+            </a:endParaRPr>
+          </a:p>
+          <a:p>
+            <a:pPr algn="ctr"/>
+            <a:r>
+              <a:rPr sz="1000">
+                <a:solidFill>
+                  <a:srgbClr val="808080"/>
+                </a:solidFill>
+                <a:latin typeface="微软雅黑" panose="020B0503020204020204" charset="-122"/>
+                <a:ea typeface="微软雅黑" panose="020B0503020204020204" charset="-122"/>
+                <a:cs typeface="微软雅黑" panose="020B0503020204020204" charset="-122"/>
+              </a:rPr>
+              <a:t>聊天式布局 + AI 回答
++ 回答下方的引用来源卡片（文件名/原文摘要）</a:t>
+            </a:r>
+            <a:endParaRPr sz="1000">
+              <a:solidFill>
+                <a:srgbClr val="808080"/>
+              </a:solidFill>
+              <a:latin typeface="微软雅黑" panose="020B0503020204020204" charset="-122"/>
+              <a:ea typeface="微软雅黑" panose="020B0503020204020204" charset="-122"/>
+              <a:cs typeface="微软雅黑" panose="020B0503020204020204" charset="-122"/>
+            </a:endParaRPr>
+          </a:p>
+        </p:txBody>
+      </p:sp>
+      <p:sp>
+        <p:nvSpPr>
+          <p:cNvPr id="17" name="TextBox 16"/>
+          <p:cNvSpPr txBox="1"/>
+          <p:nvPr/>
+        </p:nvSpPr>
+        <p:spPr>
+          <a:xfrm>
+            <a:off x="5577840" y="5321808"/>
+            <a:ext cx="5943600" cy="168910"/>
+          </a:xfrm>
+          <a:prstGeom prst="rect">
+            <a:avLst/>
+          </a:prstGeom>
+          <a:noFill/>
+        </p:spPr>
+        <p:txBody>
+          <a:bodyPr wrap="square" lIns="0" tIns="0" rIns="0" bIns="0" anchor="t">
+            <a:spAutoFit/>
+          </a:bodyPr>
+          <a:lstStyle/>
+          <a:p>
+            <a:pPr algn="ctr">
+              <a:spcAft>
+                <a:spcPts val="600"/>
+              </a:spcAft>
+            </a:pPr>
+            <a:r>
+              <a:rPr sz="1100">
+                <a:solidFill>
+                  <a:srgbClr val="808080"/>
+                </a:solidFill>
+                <a:latin typeface="微软雅黑" panose="020B0503020204020204" charset="-122"/>
+                <a:ea typeface="微软雅黑" panose="020B0503020204020204" charset="-122"/>
+                <a:cs typeface="微软雅黑" panose="020B0503020204020204" charset="-122"/>
+              </a:rPr>
+              <a:t>演示截图</a:t>
+            </a:r>
+            <a:endParaRPr sz="1100">
+              <a:solidFill>
+                <a:srgbClr val="808080"/>
+              </a:solidFill>
+              <a:latin typeface="微软雅黑" panose="020B0503020204020204" charset="-122"/>
+              <a:ea typeface="微软雅黑" panose="020B0503020204020204" charset="-122"/>
+              <a:cs typeface="微软雅黑" panose="020B0503020204020204" charset="-122"/>
+            </a:endParaRPr>
+          </a:p>
+        </p:txBody>
+      </p:sp>
+      <p:sp>
+        <p:nvSpPr>
+          <p:cNvPr id="18" name="TextBox 17"/>
+          <p:cNvSpPr txBox="1"/>
+          <p:nvPr/>
+        </p:nvSpPr>
+        <p:spPr>
+          <a:xfrm>
+            <a:off x="11247120" y="6473952"/>
+            <a:ext cx="640080" cy="274320"/>
+          </a:xfrm>
+          <a:prstGeom prst="rect">
+            <a:avLst/>
+          </a:prstGeom>
+          <a:noFill/>
+        </p:spPr>
+        <p:txBody>
+          <a:bodyPr wrap="none">
+            <a:spAutoFit/>
+          </a:bodyPr>
+          <a:lstStyle/>
+          <a:p>
+            <a:pPr algn="r"/>
+            <a:r>
+              <a:rPr sz="1000">
+                <a:solidFill>
+                  <a:srgbClr val="808080"/>
+                </a:solidFill>
+                <a:latin typeface="微软雅黑" panose="020B0503020204020204" charset="-122"/>
+                <a:ea typeface="微软雅黑" panose="020B0503020204020204" charset="-122"/>
+                <a:cs typeface="微软雅黑" panose="020B0503020204020204" charset="-122"/>
+              </a:rPr>
+              <a:t>11</a:t>
+            </a:r>
+            <a:endParaRPr sz="1000">
+              <a:solidFill>
+                <a:srgbClr val="808080"/>
+              </a:solidFill>
+              <a:latin typeface="微软雅黑" panose="020B0503020204020204" charset="-122"/>
+              <a:ea typeface="微软雅黑" panose="020B0503020204020204" charset="-122"/>
+              <a:cs typeface="微软雅黑" panose="020B0503020204020204" charset="-122"/>
+            </a:endParaRPr>
+          </a:p>
+        </p:txBody>
+      </p:sp>
+      <p:pic>
+        <p:nvPicPr>
+          <p:cNvPr id="19" name="图片 18" descr="ca5a6761a4240cfa9514e9ef41757ecc"/>
+          <p:cNvPicPr>
+            <a:picLocks noChangeAspect="1"/>
+          </p:cNvPicPr>
+          <p:nvPr/>
+        </p:nvPicPr>
+        <p:blipFill>
+          <a:blip r:embed="rId1"/>
+          <a:stretch>
+            <a:fillRect/>
+          </a:stretch>
+        </p:blipFill>
+        <p:spPr>
+          <a:xfrm>
+            <a:off x="5346700" y="1219835"/>
+            <a:ext cx="6360795" cy="4102100"/>
+          </a:xfrm>
+          <a:prstGeom prst="rect">
+            <a:avLst/>
+          </a:prstGeom>
+        </p:spPr>
+      </p:pic>
+    </p:spTree>
+  </p:cSld>
+  <p:clrMapOvr>
+    <a:masterClrMapping/>
+  </p:clrMapOvr>
+</p:sld>
+</file>
+
+<file path=ppt/slides/slide12.xml><?xml version="1.0" encoding="utf-8"?>
+<p:sld xmlns:a="http://schemas.openxmlformats.org/drawingml/2006/main" xmlns:r="http://schemas.openxmlformats.org/officeDocument/2006/relationships" xmlns:p="http://schemas.openxmlformats.org/presentationml/2006/main">
+  <p:cSld>
+    <p:spTree>
+      <p:nvGrpSpPr>
+        <p:cNvPr id="1" name=""/>
+        <p:cNvGrpSpPr/>
+        <p:nvPr/>
+      </p:nvGrpSpPr>
+      <p:grpSpPr/>
+      <p:sp>
+        <p:nvSpPr>
+          <p:cNvPr id="2" name="Rectangle 1"/>
+          <p:cNvSpPr/>
+          <p:nvPr/>
+        </p:nvSpPr>
+        <p:spPr>
+          <a:xfrm>
+            <a:off x="0" y="0"/>
+            <a:ext cx="12191695" cy="960120"/>
+          </a:xfrm>
+          <a:prstGeom prst="rect">
+            <a:avLst/>
+          </a:prstGeom>
+          <a:solidFill>
+            <a:srgbClr val="1F4E79"/>
+          </a:solidFill>
+          <a:ln>
+            <a:noFill/>
+          </a:ln>
+          <a:effectLst/>
+        </p:spPr>
+        <p:style>
+          <a:lnRef idx="1">
+            <a:schemeClr val="accent1"/>
+          </a:lnRef>
+          <a:fillRef idx="3">
+            <a:schemeClr val="accent1"/>
+          </a:fillRef>
+          <a:effectRef idx="2">
+            <a:schemeClr val="accent1"/>
+          </a:effectRef>
+          <a:fontRef idx="minor">
+            <a:schemeClr val="lt1"/>
+          </a:fontRef>
+        </p:style>
+        <p:txBody>
+          <a:bodyPr rtlCol="0" anchor="ctr"/>
+          <a:lstStyle/>
+          <a:p>
+            <a:pPr algn="ctr"/>
+          </a:p>
+        </p:txBody>
+      </p:sp>
+      <p:sp>
+        <p:nvSpPr>
+          <p:cNvPr id="3" name="TextBox 2"/>
+          <p:cNvSpPr txBox="1"/>
+          <p:nvPr/>
+        </p:nvSpPr>
+        <p:spPr>
+          <a:xfrm>
+            <a:off x="502920" y="182880"/>
+            <a:ext cx="11155680" cy="621792"/>
+          </a:xfrm>
+          <a:prstGeom prst="rect">
+            <a:avLst/>
+          </a:prstGeom>
+          <a:noFill/>
+        </p:spPr>
+        <p:txBody>
+          <a:bodyPr wrap="square" lIns="0" tIns="0" rIns="0" bIns="0" anchor="ctr">
+            <a:spAutoFit/>
+          </a:bodyPr>
+          <a:lstStyle/>
+          <a:p>
+            <a:pPr algn="l">
               <a:lnSpc>
                 <a:spcPct val="125000"/>
               </a:lnSpc>
@@ -5354,7 +7191,7 @@
               </a:spcAft>
             </a:pPr>
             <a:r>
-              <a:rPr sz="2600" b="1">
+              <a:rPr sz="2600">
                 <a:solidFill>
                   <a:srgbClr val="FFFFFF"/>
                 </a:solidFill>
@@ -5362,9 +7199,9 @@
                 <a:ea typeface="微软雅黑" panose="020B0503020204020204" charset="-122"/>
                 <a:cs typeface="微软雅黑" panose="020B0503020204020204" charset="-122"/>
               </a:rPr>
-              <a:t>5.1　F3 自动出题与判题模块</a:t>
-            </a:r>
-            <a:endParaRPr sz="2600" b="1">
+              <a:t>5.3　F3 自动出题与判题模块</a:t>
+            </a:r>
+            <a:endParaRPr sz="2600">
               <a:solidFill>
                 <a:srgbClr val="FFFFFF"/>
               </a:solidFill>
@@ -5465,14 +7302,18 @@
                   <a:srgbClr val="808080"/>
                 </a:solidFill>
                 <a:latin typeface="微软雅黑" panose="020B0503020204020204" charset="-122"/>
+                <a:ea typeface="微软雅黑" panose="020B0503020204020204" charset="-122"/>
+                <a:cs typeface="微软雅黑" panose="020B0503020204020204" charset="-122"/>
               </a:rPr>
-              <a:t>10</a:t>
+              <a:t>12</a:t>
             </a:r>
             <a:endParaRPr sz="1000">
               <a:solidFill>
                 <a:srgbClr val="808080"/>
               </a:solidFill>
               <a:latin typeface="微软雅黑" panose="020B0503020204020204" charset="-122"/>
+              <a:ea typeface="微软雅黑" panose="020B0503020204020204" charset="-122"/>
+              <a:cs typeface="微软雅黑" panose="020B0503020204020204" charset="-122"/>
             </a:endParaRPr>
           </a:p>
         </p:txBody>
@@ -5541,8 +7382,8 @@
           <p:nvPr/>
         </p:nvGraphicFramePr>
         <p:xfrm>
-          <a:off x="548640" y="1572768"/>
-          <a:ext cx="11091672" cy="2103120"/>
+          <a:off x="548640" y="1572895"/>
+          <a:ext cx="6242050" cy="2103120"/>
         </p:xfrm>
         <a:graphic>
           <a:graphicData uri="http://schemas.openxmlformats.org/drawingml/2006/table">
@@ -5551,8 +7392,8 @@
                 <a:tableStyleId>{5C22544A-7EE6-4342-B048-85BDC9FD1C3A}</a:tableStyleId>
               </a:tblPr>
               <a:tblGrid>
-                <a:gridCol w="1232408"/>
-                <a:gridCol w="9859264"/>
+                <a:gridCol w="694055"/>
+                <a:gridCol w="5547995"/>
               </a:tblGrid>
               <a:tr h="420624">
                 <a:tc>
@@ -5961,8 +7802,8 @@
         </p:nvSpPr>
         <p:spPr>
           <a:xfrm>
-            <a:off x="548640" y="4133087"/>
-            <a:ext cx="11091672" cy="2103120"/>
+            <a:off x="548640" y="4133215"/>
+            <a:ext cx="4796155" cy="1499870"/>
           </a:xfrm>
           <a:prstGeom prst="rect">
             <a:avLst/>
@@ -6105,6 +7946,30 @@
           </a:p>
         </p:txBody>
       </p:sp>
+      <p:pic>
+        <p:nvPicPr>
+          <p:cNvPr id="10" name="图片 9" descr="616d32327babf71b30e6beb8c57db5f6"/>
+          <p:cNvPicPr>
+            <a:picLocks noChangeAspect="1"/>
+          </p:cNvPicPr>
+          <p:nvPr/>
+        </p:nvPicPr>
+        <p:blipFill>
+          <a:blip r:embed="rId1"/>
+          <a:stretch>
+            <a:fillRect/>
+          </a:stretch>
+        </p:blipFill>
+        <p:spPr>
+          <a:xfrm>
+            <a:off x="6112510" y="1508760"/>
+            <a:ext cx="5788025" cy="3320415"/>
+          </a:xfrm>
+          <a:prstGeom prst="rect">
+            <a:avLst/>
+          </a:prstGeom>
+        </p:spPr>
+      </p:pic>
     </p:spTree>
   </p:cSld>
   <p:clrMapOvr>
@@ -6113,7 +7978,7 @@
 </p:sld>
 </file>
 
-<file path=ppt/slides/slide11.xml><?xml version="1.0" encoding="utf-8"?>
+<file path=ppt/slides/slide13.xml><?xml version="1.0" encoding="utf-8"?>
 <p:sld xmlns:a="http://schemas.openxmlformats.org/drawingml/2006/main" xmlns:r="http://schemas.openxmlformats.org/officeDocument/2006/relationships" xmlns:p="http://schemas.openxmlformats.org/presentationml/2006/main">
   <p:cSld>
     <p:spTree>
@@ -6201,7 +8066,7 @@
               </a:spcAft>
             </a:pPr>
             <a:r>
-              <a:rPr sz="2600" b="1">
+              <a:rPr sz="2600">
                 <a:solidFill>
                   <a:srgbClr val="FFFFFF"/>
                 </a:solidFill>
@@ -6209,9 +8074,9 @@
                 <a:ea typeface="微软雅黑" panose="020B0503020204020204" charset="-122"/>
                 <a:cs typeface="微软雅黑" panose="020B0503020204020204" charset="-122"/>
               </a:rPr>
-              <a:t>5.2　F4 错题本与 F5 复习计划模块</a:t>
-            </a:r>
-            <a:endParaRPr sz="2600" b="1">
+              <a:t>5.4　F4 错题本与 F5 复习计划模块</a:t>
+            </a:r>
+            <a:endParaRPr sz="2600">
               <a:solidFill>
                 <a:srgbClr val="FFFFFF"/>
               </a:solidFill>
@@ -6312,14 +8177,18 @@
                   <a:srgbClr val="808080"/>
                 </a:solidFill>
                 <a:latin typeface="微软雅黑" panose="020B0503020204020204" charset="-122"/>
+                <a:ea typeface="微软雅黑" panose="020B0503020204020204" charset="-122"/>
+                <a:cs typeface="微软雅黑" panose="020B0503020204020204" charset="-122"/>
               </a:rPr>
-              <a:t>11</a:t>
+              <a:t>13</a:t>
             </a:r>
             <a:endParaRPr sz="1000">
               <a:solidFill>
                 <a:srgbClr val="808080"/>
               </a:solidFill>
               <a:latin typeface="微软雅黑" panose="020B0503020204020204" charset="-122"/>
+              <a:ea typeface="微软雅黑" panose="020B0503020204020204" charset="-122"/>
+              <a:cs typeface="微软雅黑" panose="020B0503020204020204" charset="-122"/>
             </a:endParaRPr>
           </a:p>
         </p:txBody>
@@ -6387,8 +8256,8 @@
         </p:nvSpPr>
         <p:spPr>
           <a:xfrm>
-            <a:off x="548640" y="1572768"/>
-            <a:ext cx="11091672" cy="1234440"/>
+            <a:off x="548640" y="1572895"/>
+            <a:ext cx="5084445" cy="1230630"/>
           </a:xfrm>
           <a:prstGeom prst="rect">
             <a:avLst/>
@@ -6595,8 +8464,8 @@
           <p:nvPr/>
         </p:nvGraphicFramePr>
         <p:xfrm>
-          <a:off x="548640" y="3218688"/>
-          <a:ext cx="11091672" cy="2103120"/>
+          <a:off x="548640" y="3218815"/>
+          <a:ext cx="4276090" cy="3413760"/>
         </p:xfrm>
         <a:graphic>
           <a:graphicData uri="http://schemas.openxmlformats.org/drawingml/2006/table">
@@ -6605,10 +8474,10 @@
                 <a:tableStyleId>{5C22544A-7EE6-4342-B048-85BDC9FD1C3A}</a:tableStyleId>
               </a:tblPr>
               <a:tblGrid>
-                <a:gridCol w="1232408"/>
-                <a:gridCol w="9859264"/>
+                <a:gridCol w="474980"/>
+                <a:gridCol w="3801110"/>
               </a:tblGrid>
-              <a:tr h="420624">
+              <a:tr h="487680">
                 <a:tc>
                   <a:txBody>
                     <a:bodyPr/>
@@ -6676,7 +8545,7 @@
                   </a:tcPr>
                 </a:tc>
               </a:tr>
-              <a:tr h="420624">
+              <a:tr h="822960">
                 <a:tc>
                   <a:txBody>
                     <a:bodyPr/>
@@ -6744,7 +8613,7 @@
                   </a:tcPr>
                 </a:tc>
               </a:tr>
-              <a:tr h="420624">
+              <a:tr h="640080">
                 <a:tc>
                   <a:txBody>
                     <a:bodyPr/>
@@ -6812,7 +8681,7 @@
                   </a:tcPr>
                 </a:tc>
               </a:tr>
-              <a:tr h="420624">
+              <a:tr h="822960">
                 <a:tc>
                   <a:txBody>
                     <a:bodyPr/>
@@ -6880,7 +8749,7 @@
                   </a:tcPr>
                 </a:tc>
               </a:tr>
-              <a:tr h="420624">
+              <a:tr h="640080">
                 <a:tc>
                   <a:txBody>
                     <a:bodyPr/>
@@ -6952,6 +8821,54 @@
           </a:graphicData>
         </a:graphic>
       </p:graphicFrame>
+      <p:pic>
+        <p:nvPicPr>
+          <p:cNvPr id="10" name="图片 9" descr="58cb55beb300f6cca056702bbbcf823d"/>
+          <p:cNvPicPr>
+            <a:picLocks noChangeAspect="1"/>
+          </p:cNvPicPr>
+          <p:nvPr/>
+        </p:nvPicPr>
+        <p:blipFill>
+          <a:blip r:embed="rId1"/>
+          <a:stretch>
+            <a:fillRect/>
+          </a:stretch>
+        </p:blipFill>
+        <p:spPr>
+          <a:xfrm>
+            <a:off x="6117590" y="1214120"/>
+            <a:ext cx="4565015" cy="2525395"/>
+          </a:xfrm>
+          <a:prstGeom prst="rect">
+            <a:avLst/>
+          </a:prstGeom>
+        </p:spPr>
+      </p:pic>
+      <p:pic>
+        <p:nvPicPr>
+          <p:cNvPr id="11" name="图片 10" descr="1ea2b7f88a7f4e965704607efe77f8a5"/>
+          <p:cNvPicPr>
+            <a:picLocks noChangeAspect="1"/>
+          </p:cNvPicPr>
+          <p:nvPr/>
+        </p:nvPicPr>
+        <p:blipFill>
+          <a:blip r:embed="rId2"/>
+          <a:stretch>
+            <a:fillRect/>
+          </a:stretch>
+        </p:blipFill>
+        <p:spPr>
+          <a:xfrm>
+            <a:off x="6099810" y="3899535"/>
+            <a:ext cx="4582795" cy="2536190"/>
+          </a:xfrm>
+          <a:prstGeom prst="rect">
+            <a:avLst/>
+          </a:prstGeom>
+        </p:spPr>
+      </p:pic>
     </p:spTree>
   </p:cSld>
   <p:clrMapOvr>
@@ -6960,7 +8877,7 @@
 </p:sld>
 </file>
 
-<file path=ppt/slides/slide12.xml><?xml version="1.0" encoding="utf-8"?>
+<file path=ppt/slides/slide14.xml><?xml version="1.0" encoding="utf-8"?>
 <p:sld xmlns:a="http://schemas.openxmlformats.org/drawingml/2006/main" xmlns:r="http://schemas.openxmlformats.org/officeDocument/2006/relationships" xmlns:p="http://schemas.openxmlformats.org/presentationml/2006/main">
   <p:cSld>
     <p:spTree>
@@ -7048,7 +8965,7 @@
               </a:spcAft>
             </a:pPr>
             <a:r>
-              <a:rPr sz="2600" b="1">
+              <a:rPr sz="2600">
                 <a:solidFill>
                   <a:srgbClr val="FFFFFF"/>
                 </a:solidFill>
@@ -7056,9 +8973,9 @@
                 <a:ea typeface="微软雅黑" panose="020B0503020204020204" charset="-122"/>
                 <a:cs typeface="微软雅黑" panose="020B0503020204020204" charset="-122"/>
               </a:rPr>
-              <a:t>5.3　前端界面与系统测试</a:t>
-            </a:r>
-            <a:endParaRPr sz="2600" b="1">
+              <a:t>5.5　前端界面与系统测试</a:t>
+            </a:r>
+            <a:endParaRPr sz="2600">
               <a:solidFill>
                 <a:srgbClr val="FFFFFF"/>
               </a:solidFill>
@@ -7159,14 +9076,18 @@
                   <a:srgbClr val="808080"/>
                 </a:solidFill>
                 <a:latin typeface="微软雅黑" panose="020B0503020204020204" charset="-122"/>
+                <a:ea typeface="微软雅黑" panose="020B0503020204020204" charset="-122"/>
+                <a:cs typeface="微软雅黑" panose="020B0503020204020204" charset="-122"/>
               </a:rPr>
-              <a:t>12</a:t>
+              <a:t>14</a:t>
             </a:r>
             <a:endParaRPr sz="1000">
               <a:solidFill>
                 <a:srgbClr val="808080"/>
               </a:solidFill>
               <a:latin typeface="微软雅黑" panose="020B0503020204020204" charset="-122"/>
+              <a:ea typeface="微软雅黑" panose="020B0503020204020204" charset="-122"/>
+              <a:cs typeface="微软雅黑" panose="020B0503020204020204" charset="-122"/>
             </a:endParaRPr>
           </a:p>
         </p:txBody>
@@ -8335,7 +10256,7 @@
 </p:sld>
 </file>
 
-<file path=ppt/slides/slide13.xml><?xml version="1.0" encoding="utf-8"?>
+<file path=ppt/slides/slide15.xml><?xml version="1.0" encoding="utf-8"?>
 <p:sld xmlns:a="http://schemas.openxmlformats.org/drawingml/2006/main" xmlns:r="http://schemas.openxmlformats.org/officeDocument/2006/relationships" xmlns:p="http://schemas.openxmlformats.org/presentationml/2006/main">
   <p:cSld>
     <p:spTree>
@@ -8397,8 +10318,8 @@
         </p:nvSpPr>
         <p:spPr>
           <a:xfrm>
-            <a:off x="502920" y="182880"/>
-            <a:ext cx="11155680" cy="621792"/>
+            <a:off x="502920" y="293751"/>
+            <a:ext cx="11155680" cy="400050"/>
           </a:xfrm>
           <a:prstGeom prst="rect">
             <a:avLst/>
@@ -8425,7 +10346,29 @@
                 <a:ea typeface="微软雅黑" panose="020B0503020204020204" charset="-122"/>
                 <a:cs typeface="微软雅黑" panose="020B0503020204020204" charset="-122"/>
               </a:rPr>
-              <a:t>5.4　系统界面展示（需补充截图）</a:t>
+              <a:t>5.</a:t>
+            </a:r>
+            <a:r>
+              <a:rPr lang="en-US" sz="2600">
+                <a:solidFill>
+                  <a:srgbClr val="FFFFFF"/>
+                </a:solidFill>
+                <a:latin typeface="微软雅黑" panose="020B0503020204020204" charset="-122"/>
+                <a:ea typeface="微软雅黑" panose="020B0503020204020204" charset="-122"/>
+                <a:cs typeface="微软雅黑" panose="020B0503020204020204" charset="-122"/>
+              </a:rPr>
+              <a:t>6</a:t>
+            </a:r>
+            <a:r>
+              <a:rPr sz="2600">
+                <a:solidFill>
+                  <a:srgbClr val="FFFFFF"/>
+                </a:solidFill>
+                <a:latin typeface="微软雅黑" panose="020B0503020204020204" charset="-122"/>
+                <a:ea typeface="微软雅黑" panose="020B0503020204020204" charset="-122"/>
+                <a:cs typeface="微软雅黑" panose="020B0503020204020204" charset="-122"/>
+              </a:rPr>
+              <a:t>　功能演示（五）：端到端学习闭环</a:t>
             </a:r>
             <a:endParaRPr sz="2600">
               <a:solidFill>
@@ -8471,40 +10414,92 @@
                   <a:srgbClr val="BDD7EE"/>
                 </a:solidFill>
                 <a:latin typeface="微软雅黑" panose="020B0503020204020204" charset="-122"/>
+                <a:ea typeface="微软雅黑" panose="020B0503020204020204" charset="-122"/>
+                <a:cs typeface="微软雅黑" panose="020B0503020204020204" charset="-122"/>
               </a:rPr>
-              <a:t>负责人：陈果</a:t>
+              <a:t>负责人：周承锦</a:t>
             </a:r>
             <a:endParaRPr sz="1300">
               <a:solidFill>
                 <a:srgbClr val="BDD7EE"/>
               </a:solidFill>
               <a:latin typeface="微软雅黑" panose="020B0503020204020204" charset="-122"/>
+              <a:ea typeface="微软雅黑" panose="020B0503020204020204" charset="-122"/>
+              <a:cs typeface="微软雅黑" panose="020B0503020204020204" charset="-122"/>
             </a:endParaRPr>
           </a:p>
         </p:txBody>
       </p:sp>
       <p:sp>
         <p:nvSpPr>
-          <p:cNvPr id="5" name="Rectangle 4"/>
-          <p:cNvSpPr/>
+          <p:cNvPr id="5" name="TextBox 4"/>
+          <p:cNvSpPr txBox="1"/>
           <p:nvPr/>
         </p:nvSpPr>
         <p:spPr>
           <a:xfrm>
-            <a:off x="548640" y="3566160"/>
-            <a:ext cx="3566160" cy="1417320"/>
+            <a:off x="502920" y="1078992"/>
+            <a:ext cx="11155680" cy="365760"/>
           </a:xfrm>
           <a:prstGeom prst="rect">
             <a:avLst/>
           </a:prstGeom>
+          <a:noFill/>
+        </p:spPr>
+        <p:txBody>
+          <a:bodyPr wrap="square" lIns="0" tIns="0" rIns="0" bIns="0" anchor="t">
+            <a:spAutoFit/>
+          </a:bodyPr>
+          <a:lstStyle/>
+          <a:p>
+            <a:pPr algn="l">
+              <a:spcAft>
+                <a:spcPts val="600"/>
+              </a:spcAft>
+            </a:pPr>
+            <a:r>
+              <a:rPr sz="1800">
+                <a:solidFill>
+                  <a:srgbClr val="2E75B6"/>
+                </a:solidFill>
+                <a:latin typeface="微软雅黑" panose="020B0503020204020204" charset="-122"/>
+                <a:ea typeface="微软雅黑" panose="020B0503020204020204" charset="-122"/>
+                <a:cs typeface="微软雅黑" panose="020B0503020204020204" charset="-122"/>
+              </a:rPr>
+              <a:t>一条完整的学习闭环（演示脚本）</a:t>
+            </a:r>
+            <a:endParaRPr sz="1800">
+              <a:solidFill>
+                <a:srgbClr val="2E75B6"/>
+              </a:solidFill>
+              <a:latin typeface="微软雅黑" panose="020B0503020204020204" charset="-122"/>
+              <a:ea typeface="微软雅黑" panose="020B0503020204020204" charset="-122"/>
+              <a:cs typeface="微软雅黑" panose="020B0503020204020204" charset="-122"/>
+            </a:endParaRPr>
+          </a:p>
+        </p:txBody>
+      </p:sp>
+      <p:sp>
+        <p:nvSpPr>
+          <p:cNvPr id="6" name="Rounded Rectangle 5"/>
+          <p:cNvSpPr/>
+          <p:nvPr/>
+        </p:nvSpPr>
+        <p:spPr>
+          <a:xfrm>
+            <a:off x="502920" y="1627632"/>
+            <a:ext cx="1874519" cy="914400"/>
+          </a:xfrm>
+          <a:prstGeom prst="roundRect">
+            <a:avLst/>
+          </a:prstGeom>
           <a:solidFill>
-            <a:srgbClr val="F2F2F2"/>
+            <a:srgbClr val="EAF3FB"/>
           </a:solidFill>
-          <a:ln w="15240">
+          <a:ln w="16510">
             <a:solidFill>
-              <a:srgbClr val="C00000"/>
+              <a:srgbClr val="1F4E79"/>
             </a:solidFill>
-            <a:prstDash val="dash"/>
           </a:ln>
           <a:effectLst/>
         </p:spPr>
@@ -8528,122 +10523,47 @@
           <a:p>
             <a:pPr algn="ctr"/>
             <a:r>
-              <a:rPr sz="1300">
+              <a:rPr sz="1200">
                 <a:solidFill>
-                  <a:srgbClr val="C00000"/>
+                  <a:srgbClr val="1F4E79"/>
                 </a:solidFill>
                 <a:latin typeface="微软雅黑" panose="020B0503020204020204" charset="-122"/>
                 <a:ea typeface="微软雅黑" panose="020B0503020204020204" charset="-122"/>
                 <a:cs typeface="微软雅黑" panose="020B0503020204020204" charset="-122"/>
               </a:rPr>
-              <a:t>【截图 1】
-文档管理页</a:t>
-            </a:r>
-            <a:endParaRPr sz="1300">
+              <a:t>上传课件
+建知识库</a:t>
+            </a:r>
+            <a:endParaRPr sz="1200">
               <a:solidFill>
-                <a:srgbClr val="C00000"/>
+                <a:srgbClr val="1F4E79"/>
               </a:solidFill>
               <a:latin typeface="微软雅黑" panose="020B0503020204020204" charset="-122"/>
               <a:ea typeface="微软雅黑" panose="020B0503020204020204" charset="-122"/>
               <a:cs typeface="微软雅黑" panose="020B0503020204020204" charset="-122"/>
             </a:endParaRPr>
           </a:p>
-          <a:p>
-            <a:pPr algn="ctr"/>
-            <a:r>
-              <a:rPr sz="1000">
-                <a:solidFill>
-                  <a:srgbClr val="808080"/>
-                </a:solidFill>
-                <a:latin typeface="微软雅黑" panose="020B0503020204020204" charset="-122"/>
-                <a:ea typeface="微软雅黑" panose="020B0503020204020204" charset="-122"/>
-                <a:cs typeface="微软雅黑" panose="020B0503020204020204" charset="-122"/>
-              </a:rPr>
-              <a:t>已选课程 + 文档列表
-含文件名与切分块数</a:t>
-            </a:r>
-            <a:endParaRPr sz="1000">
-              <a:solidFill>
-                <a:srgbClr val="808080"/>
-              </a:solidFill>
-              <a:latin typeface="微软雅黑" panose="020B0503020204020204" charset="-122"/>
-              <a:ea typeface="微软雅黑" panose="020B0503020204020204" charset="-122"/>
-              <a:cs typeface="微软雅黑" panose="020B0503020204020204" charset="-122"/>
-            </a:endParaRPr>
-          </a:p>
-        </p:txBody>
-      </p:sp>
-      <p:sp>
-        <p:nvSpPr>
-          <p:cNvPr id="6" name="TextBox 5"/>
-          <p:cNvSpPr txBox="1"/>
+        </p:txBody>
+      </p:sp>
+      <p:sp>
+        <p:nvSpPr>
+          <p:cNvPr id="7" name="Right Arrow 6"/>
+          <p:cNvSpPr/>
           <p:nvPr/>
         </p:nvSpPr>
         <p:spPr>
           <a:xfrm>
-            <a:off x="548640" y="5038344"/>
-            <a:ext cx="3566160" cy="310896"/>
+            <a:off x="2377439" y="1975104"/>
+            <a:ext cx="274320" cy="219456"/>
           </a:xfrm>
-          <a:prstGeom prst="rect">
-            <a:avLst/>
-          </a:prstGeom>
-          <a:noFill/>
-        </p:spPr>
-        <p:txBody>
-          <a:bodyPr wrap="square" lIns="0" tIns="0" rIns="0" bIns="0" anchor="t">
-            <a:spAutoFit/>
-          </a:bodyPr>
-          <a:lstStyle/>
-          <a:p>
-            <a:pPr algn="ctr">
-              <a:spcAft>
-                <a:spcPts val="600"/>
-              </a:spcAft>
-            </a:pPr>
-            <a:r>
-              <a:rPr sz="1050">
-                <a:solidFill>
-                  <a:srgbClr val="808080"/>
-                </a:solidFill>
-                <a:latin typeface="微软雅黑" panose="020B0503020204020204" charset="-122"/>
-                <a:ea typeface="微软雅黑" panose="020B0503020204020204" charset="-122"/>
-                <a:cs typeface="微软雅黑" panose="020B0503020204020204" charset="-122"/>
-              </a:rPr>
-              <a:t>图 1  文档管理页</a:t>
-            </a:r>
-            <a:endParaRPr sz="1050">
-              <a:solidFill>
-                <a:srgbClr val="808080"/>
-              </a:solidFill>
-              <a:latin typeface="微软雅黑" panose="020B0503020204020204" charset="-122"/>
-              <a:ea typeface="微软雅黑" panose="020B0503020204020204" charset="-122"/>
-              <a:cs typeface="微软雅黑" panose="020B0503020204020204" charset="-122"/>
-            </a:endParaRPr>
-          </a:p>
-        </p:txBody>
-      </p:sp>
-      <p:sp>
-        <p:nvSpPr>
-          <p:cNvPr id="7" name="Rectangle 6"/>
-          <p:cNvSpPr/>
-          <p:nvPr/>
-        </p:nvSpPr>
-        <p:spPr>
-          <a:xfrm>
-            <a:off x="4206240" y="3566160"/>
-            <a:ext cx="3566160" cy="1417320"/>
-          </a:xfrm>
-          <a:prstGeom prst="rect">
+          <a:prstGeom prst="rightArrow">
             <a:avLst/>
           </a:prstGeom>
           <a:solidFill>
-            <a:srgbClr val="F2F2F2"/>
+            <a:srgbClr val="2E75B6"/>
           </a:solidFill>
-          <a:ln w="15240">
-            <a:solidFill>
-              <a:srgbClr val="C00000"/>
-            </a:solidFill>
-            <a:prstDash val="dash"/>
+          <a:ln>
+            <a:noFill/>
           </a:ln>
           <a:effectLst/>
         </p:spPr>
@@ -8662,127 +10582,34 @@
           </a:fontRef>
         </p:style>
         <p:txBody>
-          <a:bodyPr wrap="square" rtlCol="0" anchor="ctr"/>
+          <a:bodyPr rtlCol="0" anchor="ctr"/>
           <a:lstStyle/>
           <a:p>
             <a:pPr algn="ctr"/>
-            <a:r>
-              <a:rPr sz="1300">
-                <a:solidFill>
-                  <a:srgbClr val="C00000"/>
-                </a:solidFill>
-                <a:latin typeface="微软雅黑" panose="020B0503020204020204" charset="-122"/>
-                <a:ea typeface="微软雅黑" panose="020B0503020204020204" charset="-122"/>
-                <a:cs typeface="微软雅黑" panose="020B0503020204020204" charset="-122"/>
-              </a:rPr>
-              <a:t>【截图 2】
-智能问答页</a:t>
-            </a:r>
-            <a:endParaRPr sz="1300">
-              <a:solidFill>
-                <a:srgbClr val="C00000"/>
-              </a:solidFill>
-              <a:latin typeface="微软雅黑" panose="020B0503020204020204" charset="-122"/>
-              <a:ea typeface="微软雅黑" panose="020B0503020204020204" charset="-122"/>
-              <a:cs typeface="微软雅黑" panose="020B0503020204020204" charset="-122"/>
-            </a:endParaRPr>
-          </a:p>
-          <a:p>
-            <a:pPr algn="ctr"/>
-            <a:r>
-              <a:rPr sz="1000">
-                <a:solidFill>
-                  <a:srgbClr val="808080"/>
-                </a:solidFill>
-                <a:latin typeface="微软雅黑" panose="020B0503020204020204" charset="-122"/>
-                <a:ea typeface="微软雅黑" panose="020B0503020204020204" charset="-122"/>
-                <a:cs typeface="微软雅黑" panose="020B0503020204020204" charset="-122"/>
-              </a:rPr>
-              <a:t>提问与 AI 回答
-下方显示引用来源卡片</a:t>
-            </a:r>
-            <a:endParaRPr sz="1000">
-              <a:solidFill>
-                <a:srgbClr val="808080"/>
-              </a:solidFill>
-              <a:latin typeface="微软雅黑" panose="020B0503020204020204" charset="-122"/>
-              <a:ea typeface="微软雅黑" panose="020B0503020204020204" charset="-122"/>
-              <a:cs typeface="微软雅黑" panose="020B0503020204020204" charset="-122"/>
-            </a:endParaRPr>
-          </a:p>
-        </p:txBody>
-      </p:sp>
-      <p:sp>
-        <p:nvSpPr>
-          <p:cNvPr id="8" name="TextBox 7"/>
-          <p:cNvSpPr txBox="1"/>
+          </a:p>
+        </p:txBody>
+      </p:sp>
+      <p:sp>
+        <p:nvSpPr>
+          <p:cNvPr id="8" name="Rounded Rectangle 7"/>
+          <p:cNvSpPr/>
           <p:nvPr/>
         </p:nvSpPr>
         <p:spPr>
           <a:xfrm>
-            <a:off x="4206240" y="5038344"/>
-            <a:ext cx="3566160" cy="310896"/>
+            <a:off x="2697480" y="1627632"/>
+            <a:ext cx="1874519" cy="914400"/>
           </a:xfrm>
-          <a:prstGeom prst="rect">
-            <a:avLst/>
-          </a:prstGeom>
-          <a:noFill/>
-        </p:spPr>
-        <p:txBody>
-          <a:bodyPr wrap="square" lIns="0" tIns="0" rIns="0" bIns="0" anchor="t">
-            <a:spAutoFit/>
-          </a:bodyPr>
-          <a:lstStyle/>
-          <a:p>
-            <a:pPr algn="ctr">
-              <a:spcAft>
-                <a:spcPts val="600"/>
-              </a:spcAft>
-            </a:pPr>
-            <a:r>
-              <a:rPr sz="1050">
-                <a:solidFill>
-                  <a:srgbClr val="808080"/>
-                </a:solidFill>
-                <a:latin typeface="微软雅黑" panose="020B0503020204020204" charset="-122"/>
-                <a:ea typeface="微软雅黑" panose="020B0503020204020204" charset="-122"/>
-                <a:cs typeface="微软雅黑" panose="020B0503020204020204" charset="-122"/>
-              </a:rPr>
-              <a:t>图 2  智能问答页</a:t>
-            </a:r>
-            <a:endParaRPr sz="1050">
-              <a:solidFill>
-                <a:srgbClr val="808080"/>
-              </a:solidFill>
-              <a:latin typeface="微软雅黑" panose="020B0503020204020204" charset="-122"/>
-              <a:ea typeface="微软雅黑" panose="020B0503020204020204" charset="-122"/>
-              <a:cs typeface="微软雅黑" panose="020B0503020204020204" charset="-122"/>
-            </a:endParaRPr>
-          </a:p>
-        </p:txBody>
-      </p:sp>
-      <p:sp>
-        <p:nvSpPr>
-          <p:cNvPr id="9" name="Rectangle 8"/>
-          <p:cNvSpPr/>
-          <p:nvPr/>
-        </p:nvSpPr>
-        <p:spPr>
-          <a:xfrm>
-            <a:off x="7863840" y="3566160"/>
-            <a:ext cx="3566160" cy="1417320"/>
-          </a:xfrm>
-          <a:prstGeom prst="rect">
+          <a:prstGeom prst="roundRect">
             <a:avLst/>
           </a:prstGeom>
           <a:solidFill>
-            <a:srgbClr val="F2F2F2"/>
+            <a:srgbClr val="EAF3FB"/>
           </a:solidFill>
-          <a:ln w="15240">
+          <a:ln w="16510">
             <a:solidFill>
-              <a:srgbClr val="C00000"/>
+              <a:srgbClr val="2E75B6"/>
             </a:solidFill>
-            <a:prstDash val="dash"/>
           </a:ln>
           <a:effectLst/>
         </p:spPr>
@@ -8806,122 +10633,47 @@
           <a:p>
             <a:pPr algn="ctr"/>
             <a:r>
-              <a:rPr sz="1300">
+              <a:rPr sz="1200">
                 <a:solidFill>
-                  <a:srgbClr val="C00000"/>
+                  <a:srgbClr val="1F4E79"/>
                 </a:solidFill>
                 <a:latin typeface="微软雅黑" panose="020B0503020204020204" charset="-122"/>
                 <a:ea typeface="微软雅黑" panose="020B0503020204020204" charset="-122"/>
                 <a:cs typeface="微软雅黑" panose="020B0503020204020204" charset="-122"/>
               </a:rPr>
-              <a:t>【截图 3】
-自动出题页</a:t>
-            </a:r>
-            <a:endParaRPr sz="1300">
+              <a:t>针对课件
+智能问答</a:t>
+            </a:r>
+            <a:endParaRPr sz="1200">
               <a:solidFill>
-                <a:srgbClr val="C00000"/>
+                <a:srgbClr val="1F4E79"/>
               </a:solidFill>
               <a:latin typeface="微软雅黑" panose="020B0503020204020204" charset="-122"/>
               <a:ea typeface="微软雅黑" panose="020B0503020204020204" charset="-122"/>
               <a:cs typeface="微软雅黑" panose="020B0503020204020204" charset="-122"/>
             </a:endParaRPr>
           </a:p>
-          <a:p>
-            <a:pPr algn="ctr"/>
-            <a:r>
-              <a:rPr sz="1000">
-                <a:solidFill>
-                  <a:srgbClr val="808080"/>
-                </a:solidFill>
-                <a:latin typeface="微软雅黑" panose="020B0503020204020204" charset="-122"/>
-                <a:ea typeface="微软雅黑" panose="020B0503020204020204" charset="-122"/>
-                <a:cs typeface="微软雅黑" panose="020B0503020204020204" charset="-122"/>
-              </a:rPr>
-              <a:t>参数表单 + 题目卡片
-含判分结果</a:t>
-            </a:r>
-            <a:endParaRPr sz="1000">
-              <a:solidFill>
-                <a:srgbClr val="808080"/>
-              </a:solidFill>
-              <a:latin typeface="微软雅黑" panose="020B0503020204020204" charset="-122"/>
-              <a:ea typeface="微软雅黑" panose="020B0503020204020204" charset="-122"/>
-              <a:cs typeface="微软雅黑" panose="020B0503020204020204" charset="-122"/>
-            </a:endParaRPr>
-          </a:p>
-        </p:txBody>
-      </p:sp>
-      <p:sp>
-        <p:nvSpPr>
-          <p:cNvPr id="10" name="TextBox 9"/>
-          <p:cNvSpPr txBox="1"/>
+        </p:txBody>
+      </p:sp>
+      <p:sp>
+        <p:nvSpPr>
+          <p:cNvPr id="9" name="Right Arrow 8"/>
+          <p:cNvSpPr/>
           <p:nvPr/>
         </p:nvSpPr>
         <p:spPr>
           <a:xfrm>
-            <a:off x="7863840" y="5038344"/>
-            <a:ext cx="3566160" cy="310896"/>
+            <a:off x="4572000" y="1975104"/>
+            <a:ext cx="274320" cy="219456"/>
           </a:xfrm>
-          <a:prstGeom prst="rect">
-            <a:avLst/>
-          </a:prstGeom>
-          <a:noFill/>
-        </p:spPr>
-        <p:txBody>
-          <a:bodyPr wrap="square" lIns="0" tIns="0" rIns="0" bIns="0" anchor="t">
-            <a:spAutoFit/>
-          </a:bodyPr>
-          <a:lstStyle/>
-          <a:p>
-            <a:pPr algn="ctr">
-              <a:spcAft>
-                <a:spcPts val="600"/>
-              </a:spcAft>
-            </a:pPr>
-            <a:r>
-              <a:rPr sz="1050">
-                <a:solidFill>
-                  <a:srgbClr val="808080"/>
-                </a:solidFill>
-                <a:latin typeface="微软雅黑" panose="020B0503020204020204" charset="-122"/>
-                <a:ea typeface="微软雅黑" panose="020B0503020204020204" charset="-122"/>
-                <a:cs typeface="微软雅黑" panose="020B0503020204020204" charset="-122"/>
-              </a:rPr>
-              <a:t>图 3  自动出题页</a:t>
-            </a:r>
-            <a:endParaRPr sz="1050">
-              <a:solidFill>
-                <a:srgbClr val="808080"/>
-              </a:solidFill>
-              <a:latin typeface="微软雅黑" panose="020B0503020204020204" charset="-122"/>
-              <a:ea typeface="微软雅黑" panose="020B0503020204020204" charset="-122"/>
-              <a:cs typeface="微软雅黑" panose="020B0503020204020204" charset="-122"/>
-            </a:endParaRPr>
-          </a:p>
-        </p:txBody>
-      </p:sp>
-      <p:sp>
-        <p:nvSpPr>
-          <p:cNvPr id="11" name="Rectangle 10"/>
-          <p:cNvSpPr/>
-          <p:nvPr/>
-        </p:nvSpPr>
-        <p:spPr>
-          <a:xfrm>
-            <a:off x="1417320" y="1828800"/>
-            <a:ext cx="3566160" cy="1417320"/>
-          </a:xfrm>
-          <a:prstGeom prst="rect">
+          <a:prstGeom prst="rightArrow">
             <a:avLst/>
           </a:prstGeom>
           <a:solidFill>
-            <a:srgbClr val="F2F2F2"/>
+            <a:srgbClr val="2E75B6"/>
           </a:solidFill>
-          <a:ln w="15240">
-            <a:solidFill>
-              <a:srgbClr val="C00000"/>
-            </a:solidFill>
-            <a:prstDash val="dash"/>
+          <a:ln>
+            <a:noFill/>
           </a:ln>
           <a:effectLst/>
         </p:spPr>
@@ -8940,127 +10692,34 @@
           </a:fontRef>
         </p:style>
         <p:txBody>
-          <a:bodyPr wrap="square" rtlCol="0" anchor="ctr"/>
+          <a:bodyPr rtlCol="0" anchor="ctr"/>
           <a:lstStyle/>
           <a:p>
             <a:pPr algn="ctr"/>
-            <a:r>
-              <a:rPr sz="1300">
-                <a:solidFill>
-                  <a:srgbClr val="C00000"/>
-                </a:solidFill>
-                <a:latin typeface="微软雅黑" panose="020B0503020204020204" charset="-122"/>
-                <a:ea typeface="微软雅黑" panose="020B0503020204020204" charset="-122"/>
-                <a:cs typeface="微软雅黑" panose="020B0503020204020204" charset="-122"/>
-              </a:rPr>
-              <a:t>【截图 4】
-错题本页</a:t>
-            </a:r>
-            <a:endParaRPr sz="1300">
-              <a:solidFill>
-                <a:srgbClr val="C00000"/>
-              </a:solidFill>
-              <a:latin typeface="微软雅黑" panose="020B0503020204020204" charset="-122"/>
-              <a:ea typeface="微软雅黑" panose="020B0503020204020204" charset="-122"/>
-              <a:cs typeface="微软雅黑" panose="020B0503020204020204" charset="-122"/>
-            </a:endParaRPr>
-          </a:p>
-          <a:p>
-            <a:pPr algn="ctr"/>
-            <a:r>
-              <a:rPr sz="1000">
-                <a:solidFill>
-                  <a:srgbClr val="808080"/>
-                </a:solidFill>
-                <a:latin typeface="微软雅黑" panose="020B0503020204020204" charset="-122"/>
-                <a:ea typeface="微软雅黑" panose="020B0503020204020204" charset="-122"/>
-                <a:cs typeface="微软雅黑" panose="020B0503020204020204" charset="-122"/>
-              </a:rPr>
-              <a:t>错题卡片
-用户答案与正确答案对比</a:t>
-            </a:r>
-            <a:endParaRPr sz="1000">
-              <a:solidFill>
-                <a:srgbClr val="808080"/>
-              </a:solidFill>
-              <a:latin typeface="微软雅黑" panose="020B0503020204020204" charset="-122"/>
-              <a:ea typeface="微软雅黑" panose="020B0503020204020204" charset="-122"/>
-              <a:cs typeface="微软雅黑" panose="020B0503020204020204" charset="-122"/>
-            </a:endParaRPr>
-          </a:p>
-        </p:txBody>
-      </p:sp>
-      <p:sp>
-        <p:nvSpPr>
-          <p:cNvPr id="12" name="TextBox 11"/>
-          <p:cNvSpPr txBox="1"/>
+          </a:p>
+        </p:txBody>
+      </p:sp>
+      <p:sp>
+        <p:nvSpPr>
+          <p:cNvPr id="10" name="Rounded Rectangle 9"/>
+          <p:cNvSpPr/>
           <p:nvPr/>
         </p:nvSpPr>
         <p:spPr>
           <a:xfrm>
-            <a:off x="1417320" y="3300984"/>
-            <a:ext cx="3566160" cy="310896"/>
+            <a:off x="4892040" y="1627632"/>
+            <a:ext cx="1874519" cy="914400"/>
           </a:xfrm>
-          <a:prstGeom prst="rect">
-            <a:avLst/>
-          </a:prstGeom>
-          <a:noFill/>
-        </p:spPr>
-        <p:txBody>
-          <a:bodyPr wrap="square" lIns="0" tIns="0" rIns="0" bIns="0" anchor="t">
-            <a:spAutoFit/>
-          </a:bodyPr>
-          <a:lstStyle/>
-          <a:p>
-            <a:pPr algn="ctr">
-              <a:spcAft>
-                <a:spcPts val="600"/>
-              </a:spcAft>
-            </a:pPr>
-            <a:r>
-              <a:rPr sz="1050">
-                <a:solidFill>
-                  <a:srgbClr val="808080"/>
-                </a:solidFill>
-                <a:latin typeface="微软雅黑" panose="020B0503020204020204" charset="-122"/>
-                <a:ea typeface="微软雅黑" panose="020B0503020204020204" charset="-122"/>
-                <a:cs typeface="微软雅黑" panose="020B0503020204020204" charset="-122"/>
-              </a:rPr>
-              <a:t>图 4  错题本页</a:t>
-            </a:r>
-            <a:endParaRPr sz="1050">
-              <a:solidFill>
-                <a:srgbClr val="808080"/>
-              </a:solidFill>
-              <a:latin typeface="微软雅黑" panose="020B0503020204020204" charset="-122"/>
-              <a:ea typeface="微软雅黑" panose="020B0503020204020204" charset="-122"/>
-              <a:cs typeface="微软雅黑" panose="020B0503020204020204" charset="-122"/>
-            </a:endParaRPr>
-          </a:p>
-        </p:txBody>
-      </p:sp>
-      <p:sp>
-        <p:nvSpPr>
-          <p:cNvPr id="13" name="Rectangle 12"/>
-          <p:cNvSpPr/>
-          <p:nvPr/>
-        </p:nvSpPr>
-        <p:spPr>
-          <a:xfrm>
-            <a:off x="5074920" y="1828800"/>
-            <a:ext cx="3566160" cy="1417320"/>
-          </a:xfrm>
-          <a:prstGeom prst="rect">
+          <a:prstGeom prst="roundRect">
             <a:avLst/>
           </a:prstGeom>
           <a:solidFill>
-            <a:srgbClr val="F2F2F2"/>
+            <a:srgbClr val="EAF3FB"/>
           </a:solidFill>
-          <a:ln w="15240">
+          <a:ln w="16510">
             <a:solidFill>
-              <a:srgbClr val="C00000"/>
+              <a:srgbClr val="1F4E79"/>
             </a:solidFill>
-            <a:prstDash val="dash"/>
           </a:ln>
           <a:effectLst/>
         </p:spPr>
@@ -9084,43 +10743,130 @@
           <a:p>
             <a:pPr algn="ctr"/>
             <a:r>
-              <a:rPr sz="1300">
+              <a:rPr sz="1200">
                 <a:solidFill>
-                  <a:srgbClr val="C00000"/>
+                  <a:srgbClr val="1F4E79"/>
                 </a:solidFill>
                 <a:latin typeface="微软雅黑" panose="020B0503020204020204" charset="-122"/>
                 <a:ea typeface="微软雅黑" panose="020B0503020204020204" charset="-122"/>
                 <a:cs typeface="微软雅黑" panose="020B0503020204020204" charset="-122"/>
               </a:rPr>
-              <a:t>【截图 5】
-复习计划页</a:t>
-            </a:r>
-            <a:endParaRPr sz="1300">
+              <a:t>生成题目
+在线作答</a:t>
+            </a:r>
+            <a:endParaRPr sz="1200">
               <a:solidFill>
-                <a:srgbClr val="C00000"/>
+                <a:srgbClr val="1F4E79"/>
               </a:solidFill>
               <a:latin typeface="微软雅黑" panose="020B0503020204020204" charset="-122"/>
               <a:ea typeface="微软雅黑" panose="020B0503020204020204" charset="-122"/>
               <a:cs typeface="微软雅黑" panose="020B0503020204020204" charset="-122"/>
             </a:endParaRPr>
           </a:p>
+        </p:txBody>
+      </p:sp>
+      <p:sp>
+        <p:nvSpPr>
+          <p:cNvPr id="11" name="Right Arrow 10"/>
+          <p:cNvSpPr/>
+          <p:nvPr/>
+        </p:nvSpPr>
+        <p:spPr>
+          <a:xfrm>
+            <a:off x="6766559" y="1975104"/>
+            <a:ext cx="274320" cy="219456"/>
+          </a:xfrm>
+          <a:prstGeom prst="rightArrow">
+            <a:avLst/>
+          </a:prstGeom>
+          <a:solidFill>
+            <a:srgbClr val="2E75B6"/>
+          </a:solidFill>
+          <a:ln>
+            <a:noFill/>
+          </a:ln>
+          <a:effectLst/>
+        </p:spPr>
+        <p:style>
+          <a:lnRef idx="1">
+            <a:schemeClr val="accent1"/>
+          </a:lnRef>
+          <a:fillRef idx="3">
+            <a:schemeClr val="accent1"/>
+          </a:fillRef>
+          <a:effectRef idx="2">
+            <a:schemeClr val="accent1"/>
+          </a:effectRef>
+          <a:fontRef idx="minor">
+            <a:schemeClr val="lt1"/>
+          </a:fontRef>
+        </p:style>
+        <p:txBody>
+          <a:bodyPr rtlCol="0" anchor="ctr"/>
+          <a:lstStyle/>
           <a:p>
             <a:pPr algn="ctr"/>
-            <a:r>
-              <a:rPr sz="1000">
+          </a:p>
+        </p:txBody>
+      </p:sp>
+      <p:sp>
+        <p:nvSpPr>
+          <p:cNvPr id="12" name="Rounded Rectangle 11"/>
+          <p:cNvSpPr/>
+          <p:nvPr/>
+        </p:nvSpPr>
+        <p:spPr>
+          <a:xfrm>
+            <a:off x="7086600" y="1627632"/>
+            <a:ext cx="1874519" cy="914400"/>
+          </a:xfrm>
+          <a:prstGeom prst="roundRect">
+            <a:avLst/>
+          </a:prstGeom>
+          <a:solidFill>
+            <a:srgbClr val="EAF3FB"/>
+          </a:solidFill>
+          <a:ln w="16510">
+            <a:solidFill>
+              <a:srgbClr val="2E75B6"/>
+            </a:solidFill>
+          </a:ln>
+          <a:effectLst/>
+        </p:spPr>
+        <p:style>
+          <a:lnRef idx="1">
+            <a:schemeClr val="accent1"/>
+          </a:lnRef>
+          <a:fillRef idx="3">
+            <a:schemeClr val="accent1"/>
+          </a:fillRef>
+          <a:effectRef idx="2">
+            <a:schemeClr val="accent1"/>
+          </a:effectRef>
+          <a:fontRef idx="minor">
+            <a:schemeClr val="lt1"/>
+          </a:fontRef>
+        </p:style>
+        <p:txBody>
+          <a:bodyPr wrap="square" rtlCol="0" anchor="ctr"/>
+          <a:lstStyle/>
+          <a:p>
+            <a:pPr algn="ctr"/>
+            <a:r>
+              <a:rPr sz="1200">
                 <a:solidFill>
-                  <a:srgbClr val="808080"/>
+                  <a:srgbClr val="1F4E79"/>
                 </a:solidFill>
                 <a:latin typeface="微软雅黑" panose="020B0503020204020204" charset="-122"/>
                 <a:ea typeface="微软雅黑" panose="020B0503020204020204" charset="-122"/>
                 <a:cs typeface="微软雅黑" panose="020B0503020204020204" charset="-122"/>
               </a:rPr>
-              <a:t>按日期分组的复习条目
-含完成勾选</a:t>
-            </a:r>
-            <a:endParaRPr sz="1000">
+              <a:t>答错自动
+进错题本</a:t>
+            </a:r>
+            <a:endParaRPr sz="1200">
               <a:solidFill>
-                <a:srgbClr val="808080"/>
+                <a:srgbClr val="1F4E79"/>
               </a:solidFill>
               <a:latin typeface="微软雅黑" panose="020B0503020204020204" charset="-122"/>
               <a:ea typeface="微软雅黑" panose="020B0503020204020204" charset="-122"/>
@@ -9131,14 +10877,124 @@
       </p:sp>
       <p:sp>
         <p:nvSpPr>
-          <p:cNvPr id="14" name="TextBox 13"/>
+          <p:cNvPr id="13" name="Right Arrow 12"/>
+          <p:cNvSpPr/>
+          <p:nvPr/>
+        </p:nvSpPr>
+        <p:spPr>
+          <a:xfrm>
+            <a:off x="8961120" y="1975104"/>
+            <a:ext cx="274320" cy="219456"/>
+          </a:xfrm>
+          <a:prstGeom prst="rightArrow">
+            <a:avLst/>
+          </a:prstGeom>
+          <a:solidFill>
+            <a:srgbClr val="2E75B6"/>
+          </a:solidFill>
+          <a:ln>
+            <a:noFill/>
+          </a:ln>
+          <a:effectLst/>
+        </p:spPr>
+        <p:style>
+          <a:lnRef idx="1">
+            <a:schemeClr val="accent1"/>
+          </a:lnRef>
+          <a:fillRef idx="3">
+            <a:schemeClr val="accent1"/>
+          </a:fillRef>
+          <a:effectRef idx="2">
+            <a:schemeClr val="accent1"/>
+          </a:effectRef>
+          <a:fontRef idx="minor">
+            <a:schemeClr val="lt1"/>
+          </a:fontRef>
+        </p:style>
+        <p:txBody>
+          <a:bodyPr rtlCol="0" anchor="ctr"/>
+          <a:lstStyle/>
+          <a:p>
+            <a:pPr algn="ctr"/>
+          </a:p>
+        </p:txBody>
+      </p:sp>
+      <p:sp>
+        <p:nvSpPr>
+          <p:cNvPr id="14" name="Rounded Rectangle 13"/>
+          <p:cNvSpPr/>
+          <p:nvPr/>
+        </p:nvSpPr>
+        <p:spPr>
+          <a:xfrm>
+            <a:off x="9281160" y="1627632"/>
+            <a:ext cx="1874519" cy="914400"/>
+          </a:xfrm>
+          <a:prstGeom prst="roundRect">
+            <a:avLst/>
+          </a:prstGeom>
+          <a:solidFill>
+            <a:srgbClr val="EAF3FB"/>
+          </a:solidFill>
+          <a:ln w="16510">
+            <a:solidFill>
+              <a:srgbClr val="1F4E79"/>
+            </a:solidFill>
+          </a:ln>
+          <a:effectLst/>
+        </p:spPr>
+        <p:style>
+          <a:lnRef idx="1">
+            <a:schemeClr val="accent1"/>
+          </a:lnRef>
+          <a:fillRef idx="3">
+            <a:schemeClr val="accent1"/>
+          </a:fillRef>
+          <a:effectRef idx="2">
+            <a:schemeClr val="accent1"/>
+          </a:effectRef>
+          <a:fontRef idx="minor">
+            <a:schemeClr val="lt1"/>
+          </a:fontRef>
+        </p:style>
+        <p:txBody>
+          <a:bodyPr wrap="square" rtlCol="0" anchor="ctr"/>
+          <a:lstStyle/>
+          <a:p>
+            <a:pPr algn="ctr"/>
+            <a:r>
+              <a:rPr sz="1200">
+                <a:solidFill>
+                  <a:srgbClr val="1F4E79"/>
+                </a:solidFill>
+                <a:latin typeface="微软雅黑" panose="020B0503020204020204" charset="-122"/>
+                <a:ea typeface="微软雅黑" panose="020B0503020204020204" charset="-122"/>
+                <a:cs typeface="微软雅黑" panose="020B0503020204020204" charset="-122"/>
+              </a:rPr>
+              <a:t>一键生成
+7天复习计划</a:t>
+            </a:r>
+            <a:endParaRPr sz="1200">
+              <a:solidFill>
+                <a:srgbClr val="1F4E79"/>
+              </a:solidFill>
+              <a:latin typeface="微软雅黑" panose="020B0503020204020204" charset="-122"/>
+              <a:ea typeface="微软雅黑" panose="020B0503020204020204" charset="-122"/>
+              <a:cs typeface="微软雅黑" panose="020B0503020204020204" charset="-122"/>
+            </a:endParaRPr>
+          </a:p>
+        </p:txBody>
+      </p:sp>
+      <p:sp>
+        <p:nvSpPr>
+          <p:cNvPr id="16" name="TextBox 15"/>
           <p:cNvSpPr txBox="1"/>
           <p:nvPr/>
         </p:nvSpPr>
         <p:spPr>
           <a:xfrm>
-            <a:off x="5074920" y="3300984"/>
-            <a:ext cx="3566160" cy="310896"/>
+            <a:off x="502920" y="3200400"/>
+            <a:ext cx="11155680" cy="3017520"/>
           </a:xfrm>
           <a:prstGeom prst="rect">
             <a:avLst/>
@@ -9151,85 +11007,140 @@
           </a:bodyPr>
           <a:lstStyle/>
           <a:p>
-            <a:pPr algn="ctr">
+            <a:pPr algn="l">
               <a:spcAft>
-                <a:spcPts val="600"/>
+                <a:spcPts val="800"/>
               </a:spcAft>
             </a:pPr>
             <a:r>
-              <a:rPr sz="1050">
+              <a:rPr sz="1400">
                 <a:solidFill>
-                  <a:srgbClr val="808080"/>
+                  <a:srgbClr val="222222"/>
                 </a:solidFill>
                 <a:latin typeface="微软雅黑" panose="020B0503020204020204" charset="-122"/>
                 <a:ea typeface="微软雅黑" panose="020B0503020204020204" charset="-122"/>
                 <a:cs typeface="微软雅黑" panose="020B0503020204020204" charset="-122"/>
               </a:rPr>
-              <a:t>图 5  复习计划页</a:t>
-            </a:r>
-            <a:endParaRPr sz="1050">
+              <a:t>① “先上传一份课程讲义，系统自动切分成知识块并向量化入库。”</a:t>
+            </a:r>
+            <a:endParaRPr sz="1400">
               <a:solidFill>
-                <a:srgbClr val="808080"/>
+                <a:srgbClr val="222222"/>
               </a:solidFill>
               <a:latin typeface="微软雅黑" panose="020B0503020204020204" charset="-122"/>
               <a:ea typeface="微软雅黑" panose="020B0503020204020204" charset="-122"/>
               <a:cs typeface="微软雅黑" panose="020B0503020204020204" charset="-122"/>
             </a:endParaRPr>
           </a:p>
-        </p:txBody>
-      </p:sp>
-      <p:sp>
-        <p:nvSpPr>
-          <p:cNvPr id="15" name="TextBox 14"/>
-          <p:cNvSpPr txBox="1"/>
-          <p:nvPr/>
-        </p:nvSpPr>
-        <p:spPr>
-          <a:xfrm>
-            <a:off x="548640" y="6053328"/>
-            <a:ext cx="11091672" cy="640080"/>
-          </a:xfrm>
-          <a:prstGeom prst="rect">
-            <a:avLst/>
-          </a:prstGeom>
-          <a:noFill/>
-        </p:spPr>
-        <p:txBody>
-          <a:bodyPr wrap="square" lIns="0" tIns="0" rIns="0" bIns="0" anchor="t">
-            <a:spAutoFit/>
-          </a:bodyPr>
-          <a:lstStyle/>
-          <a:p>
-            <a:pPr algn="ctr">
+          <a:p>
+            <a:pPr algn="l">
               <a:spcAft>
-                <a:spcPts val="600"/>
+                <a:spcPts val="800"/>
               </a:spcAft>
             </a:pPr>
             <a:r>
-              <a:rPr sz="1200">
+              <a:rPr sz="1400">
                 <a:solidFill>
-                  <a:srgbClr val="C00000"/>
+                  <a:srgbClr val="222222"/>
                 </a:solidFill>
                 <a:latin typeface="微软雅黑" panose="020B0503020204020204" charset="-122"/>
                 <a:ea typeface="微软雅黑" panose="020B0503020204020204" charset="-122"/>
                 <a:cs typeface="微软雅黑" panose="020B0503020204020204" charset="-122"/>
               </a:rPr>
-              <a:t>说明：本页五张截图需在系统实际运行后补充；截图要求与报告第三节“11．实现的界面”一致。</a:t>
-            </a:r>
-            <a:endParaRPr sz="1200">
+              <a:t>② “切换到智能问答，问一个课件里的问题，注意回答下方带引用来源。”</a:t>
+            </a:r>
+            <a:endParaRPr sz="1400">
               <a:solidFill>
-                <a:srgbClr val="C00000"/>
+                <a:srgbClr val="222222"/>
               </a:solidFill>
               <a:latin typeface="微软雅黑" panose="020B0503020204020204" charset="-122"/>
               <a:ea typeface="微软雅黑" panose="020B0503020204020204" charset="-122"/>
               <a:cs typeface="微软雅黑" panose="020B0503020204020204" charset="-122"/>
             </a:endParaRPr>
           </a:p>
-        </p:txBody>
-      </p:sp>
-      <p:sp>
-        <p:nvSpPr>
-          <p:cNvPr id="16" name="TextBox 15"/>
+          <a:p>
+            <a:pPr algn="l">
+              <a:spcAft>
+                <a:spcPts val="800"/>
+              </a:spcAft>
+            </a:pPr>
+            <a:r>
+              <a:rPr sz="1400">
+                <a:solidFill>
+                  <a:srgbClr val="222222"/>
+                </a:solidFill>
+                <a:latin typeface="微软雅黑" panose="020B0503020204020204" charset="-122"/>
+                <a:ea typeface="微软雅黑" panose="020B0503020204020204" charset="-122"/>
+                <a:cs typeface="微软雅黑" panose="020B0503020204020204" charset="-122"/>
+              </a:rPr>
+              <a:t>③ “用自动出题生成 5 道单选题，现场点一道作答，答错后立即判分。”</a:t>
+            </a:r>
+            <a:endParaRPr sz="1400">
+              <a:solidFill>
+                <a:srgbClr val="222222"/>
+              </a:solidFill>
+              <a:latin typeface="微软雅黑" panose="020B0503020204020204" charset="-122"/>
+              <a:ea typeface="微软雅黑" panose="020B0503020204020204" charset="-122"/>
+              <a:cs typeface="微软雅黑" panose="020B0503020204020204" charset="-122"/>
+            </a:endParaRPr>
+          </a:p>
+          <a:p>
+            <a:pPr algn="l">
+              <a:spcAft>
+                <a:spcPts val="800"/>
+              </a:spcAft>
+            </a:pPr>
+            <a:r>
+              <a:rPr sz="1400">
+                <a:solidFill>
+                  <a:srgbClr val="222222"/>
+                </a:solidFill>
+                <a:latin typeface="微软雅黑" panose="020B0503020204020204" charset="-122"/>
+                <a:ea typeface="微软雅黑" panose="020B0503020204020204" charset="-122"/>
+                <a:cs typeface="微软雅黑" panose="020B0503020204020204" charset="-122"/>
+              </a:rPr>
+              <a:t>④ “切到错题本，看到刚才答错的题已自动沉淀，含答案对比与解析。”</a:t>
+            </a:r>
+            <a:endParaRPr sz="1400">
+              <a:solidFill>
+                <a:srgbClr val="222222"/>
+              </a:solidFill>
+              <a:latin typeface="微软雅黑" panose="020B0503020204020204" charset="-122"/>
+              <a:ea typeface="微软雅黑" panose="020B0503020204020204" charset="-122"/>
+              <a:cs typeface="微软雅黑" panose="020B0503020204020204" charset="-122"/>
+            </a:endParaRPr>
+          </a:p>
+          <a:p>
+            <a:pPr algn="l">
+              <a:spcAft>
+                <a:spcPts val="800"/>
+              </a:spcAft>
+            </a:pPr>
+            <a:r>
+              <a:rPr sz="1400">
+                <a:solidFill>
+                  <a:srgbClr val="222222"/>
+                </a:solidFill>
+                <a:latin typeface="微软雅黑" panose="020B0503020204020204" charset="-122"/>
+                <a:ea typeface="微软雅黑" panose="020B0503020204020204" charset="-122"/>
+                <a:cs typeface="微软雅黑" panose="020B0503020204020204" charset="-122"/>
+              </a:rPr>
+              <a:t>⑤ “生成复习计划，系统按错题把知识点排到 7 天，日期从今天起算。”</a:t>
+            </a:r>
+            <a:endParaRPr sz="1400">
+              <a:solidFill>
+                <a:srgbClr val="222222"/>
+              </a:solidFill>
+              <a:latin typeface="微软雅黑" panose="020B0503020204020204" charset="-122"/>
+              <a:ea typeface="微软雅黑" panose="020B0503020204020204" charset="-122"/>
+              <a:cs typeface="微软雅黑" panose="020B0503020204020204" charset="-122"/>
+            </a:endParaRPr>
+          </a:p>
+        </p:txBody>
+      </p:sp>
+      <p:sp>
+        <p:nvSpPr>
+          <p:cNvPr id="17" name="TextBox 16"/>
           <p:cNvSpPr txBox="1"/>
           <p:nvPr/>
         </p:nvSpPr>
@@ -9244,30 +11155,30 @@
           <a:noFill/>
         </p:spPr>
         <p:txBody>
-          <a:bodyPr wrap="square" lIns="0" tIns="0" rIns="0" bIns="0" anchor="t">
+          <a:bodyPr wrap="none">
             <a:spAutoFit/>
           </a:bodyPr>
           <a:lstStyle/>
           <a:p>
-            <a:pPr algn="r">
-              <a:spcAft>
-                <a:spcPts val="600"/>
-              </a:spcAft>
-            </a:pPr>
+            <a:pPr algn="r"/>
             <a:r>
               <a:rPr sz="1000">
                 <a:solidFill>
                   <a:srgbClr val="808080"/>
                 </a:solidFill>
                 <a:latin typeface="微软雅黑" panose="020B0503020204020204" charset="-122"/>
+                <a:ea typeface="微软雅黑" panose="020B0503020204020204" charset="-122"/>
+                <a:cs typeface="微软雅黑" panose="020B0503020204020204" charset="-122"/>
               </a:rPr>
-              <a:t>13</a:t>
+              <a:t>16</a:t>
             </a:r>
             <a:endParaRPr sz="1000">
               <a:solidFill>
                 <a:srgbClr val="808080"/>
               </a:solidFill>
               <a:latin typeface="微软雅黑" panose="020B0503020204020204" charset="-122"/>
+              <a:ea typeface="微软雅黑" panose="020B0503020204020204" charset="-122"/>
+              <a:cs typeface="微软雅黑" panose="020B0503020204020204" charset="-122"/>
             </a:endParaRPr>
           </a:p>
         </p:txBody>
@@ -9280,7 +11191,7 @@
 </p:sld>
 </file>
 
-<file path=ppt/slides/slide14.xml><?xml version="1.0" encoding="utf-8"?>
+<file path=ppt/slides/slide16.xml><?xml version="1.0" encoding="utf-8"?>
 <p:sld xmlns:a="http://schemas.openxmlformats.org/drawingml/2006/main" xmlns:r="http://schemas.openxmlformats.org/officeDocument/2006/relationships" xmlns:p="http://schemas.openxmlformats.org/presentationml/2006/main">
   <p:cSld>
     <p:spTree>
@@ -9342,8 +11253,8 @@
         </p:nvSpPr>
         <p:spPr>
           <a:xfrm>
-            <a:off x="502920" y="182880"/>
-            <a:ext cx="11185855" cy="621792"/>
+            <a:off x="502920" y="243903"/>
+            <a:ext cx="11185855" cy="499745"/>
           </a:xfrm>
           <a:prstGeom prst="rect">
             <a:avLst/>
@@ -9376,7 +11287,29 @@
                 <a:ea typeface="微软雅黑" panose="020B0503020204020204" charset="-122"/>
                 <a:cs typeface="微软雅黑" panose="020B0503020204020204" charset="-122"/>
               </a:rPr>
-              <a:t>5.5　系统部署与运行</a:t>
+              <a:t>5.</a:t>
+            </a:r>
+            <a:r>
+              <a:rPr lang="en-US" sz="2600">
+                <a:solidFill>
+                  <a:srgbClr val="FFFFFF"/>
+                </a:solidFill>
+                <a:latin typeface="微软雅黑" panose="020B0503020204020204" charset="-122"/>
+                <a:ea typeface="微软雅黑" panose="020B0503020204020204" charset="-122"/>
+                <a:cs typeface="微软雅黑" panose="020B0503020204020204" charset="-122"/>
+              </a:rPr>
+              <a:t>7</a:t>
+            </a:r>
+            <a:r>
+              <a:rPr sz="2600">
+                <a:solidFill>
+                  <a:srgbClr val="FFFFFF"/>
+                </a:solidFill>
+                <a:latin typeface="微软雅黑" panose="020B0503020204020204" charset="-122"/>
+                <a:ea typeface="微软雅黑" panose="020B0503020204020204" charset="-122"/>
+                <a:cs typeface="微软雅黑" panose="020B0503020204020204" charset="-122"/>
+              </a:rPr>
+              <a:t>　系统部署与运行</a:t>
             </a:r>
             <a:endParaRPr sz="2600">
               <a:solidFill>
@@ -9479,14 +11412,18 @@
                   <a:srgbClr val="808080"/>
                 </a:solidFill>
                 <a:latin typeface="微软雅黑" panose="020B0503020204020204" charset="-122"/>
+                <a:ea typeface="微软雅黑" panose="020B0503020204020204" charset="-122"/>
+                <a:cs typeface="微软雅黑" panose="020B0503020204020204" charset="-122"/>
               </a:rPr>
-              <a:t>14</a:t>
+              <a:t>17</a:t>
             </a:r>
             <a:endParaRPr sz="1000">
               <a:solidFill>
                 <a:srgbClr val="808080"/>
               </a:solidFill>
               <a:latin typeface="微软雅黑" panose="020B0503020204020204" charset="-122"/>
+              <a:ea typeface="微软雅黑" panose="020B0503020204020204" charset="-122"/>
+              <a:cs typeface="微软雅黑" panose="020B0503020204020204" charset="-122"/>
             </a:endParaRPr>
           </a:p>
         </p:txBody>
@@ -9813,7 +11750,7 @@
 </p:sld>
 </file>
 
-<file path=ppt/slides/slide15.xml><?xml version="1.0" encoding="utf-8"?>
+<file path=ppt/slides/slide17.xml><?xml version="1.0" encoding="utf-8"?>
 <p:sld xmlns:a="http://schemas.openxmlformats.org/drawingml/2006/main" xmlns:r="http://schemas.openxmlformats.org/officeDocument/2006/relationships" xmlns:p="http://schemas.openxmlformats.org/presentationml/2006/main">
   <p:cSld>
     <p:spTree>
@@ -9961,14 +11898,18 @@
                   <a:srgbClr val="808080"/>
                 </a:solidFill>
                 <a:latin typeface="微软雅黑" panose="020B0503020204020204" charset="-122"/>
+                <a:ea typeface="微软雅黑" panose="020B0503020204020204" charset="-122"/>
+                <a:cs typeface="微软雅黑" panose="020B0503020204020204" charset="-122"/>
               </a:rPr>
-              <a:t>15</a:t>
+              <a:t>18</a:t>
             </a:r>
             <a:endParaRPr sz="1000">
               <a:solidFill>
                 <a:srgbClr val="808080"/>
               </a:solidFill>
               <a:latin typeface="微软雅黑" panose="020B0503020204020204" charset="-122"/>
+              <a:ea typeface="微软雅黑" panose="020B0503020204020204" charset="-122"/>
+              <a:cs typeface="微软雅黑" panose="020B0503020204020204" charset="-122"/>
             </a:endParaRPr>
           </a:p>
         </p:txBody>
@@ -10329,7 +12270,7 @@
 </p:sld>
 </file>
 
-<file path=ppt/slides/slide16.xml><?xml version="1.0" encoding="utf-8"?>
+<file path=ppt/slides/slide18.xml><?xml version="1.0" encoding="utf-8"?>
 <p:sld xmlns:a="http://schemas.openxmlformats.org/drawingml/2006/main" xmlns:r="http://schemas.openxmlformats.org/officeDocument/2006/relationships" xmlns:p="http://schemas.openxmlformats.org/presentationml/2006/main">
   <p:cSld>
     <p:spTree>
@@ -10477,14 +12418,18 @@
                   <a:srgbClr val="808080"/>
                 </a:solidFill>
                 <a:latin typeface="微软雅黑" panose="020B0503020204020204" charset="-122"/>
+                <a:ea typeface="微软雅黑" panose="020B0503020204020204" charset="-122"/>
+                <a:cs typeface="微软雅黑" panose="020B0503020204020204" charset="-122"/>
               </a:rPr>
-              <a:t>16</a:t>
+              <a:t>19</a:t>
             </a:r>
             <a:endParaRPr sz="1000">
               <a:solidFill>
                 <a:srgbClr val="808080"/>
               </a:solidFill>
               <a:latin typeface="微软雅黑" panose="020B0503020204020204" charset="-122"/>
+              <a:ea typeface="微软雅黑" panose="020B0503020204020204" charset="-122"/>
+              <a:cs typeface="微软雅黑" panose="020B0503020204020204" charset="-122"/>
             </a:endParaRPr>
           </a:p>
         </p:txBody>
@@ -11201,61 +13146,6 @@
           </a:graphicData>
         </a:graphic>
       </p:graphicFrame>
-      <p:sp>
-        <p:nvSpPr>
-          <p:cNvPr id="6" name="TextBox 5"/>
-          <p:cNvSpPr txBox="1"/>
-          <p:nvPr/>
-        </p:nvSpPr>
-        <p:spPr>
-          <a:xfrm>
-            <a:off x="548640" y="5120640"/>
-            <a:ext cx="11091672" cy="1097280"/>
-          </a:xfrm>
-          <a:prstGeom prst="rect">
-            <a:avLst/>
-          </a:prstGeom>
-          <a:noFill/>
-        </p:spPr>
-        <p:txBody>
-          <a:bodyPr wrap="square" lIns="0" tIns="0" rIns="0" bIns="0" anchor="t">
-            <a:spAutoFit/>
-          </a:bodyPr>
-          <a:lstStyle/>
-          <a:p>
-            <a:pPr algn="l">
-              <a:lnSpc>
-                <a:spcPct val="125000"/>
-              </a:lnSpc>
-              <a:spcBef>
-                <a:spcPts val="0"/>
-              </a:spcBef>
-              <a:spcAft>
-                <a:spcPts val="600"/>
-              </a:spcAft>
-            </a:pPr>
-            <a:r>
-              <a:rPr sz="1300" b="0">
-                <a:solidFill>
-                  <a:srgbClr val="808080"/>
-                </a:solidFill>
-                <a:latin typeface="微软雅黑" panose="020B0503020204020204" charset="-122"/>
-                <a:ea typeface="微软雅黑" panose="020B0503020204020204" charset="-122"/>
-                <a:cs typeface="微软雅黑" panose="020B0503020204020204" charset="-122"/>
-              </a:rPr>
-              <a:t>注：表格中标注“【姓名】”“【学号】”的位置需补全；各成员的功能模块建议对应独立的 Git 提交记录，便于体现贡献度。</a:t>
-            </a:r>
-            <a:endParaRPr sz="1300" b="0">
-              <a:solidFill>
-                <a:srgbClr val="808080"/>
-              </a:solidFill>
-              <a:latin typeface="微软雅黑" panose="020B0503020204020204" charset="-122"/>
-              <a:ea typeface="微软雅黑" panose="020B0503020204020204" charset="-122"/>
-              <a:cs typeface="微软雅黑" panose="020B0503020204020204" charset="-122"/>
-            </a:endParaRPr>
-          </a:p>
-        </p:txBody>
-      </p:sp>
     </p:spTree>
   </p:cSld>
   <p:clrMapOvr>
@@ -11264,7 +13154,7 @@
 </p:sld>
 </file>
 
-<file path=ppt/slides/slide17.xml><?xml version="1.0" encoding="utf-8"?>
+<file path=ppt/slides/slide19.xml><?xml version="1.0" encoding="utf-8"?>
 <p:sld xmlns:a="http://schemas.openxmlformats.org/drawingml/2006/main" xmlns:r="http://schemas.openxmlformats.org/officeDocument/2006/relationships" xmlns:p="http://schemas.openxmlformats.org/presentationml/2006/main">
   <p:cSld>
     <p:spTree>
@@ -11313,14 +13203,18 @@
                   <a:srgbClr val="808080"/>
                 </a:solidFill>
                 <a:latin typeface="微软雅黑" panose="020B0503020204020204" charset="-122"/>
+                <a:ea typeface="微软雅黑" panose="020B0503020204020204" charset="-122"/>
+                <a:cs typeface="微软雅黑" panose="020B0503020204020204" charset="-122"/>
               </a:rPr>
-              <a:t>17</a:t>
+              <a:t>20</a:t>
             </a:r>
             <a:endParaRPr sz="1000">
               <a:solidFill>
                 <a:srgbClr val="808080"/>
               </a:solidFill>
               <a:latin typeface="微软雅黑" panose="020B0503020204020204" charset="-122"/>
+              <a:ea typeface="微软雅黑" panose="020B0503020204020204" charset="-122"/>
+              <a:cs typeface="微软雅黑" panose="020B0503020204020204" charset="-122"/>
             </a:endParaRPr>
           </a:p>
         </p:txBody>
@@ -11722,6 +13616,8 @@
                   <a:srgbClr val="808080"/>
                 </a:solidFill>
                 <a:latin typeface="微软雅黑" panose="020B0503020204020204" charset="-122"/>
+                <a:ea typeface="微软雅黑" panose="020B0503020204020204" charset="-122"/>
+                <a:cs typeface="微软雅黑" panose="020B0503020204020204" charset="-122"/>
               </a:rPr>
               <a:t>2</a:t>
             </a:r>
@@ -11730,6 +13626,8 @@
                 <a:srgbClr val="808080"/>
               </a:solidFill>
               <a:latin typeface="微软雅黑" panose="020B0503020204020204" charset="-122"/>
+              <a:ea typeface="微软雅黑" panose="020B0503020204020204" charset="-122"/>
+              <a:cs typeface="微软雅黑" panose="020B0503020204020204" charset="-122"/>
             </a:endParaRPr>
           </a:p>
         </p:txBody>
@@ -12193,6 +14091,8 @@
                   <a:srgbClr val="808080"/>
                 </a:solidFill>
                 <a:latin typeface="微软雅黑" panose="020B0503020204020204" charset="-122"/>
+                <a:ea typeface="微软雅黑" panose="020B0503020204020204" charset="-122"/>
+                <a:cs typeface="微软雅黑" panose="020B0503020204020204" charset="-122"/>
               </a:rPr>
               <a:t>3</a:t>
             </a:r>
@@ -12201,6 +14101,8 @@
                 <a:srgbClr val="808080"/>
               </a:solidFill>
               <a:latin typeface="微软雅黑" panose="020B0503020204020204" charset="-122"/>
+              <a:ea typeface="微软雅黑" panose="020B0503020204020204" charset="-122"/>
+              <a:cs typeface="微软雅黑" panose="020B0503020204020204" charset="-122"/>
             </a:endParaRPr>
           </a:p>
         </p:txBody>
@@ -12656,6 +14558,8 @@
                   <a:srgbClr val="808080"/>
                 </a:solidFill>
                 <a:latin typeface="微软雅黑" panose="020B0503020204020204" charset="-122"/>
+                <a:ea typeface="微软雅黑" panose="020B0503020204020204" charset="-122"/>
+                <a:cs typeface="微软雅黑" panose="020B0503020204020204" charset="-122"/>
               </a:rPr>
               <a:t>4</a:t>
             </a:r>
@@ -12664,6 +14568,8 @@
                 <a:srgbClr val="808080"/>
               </a:solidFill>
               <a:latin typeface="微软雅黑" panose="020B0503020204020204" charset="-122"/>
+              <a:ea typeface="微软雅黑" panose="020B0503020204020204" charset="-122"/>
+              <a:cs typeface="微软雅黑" panose="020B0503020204020204" charset="-122"/>
             </a:endParaRPr>
           </a:p>
         </p:txBody>
@@ -13817,6 +15723,8 @@
                   <a:srgbClr val="808080"/>
                 </a:solidFill>
                 <a:latin typeface="微软雅黑" panose="020B0503020204020204" charset="-122"/>
+                <a:ea typeface="微软雅黑" panose="020B0503020204020204" charset="-122"/>
+                <a:cs typeface="微软雅黑" panose="020B0503020204020204" charset="-122"/>
               </a:rPr>
               <a:t>5</a:t>
             </a:r>
@@ -13825,6 +15733,8 @@
                 <a:srgbClr val="808080"/>
               </a:solidFill>
               <a:latin typeface="微软雅黑" panose="020B0503020204020204" charset="-122"/>
+              <a:ea typeface="微软雅黑" panose="020B0503020204020204" charset="-122"/>
+              <a:cs typeface="微软雅黑" panose="020B0503020204020204" charset="-122"/>
             </a:endParaRPr>
           </a:p>
         </p:txBody>
@@ -14164,6 +16074,8 @@
                   <a:srgbClr val="808080"/>
                 </a:solidFill>
                 <a:latin typeface="微软雅黑" panose="020B0503020204020204" charset="-122"/>
+                <a:ea typeface="微软雅黑" panose="020B0503020204020204" charset="-122"/>
+                <a:cs typeface="微软雅黑" panose="020B0503020204020204" charset="-122"/>
               </a:rPr>
               <a:t>6</a:t>
             </a:r>
@@ -14172,6 +16084,8 @@
                 <a:srgbClr val="808080"/>
               </a:solidFill>
               <a:latin typeface="微软雅黑" panose="020B0503020204020204" charset="-122"/>
+              <a:ea typeface="微软雅黑" panose="020B0503020204020204" charset="-122"/>
+              <a:cs typeface="微软雅黑" panose="020B0503020204020204" charset="-122"/>
             </a:endParaRPr>
           </a:p>
         </p:txBody>
@@ -14456,6 +16370,8 @@
                   <a:srgbClr val="808080"/>
                 </a:solidFill>
                 <a:latin typeface="微软雅黑" panose="020B0503020204020204" charset="-122"/>
+                <a:ea typeface="微软雅黑" panose="020B0503020204020204" charset="-122"/>
+                <a:cs typeface="微软雅黑" panose="020B0503020204020204" charset="-122"/>
               </a:rPr>
               <a:t>7</a:t>
             </a:r>
@@ -14464,6 +16380,8 @@
                 <a:srgbClr val="808080"/>
               </a:solidFill>
               <a:latin typeface="微软雅黑" panose="020B0503020204020204" charset="-122"/>
+              <a:ea typeface="微软雅黑" panose="020B0503020204020204" charset="-122"/>
+              <a:cs typeface="微软雅黑" panose="020B0503020204020204" charset="-122"/>
             </a:endParaRPr>
           </a:p>
         </p:txBody>
@@ -14748,6 +16666,8 @@
                   <a:srgbClr val="808080"/>
                 </a:solidFill>
                 <a:latin typeface="微软雅黑" panose="020B0503020204020204" charset="-122"/>
+                <a:ea typeface="微软雅黑" panose="020B0503020204020204" charset="-122"/>
+                <a:cs typeface="微软雅黑" panose="020B0503020204020204" charset="-122"/>
               </a:rPr>
               <a:t>8</a:t>
             </a:r>
@@ -14756,6 +16676,8 @@
                 <a:srgbClr val="808080"/>
               </a:solidFill>
               <a:latin typeface="微软雅黑" panose="020B0503020204020204" charset="-122"/>
+              <a:ea typeface="微软雅黑" panose="020B0503020204020204" charset="-122"/>
+              <a:cs typeface="微软雅黑" panose="020B0503020204020204" charset="-122"/>
             </a:endParaRPr>
           </a:p>
         </p:txBody>
@@ -16148,6 +18070,8 @@
                   <a:srgbClr val="808080"/>
                 </a:solidFill>
                 <a:latin typeface="微软雅黑" panose="020B0503020204020204" charset="-122"/>
+                <a:ea typeface="微软雅黑" panose="020B0503020204020204" charset="-122"/>
+                <a:cs typeface="微软雅黑" panose="020B0503020204020204" charset="-122"/>
               </a:rPr>
               <a:t>9</a:t>
             </a:r>
@@ -16156,6 +18080,8 @@
                 <a:srgbClr val="808080"/>
               </a:solidFill>
               <a:latin typeface="微软雅黑" panose="020B0503020204020204" charset="-122"/>
+              <a:ea typeface="微软雅黑" panose="020B0503020204020204" charset="-122"/>
+              <a:cs typeface="微软雅黑" panose="020B0503020204020204" charset="-122"/>
             </a:endParaRPr>
           </a:p>
         </p:txBody>
